--- a/치과약리학실험2-논문발표/치과약리학실험2_논문발표.pptx
+++ b/치과약리학실험2-논문발표/치과약리학실험2_논문발표.pptx
@@ -1042,7 +1042,7 @@
           <a:p>
             <a:r>
               <a:rPr lang="en-US" dirty="0"/>
-              <a:t>숫자는 초록/검색 스니펫 기준(122.1±52.90초 vs 144.5±68.85초)이며, p-value·95% CI 등 정확한 통계치는 원문 Results 섹션에서 직접 확인해 채울 것.</a:t>
+              <a:t>원문 Table 3 기준 수치로 확정. Results 본문에서는 p&lt;0.01, Abstract에서는 p&lt;0.05로 표기되어 있어 발표 시 Table 3 기준(p&lt;0.01)으로 통일해 설명할 것.</a:t>
             </a:r>
             <a:endParaRPr lang="en-US" dirty="0"/>
           </a:p>
@@ -1218,7 +1218,7 @@
           <a:p>
             <a:r>
               <a:rPr lang="en-US" dirty="0"/>
-              <a:t>이 슬라이드는 발표자 본인의 실제 의견으로 채워야 하는 영역. 표본수 60명의 검정력, split-mouth 특유의 교차확산(diffusion) 가능성, 단일 기관 연구의 일반화 한계 등을 생각해볼 것.</a:t>
+              <a:t>좌측 두 칸은 원문 Discussion·Limitations 절 기준 초안. 우측 임상 적용 가능성 칸의 '통계적 유의성 vs 임상적 유의성' 포인트는 Q&amp;A에서 자주 나오는 포인트이니 본인 의견으로 발전시킬 것. 빈 줄에는 실습·발표 리허설 중 떠오른 개인 의견을 추가.</a:t>
             </a:r>
             <a:endParaRPr lang="en-US" dirty="0"/>
           </a:p>
@@ -1973,7 +1973,7 @@
                 <a:ea typeface="Pretendard" pitchFamily="34" charset="-122"/>
                 <a:cs typeface="Pretendard" pitchFamily="34" charset="-120"/>
               </a:rPr>
-              <a:t>[이름 입력]</a:t>
+              <a:t>김민성</a:t>
             </a:r>
             <a:endParaRPr lang="en-US" sz="1400" dirty="0"/>
           </a:p>
@@ -4782,7 +4782,7 @@
                 <a:ea typeface="Pretendard" pitchFamily="34" charset="-122"/>
                 <a:cs typeface="Pretendard" pitchFamily="34" charset="-120"/>
               </a:rPr>
-              <a:t>→ 아티카인 측이 평균 22.4초 더 빠르게 발현 (통계적 유의성: [원문 확인 필요])</a:t>
+              <a:t>→ 아티카인 측이 평균 22.4초 더 빠르게 발현 (p&lt;0.01, paired t-test)</a:t>
             </a:r>
             <a:endParaRPr lang="en-US" sz="1400" dirty="0"/>
           </a:p>
@@ -4889,7 +4889,7 @@
                 <a:ea typeface="Pretendard" pitchFamily="34" charset="-122"/>
                 <a:cs typeface="Pretendard" pitchFamily="34" charset="-120"/>
               </a:rPr>
-              <a:t>아티카인 측의 추가 마취(보충 주사) 필요율이 리도카인 측보다 낮게 보고됨. 정확한 비율·건수는 [원문 확인 필요].</a:t>
+              <a:t>추가 마취(보충 주사) 튜브 수: 아티카인 0.26±0.48개 vs 리도카인 0.50±0.75개 (p&lt;0.01) — 리도카인 측에서 유의하게 더 많이 필요.</a:t>
             </a:r>
             <a:endParaRPr lang="en-US" sz="1300" dirty="0"/>
           </a:p>
@@ -5106,7 +5106,7 @@
                 <a:ea typeface="Wanted Sans" pitchFamily="34" charset="-122"/>
                 <a:cs typeface="Wanted Sans" pitchFamily="34" charset="-120"/>
               </a:rPr>
-              <a:t>주사통 / 술 중·후 VAS</a:t>
+              <a:t>술 중·후 VAS 및 기타 지표 (Table 3)</a:t>
             </a:r>
             <a:endParaRPr lang="en-US" sz="1600" dirty="0"/>
           </a:p>
@@ -5140,7 +5140,7 @@
               <a:buNone/>
             </a:pPr>
             <a:r>
-              <a:rPr lang="en-US" sz="1350" i="1" dirty="0">
+              <a:rPr lang="en-US" sz="1300" dirty="0">
                 <a:solidFill>
                   <a:srgbClr val="5B7A7E"/>
                 </a:solidFill>
@@ -5148,9 +5148,67 @@
                 <a:ea typeface="Pretendard" pitchFamily="34" charset="-122"/>
                 <a:cs typeface="Pretendard" pitchFamily="34" charset="-120"/>
               </a:rPr>
-              <a:t>[원문 확인 필요 — VAS 평균값·표준편차, 군간 비교 결과]</a:t>
-            </a:r>
-            <a:endParaRPr lang="en-US" sz="1350" dirty="0"/>
+              <a:t>VAS 통증 점수: 리도카인 3.62±2.46 vs 아티카인 3.75±2.56 — 유의차 없음</a:t>
+            </a:r>
+            <a:endParaRPr lang="en-US" sz="1300" dirty="0"/>
+          </a:p>
+          <a:p>
+            <a:pPr indent="0" marL="0">
+              <a:lnSpc>
+                <a:spcPct val="140000"/>
+              </a:lnSpc>
+              <a:buNone/>
+            </a:pPr>
+            <a:endParaRPr lang="en-US" sz="1300" dirty="0"/>
+          </a:p>
+          <a:p>
+            <a:pPr indent="0" marL="0">
+              <a:lnSpc>
+                <a:spcPct val="140000"/>
+              </a:lnSpc>
+              <a:buNone/>
+            </a:pPr>
+            <a:r>
+              <a:rPr lang="en-US" sz="1300" dirty="0">
+                <a:solidFill>
+                  <a:srgbClr val="5B7A7E"/>
+                </a:solidFill>
+                <a:latin typeface="Pretendard" pitchFamily="34" charset="0"/>
+                <a:ea typeface="Pretendard" pitchFamily="34" charset="-122"/>
+                <a:cs typeface="Pretendard" pitchFamily="34" charset="-120"/>
+              </a:rPr>
+              <a:t>수술 시간(분): 리도카인 33.45±21.85 vs 아티카인 28.86±15.13 — 유의차 없음</a:t>
+            </a:r>
+            <a:endParaRPr lang="en-US" sz="1300" dirty="0"/>
+          </a:p>
+          <a:p>
+            <a:pPr indent="0" marL="0">
+              <a:lnSpc>
+                <a:spcPct val="140000"/>
+              </a:lnSpc>
+              <a:buNone/>
+            </a:pPr>
+            <a:endParaRPr lang="en-US" sz="1300" dirty="0"/>
+          </a:p>
+          <a:p>
+            <a:pPr indent="0" marL="0">
+              <a:lnSpc>
+                <a:spcPct val="140000"/>
+              </a:lnSpc>
+              <a:buNone/>
+            </a:pPr>
+            <a:r>
+              <a:rPr lang="en-US" sz="1300" dirty="0">
+                <a:solidFill>
+                  <a:srgbClr val="5B7A7E"/>
+                </a:solidFill>
+                <a:latin typeface="Pretendard" pitchFamily="34" charset="0"/>
+                <a:ea typeface="Pretendard" pitchFamily="34" charset="-122"/>
+                <a:cs typeface="Pretendard" pitchFamily="34" charset="-120"/>
+              </a:rPr>
+              <a:t>마취 지속시간(분): 리도카인 260.4±96.02 vs 아티카인 278.2±127.6 — 유의차 없음</a:t>
+            </a:r>
+            <a:endParaRPr lang="en-US" sz="1300" dirty="0"/>
           </a:p>
         </p:txBody>
       </p:sp>
@@ -5510,7 +5568,7 @@
         <p:spPr>
           <a:xfrm>
             <a:off x="822960" y="2148840"/>
-            <a:ext cx="3063240" cy="548640"/>
+            <a:ext cx="3063240" cy="457200"/>
           </a:xfrm>
           <a:prstGeom prst="rect">
             <a:avLst/>
@@ -5548,8 +5606,8 @@
         </p:nvSpPr>
         <p:spPr>
           <a:xfrm>
-            <a:off x="822960" y="2788920"/>
-            <a:ext cx="3063240" cy="1097280"/>
+            <a:off x="822960" y="2697480"/>
+            <a:ext cx="3063240" cy="2651760"/>
           </a:xfrm>
           <a:prstGeom prst="rect">
             <a:avLst/>
@@ -5563,12 +5621,12 @@
           <a:p>
             <a:pPr indent="0" marL="0">
               <a:lnSpc>
-                <a:spcPct val="130000"/>
+                <a:spcPct val="135000"/>
               </a:lnSpc>
               <a:buNone/>
             </a:pPr>
             <a:r>
-              <a:rPr lang="en-US" sz="1350" dirty="0">
+              <a:rPr lang="en-US" sz="1200" dirty="0">
                 <a:solidFill>
                   <a:srgbClr val="0B2E33"/>
                 </a:solidFill>
@@ -5576,19 +5634,98 @@
                 <a:ea typeface="Pretendard" pitchFamily="34" charset="-122"/>
                 <a:cs typeface="Pretendard" pitchFamily="34" charset="-120"/>
               </a:rPr>
-              <a:t>연구 설계의 강점은?</a:t>
-            </a:r>
-            <a:endParaRPr lang="en-US" sz="1350" dirty="0"/>
+              <a:t>· Split-mouth 설계로 개체간 변이(연령·통증 역치 등) 통제</a:t>
+            </a:r>
+            <a:endParaRPr lang="en-US" sz="1200" dirty="0"/>
           </a:p>
           <a:p>
             <a:pPr indent="0" marL="0">
               <a:lnSpc>
-                <a:spcPct val="130000"/>
+                <a:spcPct val="135000"/>
               </a:lnSpc>
               <a:buNone/>
             </a:pPr>
             <a:r>
-              <a:rPr lang="en-US" sz="1250" i="1" dirty="0">
+              <a:rPr lang="en-US" sz="1200" dirty="0">
+                <a:solidFill>
+                  <a:srgbClr val="0B2E33"/>
+                </a:solidFill>
+                <a:latin typeface="Pretendard" pitchFamily="34" charset="0"/>
+                <a:ea typeface="Pretendard" pitchFamily="34" charset="-122"/>
+                <a:cs typeface="Pretendard" pitchFamily="34" charset="-120"/>
+              </a:rPr>
+              <a:t>· 이중눈가림 + 무작위 배정(randomization table)</a:t>
+            </a:r>
+            <a:endParaRPr lang="en-US" sz="1200" dirty="0"/>
+          </a:p>
+          <a:p>
+            <a:pPr indent="0" marL="0">
+              <a:lnSpc>
+                <a:spcPct val="135000"/>
+              </a:lnSpc>
+              <a:buNone/>
+            </a:pPr>
+            <a:r>
+              <a:rPr lang="en-US" sz="1200" dirty="0">
+                <a:solidFill>
+                  <a:srgbClr val="0B2E33"/>
+                </a:solidFill>
+                <a:latin typeface="Pretendard" pitchFamily="34" charset="0"/>
+                <a:ea typeface="Pretendard" pitchFamily="34" charset="-122"/>
+                <a:cs typeface="Pretendard" pitchFamily="34" charset="-120"/>
+              </a:rPr>
+              <a:t>· CONSORT 가이드라인 준수, 사전 임상시험 등록(REBEC)</a:t>
+            </a:r>
+            <a:endParaRPr lang="en-US" sz="1200" dirty="0"/>
+          </a:p>
+          <a:p>
+            <a:pPr indent="0" marL="0">
+              <a:lnSpc>
+                <a:spcPct val="135000"/>
+              </a:lnSpc>
+              <a:buNone/>
+            </a:pPr>
+            <a:r>
+              <a:rPr lang="en-US" sz="1200" dirty="0">
+                <a:solidFill>
+                  <a:srgbClr val="0B2E33"/>
+                </a:solidFill>
+                <a:latin typeface="Pretendard" pitchFamily="34" charset="0"/>
+                <a:ea typeface="Pretendard" pitchFamily="34" charset="-122"/>
+                <a:cs typeface="Pretendard" pitchFamily="34" charset="-120"/>
+              </a:rPr>
+              <a:t>· 표본수 60명 = β power&gt;0.90 사전 계산 근거 명시</a:t>
+            </a:r>
+            <a:endParaRPr lang="en-US" sz="1200" dirty="0"/>
+          </a:p>
+        </p:txBody>
+      </p:sp>
+      <p:sp>
+        <p:nvSpPr>
+          <p:cNvPr id="7" name="Text 5"/>
+          <p:cNvSpPr txBox="1"/>
+          <p:nvPr/>
+        </p:nvSpPr>
+        <p:spPr>
+          <a:xfrm>
+            <a:off x="822960" y="5440680"/>
+            <a:ext cx="3063240" cy="274320"/>
+          </a:xfrm>
+          <a:prstGeom prst="rect">
+            <a:avLst/>
+          </a:prstGeom>
+          <a:noFill/>
+          <a:ln/>
+        </p:spPr>
+        <p:txBody>
+          <a:bodyPr wrap="square" lIns="0" tIns="0" rIns="0" bIns="0" rtlCol="0" anchor="ctr"/>
+          <a:lstStyle/>
+          <a:p>
+            <a:pPr indent="0" marL="0">
+              <a:buNone/>
+            </a:pPr>
+            <a:r>
+              <a:rPr lang="en-US" sz="1050" i="1" dirty="0">
                 <a:solidFill>
                   <a:srgbClr val="5B7A7E"/>
                 </a:solidFill>
@@ -5596,21 +5733,21 @@
                 <a:ea typeface="Pretendard" pitchFamily="34" charset="-122"/>
                 <a:cs typeface="Pretendard" pitchFamily="34" charset="-120"/>
               </a:rPr>
-              <a:t>(예: split-mouth로 개체간 변이 통제)</a:t>
-            </a:r>
-            <a:endParaRPr lang="en-US" sz="1350" dirty="0"/>
-          </a:p>
-        </p:txBody>
-      </p:sp>
-      <p:sp>
-        <p:nvSpPr>
-          <p:cNvPr id="7" name="Shape 5"/>
+              <a:t>(발표 시 본인 의견 추가)</a:t>
+            </a:r>
+            <a:endParaRPr lang="en-US" sz="1050" dirty="0"/>
+          </a:p>
+        </p:txBody>
+      </p:sp>
+      <p:sp>
+        <p:nvSpPr>
+          <p:cNvPr id="8" name="Shape 6"/>
           <p:cNvSpPr/>
           <p:nvPr/>
         </p:nvSpPr>
         <p:spPr>
           <a:xfrm>
-            <a:off x="822960" y="4206240"/>
+            <a:off x="822960" y="5760720"/>
             <a:ext cx="3063240" cy="0"/>
           </a:xfrm>
           <a:prstGeom prst="line">
@@ -5629,38 +5766,13 @@
       </p:sp>
       <p:sp>
         <p:nvSpPr>
-          <p:cNvPr id="8" name="Shape 6"/>
-          <p:cNvSpPr/>
-          <p:nvPr/>
-        </p:nvSpPr>
-        <p:spPr>
-          <a:xfrm>
-            <a:off x="822960" y="4709160"/>
-            <a:ext cx="3063240" cy="0"/>
-          </a:xfrm>
-          <a:prstGeom prst="line">
-            <a:avLst/>
-          </a:prstGeom>
-          <a:noFill/>
-          <a:ln w="9525">
-            <a:solidFill>
-              <a:srgbClr val="5B7A7E">
-                <a:alpha val="60000"/>
-              </a:srgbClr>
-            </a:solidFill>
-            <a:prstDash val="dash"/>
-          </a:ln>
-        </p:spPr>
-      </p:sp>
-      <p:sp>
-        <p:nvSpPr>
           <p:cNvPr id="9" name="Shape 7"/>
           <p:cNvSpPr/>
           <p:nvPr/>
         </p:nvSpPr>
         <p:spPr>
           <a:xfrm>
-            <a:off x="822960" y="5212080"/>
+            <a:off x="822960" y="6172200"/>
             <a:ext cx="3063240" cy="0"/>
           </a:xfrm>
           <a:prstGeom prst="line">
@@ -5713,7 +5825,7 @@
         <p:spPr>
           <a:xfrm>
             <a:off x="4617720" y="2148840"/>
-            <a:ext cx="3063240" cy="548640"/>
+            <a:ext cx="3063240" cy="457200"/>
           </a:xfrm>
           <a:prstGeom prst="rect">
             <a:avLst/>
@@ -5751,8 +5863,8 @@
         </p:nvSpPr>
         <p:spPr>
           <a:xfrm>
-            <a:off x="4617720" y="2788920"/>
-            <a:ext cx="3063240" cy="1097280"/>
+            <a:off x="4617720" y="2697480"/>
+            <a:ext cx="3063240" cy="2651760"/>
           </a:xfrm>
           <a:prstGeom prst="rect">
             <a:avLst/>
@@ -5766,12 +5878,12 @@
           <a:p>
             <a:pPr indent="0" marL="0">
               <a:lnSpc>
-                <a:spcPct val="130000"/>
+                <a:spcPct val="135000"/>
               </a:lnSpc>
               <a:buNone/>
             </a:pPr>
             <a:r>
-              <a:rPr lang="en-US" sz="1350" dirty="0">
+              <a:rPr lang="en-US" sz="1200" dirty="0">
                 <a:solidFill>
                   <a:srgbClr val="0B2E33"/>
                 </a:solidFill>
@@ -5779,19 +5891,98 @@
                 <a:ea typeface="Pretendard" pitchFamily="34" charset="-122"/>
                 <a:cs typeface="Pretendard" pitchFamily="34" charset="-120"/>
               </a:rPr>
-              <a:t>표본수·눈가림·결과 측정의 한계는?</a:t>
-            </a:r>
-            <a:endParaRPr lang="en-US" sz="1350" dirty="0"/>
+              <a:t>· 상·하악을 동시에 발치해 상/하악별 마취 효과 비교 불가</a:t>
+            </a:r>
+            <a:endParaRPr lang="en-US" sz="1200" dirty="0"/>
           </a:p>
           <a:p>
             <a:pPr indent="0" marL="0">
               <a:lnSpc>
-                <a:spcPct val="130000"/>
+                <a:spcPct val="135000"/>
               </a:lnSpc>
               <a:buNone/>
             </a:pPr>
             <a:r>
-              <a:rPr lang="en-US" sz="1250" i="1" dirty="0">
+              <a:rPr lang="en-US" sz="1200" dirty="0">
+                <a:solidFill>
+                  <a:srgbClr val="0B2E33"/>
+                </a:solidFill>
+                <a:latin typeface="Pretendard" pitchFamily="34" charset="0"/>
+                <a:ea typeface="Pretendard" pitchFamily="34" charset="-122"/>
+                <a:cs typeface="Pretendard" pitchFamily="34" charset="-120"/>
+              </a:rPr>
+              <a:t>· 전신 진통제·소염제 병용 처방 — 통증 인지에 교란 가능</a:t>
+            </a:r>
+            <a:endParaRPr lang="en-US" sz="1200" dirty="0"/>
+          </a:p>
+          <a:p>
+            <a:pPr indent="0" marL="0">
+              <a:lnSpc>
+                <a:spcPct val="135000"/>
+              </a:lnSpc>
+              <a:buNone/>
+            </a:pPr>
+            <a:r>
+              <a:rPr lang="en-US" sz="1200" dirty="0">
+                <a:solidFill>
+                  <a:srgbClr val="0B2E33"/>
+                </a:solidFill>
+                <a:latin typeface="Pretendard" pitchFamily="34" charset="0"/>
+                <a:ea typeface="Pretendard" pitchFamily="34" charset="-122"/>
+                <a:cs typeface="Pretendard" pitchFamily="34" charset="-120"/>
+              </a:rPr>
+              <a:t>· 단일 기관(브라질) 연구 — 인종·시술자 숙련도 일반화 제한</a:t>
+            </a:r>
+            <a:endParaRPr lang="en-US" sz="1200" dirty="0"/>
+          </a:p>
+          <a:p>
+            <a:pPr indent="0" marL="0">
+              <a:lnSpc>
+                <a:spcPct val="135000"/>
+              </a:lnSpc>
+              <a:buNone/>
+            </a:pPr>
+            <a:r>
+              <a:rPr lang="en-US" sz="1200" dirty="0">
+                <a:solidFill>
+                  <a:srgbClr val="0B2E33"/>
+                </a:solidFill>
+                <a:latin typeface="Pretendard" pitchFamily="34" charset="0"/>
+                <a:ea typeface="Pretendard" pitchFamily="34" charset="-122"/>
+                <a:cs typeface="Pretendard" pitchFamily="34" charset="-120"/>
+              </a:rPr>
+              <a:t>· split-mouth 특성상 인접 부위로의 약물 확산 가능성</a:t>
+            </a:r>
+            <a:endParaRPr lang="en-US" sz="1200" dirty="0"/>
+          </a:p>
+        </p:txBody>
+      </p:sp>
+      <p:sp>
+        <p:nvSpPr>
+          <p:cNvPr id="13" name="Text 11"/>
+          <p:cNvSpPr txBox="1"/>
+          <p:nvPr/>
+        </p:nvSpPr>
+        <p:spPr>
+          <a:xfrm>
+            <a:off x="4617720" y="5440680"/>
+            <a:ext cx="3063240" cy="274320"/>
+          </a:xfrm>
+          <a:prstGeom prst="rect">
+            <a:avLst/>
+          </a:prstGeom>
+          <a:noFill/>
+          <a:ln/>
+        </p:spPr>
+        <p:txBody>
+          <a:bodyPr wrap="square" lIns="0" tIns="0" rIns="0" bIns="0" rtlCol="0" anchor="ctr"/>
+          <a:lstStyle/>
+          <a:p>
+            <a:pPr indent="0" marL="0">
+              <a:buNone/>
+            </a:pPr>
+            <a:r>
+              <a:rPr lang="en-US" sz="1050" i="1" dirty="0">
                 <a:solidFill>
                   <a:srgbClr val="5B7A7E"/>
                 </a:solidFill>
@@ -5799,21 +5990,21 @@
                 <a:ea typeface="Pretendard" pitchFamily="34" charset="-122"/>
                 <a:cs typeface="Pretendard" pitchFamily="34" charset="-120"/>
               </a:rPr>
-              <a:t>(직접 채워 넣기)</a:t>
-            </a:r>
-            <a:endParaRPr lang="en-US" sz="1350" dirty="0"/>
-          </a:p>
-        </p:txBody>
-      </p:sp>
-      <p:sp>
-        <p:nvSpPr>
-          <p:cNvPr id="13" name="Shape 11"/>
+              <a:t>(발표 시 본인 의견 추가)</a:t>
+            </a:r>
+            <a:endParaRPr lang="en-US" sz="1050" dirty="0"/>
+          </a:p>
+        </p:txBody>
+      </p:sp>
+      <p:sp>
+        <p:nvSpPr>
+          <p:cNvPr id="14" name="Shape 12"/>
           <p:cNvSpPr/>
           <p:nvPr/>
         </p:nvSpPr>
         <p:spPr>
           <a:xfrm>
-            <a:off x="4617720" y="4206240"/>
+            <a:off x="4617720" y="5760720"/>
             <a:ext cx="3063240" cy="0"/>
           </a:xfrm>
           <a:prstGeom prst="line">
@@ -5832,38 +6023,13 @@
       </p:sp>
       <p:sp>
         <p:nvSpPr>
-          <p:cNvPr id="14" name="Shape 12"/>
-          <p:cNvSpPr/>
-          <p:nvPr/>
-        </p:nvSpPr>
-        <p:spPr>
-          <a:xfrm>
-            <a:off x="4617720" y="4709160"/>
-            <a:ext cx="3063240" cy="0"/>
-          </a:xfrm>
-          <a:prstGeom prst="line">
-            <a:avLst/>
-          </a:prstGeom>
-          <a:noFill/>
-          <a:ln w="9525">
-            <a:solidFill>
-              <a:srgbClr val="5B7A7E">
-                <a:alpha val="60000"/>
-              </a:srgbClr>
-            </a:solidFill>
-            <a:prstDash val="dash"/>
-          </a:ln>
-        </p:spPr>
-      </p:sp>
-      <p:sp>
-        <p:nvSpPr>
           <p:cNvPr id="15" name="Shape 13"/>
           <p:cNvSpPr/>
           <p:nvPr/>
         </p:nvSpPr>
         <p:spPr>
           <a:xfrm>
-            <a:off x="4617720" y="5212080"/>
+            <a:off x="4617720" y="6172200"/>
             <a:ext cx="3063240" cy="0"/>
           </a:xfrm>
           <a:prstGeom prst="line">
@@ -5916,7 +6082,7 @@
         <p:spPr>
           <a:xfrm>
             <a:off x="8412480" y="2148840"/>
-            <a:ext cx="3063240" cy="548640"/>
+            <a:ext cx="3063240" cy="457200"/>
           </a:xfrm>
           <a:prstGeom prst="rect">
             <a:avLst/>
@@ -5954,8 +6120,8 @@
         </p:nvSpPr>
         <p:spPr>
           <a:xfrm>
-            <a:off x="8412480" y="2788920"/>
-            <a:ext cx="3063240" cy="1097280"/>
+            <a:off x="8412480" y="2697480"/>
+            <a:ext cx="3063240" cy="2651760"/>
           </a:xfrm>
           <a:prstGeom prst="rect">
             <a:avLst/>
@@ -5969,12 +6135,12 @@
           <a:p>
             <a:pPr indent="0" marL="0">
               <a:lnSpc>
-                <a:spcPct val="130000"/>
+                <a:spcPct val="135000"/>
               </a:lnSpc>
               <a:buNone/>
             </a:pPr>
             <a:r>
-              <a:rPr lang="en-US" sz="1350" dirty="0">
+              <a:rPr lang="en-US" sz="1200" dirty="0">
                 <a:solidFill>
                   <a:srgbClr val="0B2E33"/>
                 </a:solidFill>
@@ -5982,19 +6148,98 @@
                 <a:ea typeface="Pretendard" pitchFamily="34" charset="-122"/>
                 <a:cs typeface="Pretendard" pitchFamily="34" charset="-120"/>
               </a:rPr>
-              <a:t>한국 임상 현장에 그대로 적용 가능한가?</a:t>
-            </a:r>
-            <a:endParaRPr lang="en-US" sz="1350" dirty="0"/>
+              <a:t>· 국내 임상에도 대체로 적용 가능(동일 기전의 아마이드계)</a:t>
+            </a:r>
+            <a:endParaRPr lang="en-US" sz="1200" dirty="0"/>
           </a:p>
           <a:p>
             <a:pPr indent="0" marL="0">
               <a:lnSpc>
-                <a:spcPct val="130000"/>
+                <a:spcPct val="135000"/>
               </a:lnSpc>
               <a:buNone/>
             </a:pPr>
             <a:r>
-              <a:rPr lang="en-US" sz="1250" i="1" dirty="0">
+              <a:rPr lang="en-US" sz="1200" dirty="0">
+                <a:solidFill>
+                  <a:srgbClr val="0B2E33"/>
+                </a:solidFill>
+                <a:latin typeface="Pretendard" pitchFamily="34" charset="0"/>
+                <a:ea typeface="Pretendard" pitchFamily="34" charset="-122"/>
+                <a:cs typeface="Pretendard" pitchFamily="34" charset="-120"/>
+              </a:rPr>
+              <a:t>· 단, 국내 환자 대상 재현 데이터는 부재(연구계획서 과제와 연결)</a:t>
+            </a:r>
+            <a:endParaRPr lang="en-US" sz="1200" dirty="0"/>
+          </a:p>
+          <a:p>
+            <a:pPr indent="0" marL="0">
+              <a:lnSpc>
+                <a:spcPct val="135000"/>
+              </a:lnSpc>
+              <a:buNone/>
+            </a:pPr>
+            <a:r>
+              <a:rPr lang="en-US" sz="1200" dirty="0">
+                <a:solidFill>
+                  <a:srgbClr val="0B2E33"/>
+                </a:solidFill>
+                <a:latin typeface="Pretendard" pitchFamily="34" charset="0"/>
+                <a:ea typeface="Pretendard" pitchFamily="34" charset="-122"/>
+                <a:cs typeface="Pretendard" pitchFamily="34" charset="-120"/>
+              </a:rPr>
+              <a:t>· 발현시간 단축은 유의하나 절대적 차이(약 22초)는 임상적</a:t>
+            </a:r>
+            <a:endParaRPr lang="en-US" sz="1200" dirty="0"/>
+          </a:p>
+          <a:p>
+            <a:pPr indent="0" marL="0">
+              <a:lnSpc>
+                <a:spcPct val="135000"/>
+              </a:lnSpc>
+              <a:buNone/>
+            </a:pPr>
+            <a:r>
+              <a:rPr lang="en-US" sz="1200" dirty="0">
+                <a:solidFill>
+                  <a:srgbClr val="0B2E33"/>
+                </a:solidFill>
+                <a:latin typeface="Pretendard" pitchFamily="34" charset="0"/>
+                <a:ea typeface="Pretendard" pitchFamily="34" charset="-122"/>
+                <a:cs typeface="Pretendard" pitchFamily="34" charset="-120"/>
+              </a:rPr>
+              <a:t>  의미가 제한적일 수 있음 — 통계적 유의성 ≠ 임상적 유의성</a:t>
+            </a:r>
+            <a:endParaRPr lang="en-US" sz="1200" dirty="0"/>
+          </a:p>
+        </p:txBody>
+      </p:sp>
+      <p:sp>
+        <p:nvSpPr>
+          <p:cNvPr id="19" name="Text 17"/>
+          <p:cNvSpPr txBox="1"/>
+          <p:nvPr/>
+        </p:nvSpPr>
+        <p:spPr>
+          <a:xfrm>
+            <a:off x="8412480" y="5440680"/>
+            <a:ext cx="3063240" cy="274320"/>
+          </a:xfrm>
+          <a:prstGeom prst="rect">
+            <a:avLst/>
+          </a:prstGeom>
+          <a:noFill/>
+          <a:ln/>
+        </p:spPr>
+        <p:txBody>
+          <a:bodyPr wrap="square" lIns="0" tIns="0" rIns="0" bIns="0" rtlCol="0" anchor="ctr"/>
+          <a:lstStyle/>
+          <a:p>
+            <a:pPr indent="0" marL="0">
+              <a:buNone/>
+            </a:pPr>
+            <a:r>
+              <a:rPr lang="en-US" sz="1050" i="1" dirty="0">
                 <a:solidFill>
                   <a:srgbClr val="5B7A7E"/>
                 </a:solidFill>
@@ -6002,21 +6247,21 @@
                 <a:ea typeface="Pretendard" pitchFamily="34" charset="-122"/>
                 <a:cs typeface="Pretendard" pitchFamily="34" charset="-120"/>
               </a:rPr>
-              <a:t>(직접 채워 넣기)</a:t>
-            </a:r>
-            <a:endParaRPr lang="en-US" sz="1350" dirty="0"/>
-          </a:p>
-        </p:txBody>
-      </p:sp>
-      <p:sp>
-        <p:nvSpPr>
-          <p:cNvPr id="19" name="Shape 17"/>
+              <a:t>(발표 시 본인 의견 추가)</a:t>
+            </a:r>
+            <a:endParaRPr lang="en-US" sz="1050" dirty="0"/>
+          </a:p>
+        </p:txBody>
+      </p:sp>
+      <p:sp>
+        <p:nvSpPr>
+          <p:cNvPr id="20" name="Shape 18"/>
           <p:cNvSpPr/>
           <p:nvPr/>
         </p:nvSpPr>
         <p:spPr>
           <a:xfrm>
-            <a:off x="8412480" y="4206240"/>
+            <a:off x="8412480" y="5760720"/>
             <a:ext cx="3063240" cy="0"/>
           </a:xfrm>
           <a:prstGeom prst="line">
@@ -6035,38 +6280,13 @@
       </p:sp>
       <p:sp>
         <p:nvSpPr>
-          <p:cNvPr id="20" name="Shape 18"/>
-          <p:cNvSpPr/>
-          <p:nvPr/>
-        </p:nvSpPr>
-        <p:spPr>
-          <a:xfrm>
-            <a:off x="8412480" y="4709160"/>
-            <a:ext cx="3063240" cy="0"/>
-          </a:xfrm>
-          <a:prstGeom prst="line">
-            <a:avLst/>
-          </a:prstGeom>
-          <a:noFill/>
-          <a:ln w="9525">
-            <a:solidFill>
-              <a:srgbClr val="5B7A7E">
-                <a:alpha val="60000"/>
-              </a:srgbClr>
-            </a:solidFill>
-            <a:prstDash val="dash"/>
-          </a:ln>
-        </p:spPr>
-      </p:sp>
-      <p:sp>
-        <p:nvSpPr>
           <p:cNvPr id="21" name="Shape 19"/>
           <p:cNvSpPr/>
           <p:nvPr/>
         </p:nvSpPr>
         <p:spPr>
           <a:xfrm>
-            <a:off x="8412480" y="5212080"/>
+            <a:off x="8412480" y="6172200"/>
             <a:ext cx="3063240" cy="0"/>
           </a:xfrm>
           <a:prstGeom prst="line">

--- a/치과약리학실험2-논문발표/치과약리학실험2_논문발표.pptx
+++ b/치과약리학실험2-논문발표/치과약리학실험2_논문발표.pptx
@@ -15,9 +15,10 @@
     <p:sldId id="263" r:id="rId9"/>
     <p:sldId id="264" r:id="rId10"/>
     <p:sldId id="265" r:id="rId11"/>
+    <p:sldId id="266" r:id="rId12"/>
   </p:sldIdLst>
   <p:notesMasterIdLst>
-    <p:notesMasterId r:id="rId12"/>
+    <p:notesMasterId r:id="rId13"/>
   </p:notesMasterIdLst>
   <p:sldSz cx="12192000" cy="6858000"/>
   <p:notesSz cx="6858000" cy="12192000"/>
@@ -599,10 +600,7 @@
           <a:p>
             <a:r>
               <a:rPr lang="en-US" dirty="0"/>
-              <a:t>예상 질문 1: split-mouth 설계에서 두 마취제가 서로 확산되어 결과를 교란할 가능성은 없는가?
-예상 질문 2: 표본수 60명이 통계적으로 충분한가 (검정력 계산 근거)?
-예상 질문 3: 에피네프린 농도가 동일(1:100,000)한데 순수 약물 자체의 효과 차이로 볼 수 있는가, 농도(4% vs 2%) 차이의 영향은 아닌가?
-예상 질문 4: 이 결과를 한국인 임상 현장에 그대로 적용할 수 있는가(연구계획서 주제와 연결)?</a:t>
+              <a:t>연구계획서 과제(완충 아티카인 vs 리도카인, 한국인 대상)와 자연스럽게 연결하며 마무리. Q&amp;A로 전환.</a:t>
             </a:r>
             <a:endParaRPr lang="en-US" dirty="0"/>
           </a:p>
@@ -626,6 +624,97 @@
             <a:fld id="{F7021451-1387-4CA6-816F-3879F97B5CBC}" type="slidenum">
               <a:rPr lang="en-US"/>
               <a:t>10</a:t>
+            </a:fld>
+            <a:endParaRPr lang="en-US"/>
+          </a:p>
+        </p:txBody>
+      </p:sp>
+    </p:spTree>
+    <p:extLst>
+      <p:ext uri="{BB962C8B-B14F-4D97-AF65-F5344CB8AC3E}">
+        <p14:creationId xmlns:p14="http://schemas.microsoft.com/office/powerpoint/2010/main" val="1024086991"/>
+      </p:ext>
+    </p:extLst>
+  </p:cSld>
+  <p:clrMapOvr>
+    <a:masterClrMapping/>
+  </p:clrMapOvr>
+</p:notes>
+</file>
+
+<file path=ppt/notesSlides/notesSlide11.xml><?xml version="1.0" encoding="utf-8"?>
+<p:notes xmlns:a="http://schemas.openxmlformats.org/drawingml/2006/main" xmlns:r="http://schemas.openxmlformats.org/officeDocument/2006/relationships" xmlns:p="http://schemas.openxmlformats.org/presentationml/2006/main">
+  <p:cSld>
+    <p:spTree>
+      <p:nvGrpSpPr>
+        <p:cNvPr id="1" name=""/>
+        <p:cNvGrpSpPr/>
+        <p:nvPr/>
+      </p:nvGrpSpPr>
+      <p:grpSpPr>
+        <a:xfrm>
+          <a:off x="0" y="0"/>
+          <a:ext cx="0" cy="0"/>
+          <a:chOff x="0" y="0"/>
+          <a:chExt cx="0" cy="0"/>
+        </a:xfrm>
+      </p:grpSpPr>
+      <p:sp>
+        <p:nvSpPr>
+          <p:cNvPr id="2" name="Slide Image Placeholder 1"/>
+          <p:cNvSpPr>
+            <a:spLocks noGrp="1" noRot="1" noChangeAspect="1"/>
+          </p:cNvSpPr>
+          <p:nvPr>
+            <p:ph type="sldImg"/>
+          </p:nvPr>
+        </p:nvSpPr>
+        <p:spPr/>
+      </p:sp>
+      <p:sp>
+        <p:nvSpPr>
+          <p:cNvPr id="3" name="Notes Placeholder 2"/>
+          <p:cNvSpPr>
+            <a:spLocks noGrp="1"/>
+          </p:cNvSpPr>
+          <p:nvPr>
+            <p:ph type="body" idx="1"/>
+          </p:nvPr>
+        </p:nvSpPr>
+        <p:spPr/>
+        <p:txBody>
+          <a:bodyPr/>
+          <a:lstStyle/>
+          <a:p>
+            <a:r>
+              <a:rPr lang="en-US" dirty="0"/>
+              <a:t>예상 질문 1: split-mouth 설계에서 두 마취제가 서로 확산되어 결과를 교란할 가능성은 없는가?
+예상 질문 2: 표본수 60명이 통계적으로 충분한가 (검정력 계산 근거)?
+예상 질문 3: 에피네프린 농도가 동일(1:100,000)한데 순수 약물 자체의 효과 차이로 볼 수 있는가, 농도(4% vs 2%) 차이의 영향은 아닌가?
+예상 질문 4: 이 결과를 한국인 임상 현장에 그대로 적용할 수 있는가(연구계획서 주제와 연결)?</a:t>
+            </a:r>
+            <a:endParaRPr lang="en-US" dirty="0"/>
+          </a:p>
+        </p:txBody>
+      </p:sp>
+      <p:sp>
+        <p:nvSpPr>
+          <p:cNvPr id="4" name="Slide Number Placeholder 3"/>
+          <p:cNvSpPr>
+            <a:spLocks noGrp="1"/>
+          </p:cNvSpPr>
+          <p:nvPr>
+            <p:ph type="sldNum" sz="quarter" idx="10"/>
+          </p:nvPr>
+        </p:nvSpPr>
+        <p:spPr/>
+        <p:txBody>
+          <a:bodyPr/>
+          <a:lstStyle/>
+          <a:p>
+            <a:fld id="{F7021451-1387-4CA6-816F-3879F97B5CBC}" type="slidenum">
+              <a:rPr lang="en-US"/>
+              <a:t>11</a:t>
             </a:fld>
             <a:endParaRPr lang="en-US"/>
           </a:p>
@@ -778,7 +867,7 @@
           <a:p>
             <a:r>
               <a:rPr lang="en-US" dirty="0"/>
-              <a:t>이 슬라이드는 오늘 소개할 논문이 채우는 공백을 시각적으로 보여주는 목적. 세 연구 결과가 서로 다르다는 점을 강조.</a:t>
+              <a:t>Q&amp;A 예상질문(농도 4% vs 2% 차이로 인한 교란)을 여기서 선제적으로 짚어주면 좋음. 아티카인의 티오펜 고리·에스터 곁사슬 구조는 약리학 교과서 표준 설명이므로 실습 교재/강의자료와 대조해 표현을 맞출 것.</a:t>
             </a:r>
             <a:endParaRPr lang="en-US" dirty="0"/>
           </a:p>
@@ -866,7 +955,7 @@
           <a:p>
             <a:r>
               <a:rPr lang="en-US" dirty="0"/>
-              <a:t>가설은 저자들이 명시한 연구가설이 아니라 발표자가 선행연구 흐름을 근거로 재구성한 것임을 언급하면 좋음.</a:t>
+              <a:t>이 슬라이드는 오늘 소개할 논문이 채우는 공백을 시각적으로 보여주는 목적. 세 연구 결과가 서로 다르다는 점을 강조.</a:t>
             </a:r>
             <a:endParaRPr lang="en-US" dirty="0"/>
           </a:p>
@@ -954,7 +1043,7 @@
           <a:p>
             <a:r>
               <a:rPr lang="en-US" dirty="0"/>
-              <a:t>split-mouth 설계의 장점(대상자 본인이 대조군 — 개체 간 변이 통제)을 설명. 이중눈가림이 어떻게 이뤄졌는지(투여자/평가자 분리 등) 원문에서 확인해 보충하면 좋음.</a:t>
+              <a:t>가설은 저자들이 명시한 연구가설이 아니라 발표자가 선행연구 흐름을 근거로 재구성한 것임을 언급하면 좋음.</a:t>
             </a:r>
             <a:endParaRPr lang="en-US" dirty="0"/>
           </a:p>
@@ -1042,7 +1131,7 @@
           <a:p>
             <a:r>
               <a:rPr lang="en-US" dirty="0"/>
-              <a:t>원문 Table 3 기준 수치로 확정. Results 본문에서는 p&lt;0.01, Abstract에서는 p&lt;0.05로 표기되어 있어 발표 시 Table 3 기준(p&lt;0.01)으로 통일해 설명할 것.</a:t>
+              <a:t>split-mouth 설계의 장점(대상자 본인이 대조군 — 개체 간 변이 통제)을 설명. 이중눈가림이 어떻게 이뤄졌는지(투여자/평가자 분리 등) 원문에서 확인해 보충하면 좋음.</a:t>
             </a:r>
             <a:endParaRPr lang="en-US" dirty="0"/>
           </a:p>
@@ -1130,7 +1219,7 @@
           <a:p>
             <a:r>
               <a:rPr lang="en-US" dirty="0"/>
-              <a:t>VAS 관련 정량 수치는 검색 스니펫만으로 확보되지 않아 플레이스홀더로 남김 — 원문 Table/Figure를 확인해 직접 채워 넣을 것.</a:t>
+              <a:t>원문 Table 3 기준 수치로 확정. Results 본문에서는 p&lt;0.01, Abstract에서는 p&lt;0.05로 표기되어 있어 발표 시 Table 3 기준(p&lt;0.01)으로 통일해 설명할 것.</a:t>
             </a:r>
             <a:endParaRPr lang="en-US" dirty="0"/>
           </a:p>
@@ -1218,7 +1307,7 @@
           <a:p>
             <a:r>
               <a:rPr lang="en-US" dirty="0"/>
-              <a:t>좌측 두 칸은 원문 Discussion·Limitations 절 기준 초안. 우측 임상 적용 가능성 칸의 '통계적 유의성 vs 임상적 유의성' 포인트는 Q&amp;A에서 자주 나오는 포인트이니 본인 의견으로 발전시킬 것. 빈 줄에는 실습·발표 리허설 중 떠오른 개인 의견을 추가.</a:t>
+              <a:t>VAS 관련 정량 수치는 검색 스니펫만으로 확보되지 않아 플레이스홀더로 남김 — 원문 Table/Figure를 확인해 직접 채워 넣을 것.</a:t>
             </a:r>
             <a:endParaRPr lang="en-US" dirty="0"/>
           </a:p>
@@ -1306,7 +1395,7 @@
           <a:p>
             <a:r>
               <a:rPr lang="en-US" dirty="0"/>
-              <a:t>연구계획서 과제(완충 아티카인 vs 리도카인, 한국인 대상)와 자연스럽게 연결하며 마무리. Q&amp;A로 전환.</a:t>
+              <a:t>좌측 두 칸은 원문 Discussion·Limitations 절 기준 초안. 우측 임상 적용 가능성 칸의 '통계적 유의성 vs 임상적 유의성' 포인트는 Q&amp;A에서 자주 나오는 포인트이니 본인 의견으로 발전시킬 것. 빈 줄에는 실습·발표 리허설 중 떠오른 개인 의견을 추가.</a:t>
             </a:r>
             <a:endParaRPr lang="en-US" dirty="0"/>
           </a:p>
@@ -1993,6 +2082,242 @@
     <p:bg>
       <p:bgPr>
         <a:solidFill>
+          <a:srgbClr val="028090"/>
+        </a:solidFill>
+      </p:bgPr>
+    </p:bg>
+    <p:spTree>
+      <p:nvGrpSpPr>
+        <p:cNvPr id="1" name=""/>
+        <p:cNvGrpSpPr/>
+        <p:nvPr/>
+      </p:nvGrpSpPr>
+      <p:grpSpPr>
+        <a:xfrm>
+          <a:off x="0" y="0"/>
+          <a:ext cx="0" cy="0"/>
+          <a:chOff x="0" y="0"/>
+          <a:chExt cx="0" cy="0"/>
+        </a:xfrm>
+      </p:grpSpPr>
+      <p:sp>
+        <p:nvSpPr>
+          <p:cNvPr id="2" name="Shape 0"/>
+          <p:cNvSpPr/>
+          <p:nvPr/>
+        </p:nvSpPr>
+        <p:spPr>
+          <a:xfrm>
+            <a:off x="-2743200" y="-2743200"/>
+            <a:ext cx="7315200" cy="7315200"/>
+          </a:xfrm>
+          <a:prstGeom prst="ellipse">
+            <a:avLst/>
+          </a:prstGeom>
+          <a:solidFill>
+            <a:srgbClr val="00A896">
+              <a:alpha val="40000"/>
+            </a:srgbClr>
+          </a:solidFill>
+          <a:ln/>
+        </p:spPr>
+      </p:sp>
+      <p:sp>
+        <p:nvSpPr>
+          <p:cNvPr id="3" name="Text 1"/>
+          <p:cNvSpPr txBox="1"/>
+          <p:nvPr/>
+        </p:nvSpPr>
+        <p:spPr>
+          <a:xfrm>
+            <a:off x="822960" y="1463040"/>
+            <a:ext cx="9144000" cy="365760"/>
+          </a:xfrm>
+          <a:prstGeom prst="rect">
+            <a:avLst/>
+          </a:prstGeom>
+          <a:noFill/>
+          <a:ln/>
+        </p:spPr>
+        <p:txBody>
+          <a:bodyPr wrap="square" lIns="0" tIns="0" rIns="0" bIns="0" rtlCol="0" anchor="ctr"/>
+          <a:lstStyle/>
+          <a:p>
+            <a:pPr indent="0" marL="0">
+              <a:buNone/>
+            </a:pPr>
+            <a:r>
+              <a:rPr lang="en-US" sz="1300" b="1" spc="100" kern="0" dirty="0">
+                <a:solidFill>
+                  <a:srgbClr val="02C39A"/>
+                </a:solidFill>
+                <a:latin typeface="Pretendard" pitchFamily="34" charset="0"/>
+                <a:ea typeface="Pretendard" pitchFamily="34" charset="-122"/>
+                <a:cs typeface="Pretendard" pitchFamily="34" charset="-120"/>
+              </a:rPr>
+              <a:t>TAKE-HOME MESSAGE</a:t>
+            </a:r>
+            <a:endParaRPr lang="en-US" sz="1300" dirty="0"/>
+          </a:p>
+        </p:txBody>
+      </p:sp>
+      <p:sp>
+        <p:nvSpPr>
+          <p:cNvPr id="4" name="Text 2"/>
+          <p:cNvSpPr txBox="1"/>
+          <p:nvPr/>
+        </p:nvSpPr>
+        <p:spPr>
+          <a:xfrm>
+            <a:off x="822960" y="1965960"/>
+            <a:ext cx="10332720" cy="1828800"/>
+          </a:xfrm>
+          <a:prstGeom prst="rect">
+            <a:avLst/>
+          </a:prstGeom>
+          <a:noFill/>
+          <a:ln/>
+        </p:spPr>
+        <p:txBody>
+          <a:bodyPr wrap="square" lIns="0" tIns="0" rIns="0" bIns="0" rtlCol="0" anchor="ctr"/>
+          <a:lstStyle/>
+          <a:p>
+            <a:pPr indent="0" marL="0">
+              <a:lnSpc>
+                <a:spcPct val="130000"/>
+              </a:lnSpc>
+              <a:buNone/>
+            </a:pPr>
+            <a:r>
+              <a:rPr lang="en-US" sz="2700" b="1" dirty="0">
+                <a:solidFill>
+                  <a:srgbClr val="FFFFFF"/>
+                </a:solidFill>
+                <a:latin typeface="Wanted Sans" pitchFamily="34" charset="0"/>
+                <a:ea typeface="Wanted Sans" pitchFamily="34" charset="-122"/>
+                <a:cs typeface="Wanted Sans" pitchFamily="34" charset="-120"/>
+              </a:rPr>
+              <a:t>발치 시 빠른 마취 발현이 필요한 상황이라면,</a:t>
+            </a:r>
+            <a:endParaRPr lang="en-US" sz="2700" dirty="0"/>
+          </a:p>
+          <a:p>
+            <a:pPr indent="0" marL="0">
+              <a:lnSpc>
+                <a:spcPct val="130000"/>
+              </a:lnSpc>
+              <a:buNone/>
+            </a:pPr>
+            <a:r>
+              <a:rPr lang="en-US" sz="2700" b="1" dirty="0">
+                <a:solidFill>
+                  <a:srgbClr val="FFFFFF"/>
+                </a:solidFill>
+                <a:latin typeface="Wanted Sans" pitchFamily="34" charset="0"/>
+                <a:ea typeface="Wanted Sans" pitchFamily="34" charset="-122"/>
+                <a:cs typeface="Wanted Sans" pitchFamily="34" charset="-120"/>
+              </a:rPr>
+              <a:t>아티카인이 리도카인보다 유리한 선택지일 수 있다.</a:t>
+            </a:r>
+            <a:endParaRPr lang="en-US" sz="2700" dirty="0"/>
+          </a:p>
+        </p:txBody>
+      </p:sp>
+      <p:sp>
+        <p:nvSpPr>
+          <p:cNvPr id="5" name="Text 3"/>
+          <p:cNvSpPr txBox="1"/>
+          <p:nvPr/>
+        </p:nvSpPr>
+        <p:spPr>
+          <a:xfrm>
+            <a:off x="822960" y="3931920"/>
+            <a:ext cx="10332720" cy="822960"/>
+          </a:xfrm>
+          <a:prstGeom prst="rect">
+            <a:avLst/>
+          </a:prstGeom>
+          <a:noFill/>
+          <a:ln/>
+        </p:spPr>
+        <p:txBody>
+          <a:bodyPr wrap="square" lIns="0" tIns="0" rIns="0" bIns="0" rtlCol="0" anchor="ctr"/>
+          <a:lstStyle/>
+          <a:p>
+            <a:pPr indent="0" marL="0">
+              <a:lnSpc>
+                <a:spcPct val="130000"/>
+              </a:lnSpc>
+              <a:buNone/>
+            </a:pPr>
+            <a:r>
+              <a:rPr lang="en-US" sz="1400" i="1" dirty="0">
+                <a:solidFill>
+                  <a:srgbClr val="F7FBFB"/>
+                </a:solidFill>
+                <a:latin typeface="Pretendard" pitchFamily="34" charset="0"/>
+                <a:ea typeface="Pretendard" pitchFamily="34" charset="-122"/>
+                <a:cs typeface="Pretendard" pitchFamily="34" charset="-120"/>
+              </a:rPr>
+              <a:t>단, 근거는 특정 인구집단·단일 연구 기준 — 한국인 대상 재현/후속 연구로 확인이 필요함 (→ 본 과제의 연구계획서 참고)</a:t>
+            </a:r>
+            <a:endParaRPr lang="en-US" sz="1400" dirty="0"/>
+          </a:p>
+        </p:txBody>
+      </p:sp>
+      <p:sp>
+        <p:nvSpPr>
+          <p:cNvPr id="6" name="Text 4"/>
+          <p:cNvSpPr txBox="1"/>
+          <p:nvPr/>
+        </p:nvSpPr>
+        <p:spPr>
+          <a:xfrm>
+            <a:off x="11365992" y="6355080"/>
+            <a:ext cx="457200" cy="320040"/>
+          </a:xfrm>
+          <a:prstGeom prst="rect">
+            <a:avLst/>
+          </a:prstGeom>
+          <a:noFill/>
+          <a:ln/>
+        </p:spPr>
+        <p:txBody>
+          <a:bodyPr wrap="square" lIns="0" tIns="0" rIns="0" bIns="0" rtlCol="0" anchor="ctr"/>
+          <a:lstStyle/>
+          <a:p>
+            <a:pPr algn="r" indent="0" marL="0">
+              <a:buNone/>
+            </a:pPr>
+            <a:r>
+              <a:rPr lang="en-US" sz="1100" dirty="0">
+                <a:solidFill>
+                  <a:srgbClr val="5B7A7E"/>
+                </a:solidFill>
+                <a:latin typeface="Pretendard" pitchFamily="34" charset="0"/>
+                <a:ea typeface="Pretendard" pitchFamily="34" charset="-122"/>
+                <a:cs typeface="Pretendard" pitchFamily="34" charset="-120"/>
+              </a:rPr>
+              <a:t>10</a:t>
+            </a:r>
+            <a:endParaRPr lang="en-US" sz="1100" dirty="0"/>
+          </a:p>
+        </p:txBody>
+      </p:sp>
+    </p:spTree>
+  </p:cSld>
+  <p:clrMapOvr>
+    <a:masterClrMapping/>
+  </p:clrMapOvr>
+</p:sld>
+</file>
+
+<file path=ppt/slides/slide11.xml><?xml version="1.0" encoding="utf-8"?>
+<p:sld xmlns:a="http://schemas.openxmlformats.org/drawingml/2006/main" xmlns:r="http://schemas.openxmlformats.org/officeDocument/2006/relationships" xmlns:p="http://schemas.openxmlformats.org/presentationml/2006/main">
+  <p:cSld name="Slide 11">
+    <p:bg>
+      <p:bgPr>
+        <a:solidFill>
           <a:srgbClr val="0B2E33"/>
         </a:solidFill>
       </p:bgPr>
@@ -2822,7 +3147,7 @@
                 <a:ea typeface="Pretendard" pitchFamily="34" charset="-122"/>
                 <a:cs typeface="Pretendard" pitchFamily="34" charset="-120"/>
               </a:rPr>
-              <a:t>EVIDENCE GAP</a:t>
+              <a:t>PHARMACOLOGY</a:t>
             </a:r>
             <a:endParaRPr lang="en-US" sz="1300" dirty="0"/>
           </a:p>
@@ -2861,7 +3186,7 @@
                 <a:ea typeface="Wanted Sans" pitchFamily="34" charset="-122"/>
                 <a:cs typeface="Wanted Sans" pitchFamily="34" charset="-120"/>
               </a:rPr>
-              <a:t>기존 근거의 공백</a:t>
+              <a:t>왜 아티카인이 더 빠르게 발현하는가</a:t>
             </a:r>
             <a:endParaRPr lang="en-US" sz="3000" dirty="0"/>
           </a:p>
@@ -2869,63 +3194,31 @@
       </p:sp>
       <p:sp>
         <p:nvSpPr>
-          <p:cNvPr id="4" name="Text 2"/>
-          <p:cNvSpPr txBox="1"/>
-          <p:nvPr/>
-        </p:nvSpPr>
-        <p:spPr>
-          <a:xfrm>
-            <a:off x="548640" y="1783080"/>
-            <a:ext cx="10972800" cy="457200"/>
-          </a:xfrm>
-          <a:prstGeom prst="rect">
-            <a:avLst/>
-          </a:prstGeom>
-          <a:noFill/>
-          <a:ln/>
-        </p:spPr>
-        <p:txBody>
-          <a:bodyPr wrap="square" lIns="0" tIns="0" rIns="0" bIns="0" rtlCol="0" anchor="ctr"/>
-          <a:lstStyle/>
-          <a:p>
-            <a:pPr indent="0" marL="0">
-              <a:buNone/>
-            </a:pPr>
-            <a:r>
-              <a:rPr lang="en-US" sz="1600" b="1" dirty="0">
-                <a:solidFill>
-                  <a:srgbClr val="0B2E33"/>
-                </a:solidFill>
-                <a:latin typeface="Pretendard" pitchFamily="34" charset="0"/>
-                <a:ea typeface="Pretendard" pitchFamily="34" charset="-122"/>
-                <a:cs typeface="Pretendard" pitchFamily="34" charset="-120"/>
-              </a:rPr>
-              <a:t>완충(Buffered) 제형 효과는 연구마다 결과가 엇갈림</a:t>
-            </a:r>
-            <a:endParaRPr lang="en-US" sz="1600" dirty="0"/>
-          </a:p>
-        </p:txBody>
-      </p:sp>
-      <p:sp>
-        <p:nvSpPr>
-          <p:cNvPr id="5" name="Shape 3"/>
+          <p:cNvPr id="4" name="Shape 2"/>
           <p:cNvSpPr/>
           <p:nvPr/>
         </p:nvSpPr>
         <p:spPr>
           <a:xfrm>
-            <a:off x="548640" y="2423160"/>
-            <a:ext cx="11064240" cy="960120"/>
+            <a:off x="548640" y="1828800"/>
+            <a:ext cx="11064240" cy="1097280"/>
           </a:xfrm>
           <a:prstGeom prst="roundRect">
             <a:avLst>
-              <a:gd name="adj" fmla="val 5714"/>
+              <a:gd name="adj" fmla="val 6667"/>
             </a:avLst>
           </a:prstGeom>
           <a:solidFill>
             <a:srgbClr val="FFFFFF"/>
           </a:solidFill>
-          <a:ln/>
+          <a:ln w="9525">
+            <a:solidFill>
+              <a:srgbClr val="00A896">
+                <a:alpha val="30000"/>
+              </a:srgbClr>
+            </a:solidFill>
+            <a:prstDash val="solid"/>
+          </a:ln>
           <a:effectLst>
             <a:outerShdw sx="100000" sy="100000" kx="0" ky="0" algn="bl" rotWithShape="0" blurRad="63500" dist="25400" dir="5400000">
               <a:srgbClr val="000000">
@@ -2937,62 +3230,23 @@
       </p:sp>
       <p:sp>
         <p:nvSpPr>
-          <p:cNvPr id="6" name="Text 4"/>
-          <p:cNvSpPr txBox="1"/>
-          <p:nvPr/>
-        </p:nvSpPr>
-        <p:spPr>
-          <a:xfrm>
-            <a:off x="868680" y="2532888"/>
-            <a:ext cx="6675120" cy="731520"/>
-          </a:xfrm>
-          <a:prstGeom prst="rect">
-            <a:avLst/>
-          </a:prstGeom>
-          <a:noFill/>
-          <a:ln/>
-        </p:spPr>
-        <p:txBody>
-          <a:bodyPr wrap="square" lIns="0" tIns="0" rIns="0" bIns="0" rtlCol="0" anchor="ctr"/>
-          <a:lstStyle/>
-          <a:p>
-            <a:pPr indent="0" marL="0">
-              <a:buNone/>
-            </a:pPr>
-            <a:r>
-              <a:rPr lang="en-US" sz="1350" b="1" dirty="0">
-                <a:solidFill>
-                  <a:srgbClr val="0B2E33"/>
-                </a:solidFill>
-                <a:latin typeface="Pretendard" pitchFamily="34" charset="0"/>
-                <a:ea typeface="Pretendard" pitchFamily="34" charset="-122"/>
-                <a:cs typeface="Pretendard" pitchFamily="34" charset="-120"/>
-              </a:rPr>
-              <a:t>성인 · 제3대구치 발치 (2024, Springer)</a:t>
-            </a:r>
-            <a:endParaRPr lang="en-US" sz="1350" dirty="0"/>
-          </a:p>
-        </p:txBody>
-      </p:sp>
-      <p:sp>
-        <p:nvSpPr>
-          <p:cNvPr id="7" name="Shape 5"/>
+          <p:cNvPr id="5" name="Shape 3"/>
           <p:cNvSpPr/>
           <p:nvPr/>
         </p:nvSpPr>
         <p:spPr>
           <a:xfrm>
-            <a:off x="7772400" y="2624328"/>
-            <a:ext cx="3657600" cy="548640"/>
+            <a:off x="777240" y="2057400"/>
+            <a:ext cx="1737360" cy="640080"/>
           </a:xfrm>
           <a:prstGeom prst="roundRect">
             <a:avLst>
-              <a:gd name="adj" fmla="val 50000"/>
+              <a:gd name="adj" fmla="val 42857"/>
             </a:avLst>
           </a:prstGeom>
           <a:solidFill>
-            <a:srgbClr val="02C39A">
-              <a:alpha val="15000"/>
+            <a:srgbClr val="028090">
+              <a:alpha val="12000"/>
             </a:srgbClr>
           </a:solidFill>
           <a:ln/>
@@ -3000,14 +3254,14 @@
       </p:sp>
       <p:sp>
         <p:nvSpPr>
-          <p:cNvPr id="8" name="Text 6"/>
-          <p:cNvSpPr txBox="1"/>
-          <p:nvPr/>
-        </p:nvSpPr>
-        <p:spPr>
-          <a:xfrm>
-            <a:off x="7772400" y="2624328"/>
-            <a:ext cx="3657600" cy="548640"/>
+          <p:cNvPr id="6" name="Text 4"/>
+          <p:cNvSpPr txBox="1"/>
+          <p:nvPr/>
+        </p:nvSpPr>
+        <p:spPr>
+          <a:xfrm>
+            <a:off x="777240" y="2057400"/>
+            <a:ext cx="1737360" cy="640080"/>
           </a:xfrm>
           <a:prstGeom prst="rect">
             <a:avLst/>
@@ -3023,40 +3277,89 @@
               <a:buNone/>
             </a:pPr>
             <a:r>
-              <a:rPr lang="en-US" sz="1200" b="1" dirty="0">
-                <a:solidFill>
-                  <a:srgbClr val="047857"/>
-                </a:solidFill>
-                <a:latin typeface="Pretendard" pitchFamily="34" charset="0"/>
-                <a:ea typeface="Pretendard" pitchFamily="34" charset="-122"/>
-                <a:cs typeface="Pretendard" pitchFamily="34" charset="-120"/>
-              </a:rPr>
-              <a:t>아티카인 발현시간 유의하게 단축</a:t>
-            </a:r>
-            <a:endParaRPr lang="en-US" sz="1200" dirty="0"/>
-          </a:p>
-        </p:txBody>
-      </p:sp>
-      <p:sp>
-        <p:nvSpPr>
-          <p:cNvPr id="9" name="Shape 7"/>
+              <a:rPr lang="en-US" sz="1300" b="1" dirty="0">
+                <a:solidFill>
+                  <a:srgbClr val="028090"/>
+                </a:solidFill>
+                <a:latin typeface="Pretendard" pitchFamily="34" charset="0"/>
+                <a:ea typeface="Pretendard" pitchFamily="34" charset="-122"/>
+                <a:cs typeface="Pretendard" pitchFamily="34" charset="-120"/>
+              </a:rPr>
+              <a:t>화학구조</a:t>
+            </a:r>
+            <a:endParaRPr lang="en-US" sz="1300" dirty="0"/>
+          </a:p>
+        </p:txBody>
+      </p:sp>
+      <p:sp>
+        <p:nvSpPr>
+          <p:cNvPr id="7" name="Text 5"/>
+          <p:cNvSpPr txBox="1"/>
+          <p:nvPr/>
+        </p:nvSpPr>
+        <p:spPr>
+          <a:xfrm>
+            <a:off x="2743200" y="1920240"/>
+            <a:ext cx="8595360" cy="914400"/>
+          </a:xfrm>
+          <a:prstGeom prst="rect">
+            <a:avLst/>
+          </a:prstGeom>
+          <a:noFill/>
+          <a:ln/>
+        </p:spPr>
+        <p:txBody>
+          <a:bodyPr wrap="square" lIns="0" tIns="0" rIns="0" bIns="0" rtlCol="0" anchor="ctr"/>
+          <a:lstStyle/>
+          <a:p>
+            <a:pPr indent="0" marL="0">
+              <a:lnSpc>
+                <a:spcPct val="120000"/>
+              </a:lnSpc>
+              <a:buNone/>
+            </a:pPr>
+            <a:r>
+              <a:rPr lang="en-US" sz="1250" dirty="0">
+                <a:solidFill>
+                  <a:srgbClr val="0B2E33"/>
+                </a:solidFill>
+                <a:latin typeface="Pretendard" pitchFamily="34" charset="0"/>
+                <a:ea typeface="Pretendard" pitchFamily="34" charset="-122"/>
+                <a:cs typeface="Pretendard" pitchFamily="34" charset="-120"/>
+              </a:rPr>
+              <a:t>아티카인은 티오펜(thiophene) 고리, 리도카인은 벤젠 고리 — 티오펜 고리가 지질용해도를 높여 신경막·연조직·피질골 투과를 향상시킴</a:t>
+            </a:r>
+            <a:endParaRPr lang="en-US" sz="1250" dirty="0"/>
+          </a:p>
+        </p:txBody>
+      </p:sp>
+      <p:sp>
+        <p:nvSpPr>
+          <p:cNvPr id="8" name="Shape 6"/>
           <p:cNvSpPr/>
           <p:nvPr/>
         </p:nvSpPr>
         <p:spPr>
           <a:xfrm>
-            <a:off x="548640" y="3566160"/>
-            <a:ext cx="11064240" cy="960120"/>
+            <a:off x="548640" y="3063240"/>
+            <a:ext cx="11064240" cy="1097280"/>
           </a:xfrm>
           <a:prstGeom prst="roundRect">
             <a:avLst>
-              <a:gd name="adj" fmla="val 5714"/>
+              <a:gd name="adj" fmla="val 6667"/>
             </a:avLst>
           </a:prstGeom>
           <a:solidFill>
             <a:srgbClr val="FFFFFF"/>
           </a:solidFill>
-          <a:ln/>
+          <a:ln w="9525">
+            <a:solidFill>
+              <a:srgbClr val="00A896">
+                <a:alpha val="30000"/>
+              </a:srgbClr>
+            </a:solidFill>
+            <a:prstDash val="solid"/>
+          </a:ln>
           <a:effectLst>
             <a:outerShdw sx="100000" sy="100000" kx="0" ky="0" algn="bl" rotWithShape="0" blurRad="63500" dist="25400" dir="5400000">
               <a:srgbClr val="000000">
@@ -3068,62 +3371,23 @@
       </p:sp>
       <p:sp>
         <p:nvSpPr>
-          <p:cNvPr id="10" name="Text 8"/>
-          <p:cNvSpPr txBox="1"/>
-          <p:nvPr/>
-        </p:nvSpPr>
-        <p:spPr>
-          <a:xfrm>
-            <a:off x="868680" y="3675888"/>
-            <a:ext cx="6675120" cy="731520"/>
-          </a:xfrm>
-          <a:prstGeom prst="rect">
-            <a:avLst/>
-          </a:prstGeom>
-          <a:noFill/>
-          <a:ln/>
-        </p:spPr>
-        <p:txBody>
-          <a:bodyPr wrap="square" lIns="0" tIns="0" rIns="0" bIns="0" rtlCol="0" anchor="ctr"/>
-          <a:lstStyle/>
-          <a:p>
-            <a:pPr indent="0" marL="0">
-              <a:buNone/>
-            </a:pPr>
-            <a:r>
-              <a:rPr lang="en-US" sz="1350" b="1" dirty="0">
-                <a:solidFill>
-                  <a:srgbClr val="0B2E33"/>
-                </a:solidFill>
-                <a:latin typeface="Pretendard" pitchFamily="34" charset="0"/>
-                <a:ea typeface="Pretendard" pitchFamily="34" charset="-122"/>
-                <a:cs typeface="Pretendard" pitchFamily="34" charset="-120"/>
-              </a:rPr>
-              <a:t>성인 · 발치 시 완충 리도카인 (2024, JOMS/Cincinnati)</a:t>
-            </a:r>
-            <a:endParaRPr lang="en-US" sz="1350" dirty="0"/>
-          </a:p>
-        </p:txBody>
-      </p:sp>
-      <p:sp>
-        <p:nvSpPr>
-          <p:cNvPr id="11" name="Shape 9"/>
+          <p:cNvPr id="9" name="Shape 7"/>
           <p:cNvSpPr/>
           <p:nvPr/>
         </p:nvSpPr>
         <p:spPr>
           <a:xfrm>
-            <a:off x="7772400" y="3767328"/>
-            <a:ext cx="3657600" cy="548640"/>
+            <a:off x="777240" y="3291840"/>
+            <a:ext cx="1737360" cy="640080"/>
           </a:xfrm>
           <a:prstGeom prst="roundRect">
             <a:avLst>
-              <a:gd name="adj" fmla="val 50000"/>
+              <a:gd name="adj" fmla="val 42857"/>
             </a:avLst>
           </a:prstGeom>
           <a:solidFill>
-            <a:srgbClr val="5B7A7E">
-              <a:alpha val="15000"/>
+            <a:srgbClr val="028090">
+              <a:alpha val="12000"/>
             </a:srgbClr>
           </a:solidFill>
           <a:ln/>
@@ -3131,14 +3395,14 @@
       </p:sp>
       <p:sp>
         <p:nvSpPr>
-          <p:cNvPr id="12" name="Text 10"/>
-          <p:cNvSpPr txBox="1"/>
-          <p:nvPr/>
-        </p:nvSpPr>
-        <p:spPr>
-          <a:xfrm>
-            <a:off x="7772400" y="3767328"/>
-            <a:ext cx="3657600" cy="548640"/>
+          <p:cNvPr id="10" name="Text 8"/>
+          <p:cNvSpPr txBox="1"/>
+          <p:nvPr/>
+        </p:nvSpPr>
+        <p:spPr>
+          <a:xfrm>
+            <a:off x="777240" y="3291840"/>
+            <a:ext cx="1737360" cy="640080"/>
           </a:xfrm>
           <a:prstGeom prst="rect">
             <a:avLst/>
@@ -3154,40 +3418,89 @@
               <a:buNone/>
             </a:pPr>
             <a:r>
-              <a:rPr lang="en-US" sz="1200" b="1" dirty="0">
-                <a:solidFill>
-                  <a:srgbClr val="5B7A7E"/>
-                </a:solidFill>
-                <a:latin typeface="Pretendard" pitchFamily="34" charset="0"/>
-                <a:ea typeface="Pretendard" pitchFamily="34" charset="-122"/>
-                <a:cs typeface="Pretendard" pitchFamily="34" charset="-120"/>
-              </a:rPr>
-              <a:t>완충 처리 효과 통계적 유의성 없음</a:t>
-            </a:r>
-            <a:endParaRPr lang="en-US" sz="1200" dirty="0"/>
-          </a:p>
-        </p:txBody>
-      </p:sp>
-      <p:sp>
-        <p:nvSpPr>
-          <p:cNvPr id="13" name="Shape 11"/>
+              <a:rPr lang="en-US" sz="1300" b="1" dirty="0">
+                <a:solidFill>
+                  <a:srgbClr val="028090"/>
+                </a:solidFill>
+                <a:latin typeface="Pretendard" pitchFamily="34" charset="0"/>
+                <a:ea typeface="Pretendard" pitchFamily="34" charset="-122"/>
+                <a:cs typeface="Pretendard" pitchFamily="34" charset="-120"/>
+              </a:rPr>
+              <a:t>대사 경로</a:t>
+            </a:r>
+            <a:endParaRPr lang="en-US" sz="1300" dirty="0"/>
+          </a:p>
+        </p:txBody>
+      </p:sp>
+      <p:sp>
+        <p:nvSpPr>
+          <p:cNvPr id="11" name="Text 9"/>
+          <p:cNvSpPr txBox="1"/>
+          <p:nvPr/>
+        </p:nvSpPr>
+        <p:spPr>
+          <a:xfrm>
+            <a:off x="2743200" y="3154680"/>
+            <a:ext cx="8595360" cy="914400"/>
+          </a:xfrm>
+          <a:prstGeom prst="rect">
+            <a:avLst/>
+          </a:prstGeom>
+          <a:noFill/>
+          <a:ln/>
+        </p:spPr>
+        <p:txBody>
+          <a:bodyPr wrap="square" lIns="0" tIns="0" rIns="0" bIns="0" rtlCol="0" anchor="ctr"/>
+          <a:lstStyle/>
+          <a:p>
+            <a:pPr indent="0" marL="0">
+              <a:lnSpc>
+                <a:spcPct val="120000"/>
+              </a:lnSpc>
+              <a:buNone/>
+            </a:pPr>
+            <a:r>
+              <a:rPr lang="en-US" sz="1250" dirty="0">
+                <a:solidFill>
+                  <a:srgbClr val="0B2E33"/>
+                </a:solidFill>
+                <a:latin typeface="Pretendard" pitchFamily="34" charset="0"/>
+                <a:ea typeface="Pretendard" pitchFamily="34" charset="-122"/>
+                <a:cs typeface="Pretendard" pitchFamily="34" charset="-120"/>
+              </a:rPr>
+              <a:t>아티카인은 에스터 곁사슬을 가져 혈장 esterase에 의해 일부 가수분해됨(간 대사 의존도↓) → 전신독성이 낮아 4% 고농도 제형 사용이 가능</a:t>
+            </a:r>
+            <a:endParaRPr lang="en-US" sz="1250" dirty="0"/>
+          </a:p>
+        </p:txBody>
+      </p:sp>
+      <p:sp>
+        <p:nvSpPr>
+          <p:cNvPr id="12" name="Shape 10"/>
           <p:cNvSpPr/>
           <p:nvPr/>
         </p:nvSpPr>
         <p:spPr>
           <a:xfrm>
-            <a:off x="548640" y="4709160"/>
-            <a:ext cx="11064240" cy="960120"/>
+            <a:off x="548640" y="4297680"/>
+            <a:ext cx="11064240" cy="1097280"/>
           </a:xfrm>
           <a:prstGeom prst="roundRect">
             <a:avLst>
-              <a:gd name="adj" fmla="val 5714"/>
+              <a:gd name="adj" fmla="val 6667"/>
             </a:avLst>
           </a:prstGeom>
           <a:solidFill>
             <a:srgbClr val="FFFFFF"/>
           </a:solidFill>
-          <a:ln/>
+          <a:ln w="9525">
+            <a:solidFill>
+              <a:srgbClr val="00A896">
+                <a:alpha val="30000"/>
+              </a:srgbClr>
+            </a:solidFill>
+            <a:prstDash val="solid"/>
+          </a:ln>
           <a:effectLst>
             <a:outerShdw sx="100000" sy="100000" kx="0" ky="0" algn="bl" rotWithShape="0" blurRad="63500" dist="25400" dir="5400000">
               <a:srgbClr val="000000">
@@ -3199,62 +3512,23 @@
       </p:sp>
       <p:sp>
         <p:nvSpPr>
-          <p:cNvPr id="14" name="Text 12"/>
-          <p:cNvSpPr txBox="1"/>
-          <p:nvPr/>
-        </p:nvSpPr>
-        <p:spPr>
-          <a:xfrm>
-            <a:off x="868680" y="4818888"/>
-            <a:ext cx="6675120" cy="731520"/>
-          </a:xfrm>
-          <a:prstGeom prst="rect">
-            <a:avLst/>
-          </a:prstGeom>
-          <a:noFill/>
-          <a:ln/>
-        </p:spPr>
-        <p:txBody>
-          <a:bodyPr wrap="square" lIns="0" tIns="0" rIns="0" bIns="0" rtlCol="0" anchor="ctr"/>
-          <a:lstStyle/>
-          <a:p>
-            <a:pPr indent="0" marL="0">
-              <a:buNone/>
-            </a:pPr>
-            <a:r>
-              <a:rPr lang="en-US" sz="1350" b="1" dirty="0">
-                <a:solidFill>
-                  <a:srgbClr val="0B2E33"/>
-                </a:solidFill>
-                <a:latin typeface="Pretendard" pitchFamily="34" charset="0"/>
-                <a:ea typeface="Pretendard" pitchFamily="34" charset="-122"/>
-                <a:cs typeface="Pretendard" pitchFamily="34" charset="-120"/>
-              </a:rPr>
-              <a:t>소아 · 침윤/전달마취 (2019, 2024)</a:t>
-            </a:r>
-            <a:endParaRPr lang="en-US" sz="1350" dirty="0"/>
-          </a:p>
-        </p:txBody>
-      </p:sp>
-      <p:sp>
-        <p:nvSpPr>
-          <p:cNvPr id="15" name="Shape 13"/>
+          <p:cNvPr id="13" name="Shape 11"/>
           <p:cNvSpPr/>
           <p:nvPr/>
         </p:nvSpPr>
         <p:spPr>
           <a:xfrm>
-            <a:off x="7772400" y="4910328"/>
-            <a:ext cx="3657600" cy="548640"/>
+            <a:off x="777240" y="4526280"/>
+            <a:ext cx="1737360" cy="640080"/>
           </a:xfrm>
           <a:prstGeom prst="roundRect">
             <a:avLst>
-              <a:gd name="adj" fmla="val 50000"/>
+              <a:gd name="adj" fmla="val 42857"/>
             </a:avLst>
           </a:prstGeom>
           <a:solidFill>
-            <a:srgbClr val="02C39A">
-              <a:alpha val="15000"/>
+            <a:srgbClr val="028090">
+              <a:alpha val="12000"/>
             </a:srgbClr>
           </a:solidFill>
           <a:ln/>
@@ -3262,14 +3536,14 @@
       </p:sp>
       <p:sp>
         <p:nvSpPr>
-          <p:cNvPr id="16" name="Text 14"/>
-          <p:cNvSpPr txBox="1"/>
-          <p:nvPr/>
-        </p:nvSpPr>
-        <p:spPr>
-          <a:xfrm>
-            <a:off x="7772400" y="4910328"/>
-            <a:ext cx="3657600" cy="548640"/>
+          <p:cNvPr id="14" name="Text 12"/>
+          <p:cNvSpPr txBox="1"/>
+          <p:nvPr/>
+        </p:nvSpPr>
+        <p:spPr>
+          <a:xfrm>
+            <a:off x="777240" y="4526280"/>
+            <a:ext cx="1737360" cy="640080"/>
           </a:xfrm>
           <a:prstGeom prst="rect">
             <a:avLst/>
@@ -3285,46 +3559,7 @@
               <a:buNone/>
             </a:pPr>
             <a:r>
-              <a:rPr lang="en-US" sz="1200" b="1" dirty="0">
-                <a:solidFill>
-                  <a:srgbClr val="047857"/>
-                </a:solidFill>
-                <a:latin typeface="Pretendard" pitchFamily="34" charset="0"/>
-                <a:ea typeface="Pretendard" pitchFamily="34" charset="-122"/>
-                <a:cs typeface="Pretendard" pitchFamily="34" charset="-120"/>
-              </a:rPr>
-              <a:t>완충 제형이 주사통·발현시간 유의하게 개선</a:t>
-            </a:r>
-            <a:endParaRPr lang="en-US" sz="1200" dirty="0"/>
-          </a:p>
-        </p:txBody>
-      </p:sp>
-      <p:sp>
-        <p:nvSpPr>
-          <p:cNvPr id="17" name="Text 15"/>
-          <p:cNvSpPr txBox="1"/>
-          <p:nvPr/>
-        </p:nvSpPr>
-        <p:spPr>
-          <a:xfrm>
-            <a:off x="548640" y="5943600"/>
-            <a:ext cx="11064240" cy="640080"/>
-          </a:xfrm>
-          <a:prstGeom prst="rect">
-            <a:avLst/>
-          </a:prstGeom>
-          <a:noFill/>
-          <a:ln/>
-        </p:spPr>
-        <p:txBody>
-          <a:bodyPr wrap="square" lIns="0" tIns="0" rIns="0" bIns="0" rtlCol="0" anchor="ctr"/>
-          <a:lstStyle/>
-          <a:p>
-            <a:pPr indent="0" marL="0">
-              <a:buNone/>
-            </a:pPr>
-            <a:r>
-              <a:rPr lang="en-US" sz="1300" i="1" dirty="0">
+              <a:rPr lang="en-US" sz="1300" b="1" dirty="0">
                 <a:solidFill>
                   <a:srgbClr val="028090"/>
                 </a:solidFill>
@@ -3332,7 +3567,7 @@
                 <a:ea typeface="Pretendard" pitchFamily="34" charset="-122"/>
                 <a:cs typeface="Pretendard" pitchFamily="34" charset="-120"/>
               </a:rPr>
-              <a:t>→ 연령대·시술 종류에 따라 결과가 불일치 — 한국인 성인·제3대구치 발치 상황에 특화된 head-to-head 비교 데이터는 부재</a:t>
+              <a:t>제형 농도</a:t>
             </a:r>
             <a:endParaRPr lang="en-US" sz="1300" dirty="0"/>
           </a:p>
@@ -3340,7 +3575,190 @@
       </p:sp>
       <p:sp>
         <p:nvSpPr>
+          <p:cNvPr id="15" name="Text 13"/>
+          <p:cNvSpPr txBox="1"/>
+          <p:nvPr/>
+        </p:nvSpPr>
+        <p:spPr>
+          <a:xfrm>
+            <a:off x="2743200" y="4389120"/>
+            <a:ext cx="8595360" cy="914400"/>
+          </a:xfrm>
+          <a:prstGeom prst="rect">
+            <a:avLst/>
+          </a:prstGeom>
+          <a:noFill/>
+          <a:ln/>
+        </p:spPr>
+        <p:txBody>
+          <a:bodyPr wrap="square" lIns="0" tIns="0" rIns="0" bIns="0" rtlCol="0" anchor="ctr"/>
+          <a:lstStyle/>
+          <a:p>
+            <a:pPr indent="0" marL="0">
+              <a:lnSpc>
+                <a:spcPct val="120000"/>
+              </a:lnSpc>
+              <a:buNone/>
+            </a:pPr>
+            <a:r>
+              <a:rPr lang="en-US" sz="1250" dirty="0">
+                <a:solidFill>
+                  <a:srgbClr val="0B2E33"/>
+                </a:solidFill>
+                <a:latin typeface="Pretendard" pitchFamily="34" charset="0"/>
+                <a:ea typeface="Pretendard" pitchFamily="34" charset="-122"/>
+                <a:cs typeface="Pretendard" pitchFamily="34" charset="-120"/>
+              </a:rPr>
+              <a:t>이번 연구는 4% 아티카인 vs 2% 리도카인 비교 — 농도가 2배 높은 만큼 단위시간당 확산 가능한 분자 수 자체가 많아짐(순수 약리작용 차이와 분리해서 봐야 할 교란요인)</a:t>
+            </a:r>
+            <a:endParaRPr lang="en-US" sz="1250" dirty="0"/>
+          </a:p>
+        </p:txBody>
+      </p:sp>
+      <p:sp>
+        <p:nvSpPr>
+          <p:cNvPr id="16" name="Shape 14"/>
+          <p:cNvSpPr/>
+          <p:nvPr/>
+        </p:nvSpPr>
+        <p:spPr>
+          <a:xfrm>
+            <a:off x="548640" y="5532120"/>
+            <a:ext cx="11064240" cy="1097280"/>
+          </a:xfrm>
+          <a:prstGeom prst="roundRect">
+            <a:avLst>
+              <a:gd name="adj" fmla="val 6667"/>
+            </a:avLst>
+          </a:prstGeom>
+          <a:solidFill>
+            <a:srgbClr val="FFFFFF"/>
+          </a:solidFill>
+          <a:ln w="9525">
+            <a:solidFill>
+              <a:srgbClr val="00A896">
+                <a:alpha val="30000"/>
+              </a:srgbClr>
+            </a:solidFill>
+            <a:prstDash val="solid"/>
+          </a:ln>
+          <a:effectLst>
+            <a:outerShdw sx="100000" sy="100000" kx="0" ky="0" algn="bl" rotWithShape="0" blurRad="63500" dist="25400" dir="5400000">
+              <a:srgbClr val="000000">
+                <a:alpha val="10000"/>
+              </a:srgbClr>
+            </a:outerShdw>
+          </a:effectLst>
+        </p:spPr>
+      </p:sp>
+      <p:sp>
+        <p:nvSpPr>
+          <p:cNvPr id="17" name="Shape 15"/>
+          <p:cNvSpPr/>
+          <p:nvPr/>
+        </p:nvSpPr>
+        <p:spPr>
+          <a:xfrm>
+            <a:off x="777240" y="5760720"/>
+            <a:ext cx="1737360" cy="640080"/>
+          </a:xfrm>
+          <a:prstGeom prst="roundRect">
+            <a:avLst>
+              <a:gd name="adj" fmla="val 42857"/>
+            </a:avLst>
+          </a:prstGeom>
+          <a:solidFill>
+            <a:srgbClr val="028090">
+              <a:alpha val="12000"/>
+            </a:srgbClr>
+          </a:solidFill>
+          <a:ln/>
+        </p:spPr>
+      </p:sp>
+      <p:sp>
+        <p:nvSpPr>
           <p:cNvPr id="18" name="Text 16"/>
+          <p:cNvSpPr txBox="1"/>
+          <p:nvPr/>
+        </p:nvSpPr>
+        <p:spPr>
+          <a:xfrm>
+            <a:off x="777240" y="5760720"/>
+            <a:ext cx="1737360" cy="640080"/>
+          </a:xfrm>
+          <a:prstGeom prst="rect">
+            <a:avLst/>
+          </a:prstGeom>
+          <a:noFill/>
+          <a:ln/>
+        </p:spPr>
+        <p:txBody>
+          <a:bodyPr wrap="square" lIns="0" tIns="0" rIns="0" bIns="0" rtlCol="0" anchor="ctr"/>
+          <a:lstStyle/>
+          <a:p>
+            <a:pPr algn="ctr" indent="0" marL="0">
+              <a:buNone/>
+            </a:pPr>
+            <a:r>
+              <a:rPr lang="en-US" sz="1300" b="1" dirty="0">
+                <a:solidFill>
+                  <a:srgbClr val="028090"/>
+                </a:solidFill>
+                <a:latin typeface="Pretendard" pitchFamily="34" charset="0"/>
+                <a:ea typeface="Pretendard" pitchFamily="34" charset="-122"/>
+                <a:cs typeface="Pretendard" pitchFamily="34" charset="-120"/>
+              </a:rPr>
+              <a:t>단백결합률</a:t>
+            </a:r>
+            <a:endParaRPr lang="en-US" sz="1300" dirty="0"/>
+          </a:p>
+        </p:txBody>
+      </p:sp>
+      <p:sp>
+        <p:nvSpPr>
+          <p:cNvPr id="19" name="Text 17"/>
+          <p:cNvSpPr txBox="1"/>
+          <p:nvPr/>
+        </p:nvSpPr>
+        <p:spPr>
+          <a:xfrm>
+            <a:off x="2743200" y="5623560"/>
+            <a:ext cx="8595360" cy="914400"/>
+          </a:xfrm>
+          <a:prstGeom prst="rect">
+            <a:avLst/>
+          </a:prstGeom>
+          <a:noFill/>
+          <a:ln/>
+        </p:spPr>
+        <p:txBody>
+          <a:bodyPr wrap="square" lIns="0" tIns="0" rIns="0" bIns="0" rtlCol="0" anchor="ctr"/>
+          <a:lstStyle/>
+          <a:p>
+            <a:pPr indent="0" marL="0">
+              <a:lnSpc>
+                <a:spcPct val="120000"/>
+              </a:lnSpc>
+              <a:buNone/>
+            </a:pPr>
+            <a:r>
+              <a:rPr lang="en-US" sz="1250" dirty="0">
+                <a:solidFill>
+                  <a:srgbClr val="0B2E33"/>
+                </a:solidFill>
+                <a:latin typeface="Pretendard" pitchFamily="34" charset="0"/>
+                <a:ea typeface="Pretendard" pitchFamily="34" charset="-122"/>
+                <a:cs typeface="Pretendard" pitchFamily="34" charset="-120"/>
+              </a:rPr>
+              <a:t>아티카인 약 95% vs 리도카인 약 65% — 단백결합률이 높을수록 지속시간이 길어지는 경향과 관련(발현시간과는 별개 지표)</a:t>
+            </a:r>
+            <a:endParaRPr lang="en-US" sz="1250" dirty="0"/>
+          </a:p>
+        </p:txBody>
+      </p:sp>
+      <p:sp>
+        <p:nvSpPr>
+          <p:cNvPr id="20" name="Text 18"/>
           <p:cNvSpPr txBox="1"/>
           <p:nvPr/>
         </p:nvSpPr>
@@ -3388,6 +3806,626 @@
 <file path=ppt/slides/slide4.xml><?xml version="1.0" encoding="utf-8"?>
 <p:sld xmlns:a="http://schemas.openxmlformats.org/drawingml/2006/main" xmlns:r="http://schemas.openxmlformats.org/officeDocument/2006/relationships" xmlns:p="http://schemas.openxmlformats.org/presentationml/2006/main">
   <p:cSld name="Slide 4">
+    <p:bg>
+      <p:bgPr>
+        <a:solidFill>
+          <a:srgbClr val="F7FBFB"/>
+        </a:solidFill>
+      </p:bgPr>
+    </p:bg>
+    <p:spTree>
+      <p:nvGrpSpPr>
+        <p:cNvPr id="1" name=""/>
+        <p:cNvGrpSpPr/>
+        <p:nvPr/>
+      </p:nvGrpSpPr>
+      <p:grpSpPr>
+        <a:xfrm>
+          <a:off x="0" y="0"/>
+          <a:ext cx="0" cy="0"/>
+          <a:chOff x="0" y="0"/>
+          <a:chExt cx="0" cy="0"/>
+        </a:xfrm>
+      </p:grpSpPr>
+      <p:sp>
+        <p:nvSpPr>
+          <p:cNvPr id="2" name="Text 0"/>
+          <p:cNvSpPr txBox="1"/>
+          <p:nvPr/>
+        </p:nvSpPr>
+        <p:spPr>
+          <a:xfrm>
+            <a:off x="548640" y="411480"/>
+            <a:ext cx="9144000" cy="365760"/>
+          </a:xfrm>
+          <a:prstGeom prst="rect">
+            <a:avLst/>
+          </a:prstGeom>
+          <a:noFill/>
+          <a:ln/>
+        </p:spPr>
+        <p:txBody>
+          <a:bodyPr wrap="square" lIns="0" tIns="0" rIns="0" bIns="0" rtlCol="0" anchor="ctr"/>
+          <a:lstStyle/>
+          <a:p>
+            <a:pPr indent="0" marL="0">
+              <a:buNone/>
+            </a:pPr>
+            <a:r>
+              <a:rPr lang="en-US" sz="1300" b="1" spc="100" kern="0" dirty="0">
+                <a:solidFill>
+                  <a:srgbClr val="00A896"/>
+                </a:solidFill>
+                <a:latin typeface="Pretendard" pitchFamily="34" charset="0"/>
+                <a:ea typeface="Pretendard" pitchFamily="34" charset="-122"/>
+                <a:cs typeface="Pretendard" pitchFamily="34" charset="-120"/>
+              </a:rPr>
+              <a:t>EVIDENCE GAP</a:t>
+            </a:r>
+            <a:endParaRPr lang="en-US" sz="1300" dirty="0"/>
+          </a:p>
+        </p:txBody>
+      </p:sp>
+      <p:sp>
+        <p:nvSpPr>
+          <p:cNvPr id="3" name="Text 1"/>
+          <p:cNvSpPr txBox="1"/>
+          <p:nvPr/>
+        </p:nvSpPr>
+        <p:spPr>
+          <a:xfrm>
+            <a:off x="548640" y="749808"/>
+            <a:ext cx="11064240" cy="914400"/>
+          </a:xfrm>
+          <a:prstGeom prst="rect">
+            <a:avLst/>
+          </a:prstGeom>
+          <a:noFill/>
+          <a:ln/>
+        </p:spPr>
+        <p:txBody>
+          <a:bodyPr wrap="square" lIns="0" tIns="0" rIns="0" bIns="0" rtlCol="0" anchor="ctr"/>
+          <a:lstStyle/>
+          <a:p>
+            <a:pPr indent="0" marL="0">
+              <a:buNone/>
+            </a:pPr>
+            <a:r>
+              <a:rPr lang="en-US" sz="3000" b="1" dirty="0">
+                <a:solidFill>
+                  <a:srgbClr val="0B2E33"/>
+                </a:solidFill>
+                <a:latin typeface="Wanted Sans" pitchFamily="34" charset="0"/>
+                <a:ea typeface="Wanted Sans" pitchFamily="34" charset="-122"/>
+                <a:cs typeface="Wanted Sans" pitchFamily="34" charset="-120"/>
+              </a:rPr>
+              <a:t>기존 근거의 공백</a:t>
+            </a:r>
+            <a:endParaRPr lang="en-US" sz="3000" dirty="0"/>
+          </a:p>
+        </p:txBody>
+      </p:sp>
+      <p:sp>
+        <p:nvSpPr>
+          <p:cNvPr id="4" name="Text 2"/>
+          <p:cNvSpPr txBox="1"/>
+          <p:nvPr/>
+        </p:nvSpPr>
+        <p:spPr>
+          <a:xfrm>
+            <a:off x="548640" y="1783080"/>
+            <a:ext cx="10972800" cy="457200"/>
+          </a:xfrm>
+          <a:prstGeom prst="rect">
+            <a:avLst/>
+          </a:prstGeom>
+          <a:noFill/>
+          <a:ln/>
+        </p:spPr>
+        <p:txBody>
+          <a:bodyPr wrap="square" lIns="0" tIns="0" rIns="0" bIns="0" rtlCol="0" anchor="ctr"/>
+          <a:lstStyle/>
+          <a:p>
+            <a:pPr indent="0" marL="0">
+              <a:buNone/>
+            </a:pPr>
+            <a:r>
+              <a:rPr lang="en-US" sz="1600" b="1" dirty="0">
+                <a:solidFill>
+                  <a:srgbClr val="0B2E33"/>
+                </a:solidFill>
+                <a:latin typeface="Pretendard" pitchFamily="34" charset="0"/>
+                <a:ea typeface="Pretendard" pitchFamily="34" charset="-122"/>
+                <a:cs typeface="Pretendard" pitchFamily="34" charset="-120"/>
+              </a:rPr>
+              <a:t>완충(Buffered) 제형 효과는 연구마다 결과가 엇갈림</a:t>
+            </a:r>
+            <a:endParaRPr lang="en-US" sz="1600" dirty="0"/>
+          </a:p>
+        </p:txBody>
+      </p:sp>
+      <p:sp>
+        <p:nvSpPr>
+          <p:cNvPr id="5" name="Shape 3"/>
+          <p:cNvSpPr/>
+          <p:nvPr/>
+        </p:nvSpPr>
+        <p:spPr>
+          <a:xfrm>
+            <a:off x="548640" y="2423160"/>
+            <a:ext cx="11064240" cy="960120"/>
+          </a:xfrm>
+          <a:prstGeom prst="roundRect">
+            <a:avLst>
+              <a:gd name="adj" fmla="val 5714"/>
+            </a:avLst>
+          </a:prstGeom>
+          <a:solidFill>
+            <a:srgbClr val="FFFFFF"/>
+          </a:solidFill>
+          <a:ln/>
+          <a:effectLst>
+            <a:outerShdw sx="100000" sy="100000" kx="0" ky="0" algn="bl" rotWithShape="0" blurRad="63500" dist="25400" dir="5400000">
+              <a:srgbClr val="000000">
+                <a:alpha val="10000"/>
+              </a:srgbClr>
+            </a:outerShdw>
+          </a:effectLst>
+        </p:spPr>
+      </p:sp>
+      <p:sp>
+        <p:nvSpPr>
+          <p:cNvPr id="6" name="Text 4"/>
+          <p:cNvSpPr txBox="1"/>
+          <p:nvPr/>
+        </p:nvSpPr>
+        <p:spPr>
+          <a:xfrm>
+            <a:off x="868680" y="2532888"/>
+            <a:ext cx="6675120" cy="731520"/>
+          </a:xfrm>
+          <a:prstGeom prst="rect">
+            <a:avLst/>
+          </a:prstGeom>
+          <a:noFill/>
+          <a:ln/>
+        </p:spPr>
+        <p:txBody>
+          <a:bodyPr wrap="square" lIns="0" tIns="0" rIns="0" bIns="0" rtlCol="0" anchor="ctr"/>
+          <a:lstStyle/>
+          <a:p>
+            <a:pPr indent="0" marL="0">
+              <a:buNone/>
+            </a:pPr>
+            <a:r>
+              <a:rPr lang="en-US" sz="1350" b="1" dirty="0">
+                <a:solidFill>
+                  <a:srgbClr val="0B2E33"/>
+                </a:solidFill>
+                <a:latin typeface="Pretendard" pitchFamily="34" charset="0"/>
+                <a:ea typeface="Pretendard" pitchFamily="34" charset="-122"/>
+                <a:cs typeface="Pretendard" pitchFamily="34" charset="-120"/>
+              </a:rPr>
+              <a:t>성인 · 제3대구치 발치 (2024, Springer)</a:t>
+            </a:r>
+            <a:endParaRPr lang="en-US" sz="1350" dirty="0"/>
+          </a:p>
+        </p:txBody>
+      </p:sp>
+      <p:sp>
+        <p:nvSpPr>
+          <p:cNvPr id="7" name="Shape 5"/>
+          <p:cNvSpPr/>
+          <p:nvPr/>
+        </p:nvSpPr>
+        <p:spPr>
+          <a:xfrm>
+            <a:off x="7772400" y="2624328"/>
+            <a:ext cx="3657600" cy="548640"/>
+          </a:xfrm>
+          <a:prstGeom prst="roundRect">
+            <a:avLst>
+              <a:gd name="adj" fmla="val 50000"/>
+            </a:avLst>
+          </a:prstGeom>
+          <a:solidFill>
+            <a:srgbClr val="02C39A">
+              <a:alpha val="15000"/>
+            </a:srgbClr>
+          </a:solidFill>
+          <a:ln/>
+        </p:spPr>
+      </p:sp>
+      <p:sp>
+        <p:nvSpPr>
+          <p:cNvPr id="8" name="Text 6"/>
+          <p:cNvSpPr txBox="1"/>
+          <p:nvPr/>
+        </p:nvSpPr>
+        <p:spPr>
+          <a:xfrm>
+            <a:off x="7772400" y="2624328"/>
+            <a:ext cx="3657600" cy="548640"/>
+          </a:xfrm>
+          <a:prstGeom prst="rect">
+            <a:avLst/>
+          </a:prstGeom>
+          <a:noFill/>
+          <a:ln/>
+        </p:spPr>
+        <p:txBody>
+          <a:bodyPr wrap="square" lIns="0" tIns="0" rIns="0" bIns="0" rtlCol="0" anchor="ctr"/>
+          <a:lstStyle/>
+          <a:p>
+            <a:pPr algn="ctr" indent="0" marL="0">
+              <a:buNone/>
+            </a:pPr>
+            <a:r>
+              <a:rPr lang="en-US" sz="1200" b="1" dirty="0">
+                <a:solidFill>
+                  <a:srgbClr val="047857"/>
+                </a:solidFill>
+                <a:latin typeface="Pretendard" pitchFamily="34" charset="0"/>
+                <a:ea typeface="Pretendard" pitchFamily="34" charset="-122"/>
+                <a:cs typeface="Pretendard" pitchFamily="34" charset="-120"/>
+              </a:rPr>
+              <a:t>아티카인 발현시간 유의하게 단축</a:t>
+            </a:r>
+            <a:endParaRPr lang="en-US" sz="1200" dirty="0"/>
+          </a:p>
+        </p:txBody>
+      </p:sp>
+      <p:sp>
+        <p:nvSpPr>
+          <p:cNvPr id="9" name="Shape 7"/>
+          <p:cNvSpPr/>
+          <p:nvPr/>
+        </p:nvSpPr>
+        <p:spPr>
+          <a:xfrm>
+            <a:off x="548640" y="3566160"/>
+            <a:ext cx="11064240" cy="960120"/>
+          </a:xfrm>
+          <a:prstGeom prst="roundRect">
+            <a:avLst>
+              <a:gd name="adj" fmla="val 5714"/>
+            </a:avLst>
+          </a:prstGeom>
+          <a:solidFill>
+            <a:srgbClr val="FFFFFF"/>
+          </a:solidFill>
+          <a:ln/>
+          <a:effectLst>
+            <a:outerShdw sx="100000" sy="100000" kx="0" ky="0" algn="bl" rotWithShape="0" blurRad="63500" dist="25400" dir="5400000">
+              <a:srgbClr val="000000">
+                <a:alpha val="10000"/>
+              </a:srgbClr>
+            </a:outerShdw>
+          </a:effectLst>
+        </p:spPr>
+      </p:sp>
+      <p:sp>
+        <p:nvSpPr>
+          <p:cNvPr id="10" name="Text 8"/>
+          <p:cNvSpPr txBox="1"/>
+          <p:nvPr/>
+        </p:nvSpPr>
+        <p:spPr>
+          <a:xfrm>
+            <a:off x="868680" y="3675888"/>
+            <a:ext cx="6675120" cy="731520"/>
+          </a:xfrm>
+          <a:prstGeom prst="rect">
+            <a:avLst/>
+          </a:prstGeom>
+          <a:noFill/>
+          <a:ln/>
+        </p:spPr>
+        <p:txBody>
+          <a:bodyPr wrap="square" lIns="0" tIns="0" rIns="0" bIns="0" rtlCol="0" anchor="ctr"/>
+          <a:lstStyle/>
+          <a:p>
+            <a:pPr indent="0" marL="0">
+              <a:buNone/>
+            </a:pPr>
+            <a:r>
+              <a:rPr lang="en-US" sz="1350" b="1" dirty="0">
+                <a:solidFill>
+                  <a:srgbClr val="0B2E33"/>
+                </a:solidFill>
+                <a:latin typeface="Pretendard" pitchFamily="34" charset="0"/>
+                <a:ea typeface="Pretendard" pitchFamily="34" charset="-122"/>
+                <a:cs typeface="Pretendard" pitchFamily="34" charset="-120"/>
+              </a:rPr>
+              <a:t>성인 · 발치 시 완충 리도카인 (2024, JOMS/Cincinnati)</a:t>
+            </a:r>
+            <a:endParaRPr lang="en-US" sz="1350" dirty="0"/>
+          </a:p>
+        </p:txBody>
+      </p:sp>
+      <p:sp>
+        <p:nvSpPr>
+          <p:cNvPr id="11" name="Shape 9"/>
+          <p:cNvSpPr/>
+          <p:nvPr/>
+        </p:nvSpPr>
+        <p:spPr>
+          <a:xfrm>
+            <a:off x="7772400" y="3767328"/>
+            <a:ext cx="3657600" cy="548640"/>
+          </a:xfrm>
+          <a:prstGeom prst="roundRect">
+            <a:avLst>
+              <a:gd name="adj" fmla="val 50000"/>
+            </a:avLst>
+          </a:prstGeom>
+          <a:solidFill>
+            <a:srgbClr val="5B7A7E">
+              <a:alpha val="15000"/>
+            </a:srgbClr>
+          </a:solidFill>
+          <a:ln/>
+        </p:spPr>
+      </p:sp>
+      <p:sp>
+        <p:nvSpPr>
+          <p:cNvPr id="12" name="Text 10"/>
+          <p:cNvSpPr txBox="1"/>
+          <p:nvPr/>
+        </p:nvSpPr>
+        <p:spPr>
+          <a:xfrm>
+            <a:off x="7772400" y="3767328"/>
+            <a:ext cx="3657600" cy="548640"/>
+          </a:xfrm>
+          <a:prstGeom prst="rect">
+            <a:avLst/>
+          </a:prstGeom>
+          <a:noFill/>
+          <a:ln/>
+        </p:spPr>
+        <p:txBody>
+          <a:bodyPr wrap="square" lIns="0" tIns="0" rIns="0" bIns="0" rtlCol="0" anchor="ctr"/>
+          <a:lstStyle/>
+          <a:p>
+            <a:pPr algn="ctr" indent="0" marL="0">
+              <a:buNone/>
+            </a:pPr>
+            <a:r>
+              <a:rPr lang="en-US" sz="1200" b="1" dirty="0">
+                <a:solidFill>
+                  <a:srgbClr val="5B7A7E"/>
+                </a:solidFill>
+                <a:latin typeface="Pretendard" pitchFamily="34" charset="0"/>
+                <a:ea typeface="Pretendard" pitchFamily="34" charset="-122"/>
+                <a:cs typeface="Pretendard" pitchFamily="34" charset="-120"/>
+              </a:rPr>
+              <a:t>완충 처리 효과 통계적 유의성 없음</a:t>
+            </a:r>
+            <a:endParaRPr lang="en-US" sz="1200" dirty="0"/>
+          </a:p>
+        </p:txBody>
+      </p:sp>
+      <p:sp>
+        <p:nvSpPr>
+          <p:cNvPr id="13" name="Shape 11"/>
+          <p:cNvSpPr/>
+          <p:nvPr/>
+        </p:nvSpPr>
+        <p:spPr>
+          <a:xfrm>
+            <a:off x="548640" y="4709160"/>
+            <a:ext cx="11064240" cy="960120"/>
+          </a:xfrm>
+          <a:prstGeom prst="roundRect">
+            <a:avLst>
+              <a:gd name="adj" fmla="val 5714"/>
+            </a:avLst>
+          </a:prstGeom>
+          <a:solidFill>
+            <a:srgbClr val="FFFFFF"/>
+          </a:solidFill>
+          <a:ln/>
+          <a:effectLst>
+            <a:outerShdw sx="100000" sy="100000" kx="0" ky="0" algn="bl" rotWithShape="0" blurRad="63500" dist="25400" dir="5400000">
+              <a:srgbClr val="000000">
+                <a:alpha val="10000"/>
+              </a:srgbClr>
+            </a:outerShdw>
+          </a:effectLst>
+        </p:spPr>
+      </p:sp>
+      <p:sp>
+        <p:nvSpPr>
+          <p:cNvPr id="14" name="Text 12"/>
+          <p:cNvSpPr txBox="1"/>
+          <p:nvPr/>
+        </p:nvSpPr>
+        <p:spPr>
+          <a:xfrm>
+            <a:off x="868680" y="4818888"/>
+            <a:ext cx="6675120" cy="731520"/>
+          </a:xfrm>
+          <a:prstGeom prst="rect">
+            <a:avLst/>
+          </a:prstGeom>
+          <a:noFill/>
+          <a:ln/>
+        </p:spPr>
+        <p:txBody>
+          <a:bodyPr wrap="square" lIns="0" tIns="0" rIns="0" bIns="0" rtlCol="0" anchor="ctr"/>
+          <a:lstStyle/>
+          <a:p>
+            <a:pPr indent="0" marL="0">
+              <a:buNone/>
+            </a:pPr>
+            <a:r>
+              <a:rPr lang="en-US" sz="1350" b="1" dirty="0">
+                <a:solidFill>
+                  <a:srgbClr val="0B2E33"/>
+                </a:solidFill>
+                <a:latin typeface="Pretendard" pitchFamily="34" charset="0"/>
+                <a:ea typeface="Pretendard" pitchFamily="34" charset="-122"/>
+                <a:cs typeface="Pretendard" pitchFamily="34" charset="-120"/>
+              </a:rPr>
+              <a:t>소아 · 침윤/전달마취 (2019, 2024)</a:t>
+            </a:r>
+            <a:endParaRPr lang="en-US" sz="1350" dirty="0"/>
+          </a:p>
+        </p:txBody>
+      </p:sp>
+      <p:sp>
+        <p:nvSpPr>
+          <p:cNvPr id="15" name="Shape 13"/>
+          <p:cNvSpPr/>
+          <p:nvPr/>
+        </p:nvSpPr>
+        <p:spPr>
+          <a:xfrm>
+            <a:off x="7772400" y="4910328"/>
+            <a:ext cx="3657600" cy="548640"/>
+          </a:xfrm>
+          <a:prstGeom prst="roundRect">
+            <a:avLst>
+              <a:gd name="adj" fmla="val 50000"/>
+            </a:avLst>
+          </a:prstGeom>
+          <a:solidFill>
+            <a:srgbClr val="02C39A">
+              <a:alpha val="15000"/>
+            </a:srgbClr>
+          </a:solidFill>
+          <a:ln/>
+        </p:spPr>
+      </p:sp>
+      <p:sp>
+        <p:nvSpPr>
+          <p:cNvPr id="16" name="Text 14"/>
+          <p:cNvSpPr txBox="1"/>
+          <p:nvPr/>
+        </p:nvSpPr>
+        <p:spPr>
+          <a:xfrm>
+            <a:off x="7772400" y="4910328"/>
+            <a:ext cx="3657600" cy="548640"/>
+          </a:xfrm>
+          <a:prstGeom prst="rect">
+            <a:avLst/>
+          </a:prstGeom>
+          <a:noFill/>
+          <a:ln/>
+        </p:spPr>
+        <p:txBody>
+          <a:bodyPr wrap="square" lIns="0" tIns="0" rIns="0" bIns="0" rtlCol="0" anchor="ctr"/>
+          <a:lstStyle/>
+          <a:p>
+            <a:pPr algn="ctr" indent="0" marL="0">
+              <a:buNone/>
+            </a:pPr>
+            <a:r>
+              <a:rPr lang="en-US" sz="1200" b="1" dirty="0">
+                <a:solidFill>
+                  <a:srgbClr val="047857"/>
+                </a:solidFill>
+                <a:latin typeface="Pretendard" pitchFamily="34" charset="0"/>
+                <a:ea typeface="Pretendard" pitchFamily="34" charset="-122"/>
+                <a:cs typeface="Pretendard" pitchFamily="34" charset="-120"/>
+              </a:rPr>
+              <a:t>완충 제형이 주사통·발현시간 유의하게 개선</a:t>
+            </a:r>
+            <a:endParaRPr lang="en-US" sz="1200" dirty="0"/>
+          </a:p>
+        </p:txBody>
+      </p:sp>
+      <p:sp>
+        <p:nvSpPr>
+          <p:cNvPr id="17" name="Text 15"/>
+          <p:cNvSpPr txBox="1"/>
+          <p:nvPr/>
+        </p:nvSpPr>
+        <p:spPr>
+          <a:xfrm>
+            <a:off x="548640" y="5943600"/>
+            <a:ext cx="11064240" cy="640080"/>
+          </a:xfrm>
+          <a:prstGeom prst="rect">
+            <a:avLst/>
+          </a:prstGeom>
+          <a:noFill/>
+          <a:ln/>
+        </p:spPr>
+        <p:txBody>
+          <a:bodyPr wrap="square" lIns="0" tIns="0" rIns="0" bIns="0" rtlCol="0" anchor="ctr"/>
+          <a:lstStyle/>
+          <a:p>
+            <a:pPr indent="0" marL="0">
+              <a:buNone/>
+            </a:pPr>
+            <a:r>
+              <a:rPr lang="en-US" sz="1300" i="1" dirty="0">
+                <a:solidFill>
+                  <a:srgbClr val="028090"/>
+                </a:solidFill>
+                <a:latin typeface="Pretendard" pitchFamily="34" charset="0"/>
+                <a:ea typeface="Pretendard" pitchFamily="34" charset="-122"/>
+                <a:cs typeface="Pretendard" pitchFamily="34" charset="-120"/>
+              </a:rPr>
+              <a:t>→ 연령대·시술 종류에 따라 결과가 불일치 — 한국인 성인·제3대구치 발치 상황에 특화된 head-to-head 비교 데이터는 부재</a:t>
+            </a:r>
+            <a:endParaRPr lang="en-US" sz="1300" dirty="0"/>
+          </a:p>
+        </p:txBody>
+      </p:sp>
+      <p:sp>
+        <p:nvSpPr>
+          <p:cNvPr id="18" name="Text 16"/>
+          <p:cNvSpPr txBox="1"/>
+          <p:nvPr/>
+        </p:nvSpPr>
+        <p:spPr>
+          <a:xfrm>
+            <a:off x="11365992" y="6355080"/>
+            <a:ext cx="457200" cy="320040"/>
+          </a:xfrm>
+          <a:prstGeom prst="rect">
+            <a:avLst/>
+          </a:prstGeom>
+          <a:noFill/>
+          <a:ln/>
+        </p:spPr>
+        <p:txBody>
+          <a:bodyPr wrap="square" lIns="0" tIns="0" rIns="0" bIns="0" rtlCol="0" anchor="ctr"/>
+          <a:lstStyle/>
+          <a:p>
+            <a:pPr algn="r" indent="0" marL="0">
+              <a:buNone/>
+            </a:pPr>
+            <a:r>
+              <a:rPr lang="en-US" sz="1100" dirty="0">
+                <a:solidFill>
+                  <a:srgbClr val="5B7A7E"/>
+                </a:solidFill>
+                <a:latin typeface="Pretendard" pitchFamily="34" charset="0"/>
+                <a:ea typeface="Pretendard" pitchFamily="34" charset="-122"/>
+                <a:cs typeface="Pretendard" pitchFamily="34" charset="-120"/>
+              </a:rPr>
+              <a:t>4</a:t>
+            </a:r>
+            <a:endParaRPr lang="en-US" sz="1100" dirty="0"/>
+          </a:p>
+        </p:txBody>
+      </p:sp>
+    </p:spTree>
+  </p:cSld>
+  <p:clrMapOvr>
+    <a:masterClrMapping/>
+  </p:clrMapOvr>
+</p:sld>
+</file>
+
+<file path=ppt/slides/slide5.xml><?xml version="1.0" encoding="utf-8"?>
+<p:sld xmlns:a="http://schemas.openxmlformats.org/drawingml/2006/main" xmlns:r="http://schemas.openxmlformats.org/officeDocument/2006/relationships" xmlns:p="http://schemas.openxmlformats.org/presentationml/2006/main">
+  <p:cSld name="Slide 5">
     <p:bg>
       <p:bgPr>
         <a:solidFill>
@@ -3698,697 +4736,6 @@
       <p:sp>
         <p:nvSpPr>
           <p:cNvPr id="10" name="Text 8"/>
-          <p:cNvSpPr txBox="1"/>
-          <p:nvPr/>
-        </p:nvSpPr>
-        <p:spPr>
-          <a:xfrm>
-            <a:off x="11365992" y="6355080"/>
-            <a:ext cx="457200" cy="320040"/>
-          </a:xfrm>
-          <a:prstGeom prst="rect">
-            <a:avLst/>
-          </a:prstGeom>
-          <a:noFill/>
-          <a:ln/>
-        </p:spPr>
-        <p:txBody>
-          <a:bodyPr wrap="square" lIns="0" tIns="0" rIns="0" bIns="0" rtlCol="0" anchor="ctr"/>
-          <a:lstStyle/>
-          <a:p>
-            <a:pPr algn="r" indent="0" marL="0">
-              <a:buNone/>
-            </a:pPr>
-            <a:r>
-              <a:rPr lang="en-US" sz="1100" dirty="0">
-                <a:solidFill>
-                  <a:srgbClr val="5B7A7E"/>
-                </a:solidFill>
-                <a:latin typeface="Pretendard" pitchFamily="34" charset="0"/>
-                <a:ea typeface="Pretendard" pitchFamily="34" charset="-122"/>
-                <a:cs typeface="Pretendard" pitchFamily="34" charset="-120"/>
-              </a:rPr>
-              <a:t>4</a:t>
-            </a:r>
-            <a:endParaRPr lang="en-US" sz="1100" dirty="0"/>
-          </a:p>
-        </p:txBody>
-      </p:sp>
-    </p:spTree>
-  </p:cSld>
-  <p:clrMapOvr>
-    <a:masterClrMapping/>
-  </p:clrMapOvr>
-</p:sld>
-</file>
-
-<file path=ppt/slides/slide5.xml><?xml version="1.0" encoding="utf-8"?>
-<p:sld xmlns:a="http://schemas.openxmlformats.org/drawingml/2006/main" xmlns:r="http://schemas.openxmlformats.org/officeDocument/2006/relationships" xmlns:p="http://schemas.openxmlformats.org/presentationml/2006/main">
-  <p:cSld name="Slide 5">
-    <p:bg>
-      <p:bgPr>
-        <a:solidFill>
-          <a:srgbClr val="F7FBFB"/>
-        </a:solidFill>
-      </p:bgPr>
-    </p:bg>
-    <p:spTree>
-      <p:nvGrpSpPr>
-        <p:cNvPr id="1" name=""/>
-        <p:cNvGrpSpPr/>
-        <p:nvPr/>
-      </p:nvGrpSpPr>
-      <p:grpSpPr>
-        <a:xfrm>
-          <a:off x="0" y="0"/>
-          <a:ext cx="0" cy="0"/>
-          <a:chOff x="0" y="0"/>
-          <a:chExt cx="0" cy="0"/>
-        </a:xfrm>
-      </p:grpSpPr>
-      <p:sp>
-        <p:nvSpPr>
-          <p:cNvPr id="2" name="Text 0"/>
-          <p:cNvSpPr txBox="1"/>
-          <p:nvPr/>
-        </p:nvSpPr>
-        <p:spPr>
-          <a:xfrm>
-            <a:off x="548640" y="411480"/>
-            <a:ext cx="9144000" cy="365760"/>
-          </a:xfrm>
-          <a:prstGeom prst="rect">
-            <a:avLst/>
-          </a:prstGeom>
-          <a:noFill/>
-          <a:ln/>
-        </p:spPr>
-        <p:txBody>
-          <a:bodyPr wrap="square" lIns="0" tIns="0" rIns="0" bIns="0" rtlCol="0" anchor="ctr"/>
-          <a:lstStyle/>
-          <a:p>
-            <a:pPr indent="0" marL="0">
-              <a:buNone/>
-            </a:pPr>
-            <a:r>
-              <a:rPr lang="en-US" sz="1300" b="1" spc="100" kern="0" dirty="0">
-                <a:solidFill>
-                  <a:srgbClr val="00A896"/>
-                </a:solidFill>
-                <a:latin typeface="Pretendard" pitchFamily="34" charset="0"/>
-                <a:ea typeface="Pretendard" pitchFamily="34" charset="-122"/>
-                <a:cs typeface="Pretendard" pitchFamily="34" charset="-120"/>
-              </a:rPr>
-              <a:t>METHODS</a:t>
-            </a:r>
-            <a:endParaRPr lang="en-US" sz="1300" dirty="0"/>
-          </a:p>
-        </p:txBody>
-      </p:sp>
-      <p:sp>
-        <p:nvSpPr>
-          <p:cNvPr id="3" name="Text 1"/>
-          <p:cNvSpPr txBox="1"/>
-          <p:nvPr/>
-        </p:nvSpPr>
-        <p:spPr>
-          <a:xfrm>
-            <a:off x="548640" y="749808"/>
-            <a:ext cx="11064240" cy="914400"/>
-          </a:xfrm>
-          <a:prstGeom prst="rect">
-            <a:avLst/>
-          </a:prstGeom>
-          <a:noFill/>
-          <a:ln/>
-        </p:spPr>
-        <p:txBody>
-          <a:bodyPr wrap="square" lIns="0" tIns="0" rIns="0" bIns="0" rtlCol="0" anchor="ctr"/>
-          <a:lstStyle/>
-          <a:p>
-            <a:pPr indent="0" marL="0">
-              <a:buNone/>
-            </a:pPr>
-            <a:r>
-              <a:rPr lang="en-US" sz="3000" b="1" dirty="0">
-                <a:solidFill>
-                  <a:srgbClr val="0B2E33"/>
-                </a:solidFill>
-                <a:latin typeface="Wanted Sans" pitchFamily="34" charset="0"/>
-                <a:ea typeface="Wanted Sans" pitchFamily="34" charset="-122"/>
-                <a:cs typeface="Wanted Sans" pitchFamily="34" charset="-120"/>
-              </a:rPr>
-              <a:t>연구 설계 및 대상</a:t>
-            </a:r>
-            <a:endParaRPr lang="en-US" sz="3000" dirty="0"/>
-          </a:p>
-        </p:txBody>
-      </p:sp>
-      <p:sp>
-        <p:nvSpPr>
-          <p:cNvPr id="4" name="Shape 2"/>
-          <p:cNvSpPr/>
-          <p:nvPr/>
-        </p:nvSpPr>
-        <p:spPr>
-          <a:xfrm>
-            <a:off x="548640" y="1920240"/>
-            <a:ext cx="3611880" cy="3108960"/>
-          </a:xfrm>
-          <a:prstGeom prst="roundRect">
-            <a:avLst>
-              <a:gd name="adj" fmla="val 2941"/>
-            </a:avLst>
-          </a:prstGeom>
-          <a:solidFill>
-            <a:srgbClr val="FFFFFF"/>
-          </a:solidFill>
-          <a:ln w="12700">
-            <a:solidFill>
-              <a:srgbClr val="00A896">
-                <a:alpha val="25000"/>
-              </a:srgbClr>
-            </a:solidFill>
-            <a:prstDash val="solid"/>
-          </a:ln>
-          <a:effectLst>
-            <a:outerShdw sx="100000" sy="100000" kx="0" ky="0" algn="bl" rotWithShape="0" blurRad="76200" dist="25400" dir="5400000">
-              <a:srgbClr val="000000">
-                <a:alpha val="12000"/>
-              </a:srgbClr>
-            </a:outerShdw>
-          </a:effectLst>
-        </p:spPr>
-      </p:sp>
-      <p:sp>
-        <p:nvSpPr>
-          <p:cNvPr id="5" name="Shape 3"/>
-          <p:cNvSpPr/>
-          <p:nvPr/>
-        </p:nvSpPr>
-        <p:spPr>
-          <a:xfrm>
-            <a:off x="868680" y="2240280"/>
-            <a:ext cx="2971800" cy="502920"/>
-          </a:xfrm>
-          <a:prstGeom prst="roundRect">
-            <a:avLst>
-              <a:gd name="adj" fmla="val 50909"/>
-            </a:avLst>
-          </a:prstGeom>
-          <a:solidFill>
-            <a:srgbClr val="028090">
-              <a:alpha val="12000"/>
-            </a:srgbClr>
-          </a:solidFill>
-          <a:ln/>
-        </p:spPr>
-      </p:sp>
-      <p:sp>
-        <p:nvSpPr>
-          <p:cNvPr id="6" name="Text 4"/>
-          <p:cNvSpPr txBox="1"/>
-          <p:nvPr/>
-        </p:nvSpPr>
-        <p:spPr>
-          <a:xfrm>
-            <a:off x="868680" y="2240280"/>
-            <a:ext cx="2971800" cy="502920"/>
-          </a:xfrm>
-          <a:prstGeom prst="rect">
-            <a:avLst/>
-          </a:prstGeom>
-          <a:noFill/>
-          <a:ln/>
-        </p:spPr>
-        <p:txBody>
-          <a:bodyPr wrap="square" lIns="0" tIns="0" rIns="0" bIns="0" rtlCol="0" anchor="ctr"/>
-          <a:lstStyle/>
-          <a:p>
-            <a:pPr algn="ctr" indent="0" marL="0">
-              <a:buNone/>
-            </a:pPr>
-            <a:r>
-              <a:rPr lang="en-US" sz="1300" b="1" dirty="0">
-                <a:solidFill>
-                  <a:srgbClr val="028090"/>
-                </a:solidFill>
-                <a:latin typeface="Pretendard" pitchFamily="34" charset="0"/>
-                <a:ea typeface="Pretendard" pitchFamily="34" charset="-122"/>
-                <a:cs typeface="Pretendard" pitchFamily="34" charset="-120"/>
-              </a:rPr>
-              <a:t>설계</a:t>
-            </a:r>
-            <a:endParaRPr lang="en-US" sz="1300" dirty="0"/>
-          </a:p>
-        </p:txBody>
-      </p:sp>
-      <p:sp>
-        <p:nvSpPr>
-          <p:cNvPr id="7" name="Text 5"/>
-          <p:cNvSpPr txBox="1"/>
-          <p:nvPr/>
-        </p:nvSpPr>
-        <p:spPr>
-          <a:xfrm>
-            <a:off x="822960" y="2926080"/>
-            <a:ext cx="3063240" cy="1920240"/>
-          </a:xfrm>
-          <a:prstGeom prst="rect">
-            <a:avLst/>
-          </a:prstGeom>
-          <a:noFill/>
-          <a:ln/>
-        </p:spPr>
-        <p:txBody>
-          <a:bodyPr wrap="square" lIns="0" tIns="0" rIns="0" bIns="0" rtlCol="0" anchor="ctr"/>
-          <a:lstStyle/>
-          <a:p>
-            <a:pPr algn="ctr" indent="0" marL="0">
-              <a:lnSpc>
-                <a:spcPct val="135000"/>
-              </a:lnSpc>
-              <a:buNone/>
-            </a:pPr>
-            <a:r>
-              <a:rPr lang="en-US" sz="1450" dirty="0">
-                <a:solidFill>
-                  <a:srgbClr val="0B2E33"/>
-                </a:solidFill>
-                <a:latin typeface="Pretendard" pitchFamily="34" charset="0"/>
-                <a:ea typeface="Pretendard" pitchFamily="34" charset="-122"/>
-                <a:cs typeface="Pretendard" pitchFamily="34" charset="-120"/>
-              </a:rPr>
-              <a:t>Split-mouth, 이중눈가림,</a:t>
-            </a:r>
-            <a:endParaRPr lang="en-US" sz="1450" dirty="0"/>
-          </a:p>
-          <a:p>
-            <a:pPr algn="ctr" indent="0" marL="0">
-              <a:lnSpc>
-                <a:spcPct val="135000"/>
-              </a:lnSpc>
-              <a:buNone/>
-            </a:pPr>
-            <a:r>
-              <a:rPr lang="en-US" sz="1450" dirty="0">
-                <a:solidFill>
-                  <a:srgbClr val="0B2E33"/>
-                </a:solidFill>
-                <a:latin typeface="Pretendard" pitchFamily="34" charset="0"/>
-                <a:ea typeface="Pretendard" pitchFamily="34" charset="-122"/>
-                <a:cs typeface="Pretendard" pitchFamily="34" charset="-120"/>
-              </a:rPr>
-              <a:t>무작위 대조 연구</a:t>
-            </a:r>
-            <a:endParaRPr lang="en-US" sz="1450" dirty="0"/>
-          </a:p>
-        </p:txBody>
-      </p:sp>
-      <p:sp>
-        <p:nvSpPr>
-          <p:cNvPr id="8" name="Shape 6"/>
-          <p:cNvSpPr/>
-          <p:nvPr/>
-        </p:nvSpPr>
-        <p:spPr>
-          <a:xfrm>
-            <a:off x="4343400" y="1920240"/>
-            <a:ext cx="3611880" cy="3108960"/>
-          </a:xfrm>
-          <a:prstGeom prst="roundRect">
-            <a:avLst>
-              <a:gd name="adj" fmla="val 2941"/>
-            </a:avLst>
-          </a:prstGeom>
-          <a:solidFill>
-            <a:srgbClr val="FFFFFF"/>
-          </a:solidFill>
-          <a:ln w="12700">
-            <a:solidFill>
-              <a:srgbClr val="00A896">
-                <a:alpha val="25000"/>
-              </a:srgbClr>
-            </a:solidFill>
-            <a:prstDash val="solid"/>
-          </a:ln>
-          <a:effectLst>
-            <a:outerShdw sx="100000" sy="100000" kx="0" ky="0" algn="bl" rotWithShape="0" blurRad="76200" dist="25400" dir="5400000">
-              <a:srgbClr val="000000">
-                <a:alpha val="12000"/>
-              </a:srgbClr>
-            </a:outerShdw>
-          </a:effectLst>
-        </p:spPr>
-      </p:sp>
-      <p:sp>
-        <p:nvSpPr>
-          <p:cNvPr id="9" name="Shape 7"/>
-          <p:cNvSpPr/>
-          <p:nvPr/>
-        </p:nvSpPr>
-        <p:spPr>
-          <a:xfrm>
-            <a:off x="4663440" y="2240280"/>
-            <a:ext cx="2971800" cy="502920"/>
-          </a:xfrm>
-          <a:prstGeom prst="roundRect">
-            <a:avLst>
-              <a:gd name="adj" fmla="val 50909"/>
-            </a:avLst>
-          </a:prstGeom>
-          <a:solidFill>
-            <a:srgbClr val="028090">
-              <a:alpha val="12000"/>
-            </a:srgbClr>
-          </a:solidFill>
-          <a:ln/>
-        </p:spPr>
-      </p:sp>
-      <p:sp>
-        <p:nvSpPr>
-          <p:cNvPr id="10" name="Text 8"/>
-          <p:cNvSpPr txBox="1"/>
-          <p:nvPr/>
-        </p:nvSpPr>
-        <p:spPr>
-          <a:xfrm>
-            <a:off x="4663440" y="2240280"/>
-            <a:ext cx="2971800" cy="502920"/>
-          </a:xfrm>
-          <a:prstGeom prst="rect">
-            <a:avLst/>
-          </a:prstGeom>
-          <a:noFill/>
-          <a:ln/>
-        </p:spPr>
-        <p:txBody>
-          <a:bodyPr wrap="square" lIns="0" tIns="0" rIns="0" bIns="0" rtlCol="0" anchor="ctr"/>
-          <a:lstStyle/>
-          <a:p>
-            <a:pPr algn="ctr" indent="0" marL="0">
-              <a:buNone/>
-            </a:pPr>
-            <a:r>
-              <a:rPr lang="en-US" sz="1300" b="1" dirty="0">
-                <a:solidFill>
-                  <a:srgbClr val="028090"/>
-                </a:solidFill>
-                <a:latin typeface="Pretendard" pitchFamily="34" charset="0"/>
-                <a:ea typeface="Pretendard" pitchFamily="34" charset="-122"/>
-                <a:cs typeface="Pretendard" pitchFamily="34" charset="-120"/>
-              </a:rPr>
-              <a:t>대상자 수</a:t>
-            </a:r>
-            <a:endParaRPr lang="en-US" sz="1300" dirty="0"/>
-          </a:p>
-        </p:txBody>
-      </p:sp>
-      <p:sp>
-        <p:nvSpPr>
-          <p:cNvPr id="11" name="Text 9"/>
-          <p:cNvSpPr txBox="1"/>
-          <p:nvPr/>
-        </p:nvSpPr>
-        <p:spPr>
-          <a:xfrm>
-            <a:off x="4617720" y="2926080"/>
-            <a:ext cx="3063240" cy="1920240"/>
-          </a:xfrm>
-          <a:prstGeom prst="rect">
-            <a:avLst/>
-          </a:prstGeom>
-          <a:noFill/>
-          <a:ln/>
-        </p:spPr>
-        <p:txBody>
-          <a:bodyPr wrap="square" lIns="0" tIns="0" rIns="0" bIns="0" rtlCol="0" anchor="ctr"/>
-          <a:lstStyle/>
-          <a:p>
-            <a:pPr algn="ctr" indent="0" marL="0">
-              <a:lnSpc>
-                <a:spcPct val="135000"/>
-              </a:lnSpc>
-              <a:buNone/>
-            </a:pPr>
-            <a:r>
-              <a:rPr lang="en-US" sz="1450" dirty="0">
-                <a:solidFill>
-                  <a:srgbClr val="0B2E33"/>
-                </a:solidFill>
-                <a:latin typeface="Pretendard" pitchFamily="34" charset="0"/>
-                <a:ea typeface="Pretendard" pitchFamily="34" charset="-122"/>
-                <a:cs typeface="Pretendard" pitchFamily="34" charset="-120"/>
-              </a:rPr>
-              <a:t>60명</a:t>
-            </a:r>
-            <a:endParaRPr lang="en-US" sz="1450" dirty="0"/>
-          </a:p>
-          <a:p>
-            <a:pPr algn="ctr" indent="0" marL="0">
-              <a:lnSpc>
-                <a:spcPct val="135000"/>
-              </a:lnSpc>
-              <a:buNone/>
-            </a:pPr>
-            <a:r>
-              <a:rPr lang="en-US" sz="1450" dirty="0">
-                <a:solidFill>
-                  <a:srgbClr val="0B2E33"/>
-                </a:solidFill>
-                <a:latin typeface="Pretendard" pitchFamily="34" charset="0"/>
-                <a:ea typeface="Pretendard" pitchFamily="34" charset="-122"/>
-                <a:cs typeface="Pretendard" pitchFamily="34" charset="-120"/>
-              </a:rPr>
-              <a:t>(양측 상·하악 제3대구치 발치)</a:t>
-            </a:r>
-            <a:endParaRPr lang="en-US" sz="1450" dirty="0"/>
-          </a:p>
-        </p:txBody>
-      </p:sp>
-      <p:sp>
-        <p:nvSpPr>
-          <p:cNvPr id="12" name="Shape 10"/>
-          <p:cNvSpPr/>
-          <p:nvPr/>
-        </p:nvSpPr>
-        <p:spPr>
-          <a:xfrm>
-            <a:off x="8138160" y="1920240"/>
-            <a:ext cx="3611880" cy="3108960"/>
-          </a:xfrm>
-          <a:prstGeom prst="roundRect">
-            <a:avLst>
-              <a:gd name="adj" fmla="val 2941"/>
-            </a:avLst>
-          </a:prstGeom>
-          <a:solidFill>
-            <a:srgbClr val="FFFFFF"/>
-          </a:solidFill>
-          <a:ln w="12700">
-            <a:solidFill>
-              <a:srgbClr val="00A896">
-                <a:alpha val="25000"/>
-              </a:srgbClr>
-            </a:solidFill>
-            <a:prstDash val="solid"/>
-          </a:ln>
-          <a:effectLst>
-            <a:outerShdw sx="100000" sy="100000" kx="0" ky="0" algn="bl" rotWithShape="0" blurRad="76200" dist="25400" dir="5400000">
-              <a:srgbClr val="000000">
-                <a:alpha val="12000"/>
-              </a:srgbClr>
-            </a:outerShdw>
-          </a:effectLst>
-        </p:spPr>
-      </p:sp>
-      <p:sp>
-        <p:nvSpPr>
-          <p:cNvPr id="13" name="Shape 11"/>
-          <p:cNvSpPr/>
-          <p:nvPr/>
-        </p:nvSpPr>
-        <p:spPr>
-          <a:xfrm>
-            <a:off x="8458200" y="2240280"/>
-            <a:ext cx="2971800" cy="502920"/>
-          </a:xfrm>
-          <a:prstGeom prst="roundRect">
-            <a:avLst>
-              <a:gd name="adj" fmla="val 50909"/>
-            </a:avLst>
-          </a:prstGeom>
-          <a:solidFill>
-            <a:srgbClr val="028090">
-              <a:alpha val="12000"/>
-            </a:srgbClr>
-          </a:solidFill>
-          <a:ln/>
-        </p:spPr>
-      </p:sp>
-      <p:sp>
-        <p:nvSpPr>
-          <p:cNvPr id="14" name="Text 12"/>
-          <p:cNvSpPr txBox="1"/>
-          <p:nvPr/>
-        </p:nvSpPr>
-        <p:spPr>
-          <a:xfrm>
-            <a:off x="8458200" y="2240280"/>
-            <a:ext cx="2971800" cy="502920"/>
-          </a:xfrm>
-          <a:prstGeom prst="rect">
-            <a:avLst/>
-          </a:prstGeom>
-          <a:noFill/>
-          <a:ln/>
-        </p:spPr>
-        <p:txBody>
-          <a:bodyPr wrap="square" lIns="0" tIns="0" rIns="0" bIns="0" rtlCol="0" anchor="ctr"/>
-          <a:lstStyle/>
-          <a:p>
-            <a:pPr algn="ctr" indent="0" marL="0">
-              <a:buNone/>
-            </a:pPr>
-            <a:r>
-              <a:rPr lang="en-US" sz="1300" b="1" dirty="0">
-                <a:solidFill>
-                  <a:srgbClr val="028090"/>
-                </a:solidFill>
-                <a:latin typeface="Pretendard" pitchFamily="34" charset="0"/>
-                <a:ea typeface="Pretendard" pitchFamily="34" charset="-122"/>
-                <a:cs typeface="Pretendard" pitchFamily="34" charset="-120"/>
-              </a:rPr>
-              <a:t>개입 (좌우 무작위 배정)</a:t>
-            </a:r>
-            <a:endParaRPr lang="en-US" sz="1300" dirty="0"/>
-          </a:p>
-        </p:txBody>
-      </p:sp>
-      <p:sp>
-        <p:nvSpPr>
-          <p:cNvPr id="15" name="Text 13"/>
-          <p:cNvSpPr txBox="1"/>
-          <p:nvPr/>
-        </p:nvSpPr>
-        <p:spPr>
-          <a:xfrm>
-            <a:off x="8412480" y="2926080"/>
-            <a:ext cx="3063240" cy="1920240"/>
-          </a:xfrm>
-          <a:prstGeom prst="rect">
-            <a:avLst/>
-          </a:prstGeom>
-          <a:noFill/>
-          <a:ln/>
-        </p:spPr>
-        <p:txBody>
-          <a:bodyPr wrap="square" lIns="0" tIns="0" rIns="0" bIns="0" rtlCol="0" anchor="ctr"/>
-          <a:lstStyle/>
-          <a:p>
-            <a:pPr algn="ctr" indent="0" marL="0">
-              <a:lnSpc>
-                <a:spcPct val="135000"/>
-              </a:lnSpc>
-              <a:buNone/>
-            </a:pPr>
-            <a:r>
-              <a:rPr lang="en-US" sz="1450" dirty="0">
-                <a:solidFill>
-                  <a:srgbClr val="0B2E33"/>
-                </a:solidFill>
-                <a:latin typeface="Pretendard" pitchFamily="34" charset="0"/>
-                <a:ea typeface="Pretendard" pitchFamily="34" charset="-122"/>
-                <a:cs typeface="Pretendard" pitchFamily="34" charset="-120"/>
-              </a:rPr>
-              <a:t>4% 아티카인 + 에피네프린 1:100,000</a:t>
-            </a:r>
-            <a:endParaRPr lang="en-US" sz="1450" dirty="0"/>
-          </a:p>
-          <a:p>
-            <a:pPr algn="ctr" indent="0" marL="0">
-              <a:lnSpc>
-                <a:spcPct val="135000"/>
-              </a:lnSpc>
-              <a:buNone/>
-            </a:pPr>
-            <a:r>
-              <a:rPr lang="en-US" sz="1450" dirty="0">
-                <a:solidFill>
-                  <a:srgbClr val="0B2E33"/>
-                </a:solidFill>
-                <a:latin typeface="Pretendard" pitchFamily="34" charset="0"/>
-                <a:ea typeface="Pretendard" pitchFamily="34" charset="-122"/>
-                <a:cs typeface="Pretendard" pitchFamily="34" charset="-120"/>
-              </a:rPr>
-              <a:t>vs</a:t>
-            </a:r>
-            <a:endParaRPr lang="en-US" sz="1450" dirty="0"/>
-          </a:p>
-          <a:p>
-            <a:pPr algn="ctr" indent="0" marL="0">
-              <a:lnSpc>
-                <a:spcPct val="135000"/>
-              </a:lnSpc>
-              <a:buNone/>
-            </a:pPr>
-            <a:r>
-              <a:rPr lang="en-US" sz="1450" dirty="0">
-                <a:solidFill>
-                  <a:srgbClr val="0B2E33"/>
-                </a:solidFill>
-                <a:latin typeface="Pretendard" pitchFamily="34" charset="0"/>
-                <a:ea typeface="Pretendard" pitchFamily="34" charset="-122"/>
-                <a:cs typeface="Pretendard" pitchFamily="34" charset="-120"/>
-              </a:rPr>
-              <a:t>2% 리도카인 + 에피네프린 1:100,000</a:t>
-            </a:r>
-            <a:endParaRPr lang="en-US" sz="1450" dirty="0"/>
-          </a:p>
-        </p:txBody>
-      </p:sp>
-      <p:sp>
-        <p:nvSpPr>
-          <p:cNvPr id="16" name="Text 14"/>
-          <p:cNvSpPr txBox="1"/>
-          <p:nvPr/>
-        </p:nvSpPr>
-        <p:spPr>
-          <a:xfrm>
-            <a:off x="548640" y="5349240"/>
-            <a:ext cx="11064240" cy="548640"/>
-          </a:xfrm>
-          <a:prstGeom prst="rect">
-            <a:avLst/>
-          </a:prstGeom>
-          <a:noFill/>
-          <a:ln/>
-        </p:spPr>
-        <p:txBody>
-          <a:bodyPr wrap="square" lIns="0" tIns="0" rIns="0" bIns="0" rtlCol="0" anchor="ctr"/>
-          <a:lstStyle/>
-          <a:p>
-            <a:pPr indent="0" marL="0">
-              <a:buNone/>
-            </a:pPr>
-            <a:r>
-              <a:rPr lang="en-US" sz="1350" b="1" dirty="0">
-                <a:solidFill>
-                  <a:srgbClr val="5B7A7E"/>
-                </a:solidFill>
-                <a:latin typeface="Pretendard" pitchFamily="34" charset="0"/>
-                <a:ea typeface="Pretendard" pitchFamily="34" charset="-122"/>
-                <a:cs typeface="Pretendard" pitchFamily="34" charset="-120"/>
-              </a:rPr>
-              <a:t>측정변수  마취 발현시간(초시계) · 통증(VAS 0-10) · 마취 지속시간 · 추가 마취 필요 여부/횟수</a:t>
-            </a:r>
-            <a:endParaRPr lang="en-US" sz="1350" dirty="0"/>
-          </a:p>
-        </p:txBody>
-      </p:sp>
-      <p:sp>
-        <p:nvSpPr>
-          <p:cNvPr id="17" name="Text 15"/>
           <p:cNvSpPr txBox="1"/>
           <p:nvPr/>
         </p:nvSpPr>
@@ -4490,7 +4837,7 @@
                 <a:ea typeface="Pretendard" pitchFamily="34" charset="-122"/>
                 <a:cs typeface="Pretendard" pitchFamily="34" charset="-120"/>
               </a:rPr>
-              <a:t>RESULTS</a:t>
+              <a:t>METHODS</a:t>
             </a:r>
             <a:endParaRPr lang="en-US" sz="1300" dirty="0"/>
           </a:p>
@@ -4529,7 +4876,7 @@
                 <a:ea typeface="Wanted Sans" pitchFamily="34" charset="-122"/>
                 <a:cs typeface="Wanted Sans" pitchFamily="34" charset="-120"/>
               </a:rPr>
-              <a:t>마취 발현시간 비교</a:t>
+              <a:t>연구 설계 및 대상</a:t>
             </a:r>
             <a:endParaRPr lang="en-US" sz="3000" dirty="0"/>
           </a:p>
@@ -4543,18 +4890,25 @@
         </p:nvSpPr>
         <p:spPr>
           <a:xfrm>
-            <a:off x="822960" y="1874520"/>
-            <a:ext cx="4480560" cy="2103120"/>
+            <a:off x="548640" y="1920240"/>
+            <a:ext cx="3611880" cy="3108960"/>
           </a:xfrm>
           <a:prstGeom prst="roundRect">
             <a:avLst>
-              <a:gd name="adj" fmla="val 5217"/>
+              <a:gd name="adj" fmla="val 2941"/>
             </a:avLst>
           </a:prstGeom>
           <a:solidFill>
             <a:srgbClr val="FFFFFF"/>
           </a:solidFill>
-          <a:ln/>
+          <a:ln w="12700">
+            <a:solidFill>
+              <a:srgbClr val="00A896">
+                <a:alpha val="25000"/>
+              </a:srgbClr>
+            </a:solidFill>
+            <a:prstDash val="solid"/>
+          </a:ln>
           <a:effectLst>
             <a:outerShdw sx="100000" sy="100000" kx="0" ky="0" algn="bl" rotWithShape="0" blurRad="76200" dist="25400" dir="5400000">
               <a:srgbClr val="000000">
@@ -4566,102 +4920,156 @@
       </p:sp>
       <p:sp>
         <p:nvSpPr>
-          <p:cNvPr id="5" name="Text 3"/>
-          <p:cNvSpPr txBox="1"/>
-          <p:nvPr/>
-        </p:nvSpPr>
-        <p:spPr>
-          <a:xfrm>
-            <a:off x="822960" y="2103120"/>
-            <a:ext cx="4480560" cy="1051560"/>
-          </a:xfrm>
-          <a:prstGeom prst="rect">
-            <a:avLst/>
-          </a:prstGeom>
-          <a:noFill/>
-          <a:ln/>
-        </p:spPr>
-        <p:txBody>
-          <a:bodyPr wrap="square" lIns="0" tIns="0" rIns="0" bIns="0" rtlCol="0" anchor="ctr"/>
-          <a:lstStyle/>
-          <a:p>
-            <a:pPr algn="ctr" indent="0" marL="0">
-              <a:buNone/>
-            </a:pPr>
-            <a:r>
-              <a:rPr lang="en-US" sz="4400" b="1" dirty="0">
-                <a:solidFill>
-                  <a:srgbClr val="02C39A"/>
-                </a:solidFill>
-                <a:latin typeface="Wanted Sans" pitchFamily="34" charset="0"/>
-                <a:ea typeface="Wanted Sans" pitchFamily="34" charset="-122"/>
-                <a:cs typeface="Wanted Sans" pitchFamily="34" charset="-120"/>
-              </a:rPr>
-              <a:t>122.1 ± 52.9</a:t>
-            </a:r>
-            <a:endParaRPr lang="en-US" sz="4400" dirty="0"/>
-          </a:p>
-        </p:txBody>
-      </p:sp>
-      <p:sp>
-        <p:nvSpPr>
-          <p:cNvPr id="6" name="Text 4"/>
-          <p:cNvSpPr txBox="1"/>
-          <p:nvPr/>
-        </p:nvSpPr>
-        <p:spPr>
-          <a:xfrm>
-            <a:off x="822960" y="3246120"/>
-            <a:ext cx="4480560" cy="548640"/>
-          </a:xfrm>
-          <a:prstGeom prst="rect">
-            <a:avLst/>
-          </a:prstGeom>
-          <a:noFill/>
-          <a:ln/>
-        </p:spPr>
-        <p:txBody>
-          <a:bodyPr wrap="square" lIns="0" tIns="0" rIns="0" bIns="0" rtlCol="0" anchor="ctr"/>
-          <a:lstStyle/>
-          <a:p>
-            <a:pPr algn="ctr" indent="0" marL="0">
-              <a:buNone/>
-            </a:pPr>
-            <a:r>
-              <a:rPr lang="en-US" sz="1500" b="1" dirty="0">
-                <a:solidFill>
-                  <a:srgbClr val="0B2E33"/>
-                </a:solidFill>
-                <a:latin typeface="Pretendard" pitchFamily="34" charset="0"/>
-                <a:ea typeface="Pretendard" pitchFamily="34" charset="-122"/>
-                <a:cs typeface="Pretendard" pitchFamily="34" charset="-120"/>
-              </a:rPr>
-              <a:t>초 · 아티카인</a:t>
-            </a:r>
-            <a:endParaRPr lang="en-US" sz="1500" dirty="0"/>
-          </a:p>
-        </p:txBody>
-      </p:sp>
-      <p:sp>
-        <p:nvSpPr>
-          <p:cNvPr id="7" name="Shape 5"/>
+          <p:cNvPr id="5" name="Shape 3"/>
           <p:cNvSpPr/>
           <p:nvPr/>
         </p:nvSpPr>
         <p:spPr>
           <a:xfrm>
-            <a:off x="5669280" y="1874520"/>
-            <a:ext cx="4480560" cy="2103120"/>
+            <a:off x="868680" y="2240280"/>
+            <a:ext cx="2971800" cy="502920"/>
           </a:xfrm>
           <a:prstGeom prst="roundRect">
             <a:avLst>
-              <a:gd name="adj" fmla="val 5217"/>
+              <a:gd name="adj" fmla="val 50909"/>
+            </a:avLst>
+          </a:prstGeom>
+          <a:solidFill>
+            <a:srgbClr val="028090">
+              <a:alpha val="12000"/>
+            </a:srgbClr>
+          </a:solidFill>
+          <a:ln/>
+        </p:spPr>
+      </p:sp>
+      <p:sp>
+        <p:nvSpPr>
+          <p:cNvPr id="6" name="Text 4"/>
+          <p:cNvSpPr txBox="1"/>
+          <p:nvPr/>
+        </p:nvSpPr>
+        <p:spPr>
+          <a:xfrm>
+            <a:off x="868680" y="2240280"/>
+            <a:ext cx="2971800" cy="502920"/>
+          </a:xfrm>
+          <a:prstGeom prst="rect">
+            <a:avLst/>
+          </a:prstGeom>
+          <a:noFill/>
+          <a:ln/>
+        </p:spPr>
+        <p:txBody>
+          <a:bodyPr wrap="square" lIns="0" tIns="0" rIns="0" bIns="0" rtlCol="0" anchor="ctr"/>
+          <a:lstStyle/>
+          <a:p>
+            <a:pPr algn="ctr" indent="0" marL="0">
+              <a:buNone/>
+            </a:pPr>
+            <a:r>
+              <a:rPr lang="en-US" sz="1300" b="1" dirty="0">
+                <a:solidFill>
+                  <a:srgbClr val="028090"/>
+                </a:solidFill>
+                <a:latin typeface="Pretendard" pitchFamily="34" charset="0"/>
+                <a:ea typeface="Pretendard" pitchFamily="34" charset="-122"/>
+                <a:cs typeface="Pretendard" pitchFamily="34" charset="-120"/>
+              </a:rPr>
+              <a:t>설계</a:t>
+            </a:r>
+            <a:endParaRPr lang="en-US" sz="1300" dirty="0"/>
+          </a:p>
+        </p:txBody>
+      </p:sp>
+      <p:sp>
+        <p:nvSpPr>
+          <p:cNvPr id="7" name="Text 5"/>
+          <p:cNvSpPr txBox="1"/>
+          <p:nvPr/>
+        </p:nvSpPr>
+        <p:spPr>
+          <a:xfrm>
+            <a:off x="822960" y="2926080"/>
+            <a:ext cx="3063240" cy="1920240"/>
+          </a:xfrm>
+          <a:prstGeom prst="rect">
+            <a:avLst/>
+          </a:prstGeom>
+          <a:noFill/>
+          <a:ln/>
+        </p:spPr>
+        <p:txBody>
+          <a:bodyPr wrap="square" lIns="0" tIns="0" rIns="0" bIns="0" rtlCol="0" anchor="ctr"/>
+          <a:lstStyle/>
+          <a:p>
+            <a:pPr algn="ctr" indent="0" marL="0">
+              <a:lnSpc>
+                <a:spcPct val="135000"/>
+              </a:lnSpc>
+              <a:buNone/>
+            </a:pPr>
+            <a:r>
+              <a:rPr lang="en-US" sz="1450" dirty="0">
+                <a:solidFill>
+                  <a:srgbClr val="0B2E33"/>
+                </a:solidFill>
+                <a:latin typeface="Pretendard" pitchFamily="34" charset="0"/>
+                <a:ea typeface="Pretendard" pitchFamily="34" charset="-122"/>
+                <a:cs typeface="Pretendard" pitchFamily="34" charset="-120"/>
+              </a:rPr>
+              <a:t>Split-mouth, 이중눈가림,</a:t>
+            </a:r>
+            <a:endParaRPr lang="en-US" sz="1450" dirty="0"/>
+          </a:p>
+          <a:p>
+            <a:pPr algn="ctr" indent="0" marL="0">
+              <a:lnSpc>
+                <a:spcPct val="135000"/>
+              </a:lnSpc>
+              <a:buNone/>
+            </a:pPr>
+            <a:r>
+              <a:rPr lang="en-US" sz="1450" dirty="0">
+                <a:solidFill>
+                  <a:srgbClr val="0B2E33"/>
+                </a:solidFill>
+                <a:latin typeface="Pretendard" pitchFamily="34" charset="0"/>
+                <a:ea typeface="Pretendard" pitchFamily="34" charset="-122"/>
+                <a:cs typeface="Pretendard" pitchFamily="34" charset="-120"/>
+              </a:rPr>
+              <a:t>무작위 대조 연구</a:t>
+            </a:r>
+            <a:endParaRPr lang="en-US" sz="1450" dirty="0"/>
+          </a:p>
+        </p:txBody>
+      </p:sp>
+      <p:sp>
+        <p:nvSpPr>
+          <p:cNvPr id="8" name="Shape 6"/>
+          <p:cNvSpPr/>
+          <p:nvPr/>
+        </p:nvSpPr>
+        <p:spPr>
+          <a:xfrm>
+            <a:off x="4343400" y="1920240"/>
+            <a:ext cx="3611880" cy="3108960"/>
+          </a:xfrm>
+          <a:prstGeom prst="roundRect">
+            <a:avLst>
+              <a:gd name="adj" fmla="val 2941"/>
             </a:avLst>
           </a:prstGeom>
           <a:solidFill>
             <a:srgbClr val="FFFFFF"/>
           </a:solidFill>
-          <a:ln/>
+          <a:ln w="12700">
+            <a:solidFill>
+              <a:srgbClr val="00A896">
+                <a:alpha val="25000"/>
+              </a:srgbClr>
+            </a:solidFill>
+            <a:prstDash val="solid"/>
+          </a:ln>
           <a:effectLst>
             <a:outerShdw sx="100000" sy="100000" kx="0" ky="0" algn="bl" rotWithShape="0" blurRad="76200" dist="25400" dir="5400000">
               <a:srgbClr val="000000">
@@ -4673,184 +5081,223 @@
       </p:sp>
       <p:sp>
         <p:nvSpPr>
-          <p:cNvPr id="8" name="Text 6"/>
-          <p:cNvSpPr txBox="1"/>
-          <p:nvPr/>
-        </p:nvSpPr>
-        <p:spPr>
-          <a:xfrm>
-            <a:off x="5669280" y="2103120"/>
-            <a:ext cx="4480560" cy="1051560"/>
-          </a:xfrm>
-          <a:prstGeom prst="rect">
-            <a:avLst/>
-          </a:prstGeom>
-          <a:noFill/>
-          <a:ln/>
-        </p:spPr>
-        <p:txBody>
-          <a:bodyPr wrap="square" lIns="0" tIns="0" rIns="0" bIns="0" rtlCol="0" anchor="ctr"/>
-          <a:lstStyle/>
-          <a:p>
-            <a:pPr algn="ctr" indent="0" marL="0">
-              <a:buNone/>
-            </a:pPr>
-            <a:r>
-              <a:rPr lang="en-US" sz="4400" b="1" dirty="0">
-                <a:solidFill>
-                  <a:srgbClr val="5B7A7E"/>
-                </a:solidFill>
-                <a:latin typeface="Wanted Sans" pitchFamily="34" charset="0"/>
-                <a:ea typeface="Wanted Sans" pitchFamily="34" charset="-122"/>
-                <a:cs typeface="Wanted Sans" pitchFamily="34" charset="-120"/>
-              </a:rPr>
-              <a:t>144.5 ± 68.9</a:t>
-            </a:r>
-            <a:endParaRPr lang="en-US" sz="4400" dirty="0"/>
-          </a:p>
-        </p:txBody>
-      </p:sp>
-      <p:sp>
-        <p:nvSpPr>
-          <p:cNvPr id="9" name="Text 7"/>
-          <p:cNvSpPr txBox="1"/>
-          <p:nvPr/>
-        </p:nvSpPr>
-        <p:spPr>
-          <a:xfrm>
-            <a:off x="5669280" y="3246120"/>
-            <a:ext cx="4480560" cy="548640"/>
-          </a:xfrm>
-          <a:prstGeom prst="rect">
-            <a:avLst/>
-          </a:prstGeom>
-          <a:noFill/>
-          <a:ln/>
-        </p:spPr>
-        <p:txBody>
-          <a:bodyPr wrap="square" lIns="0" tIns="0" rIns="0" bIns="0" rtlCol="0" anchor="ctr"/>
-          <a:lstStyle/>
-          <a:p>
-            <a:pPr algn="ctr" indent="0" marL="0">
-              <a:buNone/>
-            </a:pPr>
-            <a:r>
-              <a:rPr lang="en-US" sz="1500" b="1" dirty="0">
-                <a:solidFill>
-                  <a:srgbClr val="0B2E33"/>
-                </a:solidFill>
-                <a:latin typeface="Pretendard" pitchFamily="34" charset="0"/>
-                <a:ea typeface="Pretendard" pitchFamily="34" charset="-122"/>
-                <a:cs typeface="Pretendard" pitchFamily="34" charset="-120"/>
-              </a:rPr>
-              <a:t>초 · 리도카인</a:t>
-            </a:r>
-            <a:endParaRPr lang="en-US" sz="1500" dirty="0"/>
-          </a:p>
-        </p:txBody>
-      </p:sp>
-      <p:sp>
-        <p:nvSpPr>
-          <p:cNvPr id="10" name="Text 8"/>
-          <p:cNvSpPr txBox="1"/>
-          <p:nvPr/>
-        </p:nvSpPr>
-        <p:spPr>
-          <a:xfrm>
-            <a:off x="822960" y="4206240"/>
-            <a:ext cx="10424160" cy="457200"/>
-          </a:xfrm>
-          <a:prstGeom prst="rect">
-            <a:avLst/>
-          </a:prstGeom>
-          <a:noFill/>
-          <a:ln/>
-        </p:spPr>
-        <p:txBody>
-          <a:bodyPr wrap="square" lIns="0" tIns="0" rIns="0" bIns="0" rtlCol="0" anchor="ctr"/>
-          <a:lstStyle/>
-          <a:p>
-            <a:pPr indent="0" marL="0">
-              <a:buNone/>
-            </a:pPr>
-            <a:r>
-              <a:rPr lang="en-US" sz="1400" i="1" dirty="0">
-                <a:solidFill>
-                  <a:srgbClr val="028090"/>
-                </a:solidFill>
-                <a:latin typeface="Pretendard" pitchFamily="34" charset="0"/>
-                <a:ea typeface="Pretendard" pitchFamily="34" charset="-122"/>
-                <a:cs typeface="Pretendard" pitchFamily="34" charset="-120"/>
-              </a:rPr>
-              <a:t>→ 아티카인 측이 평균 22.4초 더 빠르게 발현 (p&lt;0.01, paired t-test)</a:t>
-            </a:r>
-            <a:endParaRPr lang="en-US" sz="1400" dirty="0"/>
-          </a:p>
-        </p:txBody>
-      </p:sp>
-      <p:sp>
-        <p:nvSpPr>
-          <p:cNvPr id="11" name="Shape 9"/>
+          <p:cNvPr id="9" name="Shape 7"/>
           <p:cNvSpPr/>
           <p:nvPr/>
         </p:nvSpPr>
         <p:spPr>
           <a:xfrm>
-            <a:off x="822960" y="4892040"/>
-            <a:ext cx="10424160" cy="1188720"/>
+            <a:off x="4663440" y="2240280"/>
+            <a:ext cx="2971800" cy="502920"/>
           </a:xfrm>
           <a:prstGeom prst="roundRect">
             <a:avLst>
-              <a:gd name="adj" fmla="val 7692"/>
+              <a:gd name="adj" fmla="val 50909"/>
             </a:avLst>
           </a:prstGeom>
           <a:solidFill>
-            <a:srgbClr val="F7FBFB"/>
+            <a:srgbClr val="028090">
+              <a:alpha val="12000"/>
+            </a:srgbClr>
+          </a:solidFill>
+          <a:ln/>
+        </p:spPr>
+      </p:sp>
+      <p:sp>
+        <p:nvSpPr>
+          <p:cNvPr id="10" name="Text 8"/>
+          <p:cNvSpPr txBox="1"/>
+          <p:nvPr/>
+        </p:nvSpPr>
+        <p:spPr>
+          <a:xfrm>
+            <a:off x="4663440" y="2240280"/>
+            <a:ext cx="2971800" cy="502920"/>
+          </a:xfrm>
+          <a:prstGeom prst="rect">
+            <a:avLst/>
+          </a:prstGeom>
+          <a:noFill/>
+          <a:ln/>
+        </p:spPr>
+        <p:txBody>
+          <a:bodyPr wrap="square" lIns="0" tIns="0" rIns="0" bIns="0" rtlCol="0" anchor="ctr"/>
+          <a:lstStyle/>
+          <a:p>
+            <a:pPr algn="ctr" indent="0" marL="0">
+              <a:buNone/>
+            </a:pPr>
+            <a:r>
+              <a:rPr lang="en-US" sz="1300" b="1" dirty="0">
+                <a:solidFill>
+                  <a:srgbClr val="028090"/>
+                </a:solidFill>
+                <a:latin typeface="Pretendard" pitchFamily="34" charset="0"/>
+                <a:ea typeface="Pretendard" pitchFamily="34" charset="-122"/>
+                <a:cs typeface="Pretendard" pitchFamily="34" charset="-120"/>
+              </a:rPr>
+              <a:t>대상자 수</a:t>
+            </a:r>
+            <a:endParaRPr lang="en-US" sz="1300" dirty="0"/>
+          </a:p>
+        </p:txBody>
+      </p:sp>
+      <p:sp>
+        <p:nvSpPr>
+          <p:cNvPr id="11" name="Text 9"/>
+          <p:cNvSpPr txBox="1"/>
+          <p:nvPr/>
+        </p:nvSpPr>
+        <p:spPr>
+          <a:xfrm>
+            <a:off x="4617720" y="2926080"/>
+            <a:ext cx="3063240" cy="1920240"/>
+          </a:xfrm>
+          <a:prstGeom prst="rect">
+            <a:avLst/>
+          </a:prstGeom>
+          <a:noFill/>
+          <a:ln/>
+        </p:spPr>
+        <p:txBody>
+          <a:bodyPr wrap="square" lIns="0" tIns="0" rIns="0" bIns="0" rtlCol="0" anchor="ctr"/>
+          <a:lstStyle/>
+          <a:p>
+            <a:pPr algn="ctr" indent="0" marL="0">
+              <a:lnSpc>
+                <a:spcPct val="135000"/>
+              </a:lnSpc>
+              <a:buNone/>
+            </a:pPr>
+            <a:r>
+              <a:rPr lang="en-US" sz="1450" dirty="0">
+                <a:solidFill>
+                  <a:srgbClr val="0B2E33"/>
+                </a:solidFill>
+                <a:latin typeface="Pretendard" pitchFamily="34" charset="0"/>
+                <a:ea typeface="Pretendard" pitchFamily="34" charset="-122"/>
+                <a:cs typeface="Pretendard" pitchFamily="34" charset="-120"/>
+              </a:rPr>
+              <a:t>60명</a:t>
+            </a:r>
+            <a:endParaRPr lang="en-US" sz="1450" dirty="0"/>
+          </a:p>
+          <a:p>
+            <a:pPr algn="ctr" indent="0" marL="0">
+              <a:lnSpc>
+                <a:spcPct val="135000"/>
+              </a:lnSpc>
+              <a:buNone/>
+            </a:pPr>
+            <a:r>
+              <a:rPr lang="en-US" sz="1450" dirty="0">
+                <a:solidFill>
+                  <a:srgbClr val="0B2E33"/>
+                </a:solidFill>
+                <a:latin typeface="Pretendard" pitchFamily="34" charset="0"/>
+                <a:ea typeface="Pretendard" pitchFamily="34" charset="-122"/>
+                <a:cs typeface="Pretendard" pitchFamily="34" charset="-120"/>
+              </a:rPr>
+              <a:t>(양측 상·하악 제3대구치 발치)</a:t>
+            </a:r>
+            <a:endParaRPr lang="en-US" sz="1450" dirty="0"/>
+          </a:p>
+        </p:txBody>
+      </p:sp>
+      <p:sp>
+        <p:nvSpPr>
+          <p:cNvPr id="12" name="Shape 10"/>
+          <p:cNvSpPr/>
+          <p:nvPr/>
+        </p:nvSpPr>
+        <p:spPr>
+          <a:xfrm>
+            <a:off x="8138160" y="1920240"/>
+            <a:ext cx="3611880" cy="3108960"/>
+          </a:xfrm>
+          <a:prstGeom prst="roundRect">
+            <a:avLst>
+              <a:gd name="adj" fmla="val 2941"/>
+            </a:avLst>
+          </a:prstGeom>
+          <a:solidFill>
+            <a:srgbClr val="FFFFFF"/>
           </a:solidFill>
           <a:ln w="12700">
             <a:solidFill>
               <a:srgbClr val="00A896">
-                <a:alpha val="30000"/>
+                <a:alpha val="25000"/>
               </a:srgbClr>
             </a:solidFill>
             <a:prstDash val="solid"/>
           </a:ln>
-        </p:spPr>
-      </p:sp>
-      <p:sp>
-        <p:nvSpPr>
-          <p:cNvPr id="12" name="Text 10"/>
-          <p:cNvSpPr txBox="1"/>
-          <p:nvPr/>
-        </p:nvSpPr>
-        <p:spPr>
-          <a:xfrm>
-            <a:off x="1097280" y="5029200"/>
-            <a:ext cx="2743200" cy="365760"/>
-          </a:xfrm>
-          <a:prstGeom prst="rect">
-            <a:avLst/>
-          </a:prstGeom>
-          <a:noFill/>
-          <a:ln/>
-        </p:spPr>
-        <p:txBody>
-          <a:bodyPr wrap="square" lIns="0" tIns="0" rIns="0" bIns="0" rtlCol="0" anchor="ctr"/>
-          <a:lstStyle/>
-          <a:p>
-            <a:pPr indent="0" marL="0">
+          <a:effectLst>
+            <a:outerShdw sx="100000" sy="100000" kx="0" ky="0" algn="bl" rotWithShape="0" blurRad="76200" dist="25400" dir="5400000">
+              <a:srgbClr val="000000">
+                <a:alpha val="12000"/>
+              </a:srgbClr>
+            </a:outerShdw>
+          </a:effectLst>
+        </p:spPr>
+      </p:sp>
+      <p:sp>
+        <p:nvSpPr>
+          <p:cNvPr id="13" name="Shape 11"/>
+          <p:cNvSpPr/>
+          <p:nvPr/>
+        </p:nvSpPr>
+        <p:spPr>
+          <a:xfrm>
+            <a:off x="8458200" y="2240280"/>
+            <a:ext cx="2971800" cy="502920"/>
+          </a:xfrm>
+          <a:prstGeom prst="roundRect">
+            <a:avLst>
+              <a:gd name="adj" fmla="val 50909"/>
+            </a:avLst>
+          </a:prstGeom>
+          <a:solidFill>
+            <a:srgbClr val="028090">
+              <a:alpha val="12000"/>
+            </a:srgbClr>
+          </a:solidFill>
+          <a:ln/>
+        </p:spPr>
+      </p:sp>
+      <p:sp>
+        <p:nvSpPr>
+          <p:cNvPr id="14" name="Text 12"/>
+          <p:cNvSpPr txBox="1"/>
+          <p:nvPr/>
+        </p:nvSpPr>
+        <p:spPr>
+          <a:xfrm>
+            <a:off x="8458200" y="2240280"/>
+            <a:ext cx="2971800" cy="502920"/>
+          </a:xfrm>
+          <a:prstGeom prst="rect">
+            <a:avLst/>
+          </a:prstGeom>
+          <a:noFill/>
+          <a:ln/>
+        </p:spPr>
+        <p:txBody>
+          <a:bodyPr wrap="square" lIns="0" tIns="0" rIns="0" bIns="0" rtlCol="0" anchor="ctr"/>
+          <a:lstStyle/>
+          <a:p>
+            <a:pPr algn="ctr" indent="0" marL="0">
               <a:buNone/>
             </a:pPr>
             <a:r>
               <a:rPr lang="en-US" sz="1300" b="1" dirty="0">
                 <a:solidFill>
-                  <a:srgbClr val="00A896"/>
-                </a:solidFill>
-                <a:latin typeface="Pretendard" pitchFamily="34" charset="0"/>
-                <a:ea typeface="Pretendard" pitchFamily="34" charset="-122"/>
-                <a:cs typeface="Pretendard" pitchFamily="34" charset="-120"/>
-              </a:rPr>
-              <a:t>추가 소견</a:t>
+                  <a:srgbClr val="028090"/>
+                </a:solidFill>
+                <a:latin typeface="Pretendard" pitchFamily="34" charset="0"/>
+                <a:ea typeface="Pretendard" pitchFamily="34" charset="-122"/>
+                <a:cs typeface="Pretendard" pitchFamily="34" charset="-120"/>
+              </a:rPr>
+              <a:t>개입 (좌우 무작위 배정)</a:t>
             </a:r>
             <a:endParaRPr lang="en-US" sz="1300" dirty="0"/>
           </a:p>
@@ -4858,30 +5305,33 @@
       </p:sp>
       <p:sp>
         <p:nvSpPr>
-          <p:cNvPr id="13" name="Text 11"/>
-          <p:cNvSpPr txBox="1"/>
-          <p:nvPr/>
-        </p:nvSpPr>
-        <p:spPr>
-          <a:xfrm>
-            <a:off x="1097280" y="5349240"/>
-            <a:ext cx="9875520" cy="640080"/>
-          </a:xfrm>
-          <a:prstGeom prst="rect">
-            <a:avLst/>
-          </a:prstGeom>
-          <a:noFill/>
-          <a:ln/>
-        </p:spPr>
-        <p:txBody>
-          <a:bodyPr wrap="square" lIns="0" tIns="0" rIns="0" bIns="0" rtlCol="0" anchor="ctr"/>
-          <a:lstStyle/>
-          <a:p>
-            <a:pPr indent="0" marL="0">
-              <a:buNone/>
-            </a:pPr>
-            <a:r>
-              <a:rPr lang="en-US" sz="1300" dirty="0">
+          <p:cNvPr id="15" name="Text 13"/>
+          <p:cNvSpPr txBox="1"/>
+          <p:nvPr/>
+        </p:nvSpPr>
+        <p:spPr>
+          <a:xfrm>
+            <a:off x="8412480" y="2926080"/>
+            <a:ext cx="3063240" cy="1920240"/>
+          </a:xfrm>
+          <a:prstGeom prst="rect">
+            <a:avLst/>
+          </a:prstGeom>
+          <a:noFill/>
+          <a:ln/>
+        </p:spPr>
+        <p:txBody>
+          <a:bodyPr wrap="square" lIns="0" tIns="0" rIns="0" bIns="0" rtlCol="0" anchor="ctr"/>
+          <a:lstStyle/>
+          <a:p>
+            <a:pPr algn="ctr" indent="0" marL="0">
+              <a:lnSpc>
+                <a:spcPct val="135000"/>
+              </a:lnSpc>
+              <a:buNone/>
+            </a:pPr>
+            <a:r>
+              <a:rPr lang="en-US" sz="1450" dirty="0">
                 <a:solidFill>
                   <a:srgbClr val="0B2E33"/>
                 </a:solidFill>
@@ -4889,15 +5339,94 @@
                 <a:ea typeface="Pretendard" pitchFamily="34" charset="-122"/>
                 <a:cs typeface="Pretendard" pitchFamily="34" charset="-120"/>
               </a:rPr>
-              <a:t>추가 마취(보충 주사) 튜브 수: 아티카인 0.26±0.48개 vs 리도카인 0.50±0.75개 (p&lt;0.01) — 리도카인 측에서 유의하게 더 많이 필요.</a:t>
-            </a:r>
-            <a:endParaRPr lang="en-US" sz="1300" dirty="0"/>
-          </a:p>
-        </p:txBody>
-      </p:sp>
-      <p:sp>
-        <p:nvSpPr>
-          <p:cNvPr id="14" name="Text 12"/>
+              <a:t>4% 아티카인 + 에피네프린 1:100,000</a:t>
+            </a:r>
+            <a:endParaRPr lang="en-US" sz="1450" dirty="0"/>
+          </a:p>
+          <a:p>
+            <a:pPr algn="ctr" indent="0" marL="0">
+              <a:lnSpc>
+                <a:spcPct val="135000"/>
+              </a:lnSpc>
+              <a:buNone/>
+            </a:pPr>
+            <a:r>
+              <a:rPr lang="en-US" sz="1450" dirty="0">
+                <a:solidFill>
+                  <a:srgbClr val="0B2E33"/>
+                </a:solidFill>
+                <a:latin typeface="Pretendard" pitchFamily="34" charset="0"/>
+                <a:ea typeface="Pretendard" pitchFamily="34" charset="-122"/>
+                <a:cs typeface="Pretendard" pitchFamily="34" charset="-120"/>
+              </a:rPr>
+              <a:t>vs</a:t>
+            </a:r>
+            <a:endParaRPr lang="en-US" sz="1450" dirty="0"/>
+          </a:p>
+          <a:p>
+            <a:pPr algn="ctr" indent="0" marL="0">
+              <a:lnSpc>
+                <a:spcPct val="135000"/>
+              </a:lnSpc>
+              <a:buNone/>
+            </a:pPr>
+            <a:r>
+              <a:rPr lang="en-US" sz="1450" dirty="0">
+                <a:solidFill>
+                  <a:srgbClr val="0B2E33"/>
+                </a:solidFill>
+                <a:latin typeface="Pretendard" pitchFamily="34" charset="0"/>
+                <a:ea typeface="Pretendard" pitchFamily="34" charset="-122"/>
+                <a:cs typeface="Pretendard" pitchFamily="34" charset="-120"/>
+              </a:rPr>
+              <a:t>2% 리도카인 + 에피네프린 1:100,000</a:t>
+            </a:r>
+            <a:endParaRPr lang="en-US" sz="1450" dirty="0"/>
+          </a:p>
+        </p:txBody>
+      </p:sp>
+      <p:sp>
+        <p:nvSpPr>
+          <p:cNvPr id="16" name="Text 14"/>
+          <p:cNvSpPr txBox="1"/>
+          <p:nvPr/>
+        </p:nvSpPr>
+        <p:spPr>
+          <a:xfrm>
+            <a:off x="548640" y="5349240"/>
+            <a:ext cx="11064240" cy="548640"/>
+          </a:xfrm>
+          <a:prstGeom prst="rect">
+            <a:avLst/>
+          </a:prstGeom>
+          <a:noFill/>
+          <a:ln/>
+        </p:spPr>
+        <p:txBody>
+          <a:bodyPr wrap="square" lIns="0" tIns="0" rIns="0" bIns="0" rtlCol="0" anchor="ctr"/>
+          <a:lstStyle/>
+          <a:p>
+            <a:pPr indent="0" marL="0">
+              <a:buNone/>
+            </a:pPr>
+            <a:r>
+              <a:rPr lang="en-US" sz="1350" b="1" dirty="0">
+                <a:solidFill>
+                  <a:srgbClr val="5B7A7E"/>
+                </a:solidFill>
+                <a:latin typeface="Pretendard" pitchFamily="34" charset="0"/>
+                <a:ea typeface="Pretendard" pitchFamily="34" charset="-122"/>
+                <a:cs typeface="Pretendard" pitchFamily="34" charset="-120"/>
+              </a:rPr>
+              <a:t>측정변수  마취 발현시간(초시계) · 통증(VAS 0-10) · 마취 지속시간 · 추가 마취 필요 여부/횟수</a:t>
+            </a:r>
+            <a:endParaRPr lang="en-US" sz="1350" dirty="0"/>
+          </a:p>
+        </p:txBody>
+      </p:sp>
+      <p:sp>
+        <p:nvSpPr>
+          <p:cNvPr id="17" name="Text 15"/>
           <p:cNvSpPr txBox="1"/>
           <p:nvPr/>
         </p:nvSpPr>
@@ -5038,7 +5567,7 @@
                 <a:ea typeface="Wanted Sans" pitchFamily="34" charset="-122"/>
                 <a:cs typeface="Wanted Sans" pitchFamily="34" charset="-120"/>
               </a:rPr>
-              <a:t>통증(VAS) 및 종합 소견</a:t>
+              <a:t>마취 발현시간 비교</a:t>
             </a:r>
             <a:endParaRPr lang="en-US" sz="3000" dirty="0"/>
           </a:p>
@@ -5052,12 +5581,12 @@
         </p:nvSpPr>
         <p:spPr>
           <a:xfrm>
-            <a:off x="548640" y="1920240"/>
-            <a:ext cx="5349240" cy="4114800"/>
+            <a:off x="822960" y="1874520"/>
+            <a:ext cx="4480560" cy="2103120"/>
           </a:xfrm>
           <a:prstGeom prst="roundRect">
             <a:avLst>
-              <a:gd name="adj" fmla="val 2222"/>
+              <a:gd name="adj" fmla="val 5217"/>
             </a:avLst>
           </a:prstGeom>
           <a:solidFill>
@@ -5065,9 +5594,9 @@
           </a:solidFill>
           <a:ln/>
           <a:effectLst>
-            <a:outerShdw sx="100000" sy="100000" kx="0" ky="0" algn="bl" rotWithShape="0" blurRad="63500" dist="25400" dir="5400000">
+            <a:outerShdw sx="100000" sy="100000" kx="0" ky="0" algn="bl" rotWithShape="0" blurRad="76200" dist="25400" dir="5400000">
               <a:srgbClr val="000000">
-                <a:alpha val="10000"/>
+                <a:alpha val="12000"/>
               </a:srgbClr>
             </a:outerShdw>
           </a:effectLst>
@@ -5081,34 +5610,34 @@
         </p:nvSpPr>
         <p:spPr>
           <a:xfrm>
-            <a:off x="868680" y="2148840"/>
-            <a:ext cx="4754880" cy="457200"/>
-          </a:xfrm>
-          <a:prstGeom prst="rect">
-            <a:avLst/>
-          </a:prstGeom>
-          <a:noFill/>
-          <a:ln/>
-        </p:spPr>
-        <p:txBody>
-          <a:bodyPr wrap="square" lIns="0" tIns="0" rIns="0" bIns="0" rtlCol="0" anchor="ctr"/>
-          <a:lstStyle/>
-          <a:p>
-            <a:pPr indent="0" marL="0">
-              <a:buNone/>
-            </a:pPr>
-            <a:r>
-              <a:rPr lang="en-US" sz="1600" b="1" dirty="0">
-                <a:solidFill>
-                  <a:srgbClr val="0B2E33"/>
+            <a:off x="822960" y="2103120"/>
+            <a:ext cx="4480560" cy="1051560"/>
+          </a:xfrm>
+          <a:prstGeom prst="rect">
+            <a:avLst/>
+          </a:prstGeom>
+          <a:noFill/>
+          <a:ln/>
+        </p:spPr>
+        <p:txBody>
+          <a:bodyPr wrap="square" lIns="0" tIns="0" rIns="0" bIns="0" rtlCol="0" anchor="ctr"/>
+          <a:lstStyle/>
+          <a:p>
+            <a:pPr algn="ctr" indent="0" marL="0">
+              <a:buNone/>
+            </a:pPr>
+            <a:r>
+              <a:rPr lang="en-US" sz="4400" b="1" dirty="0">
+                <a:solidFill>
+                  <a:srgbClr val="02C39A"/>
                 </a:solidFill>
                 <a:latin typeface="Wanted Sans" pitchFamily="34" charset="0"/>
                 <a:ea typeface="Wanted Sans" pitchFamily="34" charset="-122"/>
                 <a:cs typeface="Wanted Sans" pitchFamily="34" charset="-120"/>
               </a:rPr>
-              <a:t>술 중·후 VAS 및 기타 지표 (Table 3)</a:t>
-            </a:r>
-            <a:endParaRPr lang="en-US" sz="1600" dirty="0"/>
+              <a:t>122.1 ± 52.9</a:t>
+            </a:r>
+            <a:endParaRPr lang="en-US" sz="4400" dirty="0"/>
           </a:p>
         </p:txBody>
       </p:sp>
@@ -5120,95 +5649,34 @@
         </p:nvSpPr>
         <p:spPr>
           <a:xfrm>
-            <a:off x="868680" y="2697480"/>
-            <a:ext cx="4754880" cy="3108960"/>
-          </a:xfrm>
-          <a:prstGeom prst="rect">
-            <a:avLst/>
-          </a:prstGeom>
-          <a:noFill/>
-          <a:ln/>
-        </p:spPr>
-        <p:txBody>
-          <a:bodyPr wrap="square" lIns="0" tIns="0" rIns="0" bIns="0" rtlCol="0" anchor="ctr"/>
-          <a:lstStyle/>
-          <a:p>
-            <a:pPr indent="0" marL="0">
-              <a:lnSpc>
-                <a:spcPct val="140000"/>
-              </a:lnSpc>
-              <a:buNone/>
-            </a:pPr>
-            <a:r>
-              <a:rPr lang="en-US" sz="1300" dirty="0">
-                <a:solidFill>
-                  <a:srgbClr val="5B7A7E"/>
-                </a:solidFill>
-                <a:latin typeface="Pretendard" pitchFamily="34" charset="0"/>
-                <a:ea typeface="Pretendard" pitchFamily="34" charset="-122"/>
-                <a:cs typeface="Pretendard" pitchFamily="34" charset="-120"/>
-              </a:rPr>
-              <a:t>VAS 통증 점수: 리도카인 3.62±2.46 vs 아티카인 3.75±2.56 — 유의차 없음</a:t>
-            </a:r>
-            <a:endParaRPr lang="en-US" sz="1300" dirty="0"/>
-          </a:p>
-          <a:p>
-            <a:pPr indent="0" marL="0">
-              <a:lnSpc>
-                <a:spcPct val="140000"/>
-              </a:lnSpc>
-              <a:buNone/>
-            </a:pPr>
-            <a:endParaRPr lang="en-US" sz="1300" dirty="0"/>
-          </a:p>
-          <a:p>
-            <a:pPr indent="0" marL="0">
-              <a:lnSpc>
-                <a:spcPct val="140000"/>
-              </a:lnSpc>
-              <a:buNone/>
-            </a:pPr>
-            <a:r>
-              <a:rPr lang="en-US" sz="1300" dirty="0">
-                <a:solidFill>
-                  <a:srgbClr val="5B7A7E"/>
-                </a:solidFill>
-                <a:latin typeface="Pretendard" pitchFamily="34" charset="0"/>
-                <a:ea typeface="Pretendard" pitchFamily="34" charset="-122"/>
-                <a:cs typeface="Pretendard" pitchFamily="34" charset="-120"/>
-              </a:rPr>
-              <a:t>수술 시간(분): 리도카인 33.45±21.85 vs 아티카인 28.86±15.13 — 유의차 없음</a:t>
-            </a:r>
-            <a:endParaRPr lang="en-US" sz="1300" dirty="0"/>
-          </a:p>
-          <a:p>
-            <a:pPr indent="0" marL="0">
-              <a:lnSpc>
-                <a:spcPct val="140000"/>
-              </a:lnSpc>
-              <a:buNone/>
-            </a:pPr>
-            <a:endParaRPr lang="en-US" sz="1300" dirty="0"/>
-          </a:p>
-          <a:p>
-            <a:pPr indent="0" marL="0">
-              <a:lnSpc>
-                <a:spcPct val="140000"/>
-              </a:lnSpc>
-              <a:buNone/>
-            </a:pPr>
-            <a:r>
-              <a:rPr lang="en-US" sz="1300" dirty="0">
-                <a:solidFill>
-                  <a:srgbClr val="5B7A7E"/>
-                </a:solidFill>
-                <a:latin typeface="Pretendard" pitchFamily="34" charset="0"/>
-                <a:ea typeface="Pretendard" pitchFamily="34" charset="-122"/>
-                <a:cs typeface="Pretendard" pitchFamily="34" charset="-120"/>
-              </a:rPr>
-              <a:t>마취 지속시간(분): 리도카인 260.4±96.02 vs 아티카인 278.2±127.6 — 유의차 없음</a:t>
-            </a:r>
-            <a:endParaRPr lang="en-US" sz="1300" dirty="0"/>
+            <a:off x="822960" y="3246120"/>
+            <a:ext cx="4480560" cy="548640"/>
+          </a:xfrm>
+          <a:prstGeom prst="rect">
+            <a:avLst/>
+          </a:prstGeom>
+          <a:noFill/>
+          <a:ln/>
+        </p:spPr>
+        <p:txBody>
+          <a:bodyPr wrap="square" lIns="0" tIns="0" rIns="0" bIns="0" rtlCol="0" anchor="ctr"/>
+          <a:lstStyle/>
+          <a:p>
+            <a:pPr algn="ctr" indent="0" marL="0">
+              <a:buNone/>
+            </a:pPr>
+            <a:r>
+              <a:rPr lang="en-US" sz="1500" b="1" dirty="0">
+                <a:solidFill>
+                  <a:srgbClr val="0B2E33"/>
+                </a:solidFill>
+                <a:latin typeface="Pretendard" pitchFamily="34" charset="0"/>
+                <a:ea typeface="Pretendard" pitchFamily="34" charset="-122"/>
+                <a:cs typeface="Pretendard" pitchFamily="34" charset="-120"/>
+              </a:rPr>
+              <a:t>초 · 아티카인</a:t>
+            </a:r>
+            <a:endParaRPr lang="en-US" sz="1500" dirty="0"/>
           </a:p>
         </p:txBody>
       </p:sp>
@@ -5220,18 +5688,25 @@
         </p:nvSpPr>
         <p:spPr>
           <a:xfrm>
-            <a:off x="6263640" y="1920240"/>
-            <a:ext cx="5349240" cy="4114800"/>
+            <a:off x="5669280" y="1874520"/>
+            <a:ext cx="4480560" cy="2103120"/>
           </a:xfrm>
           <a:prstGeom prst="roundRect">
             <a:avLst>
-              <a:gd name="adj" fmla="val 2222"/>
+              <a:gd name="adj" fmla="val 5217"/>
             </a:avLst>
           </a:prstGeom>
           <a:solidFill>
-            <a:srgbClr val="0B2E33"/>
+            <a:srgbClr val="FFFFFF"/>
           </a:solidFill>
           <a:ln/>
+          <a:effectLst>
+            <a:outerShdw sx="100000" sy="100000" kx="0" ky="0" algn="bl" rotWithShape="0" blurRad="76200" dist="25400" dir="5400000">
+              <a:srgbClr val="000000">
+                <a:alpha val="12000"/>
+              </a:srgbClr>
+            </a:outerShdw>
+          </a:effectLst>
         </p:spPr>
       </p:sp>
       <p:sp>
@@ -5242,34 +5717,34 @@
         </p:nvSpPr>
         <p:spPr>
           <a:xfrm>
-            <a:off x="6583680" y="2148840"/>
-            <a:ext cx="4754880" cy="457200"/>
-          </a:xfrm>
-          <a:prstGeom prst="rect">
-            <a:avLst/>
-          </a:prstGeom>
-          <a:noFill/>
-          <a:ln/>
-        </p:spPr>
-        <p:txBody>
-          <a:bodyPr wrap="square" lIns="0" tIns="0" rIns="0" bIns="0" rtlCol="0" anchor="ctr"/>
-          <a:lstStyle/>
-          <a:p>
-            <a:pPr indent="0" marL="0">
-              <a:buNone/>
-            </a:pPr>
-            <a:r>
-              <a:rPr lang="en-US" sz="1600" b="1" dirty="0">
-                <a:solidFill>
-                  <a:srgbClr val="02C39A"/>
+            <a:off x="5669280" y="2103120"/>
+            <a:ext cx="4480560" cy="1051560"/>
+          </a:xfrm>
+          <a:prstGeom prst="rect">
+            <a:avLst/>
+          </a:prstGeom>
+          <a:noFill/>
+          <a:ln/>
+        </p:spPr>
+        <p:txBody>
+          <a:bodyPr wrap="square" lIns="0" tIns="0" rIns="0" bIns="0" rtlCol="0" anchor="ctr"/>
+          <a:lstStyle/>
+          <a:p>
+            <a:pPr algn="ctr" indent="0" marL="0">
+              <a:buNone/>
+            </a:pPr>
+            <a:r>
+              <a:rPr lang="en-US" sz="4400" b="1" dirty="0">
+                <a:solidFill>
+                  <a:srgbClr val="5B7A7E"/>
                 </a:solidFill>
                 <a:latin typeface="Wanted Sans" pitchFamily="34" charset="0"/>
                 <a:ea typeface="Wanted Sans" pitchFamily="34" charset="-122"/>
                 <a:cs typeface="Wanted Sans" pitchFamily="34" charset="-120"/>
               </a:rPr>
-              <a:t>저자 결론 요약</a:t>
-            </a:r>
-            <a:endParaRPr lang="en-US" sz="1600" dirty="0"/>
+              <a:t>144.5 ± 68.9</a:t>
+            </a:r>
+            <a:endParaRPr lang="en-US" sz="4400" dirty="0"/>
           </a:p>
         </p:txBody>
       </p:sp>
@@ -5281,111 +5756,186 @@
         </p:nvSpPr>
         <p:spPr>
           <a:xfrm>
-            <a:off x="6583680" y="2697480"/>
-            <a:ext cx="4754880" cy="3108960"/>
-          </a:xfrm>
-          <a:prstGeom prst="rect">
-            <a:avLst/>
-          </a:prstGeom>
-          <a:noFill/>
-          <a:ln/>
-        </p:spPr>
-        <p:txBody>
-          <a:bodyPr wrap="square" lIns="0" tIns="0" rIns="0" bIns="0" rtlCol="0" anchor="ctr"/>
-          <a:lstStyle/>
-          <a:p>
-            <a:pPr indent="0" marL="0">
-              <a:lnSpc>
-                <a:spcPct val="145000"/>
-              </a:lnSpc>
-              <a:buNone/>
-            </a:pPr>
-            <a:r>
-              <a:rPr lang="en-US" sz="1450" dirty="0">
-                <a:solidFill>
-                  <a:srgbClr val="FFFFFF"/>
-                </a:solidFill>
-                <a:latin typeface="Pretendard" pitchFamily="34" charset="0"/>
-                <a:ea typeface="Pretendard" pitchFamily="34" charset="-122"/>
-                <a:cs typeface="Pretendard" pitchFamily="34" charset="-120"/>
-              </a:rPr>
-              <a:t>4% 아티카인이 2% 리도카인 대비 </a:t>
-            </a:r>
-            <a:pPr indent="0" marL="0">
-              <a:lnSpc>
-                <a:spcPct val="145000"/>
-              </a:lnSpc>
-              <a:buNone/>
-            </a:pPr>
-            <a:r>
-              <a:rPr lang="en-US" sz="1450" b="1" dirty="0">
-                <a:solidFill>
-                  <a:srgbClr val="02C39A"/>
-                </a:solidFill>
-                <a:latin typeface="Pretendard" pitchFamily="34" charset="0"/>
-                <a:ea typeface="Pretendard" pitchFamily="34" charset="-122"/>
-                <a:cs typeface="Pretendard" pitchFamily="34" charset="-120"/>
-              </a:rPr>
-              <a:t>마취 발현이 더 빠르고</a:t>
-            </a:r>
-            <a:pPr indent="0" marL="0">
-              <a:lnSpc>
-                <a:spcPct val="145000"/>
-              </a:lnSpc>
-              <a:buNone/>
-            </a:pPr>
-            <a:r>
-              <a:rPr lang="en-US" sz="1450" dirty="0">
-                <a:solidFill>
-                  <a:srgbClr val="FFFFFF"/>
-                </a:solidFill>
-                <a:latin typeface="Pretendard" pitchFamily="34" charset="0"/>
-                <a:ea typeface="Pretendard" pitchFamily="34" charset="-122"/>
-                <a:cs typeface="Pretendard" pitchFamily="34" charset="-120"/>
-              </a:rPr>
-              <a:t>, 추가 마취 필요성이 </a:t>
-            </a:r>
-            <a:pPr indent="0" marL="0">
-              <a:lnSpc>
-                <a:spcPct val="145000"/>
-              </a:lnSpc>
-              <a:buNone/>
-            </a:pPr>
-            <a:r>
-              <a:rPr lang="en-US" sz="1450" b="1" dirty="0">
-                <a:solidFill>
-                  <a:srgbClr val="02C39A"/>
-                </a:solidFill>
-                <a:latin typeface="Pretendard" pitchFamily="34" charset="0"/>
-                <a:ea typeface="Pretendard" pitchFamily="34" charset="-122"/>
-                <a:cs typeface="Pretendard" pitchFamily="34" charset="-120"/>
-              </a:rPr>
-              <a:t>더 낮아</a:t>
-            </a:r>
-            <a:pPr indent="0" marL="0">
-              <a:lnSpc>
-                <a:spcPct val="145000"/>
-              </a:lnSpc>
-              <a:buNone/>
-            </a:pPr>
-            <a:r>
-              <a:rPr lang="en-US" sz="1450" dirty="0">
-                <a:solidFill>
-                  <a:srgbClr val="FFFFFF"/>
-                </a:solidFill>
-                <a:latin typeface="Pretendard" pitchFamily="34" charset="0"/>
-                <a:ea typeface="Pretendard" pitchFamily="34" charset="-122"/>
-                <a:cs typeface="Pretendard" pitchFamily="34" charset="-120"/>
-              </a:rPr>
-              <a:t> 제3대구치 발치 시 유리한 선택지가 될 수 있음을 시사한다.</a:t>
-            </a:r>
-            <a:endParaRPr lang="en-US" sz="1450" dirty="0"/>
+            <a:off x="5669280" y="3246120"/>
+            <a:ext cx="4480560" cy="548640"/>
+          </a:xfrm>
+          <a:prstGeom prst="rect">
+            <a:avLst/>
+          </a:prstGeom>
+          <a:noFill/>
+          <a:ln/>
+        </p:spPr>
+        <p:txBody>
+          <a:bodyPr wrap="square" lIns="0" tIns="0" rIns="0" bIns="0" rtlCol="0" anchor="ctr"/>
+          <a:lstStyle/>
+          <a:p>
+            <a:pPr algn="ctr" indent="0" marL="0">
+              <a:buNone/>
+            </a:pPr>
+            <a:r>
+              <a:rPr lang="en-US" sz="1500" b="1" dirty="0">
+                <a:solidFill>
+                  <a:srgbClr val="0B2E33"/>
+                </a:solidFill>
+                <a:latin typeface="Pretendard" pitchFamily="34" charset="0"/>
+                <a:ea typeface="Pretendard" pitchFamily="34" charset="-122"/>
+                <a:cs typeface="Pretendard" pitchFamily="34" charset="-120"/>
+              </a:rPr>
+              <a:t>초 · 리도카인</a:t>
+            </a:r>
+            <a:endParaRPr lang="en-US" sz="1500" dirty="0"/>
           </a:p>
         </p:txBody>
       </p:sp>
       <p:sp>
         <p:nvSpPr>
           <p:cNvPr id="10" name="Text 8"/>
+          <p:cNvSpPr txBox="1"/>
+          <p:nvPr/>
+        </p:nvSpPr>
+        <p:spPr>
+          <a:xfrm>
+            <a:off x="822960" y="4206240"/>
+            <a:ext cx="10424160" cy="457200"/>
+          </a:xfrm>
+          <a:prstGeom prst="rect">
+            <a:avLst/>
+          </a:prstGeom>
+          <a:noFill/>
+          <a:ln/>
+        </p:spPr>
+        <p:txBody>
+          <a:bodyPr wrap="square" lIns="0" tIns="0" rIns="0" bIns="0" rtlCol="0" anchor="ctr"/>
+          <a:lstStyle/>
+          <a:p>
+            <a:pPr indent="0" marL="0">
+              <a:buNone/>
+            </a:pPr>
+            <a:r>
+              <a:rPr lang="en-US" sz="1400" i="1" dirty="0">
+                <a:solidFill>
+                  <a:srgbClr val="028090"/>
+                </a:solidFill>
+                <a:latin typeface="Pretendard" pitchFamily="34" charset="0"/>
+                <a:ea typeface="Pretendard" pitchFamily="34" charset="-122"/>
+                <a:cs typeface="Pretendard" pitchFamily="34" charset="-120"/>
+              </a:rPr>
+              <a:t>→ 아티카인 측이 평균 22.4초 더 빠르게 발현 (p&lt;0.01, paired t-test)</a:t>
+            </a:r>
+            <a:endParaRPr lang="en-US" sz="1400" dirty="0"/>
+          </a:p>
+        </p:txBody>
+      </p:sp>
+      <p:sp>
+        <p:nvSpPr>
+          <p:cNvPr id="11" name="Shape 9"/>
+          <p:cNvSpPr/>
+          <p:nvPr/>
+        </p:nvSpPr>
+        <p:spPr>
+          <a:xfrm>
+            <a:off x="822960" y="4892040"/>
+            <a:ext cx="10424160" cy="1188720"/>
+          </a:xfrm>
+          <a:prstGeom prst="roundRect">
+            <a:avLst>
+              <a:gd name="adj" fmla="val 7692"/>
+            </a:avLst>
+          </a:prstGeom>
+          <a:solidFill>
+            <a:srgbClr val="F7FBFB"/>
+          </a:solidFill>
+          <a:ln w="12700">
+            <a:solidFill>
+              <a:srgbClr val="00A896">
+                <a:alpha val="30000"/>
+              </a:srgbClr>
+            </a:solidFill>
+            <a:prstDash val="solid"/>
+          </a:ln>
+        </p:spPr>
+      </p:sp>
+      <p:sp>
+        <p:nvSpPr>
+          <p:cNvPr id="12" name="Text 10"/>
+          <p:cNvSpPr txBox="1"/>
+          <p:nvPr/>
+        </p:nvSpPr>
+        <p:spPr>
+          <a:xfrm>
+            <a:off x="1097280" y="5029200"/>
+            <a:ext cx="2743200" cy="365760"/>
+          </a:xfrm>
+          <a:prstGeom prst="rect">
+            <a:avLst/>
+          </a:prstGeom>
+          <a:noFill/>
+          <a:ln/>
+        </p:spPr>
+        <p:txBody>
+          <a:bodyPr wrap="square" lIns="0" tIns="0" rIns="0" bIns="0" rtlCol="0" anchor="ctr"/>
+          <a:lstStyle/>
+          <a:p>
+            <a:pPr indent="0" marL="0">
+              <a:buNone/>
+            </a:pPr>
+            <a:r>
+              <a:rPr lang="en-US" sz="1300" b="1" dirty="0">
+                <a:solidFill>
+                  <a:srgbClr val="00A896"/>
+                </a:solidFill>
+                <a:latin typeface="Pretendard" pitchFamily="34" charset="0"/>
+                <a:ea typeface="Pretendard" pitchFamily="34" charset="-122"/>
+                <a:cs typeface="Pretendard" pitchFamily="34" charset="-120"/>
+              </a:rPr>
+              <a:t>추가 소견</a:t>
+            </a:r>
+            <a:endParaRPr lang="en-US" sz="1300" dirty="0"/>
+          </a:p>
+        </p:txBody>
+      </p:sp>
+      <p:sp>
+        <p:nvSpPr>
+          <p:cNvPr id="13" name="Text 11"/>
+          <p:cNvSpPr txBox="1"/>
+          <p:nvPr/>
+        </p:nvSpPr>
+        <p:spPr>
+          <a:xfrm>
+            <a:off x="1097280" y="5349240"/>
+            <a:ext cx="9875520" cy="640080"/>
+          </a:xfrm>
+          <a:prstGeom prst="rect">
+            <a:avLst/>
+          </a:prstGeom>
+          <a:noFill/>
+          <a:ln/>
+        </p:spPr>
+        <p:txBody>
+          <a:bodyPr wrap="square" lIns="0" tIns="0" rIns="0" bIns="0" rtlCol="0" anchor="ctr"/>
+          <a:lstStyle/>
+          <a:p>
+            <a:pPr indent="0" marL="0">
+              <a:buNone/>
+            </a:pPr>
+            <a:r>
+              <a:rPr lang="en-US" sz="1300" dirty="0">
+                <a:solidFill>
+                  <a:srgbClr val="0B2E33"/>
+                </a:solidFill>
+                <a:latin typeface="Pretendard" pitchFamily="34" charset="0"/>
+                <a:ea typeface="Pretendard" pitchFamily="34" charset="-122"/>
+                <a:cs typeface="Pretendard" pitchFamily="34" charset="-120"/>
+              </a:rPr>
+              <a:t>추가 마취(보충 주사) 튜브 수: 아티카인 0.26±0.48개 vs 리도카인 0.50±0.75개 (p&lt;0.01) — 리도카인 측에서 유의하게 더 많이 필요.</a:t>
+            </a:r>
+            <a:endParaRPr lang="en-US" sz="1300" dirty="0"/>
+          </a:p>
+        </p:txBody>
+      </p:sp>
+      <p:sp>
+        <p:nvSpPr>
+          <p:cNvPr id="14" name="Text 12"/>
           <p:cNvSpPr txBox="1"/>
           <p:nvPr/>
         </p:nvSpPr>
@@ -5487,7 +6037,7 @@
                 <a:ea typeface="Pretendard" pitchFamily="34" charset="-122"/>
                 <a:cs typeface="Pretendard" pitchFamily="34" charset="-120"/>
               </a:rPr>
-              <a:t>CRITICAL APPRAISAL</a:t>
+              <a:t>RESULTS</a:t>
             </a:r>
             <a:endParaRPr lang="en-US" sz="1300" dirty="0"/>
           </a:p>
@@ -5526,7 +6076,7 @@
                 <a:ea typeface="Wanted Sans" pitchFamily="34" charset="-122"/>
                 <a:cs typeface="Wanted Sans" pitchFamily="34" charset="-120"/>
               </a:rPr>
-              <a:t>비평적 고찰 (본인 의견 작성)</a:t>
+              <a:t>통증(VAS) 및 종합 소견</a:t>
             </a:r>
             <a:endParaRPr lang="en-US" sz="3000" dirty="0"/>
           </a:p>
@@ -5541,22 +6091,24 @@
         <p:spPr>
           <a:xfrm>
             <a:off x="548640" y="1920240"/>
-            <a:ext cx="3611880" cy="4114800"/>
+            <a:ext cx="5349240" cy="4114800"/>
           </a:xfrm>
           <a:prstGeom prst="roundRect">
             <a:avLst>
-              <a:gd name="adj" fmla="val 2532"/>
+              <a:gd name="adj" fmla="val 2222"/>
             </a:avLst>
           </a:prstGeom>
           <a:solidFill>
             <a:srgbClr val="FFFFFF"/>
           </a:solidFill>
-          <a:ln w="15875">
-            <a:solidFill>
-              <a:srgbClr val="02C39A"/>
-            </a:solidFill>
-            <a:prstDash val="dash"/>
-          </a:ln>
+          <a:ln/>
+          <a:effectLst>
+            <a:outerShdw sx="100000" sy="100000" kx="0" ky="0" algn="bl" rotWithShape="0" blurRad="63500" dist="25400" dir="5400000">
+              <a:srgbClr val="000000">
+                <a:alpha val="10000"/>
+              </a:srgbClr>
+            </a:outerShdw>
+          </a:effectLst>
         </p:spPr>
       </p:sp>
       <p:sp>
@@ -5567,8 +6119,8 @@
         </p:nvSpPr>
         <p:spPr>
           <a:xfrm>
-            <a:off x="822960" y="2148840"/>
-            <a:ext cx="3063240" cy="457200"/>
+            <a:off x="868680" y="2148840"/>
+            <a:ext cx="4754880" cy="457200"/>
           </a:xfrm>
           <a:prstGeom prst="rect">
             <a:avLst/>
@@ -5586,13 +6138,13 @@
             <a:r>
               <a:rPr lang="en-US" sz="1600" b="1" dirty="0">
                 <a:solidFill>
-                  <a:srgbClr val="028090"/>
+                  <a:srgbClr val="0B2E33"/>
                 </a:solidFill>
                 <a:latin typeface="Wanted Sans" pitchFamily="34" charset="0"/>
                 <a:ea typeface="Wanted Sans" pitchFamily="34" charset="-122"/>
                 <a:cs typeface="Wanted Sans" pitchFamily="34" charset="-120"/>
               </a:rPr>
-              <a:t>강점</a:t>
+              <a:t>술 중·후 VAS 및 기타 지표 (Table 3)</a:t>
             </a:r>
             <a:endParaRPr lang="en-US" sz="1600" dirty="0"/>
           </a:p>
@@ -5606,8 +6158,8 @@
         </p:nvSpPr>
         <p:spPr>
           <a:xfrm>
-            <a:off x="822960" y="2697480"/>
-            <a:ext cx="3063240" cy="2651760"/>
+            <a:off x="868680" y="2697480"/>
+            <a:ext cx="4754880" cy="3108960"/>
           </a:xfrm>
           <a:prstGeom prst="rect">
             <a:avLst/>
@@ -5621,111 +6173,70 @@
           <a:p>
             <a:pPr indent="0" marL="0">
               <a:lnSpc>
-                <a:spcPct val="135000"/>
+                <a:spcPct val="140000"/>
               </a:lnSpc>
               <a:buNone/>
             </a:pPr>
             <a:r>
-              <a:rPr lang="en-US" sz="1200" dirty="0">
-                <a:solidFill>
-                  <a:srgbClr val="0B2E33"/>
-                </a:solidFill>
-                <a:latin typeface="Pretendard" pitchFamily="34" charset="0"/>
-                <a:ea typeface="Pretendard" pitchFamily="34" charset="-122"/>
-                <a:cs typeface="Pretendard" pitchFamily="34" charset="-120"/>
-              </a:rPr>
-              <a:t>· Split-mouth 설계로 개체간 변이(연령·통증 역치 등) 통제</a:t>
-            </a:r>
-            <a:endParaRPr lang="en-US" sz="1200" dirty="0"/>
+              <a:rPr lang="en-US" sz="1300" dirty="0">
+                <a:solidFill>
+                  <a:srgbClr val="5B7A7E"/>
+                </a:solidFill>
+                <a:latin typeface="Pretendard" pitchFamily="34" charset="0"/>
+                <a:ea typeface="Pretendard" pitchFamily="34" charset="-122"/>
+                <a:cs typeface="Pretendard" pitchFamily="34" charset="-120"/>
+              </a:rPr>
+              <a:t>VAS 통증 점수: 리도카인 3.62±2.46 vs 아티카인 3.75±2.56 — 유의차 없음</a:t>
+            </a:r>
+            <a:endParaRPr lang="en-US" sz="1300" dirty="0"/>
           </a:p>
           <a:p>
             <a:pPr indent="0" marL="0">
               <a:lnSpc>
-                <a:spcPct val="135000"/>
+                <a:spcPct val="140000"/>
               </a:lnSpc>
               <a:buNone/>
             </a:pPr>
-            <a:r>
-              <a:rPr lang="en-US" sz="1200" dirty="0">
-                <a:solidFill>
-                  <a:srgbClr val="0B2E33"/>
-                </a:solidFill>
-                <a:latin typeface="Pretendard" pitchFamily="34" charset="0"/>
-                <a:ea typeface="Pretendard" pitchFamily="34" charset="-122"/>
-                <a:cs typeface="Pretendard" pitchFamily="34" charset="-120"/>
-              </a:rPr>
-              <a:t>· 이중눈가림 + 무작위 배정(randomization table)</a:t>
-            </a:r>
-            <a:endParaRPr lang="en-US" sz="1200" dirty="0"/>
+            <a:endParaRPr lang="en-US" sz="1300" dirty="0"/>
           </a:p>
           <a:p>
             <a:pPr indent="0" marL="0">
               <a:lnSpc>
-                <a:spcPct val="135000"/>
+                <a:spcPct val="140000"/>
               </a:lnSpc>
               <a:buNone/>
             </a:pPr>
             <a:r>
-              <a:rPr lang="en-US" sz="1200" dirty="0">
-                <a:solidFill>
-                  <a:srgbClr val="0B2E33"/>
-                </a:solidFill>
-                <a:latin typeface="Pretendard" pitchFamily="34" charset="0"/>
-                <a:ea typeface="Pretendard" pitchFamily="34" charset="-122"/>
-                <a:cs typeface="Pretendard" pitchFamily="34" charset="-120"/>
-              </a:rPr>
-              <a:t>· CONSORT 가이드라인 준수, 사전 임상시험 등록(REBEC)</a:t>
-            </a:r>
-            <a:endParaRPr lang="en-US" sz="1200" dirty="0"/>
+              <a:rPr lang="en-US" sz="1300" dirty="0">
+                <a:solidFill>
+                  <a:srgbClr val="5B7A7E"/>
+                </a:solidFill>
+                <a:latin typeface="Pretendard" pitchFamily="34" charset="0"/>
+                <a:ea typeface="Pretendard" pitchFamily="34" charset="-122"/>
+                <a:cs typeface="Pretendard" pitchFamily="34" charset="-120"/>
+              </a:rPr>
+              <a:t>수술 시간(분): 리도카인 33.45±21.85 vs 아티카인 28.86±15.13 — 유의차 없음</a:t>
+            </a:r>
+            <a:endParaRPr lang="en-US" sz="1300" dirty="0"/>
           </a:p>
           <a:p>
             <a:pPr indent="0" marL="0">
               <a:lnSpc>
-                <a:spcPct val="135000"/>
+                <a:spcPct val="140000"/>
               </a:lnSpc>
               <a:buNone/>
             </a:pPr>
-            <a:r>
-              <a:rPr lang="en-US" sz="1200" dirty="0">
-                <a:solidFill>
-                  <a:srgbClr val="0B2E33"/>
-                </a:solidFill>
-                <a:latin typeface="Pretendard" pitchFamily="34" charset="0"/>
-                <a:ea typeface="Pretendard" pitchFamily="34" charset="-122"/>
-                <a:cs typeface="Pretendard" pitchFamily="34" charset="-120"/>
-              </a:rPr>
-              <a:t>· 표본수 60명 = β power&gt;0.90 사전 계산 근거 명시</a:t>
-            </a:r>
-            <a:endParaRPr lang="en-US" sz="1200" dirty="0"/>
-          </a:p>
-        </p:txBody>
-      </p:sp>
-      <p:sp>
-        <p:nvSpPr>
-          <p:cNvPr id="7" name="Text 5"/>
-          <p:cNvSpPr txBox="1"/>
-          <p:nvPr/>
-        </p:nvSpPr>
-        <p:spPr>
-          <a:xfrm>
-            <a:off x="822960" y="5440680"/>
-            <a:ext cx="3063240" cy="274320"/>
-          </a:xfrm>
-          <a:prstGeom prst="rect">
-            <a:avLst/>
-          </a:prstGeom>
-          <a:noFill/>
-          <a:ln/>
-        </p:spPr>
-        <p:txBody>
-          <a:bodyPr wrap="square" lIns="0" tIns="0" rIns="0" bIns="0" rtlCol="0" anchor="ctr"/>
-          <a:lstStyle/>
-          <a:p>
-            <a:pPr indent="0" marL="0">
-              <a:buNone/>
-            </a:pPr>
-            <a:r>
-              <a:rPr lang="en-US" sz="1050" i="1" dirty="0">
+            <a:endParaRPr lang="en-US" sz="1300" dirty="0"/>
+          </a:p>
+          <a:p>
+            <a:pPr indent="0" marL="0">
+              <a:lnSpc>
+                <a:spcPct val="140000"/>
+              </a:lnSpc>
+              <a:buNone/>
+            </a:pPr>
+            <a:r>
+              <a:rPr lang="en-US" sz="1300" dirty="0">
                 <a:solidFill>
                   <a:srgbClr val="5B7A7E"/>
                 </a:solidFill>
@@ -5733,99 +6244,44 @@
                 <a:ea typeface="Pretendard" pitchFamily="34" charset="-122"/>
                 <a:cs typeface="Pretendard" pitchFamily="34" charset="-120"/>
               </a:rPr>
-              <a:t>(발표 시 본인 의견 추가)</a:t>
-            </a:r>
-            <a:endParaRPr lang="en-US" sz="1050" dirty="0"/>
-          </a:p>
-        </p:txBody>
-      </p:sp>
-      <p:sp>
-        <p:nvSpPr>
-          <p:cNvPr id="8" name="Shape 6"/>
+              <a:t>마취 지속시간(분): 리도카인 260.4±96.02 vs 아티카인 278.2±127.6 — 유의차 없음</a:t>
+            </a:r>
+            <a:endParaRPr lang="en-US" sz="1300" dirty="0"/>
+          </a:p>
+        </p:txBody>
+      </p:sp>
+      <p:sp>
+        <p:nvSpPr>
+          <p:cNvPr id="7" name="Shape 5"/>
           <p:cNvSpPr/>
           <p:nvPr/>
         </p:nvSpPr>
         <p:spPr>
           <a:xfrm>
-            <a:off x="822960" y="5760720"/>
-            <a:ext cx="3063240" cy="0"/>
-          </a:xfrm>
-          <a:prstGeom prst="line">
-            <a:avLst/>
-          </a:prstGeom>
-          <a:noFill/>
-          <a:ln w="9525">
-            <a:solidFill>
-              <a:srgbClr val="5B7A7E">
-                <a:alpha val="60000"/>
-              </a:srgbClr>
-            </a:solidFill>
-            <a:prstDash val="dash"/>
-          </a:ln>
-        </p:spPr>
-      </p:sp>
-      <p:sp>
-        <p:nvSpPr>
-          <p:cNvPr id="9" name="Shape 7"/>
-          <p:cNvSpPr/>
-          <p:nvPr/>
-        </p:nvSpPr>
-        <p:spPr>
-          <a:xfrm>
-            <a:off x="822960" y="6172200"/>
-            <a:ext cx="3063240" cy="0"/>
-          </a:xfrm>
-          <a:prstGeom prst="line">
-            <a:avLst/>
-          </a:prstGeom>
-          <a:noFill/>
-          <a:ln w="9525">
-            <a:solidFill>
-              <a:srgbClr val="5B7A7E">
-                <a:alpha val="60000"/>
-              </a:srgbClr>
-            </a:solidFill>
-            <a:prstDash val="dash"/>
-          </a:ln>
-        </p:spPr>
-      </p:sp>
-      <p:sp>
-        <p:nvSpPr>
-          <p:cNvPr id="10" name="Shape 8"/>
-          <p:cNvSpPr/>
-          <p:nvPr/>
-        </p:nvSpPr>
-        <p:spPr>
-          <a:xfrm>
-            <a:off x="4343400" y="1920240"/>
-            <a:ext cx="3611880" cy="4114800"/>
+            <a:off x="6263640" y="1920240"/>
+            <a:ext cx="5349240" cy="4114800"/>
           </a:xfrm>
           <a:prstGeom prst="roundRect">
             <a:avLst>
-              <a:gd name="adj" fmla="val 2532"/>
+              <a:gd name="adj" fmla="val 2222"/>
             </a:avLst>
           </a:prstGeom>
           <a:solidFill>
-            <a:srgbClr val="FFFFFF"/>
+            <a:srgbClr val="0B2E33"/>
           </a:solidFill>
-          <a:ln w="15875">
-            <a:solidFill>
-              <a:srgbClr val="02C39A"/>
-            </a:solidFill>
-            <a:prstDash val="dash"/>
-          </a:ln>
-        </p:spPr>
-      </p:sp>
-      <p:sp>
-        <p:nvSpPr>
-          <p:cNvPr id="11" name="Text 9"/>
-          <p:cNvSpPr txBox="1"/>
-          <p:nvPr/>
-        </p:nvSpPr>
-        <p:spPr>
-          <a:xfrm>
-            <a:off x="4617720" y="2148840"/>
-            <a:ext cx="3063240" cy="457200"/>
+          <a:ln/>
+        </p:spPr>
+      </p:sp>
+      <p:sp>
+        <p:nvSpPr>
+          <p:cNvPr id="8" name="Text 6"/>
+          <p:cNvSpPr txBox="1"/>
+          <p:nvPr/>
+        </p:nvSpPr>
+        <p:spPr>
+          <a:xfrm>
+            <a:off x="6583680" y="2148840"/>
+            <a:ext cx="4754880" cy="457200"/>
           </a:xfrm>
           <a:prstGeom prst="rect">
             <a:avLst/>
@@ -5843,13 +6299,13 @@
             <a:r>
               <a:rPr lang="en-US" sz="1600" b="1" dirty="0">
                 <a:solidFill>
-                  <a:srgbClr val="028090"/>
+                  <a:srgbClr val="02C39A"/>
                 </a:solidFill>
                 <a:latin typeface="Wanted Sans" pitchFamily="34" charset="0"/>
                 <a:ea typeface="Wanted Sans" pitchFamily="34" charset="-122"/>
                 <a:cs typeface="Wanted Sans" pitchFamily="34" charset="-120"/>
               </a:rPr>
-              <a:t>한계 / Bias 위험</a:t>
+              <a:t>저자 결론 요약</a:t>
             </a:r>
             <a:endParaRPr lang="en-US" sz="1600" dirty="0"/>
           </a:p>
@@ -5857,14 +6313,14 @@
       </p:sp>
       <p:sp>
         <p:nvSpPr>
-          <p:cNvPr id="12" name="Text 10"/>
-          <p:cNvSpPr txBox="1"/>
-          <p:nvPr/>
-        </p:nvSpPr>
-        <p:spPr>
-          <a:xfrm>
-            <a:off x="4617720" y="2697480"/>
-            <a:ext cx="3063240" cy="2651760"/>
+          <p:cNvPr id="9" name="Text 7"/>
+          <p:cNvSpPr txBox="1"/>
+          <p:nvPr/>
+        </p:nvSpPr>
+        <p:spPr>
+          <a:xfrm>
+            <a:off x="6583680" y="2697480"/>
+            <a:ext cx="4754880" cy="3108960"/>
           </a:xfrm>
           <a:prstGeom prst="rect">
             <a:avLst/>
@@ -5878,434 +6334,96 @@
           <a:p>
             <a:pPr indent="0" marL="0">
               <a:lnSpc>
-                <a:spcPct val="135000"/>
+                <a:spcPct val="145000"/>
               </a:lnSpc>
               <a:buNone/>
             </a:pPr>
             <a:r>
-              <a:rPr lang="en-US" sz="1200" dirty="0">
-                <a:solidFill>
-                  <a:srgbClr val="0B2E33"/>
-                </a:solidFill>
-                <a:latin typeface="Pretendard" pitchFamily="34" charset="0"/>
-                <a:ea typeface="Pretendard" pitchFamily="34" charset="-122"/>
-                <a:cs typeface="Pretendard" pitchFamily="34" charset="-120"/>
-              </a:rPr>
-              <a:t>· 상·하악을 동시에 발치해 상/하악별 마취 효과 비교 불가</a:t>
-            </a:r>
-            <a:endParaRPr lang="en-US" sz="1200" dirty="0"/>
-          </a:p>
-          <a:p>
+              <a:rPr lang="en-US" sz="1450" dirty="0">
+                <a:solidFill>
+                  <a:srgbClr val="FFFFFF"/>
+                </a:solidFill>
+                <a:latin typeface="Pretendard" pitchFamily="34" charset="0"/>
+                <a:ea typeface="Pretendard" pitchFamily="34" charset="-122"/>
+                <a:cs typeface="Pretendard" pitchFamily="34" charset="-120"/>
+              </a:rPr>
+              <a:t>4% 아티카인이 2% 리도카인 대비 </a:t>
+            </a:r>
             <a:pPr indent="0" marL="0">
               <a:lnSpc>
-                <a:spcPct val="135000"/>
+                <a:spcPct val="145000"/>
               </a:lnSpc>
               <a:buNone/>
             </a:pPr>
             <a:r>
-              <a:rPr lang="en-US" sz="1200" dirty="0">
-                <a:solidFill>
-                  <a:srgbClr val="0B2E33"/>
-                </a:solidFill>
-                <a:latin typeface="Pretendard" pitchFamily="34" charset="0"/>
-                <a:ea typeface="Pretendard" pitchFamily="34" charset="-122"/>
-                <a:cs typeface="Pretendard" pitchFamily="34" charset="-120"/>
-              </a:rPr>
-              <a:t>· 전신 진통제·소염제 병용 처방 — 통증 인지에 교란 가능</a:t>
-            </a:r>
-            <a:endParaRPr lang="en-US" sz="1200" dirty="0"/>
-          </a:p>
-          <a:p>
+              <a:rPr lang="en-US" sz="1450" b="1" dirty="0">
+                <a:solidFill>
+                  <a:srgbClr val="02C39A"/>
+                </a:solidFill>
+                <a:latin typeface="Pretendard" pitchFamily="34" charset="0"/>
+                <a:ea typeface="Pretendard" pitchFamily="34" charset="-122"/>
+                <a:cs typeface="Pretendard" pitchFamily="34" charset="-120"/>
+              </a:rPr>
+              <a:t>마취 발현이 더 빠르고</a:t>
+            </a:r>
             <a:pPr indent="0" marL="0">
               <a:lnSpc>
-                <a:spcPct val="135000"/>
+                <a:spcPct val="145000"/>
               </a:lnSpc>
               <a:buNone/>
             </a:pPr>
             <a:r>
-              <a:rPr lang="en-US" sz="1200" dirty="0">
-                <a:solidFill>
-                  <a:srgbClr val="0B2E33"/>
-                </a:solidFill>
-                <a:latin typeface="Pretendard" pitchFamily="34" charset="0"/>
-                <a:ea typeface="Pretendard" pitchFamily="34" charset="-122"/>
-                <a:cs typeface="Pretendard" pitchFamily="34" charset="-120"/>
-              </a:rPr>
-              <a:t>· 단일 기관(브라질) 연구 — 인종·시술자 숙련도 일반화 제한</a:t>
-            </a:r>
-            <a:endParaRPr lang="en-US" sz="1200" dirty="0"/>
-          </a:p>
-          <a:p>
+              <a:rPr lang="en-US" sz="1450" dirty="0">
+                <a:solidFill>
+                  <a:srgbClr val="FFFFFF"/>
+                </a:solidFill>
+                <a:latin typeface="Pretendard" pitchFamily="34" charset="0"/>
+                <a:ea typeface="Pretendard" pitchFamily="34" charset="-122"/>
+                <a:cs typeface="Pretendard" pitchFamily="34" charset="-120"/>
+              </a:rPr>
+              <a:t>, 추가 마취 필요성이 </a:t>
+            </a:r>
             <a:pPr indent="0" marL="0">
               <a:lnSpc>
-                <a:spcPct val="135000"/>
+                <a:spcPct val="145000"/>
               </a:lnSpc>
               <a:buNone/>
             </a:pPr>
             <a:r>
-              <a:rPr lang="en-US" sz="1200" dirty="0">
-                <a:solidFill>
-                  <a:srgbClr val="0B2E33"/>
-                </a:solidFill>
-                <a:latin typeface="Pretendard" pitchFamily="34" charset="0"/>
-                <a:ea typeface="Pretendard" pitchFamily="34" charset="-122"/>
-                <a:cs typeface="Pretendard" pitchFamily="34" charset="-120"/>
-              </a:rPr>
-              <a:t>· split-mouth 특성상 인접 부위로의 약물 확산 가능성</a:t>
-            </a:r>
-            <a:endParaRPr lang="en-US" sz="1200" dirty="0"/>
-          </a:p>
-        </p:txBody>
-      </p:sp>
-      <p:sp>
-        <p:nvSpPr>
-          <p:cNvPr id="13" name="Text 11"/>
-          <p:cNvSpPr txBox="1"/>
-          <p:nvPr/>
-        </p:nvSpPr>
-        <p:spPr>
-          <a:xfrm>
-            <a:off x="4617720" y="5440680"/>
-            <a:ext cx="3063240" cy="274320"/>
-          </a:xfrm>
-          <a:prstGeom prst="rect">
-            <a:avLst/>
-          </a:prstGeom>
-          <a:noFill/>
-          <a:ln/>
-        </p:spPr>
-        <p:txBody>
-          <a:bodyPr wrap="square" lIns="0" tIns="0" rIns="0" bIns="0" rtlCol="0" anchor="ctr"/>
-          <a:lstStyle/>
-          <a:p>
-            <a:pPr indent="0" marL="0">
-              <a:buNone/>
-            </a:pPr>
-            <a:r>
-              <a:rPr lang="en-US" sz="1050" i="1" dirty="0">
-                <a:solidFill>
-                  <a:srgbClr val="5B7A7E"/>
-                </a:solidFill>
-                <a:latin typeface="Pretendard" pitchFamily="34" charset="0"/>
-                <a:ea typeface="Pretendard" pitchFamily="34" charset="-122"/>
-                <a:cs typeface="Pretendard" pitchFamily="34" charset="-120"/>
-              </a:rPr>
-              <a:t>(발표 시 본인 의견 추가)</a:t>
-            </a:r>
-            <a:endParaRPr lang="en-US" sz="1050" dirty="0"/>
-          </a:p>
-        </p:txBody>
-      </p:sp>
-      <p:sp>
-        <p:nvSpPr>
-          <p:cNvPr id="14" name="Shape 12"/>
-          <p:cNvSpPr/>
-          <p:nvPr/>
-        </p:nvSpPr>
-        <p:spPr>
-          <a:xfrm>
-            <a:off x="4617720" y="5760720"/>
-            <a:ext cx="3063240" cy="0"/>
-          </a:xfrm>
-          <a:prstGeom prst="line">
-            <a:avLst/>
-          </a:prstGeom>
-          <a:noFill/>
-          <a:ln w="9525">
-            <a:solidFill>
-              <a:srgbClr val="5B7A7E">
-                <a:alpha val="60000"/>
-              </a:srgbClr>
-            </a:solidFill>
-            <a:prstDash val="dash"/>
-          </a:ln>
-        </p:spPr>
-      </p:sp>
-      <p:sp>
-        <p:nvSpPr>
-          <p:cNvPr id="15" name="Shape 13"/>
-          <p:cNvSpPr/>
-          <p:nvPr/>
-        </p:nvSpPr>
-        <p:spPr>
-          <a:xfrm>
-            <a:off x="4617720" y="6172200"/>
-            <a:ext cx="3063240" cy="0"/>
-          </a:xfrm>
-          <a:prstGeom prst="line">
-            <a:avLst/>
-          </a:prstGeom>
-          <a:noFill/>
-          <a:ln w="9525">
-            <a:solidFill>
-              <a:srgbClr val="5B7A7E">
-                <a:alpha val="60000"/>
-              </a:srgbClr>
-            </a:solidFill>
-            <a:prstDash val="dash"/>
-          </a:ln>
-        </p:spPr>
-      </p:sp>
-      <p:sp>
-        <p:nvSpPr>
-          <p:cNvPr id="16" name="Shape 14"/>
-          <p:cNvSpPr/>
-          <p:nvPr/>
-        </p:nvSpPr>
-        <p:spPr>
-          <a:xfrm>
-            <a:off x="8138160" y="1920240"/>
-            <a:ext cx="3611880" cy="4114800"/>
-          </a:xfrm>
-          <a:prstGeom prst="roundRect">
-            <a:avLst>
-              <a:gd name="adj" fmla="val 2532"/>
-            </a:avLst>
-          </a:prstGeom>
-          <a:solidFill>
-            <a:srgbClr val="FFFFFF"/>
-          </a:solidFill>
-          <a:ln w="15875">
-            <a:solidFill>
-              <a:srgbClr val="02C39A"/>
-            </a:solidFill>
-            <a:prstDash val="dash"/>
-          </a:ln>
-        </p:spPr>
-      </p:sp>
-      <p:sp>
-        <p:nvSpPr>
-          <p:cNvPr id="17" name="Text 15"/>
-          <p:cNvSpPr txBox="1"/>
-          <p:nvPr/>
-        </p:nvSpPr>
-        <p:spPr>
-          <a:xfrm>
-            <a:off x="8412480" y="2148840"/>
-            <a:ext cx="3063240" cy="457200"/>
-          </a:xfrm>
-          <a:prstGeom prst="rect">
-            <a:avLst/>
-          </a:prstGeom>
-          <a:noFill/>
-          <a:ln/>
-        </p:spPr>
-        <p:txBody>
-          <a:bodyPr wrap="square" lIns="0" tIns="0" rIns="0" bIns="0" rtlCol="0" anchor="ctr"/>
-          <a:lstStyle/>
-          <a:p>
-            <a:pPr indent="0" marL="0">
-              <a:buNone/>
-            </a:pPr>
-            <a:r>
-              <a:rPr lang="en-US" sz="1600" b="1" dirty="0">
-                <a:solidFill>
-                  <a:srgbClr val="028090"/>
-                </a:solidFill>
-                <a:latin typeface="Wanted Sans" pitchFamily="34" charset="0"/>
-                <a:ea typeface="Wanted Sans" pitchFamily="34" charset="-122"/>
-                <a:cs typeface="Wanted Sans" pitchFamily="34" charset="-120"/>
-              </a:rPr>
-              <a:t>임상 적용 가능성</a:t>
-            </a:r>
-            <a:endParaRPr lang="en-US" sz="1600" dirty="0"/>
-          </a:p>
-        </p:txBody>
-      </p:sp>
-      <p:sp>
-        <p:nvSpPr>
-          <p:cNvPr id="18" name="Text 16"/>
-          <p:cNvSpPr txBox="1"/>
-          <p:nvPr/>
-        </p:nvSpPr>
-        <p:spPr>
-          <a:xfrm>
-            <a:off x="8412480" y="2697480"/>
-            <a:ext cx="3063240" cy="2651760"/>
-          </a:xfrm>
-          <a:prstGeom prst="rect">
-            <a:avLst/>
-          </a:prstGeom>
-          <a:noFill/>
-          <a:ln/>
-        </p:spPr>
-        <p:txBody>
-          <a:bodyPr wrap="square" lIns="0" tIns="0" rIns="0" bIns="0" rtlCol="0" anchor="ctr"/>
-          <a:lstStyle/>
-          <a:p>
+              <a:rPr lang="en-US" sz="1450" b="1" dirty="0">
+                <a:solidFill>
+                  <a:srgbClr val="02C39A"/>
+                </a:solidFill>
+                <a:latin typeface="Pretendard" pitchFamily="34" charset="0"/>
+                <a:ea typeface="Pretendard" pitchFamily="34" charset="-122"/>
+                <a:cs typeface="Pretendard" pitchFamily="34" charset="-120"/>
+              </a:rPr>
+              <a:t>더 낮아</a:t>
+            </a:r>
             <a:pPr indent="0" marL="0">
               <a:lnSpc>
-                <a:spcPct val="135000"/>
+                <a:spcPct val="145000"/>
               </a:lnSpc>
               <a:buNone/>
             </a:pPr>
             <a:r>
-              <a:rPr lang="en-US" sz="1200" dirty="0">
-                <a:solidFill>
-                  <a:srgbClr val="0B2E33"/>
-                </a:solidFill>
-                <a:latin typeface="Pretendard" pitchFamily="34" charset="0"/>
-                <a:ea typeface="Pretendard" pitchFamily="34" charset="-122"/>
-                <a:cs typeface="Pretendard" pitchFamily="34" charset="-120"/>
-              </a:rPr>
-              <a:t>· 국내 임상에도 대체로 적용 가능(동일 기전의 아마이드계)</a:t>
-            </a:r>
-            <a:endParaRPr lang="en-US" sz="1200" dirty="0"/>
-          </a:p>
-          <a:p>
-            <a:pPr indent="0" marL="0">
-              <a:lnSpc>
-                <a:spcPct val="135000"/>
-              </a:lnSpc>
-              <a:buNone/>
-            </a:pPr>
-            <a:r>
-              <a:rPr lang="en-US" sz="1200" dirty="0">
-                <a:solidFill>
-                  <a:srgbClr val="0B2E33"/>
-                </a:solidFill>
-                <a:latin typeface="Pretendard" pitchFamily="34" charset="0"/>
-                <a:ea typeface="Pretendard" pitchFamily="34" charset="-122"/>
-                <a:cs typeface="Pretendard" pitchFamily="34" charset="-120"/>
-              </a:rPr>
-              <a:t>· 단, 국내 환자 대상 재현 데이터는 부재(연구계획서 과제와 연결)</a:t>
-            </a:r>
-            <a:endParaRPr lang="en-US" sz="1200" dirty="0"/>
-          </a:p>
-          <a:p>
-            <a:pPr indent="0" marL="0">
-              <a:lnSpc>
-                <a:spcPct val="135000"/>
-              </a:lnSpc>
-              <a:buNone/>
-            </a:pPr>
-            <a:r>
-              <a:rPr lang="en-US" sz="1200" dirty="0">
-                <a:solidFill>
-                  <a:srgbClr val="0B2E33"/>
-                </a:solidFill>
-                <a:latin typeface="Pretendard" pitchFamily="34" charset="0"/>
-                <a:ea typeface="Pretendard" pitchFamily="34" charset="-122"/>
-                <a:cs typeface="Pretendard" pitchFamily="34" charset="-120"/>
-              </a:rPr>
-              <a:t>· 발현시간 단축은 유의하나 절대적 차이(약 22초)는 임상적</a:t>
-            </a:r>
-            <a:endParaRPr lang="en-US" sz="1200" dirty="0"/>
-          </a:p>
-          <a:p>
-            <a:pPr indent="0" marL="0">
-              <a:lnSpc>
-                <a:spcPct val="135000"/>
-              </a:lnSpc>
-              <a:buNone/>
-            </a:pPr>
-            <a:r>
-              <a:rPr lang="en-US" sz="1200" dirty="0">
-                <a:solidFill>
-                  <a:srgbClr val="0B2E33"/>
-                </a:solidFill>
-                <a:latin typeface="Pretendard" pitchFamily="34" charset="0"/>
-                <a:ea typeface="Pretendard" pitchFamily="34" charset="-122"/>
-                <a:cs typeface="Pretendard" pitchFamily="34" charset="-120"/>
-              </a:rPr>
-              <a:t>  의미가 제한적일 수 있음 — 통계적 유의성 ≠ 임상적 유의성</a:t>
-            </a:r>
-            <a:endParaRPr lang="en-US" sz="1200" dirty="0"/>
-          </a:p>
-        </p:txBody>
-      </p:sp>
-      <p:sp>
-        <p:nvSpPr>
-          <p:cNvPr id="19" name="Text 17"/>
-          <p:cNvSpPr txBox="1"/>
-          <p:nvPr/>
-        </p:nvSpPr>
-        <p:spPr>
-          <a:xfrm>
-            <a:off x="8412480" y="5440680"/>
-            <a:ext cx="3063240" cy="274320"/>
-          </a:xfrm>
-          <a:prstGeom prst="rect">
-            <a:avLst/>
-          </a:prstGeom>
-          <a:noFill/>
-          <a:ln/>
-        </p:spPr>
-        <p:txBody>
-          <a:bodyPr wrap="square" lIns="0" tIns="0" rIns="0" bIns="0" rtlCol="0" anchor="ctr"/>
-          <a:lstStyle/>
-          <a:p>
-            <a:pPr indent="0" marL="0">
-              <a:buNone/>
-            </a:pPr>
-            <a:r>
-              <a:rPr lang="en-US" sz="1050" i="1" dirty="0">
-                <a:solidFill>
-                  <a:srgbClr val="5B7A7E"/>
-                </a:solidFill>
-                <a:latin typeface="Pretendard" pitchFamily="34" charset="0"/>
-                <a:ea typeface="Pretendard" pitchFamily="34" charset="-122"/>
-                <a:cs typeface="Pretendard" pitchFamily="34" charset="-120"/>
-              </a:rPr>
-              <a:t>(발표 시 본인 의견 추가)</a:t>
-            </a:r>
-            <a:endParaRPr lang="en-US" sz="1050" dirty="0"/>
-          </a:p>
-        </p:txBody>
-      </p:sp>
-      <p:sp>
-        <p:nvSpPr>
-          <p:cNvPr id="20" name="Shape 18"/>
-          <p:cNvSpPr/>
-          <p:nvPr/>
-        </p:nvSpPr>
-        <p:spPr>
-          <a:xfrm>
-            <a:off x="8412480" y="5760720"/>
-            <a:ext cx="3063240" cy="0"/>
-          </a:xfrm>
-          <a:prstGeom prst="line">
-            <a:avLst/>
-          </a:prstGeom>
-          <a:noFill/>
-          <a:ln w="9525">
-            <a:solidFill>
-              <a:srgbClr val="5B7A7E">
-                <a:alpha val="60000"/>
-              </a:srgbClr>
-            </a:solidFill>
-            <a:prstDash val="dash"/>
-          </a:ln>
-        </p:spPr>
-      </p:sp>
-      <p:sp>
-        <p:nvSpPr>
-          <p:cNvPr id="21" name="Shape 19"/>
-          <p:cNvSpPr/>
-          <p:nvPr/>
-        </p:nvSpPr>
-        <p:spPr>
-          <a:xfrm>
-            <a:off x="8412480" y="6172200"/>
-            <a:ext cx="3063240" cy="0"/>
-          </a:xfrm>
-          <a:prstGeom prst="line">
-            <a:avLst/>
-          </a:prstGeom>
-          <a:noFill/>
-          <a:ln w="9525">
-            <a:solidFill>
-              <a:srgbClr val="5B7A7E">
-                <a:alpha val="60000"/>
-              </a:srgbClr>
-            </a:solidFill>
-            <a:prstDash val="dash"/>
-          </a:ln>
-        </p:spPr>
-      </p:sp>
-      <p:sp>
-        <p:nvSpPr>
-          <p:cNvPr id="22" name="Text 20"/>
+              <a:rPr lang="en-US" sz="1450" dirty="0">
+                <a:solidFill>
+                  <a:srgbClr val="FFFFFF"/>
+                </a:solidFill>
+                <a:latin typeface="Pretendard" pitchFamily="34" charset="0"/>
+                <a:ea typeface="Pretendard" pitchFamily="34" charset="-122"/>
+                <a:cs typeface="Pretendard" pitchFamily="34" charset="-120"/>
+              </a:rPr>
+              <a:t> 제3대구치 발치 시 유리한 선택지가 될 수 있음을 시사한다.</a:t>
+            </a:r>
+            <a:endParaRPr lang="en-US" sz="1450" dirty="0"/>
+          </a:p>
+        </p:txBody>
+      </p:sp>
+      <p:sp>
+        <p:nvSpPr>
+          <p:cNvPr id="10" name="Text 8"/>
           <p:cNvSpPr txBox="1"/>
           <p:nvPr/>
         </p:nvSpPr>
@@ -6356,7 +6474,7 @@
     <p:bg>
       <p:bgPr>
         <a:solidFill>
-          <a:srgbClr val="028090"/>
+          <a:srgbClr val="F7FBFB"/>
         </a:solidFill>
       </p:bgPr>
     </p:bg>
@@ -6376,25 +6494,42 @@
       </p:grpSpPr>
       <p:sp>
         <p:nvSpPr>
-          <p:cNvPr id="2" name="Shape 0"/>
-          <p:cNvSpPr/>
-          <p:nvPr/>
-        </p:nvSpPr>
-        <p:spPr>
-          <a:xfrm>
-            <a:off x="-2743200" y="-2743200"/>
-            <a:ext cx="7315200" cy="7315200"/>
-          </a:xfrm>
-          <a:prstGeom prst="ellipse">
-            <a:avLst/>
-          </a:prstGeom>
-          <a:solidFill>
-            <a:srgbClr val="00A896">
-              <a:alpha val="40000"/>
-            </a:srgbClr>
-          </a:solidFill>
-          <a:ln/>
-        </p:spPr>
+          <p:cNvPr id="2" name="Text 0"/>
+          <p:cNvSpPr txBox="1"/>
+          <p:nvPr/>
+        </p:nvSpPr>
+        <p:spPr>
+          <a:xfrm>
+            <a:off x="548640" y="411480"/>
+            <a:ext cx="9144000" cy="365760"/>
+          </a:xfrm>
+          <a:prstGeom prst="rect">
+            <a:avLst/>
+          </a:prstGeom>
+          <a:noFill/>
+          <a:ln/>
+        </p:spPr>
+        <p:txBody>
+          <a:bodyPr wrap="square" lIns="0" tIns="0" rIns="0" bIns="0" rtlCol="0" anchor="ctr"/>
+          <a:lstStyle/>
+          <a:p>
+            <a:pPr indent="0" marL="0">
+              <a:buNone/>
+            </a:pPr>
+            <a:r>
+              <a:rPr lang="en-US" sz="1300" b="1" spc="100" kern="0" dirty="0">
+                <a:solidFill>
+                  <a:srgbClr val="00A896"/>
+                </a:solidFill>
+                <a:latin typeface="Pretendard" pitchFamily="34" charset="0"/>
+                <a:ea typeface="Pretendard" pitchFamily="34" charset="-122"/>
+                <a:cs typeface="Pretendard" pitchFamily="34" charset="-120"/>
+              </a:rPr>
+              <a:t>CRITICAL APPRAISAL</a:t>
+            </a:r>
+            <a:endParaRPr lang="en-US" sz="1300" dirty="0"/>
+          </a:p>
+        </p:txBody>
       </p:sp>
       <p:sp>
         <p:nvSpPr>
@@ -6404,109 +6539,113 @@
         </p:nvSpPr>
         <p:spPr>
           <a:xfrm>
-            <a:off x="822960" y="1463040"/>
-            <a:ext cx="9144000" cy="365760"/>
-          </a:xfrm>
-          <a:prstGeom prst="rect">
-            <a:avLst/>
-          </a:prstGeom>
-          <a:noFill/>
-          <a:ln/>
-        </p:spPr>
-        <p:txBody>
-          <a:bodyPr wrap="square" lIns="0" tIns="0" rIns="0" bIns="0" rtlCol="0" anchor="ctr"/>
-          <a:lstStyle/>
-          <a:p>
-            <a:pPr indent="0" marL="0">
-              <a:buNone/>
-            </a:pPr>
-            <a:r>
-              <a:rPr lang="en-US" sz="1300" b="1" spc="100" kern="0" dirty="0">
-                <a:solidFill>
-                  <a:srgbClr val="02C39A"/>
-                </a:solidFill>
-                <a:latin typeface="Pretendard" pitchFamily="34" charset="0"/>
-                <a:ea typeface="Pretendard" pitchFamily="34" charset="-122"/>
-                <a:cs typeface="Pretendard" pitchFamily="34" charset="-120"/>
-              </a:rPr>
-              <a:t>TAKE-HOME MESSAGE</a:t>
-            </a:r>
-            <a:endParaRPr lang="en-US" sz="1300" dirty="0"/>
-          </a:p>
-        </p:txBody>
-      </p:sp>
-      <p:sp>
-        <p:nvSpPr>
-          <p:cNvPr id="4" name="Text 2"/>
-          <p:cNvSpPr txBox="1"/>
-          <p:nvPr/>
-        </p:nvSpPr>
-        <p:spPr>
-          <a:xfrm>
-            <a:off x="822960" y="1965960"/>
-            <a:ext cx="10332720" cy="1828800"/>
-          </a:xfrm>
-          <a:prstGeom prst="rect">
-            <a:avLst/>
-          </a:prstGeom>
-          <a:noFill/>
-          <a:ln/>
-        </p:spPr>
-        <p:txBody>
-          <a:bodyPr wrap="square" lIns="0" tIns="0" rIns="0" bIns="0" rtlCol="0" anchor="ctr"/>
-          <a:lstStyle/>
-          <a:p>
-            <a:pPr indent="0" marL="0">
-              <a:lnSpc>
-                <a:spcPct val="130000"/>
-              </a:lnSpc>
-              <a:buNone/>
-            </a:pPr>
-            <a:r>
-              <a:rPr lang="en-US" sz="2700" b="1" dirty="0">
-                <a:solidFill>
-                  <a:srgbClr val="FFFFFF"/>
+            <a:off x="548640" y="749808"/>
+            <a:ext cx="11064240" cy="914400"/>
+          </a:xfrm>
+          <a:prstGeom prst="rect">
+            <a:avLst/>
+          </a:prstGeom>
+          <a:noFill/>
+          <a:ln/>
+        </p:spPr>
+        <p:txBody>
+          <a:bodyPr wrap="square" lIns="0" tIns="0" rIns="0" bIns="0" rtlCol="0" anchor="ctr"/>
+          <a:lstStyle/>
+          <a:p>
+            <a:pPr indent="0" marL="0">
+              <a:buNone/>
+            </a:pPr>
+            <a:r>
+              <a:rPr lang="en-US" sz="3000" b="1" dirty="0">
+                <a:solidFill>
+                  <a:srgbClr val="0B2E33"/>
                 </a:solidFill>
                 <a:latin typeface="Wanted Sans" pitchFamily="34" charset="0"/>
                 <a:ea typeface="Wanted Sans" pitchFamily="34" charset="-122"/>
                 <a:cs typeface="Wanted Sans" pitchFamily="34" charset="-120"/>
               </a:rPr>
-              <a:t>발치 시 빠른 마취 발현이 필요한 상황이라면,</a:t>
-            </a:r>
-            <a:endParaRPr lang="en-US" sz="2700" dirty="0"/>
-          </a:p>
-          <a:p>
-            <a:pPr indent="0" marL="0">
-              <a:lnSpc>
-                <a:spcPct val="130000"/>
-              </a:lnSpc>
-              <a:buNone/>
-            </a:pPr>
-            <a:r>
-              <a:rPr lang="en-US" sz="2700" b="1" dirty="0">
-                <a:solidFill>
-                  <a:srgbClr val="FFFFFF"/>
+              <a:t>비평적 고찰 (본인 의견 작성)</a:t>
+            </a:r>
+            <a:endParaRPr lang="en-US" sz="3000" dirty="0"/>
+          </a:p>
+        </p:txBody>
+      </p:sp>
+      <p:sp>
+        <p:nvSpPr>
+          <p:cNvPr id="4" name="Shape 2"/>
+          <p:cNvSpPr/>
+          <p:nvPr/>
+        </p:nvSpPr>
+        <p:spPr>
+          <a:xfrm>
+            <a:off x="548640" y="1920240"/>
+            <a:ext cx="3611880" cy="4114800"/>
+          </a:xfrm>
+          <a:prstGeom prst="roundRect">
+            <a:avLst>
+              <a:gd name="adj" fmla="val 2532"/>
+            </a:avLst>
+          </a:prstGeom>
+          <a:solidFill>
+            <a:srgbClr val="FFFFFF"/>
+          </a:solidFill>
+          <a:ln w="15875">
+            <a:solidFill>
+              <a:srgbClr val="02C39A"/>
+            </a:solidFill>
+            <a:prstDash val="dash"/>
+          </a:ln>
+        </p:spPr>
+      </p:sp>
+      <p:sp>
+        <p:nvSpPr>
+          <p:cNvPr id="5" name="Text 3"/>
+          <p:cNvSpPr txBox="1"/>
+          <p:nvPr/>
+        </p:nvSpPr>
+        <p:spPr>
+          <a:xfrm>
+            <a:off x="822960" y="2148840"/>
+            <a:ext cx="3063240" cy="457200"/>
+          </a:xfrm>
+          <a:prstGeom prst="rect">
+            <a:avLst/>
+          </a:prstGeom>
+          <a:noFill/>
+          <a:ln/>
+        </p:spPr>
+        <p:txBody>
+          <a:bodyPr wrap="square" lIns="0" tIns="0" rIns="0" bIns="0" rtlCol="0" anchor="ctr"/>
+          <a:lstStyle/>
+          <a:p>
+            <a:pPr indent="0" marL="0">
+              <a:buNone/>
+            </a:pPr>
+            <a:r>
+              <a:rPr lang="en-US" sz="1600" b="1" dirty="0">
+                <a:solidFill>
+                  <a:srgbClr val="028090"/>
                 </a:solidFill>
                 <a:latin typeface="Wanted Sans" pitchFamily="34" charset="0"/>
                 <a:ea typeface="Wanted Sans" pitchFamily="34" charset="-122"/>
                 <a:cs typeface="Wanted Sans" pitchFamily="34" charset="-120"/>
               </a:rPr>
-              <a:t>아티카인이 리도카인보다 유리한 선택지일 수 있다.</a:t>
-            </a:r>
-            <a:endParaRPr lang="en-US" sz="2700" dirty="0"/>
-          </a:p>
-        </p:txBody>
-      </p:sp>
-      <p:sp>
-        <p:nvSpPr>
-          <p:cNvPr id="5" name="Text 3"/>
-          <p:cNvSpPr txBox="1"/>
-          <p:nvPr/>
-        </p:nvSpPr>
-        <p:spPr>
-          <a:xfrm>
-            <a:off x="822960" y="3931920"/>
-            <a:ext cx="10332720" cy="822960"/>
+              <a:t>강점</a:t>
+            </a:r>
+            <a:endParaRPr lang="en-US" sz="1600" dirty="0"/>
+          </a:p>
+        </p:txBody>
+      </p:sp>
+      <p:sp>
+        <p:nvSpPr>
+          <p:cNvPr id="6" name="Text 4"/>
+          <p:cNvSpPr txBox="1"/>
+          <p:nvPr/>
+        </p:nvSpPr>
+        <p:spPr>
+          <a:xfrm>
+            <a:off x="822960" y="2697480"/>
+            <a:ext cx="3063240" cy="2651760"/>
           </a:xfrm>
           <a:prstGeom prst="rect">
             <a:avLst/>
@@ -6520,28 +6659,691 @@
           <a:p>
             <a:pPr indent="0" marL="0">
               <a:lnSpc>
-                <a:spcPct val="130000"/>
+                <a:spcPct val="135000"/>
               </a:lnSpc>
               <a:buNone/>
             </a:pPr>
             <a:r>
-              <a:rPr lang="en-US" sz="1400" i="1" dirty="0">
-                <a:solidFill>
-                  <a:srgbClr val="F7FBFB"/>
-                </a:solidFill>
-                <a:latin typeface="Pretendard" pitchFamily="34" charset="0"/>
-                <a:ea typeface="Pretendard" pitchFamily="34" charset="-122"/>
-                <a:cs typeface="Pretendard" pitchFamily="34" charset="-120"/>
-              </a:rPr>
-              <a:t>단, 근거는 특정 인구집단·단일 연구 기준 — 한국인 대상 재현/후속 연구로 확인이 필요함 (→ 본 과제의 연구계획서 참고)</a:t>
-            </a:r>
-            <a:endParaRPr lang="en-US" sz="1400" dirty="0"/>
-          </a:p>
-        </p:txBody>
-      </p:sp>
-      <p:sp>
-        <p:nvSpPr>
-          <p:cNvPr id="6" name="Text 4"/>
+              <a:rPr lang="en-US" sz="1200" dirty="0">
+                <a:solidFill>
+                  <a:srgbClr val="0B2E33"/>
+                </a:solidFill>
+                <a:latin typeface="Pretendard" pitchFamily="34" charset="0"/>
+                <a:ea typeface="Pretendard" pitchFamily="34" charset="-122"/>
+                <a:cs typeface="Pretendard" pitchFamily="34" charset="-120"/>
+              </a:rPr>
+              <a:t>· Split-mouth 설계로 개체간 변이(연령·통증 역치 등) 통제</a:t>
+            </a:r>
+            <a:endParaRPr lang="en-US" sz="1200" dirty="0"/>
+          </a:p>
+          <a:p>
+            <a:pPr indent="0" marL="0">
+              <a:lnSpc>
+                <a:spcPct val="135000"/>
+              </a:lnSpc>
+              <a:buNone/>
+            </a:pPr>
+            <a:r>
+              <a:rPr lang="en-US" sz="1200" dirty="0">
+                <a:solidFill>
+                  <a:srgbClr val="0B2E33"/>
+                </a:solidFill>
+                <a:latin typeface="Pretendard" pitchFamily="34" charset="0"/>
+                <a:ea typeface="Pretendard" pitchFamily="34" charset="-122"/>
+                <a:cs typeface="Pretendard" pitchFamily="34" charset="-120"/>
+              </a:rPr>
+              <a:t>· 이중눈가림 + 무작위 배정(randomization table)</a:t>
+            </a:r>
+            <a:endParaRPr lang="en-US" sz="1200" dirty="0"/>
+          </a:p>
+          <a:p>
+            <a:pPr indent="0" marL="0">
+              <a:lnSpc>
+                <a:spcPct val="135000"/>
+              </a:lnSpc>
+              <a:buNone/>
+            </a:pPr>
+            <a:r>
+              <a:rPr lang="en-US" sz="1200" dirty="0">
+                <a:solidFill>
+                  <a:srgbClr val="0B2E33"/>
+                </a:solidFill>
+                <a:latin typeface="Pretendard" pitchFamily="34" charset="0"/>
+                <a:ea typeface="Pretendard" pitchFamily="34" charset="-122"/>
+                <a:cs typeface="Pretendard" pitchFamily="34" charset="-120"/>
+              </a:rPr>
+              <a:t>· CONSORT 가이드라인 준수, 사전 임상시험 등록(REBEC)</a:t>
+            </a:r>
+            <a:endParaRPr lang="en-US" sz="1200" dirty="0"/>
+          </a:p>
+          <a:p>
+            <a:pPr indent="0" marL="0">
+              <a:lnSpc>
+                <a:spcPct val="135000"/>
+              </a:lnSpc>
+              <a:buNone/>
+            </a:pPr>
+            <a:r>
+              <a:rPr lang="en-US" sz="1200" dirty="0">
+                <a:solidFill>
+                  <a:srgbClr val="0B2E33"/>
+                </a:solidFill>
+                <a:latin typeface="Pretendard" pitchFamily="34" charset="0"/>
+                <a:ea typeface="Pretendard" pitchFamily="34" charset="-122"/>
+                <a:cs typeface="Pretendard" pitchFamily="34" charset="-120"/>
+              </a:rPr>
+              <a:t>· 표본수 60명 = β power&gt;0.90 사전 계산 근거 명시</a:t>
+            </a:r>
+            <a:endParaRPr lang="en-US" sz="1200" dirty="0"/>
+          </a:p>
+        </p:txBody>
+      </p:sp>
+      <p:sp>
+        <p:nvSpPr>
+          <p:cNvPr id="7" name="Text 5"/>
+          <p:cNvSpPr txBox="1"/>
+          <p:nvPr/>
+        </p:nvSpPr>
+        <p:spPr>
+          <a:xfrm>
+            <a:off x="822960" y="5440680"/>
+            <a:ext cx="3063240" cy="274320"/>
+          </a:xfrm>
+          <a:prstGeom prst="rect">
+            <a:avLst/>
+          </a:prstGeom>
+          <a:noFill/>
+          <a:ln/>
+        </p:spPr>
+        <p:txBody>
+          <a:bodyPr wrap="square" lIns="0" tIns="0" rIns="0" bIns="0" rtlCol="0" anchor="ctr"/>
+          <a:lstStyle/>
+          <a:p>
+            <a:pPr indent="0" marL="0">
+              <a:buNone/>
+            </a:pPr>
+            <a:r>
+              <a:rPr lang="en-US" sz="1050" i="1" dirty="0">
+                <a:solidFill>
+                  <a:srgbClr val="5B7A7E"/>
+                </a:solidFill>
+                <a:latin typeface="Pretendard" pitchFamily="34" charset="0"/>
+                <a:ea typeface="Pretendard" pitchFamily="34" charset="-122"/>
+                <a:cs typeface="Pretendard" pitchFamily="34" charset="-120"/>
+              </a:rPr>
+              <a:t>(발표 시 본인 의견 추가)</a:t>
+            </a:r>
+            <a:endParaRPr lang="en-US" sz="1050" dirty="0"/>
+          </a:p>
+        </p:txBody>
+      </p:sp>
+      <p:sp>
+        <p:nvSpPr>
+          <p:cNvPr id="8" name="Shape 6"/>
+          <p:cNvSpPr/>
+          <p:nvPr/>
+        </p:nvSpPr>
+        <p:spPr>
+          <a:xfrm>
+            <a:off x="822960" y="5760720"/>
+            <a:ext cx="3063240" cy="0"/>
+          </a:xfrm>
+          <a:prstGeom prst="line">
+            <a:avLst/>
+          </a:prstGeom>
+          <a:noFill/>
+          <a:ln w="9525">
+            <a:solidFill>
+              <a:srgbClr val="5B7A7E">
+                <a:alpha val="60000"/>
+              </a:srgbClr>
+            </a:solidFill>
+            <a:prstDash val="dash"/>
+          </a:ln>
+        </p:spPr>
+      </p:sp>
+      <p:sp>
+        <p:nvSpPr>
+          <p:cNvPr id="9" name="Shape 7"/>
+          <p:cNvSpPr/>
+          <p:nvPr/>
+        </p:nvSpPr>
+        <p:spPr>
+          <a:xfrm>
+            <a:off x="822960" y="6172200"/>
+            <a:ext cx="3063240" cy="0"/>
+          </a:xfrm>
+          <a:prstGeom prst="line">
+            <a:avLst/>
+          </a:prstGeom>
+          <a:noFill/>
+          <a:ln w="9525">
+            <a:solidFill>
+              <a:srgbClr val="5B7A7E">
+                <a:alpha val="60000"/>
+              </a:srgbClr>
+            </a:solidFill>
+            <a:prstDash val="dash"/>
+          </a:ln>
+        </p:spPr>
+      </p:sp>
+      <p:sp>
+        <p:nvSpPr>
+          <p:cNvPr id="10" name="Shape 8"/>
+          <p:cNvSpPr/>
+          <p:nvPr/>
+        </p:nvSpPr>
+        <p:spPr>
+          <a:xfrm>
+            <a:off x="4343400" y="1920240"/>
+            <a:ext cx="3611880" cy="4114800"/>
+          </a:xfrm>
+          <a:prstGeom prst="roundRect">
+            <a:avLst>
+              <a:gd name="adj" fmla="val 2532"/>
+            </a:avLst>
+          </a:prstGeom>
+          <a:solidFill>
+            <a:srgbClr val="FFFFFF"/>
+          </a:solidFill>
+          <a:ln w="15875">
+            <a:solidFill>
+              <a:srgbClr val="02C39A"/>
+            </a:solidFill>
+            <a:prstDash val="dash"/>
+          </a:ln>
+        </p:spPr>
+      </p:sp>
+      <p:sp>
+        <p:nvSpPr>
+          <p:cNvPr id="11" name="Text 9"/>
+          <p:cNvSpPr txBox="1"/>
+          <p:nvPr/>
+        </p:nvSpPr>
+        <p:spPr>
+          <a:xfrm>
+            <a:off x="4617720" y="2148840"/>
+            <a:ext cx="3063240" cy="457200"/>
+          </a:xfrm>
+          <a:prstGeom prst="rect">
+            <a:avLst/>
+          </a:prstGeom>
+          <a:noFill/>
+          <a:ln/>
+        </p:spPr>
+        <p:txBody>
+          <a:bodyPr wrap="square" lIns="0" tIns="0" rIns="0" bIns="0" rtlCol="0" anchor="ctr"/>
+          <a:lstStyle/>
+          <a:p>
+            <a:pPr indent="0" marL="0">
+              <a:buNone/>
+            </a:pPr>
+            <a:r>
+              <a:rPr lang="en-US" sz="1600" b="1" dirty="0">
+                <a:solidFill>
+                  <a:srgbClr val="028090"/>
+                </a:solidFill>
+                <a:latin typeface="Wanted Sans" pitchFamily="34" charset="0"/>
+                <a:ea typeface="Wanted Sans" pitchFamily="34" charset="-122"/>
+                <a:cs typeface="Wanted Sans" pitchFamily="34" charset="-120"/>
+              </a:rPr>
+              <a:t>한계 / Bias 위험</a:t>
+            </a:r>
+            <a:endParaRPr lang="en-US" sz="1600" dirty="0"/>
+          </a:p>
+        </p:txBody>
+      </p:sp>
+      <p:sp>
+        <p:nvSpPr>
+          <p:cNvPr id="12" name="Text 10"/>
+          <p:cNvSpPr txBox="1"/>
+          <p:nvPr/>
+        </p:nvSpPr>
+        <p:spPr>
+          <a:xfrm>
+            <a:off x="4617720" y="2697480"/>
+            <a:ext cx="3063240" cy="2651760"/>
+          </a:xfrm>
+          <a:prstGeom prst="rect">
+            <a:avLst/>
+          </a:prstGeom>
+          <a:noFill/>
+          <a:ln/>
+        </p:spPr>
+        <p:txBody>
+          <a:bodyPr wrap="square" lIns="0" tIns="0" rIns="0" bIns="0" rtlCol="0" anchor="ctr"/>
+          <a:lstStyle/>
+          <a:p>
+            <a:pPr indent="0" marL="0">
+              <a:lnSpc>
+                <a:spcPct val="135000"/>
+              </a:lnSpc>
+              <a:buNone/>
+            </a:pPr>
+            <a:r>
+              <a:rPr lang="en-US" sz="1200" dirty="0">
+                <a:solidFill>
+                  <a:srgbClr val="0B2E33"/>
+                </a:solidFill>
+                <a:latin typeface="Pretendard" pitchFamily="34" charset="0"/>
+                <a:ea typeface="Pretendard" pitchFamily="34" charset="-122"/>
+                <a:cs typeface="Pretendard" pitchFamily="34" charset="-120"/>
+              </a:rPr>
+              <a:t>· 상·하악을 동시에 발치해 상/하악별 마취 효과 비교 불가</a:t>
+            </a:r>
+            <a:endParaRPr lang="en-US" sz="1200" dirty="0"/>
+          </a:p>
+          <a:p>
+            <a:pPr indent="0" marL="0">
+              <a:lnSpc>
+                <a:spcPct val="135000"/>
+              </a:lnSpc>
+              <a:buNone/>
+            </a:pPr>
+            <a:r>
+              <a:rPr lang="en-US" sz="1200" dirty="0">
+                <a:solidFill>
+                  <a:srgbClr val="0B2E33"/>
+                </a:solidFill>
+                <a:latin typeface="Pretendard" pitchFamily="34" charset="0"/>
+                <a:ea typeface="Pretendard" pitchFamily="34" charset="-122"/>
+                <a:cs typeface="Pretendard" pitchFamily="34" charset="-120"/>
+              </a:rPr>
+              <a:t>· 전신 진통제·소염제 병용 처방 — 통증 인지에 교란 가능</a:t>
+            </a:r>
+            <a:endParaRPr lang="en-US" sz="1200" dirty="0"/>
+          </a:p>
+          <a:p>
+            <a:pPr indent="0" marL="0">
+              <a:lnSpc>
+                <a:spcPct val="135000"/>
+              </a:lnSpc>
+              <a:buNone/>
+            </a:pPr>
+            <a:r>
+              <a:rPr lang="en-US" sz="1200" dirty="0">
+                <a:solidFill>
+                  <a:srgbClr val="0B2E33"/>
+                </a:solidFill>
+                <a:latin typeface="Pretendard" pitchFamily="34" charset="0"/>
+                <a:ea typeface="Pretendard" pitchFamily="34" charset="-122"/>
+                <a:cs typeface="Pretendard" pitchFamily="34" charset="-120"/>
+              </a:rPr>
+              <a:t>· 단일 기관(브라질) 연구 — 인종·시술자 숙련도 일반화 제한</a:t>
+            </a:r>
+            <a:endParaRPr lang="en-US" sz="1200" dirty="0"/>
+          </a:p>
+          <a:p>
+            <a:pPr indent="0" marL="0">
+              <a:lnSpc>
+                <a:spcPct val="135000"/>
+              </a:lnSpc>
+              <a:buNone/>
+            </a:pPr>
+            <a:r>
+              <a:rPr lang="en-US" sz="1200" dirty="0">
+                <a:solidFill>
+                  <a:srgbClr val="0B2E33"/>
+                </a:solidFill>
+                <a:latin typeface="Pretendard" pitchFamily="34" charset="0"/>
+                <a:ea typeface="Pretendard" pitchFamily="34" charset="-122"/>
+                <a:cs typeface="Pretendard" pitchFamily="34" charset="-120"/>
+              </a:rPr>
+              <a:t>· split-mouth 특성상 인접 부위로의 약물 확산 가능성</a:t>
+            </a:r>
+            <a:endParaRPr lang="en-US" sz="1200" dirty="0"/>
+          </a:p>
+        </p:txBody>
+      </p:sp>
+      <p:sp>
+        <p:nvSpPr>
+          <p:cNvPr id="13" name="Text 11"/>
+          <p:cNvSpPr txBox="1"/>
+          <p:nvPr/>
+        </p:nvSpPr>
+        <p:spPr>
+          <a:xfrm>
+            <a:off x="4617720" y="5440680"/>
+            <a:ext cx="3063240" cy="274320"/>
+          </a:xfrm>
+          <a:prstGeom prst="rect">
+            <a:avLst/>
+          </a:prstGeom>
+          <a:noFill/>
+          <a:ln/>
+        </p:spPr>
+        <p:txBody>
+          <a:bodyPr wrap="square" lIns="0" tIns="0" rIns="0" bIns="0" rtlCol="0" anchor="ctr"/>
+          <a:lstStyle/>
+          <a:p>
+            <a:pPr indent="0" marL="0">
+              <a:buNone/>
+            </a:pPr>
+            <a:r>
+              <a:rPr lang="en-US" sz="1050" i="1" dirty="0">
+                <a:solidFill>
+                  <a:srgbClr val="5B7A7E"/>
+                </a:solidFill>
+                <a:latin typeface="Pretendard" pitchFamily="34" charset="0"/>
+                <a:ea typeface="Pretendard" pitchFamily="34" charset="-122"/>
+                <a:cs typeface="Pretendard" pitchFamily="34" charset="-120"/>
+              </a:rPr>
+              <a:t>(발표 시 본인 의견 추가)</a:t>
+            </a:r>
+            <a:endParaRPr lang="en-US" sz="1050" dirty="0"/>
+          </a:p>
+        </p:txBody>
+      </p:sp>
+      <p:sp>
+        <p:nvSpPr>
+          <p:cNvPr id="14" name="Shape 12"/>
+          <p:cNvSpPr/>
+          <p:nvPr/>
+        </p:nvSpPr>
+        <p:spPr>
+          <a:xfrm>
+            <a:off x="4617720" y="5760720"/>
+            <a:ext cx="3063240" cy="0"/>
+          </a:xfrm>
+          <a:prstGeom prst="line">
+            <a:avLst/>
+          </a:prstGeom>
+          <a:noFill/>
+          <a:ln w="9525">
+            <a:solidFill>
+              <a:srgbClr val="5B7A7E">
+                <a:alpha val="60000"/>
+              </a:srgbClr>
+            </a:solidFill>
+            <a:prstDash val="dash"/>
+          </a:ln>
+        </p:spPr>
+      </p:sp>
+      <p:sp>
+        <p:nvSpPr>
+          <p:cNvPr id="15" name="Shape 13"/>
+          <p:cNvSpPr/>
+          <p:nvPr/>
+        </p:nvSpPr>
+        <p:spPr>
+          <a:xfrm>
+            <a:off x="4617720" y="6172200"/>
+            <a:ext cx="3063240" cy="0"/>
+          </a:xfrm>
+          <a:prstGeom prst="line">
+            <a:avLst/>
+          </a:prstGeom>
+          <a:noFill/>
+          <a:ln w="9525">
+            <a:solidFill>
+              <a:srgbClr val="5B7A7E">
+                <a:alpha val="60000"/>
+              </a:srgbClr>
+            </a:solidFill>
+            <a:prstDash val="dash"/>
+          </a:ln>
+        </p:spPr>
+      </p:sp>
+      <p:sp>
+        <p:nvSpPr>
+          <p:cNvPr id="16" name="Shape 14"/>
+          <p:cNvSpPr/>
+          <p:nvPr/>
+        </p:nvSpPr>
+        <p:spPr>
+          <a:xfrm>
+            <a:off x="8138160" y="1920240"/>
+            <a:ext cx="3611880" cy="4114800"/>
+          </a:xfrm>
+          <a:prstGeom prst="roundRect">
+            <a:avLst>
+              <a:gd name="adj" fmla="val 2532"/>
+            </a:avLst>
+          </a:prstGeom>
+          <a:solidFill>
+            <a:srgbClr val="FFFFFF"/>
+          </a:solidFill>
+          <a:ln w="15875">
+            <a:solidFill>
+              <a:srgbClr val="02C39A"/>
+            </a:solidFill>
+            <a:prstDash val="dash"/>
+          </a:ln>
+        </p:spPr>
+      </p:sp>
+      <p:sp>
+        <p:nvSpPr>
+          <p:cNvPr id="17" name="Text 15"/>
+          <p:cNvSpPr txBox="1"/>
+          <p:nvPr/>
+        </p:nvSpPr>
+        <p:spPr>
+          <a:xfrm>
+            <a:off x="8412480" y="2148840"/>
+            <a:ext cx="3063240" cy="457200"/>
+          </a:xfrm>
+          <a:prstGeom prst="rect">
+            <a:avLst/>
+          </a:prstGeom>
+          <a:noFill/>
+          <a:ln/>
+        </p:spPr>
+        <p:txBody>
+          <a:bodyPr wrap="square" lIns="0" tIns="0" rIns="0" bIns="0" rtlCol="0" anchor="ctr"/>
+          <a:lstStyle/>
+          <a:p>
+            <a:pPr indent="0" marL="0">
+              <a:buNone/>
+            </a:pPr>
+            <a:r>
+              <a:rPr lang="en-US" sz="1600" b="1" dirty="0">
+                <a:solidFill>
+                  <a:srgbClr val="028090"/>
+                </a:solidFill>
+                <a:latin typeface="Wanted Sans" pitchFamily="34" charset="0"/>
+                <a:ea typeface="Wanted Sans" pitchFamily="34" charset="-122"/>
+                <a:cs typeface="Wanted Sans" pitchFamily="34" charset="-120"/>
+              </a:rPr>
+              <a:t>임상 적용 가능성</a:t>
+            </a:r>
+            <a:endParaRPr lang="en-US" sz="1600" dirty="0"/>
+          </a:p>
+        </p:txBody>
+      </p:sp>
+      <p:sp>
+        <p:nvSpPr>
+          <p:cNvPr id="18" name="Text 16"/>
+          <p:cNvSpPr txBox="1"/>
+          <p:nvPr/>
+        </p:nvSpPr>
+        <p:spPr>
+          <a:xfrm>
+            <a:off x="8412480" y="2697480"/>
+            <a:ext cx="3063240" cy="2651760"/>
+          </a:xfrm>
+          <a:prstGeom prst="rect">
+            <a:avLst/>
+          </a:prstGeom>
+          <a:noFill/>
+          <a:ln/>
+        </p:spPr>
+        <p:txBody>
+          <a:bodyPr wrap="square" lIns="0" tIns="0" rIns="0" bIns="0" rtlCol="0" anchor="ctr"/>
+          <a:lstStyle/>
+          <a:p>
+            <a:pPr indent="0" marL="0">
+              <a:lnSpc>
+                <a:spcPct val="135000"/>
+              </a:lnSpc>
+              <a:buNone/>
+            </a:pPr>
+            <a:r>
+              <a:rPr lang="en-US" sz="1200" dirty="0">
+                <a:solidFill>
+                  <a:srgbClr val="0B2E33"/>
+                </a:solidFill>
+                <a:latin typeface="Pretendard" pitchFamily="34" charset="0"/>
+                <a:ea typeface="Pretendard" pitchFamily="34" charset="-122"/>
+                <a:cs typeface="Pretendard" pitchFamily="34" charset="-120"/>
+              </a:rPr>
+              <a:t>· 국내 임상에도 대체로 적용 가능(동일 기전의 아마이드계)</a:t>
+            </a:r>
+            <a:endParaRPr lang="en-US" sz="1200" dirty="0"/>
+          </a:p>
+          <a:p>
+            <a:pPr indent="0" marL="0">
+              <a:lnSpc>
+                <a:spcPct val="135000"/>
+              </a:lnSpc>
+              <a:buNone/>
+            </a:pPr>
+            <a:r>
+              <a:rPr lang="en-US" sz="1200" dirty="0">
+                <a:solidFill>
+                  <a:srgbClr val="0B2E33"/>
+                </a:solidFill>
+                <a:latin typeface="Pretendard" pitchFamily="34" charset="0"/>
+                <a:ea typeface="Pretendard" pitchFamily="34" charset="-122"/>
+                <a:cs typeface="Pretendard" pitchFamily="34" charset="-120"/>
+              </a:rPr>
+              <a:t>· 단, 국내 환자 대상 재현 데이터는 부재(연구계획서 과제와 연결)</a:t>
+            </a:r>
+            <a:endParaRPr lang="en-US" sz="1200" dirty="0"/>
+          </a:p>
+          <a:p>
+            <a:pPr indent="0" marL="0">
+              <a:lnSpc>
+                <a:spcPct val="135000"/>
+              </a:lnSpc>
+              <a:buNone/>
+            </a:pPr>
+            <a:r>
+              <a:rPr lang="en-US" sz="1200" dirty="0">
+                <a:solidFill>
+                  <a:srgbClr val="0B2E33"/>
+                </a:solidFill>
+                <a:latin typeface="Pretendard" pitchFamily="34" charset="0"/>
+                <a:ea typeface="Pretendard" pitchFamily="34" charset="-122"/>
+                <a:cs typeface="Pretendard" pitchFamily="34" charset="-120"/>
+              </a:rPr>
+              <a:t>· 발현시간 단축은 유의하나 절대적 차이(약 22초)는 임상적</a:t>
+            </a:r>
+            <a:endParaRPr lang="en-US" sz="1200" dirty="0"/>
+          </a:p>
+          <a:p>
+            <a:pPr indent="0" marL="0">
+              <a:lnSpc>
+                <a:spcPct val="135000"/>
+              </a:lnSpc>
+              <a:buNone/>
+            </a:pPr>
+            <a:r>
+              <a:rPr lang="en-US" sz="1200" dirty="0">
+                <a:solidFill>
+                  <a:srgbClr val="0B2E33"/>
+                </a:solidFill>
+                <a:latin typeface="Pretendard" pitchFamily="34" charset="0"/>
+                <a:ea typeface="Pretendard" pitchFamily="34" charset="-122"/>
+                <a:cs typeface="Pretendard" pitchFamily="34" charset="-120"/>
+              </a:rPr>
+              <a:t>  의미가 제한적일 수 있음 — 통계적 유의성 ≠ 임상적 유의성</a:t>
+            </a:r>
+            <a:endParaRPr lang="en-US" sz="1200" dirty="0"/>
+          </a:p>
+        </p:txBody>
+      </p:sp>
+      <p:sp>
+        <p:nvSpPr>
+          <p:cNvPr id="19" name="Text 17"/>
+          <p:cNvSpPr txBox="1"/>
+          <p:nvPr/>
+        </p:nvSpPr>
+        <p:spPr>
+          <a:xfrm>
+            <a:off x="8412480" y="5440680"/>
+            <a:ext cx="3063240" cy="274320"/>
+          </a:xfrm>
+          <a:prstGeom prst="rect">
+            <a:avLst/>
+          </a:prstGeom>
+          <a:noFill/>
+          <a:ln/>
+        </p:spPr>
+        <p:txBody>
+          <a:bodyPr wrap="square" lIns="0" tIns="0" rIns="0" bIns="0" rtlCol="0" anchor="ctr"/>
+          <a:lstStyle/>
+          <a:p>
+            <a:pPr indent="0" marL="0">
+              <a:buNone/>
+            </a:pPr>
+            <a:r>
+              <a:rPr lang="en-US" sz="1050" i="1" dirty="0">
+                <a:solidFill>
+                  <a:srgbClr val="5B7A7E"/>
+                </a:solidFill>
+                <a:latin typeface="Pretendard" pitchFamily="34" charset="0"/>
+                <a:ea typeface="Pretendard" pitchFamily="34" charset="-122"/>
+                <a:cs typeface="Pretendard" pitchFamily="34" charset="-120"/>
+              </a:rPr>
+              <a:t>(발표 시 본인 의견 추가)</a:t>
+            </a:r>
+            <a:endParaRPr lang="en-US" sz="1050" dirty="0"/>
+          </a:p>
+        </p:txBody>
+      </p:sp>
+      <p:sp>
+        <p:nvSpPr>
+          <p:cNvPr id="20" name="Shape 18"/>
+          <p:cNvSpPr/>
+          <p:nvPr/>
+        </p:nvSpPr>
+        <p:spPr>
+          <a:xfrm>
+            <a:off x="8412480" y="5760720"/>
+            <a:ext cx="3063240" cy="0"/>
+          </a:xfrm>
+          <a:prstGeom prst="line">
+            <a:avLst/>
+          </a:prstGeom>
+          <a:noFill/>
+          <a:ln w="9525">
+            <a:solidFill>
+              <a:srgbClr val="5B7A7E">
+                <a:alpha val="60000"/>
+              </a:srgbClr>
+            </a:solidFill>
+            <a:prstDash val="dash"/>
+          </a:ln>
+        </p:spPr>
+      </p:sp>
+      <p:sp>
+        <p:nvSpPr>
+          <p:cNvPr id="21" name="Shape 19"/>
+          <p:cNvSpPr/>
+          <p:nvPr/>
+        </p:nvSpPr>
+        <p:spPr>
+          <a:xfrm>
+            <a:off x="8412480" y="6172200"/>
+            <a:ext cx="3063240" cy="0"/>
+          </a:xfrm>
+          <a:prstGeom prst="line">
+            <a:avLst/>
+          </a:prstGeom>
+          <a:noFill/>
+          <a:ln w="9525">
+            <a:solidFill>
+              <a:srgbClr val="5B7A7E">
+                <a:alpha val="60000"/>
+              </a:srgbClr>
+            </a:solidFill>
+            <a:prstDash val="dash"/>
+          </a:ln>
+        </p:spPr>
+      </p:sp>
+      <p:sp>
+        <p:nvSpPr>
+          <p:cNvPr id="22" name="Text 20"/>
           <p:cNvSpPr txBox="1"/>
           <p:nvPr/>
         </p:nvSpPr>

--- a/치과약리학실험2-논문발표/치과약리학실험2_논문발표.pptx
+++ b/치과약리학실험2-논문발표/치과약리학실험2_논문발표.pptx
@@ -955,7 +955,7 @@
           <a:p>
             <a:r>
               <a:rPr lang="en-US" dirty="0"/>
-              <a:t>이 슬라이드는 오늘 소개할 논문이 채우는 공백을 시각적으로 보여주는 목적. 세 연구 결과가 서로 다르다는 점을 강조.</a:t>
+              <a:t>원문 Discussion 문단(923쪽) 그대로 재구성한 내용 — refs 10,12(유의차 없음), refs 18-21(아티카인 우세, 각각 치수염/침윤단독/비숙련자 조건) 인용. '완충 제형' 관련 언급은 원문에 전혀 없으므로 슬라이드에서 완전히 제외함.</a:t>
             </a:r>
             <a:endParaRPr lang="en-US" dirty="0"/>
           </a:p>
@@ -3938,7 +3938,7 @@
                 <a:ea typeface="Pretendard" pitchFamily="34" charset="-122"/>
                 <a:cs typeface="Pretendard" pitchFamily="34" charset="-120"/>
               </a:rPr>
-              <a:t>완충(Buffered) 제형 효과는 연구마다 결과가 엇갈림</a:t>
+              <a:t>아티카인 vs 리도카인 비교 연구, 조건에 따라 결과가 엇갈림</a:t>
             </a:r>
             <a:endParaRPr lang="en-US" sz="1600" dirty="0"/>
           </a:p>
@@ -4006,7 +4006,7 @@
                 <a:ea typeface="Pretendard" pitchFamily="34" charset="-122"/>
                 <a:cs typeface="Pretendard" pitchFamily="34" charset="-120"/>
               </a:rPr>
-              <a:t>성인 · 제3대구치 발치 (2024, Springer)</a:t>
+              <a:t>신경차단 · 건강한 치아 · 숙련 시술자 (본 연구, 2024)</a:t>
             </a:r>
             <a:endParaRPr lang="en-US" sz="1350" dirty="0"/>
           </a:p>
@@ -4137,7 +4137,7 @@
                 <a:ea typeface="Pretendard" pitchFamily="34" charset="-122"/>
                 <a:cs typeface="Pretendard" pitchFamily="34" charset="-120"/>
               </a:rPr>
-              <a:t>성인 · 발치 시 완충 리도카인 (2024, JOMS/Cincinnati)</a:t>
+              <a:t>침윤마취만 시행 (Majid &amp; Ahmed 2018 등)</a:t>
             </a:r>
             <a:endParaRPr lang="en-US" sz="1350" dirty="0"/>
           </a:p>
@@ -4200,7 +4200,7 @@
                 <a:ea typeface="Pretendard" pitchFamily="34" charset="-122"/>
                 <a:cs typeface="Pretendard" pitchFamily="34" charset="-120"/>
               </a:rPr>
-              <a:t>완충 처리 효과 통계적 유의성 없음</a:t>
+              <a:t>두 약물 간 유의차 없음</a:t>
             </a:r>
             <a:endParaRPr lang="en-US" sz="1200" dirty="0"/>
           </a:p>
@@ -4268,7 +4268,7 @@
                 <a:ea typeface="Pretendard" pitchFamily="34" charset="-122"/>
                 <a:cs typeface="Pretendard" pitchFamily="34" charset="-120"/>
               </a:rPr>
-              <a:t>소아 · 침윤/전달마취 (2019, 2024)</a:t>
+              <a:t>치수염(pH 변화) · 비숙련 시술자 조건 (여러 RCT, refs 18–21)</a:t>
             </a:r>
             <a:endParaRPr lang="en-US" sz="1350" dirty="0"/>
           </a:p>
@@ -4331,7 +4331,7 @@
                 <a:ea typeface="Pretendard" pitchFamily="34" charset="-122"/>
                 <a:cs typeface="Pretendard" pitchFamily="34" charset="-120"/>
               </a:rPr>
-              <a:t>완충 제형이 주사통·발현시간 유의하게 개선</a:t>
+              <a:t>아티카인이 더 효과적</a:t>
             </a:r>
             <a:endParaRPr lang="en-US" sz="1200" dirty="0"/>
           </a:p>
@@ -4370,7 +4370,7 @@
                 <a:ea typeface="Pretendard" pitchFamily="34" charset="-122"/>
                 <a:cs typeface="Pretendard" pitchFamily="34" charset="-120"/>
               </a:rPr>
-              <a:t>→ 연령대·시술 종류에 따라 결과가 불일치 — 한국인 성인·제3대구치 발치 상황에 특화된 head-to-head 비교 데이터는 부재</a:t>
+              <a:t>→ 저자들 스스로도 밝히듯, 결과 차이는 마취 기법(신경차단 vs 침윤)·치아 상태(건강 vs 치수염)·시술자 숙련도 차이에서 기인 — 본 연구는 가장 표준적인 조건(신경차단·건강한 치아·숙련자)에서의 근거</a:t>
             </a:r>
             <a:endParaRPr lang="en-US" sz="1300" dirty="0"/>
           </a:p>

--- a/치과약리학실험2-논문발표/치과약리학실험2_논문발표.pptx
+++ b/치과약리학실험2-논문발표/치과약리학실험2_논문발표.pptx
@@ -1887,7 +1887,7 @@
                 <a:ea typeface="Wanted Sans" pitchFamily="34" charset="-122"/>
                 <a:cs typeface="Wanted Sans" pitchFamily="34" charset="-120"/>
               </a:rPr>
-              <a:t>Efficacy of Analgesia Promoted by Lidocaine and</a:t>
+              <a:t>제3대구치 발치 시 리도카인과 아티카인의</a:t>
             </a:r>
             <a:endParaRPr lang="en-US" sz="3400" dirty="0"/>
           </a:p>
@@ -1907,7 +1907,7 @@
                 <a:ea typeface="Wanted Sans" pitchFamily="34" charset="-122"/>
                 <a:cs typeface="Wanted Sans" pitchFamily="34" charset="-120"/>
               </a:rPr>
-              <a:t>Articaine in Third Molar Extraction Surgery</a:t>
+              <a:t>진통 효과 비교 — 스플릿마우스 무작위대조시험</a:t>
             </a:r>
             <a:endParaRPr lang="en-US" sz="3400" dirty="0"/>
           </a:p>
@@ -1922,23 +1922,26 @@
         <p:spPr>
           <a:xfrm>
             <a:off x="822960" y="3794760"/>
-            <a:ext cx="10058400" cy="457200"/>
-          </a:xfrm>
-          <a:prstGeom prst="rect">
-            <a:avLst/>
-          </a:prstGeom>
-          <a:noFill/>
-          <a:ln/>
-        </p:spPr>
-        <p:txBody>
-          <a:bodyPr wrap="square" lIns="0" tIns="0" rIns="0" bIns="0" rtlCol="0" anchor="ctr"/>
-          <a:lstStyle/>
-          <a:p>
-            <a:pPr indent="0" marL="0">
-              <a:buNone/>
-            </a:pPr>
-            <a:r>
-              <a:rPr lang="en-US" sz="1700" i="1" dirty="0">
+            <a:ext cx="10332720" cy="640080"/>
+          </a:xfrm>
+          <a:prstGeom prst="rect">
+            <a:avLst/>
+          </a:prstGeom>
+          <a:noFill/>
+          <a:ln/>
+        </p:spPr>
+        <p:txBody>
+          <a:bodyPr wrap="square" lIns="0" tIns="0" rIns="0" bIns="0" rtlCol="0" anchor="ctr"/>
+          <a:lstStyle/>
+          <a:p>
+            <a:pPr indent="0" marL="0">
+              <a:lnSpc>
+                <a:spcPct val="125000"/>
+              </a:lnSpc>
+              <a:buNone/>
+            </a:pPr>
+            <a:r>
+              <a:rPr lang="en-US" sz="1200" i="1" dirty="0">
                 <a:solidFill>
                   <a:srgbClr val="00A896"/>
                 </a:solidFill>
@@ -1946,9 +1949,9 @@
                 <a:ea typeface="Pretendard" pitchFamily="34" charset="-122"/>
                 <a:cs typeface="Pretendard" pitchFamily="34" charset="-120"/>
               </a:rPr>
-              <a:t>A Split-Mouth, Randomized, Controlled Trial</a:t>
-            </a:r>
-            <a:endParaRPr lang="en-US" sz="1700" dirty="0"/>
+              <a:t>원제  Efficacy of Analgesia Promoted by Lidocaine and Articaine in Third Molar Extraction Surgery: A Split-Mouth, Randomized, Controlled Trial</a:t>
+            </a:r>
+            <a:endParaRPr lang="en-US" sz="1200" dirty="0"/>
           </a:p>
         </p:txBody>
       </p:sp>
@@ -2155,7 +2158,7 @@
                 <a:ea typeface="Pretendard" pitchFamily="34" charset="-122"/>
                 <a:cs typeface="Pretendard" pitchFamily="34" charset="-120"/>
               </a:rPr>
-              <a:t>TAKE-HOME MESSAGE</a:t>
+              <a:t>핵심 결론</a:t>
             </a:r>
             <a:endParaRPr lang="en-US" sz="1300" dirty="0"/>
           </a:p>
@@ -2369,7 +2372,7 @@
                 <a:ea typeface="Wanted Sans" pitchFamily="34" charset="-122"/>
                 <a:cs typeface="Wanted Sans" pitchFamily="34" charset="-120"/>
               </a:rPr>
-              <a:t>Q &amp; A</a:t>
+              <a:t>질의응답</a:t>
             </a:r>
             <a:endParaRPr lang="en-US" sz="5400" dirty="0"/>
           </a:p>
@@ -2479,7 +2482,7 @@
                 <a:ea typeface="Pretendard" pitchFamily="34" charset="-122"/>
                 <a:cs typeface="Pretendard" pitchFamily="34" charset="-120"/>
               </a:rPr>
-              <a:t>BACKGROUND</a:t>
+              <a:t>배경</a:t>
             </a:r>
             <a:endParaRPr lang="en-US" sz="1300" dirty="0"/>
           </a:p>
@@ -3147,7 +3150,7 @@
                 <a:ea typeface="Pretendard" pitchFamily="34" charset="-122"/>
                 <a:cs typeface="Pretendard" pitchFamily="34" charset="-120"/>
               </a:rPr>
-              <a:t>PHARMACOLOGY</a:t>
+              <a:t>약리기전</a:t>
             </a:r>
             <a:endParaRPr lang="en-US" sz="1300" dirty="0"/>
           </a:p>
@@ -3860,7 +3863,7 @@
                 <a:ea typeface="Pretendard" pitchFamily="34" charset="-122"/>
                 <a:cs typeface="Pretendard" pitchFamily="34" charset="-120"/>
               </a:rPr>
-              <a:t>EVIDENCE GAP</a:t>
+              <a:t>선행연구 비교</a:t>
             </a:r>
             <a:endParaRPr lang="en-US" sz="1300" dirty="0"/>
           </a:p>
@@ -4480,7 +4483,7 @@
                 <a:ea typeface="Pretendard" pitchFamily="34" charset="-122"/>
                 <a:cs typeface="Pretendard" pitchFamily="34" charset="-120"/>
               </a:rPr>
-              <a:t>OBJECTIVE &amp; HYPOTHESIS</a:t>
+              <a:t>목적 및 가설</a:t>
             </a:r>
             <a:endParaRPr lang="en-US" sz="1300" dirty="0"/>
           </a:p>
@@ -4837,7 +4840,7 @@
                 <a:ea typeface="Pretendard" pitchFamily="34" charset="-122"/>
                 <a:cs typeface="Pretendard" pitchFamily="34" charset="-120"/>
               </a:rPr>
-              <a:t>METHODS</a:t>
+              <a:t>연구방법</a:t>
             </a:r>
             <a:endParaRPr lang="en-US" sz="1300" dirty="0"/>
           </a:p>
@@ -5528,7 +5531,7 @@
                 <a:ea typeface="Pretendard" pitchFamily="34" charset="-122"/>
                 <a:cs typeface="Pretendard" pitchFamily="34" charset="-120"/>
               </a:rPr>
-              <a:t>RESULTS</a:t>
+              <a:t>결과</a:t>
             </a:r>
             <a:endParaRPr lang="en-US" sz="1300" dirty="0"/>
           </a:p>
@@ -6037,7 +6040,7 @@
                 <a:ea typeface="Pretendard" pitchFamily="34" charset="-122"/>
                 <a:cs typeface="Pretendard" pitchFamily="34" charset="-120"/>
               </a:rPr>
-              <a:t>RESULTS</a:t>
+              <a:t>결과</a:t>
             </a:r>
             <a:endParaRPr lang="en-US" sz="1300" dirty="0"/>
           </a:p>
@@ -6525,7 +6528,7 @@
                 <a:ea typeface="Pretendard" pitchFamily="34" charset="-122"/>
                 <a:cs typeface="Pretendard" pitchFamily="34" charset="-120"/>
               </a:rPr>
-              <a:t>CRITICAL APPRAISAL</a:t>
+              <a:t>비평적 고찰</a:t>
             </a:r>
             <a:endParaRPr lang="en-US" sz="1300" dirty="0"/>
           </a:p>

--- a/치과약리학실험2-논문발표/치과약리학실험2_논문발표.pptx
+++ b/치과약리학실험2-논문발표/치과약리학실험2_논문발표.pptx
@@ -512,7 +512,7 @@
           <a:p>
             <a:r>
               <a:rPr lang="en-US" dirty="0"/>
-              <a:t>발표 시작 인사. 논문 출처(Springer, Oral and Maxillofacial Surgery, 2024), 선정 사유(치과약리학 직결, 최근 5년 이내, 국제학술지 Original article)를 한 줄로 언급.</a:t>
+              <a:t>발표 시작 인사. 논문 출처(J Pharm Bioallied Sci, 2026 최신호), 선정 사유(치과약리학 20장 NSAID/PGE2 내용과 직결, 5년 이내, 국제학술지 Original article)를 한 줄로 언급.</a:t>
             </a:r>
             <a:endParaRPr lang="en-US" dirty="0"/>
           </a:p>
@@ -600,7 +600,7 @@
           <a:p>
             <a:r>
               <a:rPr lang="en-US" dirty="0"/>
-              <a:t>연구계획서 과제(완충 아티카인 vs 리도카인, 한국인 대상)와 자연스럽게 연결하며 마무리. Q&amp;A로 전환.</a:t>
+              <a:t>치과약리학1 20장(NSAID/PGE2) 내용과의 연결을 다시 한번 언급하며 마무리. Q&amp;A로 전환.</a:t>
             </a:r>
             <a:endParaRPr lang="en-US" dirty="0"/>
           </a:p>
@@ -688,10 +688,11 @@
           <a:p>
             <a:r>
               <a:rPr lang="en-US" dirty="0"/>
-              <a:t>예상 질문 1: split-mouth 설계에서 두 마취제가 서로 확산되어 결과를 교란할 가능성은 없는가?
-예상 질문 2: 표본수 60명이 통계적으로 충분한가 (검정력 계산 근거)?
-예상 질문 3: 에피네프린 농도가 동일(1:100,000)한데 순수 약물 자체의 효과 차이로 볼 수 있는가, 농도(4% vs 2%) 차이의 영향은 아닌가?
-예상 질문 4: 이 결과를 한국인 임상 현장에 그대로 적용할 수 있는가(연구계획서 주제와 연결)?</a:t>
+              <a:t>예상 질문 1: 표본수가 군당 15명인데 통계적으로 충분한가?
+예상 질문 2: 진통제를 월 3일만 복용하게 했는데, 그 외 기간 환자가 임의로 다른 진통제를 먹었을 가능성은 어떻게 통제했는가?
+예상 질문 3: GCF 측정을 T1(1개월차) 한 번만 했는데, 2·3개월차의 생화학적 변화도 같은 패턴일 거라고 볼 수 있는가?
+예상 질문 4: 17.4% 이동량 차이가 실제 총 교정 치료기간을 얼마나 늘리는지, 임상적으로 의미 있는 수준인가?
+예상 질문 5: 아세트아미노펜의 진통 효과가 이부프로펜보다 약하다면, 환자 순응도(통증 참기)에는 문제가 없었는가?</a:t>
             </a:r>
             <a:endParaRPr lang="en-US" dirty="0"/>
           </a:p>
@@ -779,7 +780,7 @@
           <a:p>
             <a:r>
               <a:rPr lang="en-US" dirty="0"/>
-              <a:t>발치 시 통증 조절 실패가 환자 경험과 시술 효율에 미치는 영향을 도입부에서 강조. 리도카인/아티카인의 약리학적 차이(조직 침투력, pKa 등)는 다음 슬라이드로 연결.</a:t>
+              <a:t>치과약리학1 20장(통증·염증·관절질환 치료제)에서 배운 COX/PGE2/NSAID 내용이 그대로 이어짐을 언급하면 좋음.</a:t>
             </a:r>
             <a:endParaRPr lang="en-US" dirty="0"/>
           </a:p>
@@ -867,7 +868,7 @@
           <a:p>
             <a:r>
               <a:rPr lang="en-US" dirty="0"/>
-              <a:t>Q&amp;A 예상질문(농도 4% vs 2% 차이로 인한 교란)을 여기서 선제적으로 짚어주면 좋음. 아티카인의 티오펜 고리·에스터 곁사슬 구조는 약리학 교과서 표준 설명이므로 실습 교재/강의자료와 대조해 표현을 맞출 것.</a:t>
+              <a:t>이 슬라이드가 발표의 핵심 뼈대. Q&amp;A에서 '왜 아세트아미노펜을 대조군으로 썼나'라는 질문이 나오면 이 슬라이드로 바로 답변 가능.</a:t>
             </a:r>
             <a:endParaRPr lang="en-US" dirty="0"/>
           </a:p>
@@ -955,7 +956,7 @@
           <a:p>
             <a:r>
               <a:rPr lang="en-US" dirty="0"/>
-              <a:t>원문 Discussion 문단(923쪽) 그대로 재구성한 내용 — refs 10,12(유의차 없음), refs 18-21(아티카인 우세, 각각 치수염/침윤단독/비숙련자 조건) 인용. '완충 제형' 관련 언급은 원문에 전혀 없으므로 슬라이드에서 완전히 제외함.</a:t>
+              <a:t>원문 참고문헌 4,5,6,8번 기반. Shetty 2013이 사실상 직계 선행연구이고, 이번 논문은 여기에 RANKL과 3개월 종단설계를 더한 확장연구로 설명.</a:t>
             </a:r>
             <a:endParaRPr lang="en-US" dirty="0"/>
           </a:p>
@@ -1043,7 +1044,7 @@
           <a:p>
             <a:r>
               <a:rPr lang="en-US" dirty="0"/>
-              <a:t>가설은 저자들이 명시한 연구가설이 아니라 발표자가 선행연구 흐름을 근거로 재구성한 것임을 언급하면 좋음.</a:t>
+              <a:t>가설은 저자들이 명시한 것은 아니고, Background에서 제시한 PGE2-RANKL 기전으로부터 발표자가 재구성한 것임을 언급.</a:t>
             </a:r>
             <a:endParaRPr lang="en-US" dirty="0"/>
           </a:p>
@@ -1131,7 +1132,7 @@
           <a:p>
             <a:r>
               <a:rPr lang="en-US" dirty="0"/>
-              <a:t>split-mouth 설계의 장점(대상자 본인이 대조군 — 개체 간 변이 통제)을 설명. 이중눈가림이 어떻게 이뤄졌는지(투여자/평가자 분리 등) 원문에서 확인해 보충하면 좋음.</a:t>
+              <a:t>선정기준(Class II, 상악 제1소구치 발치+견치원심이동, 치주건강)과 제외기준(항염제·비스포스포네이트 복용, 흡연, 임신, 기존교정경험)은 원문에 있으므로 질문 오면 답변 가능.</a:t>
             </a:r>
             <a:endParaRPr lang="en-US" dirty="0"/>
           </a:p>
@@ -1219,7 +1220,7 @@
           <a:p>
             <a:r>
               <a:rPr lang="en-US" dirty="0"/>
-              <a:t>원문 Table 3 기준 수치로 확정. Results 본문에서는 p&lt;0.01, Abstract에서는 p&lt;0.05로 표기되어 있어 발표 시 Table 3 기준(p&lt;0.01)으로 통일해 설명할 것.</a:t>
+              <a:t>원문 Table 1(기저동질성: 연령 p=0.36, 성비 p=1.00)·Table 2 기준. 1개월차 비유의는 '누적효과'라는 포인트로 짚으면 좋음.</a:t>
             </a:r>
             <a:endParaRPr lang="en-US" dirty="0"/>
           </a:p>
@@ -1307,7 +1308,7 @@
           <a:p>
             <a:r>
               <a:rPr lang="en-US" dirty="0"/>
-              <a:t>VAS 관련 정량 수치는 검색 스니펫만으로 확보되지 않아 플레이스홀더로 남김 — 원문 Table/Figure를 확인해 직접 채워 넣을 것.</a:t>
+              <a:t>결과①(임상)과 결과②(생화학)가 같은 방향으로 정합된다는 점이 이 논문의 설득력 — Discussion에서 저자들이 강조하는 핵심.</a:t>
             </a:r>
             <a:endParaRPr lang="en-US" dirty="0"/>
           </a:p>
@@ -1395,7 +1396,7 @@
           <a:p>
             <a:r>
               <a:rPr lang="en-US" dirty="0"/>
-              <a:t>좌측 두 칸은 원문 Discussion·Limitations 절 기준 초안. 우측 임상 적용 가능성 칸의 '통계적 유의성 vs 임상적 유의성' 포인트는 Q&amp;A에서 자주 나오는 포인트이니 본인 의견으로 발전시킬 것. 빈 줄에는 실습·발표 리허설 중 떠오른 개인 의견을 추가.</a:t>
+              <a:t>우측 칸의 '통계적 유의성 vs 임상적 유의성' 포인트는 Q&amp;A에서 자주 나오는 질문이니 본인 의견으로 발전시킬 것.</a:t>
             </a:r>
             <a:endParaRPr lang="en-US" dirty="0"/>
           </a:p>
@@ -1879,7 +1880,7 @@
               <a:buNone/>
             </a:pPr>
             <a:r>
-              <a:rPr lang="en-US" sz="3400" b="1" dirty="0">
+              <a:rPr lang="en-US" sz="3200" b="1" dirty="0">
                 <a:solidFill>
                   <a:srgbClr val="FFFFFF"/>
                 </a:solidFill>
@@ -1887,9 +1888,9 @@
                 <a:ea typeface="Wanted Sans" pitchFamily="34" charset="-122"/>
                 <a:cs typeface="Wanted Sans" pitchFamily="34" charset="-120"/>
               </a:rPr>
-              <a:t>제3대구치 발치 시 리도카인과 아티카인의</a:t>
-            </a:r>
-            <a:endParaRPr lang="en-US" sz="3400" dirty="0"/>
+              <a:t>교정치료 중 진통제 선택이 치아이동 속도에 미치는 영향</a:t>
+            </a:r>
+            <a:endParaRPr lang="en-US" sz="3200" dirty="0"/>
           </a:p>
           <a:p>
             <a:pPr indent="0" marL="0">
@@ -1899,7 +1900,7 @@
               <a:buNone/>
             </a:pPr>
             <a:r>
-              <a:rPr lang="en-US" sz="3400" b="1" dirty="0">
+              <a:rPr lang="en-US" sz="3200" b="1" dirty="0">
                 <a:solidFill>
                   <a:srgbClr val="FFFFFF"/>
                 </a:solidFill>
@@ -1907,9 +1908,9 @@
                 <a:ea typeface="Wanted Sans" pitchFamily="34" charset="-122"/>
                 <a:cs typeface="Wanted Sans" pitchFamily="34" charset="-120"/>
               </a:rPr>
-              <a:t>진통 효과 비교 — 스플릿마우스 무작위대조시험</a:t>
-            </a:r>
-            <a:endParaRPr lang="en-US" sz="3400" dirty="0"/>
+              <a:t>— 이부프로펜 vs 아세트아미노펜 —</a:t>
+            </a:r>
+            <a:endParaRPr lang="en-US" sz="3200" dirty="0"/>
           </a:p>
         </p:txBody>
       </p:sp>
@@ -1949,7 +1950,7 @@
                 <a:ea typeface="Pretendard" pitchFamily="34" charset="-122"/>
                 <a:cs typeface="Pretendard" pitchFamily="34" charset="-120"/>
               </a:rPr>
-              <a:t>원제  Efficacy of Analgesia Promoted by Lidocaine and Articaine in Third Molar Extraction Surgery: A Split-Mouth, Randomized, Controlled Trial</a:t>
+              <a:t>원제  Evaluation of Systemic Nonsteroidal Anti-inflammatory Drugs on Orthodontic Tooth Movement Rate: A Clinical and Biomarker-Based Study</a:t>
             </a:r>
             <a:endParaRPr lang="en-US" sz="1200" dirty="0"/>
           </a:p>
@@ -2030,7 +2031,7 @@
                 <a:ea typeface="Pretendard" pitchFamily="34" charset="-122"/>
                 <a:cs typeface="Pretendard" pitchFamily="34" charset="-120"/>
               </a:rPr>
-              <a:t>Oral and Maxillofacial Surgery (Springer), 2024
+              <a:t>Journal of Pharmacy and Bioallied Sciences, 2026 (Vol.18, No.1)
 </a:t>
             </a:r>
             <a:pPr indent="0" marL="0">
@@ -2192,7 +2193,7 @@
               <a:buNone/>
             </a:pPr>
             <a:r>
-              <a:rPr lang="en-US" sz="2700" b="1" dirty="0">
+              <a:rPr lang="en-US" sz="2600" b="1" dirty="0">
                 <a:solidFill>
                   <a:srgbClr val="FFFFFF"/>
                 </a:solidFill>
@@ -2200,9 +2201,9 @@
                 <a:ea typeface="Wanted Sans" pitchFamily="34" charset="-122"/>
                 <a:cs typeface="Wanted Sans" pitchFamily="34" charset="-120"/>
               </a:rPr>
-              <a:t>발치 시 빠른 마취 발현이 필요한 상황이라면,</a:t>
-            </a:r>
-            <a:endParaRPr lang="en-US" sz="2700" dirty="0"/>
+              <a:t>교정치료 중 진통제 선택은 단순한 통증관리가 아니라,</a:t>
+            </a:r>
+            <a:endParaRPr lang="en-US" sz="2600" dirty="0"/>
           </a:p>
           <a:p>
             <a:pPr indent="0" marL="0">
@@ -2212,7 +2213,7 @@
               <a:buNone/>
             </a:pPr>
             <a:r>
-              <a:rPr lang="en-US" sz="2700" b="1" dirty="0">
+              <a:rPr lang="en-US" sz="2600" b="1" dirty="0">
                 <a:solidFill>
                   <a:srgbClr val="FFFFFF"/>
                 </a:solidFill>
@@ -2220,9 +2221,9 @@
                 <a:ea typeface="Wanted Sans" pitchFamily="34" charset="-122"/>
                 <a:cs typeface="Wanted Sans" pitchFamily="34" charset="-120"/>
               </a:rPr>
-              <a:t>아티카인이 리도카인보다 유리한 선택지일 수 있다.</a:t>
-            </a:r>
-            <a:endParaRPr lang="en-US" sz="2700" dirty="0"/>
+              <a:t>치아이동 속도에 실제로 영향을 주는 생역학적 결정이다.</a:t>
+            </a:r>
+            <a:endParaRPr lang="en-US" sz="2600" dirty="0"/>
           </a:p>
         </p:txBody>
       </p:sp>
@@ -2262,7 +2263,7 @@
                 <a:ea typeface="Pretendard" pitchFamily="34" charset="-122"/>
                 <a:cs typeface="Pretendard" pitchFamily="34" charset="-120"/>
               </a:rPr>
-              <a:t>단, 근거는 특정 인구집단·단일 연구 기준 — 한국인 대상 재현/후속 연구로 확인이 필요함 (→ 본 과제의 연구계획서 참고)</a:t>
+              <a:t>이부프로펜은 진통 효과는 우수하나 PGE2-RANKL 경로 억제로 치아이동을 늦출 수 있음 — 저자들은 교정환자에게 아세트아미노펜을 권장</a:t>
             </a:r>
             <a:endParaRPr lang="en-US" sz="1400" dirty="0"/>
           </a:p>
@@ -2521,7 +2522,7 @@
                 <a:ea typeface="Wanted Sans" pitchFamily="34" charset="-122"/>
                 <a:cs typeface="Wanted Sans" pitchFamily="34" charset="-120"/>
               </a:rPr>
-              <a:t>왜 국소마취제 선택이 중요한가</a:t>
+              <a:t>교정치료 중 진통제 선택, 왜 중요한가</a:t>
             </a:r>
             <a:endParaRPr lang="en-US" sz="3000" dirty="0"/>
           </a:p>
@@ -2655,7 +2656,7 @@
                 <a:ea typeface="Wanted Sans" pitchFamily="34" charset="-122"/>
                 <a:cs typeface="Wanted Sans" pitchFamily="34" charset="-120"/>
               </a:rPr>
-              <a:t>하악 제3대구치 발치</a:t>
+              <a:t>치아이동(OTM)의 생물학적 기반</a:t>
             </a:r>
             <a:endParaRPr lang="en-US" sz="1700" dirty="0"/>
           </a:p>
@@ -2694,7 +2695,7 @@
                 <a:ea typeface="Pretendard" pitchFamily="34" charset="-122"/>
                 <a:cs typeface="Pretendard" pitchFamily="34" charset="-120"/>
               </a:rPr>
-              <a:t>가장 흔한 구강악안면외과 시술 중 하나 — 마취 실패/지연 시 환자 불안·통증 급증</a:t>
+              <a:t>교정력 → 국소 저산소증·체액이동 → 「무균성 염증」 캐스케이드 → 압박측 골흡수·긴장측 골형성</a:t>
             </a:r>
             <a:endParaRPr lang="en-US" sz="1350" dirty="0"/>
           </a:p>
@@ -2828,7 +2829,7 @@
                 <a:ea typeface="Wanted Sans" pitchFamily="34" charset="-122"/>
                 <a:cs typeface="Wanted Sans" pitchFamily="34" charset="-120"/>
               </a:rPr>
-              <a:t>리도카인 (Lidocaine)</a:t>
+              <a:t>진통제 처방의 현실</a:t>
             </a:r>
             <a:endParaRPr lang="en-US" sz="1700" dirty="0"/>
           </a:p>
@@ -2867,7 +2868,7 @@
                 <a:ea typeface="Pretendard" pitchFamily="34" charset="-122"/>
                 <a:cs typeface="Pretendard" pitchFamily="34" charset="-120"/>
               </a:rPr>
-              <a:t>가장 널리 쓰이는 표준 국소마취제, 2% 농도 + 에피네프린 병용이 일반적</a:t>
+              <a:t>환자의 최대 95%가 장치 활성화 후 통증 호소 → NSAID(이부프로펜 등)가 1차 진통제로 흔히 처방됨</a:t>
             </a:r>
             <a:endParaRPr lang="en-US" sz="1350" dirty="0"/>
           </a:p>
@@ -3001,7 +3002,7 @@
                 <a:ea typeface="Wanted Sans" pitchFamily="34" charset="-122"/>
                 <a:cs typeface="Wanted Sans" pitchFamily="34" charset="-120"/>
               </a:rPr>
-              <a:t>아티카인 (Articaine)</a:t>
+              <a:t>이론적 우려</a:t>
             </a:r>
             <a:endParaRPr lang="en-US" sz="1700" dirty="0"/>
           </a:p>
@@ -3040,7 +3041,7 @@
                 <a:ea typeface="Pretendard" pitchFamily="34" charset="-122"/>
                 <a:cs typeface="Pretendard" pitchFamily="34" charset="-120"/>
               </a:rPr>
-              <a:t>티오펜 고리 구조로 조직 침투력이 높다고 알려진 4세대 아마이드계 마취제</a:t>
+              <a:t>NSAID의 COX 억제 기전이 진통엔 유효하나, 골개조에 필수적인 PGE2 생성까지 차단 → 치아이동 속도 자체를 늦출 가능성</a:t>
             </a:r>
             <a:endParaRPr lang="en-US" sz="1350" dirty="0"/>
           </a:p>
@@ -3189,7 +3190,7 @@
                 <a:ea typeface="Wanted Sans" pitchFamily="34" charset="-122"/>
                 <a:cs typeface="Wanted Sans" pitchFamily="34" charset="-120"/>
               </a:rPr>
-              <a:t>왜 아티카인이 더 빠르게 발현하는가</a:t>
+              <a:t>PGE2 → RANKL 경로 — 왜 NSAID가 치아이동을 늦추는가</a:t>
             </a:r>
             <a:endParaRPr lang="en-US" sz="3000" dirty="0"/>
           </a:p>
@@ -3204,11 +3205,11 @@
         <p:spPr>
           <a:xfrm>
             <a:off x="548640" y="1828800"/>
-            <a:ext cx="11064240" cy="1097280"/>
+            <a:ext cx="11064240" cy="1051560"/>
           </a:xfrm>
           <a:prstGeom prst="roundRect">
             <a:avLst>
-              <a:gd name="adj" fmla="val 6667"/>
+              <a:gd name="adj" fmla="val 6957"/>
             </a:avLst>
           </a:prstGeom>
           <a:solidFill>
@@ -3240,11 +3241,11 @@
         <p:spPr>
           <a:xfrm>
             <a:off x="777240" y="2057400"/>
-            <a:ext cx="1737360" cy="640080"/>
+            <a:ext cx="2103120" cy="594360"/>
           </a:xfrm>
           <a:prstGeom prst="roundRect">
             <a:avLst>
-              <a:gd name="adj" fmla="val 42857"/>
+              <a:gd name="adj" fmla="val 46154"/>
             </a:avLst>
           </a:prstGeom>
           <a:solidFill>
@@ -3264,7 +3265,7 @@
         <p:spPr>
           <a:xfrm>
             <a:off x="777240" y="2057400"/>
-            <a:ext cx="1737360" cy="640080"/>
+            <a:ext cx="2103120" cy="594360"/>
           </a:xfrm>
           <a:prstGeom prst="rect">
             <a:avLst/>
@@ -3288,7 +3289,7 @@
                 <a:ea typeface="Pretendard" pitchFamily="34" charset="-122"/>
                 <a:cs typeface="Pretendard" pitchFamily="34" charset="-120"/>
               </a:rPr>
-              <a:t>화학구조</a:t>
+              <a:t>1. 기계적 자극</a:t>
             </a:r>
             <a:endParaRPr lang="en-US" sz="1300" dirty="0"/>
           </a:p>
@@ -3302,8 +3303,8 @@
         </p:nvSpPr>
         <p:spPr>
           <a:xfrm>
-            <a:off x="2743200" y="1920240"/>
-            <a:ext cx="8595360" cy="914400"/>
+            <a:off x="3108960" y="1920240"/>
+            <a:ext cx="8229600" cy="868680"/>
           </a:xfrm>
           <a:prstGeom prst="rect">
             <a:avLst/>
@@ -3330,7 +3331,7 @@
                 <a:ea typeface="Pretendard" pitchFamily="34" charset="-122"/>
                 <a:cs typeface="Pretendard" pitchFamily="34" charset="-120"/>
               </a:rPr>
-              <a:t>아티카인은 티오펜(thiophene) 고리, 리도카인은 벤젠 고리 — 티오펜 고리가 지질용해도를 높여 신경막·연조직·피질골 투과를 향상시킴</a:t>
+              <a:t>교정력 → PDL·치조골 국소 저산소증/체액이동 → phospholipase A2 활성화 → 아라키돈산 유리</a:t>
             </a:r>
             <a:endParaRPr lang="en-US" sz="1250" dirty="0"/>
           </a:p>
@@ -3344,12 +3345,12 @@
         </p:nvSpPr>
         <p:spPr>
           <a:xfrm>
-            <a:off x="548640" y="3063240"/>
-            <a:ext cx="11064240" cy="1097280"/>
+            <a:off x="548640" y="3017520"/>
+            <a:ext cx="11064240" cy="1051560"/>
           </a:xfrm>
           <a:prstGeom prst="roundRect">
             <a:avLst>
-              <a:gd name="adj" fmla="val 6667"/>
+              <a:gd name="adj" fmla="val 6957"/>
             </a:avLst>
           </a:prstGeom>
           <a:solidFill>
@@ -3380,12 +3381,12 @@
         </p:nvSpPr>
         <p:spPr>
           <a:xfrm>
-            <a:off x="777240" y="3291840"/>
-            <a:ext cx="1737360" cy="640080"/>
+            <a:off x="777240" y="3246120"/>
+            <a:ext cx="2103120" cy="594360"/>
           </a:xfrm>
           <a:prstGeom prst="roundRect">
             <a:avLst>
-              <a:gd name="adj" fmla="val 42857"/>
+              <a:gd name="adj" fmla="val 46154"/>
             </a:avLst>
           </a:prstGeom>
           <a:solidFill>
@@ -3404,8 +3405,8 @@
         </p:nvSpPr>
         <p:spPr>
           <a:xfrm>
-            <a:off x="777240" y="3291840"/>
-            <a:ext cx="1737360" cy="640080"/>
+            <a:off x="777240" y="3246120"/>
+            <a:ext cx="2103120" cy="594360"/>
           </a:xfrm>
           <a:prstGeom prst="rect">
             <a:avLst/>
@@ -3429,7 +3430,7 @@
                 <a:ea typeface="Pretendard" pitchFamily="34" charset="-122"/>
                 <a:cs typeface="Pretendard" pitchFamily="34" charset="-120"/>
               </a:rPr>
-              <a:t>대사 경로</a:t>
+              <a:t>2. COX 경로</a:t>
             </a:r>
             <a:endParaRPr lang="en-US" sz="1300" dirty="0"/>
           </a:p>
@@ -3443,8 +3444,8 @@
         </p:nvSpPr>
         <p:spPr>
           <a:xfrm>
-            <a:off x="2743200" y="3154680"/>
-            <a:ext cx="8595360" cy="914400"/>
+            <a:off x="3108960" y="3108960"/>
+            <a:ext cx="8229600" cy="868680"/>
           </a:xfrm>
           <a:prstGeom prst="rect">
             <a:avLst/>
@@ -3471,7 +3472,7 @@
                 <a:ea typeface="Pretendard" pitchFamily="34" charset="-122"/>
                 <a:cs typeface="Pretendard" pitchFamily="34" charset="-120"/>
               </a:rPr>
-              <a:t>아티카인은 에스터 곁사슬을 가져 혈장 esterase에 의해 일부 가수분해됨(간 대사 의존도↓) → 전신독성이 낮아 4% 고농도 제형 사용이 가능</a:t>
+              <a:t>COX-1/2가 아라키돈산을 PGE2로 전환 — 이 단계가 이부프로펜(비선택적 COX 억제제)의 표적</a:t>
             </a:r>
             <a:endParaRPr lang="en-US" sz="1250" dirty="0"/>
           </a:p>
@@ -3485,12 +3486,12 @@
         </p:nvSpPr>
         <p:spPr>
           <a:xfrm>
-            <a:off x="548640" y="4297680"/>
-            <a:ext cx="11064240" cy="1097280"/>
+            <a:off x="548640" y="4206240"/>
+            <a:ext cx="11064240" cy="1051560"/>
           </a:xfrm>
           <a:prstGeom prst="roundRect">
             <a:avLst>
-              <a:gd name="adj" fmla="val 6667"/>
+              <a:gd name="adj" fmla="val 6957"/>
             </a:avLst>
           </a:prstGeom>
           <a:solidFill>
@@ -3521,12 +3522,12 @@
         </p:nvSpPr>
         <p:spPr>
           <a:xfrm>
-            <a:off x="777240" y="4526280"/>
-            <a:ext cx="1737360" cy="640080"/>
+            <a:off x="777240" y="4434840"/>
+            <a:ext cx="2103120" cy="594360"/>
           </a:xfrm>
           <a:prstGeom prst="roundRect">
             <a:avLst>
-              <a:gd name="adj" fmla="val 42857"/>
+              <a:gd name="adj" fmla="val 46154"/>
             </a:avLst>
           </a:prstGeom>
           <a:solidFill>
@@ -3545,8 +3546,8 @@
         </p:nvSpPr>
         <p:spPr>
           <a:xfrm>
-            <a:off x="777240" y="4526280"/>
-            <a:ext cx="1737360" cy="640080"/>
+            <a:off x="777240" y="4434840"/>
+            <a:ext cx="2103120" cy="594360"/>
           </a:xfrm>
           <a:prstGeom prst="rect">
             <a:avLst/>
@@ -3570,7 +3571,7 @@
                 <a:ea typeface="Pretendard" pitchFamily="34" charset="-122"/>
                 <a:cs typeface="Pretendard" pitchFamily="34" charset="-120"/>
               </a:rPr>
-              <a:t>제형 농도</a:t>
+              <a:t>3. PGE2 → RANKL</a:t>
             </a:r>
             <a:endParaRPr lang="en-US" sz="1300" dirty="0"/>
           </a:p>
@@ -3584,8 +3585,8 @@
         </p:nvSpPr>
         <p:spPr>
           <a:xfrm>
-            <a:off x="2743200" y="4389120"/>
-            <a:ext cx="8595360" cy="914400"/>
+            <a:off x="3108960" y="4297680"/>
+            <a:ext cx="8229600" cy="868680"/>
           </a:xfrm>
           <a:prstGeom prst="rect">
             <a:avLst/>
@@ -3612,7 +3613,7 @@
                 <a:ea typeface="Pretendard" pitchFamily="34" charset="-122"/>
                 <a:cs typeface="Pretendard" pitchFamily="34" charset="-120"/>
               </a:rPr>
-              <a:t>이번 연구는 4% 아티카인 vs 2% 리도카인 비교 — 농도가 2배 높은 만큼 단위시간당 확산 가능한 분자 수 자체가 많아짐(순수 약리작용 차이와 분리해서 봐야 할 교란요인)</a:t>
+              <a:t>PGE2가 조골세포·PDL세포에서 RANKL 발현을 유도 → RANKL이 파골세포 전구세포의 RANK 수용체에 결합</a:t>
             </a:r>
             <a:endParaRPr lang="en-US" sz="1250" dirty="0"/>
           </a:p>
@@ -3626,12 +3627,12 @@
         </p:nvSpPr>
         <p:spPr>
           <a:xfrm>
-            <a:off x="548640" y="5532120"/>
-            <a:ext cx="11064240" cy="1097280"/>
+            <a:off x="548640" y="5394960"/>
+            <a:ext cx="11064240" cy="1051560"/>
           </a:xfrm>
           <a:prstGeom prst="roundRect">
             <a:avLst>
-              <a:gd name="adj" fmla="val 6667"/>
+              <a:gd name="adj" fmla="val 6957"/>
             </a:avLst>
           </a:prstGeom>
           <a:solidFill>
@@ -3662,12 +3663,12 @@
         </p:nvSpPr>
         <p:spPr>
           <a:xfrm>
-            <a:off x="777240" y="5760720"/>
-            <a:ext cx="1737360" cy="640080"/>
+            <a:off x="777240" y="5623560"/>
+            <a:ext cx="2103120" cy="594360"/>
           </a:xfrm>
           <a:prstGeom prst="roundRect">
             <a:avLst>
-              <a:gd name="adj" fmla="val 42857"/>
+              <a:gd name="adj" fmla="val 46154"/>
             </a:avLst>
           </a:prstGeom>
           <a:solidFill>
@@ -3686,8 +3687,8 @@
         </p:nvSpPr>
         <p:spPr>
           <a:xfrm>
-            <a:off x="777240" y="5760720"/>
-            <a:ext cx="1737360" cy="640080"/>
+            <a:off x="777240" y="5623560"/>
+            <a:ext cx="2103120" cy="594360"/>
           </a:xfrm>
           <a:prstGeom prst="rect">
             <a:avLst/>
@@ -3711,7 +3712,7 @@
                 <a:ea typeface="Pretendard" pitchFamily="34" charset="-122"/>
                 <a:cs typeface="Pretendard" pitchFamily="34" charset="-120"/>
               </a:rPr>
-              <a:t>단백결합률</a:t>
+              <a:t>4. 파골세포 활성 → 골흡수</a:t>
             </a:r>
             <a:endParaRPr lang="en-US" sz="1300" dirty="0"/>
           </a:p>
@@ -3725,8 +3726,8 @@
         </p:nvSpPr>
         <p:spPr>
           <a:xfrm>
-            <a:off x="2743200" y="5623560"/>
-            <a:ext cx="8595360" cy="914400"/>
+            <a:off x="3108960" y="5486400"/>
+            <a:ext cx="8229600" cy="868680"/>
           </a:xfrm>
           <a:prstGeom prst="rect">
             <a:avLst/>
@@ -3753,7 +3754,7 @@
                 <a:ea typeface="Pretendard" pitchFamily="34" charset="-122"/>
                 <a:cs typeface="Pretendard" pitchFamily="34" charset="-120"/>
               </a:rPr>
-              <a:t>아티카인 약 95% vs 리도카인 약 65% — 단백결합률이 높을수록 지속시간이 길어지는 경향과 관련(발현시간과는 별개 지표)</a:t>
+              <a:t>RANKL-RANK 결합으로 파골세포 분화·활성 촉진 → 압박측 치조골 흡수 → 치아이동 실현</a:t>
             </a:r>
             <a:endParaRPr lang="en-US" sz="1250" dirty="0"/>
           </a:p>
@@ -3762,6 +3763,45 @@
       <p:sp>
         <p:nvSpPr>
           <p:cNvPr id="20" name="Text 18"/>
+          <p:cNvSpPr txBox="1"/>
+          <p:nvPr/>
+        </p:nvSpPr>
+        <p:spPr>
+          <a:xfrm>
+            <a:off x="548640" y="6080760"/>
+            <a:ext cx="11064240" cy="502920"/>
+          </a:xfrm>
+          <a:prstGeom prst="rect">
+            <a:avLst/>
+          </a:prstGeom>
+          <a:noFill/>
+          <a:ln/>
+        </p:spPr>
+        <p:txBody>
+          <a:bodyPr wrap="square" lIns="0" tIns="0" rIns="0" bIns="0" rtlCol="0" anchor="ctr"/>
+          <a:lstStyle/>
+          <a:p>
+            <a:pPr indent="0" marL="0">
+              <a:buNone/>
+            </a:pPr>
+            <a:r>
+              <a:rPr lang="en-US" sz="1250" i="1" dirty="0">
+                <a:solidFill>
+                  <a:srgbClr val="028090"/>
+                </a:solidFill>
+                <a:latin typeface="Pretendard" pitchFamily="34" charset="0"/>
+                <a:ea typeface="Pretendard" pitchFamily="34" charset="-122"/>
+                <a:cs typeface="Pretendard" pitchFamily="34" charset="-120"/>
+              </a:rPr>
+              <a:t>아세트아미노펜은 주로 중추(뇌)에서 작용해 말초 PGE2·이 경로에는 영향이 적음 — 그래서 대조약물로 선택됨</a:t>
+            </a:r>
+            <a:endParaRPr lang="en-US" sz="1250" dirty="0"/>
+          </a:p>
+        </p:txBody>
+      </p:sp>
+      <p:sp>
+        <p:nvSpPr>
+          <p:cNvPr id="21" name="Text 19"/>
           <p:cNvSpPr txBox="1"/>
           <p:nvPr/>
         </p:nvSpPr>
@@ -3902,7 +3942,7 @@
                 <a:ea typeface="Wanted Sans" pitchFamily="34" charset="-122"/>
                 <a:cs typeface="Wanted Sans" pitchFamily="34" charset="-120"/>
               </a:rPr>
-              <a:t>기존 근거의 공백</a:t>
+              <a:t>이 연구가 채우는 공백</a:t>
             </a:r>
             <a:endParaRPr lang="en-US" sz="3000" dirty="0"/>
           </a:p>
@@ -3910,57 +3950,18 @@
       </p:sp>
       <p:sp>
         <p:nvSpPr>
-          <p:cNvPr id="4" name="Text 2"/>
-          <p:cNvSpPr txBox="1"/>
-          <p:nvPr/>
-        </p:nvSpPr>
-        <p:spPr>
-          <a:xfrm>
-            <a:off x="548640" y="1783080"/>
-            <a:ext cx="10972800" cy="457200"/>
-          </a:xfrm>
-          <a:prstGeom prst="rect">
-            <a:avLst/>
-          </a:prstGeom>
-          <a:noFill/>
-          <a:ln/>
-        </p:spPr>
-        <p:txBody>
-          <a:bodyPr wrap="square" lIns="0" tIns="0" rIns="0" bIns="0" rtlCol="0" anchor="ctr"/>
-          <a:lstStyle/>
-          <a:p>
-            <a:pPr indent="0" marL="0">
-              <a:buNone/>
-            </a:pPr>
-            <a:r>
-              <a:rPr lang="en-US" sz="1600" b="1" dirty="0">
-                <a:solidFill>
-                  <a:srgbClr val="0B2E33"/>
-                </a:solidFill>
-                <a:latin typeface="Pretendard" pitchFamily="34" charset="0"/>
-                <a:ea typeface="Pretendard" pitchFamily="34" charset="-122"/>
-                <a:cs typeface="Pretendard" pitchFamily="34" charset="-120"/>
-              </a:rPr>
-              <a:t>아티카인 vs 리도카인 비교 연구, 조건에 따라 결과가 엇갈림</a:t>
-            </a:r>
-            <a:endParaRPr lang="en-US" sz="1600" dirty="0"/>
-          </a:p>
-        </p:txBody>
-      </p:sp>
-      <p:sp>
-        <p:nvSpPr>
-          <p:cNvPr id="5" name="Shape 3"/>
+          <p:cNvPr id="4" name="Shape 2"/>
           <p:cNvSpPr/>
           <p:nvPr/>
         </p:nvSpPr>
         <p:spPr>
           <a:xfrm>
-            <a:off x="548640" y="2423160"/>
-            <a:ext cx="11064240" cy="960120"/>
+            <a:off x="548640" y="2194560"/>
+            <a:ext cx="11064240" cy="1051560"/>
           </a:xfrm>
           <a:prstGeom prst="roundRect">
             <a:avLst>
-              <a:gd name="adj" fmla="val 5714"/>
+              <a:gd name="adj" fmla="val 5217"/>
             </a:avLst>
           </a:prstGeom>
           <a:solidFill>
@@ -3978,14 +3979,53 @@
       </p:sp>
       <p:sp>
         <p:nvSpPr>
+          <p:cNvPr id="5" name="Text 3"/>
+          <p:cNvSpPr txBox="1"/>
+          <p:nvPr/>
+        </p:nvSpPr>
+        <p:spPr>
+          <a:xfrm>
+            <a:off x="868680" y="2304288"/>
+            <a:ext cx="5120640" cy="822960"/>
+          </a:xfrm>
+          <a:prstGeom prst="rect">
+            <a:avLst/>
+          </a:prstGeom>
+          <a:noFill/>
+          <a:ln/>
+        </p:spPr>
+        <p:txBody>
+          <a:bodyPr wrap="square" lIns="0" tIns="0" rIns="0" bIns="0" rtlCol="0" anchor="ctr"/>
+          <a:lstStyle/>
+          <a:p>
+            <a:pPr indent="0" marL="0">
+              <a:buNone/>
+            </a:pPr>
+            <a:r>
+              <a:rPr lang="en-US" sz="1300" b="1" dirty="0">
+                <a:solidFill>
+                  <a:srgbClr val="0B2E33"/>
+                </a:solidFill>
+                <a:latin typeface="Pretendard" pitchFamily="34" charset="0"/>
+                <a:ea typeface="Pretendard" pitchFamily="34" charset="-122"/>
+                <a:cs typeface="Pretendard" pitchFamily="34" charset="-120"/>
+              </a:rPr>
+              <a:t>Shetty et al. 2013, Prog Orthod</a:t>
+            </a:r>
+            <a:endParaRPr lang="en-US" sz="1300" dirty="0"/>
+          </a:p>
+        </p:txBody>
+      </p:sp>
+      <p:sp>
+        <p:nvSpPr>
           <p:cNvPr id="6" name="Text 4"/>
           <p:cNvSpPr txBox="1"/>
           <p:nvPr/>
         </p:nvSpPr>
         <p:spPr>
           <a:xfrm>
-            <a:off x="868680" y="2532888"/>
-            <a:ext cx="6675120" cy="731520"/>
+            <a:off x="6126480" y="2304288"/>
+            <a:ext cx="5212080" cy="822960"/>
           </a:xfrm>
           <a:prstGeom prst="rect">
             <a:avLst/>
@@ -4001,17 +4041,17 @@
               <a:buNone/>
             </a:pPr>
             <a:r>
-              <a:rPr lang="en-US" sz="1350" b="1" dirty="0">
-                <a:solidFill>
-                  <a:srgbClr val="0B2E33"/>
-                </a:solidFill>
-                <a:latin typeface="Pretendard" pitchFamily="34" charset="0"/>
-                <a:ea typeface="Pretendard" pitchFamily="34" charset="-122"/>
-                <a:cs typeface="Pretendard" pitchFamily="34" charset="-120"/>
-              </a:rPr>
-              <a:t>신경차단 · 건강한 치아 · 숙련 시술자 (본 연구, 2024)</a:t>
-            </a:r>
-            <a:endParaRPr lang="en-US" sz="1350" dirty="0"/>
+              <a:rPr lang="en-US" sz="1200" dirty="0">
+                <a:solidFill>
+                  <a:srgbClr val="047857"/>
+                </a:solidFill>
+                <a:latin typeface="Pretendard" pitchFamily="34" charset="0"/>
+                <a:ea typeface="Pretendard" pitchFamily="34" charset="-122"/>
+                <a:cs typeface="Pretendard" pitchFamily="34" charset="-120"/>
+              </a:rPr>
+              <a:t>이부프로펜·아세트아미노펜의 GCF PGE2 비교 (human study) — 이 연구의 직접적 선행연구</a:t>
+            </a:r>
+            <a:endParaRPr lang="en-US" sz="1200" dirty="0"/>
           </a:p>
         </p:txBody>
       </p:sp>
@@ -4023,75 +4063,12 @@
         </p:nvSpPr>
         <p:spPr>
           <a:xfrm>
-            <a:off x="7772400" y="2624328"/>
-            <a:ext cx="3657600" cy="548640"/>
+            <a:off x="548640" y="3429000"/>
+            <a:ext cx="11064240" cy="1051560"/>
           </a:xfrm>
           <a:prstGeom prst="roundRect">
             <a:avLst>
-              <a:gd name="adj" fmla="val 50000"/>
-            </a:avLst>
-          </a:prstGeom>
-          <a:solidFill>
-            <a:srgbClr val="02C39A">
-              <a:alpha val="15000"/>
-            </a:srgbClr>
-          </a:solidFill>
-          <a:ln/>
-        </p:spPr>
-      </p:sp>
-      <p:sp>
-        <p:nvSpPr>
-          <p:cNvPr id="8" name="Text 6"/>
-          <p:cNvSpPr txBox="1"/>
-          <p:nvPr/>
-        </p:nvSpPr>
-        <p:spPr>
-          <a:xfrm>
-            <a:off x="7772400" y="2624328"/>
-            <a:ext cx="3657600" cy="548640"/>
-          </a:xfrm>
-          <a:prstGeom prst="rect">
-            <a:avLst/>
-          </a:prstGeom>
-          <a:noFill/>
-          <a:ln/>
-        </p:spPr>
-        <p:txBody>
-          <a:bodyPr wrap="square" lIns="0" tIns="0" rIns="0" bIns="0" rtlCol="0" anchor="ctr"/>
-          <a:lstStyle/>
-          <a:p>
-            <a:pPr algn="ctr" indent="0" marL="0">
-              <a:buNone/>
-            </a:pPr>
-            <a:r>
-              <a:rPr lang="en-US" sz="1200" b="1" dirty="0">
-                <a:solidFill>
-                  <a:srgbClr val="047857"/>
-                </a:solidFill>
-                <a:latin typeface="Pretendard" pitchFamily="34" charset="0"/>
-                <a:ea typeface="Pretendard" pitchFamily="34" charset="-122"/>
-                <a:cs typeface="Pretendard" pitchFamily="34" charset="-120"/>
-              </a:rPr>
-              <a:t>아티카인 발현시간 유의하게 단축</a:t>
-            </a:r>
-            <a:endParaRPr lang="en-US" sz="1200" dirty="0"/>
-          </a:p>
-        </p:txBody>
-      </p:sp>
-      <p:sp>
-        <p:nvSpPr>
-          <p:cNvPr id="9" name="Shape 7"/>
-          <p:cNvSpPr/>
-          <p:nvPr/>
-        </p:nvSpPr>
-        <p:spPr>
-          <a:xfrm>
-            <a:off x="548640" y="3566160"/>
-            <a:ext cx="11064240" cy="960120"/>
-          </a:xfrm>
-          <a:prstGeom prst="roundRect">
-            <a:avLst>
-              <a:gd name="adj" fmla="val 5714"/>
+              <a:gd name="adj" fmla="val 5217"/>
             </a:avLst>
           </a:prstGeom>
           <a:solidFill>
@@ -4109,14 +4086,14 @@
       </p:sp>
       <p:sp>
         <p:nvSpPr>
-          <p:cNvPr id="10" name="Text 8"/>
-          <p:cNvSpPr txBox="1"/>
-          <p:nvPr/>
-        </p:nvSpPr>
-        <p:spPr>
-          <a:xfrm>
-            <a:off x="868680" y="3675888"/>
-            <a:ext cx="6675120" cy="731520"/>
+          <p:cNvPr id="8" name="Text 6"/>
+          <p:cNvSpPr txBox="1"/>
+          <p:nvPr/>
+        </p:nvSpPr>
+        <p:spPr>
+          <a:xfrm>
+            <a:off x="868680" y="3538728"/>
+            <a:ext cx="5120640" cy="822960"/>
           </a:xfrm>
           <a:prstGeom prst="rect">
             <a:avLst/>
@@ -4132,7 +4109,7 @@
               <a:buNone/>
             </a:pPr>
             <a:r>
-              <a:rPr lang="en-US" sz="1350" b="1" dirty="0">
+              <a:rPr lang="en-US" sz="1300" b="1" dirty="0">
                 <a:solidFill>
                   <a:srgbClr val="0B2E33"/>
                 </a:solidFill>
@@ -4140,89 +4117,65 @@
                 <a:ea typeface="Pretendard" pitchFamily="34" charset="-122"/>
                 <a:cs typeface="Pretendard" pitchFamily="34" charset="-120"/>
               </a:rPr>
-              <a:t>침윤마취만 시행 (Majid &amp; Ahmed 2018 등)</a:t>
-            </a:r>
-            <a:endParaRPr lang="en-US" sz="1350" dirty="0"/>
-          </a:p>
-        </p:txBody>
-      </p:sp>
-      <p:sp>
-        <p:nvSpPr>
-          <p:cNvPr id="11" name="Shape 9"/>
+              <a:t>Bartzela et al. 2009, AJODO (systematic review)</a:t>
+            </a:r>
+            <a:endParaRPr lang="en-US" sz="1300" dirty="0"/>
+          </a:p>
+        </p:txBody>
+      </p:sp>
+      <p:sp>
+        <p:nvSpPr>
+          <p:cNvPr id="9" name="Text 7"/>
+          <p:cNvSpPr txBox="1"/>
+          <p:nvPr/>
+        </p:nvSpPr>
+        <p:spPr>
+          <a:xfrm>
+            <a:off x="6126480" y="3538728"/>
+            <a:ext cx="5212080" cy="822960"/>
+          </a:xfrm>
+          <a:prstGeom prst="rect">
+            <a:avLst/>
+          </a:prstGeom>
+          <a:noFill/>
+          <a:ln/>
+        </p:spPr>
+        <p:txBody>
+          <a:bodyPr wrap="square" lIns="0" tIns="0" rIns="0" bIns="0" rtlCol="0" anchor="ctr"/>
+          <a:lstStyle/>
+          <a:p>
+            <a:pPr indent="0" marL="0">
+              <a:buNone/>
+            </a:pPr>
+            <a:r>
+              <a:rPr lang="en-US" sz="1200" dirty="0">
+                <a:solidFill>
+                  <a:srgbClr val="5B7A7E"/>
+                </a:solidFill>
+                <a:latin typeface="Pretendard" pitchFamily="34" charset="0"/>
+                <a:ea typeface="Pretendard" pitchFamily="34" charset="-122"/>
+                <a:cs typeface="Pretendard" pitchFamily="34" charset="-120"/>
+              </a:rPr>
+              <a:t>여러 약물이 치아이동 속도에 미치는 영향을 문헌적으로 정리 — NSAID의 억제 효과 시사</a:t>
+            </a:r>
+            <a:endParaRPr lang="en-US" sz="1200" dirty="0"/>
+          </a:p>
+        </p:txBody>
+      </p:sp>
+      <p:sp>
+        <p:nvSpPr>
+          <p:cNvPr id="10" name="Shape 8"/>
           <p:cNvSpPr/>
           <p:nvPr/>
         </p:nvSpPr>
         <p:spPr>
           <a:xfrm>
-            <a:off x="7772400" y="3767328"/>
-            <a:ext cx="3657600" cy="548640"/>
+            <a:off x="548640" y="4663440"/>
+            <a:ext cx="11064240" cy="1051560"/>
           </a:xfrm>
           <a:prstGeom prst="roundRect">
             <a:avLst>
-              <a:gd name="adj" fmla="val 50000"/>
-            </a:avLst>
-          </a:prstGeom>
-          <a:solidFill>
-            <a:srgbClr val="5B7A7E">
-              <a:alpha val="15000"/>
-            </a:srgbClr>
-          </a:solidFill>
-          <a:ln/>
-        </p:spPr>
-      </p:sp>
-      <p:sp>
-        <p:nvSpPr>
-          <p:cNvPr id="12" name="Text 10"/>
-          <p:cNvSpPr txBox="1"/>
-          <p:nvPr/>
-        </p:nvSpPr>
-        <p:spPr>
-          <a:xfrm>
-            <a:off x="7772400" y="3767328"/>
-            <a:ext cx="3657600" cy="548640"/>
-          </a:xfrm>
-          <a:prstGeom prst="rect">
-            <a:avLst/>
-          </a:prstGeom>
-          <a:noFill/>
-          <a:ln/>
-        </p:spPr>
-        <p:txBody>
-          <a:bodyPr wrap="square" lIns="0" tIns="0" rIns="0" bIns="0" rtlCol="0" anchor="ctr"/>
-          <a:lstStyle/>
-          <a:p>
-            <a:pPr algn="ctr" indent="0" marL="0">
-              <a:buNone/>
-            </a:pPr>
-            <a:r>
-              <a:rPr lang="en-US" sz="1200" b="1" dirty="0">
-                <a:solidFill>
-                  <a:srgbClr val="5B7A7E"/>
-                </a:solidFill>
-                <a:latin typeface="Pretendard" pitchFamily="34" charset="0"/>
-                <a:ea typeface="Pretendard" pitchFamily="34" charset="-122"/>
-                <a:cs typeface="Pretendard" pitchFamily="34" charset="-120"/>
-              </a:rPr>
-              <a:t>두 약물 간 유의차 없음</a:t>
-            </a:r>
-            <a:endParaRPr lang="en-US" sz="1200" dirty="0"/>
-          </a:p>
-        </p:txBody>
-      </p:sp>
-      <p:sp>
-        <p:nvSpPr>
-          <p:cNvPr id="13" name="Shape 11"/>
-          <p:cNvSpPr/>
-          <p:nvPr/>
-        </p:nvSpPr>
-        <p:spPr>
-          <a:xfrm>
-            <a:off x="548640" y="4709160"/>
-            <a:ext cx="11064240" cy="960120"/>
-          </a:xfrm>
-          <a:prstGeom prst="roundRect">
-            <a:avLst>
-              <a:gd name="adj" fmla="val 5714"/>
+              <a:gd name="adj" fmla="val 5217"/>
             </a:avLst>
           </a:prstGeom>
           <a:solidFill>
@@ -4240,148 +4193,124 @@
       </p:sp>
       <p:sp>
         <p:nvSpPr>
+          <p:cNvPr id="11" name="Text 9"/>
+          <p:cNvSpPr txBox="1"/>
+          <p:nvPr/>
+        </p:nvSpPr>
+        <p:spPr>
+          <a:xfrm>
+            <a:off x="868680" y="4773168"/>
+            <a:ext cx="5120640" cy="822960"/>
+          </a:xfrm>
+          <a:prstGeom prst="rect">
+            <a:avLst/>
+          </a:prstGeom>
+          <a:noFill/>
+          <a:ln/>
+        </p:spPr>
+        <p:txBody>
+          <a:bodyPr wrap="square" lIns="0" tIns="0" rIns="0" bIns="0" rtlCol="0" anchor="ctr"/>
+          <a:lstStyle/>
+          <a:p>
+            <a:pPr indent="0" marL="0">
+              <a:buNone/>
+            </a:pPr>
+            <a:r>
+              <a:rPr lang="en-US" sz="1300" b="1" dirty="0">
+                <a:solidFill>
+                  <a:srgbClr val="0B2E33"/>
+                </a:solidFill>
+                <a:latin typeface="Pretendard" pitchFamily="34" charset="0"/>
+                <a:ea typeface="Pretendard" pitchFamily="34" charset="-122"/>
+                <a:cs typeface="Pretendard" pitchFamily="34" charset="-120"/>
+              </a:rPr>
+              <a:t>Kelderman &amp; Ren 2022, Eur J Orthod (review)</a:t>
+            </a:r>
+            <a:endParaRPr lang="en-US" sz="1300" dirty="0"/>
+          </a:p>
+        </p:txBody>
+      </p:sp>
+      <p:sp>
+        <p:nvSpPr>
+          <p:cNvPr id="12" name="Text 10"/>
+          <p:cNvSpPr txBox="1"/>
+          <p:nvPr/>
+        </p:nvSpPr>
+        <p:spPr>
+          <a:xfrm>
+            <a:off x="6126480" y="4773168"/>
+            <a:ext cx="5212080" cy="822960"/>
+          </a:xfrm>
+          <a:prstGeom prst="rect">
+            <a:avLst/>
+          </a:prstGeom>
+          <a:noFill/>
+          <a:ln/>
+        </p:spPr>
+        <p:txBody>
+          <a:bodyPr wrap="square" lIns="0" tIns="0" rIns="0" bIns="0" rtlCol="0" anchor="ctr"/>
+          <a:lstStyle/>
+          <a:p>
+            <a:pPr indent="0" marL="0">
+              <a:buNone/>
+            </a:pPr>
+            <a:r>
+              <a:rPr lang="en-US" sz="1200" dirty="0">
+                <a:solidFill>
+                  <a:srgbClr val="5B7A7E"/>
+                </a:solidFill>
+                <a:latin typeface="Pretendard" pitchFamily="34" charset="0"/>
+                <a:ea typeface="Pretendard" pitchFamily="34" charset="-122"/>
+                <a:cs typeface="Pretendard" pitchFamily="34" charset="-120"/>
+              </a:rPr>
+              <a:t>진통제와 치아이동에 대한 최신 systematic review — 근거의 일관성은 아직 논쟁적</a:t>
+            </a:r>
+            <a:endParaRPr lang="en-US" sz="1200" dirty="0"/>
+          </a:p>
+        </p:txBody>
+      </p:sp>
+      <p:sp>
+        <p:nvSpPr>
+          <p:cNvPr id="13" name="Text 11"/>
+          <p:cNvSpPr txBox="1"/>
+          <p:nvPr/>
+        </p:nvSpPr>
+        <p:spPr>
+          <a:xfrm>
+            <a:off x="548640" y="5989320"/>
+            <a:ext cx="11064240" cy="640080"/>
+          </a:xfrm>
+          <a:prstGeom prst="rect">
+            <a:avLst/>
+          </a:prstGeom>
+          <a:noFill/>
+          <a:ln/>
+        </p:spPr>
+        <p:txBody>
+          <a:bodyPr wrap="square" lIns="0" tIns="0" rIns="0" bIns="0" rtlCol="0" anchor="ctr"/>
+          <a:lstStyle/>
+          <a:p>
+            <a:pPr indent="0" marL="0">
+              <a:buNone/>
+            </a:pPr>
+            <a:r>
+              <a:rPr lang="en-US" sz="1300" i="1" dirty="0">
+                <a:solidFill>
+                  <a:srgbClr val="028090"/>
+                </a:solidFill>
+                <a:latin typeface="Pretendard" pitchFamily="34" charset="0"/>
+                <a:ea typeface="Pretendard" pitchFamily="34" charset="-122"/>
+                <a:cs typeface="Pretendard" pitchFamily="34" charset="-120"/>
+              </a:rPr>
+              <a:t>→ 본 연구는 Shetty(2013)의 단일시점 PGE2 비교를 「RANKL 지표 추가 + 3개월 종단추적 + 실제 치아이동량 측정」으로 확장 — 기전(PGE2/RANKL)과 임상결과(이동량)를 동시에 검증한 최초 사례</a:t>
+            </a:r>
+            <a:endParaRPr lang="en-US" sz="1300" dirty="0"/>
+          </a:p>
+        </p:txBody>
+      </p:sp>
+      <p:sp>
+        <p:nvSpPr>
           <p:cNvPr id="14" name="Text 12"/>
-          <p:cNvSpPr txBox="1"/>
-          <p:nvPr/>
-        </p:nvSpPr>
-        <p:spPr>
-          <a:xfrm>
-            <a:off x="868680" y="4818888"/>
-            <a:ext cx="6675120" cy="731520"/>
-          </a:xfrm>
-          <a:prstGeom prst="rect">
-            <a:avLst/>
-          </a:prstGeom>
-          <a:noFill/>
-          <a:ln/>
-        </p:spPr>
-        <p:txBody>
-          <a:bodyPr wrap="square" lIns="0" tIns="0" rIns="0" bIns="0" rtlCol="0" anchor="ctr"/>
-          <a:lstStyle/>
-          <a:p>
-            <a:pPr indent="0" marL="0">
-              <a:buNone/>
-            </a:pPr>
-            <a:r>
-              <a:rPr lang="en-US" sz="1350" b="1" dirty="0">
-                <a:solidFill>
-                  <a:srgbClr val="0B2E33"/>
-                </a:solidFill>
-                <a:latin typeface="Pretendard" pitchFamily="34" charset="0"/>
-                <a:ea typeface="Pretendard" pitchFamily="34" charset="-122"/>
-                <a:cs typeface="Pretendard" pitchFamily="34" charset="-120"/>
-              </a:rPr>
-              <a:t>치수염(pH 변화) · 비숙련 시술자 조건 (여러 RCT, refs 18–21)</a:t>
-            </a:r>
-            <a:endParaRPr lang="en-US" sz="1350" dirty="0"/>
-          </a:p>
-        </p:txBody>
-      </p:sp>
-      <p:sp>
-        <p:nvSpPr>
-          <p:cNvPr id="15" name="Shape 13"/>
-          <p:cNvSpPr/>
-          <p:nvPr/>
-        </p:nvSpPr>
-        <p:spPr>
-          <a:xfrm>
-            <a:off x="7772400" y="4910328"/>
-            <a:ext cx="3657600" cy="548640"/>
-          </a:xfrm>
-          <a:prstGeom prst="roundRect">
-            <a:avLst>
-              <a:gd name="adj" fmla="val 50000"/>
-            </a:avLst>
-          </a:prstGeom>
-          <a:solidFill>
-            <a:srgbClr val="02C39A">
-              <a:alpha val="15000"/>
-            </a:srgbClr>
-          </a:solidFill>
-          <a:ln/>
-        </p:spPr>
-      </p:sp>
-      <p:sp>
-        <p:nvSpPr>
-          <p:cNvPr id="16" name="Text 14"/>
-          <p:cNvSpPr txBox="1"/>
-          <p:nvPr/>
-        </p:nvSpPr>
-        <p:spPr>
-          <a:xfrm>
-            <a:off x="7772400" y="4910328"/>
-            <a:ext cx="3657600" cy="548640"/>
-          </a:xfrm>
-          <a:prstGeom prst="rect">
-            <a:avLst/>
-          </a:prstGeom>
-          <a:noFill/>
-          <a:ln/>
-        </p:spPr>
-        <p:txBody>
-          <a:bodyPr wrap="square" lIns="0" tIns="0" rIns="0" bIns="0" rtlCol="0" anchor="ctr"/>
-          <a:lstStyle/>
-          <a:p>
-            <a:pPr algn="ctr" indent="0" marL="0">
-              <a:buNone/>
-            </a:pPr>
-            <a:r>
-              <a:rPr lang="en-US" sz="1200" b="1" dirty="0">
-                <a:solidFill>
-                  <a:srgbClr val="047857"/>
-                </a:solidFill>
-                <a:latin typeface="Pretendard" pitchFamily="34" charset="0"/>
-                <a:ea typeface="Pretendard" pitchFamily="34" charset="-122"/>
-                <a:cs typeface="Pretendard" pitchFamily="34" charset="-120"/>
-              </a:rPr>
-              <a:t>아티카인이 더 효과적</a:t>
-            </a:r>
-            <a:endParaRPr lang="en-US" sz="1200" dirty="0"/>
-          </a:p>
-        </p:txBody>
-      </p:sp>
-      <p:sp>
-        <p:nvSpPr>
-          <p:cNvPr id="17" name="Text 15"/>
-          <p:cNvSpPr txBox="1"/>
-          <p:nvPr/>
-        </p:nvSpPr>
-        <p:spPr>
-          <a:xfrm>
-            <a:off x="548640" y="5943600"/>
-            <a:ext cx="11064240" cy="640080"/>
-          </a:xfrm>
-          <a:prstGeom prst="rect">
-            <a:avLst/>
-          </a:prstGeom>
-          <a:noFill/>
-          <a:ln/>
-        </p:spPr>
-        <p:txBody>
-          <a:bodyPr wrap="square" lIns="0" tIns="0" rIns="0" bIns="0" rtlCol="0" anchor="ctr"/>
-          <a:lstStyle/>
-          <a:p>
-            <a:pPr indent="0" marL="0">
-              <a:buNone/>
-            </a:pPr>
-            <a:r>
-              <a:rPr lang="en-US" sz="1300" i="1" dirty="0">
-                <a:solidFill>
-                  <a:srgbClr val="028090"/>
-                </a:solidFill>
-                <a:latin typeface="Pretendard" pitchFamily="34" charset="0"/>
-                <a:ea typeface="Pretendard" pitchFamily="34" charset="-122"/>
-                <a:cs typeface="Pretendard" pitchFamily="34" charset="-120"/>
-              </a:rPr>
-              <a:t>→ 저자들 스스로도 밝히듯, 결과 차이는 마취 기법(신경차단 vs 침윤)·치아 상태(건강 vs 치수염)·시술자 숙련도 차이에서 기인 — 본 연구는 가장 표준적인 조건(신경차단·건강한 치아·숙련자)에서의 근거</a:t>
-            </a:r>
-            <a:endParaRPr lang="en-US" sz="1300" dirty="0"/>
-          </a:p>
-        </p:txBody>
-      </p:sp>
-      <p:sp>
-        <p:nvSpPr>
-          <p:cNvPr id="18" name="Text 16"/>
           <p:cNvSpPr txBox="1"/>
           <p:nvPr/>
         </p:nvSpPr>
@@ -4627,7 +4556,7 @@
                 <a:ea typeface="Pretendard" pitchFamily="34" charset="-122"/>
                 <a:cs typeface="Pretendard" pitchFamily="34" charset="-120"/>
               </a:rPr>
-              <a:t>하악·상악 제3대구치 발치 환자에서 4% 아티카인(+에피네프린)과 2% 리도카인(+에피네프린)의 마취 발현시간, 통증(VAS), 추가 마취 필요성을 비교한다.</a:t>
+              <a:t>상악 제1소구치 발치 및 견치 원심이동이 필요한 교정환자에서, 이부프로펜(400mg)과 아세트아미노펜(500mg)이 치아이동 속도 및 치은열구액(GCF) PGE2·RANKL 농도에 미치는 영향을 비교한다.</a:t>
             </a:r>
             <a:endParaRPr lang="en-US" sz="1500" dirty="0"/>
           </a:p>
@@ -4730,7 +4659,7 @@
                 <a:ea typeface="Pretendard" pitchFamily="34" charset="-122"/>
                 <a:cs typeface="Pretendard" pitchFamily="34" charset="-120"/>
               </a:rPr>
-              <a:t>아티카인 측 부위가 리도카인 측 부위보다 마취 발현시간이 유의하게 짧고, 추가 마취 필요율이 유의하게 낮을 것이다.</a:t>
+              <a:t>이부프로펜 투여군은 아세트아미노펜 투여군보다 치아이동 속도가 유의하게 느리고, GCF PGE2·RANKL 농도가 유의하게 낮을 것이다.</a:t>
             </a:r>
             <a:endParaRPr lang="en-US" sz="1500" dirty="0"/>
           </a:p>
@@ -5007,12 +4936,12 @@
           <a:p>
             <a:pPr algn="ctr" indent="0" marL="0">
               <a:lnSpc>
-                <a:spcPct val="135000"/>
+                <a:spcPct val="130000"/>
               </a:lnSpc>
               <a:buNone/>
             </a:pPr>
             <a:r>
-              <a:rPr lang="en-US" sz="1450" dirty="0">
+              <a:rPr lang="en-US" sz="1400" dirty="0">
                 <a:solidFill>
                   <a:srgbClr val="0B2E33"/>
                 </a:solidFill>
@@ -5020,19 +4949,19 @@
                 <a:ea typeface="Pretendard" pitchFamily="34" charset="-122"/>
                 <a:cs typeface="Pretendard" pitchFamily="34" charset="-120"/>
               </a:rPr>
-              <a:t>Split-mouth, 이중눈가림,</a:t>
-            </a:r>
-            <a:endParaRPr lang="en-US" sz="1450" dirty="0"/>
+              <a:t>전향적, 이중눈가림,</a:t>
+            </a:r>
+            <a:endParaRPr lang="en-US" sz="1400" dirty="0"/>
           </a:p>
           <a:p>
             <a:pPr algn="ctr" indent="0" marL="0">
               <a:lnSpc>
-                <a:spcPct val="135000"/>
+                <a:spcPct val="130000"/>
               </a:lnSpc>
               <a:buNone/>
             </a:pPr>
             <a:r>
-              <a:rPr lang="en-US" sz="1450" dirty="0">
+              <a:rPr lang="en-US" sz="1400" dirty="0">
                 <a:solidFill>
                   <a:srgbClr val="0B2E33"/>
                 </a:solidFill>
@@ -5040,9 +4969,9 @@
                 <a:ea typeface="Pretendard" pitchFamily="34" charset="-122"/>
                 <a:cs typeface="Pretendard" pitchFamily="34" charset="-120"/>
               </a:rPr>
-              <a:t>무작위 대조 연구</a:t>
-            </a:r>
-            <a:endParaRPr lang="en-US" sz="1450" dirty="0"/>
+              <a:t>병렬군 RCT</a:t>
+            </a:r>
+            <a:endParaRPr lang="en-US" sz="1400" dirty="0"/>
           </a:p>
         </p:txBody>
       </p:sp>
@@ -5168,12 +5097,12 @@
           <a:p>
             <a:pPr algn="ctr" indent="0" marL="0">
               <a:lnSpc>
-                <a:spcPct val="135000"/>
+                <a:spcPct val="130000"/>
               </a:lnSpc>
               <a:buNone/>
             </a:pPr>
             <a:r>
-              <a:rPr lang="en-US" sz="1450" dirty="0">
+              <a:rPr lang="en-US" sz="1400" dirty="0">
                 <a:solidFill>
                   <a:srgbClr val="0B2E33"/>
                 </a:solidFill>
@@ -5181,19 +5110,19 @@
                 <a:ea typeface="Pretendard" pitchFamily="34" charset="-122"/>
                 <a:cs typeface="Pretendard" pitchFamily="34" charset="-120"/>
               </a:rPr>
-              <a:t>60명</a:t>
-            </a:r>
-            <a:endParaRPr lang="en-US" sz="1450" dirty="0"/>
+              <a:t>30명 (남14·여16, 평균 20.5±2.4세)</a:t>
+            </a:r>
+            <a:endParaRPr lang="en-US" sz="1400" dirty="0"/>
           </a:p>
           <a:p>
             <a:pPr algn="ctr" indent="0" marL="0">
               <a:lnSpc>
-                <a:spcPct val="135000"/>
+                <a:spcPct val="130000"/>
               </a:lnSpc>
               <a:buNone/>
             </a:pPr>
             <a:r>
-              <a:rPr lang="en-US" sz="1450" dirty="0">
+              <a:rPr lang="en-US" sz="1400" dirty="0">
                 <a:solidFill>
                   <a:srgbClr val="0B2E33"/>
                 </a:solidFill>
@@ -5201,9 +5130,9 @@
                 <a:ea typeface="Pretendard" pitchFamily="34" charset="-122"/>
                 <a:cs typeface="Pretendard" pitchFamily="34" charset="-120"/>
               </a:rPr>
-              <a:t>(양측 상·하악 제3대구치 발치)</a:t>
-            </a:r>
-            <a:endParaRPr lang="en-US" sz="1450" dirty="0"/>
+              <a:t>군당 15명</a:t>
+            </a:r>
+            <a:endParaRPr lang="en-US" sz="1400" dirty="0"/>
           </a:p>
         </p:txBody>
       </p:sp>
@@ -5300,7 +5229,7 @@
                 <a:ea typeface="Pretendard" pitchFamily="34" charset="-122"/>
                 <a:cs typeface="Pretendard" pitchFamily="34" charset="-120"/>
               </a:rPr>
-              <a:t>개입 (좌우 무작위 배정)</a:t>
+              <a:t>개입 (무작위 배정)</a:t>
             </a:r>
             <a:endParaRPr lang="en-US" sz="1300" dirty="0"/>
           </a:p>
@@ -5329,12 +5258,12 @@
           <a:p>
             <a:pPr algn="ctr" indent="0" marL="0">
               <a:lnSpc>
-                <a:spcPct val="135000"/>
+                <a:spcPct val="130000"/>
               </a:lnSpc>
               <a:buNone/>
             </a:pPr>
             <a:r>
-              <a:rPr lang="en-US" sz="1450" dirty="0">
+              <a:rPr lang="en-US" sz="1400" dirty="0">
                 <a:solidFill>
                   <a:srgbClr val="0B2E33"/>
                 </a:solidFill>
@@ -5342,19 +5271,19 @@
                 <a:ea typeface="Pretendard" pitchFamily="34" charset="-122"/>
                 <a:cs typeface="Pretendard" pitchFamily="34" charset="-120"/>
               </a:rPr>
-              <a:t>4% 아티카인 + 에피네프린 1:100,000</a:t>
-            </a:r>
-            <a:endParaRPr lang="en-US" sz="1450" dirty="0"/>
+              <a:t>A군: 이부프로펜 400mg</a:t>
+            </a:r>
+            <a:endParaRPr lang="en-US" sz="1400" dirty="0"/>
           </a:p>
           <a:p>
             <a:pPr algn="ctr" indent="0" marL="0">
               <a:lnSpc>
-                <a:spcPct val="135000"/>
+                <a:spcPct val="130000"/>
               </a:lnSpc>
               <a:buNone/>
             </a:pPr>
             <a:r>
-              <a:rPr lang="en-US" sz="1450" dirty="0">
+              <a:rPr lang="en-US" sz="1400" dirty="0">
                 <a:solidFill>
                   <a:srgbClr val="0B2E33"/>
                 </a:solidFill>
@@ -5364,17 +5293,17 @@
               </a:rPr>
               <a:t>vs</a:t>
             </a:r>
-            <a:endParaRPr lang="en-US" sz="1450" dirty="0"/>
+            <a:endParaRPr lang="en-US" sz="1400" dirty="0"/>
           </a:p>
           <a:p>
             <a:pPr algn="ctr" indent="0" marL="0">
               <a:lnSpc>
-                <a:spcPct val="135000"/>
+                <a:spcPct val="130000"/>
               </a:lnSpc>
               <a:buNone/>
             </a:pPr>
             <a:r>
-              <a:rPr lang="en-US" sz="1450" dirty="0">
+              <a:rPr lang="en-US" sz="1400" dirty="0">
                 <a:solidFill>
                   <a:srgbClr val="0B2E33"/>
                 </a:solidFill>
@@ -5382,9 +5311,29 @@
                 <a:ea typeface="Pretendard" pitchFamily="34" charset="-122"/>
                 <a:cs typeface="Pretendard" pitchFamily="34" charset="-120"/>
               </a:rPr>
-              <a:t>2% 리도카인 + 에피네프린 1:100,000</a:t>
-            </a:r>
-            <a:endParaRPr lang="en-US" sz="1450" dirty="0"/>
+              <a:t>B군: 아세트아미노펜 500mg</a:t>
+            </a:r>
+            <a:endParaRPr lang="en-US" sz="1400" dirty="0"/>
+          </a:p>
+          <a:p>
+            <a:pPr algn="ctr" indent="0" marL="0">
+              <a:lnSpc>
+                <a:spcPct val="130000"/>
+              </a:lnSpc>
+              <a:buNone/>
+            </a:pPr>
+            <a:r>
+              <a:rPr lang="en-US" sz="1400" dirty="0">
+                <a:solidFill>
+                  <a:srgbClr val="0B2E33"/>
+                </a:solidFill>
+                <a:latin typeface="Pretendard" pitchFamily="34" charset="0"/>
+                <a:ea typeface="Pretendard" pitchFamily="34" charset="-122"/>
+                <a:cs typeface="Pretendard" pitchFamily="34" charset="-120"/>
+              </a:rPr>
+              <a:t>(8시간마다 1캡슐×3일, 매달×3개월)</a:t>
+            </a:r>
+            <a:endParaRPr lang="en-US" sz="1400" dirty="0"/>
           </a:p>
         </p:txBody>
       </p:sp>
@@ -5421,7 +5370,7 @@
                 <a:ea typeface="Pretendard" pitchFamily="34" charset="-122"/>
                 <a:cs typeface="Pretendard" pitchFamily="34" charset="-120"/>
               </a:rPr>
-              <a:t>측정변수  마취 발현시간(초시계) · 통증(VAS 0-10) · 마취 지속시간 · 추가 마취 필요 여부/횟수</a:t>
+              <a:t>측정변수  임상: 캘리퍼로 측정한 견치-제2소구치 브라켓 간 거리 변화(누적 이동량) · 생화학: GCF PGE2·RANKL(ELISA)</a:t>
             </a:r>
             <a:endParaRPr lang="en-US" sz="1350" dirty="0"/>
           </a:p>
@@ -5531,7 +5480,7 @@
                 <a:ea typeface="Pretendard" pitchFamily="34" charset="-122"/>
                 <a:cs typeface="Pretendard" pitchFamily="34" charset="-120"/>
               </a:rPr>
-              <a:t>결과</a:t>
+              <a:t>결과 ①</a:t>
             </a:r>
             <a:endParaRPr lang="en-US" sz="1300" dirty="0"/>
           </a:p>
@@ -5570,7 +5519,7 @@
                 <a:ea typeface="Wanted Sans" pitchFamily="34" charset="-122"/>
                 <a:cs typeface="Wanted Sans" pitchFamily="34" charset="-120"/>
               </a:rPr>
-              <a:t>마취 발현시간 비교</a:t>
+              <a:t>치아이동량 비교 (3개월 누적)</a:t>
             </a:r>
             <a:endParaRPr lang="en-US" sz="3000" dirty="0"/>
           </a:p>
@@ -5584,12 +5533,12 @@
         </p:nvSpPr>
         <p:spPr>
           <a:xfrm>
-            <a:off x="822960" y="1874520"/>
-            <a:ext cx="4480560" cy="2103120"/>
+            <a:off x="822960" y="1783080"/>
+            <a:ext cx="4480560" cy="1920240"/>
           </a:xfrm>
           <a:prstGeom prst="roundRect">
             <a:avLst>
-              <a:gd name="adj" fmla="val 5217"/>
+              <a:gd name="adj" fmla="val 5714"/>
             </a:avLst>
           </a:prstGeom>
           <a:solidFill>
@@ -5613,8 +5562,8 @@
         </p:nvSpPr>
         <p:spPr>
           <a:xfrm>
-            <a:off x="822960" y="2103120"/>
-            <a:ext cx="4480560" cy="1051560"/>
+            <a:off x="822960" y="1965960"/>
+            <a:ext cx="4480560" cy="960120"/>
           </a:xfrm>
           <a:prstGeom prst="rect">
             <a:avLst/>
@@ -5630,17 +5579,17 @@
               <a:buNone/>
             </a:pPr>
             <a:r>
-              <a:rPr lang="en-US" sz="4400" b="1" dirty="0">
-                <a:solidFill>
-                  <a:srgbClr val="02C39A"/>
+              <a:rPr lang="en-US" sz="4000" b="1" dirty="0">
+                <a:solidFill>
+                  <a:srgbClr val="5B7A7E"/>
                 </a:solidFill>
                 <a:latin typeface="Wanted Sans" pitchFamily="34" charset="0"/>
                 <a:ea typeface="Wanted Sans" pitchFamily="34" charset="-122"/>
                 <a:cs typeface="Wanted Sans" pitchFamily="34" charset="-120"/>
               </a:rPr>
-              <a:t>122.1 ± 52.9</a:t>
-            </a:r>
-            <a:endParaRPr lang="en-US" sz="4400" dirty="0"/>
+              <a:t>2.85 ± 0.32</a:t>
+            </a:r>
+            <a:endParaRPr lang="en-US" sz="4000" dirty="0"/>
           </a:p>
         </p:txBody>
       </p:sp>
@@ -5652,7 +5601,7 @@
         </p:nvSpPr>
         <p:spPr>
           <a:xfrm>
-            <a:off x="822960" y="3246120"/>
+            <a:off x="822960" y="3017520"/>
             <a:ext cx="4480560" cy="548640"/>
           </a:xfrm>
           <a:prstGeom prst="rect">
@@ -5677,7 +5626,7 @@
                 <a:ea typeface="Pretendard" pitchFamily="34" charset="-122"/>
                 <a:cs typeface="Pretendard" pitchFamily="34" charset="-120"/>
               </a:rPr>
-              <a:t>초 · 아티카인</a:t>
+              <a:t>mm · 이부프로펜</a:t>
             </a:r>
             <a:endParaRPr lang="en-US" sz="1500" dirty="0"/>
           </a:p>
@@ -5691,12 +5640,12 @@
         </p:nvSpPr>
         <p:spPr>
           <a:xfrm>
-            <a:off x="5669280" y="1874520"/>
-            <a:ext cx="4480560" cy="2103120"/>
+            <a:off x="5669280" y="1783080"/>
+            <a:ext cx="4480560" cy="1920240"/>
           </a:xfrm>
           <a:prstGeom prst="roundRect">
             <a:avLst>
-              <a:gd name="adj" fmla="val 5217"/>
+              <a:gd name="adj" fmla="val 5714"/>
             </a:avLst>
           </a:prstGeom>
           <a:solidFill>
@@ -5720,8 +5669,8 @@
         </p:nvSpPr>
         <p:spPr>
           <a:xfrm>
-            <a:off x="5669280" y="2103120"/>
-            <a:ext cx="4480560" cy="1051560"/>
+            <a:off x="5669280" y="1965960"/>
+            <a:ext cx="4480560" cy="960120"/>
           </a:xfrm>
           <a:prstGeom prst="rect">
             <a:avLst/>
@@ -5737,17 +5686,17 @@
               <a:buNone/>
             </a:pPr>
             <a:r>
-              <a:rPr lang="en-US" sz="4400" b="1" dirty="0">
-                <a:solidFill>
-                  <a:srgbClr val="5B7A7E"/>
+              <a:rPr lang="en-US" sz="4000" b="1" dirty="0">
+                <a:solidFill>
+                  <a:srgbClr val="02C39A"/>
                 </a:solidFill>
                 <a:latin typeface="Wanted Sans" pitchFamily="34" charset="0"/>
                 <a:ea typeface="Wanted Sans" pitchFamily="34" charset="-122"/>
                 <a:cs typeface="Wanted Sans" pitchFamily="34" charset="-120"/>
               </a:rPr>
-              <a:t>144.5 ± 68.9</a:t>
-            </a:r>
-            <a:endParaRPr lang="en-US" sz="4400" dirty="0"/>
+              <a:t>3.45 ± 0.41</a:t>
+            </a:r>
+            <a:endParaRPr lang="en-US" sz="4000" dirty="0"/>
           </a:p>
         </p:txBody>
       </p:sp>
@@ -5759,7 +5708,7 @@
         </p:nvSpPr>
         <p:spPr>
           <a:xfrm>
-            <a:off x="5669280" y="3246120"/>
+            <a:off x="5669280" y="3017520"/>
             <a:ext cx="4480560" cy="548640"/>
           </a:xfrm>
           <a:prstGeom prst="rect">
@@ -5784,7 +5733,7 @@
                 <a:ea typeface="Pretendard" pitchFamily="34" charset="-122"/>
                 <a:cs typeface="Pretendard" pitchFamily="34" charset="-120"/>
               </a:rPr>
-              <a:t>초 · 리도카인</a:t>
+              <a:t>mm · 아세트아미노펜</a:t>
             </a:r>
             <a:endParaRPr lang="en-US" sz="1500" dirty="0"/>
           </a:p>
@@ -5798,7 +5747,7 @@
         </p:nvSpPr>
         <p:spPr>
           <a:xfrm>
-            <a:off x="822960" y="4206240"/>
+            <a:off x="822960" y="3886200"/>
             <a:ext cx="10424160" cy="457200"/>
           </a:xfrm>
           <a:prstGeom prst="rect">
@@ -5823,122 +5772,1107 @@
                 <a:ea typeface="Pretendard" pitchFamily="34" charset="-122"/>
                 <a:cs typeface="Pretendard" pitchFamily="34" charset="-120"/>
               </a:rPr>
-              <a:t>→ 아티카인 측이 평균 22.4초 더 빠르게 발현 (p&lt;0.01, paired t-test)</a:t>
+              <a:t>→ 이부프로펜군이 3개월 총 이동량 17.4% 적음 (p&lt;0.001) — 1개월차엔 유의차 없었으나(p=0.052), 2개월차부터 유의(p=0.001)해져 누적효과로 나타남</a:t>
             </a:r>
             <a:endParaRPr lang="en-US" sz="1400" dirty="0"/>
           </a:p>
         </p:txBody>
       </p:sp>
-      <p:sp>
-        <p:nvSpPr>
-          <p:cNvPr id="11" name="Shape 9"/>
-          <p:cNvSpPr/>
-          <p:nvPr/>
-        </p:nvSpPr>
-        <p:spPr>
-          <a:xfrm>
-            <a:off x="822960" y="4892040"/>
-            <a:ext cx="10424160" cy="1188720"/>
-          </a:xfrm>
-          <a:prstGeom prst="roundRect">
-            <a:avLst>
-              <a:gd name="adj" fmla="val 7692"/>
-            </a:avLst>
-          </a:prstGeom>
-          <a:solidFill>
-            <a:srgbClr val="F7FBFB"/>
-          </a:solidFill>
-          <a:ln w="12700">
-            <a:solidFill>
-              <a:srgbClr val="00A896">
-                <a:alpha val="30000"/>
-              </a:srgbClr>
-            </a:solidFill>
-            <a:prstDash val="solid"/>
-          </a:ln>
-        </p:spPr>
-      </p:sp>
-      <p:sp>
-        <p:nvSpPr>
-          <p:cNvPr id="12" name="Text 10"/>
-          <p:cNvSpPr txBox="1"/>
-          <p:nvPr/>
-        </p:nvSpPr>
-        <p:spPr>
-          <a:xfrm>
-            <a:off x="1097280" y="5029200"/>
-            <a:ext cx="2743200" cy="365760"/>
-          </a:xfrm>
-          <a:prstGeom prst="rect">
-            <a:avLst/>
-          </a:prstGeom>
-          <a:noFill/>
-          <a:ln/>
-        </p:spPr>
-        <p:txBody>
-          <a:bodyPr wrap="square" lIns="0" tIns="0" rIns="0" bIns="0" rtlCol="0" anchor="ctr"/>
-          <a:lstStyle/>
-          <a:p>
-            <a:pPr indent="0" marL="0">
-              <a:buNone/>
-            </a:pPr>
-            <a:r>
-              <a:rPr lang="en-US" sz="1300" b="1" dirty="0">
-                <a:solidFill>
-                  <a:srgbClr val="00A896"/>
-                </a:solidFill>
-                <a:latin typeface="Pretendard" pitchFamily="34" charset="0"/>
-                <a:ea typeface="Pretendard" pitchFamily="34" charset="-122"/>
-                <a:cs typeface="Pretendard" pitchFamily="34" charset="-120"/>
-              </a:rPr>
-              <a:t>추가 소견</a:t>
-            </a:r>
-            <a:endParaRPr lang="en-US" sz="1300" dirty="0"/>
-          </a:p>
-        </p:txBody>
-      </p:sp>
-      <p:sp>
-        <p:nvSpPr>
-          <p:cNvPr id="13" name="Text 11"/>
-          <p:cNvSpPr txBox="1"/>
-          <p:nvPr/>
-        </p:nvSpPr>
-        <p:spPr>
-          <a:xfrm>
-            <a:off x="1097280" y="5349240"/>
-            <a:ext cx="9875520" cy="640080"/>
-          </a:xfrm>
-          <a:prstGeom prst="rect">
-            <a:avLst/>
-          </a:prstGeom>
-          <a:noFill/>
-          <a:ln/>
-        </p:spPr>
-        <p:txBody>
-          <a:bodyPr wrap="square" lIns="0" tIns="0" rIns="0" bIns="0" rtlCol="0" anchor="ctr"/>
-          <a:lstStyle/>
-          <a:p>
-            <a:pPr indent="0" marL="0">
-              <a:buNone/>
-            </a:pPr>
-            <a:r>
-              <a:rPr lang="en-US" sz="1300" dirty="0">
-                <a:solidFill>
-                  <a:srgbClr val="0B2E33"/>
-                </a:solidFill>
-                <a:latin typeface="Pretendard" pitchFamily="34" charset="0"/>
-                <a:ea typeface="Pretendard" pitchFamily="34" charset="-122"/>
-                <a:cs typeface="Pretendard" pitchFamily="34" charset="-120"/>
-              </a:rPr>
-              <a:t>추가 마취(보충 주사) 튜브 수: 아티카인 0.26±0.48개 vs 리도카인 0.50±0.75개 (p&lt;0.01) — 리도카인 측에서 유의하게 더 많이 필요.</a:t>
-            </a:r>
-            <a:endParaRPr lang="en-US" sz="1300" dirty="0"/>
-          </a:p>
-        </p:txBody>
-      </p:sp>
-      <p:sp>
-        <p:nvSpPr>
-          <p:cNvPr id="14" name="Text 12"/>
+      <p:graphicFrame>
+        <p:nvGraphicFramePr>
+          <p:cNvPr id="8" name="Table 0"/>
+          <p:cNvGraphicFramePr>
+            <a:graphicFrameLocks noGrp="1"/>
+          </p:cNvGraphicFramePr>
+          <p:nvPr>
+            <p:extLst>
+              <p:ext uri="{D42A27DB-BD31-4B8C-83A1-F6EECF244321}">
+                <p14:modId xmlns:p14="http://schemas.microsoft.com/office/powerpoint/2010/main" val="1579011935"/>
+              </p:ext>
+            </p:extLst>
+          </p:nvPr>
+        </p:nvGraphicFramePr>
+        <p:xfrm>
+          <a:off x="822960" y="4526280"/>
+          <a:ext cx="10424160" cy="1645920"/>
+        </p:xfrm>
+        <a:graphic>
+          <a:graphicData uri="http://schemas.openxmlformats.org/drawingml/2006/table">
+            <a:tbl>
+              <a:tblPr/>
+              <a:tblGrid>
+                <a:gridCol w="2606040"/>
+                <a:gridCol w="2606040"/>
+                <a:gridCol w="2606040"/>
+                <a:gridCol w="2606040"/>
+              </a:tblGrid>
+              <a:tr h="411480">
+                <a:tc>
+                  <a:txBody>
+                    <a:bodyPr/>
+                    <a:lstStyle/>
+                    <a:p>
+                      <a:pPr algn="ctr" indent="0" marL="0">
+                        <a:buNone/>
+                      </a:pPr>
+                      <a:r>
+                        <a:rPr lang="en-US" sz="1300" b="1" dirty="0">
+                          <a:solidFill>
+                            <a:srgbClr val="FFFFFF"/>
+                          </a:solidFill>
+                          <a:latin typeface="Pretendard" pitchFamily="34" charset="0"/>
+                          <a:ea typeface="Pretendard" pitchFamily="34" charset="-122"/>
+                          <a:cs typeface="Pretendard" pitchFamily="34" charset="-120"/>
+                        </a:rPr>
+                        <a:t>시점</a:t>
+                      </a:r>
+                      <a:endParaRPr lang="en-US" sz="1300" dirty="0">
+                        <a:latin typeface="Pretendard" charset="0"/>
+                        <a:ea typeface="Pretendard" charset="0"/>
+                        <a:cs typeface="Pretendard" charset="0"/>
+                      </a:endParaRPr>
+                    </a:p>
+                  </a:txBody>
+                  <a:tcPr marL="91440" marR="91440" marT="45720" marB="45720" anchor="ctr">
+                    <a:lnL w="12700" cap="flat" cmpd="sng" algn="ctr">
+                      <a:solidFill>
+                        <a:srgbClr val="D8E8E6"/>
+                      </a:solidFill>
+                      <a:prstDash val="solid"/>
+                      <a:round/>
+                      <a:headEnd type="none" w="med" len="med"/>
+                      <a:tailEnd type="none" w="med" len="med"/>
+                    </a:lnL>
+                    <a:lnR w="12700" cap="flat" cmpd="sng" algn="ctr">
+                      <a:solidFill>
+                        <a:srgbClr val="D8E8E6"/>
+                      </a:solidFill>
+                      <a:prstDash val="solid"/>
+                      <a:round/>
+                      <a:headEnd type="none" w="med" len="med"/>
+                      <a:tailEnd type="none" w="med" len="med"/>
+                    </a:lnR>
+                    <a:lnT w="12700" cap="flat" cmpd="sng" algn="ctr">
+                      <a:solidFill>
+                        <a:srgbClr val="D8E8E6"/>
+                      </a:solidFill>
+                      <a:prstDash val="solid"/>
+                      <a:round/>
+                      <a:headEnd type="none" w="med" len="med"/>
+                      <a:tailEnd type="none" w="med" len="med"/>
+                    </a:lnT>
+                    <a:lnB w="12700" cap="flat" cmpd="sng" algn="ctr">
+                      <a:solidFill>
+                        <a:srgbClr val="D8E8E6"/>
+                      </a:solidFill>
+                      <a:prstDash val="solid"/>
+                      <a:round/>
+                      <a:headEnd type="none" w="med" len="med"/>
+                      <a:tailEnd type="none" w="med" len="med"/>
+                    </a:lnB>
+                    <a:solidFill>
+                      <a:srgbClr val="028090"/>
+                    </a:solidFill>
+                  </a:tcPr>
+                </a:tc>
+                <a:tc>
+                  <a:txBody>
+                    <a:bodyPr/>
+                    <a:lstStyle/>
+                    <a:p>
+                      <a:pPr algn="ctr" indent="0" marL="0">
+                        <a:buNone/>
+                      </a:pPr>
+                      <a:r>
+                        <a:rPr lang="en-US" sz="1300" b="1" dirty="0">
+                          <a:solidFill>
+                            <a:srgbClr val="FFFFFF"/>
+                          </a:solidFill>
+                          <a:latin typeface="Pretendard" pitchFamily="34" charset="0"/>
+                          <a:ea typeface="Pretendard" pitchFamily="34" charset="-122"/>
+                          <a:cs typeface="Pretendard" pitchFamily="34" charset="-120"/>
+                        </a:rPr>
+                        <a:t>이부프로펜</a:t>
+                      </a:r>
+                      <a:endParaRPr lang="en-US" sz="1300" dirty="0">
+                        <a:latin typeface="Pretendard" charset="0"/>
+                        <a:ea typeface="Pretendard" charset="0"/>
+                        <a:cs typeface="Pretendard" charset="0"/>
+                      </a:endParaRPr>
+                    </a:p>
+                  </a:txBody>
+                  <a:tcPr marL="91440" marR="91440" marT="45720" marB="45720" anchor="ctr">
+                    <a:lnL w="12700" cap="flat" cmpd="sng" algn="ctr">
+                      <a:solidFill>
+                        <a:srgbClr val="D8E8E6"/>
+                      </a:solidFill>
+                      <a:prstDash val="solid"/>
+                      <a:round/>
+                      <a:headEnd type="none" w="med" len="med"/>
+                      <a:tailEnd type="none" w="med" len="med"/>
+                    </a:lnL>
+                    <a:lnR w="12700" cap="flat" cmpd="sng" algn="ctr">
+                      <a:solidFill>
+                        <a:srgbClr val="D8E8E6"/>
+                      </a:solidFill>
+                      <a:prstDash val="solid"/>
+                      <a:round/>
+                      <a:headEnd type="none" w="med" len="med"/>
+                      <a:tailEnd type="none" w="med" len="med"/>
+                    </a:lnR>
+                    <a:lnT w="12700" cap="flat" cmpd="sng" algn="ctr">
+                      <a:solidFill>
+                        <a:srgbClr val="D8E8E6"/>
+                      </a:solidFill>
+                      <a:prstDash val="solid"/>
+                      <a:round/>
+                      <a:headEnd type="none" w="med" len="med"/>
+                      <a:tailEnd type="none" w="med" len="med"/>
+                    </a:lnT>
+                    <a:lnB w="12700" cap="flat" cmpd="sng" algn="ctr">
+                      <a:solidFill>
+                        <a:srgbClr val="D8E8E6"/>
+                      </a:solidFill>
+                      <a:prstDash val="solid"/>
+                      <a:round/>
+                      <a:headEnd type="none" w="med" len="med"/>
+                      <a:tailEnd type="none" w="med" len="med"/>
+                    </a:lnB>
+                    <a:solidFill>
+                      <a:srgbClr val="028090"/>
+                    </a:solidFill>
+                  </a:tcPr>
+                </a:tc>
+                <a:tc>
+                  <a:txBody>
+                    <a:bodyPr/>
+                    <a:lstStyle/>
+                    <a:p>
+                      <a:pPr algn="ctr" indent="0" marL="0">
+                        <a:buNone/>
+                      </a:pPr>
+                      <a:r>
+                        <a:rPr lang="en-US" sz="1300" b="1" dirty="0">
+                          <a:solidFill>
+                            <a:srgbClr val="FFFFFF"/>
+                          </a:solidFill>
+                          <a:latin typeface="Pretendard" pitchFamily="34" charset="0"/>
+                          <a:ea typeface="Pretendard" pitchFamily="34" charset="-122"/>
+                          <a:cs typeface="Pretendard" pitchFamily="34" charset="-120"/>
+                        </a:rPr>
+                        <a:t>아세트아미노펜</a:t>
+                      </a:r>
+                      <a:endParaRPr lang="en-US" sz="1300" dirty="0">
+                        <a:latin typeface="Pretendard" charset="0"/>
+                        <a:ea typeface="Pretendard" charset="0"/>
+                        <a:cs typeface="Pretendard" charset="0"/>
+                      </a:endParaRPr>
+                    </a:p>
+                  </a:txBody>
+                  <a:tcPr marL="91440" marR="91440" marT="45720" marB="45720" anchor="ctr">
+                    <a:lnL w="12700" cap="flat" cmpd="sng" algn="ctr">
+                      <a:solidFill>
+                        <a:srgbClr val="D8E8E6"/>
+                      </a:solidFill>
+                      <a:prstDash val="solid"/>
+                      <a:round/>
+                      <a:headEnd type="none" w="med" len="med"/>
+                      <a:tailEnd type="none" w="med" len="med"/>
+                    </a:lnL>
+                    <a:lnR w="12700" cap="flat" cmpd="sng" algn="ctr">
+                      <a:solidFill>
+                        <a:srgbClr val="D8E8E6"/>
+                      </a:solidFill>
+                      <a:prstDash val="solid"/>
+                      <a:round/>
+                      <a:headEnd type="none" w="med" len="med"/>
+                      <a:tailEnd type="none" w="med" len="med"/>
+                    </a:lnR>
+                    <a:lnT w="12700" cap="flat" cmpd="sng" algn="ctr">
+                      <a:solidFill>
+                        <a:srgbClr val="D8E8E6"/>
+                      </a:solidFill>
+                      <a:prstDash val="solid"/>
+                      <a:round/>
+                      <a:headEnd type="none" w="med" len="med"/>
+                      <a:tailEnd type="none" w="med" len="med"/>
+                    </a:lnT>
+                    <a:lnB w="12700" cap="flat" cmpd="sng" algn="ctr">
+                      <a:solidFill>
+                        <a:srgbClr val="D8E8E6"/>
+                      </a:solidFill>
+                      <a:prstDash val="solid"/>
+                      <a:round/>
+                      <a:headEnd type="none" w="med" len="med"/>
+                      <a:tailEnd type="none" w="med" len="med"/>
+                    </a:lnB>
+                    <a:solidFill>
+                      <a:srgbClr val="028090"/>
+                    </a:solidFill>
+                  </a:tcPr>
+                </a:tc>
+                <a:tc>
+                  <a:txBody>
+                    <a:bodyPr/>
+                    <a:lstStyle/>
+                    <a:p>
+                      <a:pPr algn="ctr" indent="0" marL="0">
+                        <a:buNone/>
+                      </a:pPr>
+                      <a:r>
+                        <a:rPr lang="en-US" sz="1300" b="1" dirty="0">
+                          <a:solidFill>
+                            <a:srgbClr val="FFFFFF"/>
+                          </a:solidFill>
+                          <a:latin typeface="Pretendard" pitchFamily="34" charset="0"/>
+                          <a:ea typeface="Pretendard" pitchFamily="34" charset="-122"/>
+                          <a:cs typeface="Pretendard" pitchFamily="34" charset="-120"/>
+                        </a:rPr>
+                        <a:t>p</a:t>
+                      </a:r>
+                      <a:endParaRPr lang="en-US" sz="1300" dirty="0">
+                        <a:latin typeface="Pretendard" charset="0"/>
+                        <a:ea typeface="Pretendard" charset="0"/>
+                        <a:cs typeface="Pretendard" charset="0"/>
+                      </a:endParaRPr>
+                    </a:p>
+                  </a:txBody>
+                  <a:tcPr marL="91440" marR="91440" marT="45720" marB="45720" anchor="ctr">
+                    <a:lnL w="12700" cap="flat" cmpd="sng" algn="ctr">
+                      <a:solidFill>
+                        <a:srgbClr val="D8E8E6"/>
+                      </a:solidFill>
+                      <a:prstDash val="solid"/>
+                      <a:round/>
+                      <a:headEnd type="none" w="med" len="med"/>
+                      <a:tailEnd type="none" w="med" len="med"/>
+                    </a:lnL>
+                    <a:lnR w="12700" cap="flat" cmpd="sng" algn="ctr">
+                      <a:solidFill>
+                        <a:srgbClr val="D8E8E6"/>
+                      </a:solidFill>
+                      <a:prstDash val="solid"/>
+                      <a:round/>
+                      <a:headEnd type="none" w="med" len="med"/>
+                      <a:tailEnd type="none" w="med" len="med"/>
+                    </a:lnR>
+                    <a:lnT w="12700" cap="flat" cmpd="sng" algn="ctr">
+                      <a:solidFill>
+                        <a:srgbClr val="D8E8E6"/>
+                      </a:solidFill>
+                      <a:prstDash val="solid"/>
+                      <a:round/>
+                      <a:headEnd type="none" w="med" len="med"/>
+                      <a:tailEnd type="none" w="med" len="med"/>
+                    </a:lnT>
+                    <a:lnB w="12700" cap="flat" cmpd="sng" algn="ctr">
+                      <a:solidFill>
+                        <a:srgbClr val="D8E8E6"/>
+                      </a:solidFill>
+                      <a:prstDash val="solid"/>
+                      <a:round/>
+                      <a:headEnd type="none" w="med" len="med"/>
+                      <a:tailEnd type="none" w="med" len="med"/>
+                    </a:lnB>
+                    <a:solidFill>
+                      <a:srgbClr val="028090"/>
+                    </a:solidFill>
+                  </a:tcPr>
+                </a:tc>
+              </a:tr>
+              <a:tr h="411480">
+                <a:tc>
+                  <a:txBody>
+                    <a:bodyPr/>
+                    <a:lstStyle/>
+                    <a:p>
+                      <a:pPr algn="ctr" indent="0" marL="0">
+                        <a:buNone/>
+                      </a:pPr>
+                      <a:r>
+                        <a:rPr lang="en-US" sz="1300" dirty="0">
+                          <a:solidFill>
+                            <a:srgbClr val="0B2E33"/>
+                          </a:solidFill>
+                          <a:latin typeface="Pretendard" pitchFamily="34" charset="0"/>
+                          <a:ea typeface="Pretendard" pitchFamily="34" charset="-122"/>
+                          <a:cs typeface="Pretendard" pitchFamily="34" charset="-120"/>
+                        </a:rPr>
+                        <a:t>1개월</a:t>
+                      </a:r>
+                      <a:endParaRPr lang="en-US" sz="1300" dirty="0">
+                        <a:latin typeface="Pretendard" charset="0"/>
+                        <a:ea typeface="Pretendard" charset="0"/>
+                        <a:cs typeface="Pretendard" charset="0"/>
+                      </a:endParaRPr>
+                    </a:p>
+                  </a:txBody>
+                  <a:tcPr marL="91440" marR="91440" marT="45720" marB="45720" anchor="ctr">
+                    <a:lnL w="12700" cap="flat" cmpd="sng" algn="ctr">
+                      <a:solidFill>
+                        <a:srgbClr val="D8E8E6"/>
+                      </a:solidFill>
+                      <a:prstDash val="solid"/>
+                      <a:round/>
+                      <a:headEnd type="none" w="med" len="med"/>
+                      <a:tailEnd type="none" w="med" len="med"/>
+                    </a:lnL>
+                    <a:lnR w="12700" cap="flat" cmpd="sng" algn="ctr">
+                      <a:solidFill>
+                        <a:srgbClr val="D8E8E6"/>
+                      </a:solidFill>
+                      <a:prstDash val="solid"/>
+                      <a:round/>
+                      <a:headEnd type="none" w="med" len="med"/>
+                      <a:tailEnd type="none" w="med" len="med"/>
+                    </a:lnR>
+                    <a:lnT w="12700" cap="flat" cmpd="sng" algn="ctr">
+                      <a:solidFill>
+                        <a:srgbClr val="D8E8E6"/>
+                      </a:solidFill>
+                      <a:prstDash val="solid"/>
+                      <a:round/>
+                      <a:headEnd type="none" w="med" len="med"/>
+                      <a:tailEnd type="none" w="med" len="med"/>
+                    </a:lnT>
+                    <a:lnB w="12700" cap="flat" cmpd="sng" algn="ctr">
+                      <a:solidFill>
+                        <a:srgbClr val="D8E8E6"/>
+                      </a:solidFill>
+                      <a:prstDash val="solid"/>
+                      <a:round/>
+                      <a:headEnd type="none" w="med" len="med"/>
+                      <a:tailEnd type="none" w="med" len="med"/>
+                    </a:lnB>
+                  </a:tcPr>
+                </a:tc>
+                <a:tc>
+                  <a:txBody>
+                    <a:bodyPr/>
+                    <a:lstStyle/>
+                    <a:p>
+                      <a:pPr algn="ctr" indent="0" marL="0">
+                        <a:buNone/>
+                      </a:pPr>
+                      <a:r>
+                        <a:rPr lang="en-US" sz="1300" dirty="0">
+                          <a:solidFill>
+                            <a:srgbClr val="0B2E33"/>
+                          </a:solidFill>
+                          <a:latin typeface="Pretendard" pitchFamily="34" charset="0"/>
+                          <a:ea typeface="Pretendard" pitchFamily="34" charset="-122"/>
+                          <a:cs typeface="Pretendard" pitchFamily="34" charset="-120"/>
+                        </a:rPr>
+                        <a:t>0.92 ± 0.15 mm</a:t>
+                      </a:r>
+                      <a:endParaRPr lang="en-US" sz="1300" dirty="0">
+                        <a:latin typeface="Pretendard" charset="0"/>
+                        <a:ea typeface="Pretendard" charset="0"/>
+                        <a:cs typeface="Pretendard" charset="0"/>
+                      </a:endParaRPr>
+                    </a:p>
+                  </a:txBody>
+                  <a:tcPr marL="91440" marR="91440" marT="45720" marB="45720" anchor="ctr">
+                    <a:lnL w="12700" cap="flat" cmpd="sng" algn="ctr">
+                      <a:solidFill>
+                        <a:srgbClr val="D8E8E6"/>
+                      </a:solidFill>
+                      <a:prstDash val="solid"/>
+                      <a:round/>
+                      <a:headEnd type="none" w="med" len="med"/>
+                      <a:tailEnd type="none" w="med" len="med"/>
+                    </a:lnL>
+                    <a:lnR w="12700" cap="flat" cmpd="sng" algn="ctr">
+                      <a:solidFill>
+                        <a:srgbClr val="D8E8E6"/>
+                      </a:solidFill>
+                      <a:prstDash val="solid"/>
+                      <a:round/>
+                      <a:headEnd type="none" w="med" len="med"/>
+                      <a:tailEnd type="none" w="med" len="med"/>
+                    </a:lnR>
+                    <a:lnT w="12700" cap="flat" cmpd="sng" algn="ctr">
+                      <a:solidFill>
+                        <a:srgbClr val="D8E8E6"/>
+                      </a:solidFill>
+                      <a:prstDash val="solid"/>
+                      <a:round/>
+                      <a:headEnd type="none" w="med" len="med"/>
+                      <a:tailEnd type="none" w="med" len="med"/>
+                    </a:lnT>
+                    <a:lnB w="12700" cap="flat" cmpd="sng" algn="ctr">
+                      <a:solidFill>
+                        <a:srgbClr val="D8E8E6"/>
+                      </a:solidFill>
+                      <a:prstDash val="solid"/>
+                      <a:round/>
+                      <a:headEnd type="none" w="med" len="med"/>
+                      <a:tailEnd type="none" w="med" len="med"/>
+                    </a:lnB>
+                  </a:tcPr>
+                </a:tc>
+                <a:tc>
+                  <a:txBody>
+                    <a:bodyPr/>
+                    <a:lstStyle/>
+                    <a:p>
+                      <a:pPr algn="ctr" indent="0" marL="0">
+                        <a:buNone/>
+                      </a:pPr>
+                      <a:r>
+                        <a:rPr lang="en-US" sz="1300" dirty="0">
+                          <a:solidFill>
+                            <a:srgbClr val="0B2E33"/>
+                          </a:solidFill>
+                          <a:latin typeface="Pretendard" pitchFamily="34" charset="0"/>
+                          <a:ea typeface="Pretendard" pitchFamily="34" charset="-122"/>
+                          <a:cs typeface="Pretendard" pitchFamily="34" charset="-120"/>
+                        </a:rPr>
+                        <a:t>1.05 ± 0.18 mm</a:t>
+                      </a:r>
+                      <a:endParaRPr lang="en-US" sz="1300" dirty="0">
+                        <a:latin typeface="Pretendard" charset="0"/>
+                        <a:ea typeface="Pretendard" charset="0"/>
+                        <a:cs typeface="Pretendard" charset="0"/>
+                      </a:endParaRPr>
+                    </a:p>
+                  </a:txBody>
+                  <a:tcPr marL="91440" marR="91440" marT="45720" marB="45720" anchor="ctr">
+                    <a:lnL w="12700" cap="flat" cmpd="sng" algn="ctr">
+                      <a:solidFill>
+                        <a:srgbClr val="D8E8E6"/>
+                      </a:solidFill>
+                      <a:prstDash val="solid"/>
+                      <a:round/>
+                      <a:headEnd type="none" w="med" len="med"/>
+                      <a:tailEnd type="none" w="med" len="med"/>
+                    </a:lnL>
+                    <a:lnR w="12700" cap="flat" cmpd="sng" algn="ctr">
+                      <a:solidFill>
+                        <a:srgbClr val="D8E8E6"/>
+                      </a:solidFill>
+                      <a:prstDash val="solid"/>
+                      <a:round/>
+                      <a:headEnd type="none" w="med" len="med"/>
+                      <a:tailEnd type="none" w="med" len="med"/>
+                    </a:lnR>
+                    <a:lnT w="12700" cap="flat" cmpd="sng" algn="ctr">
+                      <a:solidFill>
+                        <a:srgbClr val="D8E8E6"/>
+                      </a:solidFill>
+                      <a:prstDash val="solid"/>
+                      <a:round/>
+                      <a:headEnd type="none" w="med" len="med"/>
+                      <a:tailEnd type="none" w="med" len="med"/>
+                    </a:lnT>
+                    <a:lnB w="12700" cap="flat" cmpd="sng" algn="ctr">
+                      <a:solidFill>
+                        <a:srgbClr val="D8E8E6"/>
+                      </a:solidFill>
+                      <a:prstDash val="solid"/>
+                      <a:round/>
+                      <a:headEnd type="none" w="med" len="med"/>
+                      <a:tailEnd type="none" w="med" len="med"/>
+                    </a:lnB>
+                  </a:tcPr>
+                </a:tc>
+                <a:tc>
+                  <a:txBody>
+                    <a:bodyPr/>
+                    <a:lstStyle/>
+                    <a:p>
+                      <a:pPr algn="ctr" indent="0" marL="0">
+                        <a:buNone/>
+                      </a:pPr>
+                      <a:r>
+                        <a:rPr lang="en-US" sz="1300" dirty="0">
+                          <a:solidFill>
+                            <a:srgbClr val="0B2E33"/>
+                          </a:solidFill>
+                          <a:latin typeface="Pretendard" pitchFamily="34" charset="0"/>
+                          <a:ea typeface="Pretendard" pitchFamily="34" charset="-122"/>
+                          <a:cs typeface="Pretendard" pitchFamily="34" charset="-120"/>
+                        </a:rPr>
+                        <a:t>0.052</a:t>
+                      </a:r>
+                      <a:endParaRPr lang="en-US" sz="1300" dirty="0">
+                        <a:latin typeface="Pretendard" charset="0"/>
+                        <a:ea typeface="Pretendard" charset="0"/>
+                        <a:cs typeface="Pretendard" charset="0"/>
+                      </a:endParaRPr>
+                    </a:p>
+                  </a:txBody>
+                  <a:tcPr marL="91440" marR="91440" marT="45720" marB="45720" anchor="ctr">
+                    <a:lnL w="12700" cap="flat" cmpd="sng" algn="ctr">
+                      <a:solidFill>
+                        <a:srgbClr val="D8E8E6"/>
+                      </a:solidFill>
+                      <a:prstDash val="solid"/>
+                      <a:round/>
+                      <a:headEnd type="none" w="med" len="med"/>
+                      <a:tailEnd type="none" w="med" len="med"/>
+                    </a:lnL>
+                    <a:lnR w="12700" cap="flat" cmpd="sng" algn="ctr">
+                      <a:solidFill>
+                        <a:srgbClr val="D8E8E6"/>
+                      </a:solidFill>
+                      <a:prstDash val="solid"/>
+                      <a:round/>
+                      <a:headEnd type="none" w="med" len="med"/>
+                      <a:tailEnd type="none" w="med" len="med"/>
+                    </a:lnR>
+                    <a:lnT w="12700" cap="flat" cmpd="sng" algn="ctr">
+                      <a:solidFill>
+                        <a:srgbClr val="D8E8E6"/>
+                      </a:solidFill>
+                      <a:prstDash val="solid"/>
+                      <a:round/>
+                      <a:headEnd type="none" w="med" len="med"/>
+                      <a:tailEnd type="none" w="med" len="med"/>
+                    </a:lnT>
+                    <a:lnB w="12700" cap="flat" cmpd="sng" algn="ctr">
+                      <a:solidFill>
+                        <a:srgbClr val="D8E8E6"/>
+                      </a:solidFill>
+                      <a:prstDash val="solid"/>
+                      <a:round/>
+                      <a:headEnd type="none" w="med" len="med"/>
+                      <a:tailEnd type="none" w="med" len="med"/>
+                    </a:lnB>
+                  </a:tcPr>
+                </a:tc>
+              </a:tr>
+              <a:tr h="411480">
+                <a:tc>
+                  <a:txBody>
+                    <a:bodyPr/>
+                    <a:lstStyle/>
+                    <a:p>
+                      <a:pPr algn="ctr" indent="0" marL="0">
+                        <a:buNone/>
+                      </a:pPr>
+                      <a:r>
+                        <a:rPr lang="en-US" sz="1300" dirty="0">
+                          <a:solidFill>
+                            <a:srgbClr val="0B2E33"/>
+                          </a:solidFill>
+                          <a:latin typeface="Pretendard" pitchFamily="34" charset="0"/>
+                          <a:ea typeface="Pretendard" pitchFamily="34" charset="-122"/>
+                          <a:cs typeface="Pretendard" pitchFamily="34" charset="-120"/>
+                        </a:rPr>
+                        <a:t>2개월</a:t>
+                      </a:r>
+                      <a:endParaRPr lang="en-US" sz="1300" dirty="0">
+                        <a:latin typeface="Pretendard" charset="0"/>
+                        <a:ea typeface="Pretendard" charset="0"/>
+                        <a:cs typeface="Pretendard" charset="0"/>
+                      </a:endParaRPr>
+                    </a:p>
+                  </a:txBody>
+                  <a:tcPr marL="91440" marR="91440" marT="45720" marB="45720" anchor="ctr">
+                    <a:lnL w="12700" cap="flat" cmpd="sng" algn="ctr">
+                      <a:solidFill>
+                        <a:srgbClr val="D8E8E6"/>
+                      </a:solidFill>
+                      <a:prstDash val="solid"/>
+                      <a:round/>
+                      <a:headEnd type="none" w="med" len="med"/>
+                      <a:tailEnd type="none" w="med" len="med"/>
+                    </a:lnL>
+                    <a:lnR w="12700" cap="flat" cmpd="sng" algn="ctr">
+                      <a:solidFill>
+                        <a:srgbClr val="D8E8E6"/>
+                      </a:solidFill>
+                      <a:prstDash val="solid"/>
+                      <a:round/>
+                      <a:headEnd type="none" w="med" len="med"/>
+                      <a:tailEnd type="none" w="med" len="med"/>
+                    </a:lnR>
+                    <a:lnT w="12700" cap="flat" cmpd="sng" algn="ctr">
+                      <a:solidFill>
+                        <a:srgbClr val="D8E8E6"/>
+                      </a:solidFill>
+                      <a:prstDash val="solid"/>
+                      <a:round/>
+                      <a:headEnd type="none" w="med" len="med"/>
+                      <a:tailEnd type="none" w="med" len="med"/>
+                    </a:lnT>
+                    <a:lnB w="12700" cap="flat" cmpd="sng" algn="ctr">
+                      <a:solidFill>
+                        <a:srgbClr val="D8E8E6"/>
+                      </a:solidFill>
+                      <a:prstDash val="solid"/>
+                      <a:round/>
+                      <a:headEnd type="none" w="med" len="med"/>
+                      <a:tailEnd type="none" w="med" len="med"/>
+                    </a:lnB>
+                  </a:tcPr>
+                </a:tc>
+                <a:tc>
+                  <a:txBody>
+                    <a:bodyPr/>
+                    <a:lstStyle/>
+                    <a:p>
+                      <a:pPr algn="ctr" indent="0" marL="0">
+                        <a:buNone/>
+                      </a:pPr>
+                      <a:r>
+                        <a:rPr lang="en-US" sz="1300" dirty="0">
+                          <a:solidFill>
+                            <a:srgbClr val="0B2E33"/>
+                          </a:solidFill>
+                          <a:latin typeface="Pretendard" pitchFamily="34" charset="0"/>
+                          <a:ea typeface="Pretendard" pitchFamily="34" charset="-122"/>
+                          <a:cs typeface="Pretendard" pitchFamily="34" charset="-120"/>
+                        </a:rPr>
+                        <a:t>1.84 ± 0.22 mm</a:t>
+                      </a:r>
+                      <a:endParaRPr lang="en-US" sz="1300" dirty="0">
+                        <a:latin typeface="Pretendard" charset="0"/>
+                        <a:ea typeface="Pretendard" charset="0"/>
+                        <a:cs typeface="Pretendard" charset="0"/>
+                      </a:endParaRPr>
+                    </a:p>
+                  </a:txBody>
+                  <a:tcPr marL="91440" marR="91440" marT="45720" marB="45720" anchor="ctr">
+                    <a:lnL w="12700" cap="flat" cmpd="sng" algn="ctr">
+                      <a:solidFill>
+                        <a:srgbClr val="D8E8E6"/>
+                      </a:solidFill>
+                      <a:prstDash val="solid"/>
+                      <a:round/>
+                      <a:headEnd type="none" w="med" len="med"/>
+                      <a:tailEnd type="none" w="med" len="med"/>
+                    </a:lnL>
+                    <a:lnR w="12700" cap="flat" cmpd="sng" algn="ctr">
+                      <a:solidFill>
+                        <a:srgbClr val="D8E8E6"/>
+                      </a:solidFill>
+                      <a:prstDash val="solid"/>
+                      <a:round/>
+                      <a:headEnd type="none" w="med" len="med"/>
+                      <a:tailEnd type="none" w="med" len="med"/>
+                    </a:lnR>
+                    <a:lnT w="12700" cap="flat" cmpd="sng" algn="ctr">
+                      <a:solidFill>
+                        <a:srgbClr val="D8E8E6"/>
+                      </a:solidFill>
+                      <a:prstDash val="solid"/>
+                      <a:round/>
+                      <a:headEnd type="none" w="med" len="med"/>
+                      <a:tailEnd type="none" w="med" len="med"/>
+                    </a:lnT>
+                    <a:lnB w="12700" cap="flat" cmpd="sng" algn="ctr">
+                      <a:solidFill>
+                        <a:srgbClr val="D8E8E6"/>
+                      </a:solidFill>
+                      <a:prstDash val="solid"/>
+                      <a:round/>
+                      <a:headEnd type="none" w="med" len="med"/>
+                      <a:tailEnd type="none" w="med" len="med"/>
+                    </a:lnB>
+                  </a:tcPr>
+                </a:tc>
+                <a:tc>
+                  <a:txBody>
+                    <a:bodyPr/>
+                    <a:lstStyle/>
+                    <a:p>
+                      <a:pPr algn="ctr" indent="0" marL="0">
+                        <a:buNone/>
+                      </a:pPr>
+                      <a:r>
+                        <a:rPr lang="en-US" sz="1300" dirty="0">
+                          <a:solidFill>
+                            <a:srgbClr val="0B2E33"/>
+                          </a:solidFill>
+                          <a:latin typeface="Pretendard" pitchFamily="34" charset="0"/>
+                          <a:ea typeface="Pretendard" pitchFamily="34" charset="-122"/>
+                          <a:cs typeface="Pretendard" pitchFamily="34" charset="-120"/>
+                        </a:rPr>
+                        <a:t>2.21 ± 0.29 mm</a:t>
+                      </a:r>
+                      <a:endParaRPr lang="en-US" sz="1300" dirty="0">
+                        <a:latin typeface="Pretendard" charset="0"/>
+                        <a:ea typeface="Pretendard" charset="0"/>
+                        <a:cs typeface="Pretendard" charset="0"/>
+                      </a:endParaRPr>
+                    </a:p>
+                  </a:txBody>
+                  <a:tcPr marL="91440" marR="91440" marT="45720" marB="45720" anchor="ctr">
+                    <a:lnL w="12700" cap="flat" cmpd="sng" algn="ctr">
+                      <a:solidFill>
+                        <a:srgbClr val="D8E8E6"/>
+                      </a:solidFill>
+                      <a:prstDash val="solid"/>
+                      <a:round/>
+                      <a:headEnd type="none" w="med" len="med"/>
+                      <a:tailEnd type="none" w="med" len="med"/>
+                    </a:lnL>
+                    <a:lnR w="12700" cap="flat" cmpd="sng" algn="ctr">
+                      <a:solidFill>
+                        <a:srgbClr val="D8E8E6"/>
+                      </a:solidFill>
+                      <a:prstDash val="solid"/>
+                      <a:round/>
+                      <a:headEnd type="none" w="med" len="med"/>
+                      <a:tailEnd type="none" w="med" len="med"/>
+                    </a:lnR>
+                    <a:lnT w="12700" cap="flat" cmpd="sng" algn="ctr">
+                      <a:solidFill>
+                        <a:srgbClr val="D8E8E6"/>
+                      </a:solidFill>
+                      <a:prstDash val="solid"/>
+                      <a:round/>
+                      <a:headEnd type="none" w="med" len="med"/>
+                      <a:tailEnd type="none" w="med" len="med"/>
+                    </a:lnT>
+                    <a:lnB w="12700" cap="flat" cmpd="sng" algn="ctr">
+                      <a:solidFill>
+                        <a:srgbClr val="D8E8E6"/>
+                      </a:solidFill>
+                      <a:prstDash val="solid"/>
+                      <a:round/>
+                      <a:headEnd type="none" w="med" len="med"/>
+                      <a:tailEnd type="none" w="med" len="med"/>
+                    </a:lnB>
+                  </a:tcPr>
+                </a:tc>
+                <a:tc>
+                  <a:txBody>
+                    <a:bodyPr/>
+                    <a:lstStyle/>
+                    <a:p>
+                      <a:pPr algn="ctr" indent="0" marL="0">
+                        <a:buNone/>
+                      </a:pPr>
+                      <a:r>
+                        <a:rPr lang="en-US" sz="1300" dirty="0">
+                          <a:solidFill>
+                            <a:srgbClr val="0B2E33"/>
+                          </a:solidFill>
+                          <a:latin typeface="Pretendard" pitchFamily="34" charset="0"/>
+                          <a:ea typeface="Pretendard" pitchFamily="34" charset="-122"/>
+                          <a:cs typeface="Pretendard" pitchFamily="34" charset="-120"/>
+                        </a:rPr>
+                        <a:t>0.001*</a:t>
+                      </a:r>
+                      <a:endParaRPr lang="en-US" sz="1300" dirty="0">
+                        <a:latin typeface="Pretendard" charset="0"/>
+                        <a:ea typeface="Pretendard" charset="0"/>
+                        <a:cs typeface="Pretendard" charset="0"/>
+                      </a:endParaRPr>
+                    </a:p>
+                  </a:txBody>
+                  <a:tcPr marL="91440" marR="91440" marT="45720" marB="45720" anchor="ctr">
+                    <a:lnL w="12700" cap="flat" cmpd="sng" algn="ctr">
+                      <a:solidFill>
+                        <a:srgbClr val="D8E8E6"/>
+                      </a:solidFill>
+                      <a:prstDash val="solid"/>
+                      <a:round/>
+                      <a:headEnd type="none" w="med" len="med"/>
+                      <a:tailEnd type="none" w="med" len="med"/>
+                    </a:lnL>
+                    <a:lnR w="12700" cap="flat" cmpd="sng" algn="ctr">
+                      <a:solidFill>
+                        <a:srgbClr val="D8E8E6"/>
+                      </a:solidFill>
+                      <a:prstDash val="solid"/>
+                      <a:round/>
+                      <a:headEnd type="none" w="med" len="med"/>
+                      <a:tailEnd type="none" w="med" len="med"/>
+                    </a:lnR>
+                    <a:lnT w="12700" cap="flat" cmpd="sng" algn="ctr">
+                      <a:solidFill>
+                        <a:srgbClr val="D8E8E6"/>
+                      </a:solidFill>
+                      <a:prstDash val="solid"/>
+                      <a:round/>
+                      <a:headEnd type="none" w="med" len="med"/>
+                      <a:tailEnd type="none" w="med" len="med"/>
+                    </a:lnT>
+                    <a:lnB w="12700" cap="flat" cmpd="sng" algn="ctr">
+                      <a:solidFill>
+                        <a:srgbClr val="D8E8E6"/>
+                      </a:solidFill>
+                      <a:prstDash val="solid"/>
+                      <a:round/>
+                      <a:headEnd type="none" w="med" len="med"/>
+                      <a:tailEnd type="none" w="med" len="med"/>
+                    </a:lnB>
+                  </a:tcPr>
+                </a:tc>
+              </a:tr>
+              <a:tr h="411480">
+                <a:tc>
+                  <a:txBody>
+                    <a:bodyPr/>
+                    <a:lstStyle/>
+                    <a:p>
+                      <a:pPr algn="ctr" indent="0" marL="0">
+                        <a:buNone/>
+                      </a:pPr>
+                      <a:r>
+                        <a:rPr lang="en-US" sz="1300" dirty="0">
+                          <a:solidFill>
+                            <a:srgbClr val="0B2E33"/>
+                          </a:solidFill>
+                          <a:latin typeface="Pretendard" pitchFamily="34" charset="0"/>
+                          <a:ea typeface="Pretendard" pitchFamily="34" charset="-122"/>
+                          <a:cs typeface="Pretendard" pitchFamily="34" charset="-120"/>
+                        </a:rPr>
+                        <a:t>3개월(총)</a:t>
+                      </a:r>
+                      <a:endParaRPr lang="en-US" sz="1300" dirty="0">
+                        <a:latin typeface="Pretendard" charset="0"/>
+                        <a:ea typeface="Pretendard" charset="0"/>
+                        <a:cs typeface="Pretendard" charset="0"/>
+                      </a:endParaRPr>
+                    </a:p>
+                  </a:txBody>
+                  <a:tcPr marL="91440" marR="91440" marT="45720" marB="45720" anchor="ctr">
+                    <a:lnL w="12700" cap="flat" cmpd="sng" algn="ctr">
+                      <a:solidFill>
+                        <a:srgbClr val="D8E8E6"/>
+                      </a:solidFill>
+                      <a:prstDash val="solid"/>
+                      <a:round/>
+                      <a:headEnd type="none" w="med" len="med"/>
+                      <a:tailEnd type="none" w="med" len="med"/>
+                    </a:lnL>
+                    <a:lnR w="12700" cap="flat" cmpd="sng" algn="ctr">
+                      <a:solidFill>
+                        <a:srgbClr val="D8E8E6"/>
+                      </a:solidFill>
+                      <a:prstDash val="solid"/>
+                      <a:round/>
+                      <a:headEnd type="none" w="med" len="med"/>
+                      <a:tailEnd type="none" w="med" len="med"/>
+                    </a:lnR>
+                    <a:lnT w="12700" cap="flat" cmpd="sng" algn="ctr">
+                      <a:solidFill>
+                        <a:srgbClr val="D8E8E6"/>
+                      </a:solidFill>
+                      <a:prstDash val="solid"/>
+                      <a:round/>
+                      <a:headEnd type="none" w="med" len="med"/>
+                      <a:tailEnd type="none" w="med" len="med"/>
+                    </a:lnT>
+                    <a:lnB w="12700" cap="flat" cmpd="sng" algn="ctr">
+                      <a:solidFill>
+                        <a:srgbClr val="D8E8E6"/>
+                      </a:solidFill>
+                      <a:prstDash val="solid"/>
+                      <a:round/>
+                      <a:headEnd type="none" w="med" len="med"/>
+                      <a:tailEnd type="none" w="med" len="med"/>
+                    </a:lnB>
+                  </a:tcPr>
+                </a:tc>
+                <a:tc>
+                  <a:txBody>
+                    <a:bodyPr/>
+                    <a:lstStyle/>
+                    <a:p>
+                      <a:pPr algn="ctr" indent="0" marL="0">
+                        <a:buNone/>
+                      </a:pPr>
+                      <a:r>
+                        <a:rPr lang="en-US" sz="1300" dirty="0">
+                          <a:solidFill>
+                            <a:srgbClr val="0B2E33"/>
+                          </a:solidFill>
+                          <a:latin typeface="Pretendard" pitchFamily="34" charset="0"/>
+                          <a:ea typeface="Pretendard" pitchFamily="34" charset="-122"/>
+                          <a:cs typeface="Pretendard" pitchFamily="34" charset="-120"/>
+                        </a:rPr>
+                        <a:t>2.85 ± 0.32 mm</a:t>
+                      </a:r>
+                      <a:endParaRPr lang="en-US" sz="1300" dirty="0">
+                        <a:latin typeface="Pretendard" charset="0"/>
+                        <a:ea typeface="Pretendard" charset="0"/>
+                        <a:cs typeface="Pretendard" charset="0"/>
+                      </a:endParaRPr>
+                    </a:p>
+                  </a:txBody>
+                  <a:tcPr marL="91440" marR="91440" marT="45720" marB="45720" anchor="ctr">
+                    <a:lnL w="12700" cap="flat" cmpd="sng" algn="ctr">
+                      <a:solidFill>
+                        <a:srgbClr val="D8E8E6"/>
+                      </a:solidFill>
+                      <a:prstDash val="solid"/>
+                      <a:round/>
+                      <a:headEnd type="none" w="med" len="med"/>
+                      <a:tailEnd type="none" w="med" len="med"/>
+                    </a:lnL>
+                    <a:lnR w="12700" cap="flat" cmpd="sng" algn="ctr">
+                      <a:solidFill>
+                        <a:srgbClr val="D8E8E6"/>
+                      </a:solidFill>
+                      <a:prstDash val="solid"/>
+                      <a:round/>
+                      <a:headEnd type="none" w="med" len="med"/>
+                      <a:tailEnd type="none" w="med" len="med"/>
+                    </a:lnR>
+                    <a:lnT w="12700" cap="flat" cmpd="sng" algn="ctr">
+                      <a:solidFill>
+                        <a:srgbClr val="D8E8E6"/>
+                      </a:solidFill>
+                      <a:prstDash val="solid"/>
+                      <a:round/>
+                      <a:headEnd type="none" w="med" len="med"/>
+                      <a:tailEnd type="none" w="med" len="med"/>
+                    </a:lnT>
+                    <a:lnB w="12700" cap="flat" cmpd="sng" algn="ctr">
+                      <a:solidFill>
+                        <a:srgbClr val="D8E8E6"/>
+                      </a:solidFill>
+                      <a:prstDash val="solid"/>
+                      <a:round/>
+                      <a:headEnd type="none" w="med" len="med"/>
+                      <a:tailEnd type="none" w="med" len="med"/>
+                    </a:lnB>
+                  </a:tcPr>
+                </a:tc>
+                <a:tc>
+                  <a:txBody>
+                    <a:bodyPr/>
+                    <a:lstStyle/>
+                    <a:p>
+                      <a:pPr algn="ctr" indent="0" marL="0">
+                        <a:buNone/>
+                      </a:pPr>
+                      <a:r>
+                        <a:rPr lang="en-US" sz="1300" dirty="0">
+                          <a:solidFill>
+                            <a:srgbClr val="0B2E33"/>
+                          </a:solidFill>
+                          <a:latin typeface="Pretendard" pitchFamily="34" charset="0"/>
+                          <a:ea typeface="Pretendard" pitchFamily="34" charset="-122"/>
+                          <a:cs typeface="Pretendard" pitchFamily="34" charset="-120"/>
+                        </a:rPr>
+                        <a:t>3.45 ± 0.41 mm</a:t>
+                      </a:r>
+                      <a:endParaRPr lang="en-US" sz="1300" dirty="0">
+                        <a:latin typeface="Pretendard" charset="0"/>
+                        <a:ea typeface="Pretendard" charset="0"/>
+                        <a:cs typeface="Pretendard" charset="0"/>
+                      </a:endParaRPr>
+                    </a:p>
+                  </a:txBody>
+                  <a:tcPr marL="91440" marR="91440" marT="45720" marB="45720" anchor="ctr">
+                    <a:lnL w="12700" cap="flat" cmpd="sng" algn="ctr">
+                      <a:solidFill>
+                        <a:srgbClr val="D8E8E6"/>
+                      </a:solidFill>
+                      <a:prstDash val="solid"/>
+                      <a:round/>
+                      <a:headEnd type="none" w="med" len="med"/>
+                      <a:tailEnd type="none" w="med" len="med"/>
+                    </a:lnL>
+                    <a:lnR w="12700" cap="flat" cmpd="sng" algn="ctr">
+                      <a:solidFill>
+                        <a:srgbClr val="D8E8E6"/>
+                      </a:solidFill>
+                      <a:prstDash val="solid"/>
+                      <a:round/>
+                      <a:headEnd type="none" w="med" len="med"/>
+                      <a:tailEnd type="none" w="med" len="med"/>
+                    </a:lnR>
+                    <a:lnT w="12700" cap="flat" cmpd="sng" algn="ctr">
+                      <a:solidFill>
+                        <a:srgbClr val="D8E8E6"/>
+                      </a:solidFill>
+                      <a:prstDash val="solid"/>
+                      <a:round/>
+                      <a:headEnd type="none" w="med" len="med"/>
+                      <a:tailEnd type="none" w="med" len="med"/>
+                    </a:lnT>
+                    <a:lnB w="12700" cap="flat" cmpd="sng" algn="ctr">
+                      <a:solidFill>
+                        <a:srgbClr val="D8E8E6"/>
+                      </a:solidFill>
+                      <a:prstDash val="solid"/>
+                      <a:round/>
+                      <a:headEnd type="none" w="med" len="med"/>
+                      <a:tailEnd type="none" w="med" len="med"/>
+                    </a:lnB>
+                  </a:tcPr>
+                </a:tc>
+                <a:tc>
+                  <a:txBody>
+                    <a:bodyPr/>
+                    <a:lstStyle/>
+                    <a:p>
+                      <a:pPr algn="ctr" indent="0" marL="0">
+                        <a:buNone/>
+                      </a:pPr>
+                      <a:r>
+                        <a:rPr lang="en-US" sz="1300" dirty="0">
+                          <a:solidFill>
+                            <a:srgbClr val="0B2E33"/>
+                          </a:solidFill>
+                          <a:latin typeface="Pretendard" pitchFamily="34" charset="0"/>
+                          <a:ea typeface="Pretendard" pitchFamily="34" charset="-122"/>
+                          <a:cs typeface="Pretendard" pitchFamily="34" charset="-120"/>
+                        </a:rPr>
+                        <a:t>0.000*</a:t>
+                      </a:r>
+                      <a:endParaRPr lang="en-US" sz="1300" dirty="0">
+                        <a:latin typeface="Pretendard" charset="0"/>
+                        <a:ea typeface="Pretendard" charset="0"/>
+                        <a:cs typeface="Pretendard" charset="0"/>
+                      </a:endParaRPr>
+                    </a:p>
+                  </a:txBody>
+                  <a:tcPr marL="91440" marR="91440" marT="45720" marB="45720" anchor="ctr">
+                    <a:lnL w="12700" cap="flat" cmpd="sng" algn="ctr">
+                      <a:solidFill>
+                        <a:srgbClr val="D8E8E6"/>
+                      </a:solidFill>
+                      <a:prstDash val="solid"/>
+                      <a:round/>
+                      <a:headEnd type="none" w="med" len="med"/>
+                      <a:tailEnd type="none" w="med" len="med"/>
+                    </a:lnL>
+                    <a:lnR w="12700" cap="flat" cmpd="sng" algn="ctr">
+                      <a:solidFill>
+                        <a:srgbClr val="D8E8E6"/>
+                      </a:solidFill>
+                      <a:prstDash val="solid"/>
+                      <a:round/>
+                      <a:headEnd type="none" w="med" len="med"/>
+                      <a:tailEnd type="none" w="med" len="med"/>
+                    </a:lnR>
+                    <a:lnT w="12700" cap="flat" cmpd="sng" algn="ctr">
+                      <a:solidFill>
+                        <a:srgbClr val="D8E8E6"/>
+                      </a:solidFill>
+                      <a:prstDash val="solid"/>
+                      <a:round/>
+                      <a:headEnd type="none" w="med" len="med"/>
+                      <a:tailEnd type="none" w="med" len="med"/>
+                    </a:lnT>
+                    <a:lnB w="12700" cap="flat" cmpd="sng" algn="ctr">
+                      <a:solidFill>
+                        <a:srgbClr val="D8E8E6"/>
+                      </a:solidFill>
+                      <a:prstDash val="solid"/>
+                      <a:round/>
+                      <a:headEnd type="none" w="med" len="med"/>
+                      <a:tailEnd type="none" w="med" len="med"/>
+                    </a:lnB>
+                  </a:tcPr>
+                </a:tc>
+              </a:tr>
+            </a:tbl>
+          </a:graphicData>
+        </a:graphic>
+      </p:graphicFrame>
+      <p:sp>
+        <p:nvSpPr>
+          <p:cNvPr id="12" name="Text 9"/>
           <p:cNvSpPr txBox="1"/>
           <p:nvPr/>
         </p:nvSpPr>
@@ -6040,7 +6974,7 @@
                 <a:ea typeface="Pretendard" pitchFamily="34" charset="-122"/>
                 <a:cs typeface="Pretendard" pitchFamily="34" charset="-120"/>
               </a:rPr>
-              <a:t>결과</a:t>
+              <a:t>결과 ②</a:t>
             </a:r>
             <a:endParaRPr lang="en-US" sz="1300" dirty="0"/>
           </a:p>
@@ -6079,7 +7013,7 @@
                 <a:ea typeface="Wanted Sans" pitchFamily="34" charset="-122"/>
                 <a:cs typeface="Wanted Sans" pitchFamily="34" charset="-120"/>
               </a:rPr>
-              <a:t>통증(VAS) 및 종합 소견</a:t>
+              <a:t>GCF 바이오마커 (PGE2·RANKL)</a:t>
             </a:r>
             <a:endParaRPr lang="en-US" sz="3000" dirty="0"/>
           </a:p>
@@ -6094,11 +7028,11 @@
         <p:spPr>
           <a:xfrm>
             <a:off x="548640" y="1920240"/>
-            <a:ext cx="5349240" cy="4114800"/>
+            <a:ext cx="5349240" cy="4023360"/>
           </a:xfrm>
           <a:prstGeom prst="roundRect">
             <a:avLst>
-              <a:gd name="adj" fmla="val 2222"/>
+              <a:gd name="adj" fmla="val 2273"/>
             </a:avLst>
           </a:prstGeom>
           <a:solidFill>
@@ -6147,7 +7081,7 @@
                 <a:ea typeface="Wanted Sans" pitchFamily="34" charset="-122"/>
                 <a:cs typeface="Wanted Sans" pitchFamily="34" charset="-120"/>
               </a:rPr>
-              <a:t>술 중·후 VAS 및 기타 지표 (Table 3)</a:t>
+              <a:t>GCF 농도 (T1, 염증 최고점)</a:t>
             </a:r>
             <a:endParaRPr lang="en-US" sz="1600" dirty="0"/>
           </a:p>
@@ -6162,7 +7096,7 @@
         <p:spPr>
           <a:xfrm>
             <a:off x="868680" y="2697480"/>
-            <a:ext cx="4754880" cy="3108960"/>
+            <a:ext cx="4754880" cy="3017520"/>
           </a:xfrm>
           <a:prstGeom prst="rect">
             <a:avLst/>
@@ -6176,65 +7110,83 @@
           <a:p>
             <a:pPr indent="0" marL="0">
               <a:lnSpc>
-                <a:spcPct val="140000"/>
+                <a:spcPct val="135000"/>
               </a:lnSpc>
               <a:buNone/>
             </a:pPr>
             <a:r>
-              <a:rPr lang="en-US" sz="1300" dirty="0">
-                <a:solidFill>
-                  <a:srgbClr val="5B7A7E"/>
-                </a:solidFill>
-                <a:latin typeface="Pretendard" pitchFamily="34" charset="0"/>
-                <a:ea typeface="Pretendard" pitchFamily="34" charset="-122"/>
-                <a:cs typeface="Pretendard" pitchFamily="34" charset="-120"/>
-              </a:rPr>
-              <a:t>VAS 통증 점수: 리도카인 3.62±2.46 vs 아티카인 3.75±2.56 — 유의차 없음</a:t>
-            </a:r>
-            <a:endParaRPr lang="en-US" sz="1300" dirty="0"/>
-          </a:p>
-          <a:p>
+              <a:rPr lang="en-US" sz="1400" b="1" dirty="0">
+                <a:solidFill>
+                  <a:srgbClr val="028090"/>
+                </a:solidFill>
+                <a:latin typeface="Pretendard" pitchFamily="34" charset="0"/>
+                <a:ea typeface="Pretendard" pitchFamily="34" charset="-122"/>
+                <a:cs typeface="Pretendard" pitchFamily="34" charset="-120"/>
+              </a:rPr>
+              <a:t>PGE2
+</a:t>
+            </a:r>
             <a:pPr indent="0" marL="0">
               <a:lnSpc>
-                <a:spcPct val="140000"/>
+                <a:spcPct val="135000"/>
               </a:lnSpc>
               <a:buNone/>
             </a:pPr>
-            <a:endParaRPr lang="en-US" sz="1300" dirty="0"/>
-          </a:p>
-          <a:p>
+            <a:r>
+              <a:rPr lang="en-US" sz="1300" dirty="0">
+                <a:solidFill>
+                  <a:srgbClr val="5B7A7E"/>
+                </a:solidFill>
+                <a:latin typeface="Pretendard" pitchFamily="34" charset="0"/>
+                <a:ea typeface="Pretendard" pitchFamily="34" charset="-122"/>
+                <a:cs typeface="Pretendard" pitchFamily="34" charset="-120"/>
+              </a:rPr>
+              <a:t>이부프로펜 145.2±22.1 pg/mL
+아세트아미노펜 210.5±35.4 pg/mL
+p&lt;0.001
+</a:t>
+            </a:r>
             <a:pPr indent="0" marL="0">
               <a:lnSpc>
-                <a:spcPct val="140000"/>
+                <a:spcPct val="135000"/>
               </a:lnSpc>
               <a:buNone/>
             </a:pPr>
             <a:r>
-              <a:rPr lang="en-US" sz="1300" dirty="0">
-                <a:solidFill>
-                  <a:srgbClr val="5B7A7E"/>
-                </a:solidFill>
-                <a:latin typeface="Pretendard" pitchFamily="34" charset="0"/>
-                <a:ea typeface="Pretendard" pitchFamily="34" charset="-122"/>
-                <a:cs typeface="Pretendard" pitchFamily="34" charset="-120"/>
-              </a:rPr>
-              <a:t>수술 시간(분): 리도카인 33.45±21.85 vs 아티카인 28.86±15.13 — 유의차 없음</a:t>
-            </a:r>
-            <a:endParaRPr lang="en-US" sz="1300" dirty="0"/>
-          </a:p>
-          <a:p>
+              <a:rPr lang="en-US" sz="1400" b="1" dirty="0">
+                <a:solidFill>
+                  <a:srgbClr val="028090"/>
+                </a:solidFill>
+                <a:latin typeface="Pretendard" pitchFamily="34" charset="0"/>
+                <a:ea typeface="Pretendard" pitchFamily="34" charset="-122"/>
+                <a:cs typeface="Pretendard" pitchFamily="34" charset="-120"/>
+              </a:rPr>
+              <a:t>RANKL
+</a:t>
+            </a:r>
             <a:pPr indent="0" marL="0">
               <a:lnSpc>
-                <a:spcPct val="140000"/>
+                <a:spcPct val="135000"/>
               </a:lnSpc>
               <a:buNone/>
             </a:pPr>
-            <a:endParaRPr lang="en-US" sz="1300" dirty="0"/>
+            <a:r>
+              <a:rPr lang="en-US" sz="1300" dirty="0">
+                <a:solidFill>
+                  <a:srgbClr val="5B7A7E"/>
+                </a:solidFill>
+                <a:latin typeface="Pretendard" pitchFamily="34" charset="0"/>
+                <a:ea typeface="Pretendard" pitchFamily="34" charset="-122"/>
+                <a:cs typeface="Pretendard" pitchFamily="34" charset="-120"/>
+              </a:rPr>
+              <a:t>이부프로펜 58.4±12.3 pg/mL</a:t>
+            </a:r>
+            <a:endParaRPr lang="en-US" sz="1400" dirty="0"/>
           </a:p>
           <a:p>
             <a:pPr indent="0" marL="0">
               <a:lnSpc>
-                <a:spcPct val="140000"/>
+                <a:spcPct val="135000"/>
               </a:lnSpc>
               <a:buNone/>
             </a:pPr>
@@ -6247,9 +7199,29 @@
                 <a:ea typeface="Pretendard" pitchFamily="34" charset="-122"/>
                 <a:cs typeface="Pretendard" pitchFamily="34" charset="-120"/>
               </a:rPr>
-              <a:t>마취 지속시간(분): 리도카인 260.4±96.02 vs 아티카인 278.2±127.6 — 유의차 없음</a:t>
-            </a:r>
-            <a:endParaRPr lang="en-US" sz="1300" dirty="0"/>
+              <a:t>아세트아미노펜 89.7±15.6 pg/mL</a:t>
+            </a:r>
+            <a:endParaRPr lang="en-US" sz="1400" dirty="0"/>
+          </a:p>
+          <a:p>
+            <a:pPr indent="0" marL="0">
+              <a:lnSpc>
+                <a:spcPct val="135000"/>
+              </a:lnSpc>
+              <a:buNone/>
+            </a:pPr>
+            <a:r>
+              <a:rPr lang="en-US" sz="1300" dirty="0">
+                <a:solidFill>
+                  <a:srgbClr val="5B7A7E"/>
+                </a:solidFill>
+                <a:latin typeface="Pretendard" pitchFamily="34" charset="0"/>
+                <a:ea typeface="Pretendard" pitchFamily="34" charset="-122"/>
+                <a:cs typeface="Pretendard" pitchFamily="34" charset="-120"/>
+              </a:rPr>
+              <a:t>p&lt;0.001</a:t>
+            </a:r>
+            <a:endParaRPr lang="en-US" sz="1400" dirty="0"/>
           </a:p>
         </p:txBody>
       </p:sp>
@@ -6262,11 +7234,11 @@
         <p:spPr>
           <a:xfrm>
             <a:off x="6263640" y="1920240"/>
-            <a:ext cx="5349240" cy="4114800"/>
+            <a:ext cx="5349240" cy="4023360"/>
           </a:xfrm>
           <a:prstGeom prst="roundRect">
             <a:avLst>
-              <a:gd name="adj" fmla="val 2222"/>
+              <a:gd name="adj" fmla="val 2273"/>
             </a:avLst>
           </a:prstGeom>
           <a:solidFill>
@@ -6308,7 +7280,7 @@
                 <a:ea typeface="Wanted Sans" pitchFamily="34" charset="-122"/>
                 <a:cs typeface="Wanted Sans" pitchFamily="34" charset="-120"/>
               </a:rPr>
-              <a:t>저자 결론 요약</a:t>
+              <a:t>기전적 해석</a:t>
             </a:r>
             <a:endParaRPr lang="en-US" sz="1600" dirty="0"/>
           </a:p>
@@ -6323,7 +7295,7 @@
         <p:spPr>
           <a:xfrm>
             <a:off x="6583680" y="2697480"/>
-            <a:ext cx="4754880" cy="3108960"/>
+            <a:ext cx="4754880" cy="3017520"/>
           </a:xfrm>
           <a:prstGeom prst="rect">
             <a:avLst/>
@@ -6342,7 +7314,7 @@
               <a:buNone/>
             </a:pPr>
             <a:r>
-              <a:rPr lang="en-US" sz="1450" dirty="0">
+              <a:rPr lang="en-US" sz="1400" dirty="0">
                 <a:solidFill>
                   <a:srgbClr val="FFFFFF"/>
                 </a:solidFill>
@@ -6350,7 +7322,7 @@
                 <a:ea typeface="Pretendard" pitchFamily="34" charset="-122"/>
                 <a:cs typeface="Pretendard" pitchFamily="34" charset="-120"/>
               </a:rPr>
-              <a:t>4% 아티카인이 2% 리도카인 대비 </a:t>
+              <a:t>이부프로펜이 </a:t>
             </a:r>
             <a:pPr indent="0" marL="0">
               <a:lnSpc>
@@ -6359,7 +7331,7 @@
               <a:buNone/>
             </a:pPr>
             <a:r>
-              <a:rPr lang="en-US" sz="1450" b="1" dirty="0">
+              <a:rPr lang="en-US" sz="1400" b="1" dirty="0">
                 <a:solidFill>
                   <a:srgbClr val="02C39A"/>
                 </a:solidFill>
@@ -6367,7 +7339,7 @@
                 <a:ea typeface="Pretendard" pitchFamily="34" charset="-122"/>
                 <a:cs typeface="Pretendard" pitchFamily="34" charset="-120"/>
               </a:rPr>
-              <a:t>마취 발현이 더 빠르고</a:t>
+              <a:t>PGE2·RANKL 모두 유의하게 낮춤</a:t>
             </a:r>
             <a:pPr indent="0" marL="0">
               <a:lnSpc>
@@ -6376,7 +7348,7 @@
               <a:buNone/>
             </a:pPr>
             <a:r>
-              <a:rPr lang="en-US" sz="1450" dirty="0">
+              <a:rPr lang="en-US" sz="1400" dirty="0">
                 <a:solidFill>
                   <a:srgbClr val="FFFFFF"/>
                 </a:solidFill>
@@ -6384,7 +7356,7 @@
                 <a:ea typeface="Pretendard" pitchFamily="34" charset="-122"/>
                 <a:cs typeface="Pretendard" pitchFamily="34" charset="-120"/>
               </a:rPr>
-              <a:t>, 추가 마취 필요성이 </a:t>
+              <a:t> → 파골세포 활성 신호(RANKL/OPG 비율)가 골흡수보다 </a:t>
             </a:r>
             <a:pPr indent="0" marL="0">
               <a:lnSpc>
@@ -6393,7 +7365,7 @@
               <a:buNone/>
             </a:pPr>
             <a:r>
-              <a:rPr lang="en-US" sz="1450" b="1" dirty="0">
+              <a:rPr lang="en-US" sz="1400" b="1" dirty="0">
                 <a:solidFill>
                   <a:srgbClr val="02C39A"/>
                 </a:solidFill>
@@ -6401,7 +7373,7 @@
                 <a:ea typeface="Pretendard" pitchFamily="34" charset="-122"/>
                 <a:cs typeface="Pretendard" pitchFamily="34" charset="-120"/>
               </a:rPr>
-              <a:t>더 낮아</a:t>
+              <a:t>골밀도 유지 쪽으로 이동</a:t>
             </a:r>
             <a:pPr indent="0" marL="0">
               <a:lnSpc>
@@ -6410,7 +7382,7 @@
               <a:buNone/>
             </a:pPr>
             <a:r>
-              <a:rPr lang="en-US" sz="1450" dirty="0">
+              <a:rPr lang="en-US" sz="1400" dirty="0">
                 <a:solidFill>
                   <a:srgbClr val="FFFFFF"/>
                 </a:solidFill>
@@ -6418,9 +7390,9 @@
                 <a:ea typeface="Pretendard" pitchFamily="34" charset="-122"/>
                 <a:cs typeface="Pretendard" pitchFamily="34" charset="-120"/>
               </a:rPr>
-              <a:t> 제3대구치 발치 시 유리한 선택지가 될 수 있음을 시사한다.</a:t>
-            </a:r>
-            <a:endParaRPr lang="en-US" sz="1450" dirty="0"/>
+              <a:t> → 결과①의 이동량 감소와 기전적으로 정합.</a:t>
+            </a:r>
+            <a:endParaRPr lang="en-US" sz="1400" dirty="0"/>
           </a:p>
         </p:txBody>
       </p:sp>
@@ -6667,7 +7639,7 @@
               <a:buNone/>
             </a:pPr>
             <a:r>
-              <a:rPr lang="en-US" sz="1200" dirty="0">
+              <a:rPr lang="en-US" sz="1150" dirty="0">
                 <a:solidFill>
                   <a:srgbClr val="0B2E33"/>
                 </a:solidFill>
@@ -6675,9 +7647,9 @@
                 <a:ea typeface="Pretendard" pitchFamily="34" charset="-122"/>
                 <a:cs typeface="Pretendard" pitchFamily="34" charset="-120"/>
               </a:rPr>
-              <a:t>· Split-mouth 설계로 개체간 변이(연령·통증 역치 등) 통제</a:t>
-            </a:r>
-            <a:endParaRPr lang="en-US" sz="1200" dirty="0"/>
+              <a:t>· 임상지표(이동량)+생화학지표(PGE2·RANKL) 이중 검증으로 기전-결과 인과 뒷받침</a:t>
+            </a:r>
+            <a:endParaRPr lang="en-US" sz="1150" dirty="0"/>
           </a:p>
           <a:p>
             <a:pPr indent="0" marL="0">
@@ -6687,7 +7659,7 @@
               <a:buNone/>
             </a:pPr>
             <a:r>
-              <a:rPr lang="en-US" sz="1200" dirty="0">
+              <a:rPr lang="en-US" sz="1150" dirty="0">
                 <a:solidFill>
                   <a:srgbClr val="0B2E33"/>
                 </a:solidFill>
@@ -6695,9 +7667,9 @@
                 <a:ea typeface="Pretendard" pitchFamily="34" charset="-122"/>
                 <a:cs typeface="Pretendard" pitchFamily="34" charset="-120"/>
               </a:rPr>
-              <a:t>· 이중눈가림 + 무작위 배정(randomization table)</a:t>
-            </a:r>
-            <a:endParaRPr lang="en-US" sz="1200" dirty="0"/>
+              <a:t>· 무작위배정+이중눈가림, 기저 동질성 확보(연령 p=0.36, 성비 p=1.00)</a:t>
+            </a:r>
+            <a:endParaRPr lang="en-US" sz="1150" dirty="0"/>
           </a:p>
           <a:p>
             <a:pPr indent="0" marL="0">
@@ -6707,7 +7679,7 @@
               <a:buNone/>
             </a:pPr>
             <a:r>
-              <a:rPr lang="en-US" sz="1200" dirty="0">
+              <a:rPr lang="en-US" sz="1150" dirty="0">
                 <a:solidFill>
                   <a:srgbClr val="0B2E33"/>
                 </a:solidFill>
@@ -6715,9 +7687,9 @@
                 <a:ea typeface="Pretendard" pitchFamily="34" charset="-122"/>
                 <a:cs typeface="Pretendard" pitchFamily="34" charset="-120"/>
               </a:rPr>
-              <a:t>· CONSORT 가이드라인 준수, 사전 임상시험 등록(REBEC)</a:t>
-            </a:r>
-            <a:endParaRPr lang="en-US" sz="1200" dirty="0"/>
+              <a:t>· 선행연구(Shetty 2013)를 RANKL 지표+3개월 종단설계로 확장</a:t>
+            </a:r>
+            <a:endParaRPr lang="en-US" sz="1150" dirty="0"/>
           </a:p>
           <a:p>
             <a:pPr indent="0" marL="0">
@@ -6727,7 +7699,7 @@
               <a:buNone/>
             </a:pPr>
             <a:r>
-              <a:rPr lang="en-US" sz="1200" dirty="0">
+              <a:rPr lang="en-US" sz="1150" dirty="0">
                 <a:solidFill>
                   <a:srgbClr val="0B2E33"/>
                 </a:solidFill>
@@ -6735,9 +7707,9 @@
                 <a:ea typeface="Pretendard" pitchFamily="34" charset="-122"/>
                 <a:cs typeface="Pretendard" pitchFamily="34" charset="-120"/>
               </a:rPr>
-              <a:t>· 표본수 60명 = β power&gt;0.90 사전 계산 근거 명시</a:t>
-            </a:r>
-            <a:endParaRPr lang="en-US" sz="1200" dirty="0"/>
+              <a:t>· 재정지원·이해상충 없음(Nil) — 제약회사 개입 우려 낮음</a:t>
+            </a:r>
+            <a:endParaRPr lang="en-US" sz="1150" dirty="0"/>
           </a:p>
         </p:txBody>
       </p:sp>
@@ -6924,7 +7896,7 @@
               <a:buNone/>
             </a:pPr>
             <a:r>
-              <a:rPr lang="en-US" sz="1200" dirty="0">
+              <a:rPr lang="en-US" sz="1150" dirty="0">
                 <a:solidFill>
                   <a:srgbClr val="0B2E33"/>
                 </a:solidFill>
@@ -6932,9 +7904,9 @@
                 <a:ea typeface="Pretendard" pitchFamily="34" charset="-122"/>
                 <a:cs typeface="Pretendard" pitchFamily="34" charset="-120"/>
               </a:rPr>
-              <a:t>· 상·하악을 동시에 발치해 상/하악별 마취 효과 비교 불가</a:t>
-            </a:r>
-            <a:endParaRPr lang="en-US" sz="1200" dirty="0"/>
+              <a:t>· 군당 15명으로 표본이 작아 검정력 우려</a:t>
+            </a:r>
+            <a:endParaRPr lang="en-US" sz="1150" dirty="0"/>
           </a:p>
           <a:p>
             <a:pPr indent="0" marL="0">
@@ -6944,7 +7916,7 @@
               <a:buNone/>
             </a:pPr>
             <a:r>
-              <a:rPr lang="en-US" sz="1200" dirty="0">
+              <a:rPr lang="en-US" sz="1150" dirty="0">
                 <a:solidFill>
                   <a:srgbClr val="0B2E33"/>
                 </a:solidFill>
@@ -6952,9 +7924,9 @@
                 <a:ea typeface="Pretendard" pitchFamily="34" charset="-122"/>
                 <a:cs typeface="Pretendard" pitchFamily="34" charset="-120"/>
               </a:rPr>
-              <a:t>· 전신 진통제·소염제 병용 처방 — 통증 인지에 교란 가능</a:t>
-            </a:r>
-            <a:endParaRPr lang="en-US" sz="1200" dirty="0"/>
+              <a:t>· 진통제는 월 3일만 복용 통제 — 나머지 기간 자가복용(비처방 진통제) 여부 통제 불명</a:t>
+            </a:r>
+            <a:endParaRPr lang="en-US" sz="1150" dirty="0"/>
           </a:p>
           <a:p>
             <a:pPr indent="0" marL="0">
@@ -6964,7 +7936,7 @@
               <a:buNone/>
             </a:pPr>
             <a:r>
-              <a:rPr lang="en-US" sz="1200" dirty="0">
+              <a:rPr lang="en-US" sz="1150" dirty="0">
                 <a:solidFill>
                   <a:srgbClr val="0B2E33"/>
                 </a:solidFill>
@@ -6972,9 +7944,9 @@
                 <a:ea typeface="Pretendard" pitchFamily="34" charset="-122"/>
                 <a:cs typeface="Pretendard" pitchFamily="34" charset="-120"/>
               </a:rPr>
-              <a:t>· 단일 기관(브라질) 연구 — 인종·시술자 숙련도 일반화 제한</a:t>
-            </a:r>
-            <a:endParaRPr lang="en-US" sz="1200" dirty="0"/>
+              <a:t>· 단일기관·단일 인종군 대상 — 일반화 제한</a:t>
+            </a:r>
+            <a:endParaRPr lang="en-US" sz="1150" dirty="0"/>
           </a:p>
           <a:p>
             <a:pPr indent="0" marL="0">
@@ -6984,7 +7956,7 @@
               <a:buNone/>
             </a:pPr>
             <a:r>
-              <a:rPr lang="en-US" sz="1200" dirty="0">
+              <a:rPr lang="en-US" sz="1150" dirty="0">
                 <a:solidFill>
                   <a:srgbClr val="0B2E33"/>
                 </a:solidFill>
@@ -6992,9 +7964,9 @@
                 <a:ea typeface="Pretendard" pitchFamily="34" charset="-122"/>
                 <a:cs typeface="Pretendard" pitchFamily="34" charset="-120"/>
               </a:rPr>
-              <a:t>· split-mouth 특성상 인접 부위로의 약물 확산 가능성</a:t>
-            </a:r>
-            <a:endParaRPr lang="en-US" sz="1200" dirty="0"/>
+              <a:t>· GCF는 T1(1개월차) 1회만 측정 — 2·3개월차 생화학 변화는 추적 안 됨</a:t>
+            </a:r>
+            <a:endParaRPr lang="en-US" sz="1150" dirty="0"/>
           </a:p>
         </p:txBody>
       </p:sp>
@@ -7181,7 +8153,7 @@
               <a:buNone/>
             </a:pPr>
             <a:r>
-              <a:rPr lang="en-US" sz="1200" dirty="0">
+              <a:rPr lang="en-US" sz="1150" dirty="0">
                 <a:solidFill>
                   <a:srgbClr val="0B2E33"/>
                 </a:solidFill>
@@ -7189,9 +8161,9 @@
                 <a:ea typeface="Pretendard" pitchFamily="34" charset="-122"/>
                 <a:cs typeface="Pretendard" pitchFamily="34" charset="-120"/>
               </a:rPr>
-              <a:t>· 국내 임상에도 대체로 적용 가능(동일 기전의 아마이드계)</a:t>
-            </a:r>
-            <a:endParaRPr lang="en-US" sz="1200" dirty="0"/>
+              <a:t>· 국내 교정 임상에도 적용 가능(동일 기전, 약물 둘 다 국내 상용)</a:t>
+            </a:r>
+            <a:endParaRPr lang="en-US" sz="1150" dirty="0"/>
           </a:p>
           <a:p>
             <a:pPr indent="0" marL="0">
@@ -7201,7 +8173,7 @@
               <a:buNone/>
             </a:pPr>
             <a:r>
-              <a:rPr lang="en-US" sz="1200" dirty="0">
+              <a:rPr lang="en-US" sz="1150" dirty="0">
                 <a:solidFill>
                   <a:srgbClr val="0B2E33"/>
                 </a:solidFill>
@@ -7209,9 +8181,9 @@
                 <a:ea typeface="Pretendard" pitchFamily="34" charset="-122"/>
                 <a:cs typeface="Pretendard" pitchFamily="34" charset="-120"/>
               </a:rPr>
-              <a:t>· 단, 국내 환자 대상 재현 데이터는 부재(연구계획서 과제와 연결)</a:t>
-            </a:r>
-            <a:endParaRPr lang="en-US" sz="1200" dirty="0"/>
+              <a:t>· 다만 국내 환자 대상 재현 데이터는 부재</a:t>
+            </a:r>
+            <a:endParaRPr lang="en-US" sz="1150" dirty="0"/>
           </a:p>
           <a:p>
             <a:pPr indent="0" marL="0">
@@ -7221,7 +8193,7 @@
               <a:buNone/>
             </a:pPr>
             <a:r>
-              <a:rPr lang="en-US" sz="1200" dirty="0">
+              <a:rPr lang="en-US" sz="1150" dirty="0">
                 <a:solidFill>
                   <a:srgbClr val="0B2E33"/>
                 </a:solidFill>
@@ -7229,9 +8201,9 @@
                 <a:ea typeface="Pretendard" pitchFamily="34" charset="-122"/>
                 <a:cs typeface="Pretendard" pitchFamily="34" charset="-120"/>
               </a:rPr>
-              <a:t>· 발현시간 단축은 유의하나 절대적 차이(약 22초)는 임상적</a:t>
-            </a:r>
-            <a:endParaRPr lang="en-US" sz="1200" dirty="0"/>
+              <a:t>· 17.4%라는 이동량 차이가 실제 총 치료기간에 임상적으로</a:t>
+            </a:r>
+            <a:endParaRPr lang="en-US" sz="1150" dirty="0"/>
           </a:p>
           <a:p>
             <a:pPr indent="0" marL="0">
@@ -7241,7 +8213,7 @@
               <a:buNone/>
             </a:pPr>
             <a:r>
-              <a:rPr lang="en-US" sz="1200" dirty="0">
+              <a:rPr lang="en-US" sz="1150" dirty="0">
                 <a:solidFill>
                   <a:srgbClr val="0B2E33"/>
                 </a:solidFill>
@@ -7249,9 +8221,9 @@
                 <a:ea typeface="Pretendard" pitchFamily="34" charset="-122"/>
                 <a:cs typeface="Pretendard" pitchFamily="34" charset="-120"/>
               </a:rPr>
-              <a:t>  의미가 제한적일 수 있음 — 통계적 유의성 ≠ 임상적 유의성</a:t>
-            </a:r>
-            <a:endParaRPr lang="en-US" sz="1200" dirty="0"/>
+              <a:t>  체감될 정도인지는 별도 검증 필요 — 통계적 유의성 ≠ 임상적 유의성</a:t>
+            </a:r>
+            <a:endParaRPr lang="en-US" sz="1150" dirty="0"/>
           </a:p>
         </p:txBody>
       </p:sp>

--- a/치과약리학실험2-논문발표/치과약리학실험2_논문발표.pptx
+++ b/치과약리학실험2-논문발표/치과약리학실험2_논문발표.pptx
@@ -512,7 +512,7 @@
           <a:p>
             <a:r>
               <a:rPr lang="en-US" dirty="0"/>
-              <a:t>발표 시작 인사. 논문 출처(J Pharm Bioallied Sci, 2026 최신호), 선정 사유(치과약리학 20장 NSAID/PGE2 내용과 직결, 5년 이내, 국제학술지 Original article)를 한 줄로 언급.</a:t>
+              <a:t>발표 시작 인사. 이 연구는 동물실험(랫드)이라는 점을 처음부터 명확히 밝힐 것. 논문 출처(International Orthodontics, Elsevier, 프랑스교정학회 공식저널), 선정 사유(치과약리학1 20장 PGE2/COX 경로 + 구강생화학 '치아이동의 생화학적 변화' 학습목표와 직결)를 한 줄로 언급.</a:t>
             </a:r>
             <a:endParaRPr lang="en-US" dirty="0"/>
           </a:p>
@@ -600,7 +600,7 @@
           <a:p>
             <a:r>
               <a:rPr lang="en-US" dirty="0"/>
-              <a:t>치과약리학1 20장(NSAID/PGE2) 내용과의 연결을 다시 한번 언급하며 마무리. Q&amp;A로 전환.</a:t>
+              <a:t>치과약리학1 20장(PGE2/COX)과 구강생화학(치아이동의 생화학) 두 과목 내용이 이 논문 하나로 이어진다는 점을 다시 언급하며 마무리. Q&amp;A로 전환.</a:t>
             </a:r>
             <a:endParaRPr lang="en-US" dirty="0"/>
           </a:p>
@@ -688,11 +688,11 @@
           <a:p>
             <a:r>
               <a:rPr lang="en-US" dirty="0"/>
-              <a:t>예상 질문 1: 표본수가 군당 15명인데 통계적으로 충분한가?
-예상 질문 2: 진통제를 월 3일만 복용하게 했는데, 그 외 기간 환자가 임의로 다른 진통제를 먹었을 가능성은 어떻게 통제했는가?
-예상 질문 3: GCF 측정을 T1(1개월차) 한 번만 했는데, 2·3개월차의 생화학적 변화도 같은 패턴일 거라고 볼 수 있는가?
-예상 질문 4: 17.4% 이동량 차이가 실제 총 교정 치료기간을 얼마나 늘리는지, 임상적으로 의미 있는 수준인가?
-예상 질문 5: 아세트아미노펜의 진통 효과가 이부프로펜보다 약하다면, 환자 순응도(통증 참기)에는 문제가 없었는가?</a:t>
+              <a:t>예상 질문 1: 동물실험 결과를 사람에게 그대로 적용할 수 있는가?
+예상 질문 2: 코르티코스테로이드 결과가 일부 선행연구(Yamane, Molina 등)와 정반대인데, 이 연구가 더 신뢰할 만한 이유는?
+예상 질문 3: 왜 세 약물의 용량을 하나씩만 테스트했는가? 용량을 늘리면 결과가 달라질 수 있지 않은가?
+예상 질문 4: PGE2가 치근흡수를 유발할 수 있다는데, 이 연구에서는 그런 부작용을 확인했는가?
+예상 질문 5: 암컷 랫드는 왜 제외했는가? 성별에 따라 결과가 다를 가능성은?</a:t>
             </a:r>
             <a:endParaRPr lang="en-US" dirty="0"/>
           </a:p>
@@ -780,7 +780,7 @@
           <a:p>
             <a:r>
               <a:rPr lang="en-US" dirty="0"/>
-              <a:t>치과약리학1 20장(통증·염증·관절질환 치료제)에서 배운 COX/PGE2/NSAID 내용이 그대로 이어짐을 언급하면 좋음.</a:t>
+              <a:t>치과약리학1 20장(PGE2/COX/NSAID)에서 배운 '교정력→PGE2→RANKL→파골세포' 경로를 거꾸로 이용해 '외부에서 이 경로를 촉진하면 치아이동을 가속할 수 있지 않을까'라는 발상으로 자연스럽게 연결.</a:t>
             </a:r>
             <a:endParaRPr lang="en-US" dirty="0"/>
           </a:p>
@@ -868,7 +868,7 @@
           <a:p>
             <a:r>
               <a:rPr lang="en-US" dirty="0"/>
-              <a:t>이 슬라이드가 발표의 핵심 뼈대. Q&amp;A에서 '왜 아세트아미노펜을 대조군으로 썼나'라는 질문이 나오면 이 슬라이드로 바로 답변 가능.</a:t>
+              <a:t>구강생화학 '뼈와 치아의 석회화, 혈청칼슘 항상성' 챕터에서 배운 칼슘/인 대사 조절호르몬(비타민D, PTH 등) 내용과 연결지어 설명하면 좋음.</a:t>
             </a:r>
             <a:endParaRPr lang="en-US" dirty="0"/>
           </a:p>
@@ -956,7 +956,7 @@
           <a:p>
             <a:r>
               <a:rPr lang="en-US" dirty="0"/>
-              <a:t>원문 참고문헌 4,5,6,8번 기반. Shetty 2013이 사실상 직계 선행연구이고, 이번 논문은 여기에 RANKL과 3개월 종단설계를 더한 확장연구로 설명.</a:t>
+              <a:t>원문 Discussion 'Comparison with previous studies' 문단 그대로 재구성. 코르티코스테로이드만 문헌 간 결과가 정반대인 이유(연구기간·용량 차이)를 짚으면 비평적 고찰과 자연스럽게 연결됨.</a:t>
             </a:r>
             <a:endParaRPr lang="en-US" dirty="0"/>
           </a:p>
@@ -1044,7 +1044,7 @@
           <a:p>
             <a:r>
               <a:rPr lang="en-US" dirty="0"/>
-              <a:t>가설은 저자들이 명시한 것은 아니고, Background에서 제시한 PGE2-RANKL 기전으로부터 발표자가 재구성한 것임을 언급.</a:t>
+              <a:t>이 가설은 저자들의 공식 가설이 아니라 발표자가 결과 패턴(코르티코스테로이드=최대가속·최대재발, PGE2=최소가속·최소재발)을 보고 재구성한 것임을 언급.</a:t>
             </a:r>
             <a:endParaRPr lang="en-US" dirty="0"/>
           </a:p>
@@ -1132,7 +1132,7 @@
           <a:p>
             <a:r>
               <a:rPr lang="en-US" dirty="0"/>
-              <a:t>선정기준(Class II, 상악 제1소구치 발치+견치원심이동, 치주건강)과 제외기준(항염제·비스포스포네이트 복용, 흡연, 임신, 기존교정경험)은 원문에 있으므로 질문 오면 답변 가능.</a:t>
+              <a:t>동물실험이므로 Q&amp;A에서 '왜 랫드를 썼나' 물으면 '골개조·치아이동을 통제된 조건에서 관찰하기 위해 — 사람 대상으론 이 정도의 개입·조직검사가 불가능'이라고 답변.</a:t>
             </a:r>
             <a:endParaRPr lang="en-US" dirty="0"/>
           </a:p>
@@ -1220,7 +1220,7 @@
           <a:p>
             <a:r>
               <a:rPr lang="en-US" dirty="0"/>
-              <a:t>원문 Table 1(기저동질성: 연령 p=0.36, 성비 p=1.00)·Table 2 기준. 1개월차 비유의는 '누적효과'라는 포인트로 짚으면 좋음.</a:t>
+              <a:t>원문 Table I·II 기준. 보정기(2주) 동안은 모든 군에서 유의한 변화 없음(장치를 다시 수동적으로 부착해 이동량을 '고정') — 질문 나오면 이 부분도 설명 가능.</a:t>
             </a:r>
             <a:endParaRPr lang="en-US" dirty="0"/>
           </a:p>
@@ -1308,7 +1308,7 @@
           <a:p>
             <a:r>
               <a:rPr lang="en-US" dirty="0"/>
-              <a:t>결과①(임상)과 결과②(생화학)가 같은 방향으로 정합된다는 점이 이 논문의 설득력 — Discussion에서 저자들이 강조하는 핵심.</a:t>
+              <a:t>가속량이 클수록(코르티코스테로이드) 재발량도 크고, 가속량이 작을수록(PGE2) 재발도 작다는 '가속-재발 트레이드오프' 패턴이 핵심 메시지. 원문 Table VI·VII, Table VIII·IX 기준.</a:t>
             </a:r>
             <a:endParaRPr lang="en-US" dirty="0"/>
           </a:p>
@@ -1396,7 +1396,7 @@
           <a:p>
             <a:r>
               <a:rPr lang="en-US" dirty="0"/>
-              <a:t>우측 칸의 '통계적 유의성 vs 임상적 유의성' 포인트는 Q&amp;A에서 자주 나오는 질문이니 본인 의견으로 발전시킬 것.</a:t>
+              <a:t>동물실험이라는 한계를 정면으로 짚어주는 게 신뢰도를 높임 — 숨기지 말고 먼저 말할 것. 코르티코스테로이드의 상반된 선행연구 결과는 발표 중 Q&amp;A로 넘어가기 좋은 지점.</a:t>
             </a:r>
             <a:endParaRPr lang="en-US" dirty="0"/>
           </a:p>
@@ -1821,7 +1821,7 @@
         </p:nvSpPr>
         <p:spPr>
           <a:xfrm>
-            <a:off x="822960" y="1554480"/>
+            <a:off x="822960" y="1417320"/>
             <a:ext cx="9144000" cy="457200"/>
           </a:xfrm>
           <a:prstGeom prst="rect">
@@ -1860,7 +1860,7 @@
         </p:nvSpPr>
         <p:spPr>
           <a:xfrm>
-            <a:off x="822960" y="2057400"/>
+            <a:off x="822960" y="1920240"/>
             <a:ext cx="10332720" cy="1828800"/>
           </a:xfrm>
           <a:prstGeom prst="rect">
@@ -1875,12 +1875,12 @@
           <a:p>
             <a:pPr indent="0" marL="0">
               <a:lnSpc>
-                <a:spcPct val="115000"/>
+                <a:spcPct val="120000"/>
               </a:lnSpc>
               <a:buNone/>
             </a:pPr>
             <a:r>
-              <a:rPr lang="en-US" sz="3200" b="1" dirty="0">
+              <a:rPr lang="en-US" sz="3000" b="1" dirty="0">
                 <a:solidFill>
                   <a:srgbClr val="FFFFFF"/>
                 </a:solidFill>
@@ -1888,19 +1888,19 @@
                 <a:ea typeface="Wanted Sans" pitchFamily="34" charset="-122"/>
                 <a:cs typeface="Wanted Sans" pitchFamily="34" charset="-120"/>
               </a:rPr>
-              <a:t>교정치료 중 진통제 선택이 치아이동 속도에 미치는 영향</a:t>
-            </a:r>
-            <a:endParaRPr lang="en-US" sz="3200" dirty="0"/>
+              <a:t>코르티코스테로이드·비타민D·PGE2가</a:t>
+            </a:r>
+            <a:endParaRPr lang="en-US" sz="3000" dirty="0"/>
           </a:p>
           <a:p>
             <a:pPr indent="0" marL="0">
               <a:lnSpc>
-                <a:spcPct val="115000"/>
+                <a:spcPct val="120000"/>
               </a:lnSpc>
               <a:buNone/>
             </a:pPr>
             <a:r>
-              <a:rPr lang="en-US" sz="3200" b="1" dirty="0">
+              <a:rPr lang="en-US" sz="3000" b="1" dirty="0">
                 <a:solidFill>
                   <a:srgbClr val="FFFFFF"/>
                 </a:solidFill>
@@ -1908,9 +1908,9 @@
                 <a:ea typeface="Wanted Sans" pitchFamily="34" charset="-122"/>
                 <a:cs typeface="Wanted Sans" pitchFamily="34" charset="-120"/>
               </a:rPr>
-              <a:t>— 이부프로펜 vs 아세트아미노펜 —</a:t>
-            </a:r>
-            <a:endParaRPr lang="en-US" sz="3200" dirty="0"/>
+              <a:t>교정 치아이동 가속 및 재발에 미치는 영향</a:t>
+            </a:r>
+            <a:endParaRPr lang="en-US" sz="3000" dirty="0"/>
           </a:p>
         </p:txBody>
       </p:sp>
@@ -1922,8 +1922,8 @@
         </p:nvSpPr>
         <p:spPr>
           <a:xfrm>
-            <a:off x="822960" y="3794760"/>
-            <a:ext cx="10332720" cy="640080"/>
+            <a:off x="822960" y="3657600"/>
+            <a:ext cx="10332720" cy="731520"/>
           </a:xfrm>
           <a:prstGeom prst="rect">
             <a:avLst/>
@@ -1950,7 +1950,7 @@
                 <a:ea typeface="Pretendard" pitchFamily="34" charset="-122"/>
                 <a:cs typeface="Pretendard" pitchFamily="34" charset="-120"/>
               </a:rPr>
-              <a:t>원제  Evaluation of Systemic Nonsteroidal Anti-inflammatory Drugs on Orthodontic Tooth Movement Rate: A Clinical and Biomarker-Based Study</a:t>
+              <a:t>원제  Three pharmacological agents for acceleratory orthodontic tooth movement and subsequent relapse: A randomized controlled animal study</a:t>
             </a:r>
             <a:endParaRPr lang="en-US" sz="1200" dirty="0"/>
           </a:p>
@@ -1964,7 +1964,7 @@
         </p:nvSpPr>
         <p:spPr>
           <a:xfrm>
-            <a:off x="822960" y="4892040"/>
+            <a:off x="822960" y="4709160"/>
             <a:ext cx="10332720" cy="18288"/>
           </a:xfrm>
           <a:prstGeom prst="rect">
@@ -1986,7 +1986,7 @@
         </p:nvSpPr>
         <p:spPr>
           <a:xfrm>
-            <a:off x="822960" y="5120640"/>
+            <a:off x="822960" y="4937760"/>
             <a:ext cx="7315200" cy="914400"/>
           </a:xfrm>
           <a:prstGeom prst="rect">
@@ -2031,7 +2031,7 @@
                 <a:ea typeface="Pretendard" pitchFamily="34" charset="-122"/>
                 <a:cs typeface="Pretendard" pitchFamily="34" charset="-120"/>
               </a:rPr>
-              <a:t>Journal of Pharmacy and Bioallied Sciences, 2026 (Vol.18, No.1)
+              <a:t>International Orthodontics, 2026;24:101112 (Elsevier)
 </a:t>
             </a:r>
             <a:pPr indent="0" marL="0">
@@ -2193,7 +2193,7 @@
               <a:buNone/>
             </a:pPr>
             <a:r>
-              <a:rPr lang="en-US" sz="2600" b="1" dirty="0">
+              <a:rPr lang="en-US" sz="2700" b="1" dirty="0">
                 <a:solidFill>
                   <a:srgbClr val="FFFFFF"/>
                 </a:solidFill>
@@ -2201,9 +2201,9 @@
                 <a:ea typeface="Wanted Sans" pitchFamily="34" charset="-122"/>
                 <a:cs typeface="Wanted Sans" pitchFamily="34" charset="-120"/>
               </a:rPr>
-              <a:t>교정치료 중 진통제 선택은 단순한 통증관리가 아니라,</a:t>
-            </a:r>
-            <a:endParaRPr lang="en-US" sz="2600" dirty="0"/>
+              <a:t>치아이동을 가장 많이 가속하는 약물이,</a:t>
+            </a:r>
+            <a:endParaRPr lang="en-US" sz="2700" dirty="0"/>
           </a:p>
           <a:p>
             <a:pPr indent="0" marL="0">
@@ -2213,7 +2213,7 @@
               <a:buNone/>
             </a:pPr>
             <a:r>
-              <a:rPr lang="en-US" sz="2600" b="1" dirty="0">
+              <a:rPr lang="en-US" sz="2700" b="1" dirty="0">
                 <a:solidFill>
                   <a:srgbClr val="FFFFFF"/>
                 </a:solidFill>
@@ -2221,9 +2221,9 @@
                 <a:ea typeface="Wanted Sans" pitchFamily="34" charset="-122"/>
                 <a:cs typeface="Wanted Sans" pitchFamily="34" charset="-120"/>
               </a:rPr>
-              <a:t>치아이동 속도에 실제로 영향을 주는 생역학적 결정이다.</a:t>
-            </a:r>
-            <a:endParaRPr lang="en-US" sz="2600" dirty="0"/>
+              <a:t>보정 후 가장 많이 되돌아가기도 한다.</a:t>
+            </a:r>
+            <a:endParaRPr lang="en-US" sz="2700" dirty="0"/>
           </a:p>
         </p:txBody>
       </p:sp>
@@ -2263,7 +2263,7 @@
                 <a:ea typeface="Pretendard" pitchFamily="34" charset="-122"/>
                 <a:cs typeface="Pretendard" pitchFamily="34" charset="-120"/>
               </a:rPr>
-              <a:t>이부프로펜은 진통 효과는 우수하나 PGE2-RANKL 경로 억제로 치아이동을 늦출 수 있음 — 저자들은 교정환자에게 아세트아미노펜을 권장</a:t>
+              <a:t>코르티코스테로이드=최대가속·최대재발 / PGE2=최소가속·최소재발 / 비타민D=중간 — '빠른 이동'과 '안정적 결과' 사이의 트레이드오프를 보여준 첫 3약물 비교 연구</a:t>
             </a:r>
             <a:endParaRPr lang="en-US" sz="1400" dirty="0"/>
           </a:p>
@@ -2514,7 +2514,7 @@
               <a:buNone/>
             </a:pPr>
             <a:r>
-              <a:rPr lang="en-US" sz="3000" b="1" dirty="0">
+              <a:rPr lang="en-US" sz="2800" b="1" dirty="0">
                 <a:solidFill>
                   <a:srgbClr val="0B2E33"/>
                 </a:solidFill>
@@ -2522,9 +2522,9 @@
                 <a:ea typeface="Wanted Sans" pitchFamily="34" charset="-122"/>
                 <a:cs typeface="Wanted Sans" pitchFamily="34" charset="-120"/>
               </a:rPr>
-              <a:t>교정치료 중 진통제 선택, 왜 중요한가</a:t>
-            </a:r>
-            <a:endParaRPr lang="en-US" sz="3000" dirty="0"/>
+              <a:t>교정 치아이동 가속과 재발, 두 마리 토끼</a:t>
+            </a:r>
+            <a:endParaRPr lang="en-US" sz="2800" dirty="0"/>
           </a:p>
         </p:txBody>
       </p:sp>
@@ -2648,7 +2648,7 @@
               <a:buNone/>
             </a:pPr>
             <a:r>
-              <a:rPr lang="en-US" sz="1700" b="1" dirty="0">
+              <a:rPr lang="en-US" sz="1600" b="1" dirty="0">
                 <a:solidFill>
                   <a:srgbClr val="0B2E33"/>
                 </a:solidFill>
@@ -2656,9 +2656,9 @@
                 <a:ea typeface="Wanted Sans" pitchFamily="34" charset="-122"/>
                 <a:cs typeface="Wanted Sans" pitchFamily="34" charset="-120"/>
               </a:rPr>
-              <a:t>치아이동(OTM)의 생물학적 기반</a:t>
-            </a:r>
-            <a:endParaRPr lang="en-US" sz="1700" dirty="0"/>
+              <a:t>재발(relapse)과 고정력 상실</a:t>
+            </a:r>
+            <a:endParaRPr lang="en-US" sz="1600" dirty="0"/>
           </a:p>
         </p:txBody>
       </p:sp>
@@ -2687,7 +2687,7 @@
               <a:buNone/>
             </a:pPr>
             <a:r>
-              <a:rPr lang="en-US" sz="1350" dirty="0">
+              <a:rPr lang="en-US" sz="1300" dirty="0">
                 <a:solidFill>
                   <a:srgbClr val="5B7A7E"/>
                 </a:solidFill>
@@ -2695,9 +2695,9 @@
                 <a:ea typeface="Pretendard" pitchFamily="34" charset="-122"/>
                 <a:cs typeface="Pretendard" pitchFamily="34" charset="-120"/>
               </a:rPr>
-              <a:t>교정력 → 국소 저산소증·체액이동 → 「무균성 염증」 캐스케이드 → 압박측 골흡수·긴장측 골형성</a:t>
-            </a:r>
-            <a:endParaRPr lang="en-US" sz="1350" dirty="0"/>
+              <a:t>교정장치 제거 후 남아있던 결합력이 풀리면서 치아가 원래 위치로 돌아가려는 재발 현상 — 원인은 아직 명확히 규명되지 않음</a:t>
+            </a:r>
+            <a:endParaRPr lang="en-US" sz="1300" dirty="0"/>
           </a:p>
         </p:txBody>
       </p:sp>
@@ -2821,7 +2821,7 @@
               <a:buNone/>
             </a:pPr>
             <a:r>
-              <a:rPr lang="en-US" sz="1700" b="1" dirty="0">
+              <a:rPr lang="en-US" sz="1600" b="1" dirty="0">
                 <a:solidFill>
                   <a:srgbClr val="0B2E33"/>
                 </a:solidFill>
@@ -2829,9 +2829,9 @@
                 <a:ea typeface="Wanted Sans" pitchFamily="34" charset="-122"/>
                 <a:cs typeface="Wanted Sans" pitchFamily="34" charset="-120"/>
               </a:rPr>
-              <a:t>진통제 처방의 현실</a:t>
-            </a:r>
-            <a:endParaRPr lang="en-US" sz="1700" dirty="0"/>
+              <a:t>치아이동 가속의 필요성</a:t>
+            </a:r>
+            <a:endParaRPr lang="en-US" sz="1600" dirty="0"/>
           </a:p>
         </p:txBody>
       </p:sp>
@@ -2860,7 +2860,7 @@
               <a:buNone/>
             </a:pPr>
             <a:r>
-              <a:rPr lang="en-US" sz="1350" dirty="0">
+              <a:rPr lang="en-US" sz="1300" dirty="0">
                 <a:solidFill>
                   <a:srgbClr val="5B7A7E"/>
                 </a:solidFill>
@@ -2868,9 +2868,9 @@
                 <a:ea typeface="Pretendard" pitchFamily="34" charset="-122"/>
                 <a:cs typeface="Pretendard" pitchFamily="34" charset="-120"/>
               </a:rPr>
-              <a:t>환자의 최대 95%가 장치 활성화 후 통증 호소 → NSAID(이부프로펜 등)가 1차 진통제로 흔히 처방됨</a:t>
-            </a:r>
-            <a:endParaRPr lang="en-US" sz="1350" dirty="0"/>
+              <a:t>치료기간 단축을 위해 수술적·기계적·약리학적 방법으로 치아이동을 가속하는 연구가 활발 — 국소 약물주사·전신투여 모두 시도됨</a:t>
+            </a:r>
+            <a:endParaRPr lang="en-US" sz="1300" dirty="0"/>
           </a:p>
         </p:txBody>
       </p:sp>
@@ -2994,7 +2994,7 @@
               <a:buNone/>
             </a:pPr>
             <a:r>
-              <a:rPr lang="en-US" sz="1700" b="1" dirty="0">
+              <a:rPr lang="en-US" sz="1600" b="1" dirty="0">
                 <a:solidFill>
                   <a:srgbClr val="0B2E33"/>
                 </a:solidFill>
@@ -3002,9 +3002,9 @@
                 <a:ea typeface="Wanted Sans" pitchFamily="34" charset="-122"/>
                 <a:cs typeface="Wanted Sans" pitchFamily="34" charset="-120"/>
               </a:rPr>
-              <a:t>이론적 우려</a:t>
-            </a:r>
-            <a:endParaRPr lang="en-US" sz="1700" dirty="0"/>
+              <a:t>미해결 과제</a:t>
+            </a:r>
+            <a:endParaRPr lang="en-US" sz="1600" dirty="0"/>
           </a:p>
         </p:txBody>
       </p:sp>
@@ -3033,7 +3033,7 @@
               <a:buNone/>
             </a:pPr>
             <a:r>
-              <a:rPr lang="en-US" sz="1350" dirty="0">
+              <a:rPr lang="en-US" sz="1300" dirty="0">
                 <a:solidFill>
                   <a:srgbClr val="5B7A7E"/>
                 </a:solidFill>
@@ -3041,9 +3041,9 @@
                 <a:ea typeface="Pretendard" pitchFamily="34" charset="-122"/>
                 <a:cs typeface="Pretendard" pitchFamily="34" charset="-120"/>
               </a:rPr>
-              <a:t>NSAID의 COX 억제 기전이 진통엔 유효하나, 골개조에 필수적인 PGE2 생성까지 차단 → 치아이동 속도 자체를 늦출 가능성</a:t>
-            </a:r>
-            <a:endParaRPr lang="en-US" sz="1350" dirty="0"/>
+              <a:t>가속 효과를 낸 약물들이 보정(retention) 후 재발에 어떤 영향을 주는지는 선행연구가 거의 없음 — 이 연구가 처음으로 3개 약물의 재발까지 비교</a:t>
+            </a:r>
+            <a:endParaRPr lang="en-US" sz="1300" dirty="0"/>
           </a:p>
         </p:txBody>
       </p:sp>
@@ -3182,7 +3182,7 @@
               <a:buNone/>
             </a:pPr>
             <a:r>
-              <a:rPr lang="en-US" sz="3000" b="1" dirty="0">
+              <a:rPr lang="en-US" sz="2800" b="1" dirty="0">
                 <a:solidFill>
                   <a:srgbClr val="0B2E33"/>
                 </a:solidFill>
@@ -3190,9 +3190,9 @@
                 <a:ea typeface="Wanted Sans" pitchFamily="34" charset="-122"/>
                 <a:cs typeface="Wanted Sans" pitchFamily="34" charset="-120"/>
               </a:rPr>
-              <a:t>PGE2 → RANKL 경로 — 왜 NSAID가 치아이동을 늦추는가</a:t>
-            </a:r>
-            <a:endParaRPr lang="en-US" sz="3000" dirty="0"/>
+              <a:t>세 약물, 서로 다른 경로로 파골세포를 깨우다</a:t>
+            </a:r>
+            <a:endParaRPr lang="en-US" sz="2800" dirty="0"/>
           </a:p>
         </p:txBody>
       </p:sp>
@@ -3204,12 +3204,12 @@
         </p:nvSpPr>
         <p:spPr>
           <a:xfrm>
-            <a:off x="548640" y="1828800"/>
-            <a:ext cx="11064240" cy="1051560"/>
+            <a:off x="548640" y="1920240"/>
+            <a:ext cx="11064240" cy="1234440"/>
           </a:xfrm>
           <a:prstGeom prst="roundRect">
             <a:avLst>
-              <a:gd name="adj" fmla="val 6957"/>
+              <a:gd name="adj" fmla="val 5926"/>
             </a:avLst>
           </a:prstGeom>
           <a:solidFill>
@@ -3240,8 +3240,8 @@
         </p:nvSpPr>
         <p:spPr>
           <a:xfrm>
-            <a:off x="777240" y="2057400"/>
-            <a:ext cx="2103120" cy="594360"/>
+            <a:off x="777240" y="2240280"/>
+            <a:ext cx="2286000" cy="594360"/>
           </a:xfrm>
           <a:prstGeom prst="roundRect">
             <a:avLst>
@@ -3264,8 +3264,8 @@
         </p:nvSpPr>
         <p:spPr>
           <a:xfrm>
-            <a:off x="777240" y="2057400"/>
-            <a:ext cx="2103120" cy="594360"/>
+            <a:off x="777240" y="2240280"/>
+            <a:ext cx="2286000" cy="594360"/>
           </a:xfrm>
           <a:prstGeom prst="rect">
             <a:avLst/>
@@ -3281,7 +3281,7 @@
               <a:buNone/>
             </a:pPr>
             <a:r>
-              <a:rPr lang="en-US" sz="1300" b="1" dirty="0">
+              <a:rPr lang="en-US" sz="1350" b="1" dirty="0">
                 <a:solidFill>
                   <a:srgbClr val="028090"/>
                 </a:solidFill>
@@ -3289,9 +3289,9 @@
                 <a:ea typeface="Pretendard" pitchFamily="34" charset="-122"/>
                 <a:cs typeface="Pretendard" pitchFamily="34" charset="-120"/>
               </a:rPr>
-              <a:t>1. 기계적 자극</a:t>
-            </a:r>
-            <a:endParaRPr lang="en-US" sz="1300" dirty="0"/>
+              <a:t>코르티코스테로이드</a:t>
+            </a:r>
+            <a:endParaRPr lang="en-US" sz="1350" dirty="0"/>
           </a:p>
         </p:txBody>
       </p:sp>
@@ -3303,8 +3303,8 @@
         </p:nvSpPr>
         <p:spPr>
           <a:xfrm>
-            <a:off x="3108960" y="1920240"/>
-            <a:ext cx="8229600" cy="868680"/>
+            <a:off x="3291840" y="2057400"/>
+            <a:ext cx="8046720" cy="960120"/>
           </a:xfrm>
           <a:prstGeom prst="rect">
             <a:avLst/>
@@ -3318,7 +3318,7 @@
           <a:p>
             <a:pPr indent="0" marL="0">
               <a:lnSpc>
-                <a:spcPct val="120000"/>
+                <a:spcPct val="125000"/>
               </a:lnSpc>
               <a:buNone/>
             </a:pPr>
@@ -3331,7 +3331,7 @@
                 <a:ea typeface="Pretendard" pitchFamily="34" charset="-122"/>
                 <a:cs typeface="Pretendard" pitchFamily="34" charset="-120"/>
               </a:rPr>
-              <a:t>교정력 → PDL·치조골 국소 저산소증/체액이동 → phospholipase A2 활성화 → 아라키돈산 유리</a:t>
+              <a:t>염증유전자 발현 억제 + 파골세포형성(osteoclastogenesis) 직접 자극 + 콜라게나아제 활성 증가 → 골흡수 강하게 촉진</a:t>
             </a:r>
             <a:endParaRPr lang="en-US" sz="1250" dirty="0"/>
           </a:p>
@@ -3345,12 +3345,12 @@
         </p:nvSpPr>
         <p:spPr>
           <a:xfrm>
-            <a:off x="548640" y="3017520"/>
-            <a:ext cx="11064240" cy="1051560"/>
+            <a:off x="548640" y="3337560"/>
+            <a:ext cx="11064240" cy="1234440"/>
           </a:xfrm>
           <a:prstGeom prst="roundRect">
             <a:avLst>
-              <a:gd name="adj" fmla="val 6957"/>
+              <a:gd name="adj" fmla="val 5926"/>
             </a:avLst>
           </a:prstGeom>
           <a:solidFill>
@@ -3381,8 +3381,8 @@
         </p:nvSpPr>
         <p:spPr>
           <a:xfrm>
-            <a:off x="777240" y="3246120"/>
-            <a:ext cx="2103120" cy="594360"/>
+            <a:off x="777240" y="3657600"/>
+            <a:ext cx="2286000" cy="594360"/>
           </a:xfrm>
           <a:prstGeom prst="roundRect">
             <a:avLst>
@@ -3405,8 +3405,8 @@
         </p:nvSpPr>
         <p:spPr>
           <a:xfrm>
-            <a:off x="777240" y="3246120"/>
-            <a:ext cx="2103120" cy="594360"/>
+            <a:off x="777240" y="3657600"/>
+            <a:ext cx="2286000" cy="594360"/>
           </a:xfrm>
           <a:prstGeom prst="rect">
             <a:avLst/>
@@ -3422,7 +3422,7 @@
               <a:buNone/>
             </a:pPr>
             <a:r>
-              <a:rPr lang="en-US" sz="1300" b="1" dirty="0">
+              <a:rPr lang="en-US" sz="1350" b="1" dirty="0">
                 <a:solidFill>
                   <a:srgbClr val="028090"/>
                 </a:solidFill>
@@ -3430,9 +3430,9 @@
                 <a:ea typeface="Pretendard" pitchFamily="34" charset="-122"/>
                 <a:cs typeface="Pretendard" pitchFamily="34" charset="-120"/>
               </a:rPr>
-              <a:t>2. COX 경로</a:t>
-            </a:r>
-            <a:endParaRPr lang="en-US" sz="1300" dirty="0"/>
+              <a:t>비타민D</a:t>
+            </a:r>
+            <a:endParaRPr lang="en-US" sz="1350" dirty="0"/>
           </a:p>
         </p:txBody>
       </p:sp>
@@ -3444,8 +3444,8 @@
         </p:nvSpPr>
         <p:spPr>
           <a:xfrm>
-            <a:off x="3108960" y="3108960"/>
-            <a:ext cx="8229600" cy="868680"/>
+            <a:off x="3291840" y="3474720"/>
+            <a:ext cx="8046720" cy="960120"/>
           </a:xfrm>
           <a:prstGeom prst="rect">
             <a:avLst/>
@@ -3459,7 +3459,7 @@
           <a:p>
             <a:pPr indent="0" marL="0">
               <a:lnSpc>
-                <a:spcPct val="120000"/>
+                <a:spcPct val="125000"/>
               </a:lnSpc>
               <a:buNone/>
             </a:pPr>
@@ -3472,7 +3472,7 @@
                 <a:ea typeface="Pretendard" pitchFamily="34" charset="-122"/>
                 <a:cs typeface="Pretendard" pitchFamily="34" charset="-120"/>
               </a:rPr>
-              <a:t>COX-1/2가 아라키돈산을 PGE2로 전환 — 이 단계가 이부프로펜(비선택적 COX 억제제)의 표적</a:t>
+              <a:t>파골세포 활성 자체를 증가시키고 면역매개체를 조절 → 골개조 촉진. 골칼슘단백(osteocalcin)·비타민D수용체 유전자 발현에도 관여</a:t>
             </a:r>
             <a:endParaRPr lang="en-US" sz="1250" dirty="0"/>
           </a:p>
@@ -3486,12 +3486,12 @@
         </p:nvSpPr>
         <p:spPr>
           <a:xfrm>
-            <a:off x="548640" y="4206240"/>
-            <a:ext cx="11064240" cy="1051560"/>
+            <a:off x="548640" y="4754880"/>
+            <a:ext cx="11064240" cy="1234440"/>
           </a:xfrm>
           <a:prstGeom prst="roundRect">
             <a:avLst>
-              <a:gd name="adj" fmla="val 6957"/>
+              <a:gd name="adj" fmla="val 5926"/>
             </a:avLst>
           </a:prstGeom>
           <a:solidFill>
@@ -3522,8 +3522,8 @@
         </p:nvSpPr>
         <p:spPr>
           <a:xfrm>
-            <a:off x="777240" y="4434840"/>
-            <a:ext cx="2103120" cy="594360"/>
+            <a:off x="777240" y="5074920"/>
+            <a:ext cx="2286000" cy="594360"/>
           </a:xfrm>
           <a:prstGeom prst="roundRect">
             <a:avLst>
@@ -3546,8 +3546,8 @@
         </p:nvSpPr>
         <p:spPr>
           <a:xfrm>
-            <a:off x="777240" y="4434840"/>
-            <a:ext cx="2103120" cy="594360"/>
+            <a:off x="777240" y="5074920"/>
+            <a:ext cx="2286000" cy="594360"/>
           </a:xfrm>
           <a:prstGeom prst="rect">
             <a:avLst/>
@@ -3563,7 +3563,7 @@
               <a:buNone/>
             </a:pPr>
             <a:r>
-              <a:rPr lang="en-US" sz="1300" b="1" dirty="0">
+              <a:rPr lang="en-US" sz="1350" b="1" dirty="0">
                 <a:solidFill>
                   <a:srgbClr val="028090"/>
                 </a:solidFill>
@@ -3571,9 +3571,9 @@
                 <a:ea typeface="Pretendard" pitchFamily="34" charset="-122"/>
                 <a:cs typeface="Pretendard" pitchFamily="34" charset="-120"/>
               </a:rPr>
-              <a:t>3. PGE2 → RANKL</a:t>
-            </a:r>
-            <a:endParaRPr lang="en-US" sz="1300" dirty="0"/>
+              <a:t>PGE2</a:t>
+            </a:r>
+            <a:endParaRPr lang="en-US" sz="1350" dirty="0"/>
           </a:p>
         </p:txBody>
       </p:sp>
@@ -3585,8 +3585,8 @@
         </p:nvSpPr>
         <p:spPr>
           <a:xfrm>
-            <a:off x="3108960" y="4297680"/>
-            <a:ext cx="8229600" cy="868680"/>
+            <a:off x="3291840" y="4892040"/>
+            <a:ext cx="8046720" cy="960120"/>
           </a:xfrm>
           <a:prstGeom prst="rect">
             <a:avLst/>
@@ -3600,7 +3600,7 @@
           <a:p>
             <a:pPr indent="0" marL="0">
               <a:lnSpc>
-                <a:spcPct val="120000"/>
+                <a:spcPct val="125000"/>
               </a:lnSpc>
               <a:buNone/>
             </a:pPr>
@@ -3613,7 +3613,7 @@
                 <a:ea typeface="Pretendard" pitchFamily="34" charset="-122"/>
                 <a:cs typeface="Pretendard" pitchFamily="34" charset="-120"/>
               </a:rPr>
-              <a:t>PGE2가 조골세포·PDL세포에서 RANKL 발현을 유도 → RANKL이 파골세포 전구세포의 RANK 수용체에 결합</a:t>
+              <a:t>RANKL 매개 파골세포형성을 자극 + 국소 골흡수 강화 — 교정력이 만드는 내인성 경로(COX→PGE2→RANKL)를 외부에서 직접 보충하는 셈</a:t>
             </a:r>
             <a:endParaRPr lang="en-US" sz="1250" dirty="0"/>
           </a:p>
@@ -3621,90 +3621,30 @@
       </p:sp>
       <p:sp>
         <p:nvSpPr>
-          <p:cNvPr id="16" name="Shape 14"/>
-          <p:cNvSpPr/>
-          <p:nvPr/>
-        </p:nvSpPr>
-        <p:spPr>
-          <a:xfrm>
-            <a:off x="548640" y="5394960"/>
-            <a:ext cx="11064240" cy="1051560"/>
-          </a:xfrm>
-          <a:prstGeom prst="roundRect">
-            <a:avLst>
-              <a:gd name="adj" fmla="val 6957"/>
-            </a:avLst>
-          </a:prstGeom>
-          <a:solidFill>
-            <a:srgbClr val="FFFFFF"/>
-          </a:solidFill>
-          <a:ln w="9525">
-            <a:solidFill>
-              <a:srgbClr val="00A896">
-                <a:alpha val="30000"/>
-              </a:srgbClr>
-            </a:solidFill>
-            <a:prstDash val="solid"/>
-          </a:ln>
-          <a:effectLst>
-            <a:outerShdw sx="100000" sy="100000" kx="0" ky="0" algn="bl" rotWithShape="0" blurRad="63500" dist="25400" dir="5400000">
-              <a:srgbClr val="000000">
-                <a:alpha val="10000"/>
-              </a:srgbClr>
-            </a:outerShdw>
-          </a:effectLst>
-        </p:spPr>
-      </p:sp>
-      <p:sp>
-        <p:nvSpPr>
-          <p:cNvPr id="17" name="Shape 15"/>
-          <p:cNvSpPr/>
-          <p:nvPr/>
-        </p:nvSpPr>
-        <p:spPr>
-          <a:xfrm>
-            <a:off x="777240" y="5623560"/>
-            <a:ext cx="2103120" cy="594360"/>
-          </a:xfrm>
-          <a:prstGeom prst="roundRect">
-            <a:avLst>
-              <a:gd name="adj" fmla="val 46154"/>
-            </a:avLst>
-          </a:prstGeom>
-          <a:solidFill>
-            <a:srgbClr val="028090">
-              <a:alpha val="12000"/>
-            </a:srgbClr>
-          </a:solidFill>
-          <a:ln/>
-        </p:spPr>
-      </p:sp>
-      <p:sp>
-        <p:nvSpPr>
-          <p:cNvPr id="18" name="Text 16"/>
-          <p:cNvSpPr txBox="1"/>
-          <p:nvPr/>
-        </p:nvSpPr>
-        <p:spPr>
-          <a:xfrm>
-            <a:off x="777240" y="5623560"/>
-            <a:ext cx="2103120" cy="594360"/>
-          </a:xfrm>
-          <a:prstGeom prst="rect">
-            <a:avLst/>
-          </a:prstGeom>
-          <a:noFill/>
-          <a:ln/>
-        </p:spPr>
-        <p:txBody>
-          <a:bodyPr wrap="square" lIns="0" tIns="0" rIns="0" bIns="0" rtlCol="0" anchor="ctr"/>
-          <a:lstStyle/>
-          <a:p>
-            <a:pPr algn="ctr" indent="0" marL="0">
-              <a:buNone/>
-            </a:pPr>
-            <a:r>
-              <a:rPr lang="en-US" sz="1300" b="1" dirty="0">
+          <p:cNvPr id="16" name="Text 14"/>
+          <p:cNvSpPr txBox="1"/>
+          <p:nvPr/>
+        </p:nvSpPr>
+        <p:spPr>
+          <a:xfrm>
+            <a:off x="548640" y="6035040"/>
+            <a:ext cx="11064240" cy="548640"/>
+          </a:xfrm>
+          <a:prstGeom prst="rect">
+            <a:avLst/>
+          </a:prstGeom>
+          <a:noFill/>
+          <a:ln/>
+        </p:spPr>
+        <p:txBody>
+          <a:bodyPr wrap="square" lIns="0" tIns="0" rIns="0" bIns="0" rtlCol="0" anchor="ctr"/>
+          <a:lstStyle/>
+          <a:p>
+            <a:pPr indent="0" marL="0">
+              <a:buNone/>
+            </a:pPr>
+            <a:r>
+              <a:rPr lang="en-US" sz="1250" i="1" dirty="0">
                 <a:solidFill>
                   <a:srgbClr val="028090"/>
                 </a:solidFill>
@@ -3712,49 +3652,7 @@
                 <a:ea typeface="Pretendard" pitchFamily="34" charset="-122"/>
                 <a:cs typeface="Pretendard" pitchFamily="34" charset="-120"/>
               </a:rPr>
-              <a:t>4. 파골세포 활성 → 골흡수</a:t>
-            </a:r>
-            <a:endParaRPr lang="en-US" sz="1300" dirty="0"/>
-          </a:p>
-        </p:txBody>
-      </p:sp>
-      <p:sp>
-        <p:nvSpPr>
-          <p:cNvPr id="19" name="Text 17"/>
-          <p:cNvSpPr txBox="1"/>
-          <p:nvPr/>
-        </p:nvSpPr>
-        <p:spPr>
-          <a:xfrm>
-            <a:off x="3108960" y="5486400"/>
-            <a:ext cx="8229600" cy="868680"/>
-          </a:xfrm>
-          <a:prstGeom prst="rect">
-            <a:avLst/>
-          </a:prstGeom>
-          <a:noFill/>
-          <a:ln/>
-        </p:spPr>
-        <p:txBody>
-          <a:bodyPr wrap="square" lIns="0" tIns="0" rIns="0" bIns="0" rtlCol="0" anchor="ctr"/>
-          <a:lstStyle/>
-          <a:p>
-            <a:pPr indent="0" marL="0">
-              <a:lnSpc>
-                <a:spcPct val="120000"/>
-              </a:lnSpc>
-              <a:buNone/>
-            </a:pPr>
-            <a:r>
-              <a:rPr lang="en-US" sz="1250" dirty="0">
-                <a:solidFill>
-                  <a:srgbClr val="0B2E33"/>
-                </a:solidFill>
-                <a:latin typeface="Pretendard" pitchFamily="34" charset="0"/>
-                <a:ea typeface="Pretendard" pitchFamily="34" charset="-122"/>
-                <a:cs typeface="Pretendard" pitchFamily="34" charset="-120"/>
-              </a:rPr>
-              <a:t>RANKL-RANK 결합으로 파골세포 분화·활성 촉진 → 압박측 치조골 흡수 → 치아이동 실현</a:t>
+              <a:t>→ 세 약물 모두 '파골세포 활성화'라는 종착점은 같지만, 도달 경로(직접 자극 vs RANKL 매개 vs 면역조절)가 달라 가속 강도와 부작용(재발)이 다르게 나타남</a:t>
             </a:r>
             <a:endParaRPr lang="en-US" sz="1250" dirty="0"/>
           </a:p>
@@ -3762,46 +3660,7 @@
       </p:sp>
       <p:sp>
         <p:nvSpPr>
-          <p:cNvPr id="20" name="Text 18"/>
-          <p:cNvSpPr txBox="1"/>
-          <p:nvPr/>
-        </p:nvSpPr>
-        <p:spPr>
-          <a:xfrm>
-            <a:off x="548640" y="6080760"/>
-            <a:ext cx="11064240" cy="502920"/>
-          </a:xfrm>
-          <a:prstGeom prst="rect">
-            <a:avLst/>
-          </a:prstGeom>
-          <a:noFill/>
-          <a:ln/>
-        </p:spPr>
-        <p:txBody>
-          <a:bodyPr wrap="square" lIns="0" tIns="0" rIns="0" bIns="0" rtlCol="0" anchor="ctr"/>
-          <a:lstStyle/>
-          <a:p>
-            <a:pPr indent="0" marL="0">
-              <a:buNone/>
-            </a:pPr>
-            <a:r>
-              <a:rPr lang="en-US" sz="1250" i="1" dirty="0">
-                <a:solidFill>
-                  <a:srgbClr val="028090"/>
-                </a:solidFill>
-                <a:latin typeface="Pretendard" pitchFamily="34" charset="0"/>
-                <a:ea typeface="Pretendard" pitchFamily="34" charset="-122"/>
-                <a:cs typeface="Pretendard" pitchFamily="34" charset="-120"/>
-              </a:rPr>
-              <a:t>아세트아미노펜은 주로 중추(뇌)에서 작용해 말초 PGE2·이 경로에는 영향이 적음 — 그래서 대조약물로 선택됨</a:t>
-            </a:r>
-            <a:endParaRPr lang="en-US" sz="1250" dirty="0"/>
-          </a:p>
-        </p:txBody>
-      </p:sp>
-      <p:sp>
-        <p:nvSpPr>
-          <p:cNvPr id="21" name="Text 19"/>
+          <p:cNvPr id="17" name="Text 15"/>
           <p:cNvSpPr txBox="1"/>
           <p:nvPr/>
         </p:nvSpPr>
@@ -3934,7 +3793,7 @@
               <a:buNone/>
             </a:pPr>
             <a:r>
-              <a:rPr lang="en-US" sz="3000" b="1" dirty="0">
+              <a:rPr lang="en-US" sz="2800" b="1" dirty="0">
                 <a:solidFill>
                   <a:srgbClr val="0B2E33"/>
                 </a:solidFill>
@@ -3942,9 +3801,9 @@
                 <a:ea typeface="Wanted Sans" pitchFamily="34" charset="-122"/>
                 <a:cs typeface="Wanted Sans" pitchFamily="34" charset="-120"/>
               </a:rPr>
-              <a:t>이 연구가 채우는 공백</a:t>
-            </a:r>
-            <a:endParaRPr lang="en-US" sz="3000" dirty="0"/>
+              <a:t>왜 결과가 엇갈리는가, 그리고 이 연구의 공백</a:t>
+            </a:r>
+            <a:endParaRPr lang="en-US" sz="2800" dirty="0"/>
           </a:p>
         </p:txBody>
       </p:sp>
@@ -3956,12 +3815,12 @@
         </p:nvSpPr>
         <p:spPr>
           <a:xfrm>
-            <a:off x="548640" y="2194560"/>
-            <a:ext cx="11064240" cy="1051560"/>
+            <a:off x="548640" y="2103120"/>
+            <a:ext cx="11064240" cy="1097280"/>
           </a:xfrm>
           <a:prstGeom prst="roundRect">
             <a:avLst>
-              <a:gd name="adj" fmla="val 5217"/>
+              <a:gd name="adj" fmla="val 5000"/>
             </a:avLst>
           </a:prstGeom>
           <a:solidFill>
@@ -3985,24 +3844,24 @@
         </p:nvSpPr>
         <p:spPr>
           <a:xfrm>
-            <a:off x="868680" y="2304288"/>
-            <a:ext cx="5120640" cy="822960"/>
-          </a:xfrm>
-          <a:prstGeom prst="rect">
-            <a:avLst/>
-          </a:prstGeom>
-          <a:noFill/>
-          <a:ln/>
-        </p:spPr>
-        <p:txBody>
-          <a:bodyPr wrap="square" lIns="0" tIns="0" rIns="0" bIns="0" rtlCol="0" anchor="ctr"/>
-          <a:lstStyle/>
-          <a:p>
-            <a:pPr indent="0" marL="0">
-              <a:buNone/>
-            </a:pPr>
-            <a:r>
-              <a:rPr lang="en-US" sz="1300" b="1" dirty="0">
+            <a:off x="868680" y="2212848"/>
+            <a:ext cx="2743200" cy="868680"/>
+          </a:xfrm>
+          <a:prstGeom prst="rect">
+            <a:avLst/>
+          </a:prstGeom>
+          <a:noFill/>
+          <a:ln/>
+        </p:spPr>
+        <p:txBody>
+          <a:bodyPr wrap="square" lIns="0" tIns="0" rIns="0" bIns="0" rtlCol="0" anchor="ctr"/>
+          <a:lstStyle/>
+          <a:p>
+            <a:pPr indent="0" marL="0">
+              <a:buNone/>
+            </a:pPr>
+            <a:r>
+              <a:rPr lang="en-US" sz="1350" b="1" dirty="0">
                 <a:solidFill>
                   <a:srgbClr val="0B2E33"/>
                 </a:solidFill>
@@ -4010,9 +3869,9 @@
                 <a:ea typeface="Pretendard" pitchFamily="34" charset="-122"/>
                 <a:cs typeface="Pretendard" pitchFamily="34" charset="-120"/>
               </a:rPr>
-              <a:t>Shetty et al. 2013, Prog Orthod</a:t>
-            </a:r>
-            <a:endParaRPr lang="en-US" sz="1300" dirty="0"/>
+              <a:t>코르티코스테로이드</a:t>
+            </a:r>
+            <a:endParaRPr lang="en-US" sz="1350" dirty="0"/>
           </a:p>
         </p:txBody>
       </p:sp>
@@ -4024,8 +3883,8 @@
         </p:nvSpPr>
         <p:spPr>
           <a:xfrm>
-            <a:off x="6126480" y="2304288"/>
-            <a:ext cx="5212080" cy="822960"/>
+            <a:off x="3840480" y="2212848"/>
+            <a:ext cx="7498080" cy="868680"/>
           </a:xfrm>
           <a:prstGeom prst="rect">
             <a:avLst/>
@@ -4043,13 +3902,13 @@
             <a:r>
               <a:rPr lang="en-US" sz="1200" dirty="0">
                 <a:solidFill>
-                  <a:srgbClr val="047857"/>
-                </a:solidFill>
-                <a:latin typeface="Pretendard" pitchFamily="34" charset="0"/>
-                <a:ea typeface="Pretendard" pitchFamily="34" charset="-122"/>
-                <a:cs typeface="Pretendard" pitchFamily="34" charset="-120"/>
-              </a:rPr>
-              <a:t>이부프로펜·아세트아미노펜의 GCF PGE2 비교 (human study) — 이 연구의 직접적 선행연구</a:t>
+                  <a:srgbClr val="5B7A7E"/>
+                </a:solidFill>
+                <a:latin typeface="Pretendard" pitchFamily="34" charset="0"/>
+                <a:ea typeface="Pretendard" pitchFamily="34" charset="-122"/>
+                <a:cs typeface="Pretendard" pitchFamily="34" charset="-120"/>
+              </a:rPr>
+              <a:t>Baofeng·Abtahi 등은 골흡수·파골세포형성 증가로 가속 보고 / 반대로 Yamane·Molina 등은 오히려 치아이동 감소 보고</a:t>
             </a:r>
             <a:endParaRPr lang="en-US" sz="1200" dirty="0"/>
           </a:p>
@@ -4063,12 +3922,12 @@
         </p:nvSpPr>
         <p:spPr>
           <a:xfrm>
-            <a:off x="548640" y="3429000"/>
-            <a:ext cx="11064240" cy="1051560"/>
+            <a:off x="548640" y="3383280"/>
+            <a:ext cx="11064240" cy="1097280"/>
           </a:xfrm>
           <a:prstGeom prst="roundRect">
             <a:avLst>
-              <a:gd name="adj" fmla="val 5217"/>
+              <a:gd name="adj" fmla="val 5000"/>
             </a:avLst>
           </a:prstGeom>
           <a:solidFill>
@@ -4092,24 +3951,24 @@
         </p:nvSpPr>
         <p:spPr>
           <a:xfrm>
-            <a:off x="868680" y="3538728"/>
-            <a:ext cx="5120640" cy="822960"/>
-          </a:xfrm>
-          <a:prstGeom prst="rect">
-            <a:avLst/>
-          </a:prstGeom>
-          <a:noFill/>
-          <a:ln/>
-        </p:spPr>
-        <p:txBody>
-          <a:bodyPr wrap="square" lIns="0" tIns="0" rIns="0" bIns="0" rtlCol="0" anchor="ctr"/>
-          <a:lstStyle/>
-          <a:p>
-            <a:pPr indent="0" marL="0">
-              <a:buNone/>
-            </a:pPr>
-            <a:r>
-              <a:rPr lang="en-US" sz="1300" b="1" dirty="0">
+            <a:off x="868680" y="3493008"/>
+            <a:ext cx="2743200" cy="868680"/>
+          </a:xfrm>
+          <a:prstGeom prst="rect">
+            <a:avLst/>
+          </a:prstGeom>
+          <a:noFill/>
+          <a:ln/>
+        </p:spPr>
+        <p:txBody>
+          <a:bodyPr wrap="square" lIns="0" tIns="0" rIns="0" bIns="0" rtlCol="0" anchor="ctr"/>
+          <a:lstStyle/>
+          <a:p>
+            <a:pPr indent="0" marL="0">
+              <a:buNone/>
+            </a:pPr>
+            <a:r>
+              <a:rPr lang="en-US" sz="1350" b="1" dirty="0">
                 <a:solidFill>
                   <a:srgbClr val="0B2E33"/>
                 </a:solidFill>
@@ -4117,9 +3976,9 @@
                 <a:ea typeface="Pretendard" pitchFamily="34" charset="-122"/>
                 <a:cs typeface="Pretendard" pitchFamily="34" charset="-120"/>
               </a:rPr>
-              <a:t>Bartzela et al. 2009, AJODO (systematic review)</a:t>
-            </a:r>
-            <a:endParaRPr lang="en-US" sz="1300" dirty="0"/>
+              <a:t>비타민D</a:t>
+            </a:r>
+            <a:endParaRPr lang="en-US" sz="1350" dirty="0"/>
           </a:p>
         </p:txBody>
       </p:sp>
@@ -4131,8 +3990,8 @@
         </p:nvSpPr>
         <p:spPr>
           <a:xfrm>
-            <a:off x="6126480" y="3538728"/>
-            <a:ext cx="5212080" cy="822960"/>
+            <a:off x="3840480" y="3493008"/>
+            <a:ext cx="7498080" cy="868680"/>
           </a:xfrm>
           <a:prstGeom prst="rect">
             <a:avLst/>
@@ -4150,13 +4009,13 @@
             <a:r>
               <a:rPr lang="en-US" sz="1200" dirty="0">
                 <a:solidFill>
-                  <a:srgbClr val="5B7A7E"/>
-                </a:solidFill>
-                <a:latin typeface="Pretendard" pitchFamily="34" charset="0"/>
-                <a:ea typeface="Pretendard" pitchFamily="34" charset="-122"/>
-                <a:cs typeface="Pretendard" pitchFamily="34" charset="-120"/>
-              </a:rPr>
-              <a:t>여러 약물이 치아이동 속도에 미치는 영향을 문헌적으로 정리 — NSAID의 억제 효과 시사</a:t>
+                  <a:srgbClr val="047857"/>
+                </a:solidFill>
+                <a:latin typeface="Pretendard" pitchFamily="34" charset="0"/>
+                <a:ea typeface="Pretendard" pitchFamily="34" charset="-122"/>
+                <a:cs typeface="Pretendard" pitchFamily="34" charset="-120"/>
+              </a:rPr>
+              <a:t>Gowda·Varughese·Al-Attar·Moradinejad 등 다수가 골개조 증가·염증성 사이토카인 감소로 가속 효과 일관되게 보고</a:t>
             </a:r>
             <a:endParaRPr lang="en-US" sz="1200" dirty="0"/>
           </a:p>
@@ -4171,11 +4030,11 @@
         <p:spPr>
           <a:xfrm>
             <a:off x="548640" y="4663440"/>
-            <a:ext cx="11064240" cy="1051560"/>
+            <a:ext cx="11064240" cy="1097280"/>
           </a:xfrm>
           <a:prstGeom prst="roundRect">
             <a:avLst>
-              <a:gd name="adj" fmla="val 5217"/>
+              <a:gd name="adj" fmla="val 5000"/>
             </a:avLst>
           </a:prstGeom>
           <a:solidFill>
@@ -4200,23 +4059,23 @@
         <p:spPr>
           <a:xfrm>
             <a:off x="868680" y="4773168"/>
-            <a:ext cx="5120640" cy="822960"/>
-          </a:xfrm>
-          <a:prstGeom prst="rect">
-            <a:avLst/>
-          </a:prstGeom>
-          <a:noFill/>
-          <a:ln/>
-        </p:spPr>
-        <p:txBody>
-          <a:bodyPr wrap="square" lIns="0" tIns="0" rIns="0" bIns="0" rtlCol="0" anchor="ctr"/>
-          <a:lstStyle/>
-          <a:p>
-            <a:pPr indent="0" marL="0">
-              <a:buNone/>
-            </a:pPr>
-            <a:r>
-              <a:rPr lang="en-US" sz="1300" b="1" dirty="0">
+            <a:ext cx="2743200" cy="868680"/>
+          </a:xfrm>
+          <a:prstGeom prst="rect">
+            <a:avLst/>
+          </a:prstGeom>
+          <a:noFill/>
+          <a:ln/>
+        </p:spPr>
+        <p:txBody>
+          <a:bodyPr wrap="square" lIns="0" tIns="0" rIns="0" bIns="0" rtlCol="0" anchor="ctr"/>
+          <a:lstStyle/>
+          <a:p>
+            <a:pPr indent="0" marL="0">
+              <a:buNone/>
+            </a:pPr>
+            <a:r>
+              <a:rPr lang="en-US" sz="1350" b="1" dirty="0">
                 <a:solidFill>
                   <a:srgbClr val="0B2E33"/>
                 </a:solidFill>
@@ -4224,9 +4083,9 @@
                 <a:ea typeface="Pretendard" pitchFamily="34" charset="-122"/>
                 <a:cs typeface="Pretendard" pitchFamily="34" charset="-120"/>
               </a:rPr>
-              <a:t>Kelderman &amp; Ren 2022, Eur J Orthod (review)</a:t>
-            </a:r>
-            <a:endParaRPr lang="en-US" sz="1300" dirty="0"/>
+              <a:t>PGE2</a:t>
+            </a:r>
+            <a:endParaRPr lang="en-US" sz="1350" dirty="0"/>
           </a:p>
         </p:txBody>
       </p:sp>
@@ -4238,8 +4097,8 @@
         </p:nvSpPr>
         <p:spPr>
           <a:xfrm>
-            <a:off x="6126480" y="4773168"/>
-            <a:ext cx="5212080" cy="822960"/>
+            <a:off x="3840480" y="4773168"/>
+            <a:ext cx="7498080" cy="868680"/>
           </a:xfrm>
           <a:prstGeom prst="rect">
             <a:avLst/>
@@ -4257,13 +4116,13 @@
             <a:r>
               <a:rPr lang="en-US" sz="1200" dirty="0">
                 <a:solidFill>
-                  <a:srgbClr val="5B7A7E"/>
-                </a:solidFill>
-                <a:latin typeface="Pretendard" pitchFamily="34" charset="0"/>
-                <a:ea typeface="Pretendard" pitchFamily="34" charset="-122"/>
-                <a:cs typeface="Pretendard" pitchFamily="34" charset="-120"/>
-              </a:rPr>
-              <a:t>진통제와 치아이동에 대한 최신 systematic review — 근거의 일관성은 아직 논쟁적</a:t>
+                  <a:srgbClr val="047857"/>
+                </a:solidFill>
+                <a:latin typeface="Pretendard" pitchFamily="34" charset="0"/>
+                <a:ea typeface="Pretendard" pitchFamily="34" charset="-122"/>
+                <a:cs typeface="Pretendard" pitchFamily="34" charset="-120"/>
+              </a:rPr>
+              <a:t>Kale·Cağlaroğlu·Seifi 등이 RANKL 발현·파골활성 증가 보고 — 'PGE2 효과 없음'을 보고한 연구는 없음(저자 확인)</a:t>
             </a:r>
             <a:endParaRPr lang="en-US" sz="1200" dirty="0"/>
           </a:p>
@@ -4294,7 +4153,7 @@
               <a:buNone/>
             </a:pPr>
             <a:r>
-              <a:rPr lang="en-US" sz="1300" i="1" dirty="0">
+              <a:rPr lang="en-US" sz="1250" i="1" dirty="0">
                 <a:solidFill>
                   <a:srgbClr val="028090"/>
                 </a:solidFill>
@@ -4302,9 +4161,9 @@
                 <a:ea typeface="Pretendard" pitchFamily="34" charset="-122"/>
                 <a:cs typeface="Pretendard" pitchFamily="34" charset="-120"/>
               </a:rPr>
-              <a:t>→ 본 연구는 Shetty(2013)의 단일시점 PGE2 비교를 「RANKL 지표 추가 + 3개월 종단추적 + 실제 치아이동량 측정」으로 확장 — 기전(PGE2/RANKL)과 임상결과(이동량)를 동시에 검증한 최초 사례</a:t>
-            </a:r>
-            <a:endParaRPr lang="en-US" sz="1300" dirty="0"/>
+              <a:t>→ 저자들은 상반된 결과가 연구기간(1-2주 vs 8주)·용량·가해진 힘·표본수 차이에서 온다고 설명. 무엇보다 '재발(relapse)까지 세 약물을 나란히 비교한 연구는 이번이 최초' — 이것이 이 논문의 진짜 공백</a:t>
+            </a:r>
+            <a:endParaRPr lang="en-US" sz="1250" dirty="0"/>
           </a:p>
         </p:txBody>
       </p:sp>
@@ -4443,7 +4302,7 @@
               <a:buNone/>
             </a:pPr>
             <a:r>
-              <a:rPr lang="en-US" sz="3000" b="1" dirty="0">
+              <a:rPr lang="en-US" sz="2800" b="1" dirty="0">
                 <a:solidFill>
                   <a:srgbClr val="FFFFFF"/>
                 </a:solidFill>
@@ -4453,7 +4312,7 @@
               </a:rPr>
               <a:t>연구 목적 및 가설</a:t>
             </a:r>
-            <a:endParaRPr lang="en-US" sz="3000" dirty="0"/>
+            <a:endParaRPr lang="en-US" sz="2800" dirty="0"/>
           </a:p>
         </p:txBody>
       </p:sp>
@@ -4548,7 +4407,7 @@
               <a:buNone/>
             </a:pPr>
             <a:r>
-              <a:rPr lang="en-US" sz="1500" dirty="0">
+              <a:rPr lang="en-US" sz="1450" dirty="0">
                 <a:solidFill>
                   <a:srgbClr val="FFFFFF"/>
                 </a:solidFill>
@@ -4556,9 +4415,9 @@
                 <a:ea typeface="Pretendard" pitchFamily="34" charset="-122"/>
                 <a:cs typeface="Pretendard" pitchFamily="34" charset="-120"/>
               </a:rPr>
-              <a:t>상악 제1소구치 발치 및 견치 원심이동이 필요한 교정환자에서, 이부프로펜(400mg)과 아세트아미노펜(500mg)이 치아이동 속도 및 치은열구액(GCF) PGE2·RANKL 농도에 미치는 영향을 비교한다.</a:t>
-            </a:r>
-            <a:endParaRPr lang="en-US" sz="1500" dirty="0"/>
+              <a:t>랫드 모델에서 코르티코스테로이드·비타민D·PGE2의 국소(점막하) 주입이 교정 치아이동 가속 및 보정 후 재발에 미치는 영향을 비교한다. (귀무가설: 세 약물 간 가속기·재발기 효과에 차이가 없다)</a:t>
+            </a:r>
+            <a:endParaRPr lang="en-US" sz="1450" dirty="0"/>
           </a:p>
         </p:txBody>
       </p:sp>
@@ -4659,7 +4518,7 @@
                 <a:ea typeface="Pretendard" pitchFamily="34" charset="-122"/>
                 <a:cs typeface="Pretendard" pitchFamily="34" charset="-120"/>
               </a:rPr>
-              <a:t>이부프로펜 투여군은 아세트아미노펜 투여군보다 치아이동 속도가 유의하게 느리고, GCF PGE2·RANKL 농도가 유의하게 낮을 것이다.</a:t>
+              <a:t>세 약물 모두 대조군보다 치아이동을 가속하되, 가속 정도가 큰 약물일수록 보정 후 재발량도 클 것이다 (가속-재발 트레이드오프).</a:t>
             </a:r>
             <a:endParaRPr lang="en-US" sz="1500" dirty="0"/>
           </a:p>
@@ -4800,7 +4659,7 @@
               <a:buNone/>
             </a:pPr>
             <a:r>
-              <a:rPr lang="en-US" sz="3000" b="1" dirty="0">
+              <a:rPr lang="en-US" sz="2800" b="1" dirty="0">
                 <a:solidFill>
                   <a:srgbClr val="0B2E33"/>
                 </a:solidFill>
@@ -4808,9 +4667,9 @@
                 <a:ea typeface="Wanted Sans" pitchFamily="34" charset="-122"/>
                 <a:cs typeface="Wanted Sans" pitchFamily="34" charset="-120"/>
               </a:rPr>
-              <a:t>연구 설계 및 대상</a:t>
-            </a:r>
-            <a:endParaRPr lang="en-US" sz="3000" dirty="0"/>
+              <a:t>5군 랫드 모델, 4주 가속 + 2주 보정 + 2주 재발</a:t>
+            </a:r>
+            <a:endParaRPr lang="en-US" sz="2800" dirty="0"/>
           </a:p>
         </p:txBody>
       </p:sp>
@@ -4822,12 +4681,12 @@
         </p:nvSpPr>
         <p:spPr>
           <a:xfrm>
-            <a:off x="548640" y="1920240"/>
-            <a:ext cx="3611880" cy="3108960"/>
+            <a:off x="548640" y="1874520"/>
+            <a:ext cx="3611880" cy="3017520"/>
           </a:xfrm>
           <a:prstGeom prst="roundRect">
             <a:avLst>
-              <a:gd name="adj" fmla="val 2941"/>
+              <a:gd name="adj" fmla="val 3030"/>
             </a:avLst>
           </a:prstGeom>
           <a:solidFill>
@@ -4858,8 +4717,8 @@
         </p:nvSpPr>
         <p:spPr>
           <a:xfrm>
-            <a:off x="868680" y="2240280"/>
-            <a:ext cx="2971800" cy="502920"/>
+            <a:off x="822960" y="2148840"/>
+            <a:ext cx="3063240" cy="502920"/>
           </a:xfrm>
           <a:prstGeom prst="roundRect">
             <a:avLst>
@@ -4882,8 +4741,8 @@
         </p:nvSpPr>
         <p:spPr>
           <a:xfrm>
-            <a:off x="868680" y="2240280"/>
-            <a:ext cx="2971800" cy="502920"/>
+            <a:off x="822960" y="2148840"/>
+            <a:ext cx="3063240" cy="502920"/>
           </a:xfrm>
           <a:prstGeom prst="rect">
             <a:avLst/>
@@ -4921,8 +4780,8 @@
         </p:nvSpPr>
         <p:spPr>
           <a:xfrm>
-            <a:off x="822960" y="2926080"/>
-            <a:ext cx="3063240" cy="1920240"/>
+            <a:off x="777240" y="2788920"/>
+            <a:ext cx="3154680" cy="1965960"/>
           </a:xfrm>
           <a:prstGeom prst="rect">
             <a:avLst/>
@@ -4941,7 +4800,7 @@
               <a:buNone/>
             </a:pPr>
             <a:r>
-              <a:rPr lang="en-US" sz="1400" dirty="0">
+              <a:rPr lang="en-US" sz="1300" dirty="0">
                 <a:solidFill>
                   <a:srgbClr val="0B2E33"/>
                 </a:solidFill>
@@ -4949,9 +4808,9 @@
                 <a:ea typeface="Pretendard" pitchFamily="34" charset="-122"/>
                 <a:cs typeface="Pretendard" pitchFamily="34" charset="-120"/>
               </a:rPr>
-              <a:t>전향적, 이중눈가림,</a:t>
-            </a:r>
-            <a:endParaRPr lang="en-US" sz="1400" dirty="0"/>
+              <a:t>무작위배정, 눈가림(2번 저자),</a:t>
+            </a:r>
+            <a:endParaRPr lang="en-US" sz="1300" dirty="0"/>
           </a:p>
           <a:p>
             <a:pPr algn="ctr" indent="0" marL="0">
@@ -4961,7 +4820,7 @@
               <a:buNone/>
             </a:pPr>
             <a:r>
-              <a:rPr lang="en-US" sz="1400" dirty="0">
+              <a:rPr lang="en-US" sz="1300" dirty="0">
                 <a:solidFill>
                   <a:srgbClr val="0B2E33"/>
                 </a:solidFill>
@@ -4969,9 +4828,9 @@
                 <a:ea typeface="Pretendard" pitchFamily="34" charset="-122"/>
                 <a:cs typeface="Pretendard" pitchFamily="34" charset="-120"/>
               </a:rPr>
-              <a:t>병렬군 RCT</a:t>
-            </a:r>
-            <a:endParaRPr lang="en-US" sz="1400" dirty="0"/>
+              <a:t>랫드 105마리 → 5군(군당 21마리)</a:t>
+            </a:r>
+            <a:endParaRPr lang="en-US" sz="1300" dirty="0"/>
           </a:p>
         </p:txBody>
       </p:sp>
@@ -4983,12 +4842,12 @@
         </p:nvSpPr>
         <p:spPr>
           <a:xfrm>
-            <a:off x="4343400" y="1920240"/>
-            <a:ext cx="3611880" cy="3108960"/>
+            <a:off x="4343400" y="1874520"/>
+            <a:ext cx="3611880" cy="3017520"/>
           </a:xfrm>
           <a:prstGeom prst="roundRect">
             <a:avLst>
-              <a:gd name="adj" fmla="val 2941"/>
+              <a:gd name="adj" fmla="val 3030"/>
             </a:avLst>
           </a:prstGeom>
           <a:solidFill>
@@ -5019,8 +4878,8 @@
         </p:nvSpPr>
         <p:spPr>
           <a:xfrm>
-            <a:off x="4663440" y="2240280"/>
-            <a:ext cx="2971800" cy="502920"/>
+            <a:off x="4617720" y="2148840"/>
+            <a:ext cx="3063240" cy="502920"/>
           </a:xfrm>
           <a:prstGeom prst="roundRect">
             <a:avLst>
@@ -5043,8 +4902,8 @@
         </p:nvSpPr>
         <p:spPr>
           <a:xfrm>
-            <a:off x="4663440" y="2240280"/>
-            <a:ext cx="2971800" cy="502920"/>
+            <a:off x="4617720" y="2148840"/>
+            <a:ext cx="3063240" cy="502920"/>
           </a:xfrm>
           <a:prstGeom prst="rect">
             <a:avLst/>
@@ -5068,7 +4927,7 @@
                 <a:ea typeface="Pretendard" pitchFamily="34" charset="-122"/>
                 <a:cs typeface="Pretendard" pitchFamily="34" charset="-120"/>
               </a:rPr>
-              <a:t>대상자 수</a:t>
+              <a:t>군 구성</a:t>
             </a:r>
             <a:endParaRPr lang="en-US" sz="1300" dirty="0"/>
           </a:p>
@@ -5082,8 +4941,8 @@
         </p:nvSpPr>
         <p:spPr>
           <a:xfrm>
-            <a:off x="4617720" y="2926080"/>
-            <a:ext cx="3063240" cy="1920240"/>
+            <a:off x="4572000" y="2788920"/>
+            <a:ext cx="3154680" cy="1965960"/>
           </a:xfrm>
           <a:prstGeom prst="rect">
             <a:avLst/>
@@ -5102,7 +4961,7 @@
               <a:buNone/>
             </a:pPr>
             <a:r>
-              <a:rPr lang="en-US" sz="1400" dirty="0">
+              <a:rPr lang="en-US" sz="1300" dirty="0">
                 <a:solidFill>
                   <a:srgbClr val="0B2E33"/>
                 </a:solidFill>
@@ -5110,9 +4969,9 @@
                 <a:ea typeface="Pretendard" pitchFamily="34" charset="-122"/>
                 <a:cs typeface="Pretendard" pitchFamily="34" charset="-120"/>
               </a:rPr>
-              <a:t>30명 (남14·여16, 평균 20.5±2.4세)</a:t>
-            </a:r>
-            <a:endParaRPr lang="en-US" sz="1400" dirty="0"/>
+              <a:t>I 음성대조(무처치) · II 양성대조(장치만)</a:t>
+            </a:r>
+            <a:endParaRPr lang="en-US" sz="1300" dirty="0"/>
           </a:p>
           <a:p>
             <a:pPr algn="ctr" indent="0" marL="0">
@@ -5122,7 +4981,7 @@
               <a:buNone/>
             </a:pPr>
             <a:r>
-              <a:rPr lang="en-US" sz="1400" dirty="0">
+              <a:rPr lang="en-US" sz="1300" dirty="0">
                 <a:solidFill>
                   <a:srgbClr val="0B2E33"/>
                 </a:solidFill>
@@ -5130,9 +4989,9 @@
                 <a:ea typeface="Pretendard" pitchFamily="34" charset="-122"/>
                 <a:cs typeface="Pretendard" pitchFamily="34" charset="-120"/>
               </a:rPr>
-              <a:t>군당 15명</a:t>
-            </a:r>
-            <a:endParaRPr lang="en-US" sz="1400" dirty="0"/>
+              <a:t>III 코르티코스테로이드 · IV 비타민D · V PGE2</a:t>
+            </a:r>
+            <a:endParaRPr lang="en-US" sz="1300" dirty="0"/>
           </a:p>
         </p:txBody>
       </p:sp>
@@ -5144,12 +5003,12 @@
         </p:nvSpPr>
         <p:spPr>
           <a:xfrm>
-            <a:off x="8138160" y="1920240"/>
-            <a:ext cx="3611880" cy="3108960"/>
+            <a:off x="8138160" y="1874520"/>
+            <a:ext cx="3611880" cy="3017520"/>
           </a:xfrm>
           <a:prstGeom prst="roundRect">
             <a:avLst>
-              <a:gd name="adj" fmla="val 2941"/>
+              <a:gd name="adj" fmla="val 3030"/>
             </a:avLst>
           </a:prstGeom>
           <a:solidFill>
@@ -5180,8 +5039,8 @@
         </p:nvSpPr>
         <p:spPr>
           <a:xfrm>
-            <a:off x="8458200" y="2240280"/>
-            <a:ext cx="2971800" cy="502920"/>
+            <a:off x="8412480" y="2148840"/>
+            <a:ext cx="3063240" cy="502920"/>
           </a:xfrm>
           <a:prstGeom prst="roundRect">
             <a:avLst>
@@ -5204,8 +5063,8 @@
         </p:nvSpPr>
         <p:spPr>
           <a:xfrm>
-            <a:off x="8458200" y="2240280"/>
-            <a:ext cx="2971800" cy="502920"/>
+            <a:off x="8412480" y="2148840"/>
+            <a:ext cx="3063240" cy="502920"/>
           </a:xfrm>
           <a:prstGeom prst="rect">
             <a:avLst/>
@@ -5229,7 +5088,7 @@
                 <a:ea typeface="Pretendard" pitchFamily="34" charset="-122"/>
                 <a:cs typeface="Pretendard" pitchFamily="34" charset="-120"/>
               </a:rPr>
-              <a:t>개입 (무작위 배정)</a:t>
+              <a:t>개입 (점막하 주입)</a:t>
             </a:r>
             <a:endParaRPr lang="en-US" sz="1300" dirty="0"/>
           </a:p>
@@ -5243,8 +5102,8 @@
         </p:nvSpPr>
         <p:spPr>
           <a:xfrm>
-            <a:off x="8412480" y="2926080"/>
-            <a:ext cx="3063240" cy="1920240"/>
+            <a:off x="8366760" y="2788920"/>
+            <a:ext cx="3154680" cy="1965960"/>
           </a:xfrm>
           <a:prstGeom prst="rect">
             <a:avLst/>
@@ -5263,7 +5122,7 @@
               <a:buNone/>
             </a:pPr>
             <a:r>
-              <a:rPr lang="en-US" sz="1400" dirty="0">
+              <a:rPr lang="en-US" sz="1300" dirty="0">
                 <a:solidFill>
                   <a:srgbClr val="0B2E33"/>
                 </a:solidFill>
@@ -5271,9 +5130,9 @@
                 <a:ea typeface="Pretendard" pitchFamily="34" charset="-122"/>
                 <a:cs typeface="Pretendard" pitchFamily="34" charset="-120"/>
               </a:rPr>
-              <a:t>A군: 이부프로펜 400mg</a:t>
-            </a:r>
-            <a:endParaRPr lang="en-US" sz="1400" dirty="0"/>
+              <a:t>III: 코르티코스테로이드 8mg/kg 매일</a:t>
+            </a:r>
+            <a:endParaRPr lang="en-US" sz="1300" dirty="0"/>
           </a:p>
           <a:p>
             <a:pPr algn="ctr" indent="0" marL="0">
@@ -5283,7 +5142,7 @@
               <a:buNone/>
             </a:pPr>
             <a:r>
-              <a:rPr lang="en-US" sz="1400" dirty="0">
+              <a:rPr lang="en-US" sz="1300" dirty="0">
                 <a:solidFill>
                   <a:srgbClr val="0B2E33"/>
                 </a:solidFill>
@@ -5291,9 +5150,9 @@
                 <a:ea typeface="Pretendard" pitchFamily="34" charset="-122"/>
                 <a:cs typeface="Pretendard" pitchFamily="34" charset="-120"/>
               </a:rPr>
-              <a:t>vs</a:t>
-            </a:r>
-            <a:endParaRPr lang="en-US" sz="1400" dirty="0"/>
+              <a:t>IV: 비타민D 10⁻¹⁰mol/L 3일마다</a:t>
+            </a:r>
+            <a:endParaRPr lang="en-US" sz="1300" dirty="0"/>
           </a:p>
           <a:p>
             <a:pPr algn="ctr" indent="0" marL="0">
@@ -5303,7 +5162,7 @@
               <a:buNone/>
             </a:pPr>
             <a:r>
-              <a:rPr lang="en-US" sz="1400" dirty="0">
+              <a:rPr lang="en-US" sz="1300" dirty="0">
                 <a:solidFill>
                   <a:srgbClr val="0B2E33"/>
                 </a:solidFill>
@@ -5311,58 +5170,41 @@
                 <a:ea typeface="Pretendard" pitchFamily="34" charset="-122"/>
                 <a:cs typeface="Pretendard" pitchFamily="34" charset="-120"/>
               </a:rPr>
-              <a:t>B군: 아세트아미노펜 500mg</a:t>
-            </a:r>
-            <a:endParaRPr lang="en-US" sz="1400" dirty="0"/>
-          </a:p>
-          <a:p>
-            <a:pPr algn="ctr" indent="0" marL="0">
+              <a:t>V: PGE2 0.1μg 매주</a:t>
+            </a:r>
+            <a:endParaRPr lang="en-US" sz="1300" dirty="0"/>
+          </a:p>
+        </p:txBody>
+      </p:sp>
+      <p:sp>
+        <p:nvSpPr>
+          <p:cNvPr id="16" name="Text 14"/>
+          <p:cNvSpPr txBox="1"/>
+          <p:nvPr/>
+        </p:nvSpPr>
+        <p:spPr>
+          <a:xfrm>
+            <a:off x="548640" y="5074920"/>
+            <a:ext cx="11064240" cy="777240"/>
+          </a:xfrm>
+          <a:prstGeom prst="rect">
+            <a:avLst/>
+          </a:prstGeom>
+          <a:noFill/>
+          <a:ln/>
+        </p:spPr>
+        <p:txBody>
+          <a:bodyPr wrap="square" lIns="0" tIns="0" rIns="0" bIns="0" rtlCol="0" anchor="ctr"/>
+          <a:lstStyle/>
+          <a:p>
+            <a:pPr indent="0" marL="0">
               <a:lnSpc>
                 <a:spcPct val="130000"/>
               </a:lnSpc>
               <a:buNone/>
             </a:pPr>
             <a:r>
-              <a:rPr lang="en-US" sz="1400" dirty="0">
-                <a:solidFill>
-                  <a:srgbClr val="0B2E33"/>
-                </a:solidFill>
-                <a:latin typeface="Pretendard" pitchFamily="34" charset="0"/>
-                <a:ea typeface="Pretendard" pitchFamily="34" charset="-122"/>
-                <a:cs typeface="Pretendard" pitchFamily="34" charset="-120"/>
-              </a:rPr>
-              <a:t>(8시간마다 1캡슐×3일, 매달×3개월)</a:t>
-            </a:r>
-            <a:endParaRPr lang="en-US" sz="1400" dirty="0"/>
-          </a:p>
-        </p:txBody>
-      </p:sp>
-      <p:sp>
-        <p:nvSpPr>
-          <p:cNvPr id="16" name="Text 14"/>
-          <p:cNvSpPr txBox="1"/>
-          <p:nvPr/>
-        </p:nvSpPr>
-        <p:spPr>
-          <a:xfrm>
-            <a:off x="548640" y="5349240"/>
-            <a:ext cx="11064240" cy="548640"/>
-          </a:xfrm>
-          <a:prstGeom prst="rect">
-            <a:avLst/>
-          </a:prstGeom>
-          <a:noFill/>
-          <a:ln/>
-        </p:spPr>
-        <p:txBody>
-          <a:bodyPr wrap="square" lIns="0" tIns="0" rIns="0" bIns="0" rtlCol="0" anchor="ctr"/>
-          <a:lstStyle/>
-          <a:p>
-            <a:pPr indent="0" marL="0">
-              <a:buNone/>
-            </a:pPr>
-            <a:r>
-              <a:rPr lang="en-US" sz="1350" b="1" dirty="0">
+              <a:rPr lang="en-US" sz="1250" b="1" dirty="0">
                 <a:solidFill>
                   <a:srgbClr val="5B7A7E"/>
                 </a:solidFill>
@@ -5370,15 +5212,54 @@
                 <a:ea typeface="Pretendard" pitchFamily="34" charset="-122"/>
                 <a:cs typeface="Pretendard" pitchFamily="34" charset="-120"/>
               </a:rPr>
-              <a:t>측정변수  임상: 캘리퍼로 측정한 견치-제2소구치 브라켓 간 거리 변화(누적 이동량) · 생화학: GCF PGE2·RANKL(ELISA)</a:t>
-            </a:r>
-            <a:endParaRPr lang="en-US" sz="1350" dirty="0"/>
+              <a:t>장치: 상악 절치 사이에 스테인리스 open-coil loop(25g 힘, tipping 이동) · 측정: 디지털캘리퍼(0.01mm)로 절치 간 거리 · 조직: PDL 폭, ALP·TRAP 염색(조골·파골세포 활성)</a:t>
+            </a:r>
+            <a:endParaRPr lang="en-US" sz="1250" dirty="0"/>
           </a:p>
         </p:txBody>
       </p:sp>
       <p:sp>
         <p:nvSpPr>
           <p:cNvPr id="17" name="Text 15"/>
+          <p:cNvSpPr txBox="1"/>
+          <p:nvPr/>
+        </p:nvSpPr>
+        <p:spPr>
+          <a:xfrm>
+            <a:off x="548640" y="5943600"/>
+            <a:ext cx="11064240" cy="457200"/>
+          </a:xfrm>
+          <a:prstGeom prst="rect">
+            <a:avLst/>
+          </a:prstGeom>
+          <a:noFill/>
+          <a:ln/>
+        </p:spPr>
+        <p:txBody>
+          <a:bodyPr wrap="square" lIns="0" tIns="0" rIns="0" bIns="0" rtlCol="0" anchor="ctr"/>
+          <a:lstStyle/>
+          <a:p>
+            <a:pPr indent="0" marL="0">
+              <a:buNone/>
+            </a:pPr>
+            <a:r>
+              <a:rPr lang="en-US" sz="1250" i="1" dirty="0">
+                <a:solidFill>
+                  <a:srgbClr val="028090"/>
+                </a:solidFill>
+                <a:latin typeface="Pretendard" pitchFamily="34" charset="0"/>
+                <a:ea typeface="Pretendard" pitchFamily="34" charset="-122"/>
+                <a:cs typeface="Pretendard" pitchFamily="34" charset="-120"/>
+              </a:rPr>
+              <a:t>일정: 가속기 4주 → 보정기 2주(장치 재부착, passive) → 재발기 2주(장치 완전 제거)</a:t>
+            </a:r>
+            <a:endParaRPr lang="en-US" sz="1250" dirty="0"/>
+          </a:p>
+        </p:txBody>
+      </p:sp>
+      <p:sp>
+        <p:nvSpPr>
+          <p:cNvPr id="18" name="Text 16"/>
           <p:cNvSpPr txBox="1"/>
           <p:nvPr/>
         </p:nvSpPr>
@@ -5511,7 +5392,7 @@
               <a:buNone/>
             </a:pPr>
             <a:r>
-              <a:rPr lang="en-US" sz="3000" b="1" dirty="0">
+              <a:rPr lang="en-US" sz="2800" b="1" dirty="0">
                 <a:solidFill>
                   <a:srgbClr val="0B2E33"/>
                 </a:solidFill>
@@ -5519,9 +5400,9 @@
                 <a:ea typeface="Wanted Sans" pitchFamily="34" charset="-122"/>
                 <a:cs typeface="Wanted Sans" pitchFamily="34" charset="-120"/>
               </a:rPr>
-              <a:t>치아이동량 비교 (3개월 누적)</a:t>
-            </a:r>
-            <a:endParaRPr lang="en-US" sz="3000" dirty="0"/>
+              <a:t>가속기(4주) — 치아이동량 비교</a:t>
+            </a:r>
+            <a:endParaRPr lang="en-US" sz="2800" dirty="0"/>
           </a:p>
         </p:txBody>
       </p:sp>
@@ -5533,12 +5414,12 @@
         </p:nvSpPr>
         <p:spPr>
           <a:xfrm>
-            <a:off x="822960" y="1783080"/>
-            <a:ext cx="4480560" cy="1920240"/>
+            <a:off x="548640" y="1783080"/>
+            <a:ext cx="3566160" cy="1828800"/>
           </a:xfrm>
           <a:prstGeom prst="roundRect">
             <a:avLst>
-              <a:gd name="adj" fmla="val 5714"/>
+              <a:gd name="adj" fmla="val 6000"/>
             </a:avLst>
           </a:prstGeom>
           <a:solidFill>
@@ -5562,8 +5443,8 @@
         </p:nvSpPr>
         <p:spPr>
           <a:xfrm>
-            <a:off x="822960" y="1965960"/>
-            <a:ext cx="4480560" cy="960120"/>
+            <a:off x="548640" y="1965960"/>
+            <a:ext cx="3566160" cy="914400"/>
           </a:xfrm>
           <a:prstGeom prst="rect">
             <a:avLst/>
@@ -5579,17 +5460,17 @@
               <a:buNone/>
             </a:pPr>
             <a:r>
-              <a:rPr lang="en-US" sz="4000" b="1" dirty="0">
-                <a:solidFill>
-                  <a:srgbClr val="5B7A7E"/>
+              <a:rPr lang="en-US" sz="3000" b="1" dirty="0">
+                <a:solidFill>
+                  <a:srgbClr val="028090"/>
                 </a:solidFill>
                 <a:latin typeface="Wanted Sans" pitchFamily="34" charset="0"/>
                 <a:ea typeface="Wanted Sans" pitchFamily="34" charset="-122"/>
                 <a:cs typeface="Wanted Sans" pitchFamily="34" charset="-120"/>
               </a:rPr>
-              <a:t>2.85 ± 0.32</a:t>
-            </a:r>
-            <a:endParaRPr lang="en-US" sz="4000" dirty="0"/>
+              <a:t>6.22 ± 0.90</a:t>
+            </a:r>
+            <a:endParaRPr lang="en-US" sz="3000" dirty="0"/>
           </a:p>
         </p:txBody>
       </p:sp>
@@ -5601,8 +5482,8 @@
         </p:nvSpPr>
         <p:spPr>
           <a:xfrm>
-            <a:off x="822960" y="3017520"/>
-            <a:ext cx="4480560" cy="548640"/>
+            <a:off x="548640" y="2880360"/>
+            <a:ext cx="3566160" cy="548640"/>
           </a:xfrm>
           <a:prstGeom prst="rect">
             <a:avLst/>
@@ -5618,7 +5499,7 @@
               <a:buNone/>
             </a:pPr>
             <a:r>
-              <a:rPr lang="en-US" sz="1500" b="1" dirty="0">
+              <a:rPr lang="en-US" sz="1350" b="1" dirty="0">
                 <a:solidFill>
                   <a:srgbClr val="0B2E33"/>
                 </a:solidFill>
@@ -5626,9 +5507,9 @@
                 <a:ea typeface="Pretendard" pitchFamily="34" charset="-122"/>
                 <a:cs typeface="Pretendard" pitchFamily="34" charset="-120"/>
               </a:rPr>
-              <a:t>mm · 이부프로펜</a:t>
-            </a:r>
-            <a:endParaRPr lang="en-US" sz="1500" dirty="0"/>
+              <a:t>mm · 코르티코스테로이드</a:t>
+            </a:r>
+            <a:endParaRPr lang="en-US" sz="1350" dirty="0"/>
           </a:p>
         </p:txBody>
       </p:sp>
@@ -5640,12 +5521,12 @@
         </p:nvSpPr>
         <p:spPr>
           <a:xfrm>
-            <a:off x="5669280" y="1783080"/>
-            <a:ext cx="4480560" cy="1920240"/>
+            <a:off x="4297680" y="1783080"/>
+            <a:ext cx="3566160" cy="1828800"/>
           </a:xfrm>
           <a:prstGeom prst="roundRect">
             <a:avLst>
-              <a:gd name="adj" fmla="val 5714"/>
+              <a:gd name="adj" fmla="val 6000"/>
             </a:avLst>
           </a:prstGeom>
           <a:solidFill>
@@ -5669,8 +5550,8 @@
         </p:nvSpPr>
         <p:spPr>
           <a:xfrm>
-            <a:off x="5669280" y="1965960"/>
-            <a:ext cx="4480560" cy="960120"/>
+            <a:off x="4297680" y="1965960"/>
+            <a:ext cx="3566160" cy="914400"/>
           </a:xfrm>
           <a:prstGeom prst="rect">
             <a:avLst/>
@@ -5686,17 +5567,17 @@
               <a:buNone/>
             </a:pPr>
             <a:r>
-              <a:rPr lang="en-US" sz="4000" b="1" dirty="0">
-                <a:solidFill>
-                  <a:srgbClr val="02C39A"/>
+              <a:rPr lang="en-US" sz="3000" b="1" dirty="0">
+                <a:solidFill>
+                  <a:srgbClr val="00A896"/>
                 </a:solidFill>
                 <a:latin typeface="Wanted Sans" pitchFamily="34" charset="0"/>
                 <a:ea typeface="Wanted Sans" pitchFamily="34" charset="-122"/>
                 <a:cs typeface="Wanted Sans" pitchFamily="34" charset="-120"/>
               </a:rPr>
-              <a:t>3.45 ± 0.41</a:t>
-            </a:r>
-            <a:endParaRPr lang="en-US" sz="4000" dirty="0"/>
+              <a:t>3.44 ± 0.04</a:t>
+            </a:r>
+            <a:endParaRPr lang="en-US" sz="3000" dirty="0"/>
           </a:p>
         </p:txBody>
       </p:sp>
@@ -5708,8 +5589,8 @@
         </p:nvSpPr>
         <p:spPr>
           <a:xfrm>
-            <a:off x="5669280" y="3017520"/>
-            <a:ext cx="4480560" cy="548640"/>
+            <a:off x="4297680" y="2880360"/>
+            <a:ext cx="3566160" cy="548640"/>
           </a:xfrm>
           <a:prstGeom prst="rect">
             <a:avLst/>
@@ -5725,7 +5606,7 @@
               <a:buNone/>
             </a:pPr>
             <a:r>
-              <a:rPr lang="en-US" sz="1500" b="1" dirty="0">
+              <a:rPr lang="en-US" sz="1350" b="1" dirty="0">
                 <a:solidFill>
                   <a:srgbClr val="0B2E33"/>
                 </a:solidFill>
@@ -5733,38 +5614,145 @@
                 <a:ea typeface="Pretendard" pitchFamily="34" charset="-122"/>
                 <a:cs typeface="Pretendard" pitchFamily="34" charset="-120"/>
               </a:rPr>
-              <a:t>mm · 아세트아미노펜</a:t>
-            </a:r>
-            <a:endParaRPr lang="en-US" sz="1500" dirty="0"/>
-          </a:p>
-        </p:txBody>
-      </p:sp>
-      <p:sp>
-        <p:nvSpPr>
-          <p:cNvPr id="10" name="Text 8"/>
-          <p:cNvSpPr txBox="1"/>
-          <p:nvPr/>
-        </p:nvSpPr>
-        <p:spPr>
-          <a:xfrm>
-            <a:off x="822960" y="3886200"/>
-            <a:ext cx="10424160" cy="457200"/>
-          </a:xfrm>
-          <a:prstGeom prst="rect">
-            <a:avLst/>
-          </a:prstGeom>
-          <a:noFill/>
-          <a:ln/>
-        </p:spPr>
-        <p:txBody>
-          <a:bodyPr wrap="square" lIns="0" tIns="0" rIns="0" bIns="0" rtlCol="0" anchor="ctr"/>
-          <a:lstStyle/>
-          <a:p>
-            <a:pPr indent="0" marL="0">
-              <a:buNone/>
-            </a:pPr>
-            <a:r>
-              <a:rPr lang="en-US" sz="1400" i="1" dirty="0">
+              <a:t>mm · 비타민D</a:t>
+            </a:r>
+            <a:endParaRPr lang="en-US" sz="1350" dirty="0"/>
+          </a:p>
+        </p:txBody>
+      </p:sp>
+      <p:sp>
+        <p:nvSpPr>
+          <p:cNvPr id="10" name="Shape 8"/>
+          <p:cNvSpPr/>
+          <p:nvPr/>
+        </p:nvSpPr>
+        <p:spPr>
+          <a:xfrm>
+            <a:off x="8046720" y="1783080"/>
+            <a:ext cx="3566160" cy="1828800"/>
+          </a:xfrm>
+          <a:prstGeom prst="roundRect">
+            <a:avLst>
+              <a:gd name="adj" fmla="val 6000"/>
+            </a:avLst>
+          </a:prstGeom>
+          <a:solidFill>
+            <a:srgbClr val="FFFFFF"/>
+          </a:solidFill>
+          <a:ln/>
+          <a:effectLst>
+            <a:outerShdw sx="100000" sy="100000" kx="0" ky="0" algn="bl" rotWithShape="0" blurRad="76200" dist="25400" dir="5400000">
+              <a:srgbClr val="000000">
+                <a:alpha val="12000"/>
+              </a:srgbClr>
+            </a:outerShdw>
+          </a:effectLst>
+        </p:spPr>
+      </p:sp>
+      <p:sp>
+        <p:nvSpPr>
+          <p:cNvPr id="11" name="Text 9"/>
+          <p:cNvSpPr txBox="1"/>
+          <p:nvPr/>
+        </p:nvSpPr>
+        <p:spPr>
+          <a:xfrm>
+            <a:off x="8046720" y="1965960"/>
+            <a:ext cx="3566160" cy="914400"/>
+          </a:xfrm>
+          <a:prstGeom prst="rect">
+            <a:avLst/>
+          </a:prstGeom>
+          <a:noFill/>
+          <a:ln/>
+        </p:spPr>
+        <p:txBody>
+          <a:bodyPr wrap="square" lIns="0" tIns="0" rIns="0" bIns="0" rtlCol="0" anchor="ctr"/>
+          <a:lstStyle/>
+          <a:p>
+            <a:pPr algn="ctr" indent="0" marL="0">
+              <a:buNone/>
+            </a:pPr>
+            <a:r>
+              <a:rPr lang="en-US" sz="3000" b="1" dirty="0">
+                <a:solidFill>
+                  <a:srgbClr val="02C39A"/>
+                </a:solidFill>
+                <a:latin typeface="Wanted Sans" pitchFamily="34" charset="0"/>
+                <a:ea typeface="Wanted Sans" pitchFamily="34" charset="-122"/>
+                <a:cs typeface="Wanted Sans" pitchFamily="34" charset="-120"/>
+              </a:rPr>
+              <a:t>2.54 ± 0.13</a:t>
+            </a:r>
+            <a:endParaRPr lang="en-US" sz="3000" dirty="0"/>
+          </a:p>
+        </p:txBody>
+      </p:sp>
+      <p:sp>
+        <p:nvSpPr>
+          <p:cNvPr id="12" name="Text 10"/>
+          <p:cNvSpPr txBox="1"/>
+          <p:nvPr/>
+        </p:nvSpPr>
+        <p:spPr>
+          <a:xfrm>
+            <a:off x="8046720" y="2880360"/>
+            <a:ext cx="3566160" cy="548640"/>
+          </a:xfrm>
+          <a:prstGeom prst="rect">
+            <a:avLst/>
+          </a:prstGeom>
+          <a:noFill/>
+          <a:ln/>
+        </p:spPr>
+        <p:txBody>
+          <a:bodyPr wrap="square" lIns="0" tIns="0" rIns="0" bIns="0" rtlCol="0" anchor="ctr"/>
+          <a:lstStyle/>
+          <a:p>
+            <a:pPr algn="ctr" indent="0" marL="0">
+              <a:buNone/>
+            </a:pPr>
+            <a:r>
+              <a:rPr lang="en-US" sz="1350" b="1" dirty="0">
+                <a:solidFill>
+                  <a:srgbClr val="0B2E33"/>
+                </a:solidFill>
+                <a:latin typeface="Pretendard" pitchFamily="34" charset="0"/>
+                <a:ea typeface="Pretendard" pitchFamily="34" charset="-122"/>
+                <a:cs typeface="Pretendard" pitchFamily="34" charset="-120"/>
+              </a:rPr>
+              <a:t>mm · PGE2</a:t>
+            </a:r>
+            <a:endParaRPr lang="en-US" sz="1350" dirty="0"/>
+          </a:p>
+        </p:txBody>
+      </p:sp>
+      <p:sp>
+        <p:nvSpPr>
+          <p:cNvPr id="13" name="Text 11"/>
+          <p:cNvSpPr txBox="1"/>
+          <p:nvPr/>
+        </p:nvSpPr>
+        <p:spPr>
+          <a:xfrm>
+            <a:off x="548640" y="3794760"/>
+            <a:ext cx="11064240" cy="502920"/>
+          </a:xfrm>
+          <a:prstGeom prst="rect">
+            <a:avLst/>
+          </a:prstGeom>
+          <a:noFill/>
+          <a:ln/>
+        </p:spPr>
+        <p:txBody>
+          <a:bodyPr wrap="square" lIns="0" tIns="0" rIns="0" bIns="0" rtlCol="0" anchor="ctr"/>
+          <a:lstStyle/>
+          <a:p>
+            <a:pPr indent="0" marL="0">
+              <a:buNone/>
+            </a:pPr>
+            <a:r>
+              <a:rPr lang="en-US" sz="1300" i="1" dirty="0">
                 <a:solidFill>
                   <a:srgbClr val="028090"/>
                 </a:solidFill>
@@ -5772,9 +5760,9 @@
                 <a:ea typeface="Pretendard" pitchFamily="34" charset="-122"/>
                 <a:cs typeface="Pretendard" pitchFamily="34" charset="-120"/>
               </a:rPr>
-              <a:t>→ 이부프로펜군이 3개월 총 이동량 17.4% 적음 (p&lt;0.001) — 1개월차엔 유의차 없었으나(p=0.052), 2개월차부터 유의(p=0.001)해져 누적효과로 나타남</a:t>
-            </a:r>
-            <a:endParaRPr lang="en-US" sz="1400" dirty="0"/>
+              <a:t>→ 대조군(장치만, 1.03±0.11mm) 대비 세 약물 모두 유의하게 가속(p&lt;0.001). 가속 순위: 코르티코스테로이드 &gt; 비타민D &gt; PGE2 — 조직검사(ALP·TRAP)에서도 같은 순서로 파골세포 활성 확인</a:t>
+            </a:r>
+            <a:endParaRPr lang="en-US" sz="1300" dirty="0"/>
           </a:p>
         </p:txBody>
       </p:sp>
@@ -5793,20 +5781,21 @@
           </p:nvPr>
         </p:nvGraphicFramePr>
         <p:xfrm>
-          <a:off x="822960" y="4526280"/>
-          <a:ext cx="10424160" cy="1645920"/>
+          <a:off x="548640" y="4480560"/>
+          <a:ext cx="11064240" cy="1188720"/>
         </p:xfrm>
         <a:graphic>
           <a:graphicData uri="http://schemas.openxmlformats.org/drawingml/2006/table">
             <a:tbl>
               <a:tblPr/>
               <a:tblGrid>
-                <a:gridCol w="2606040"/>
-                <a:gridCol w="2606040"/>
-                <a:gridCol w="2606040"/>
-                <a:gridCol w="2606040"/>
+                <a:gridCol w="2212848"/>
+                <a:gridCol w="2212848"/>
+                <a:gridCol w="2212848"/>
+                <a:gridCol w="2212848"/>
+                <a:gridCol w="2212848"/>
               </a:tblGrid>
-              <a:tr h="411480">
+              <a:tr h="594360">
                 <a:tc>
                   <a:txBody>
                     <a:bodyPr/>
@@ -5816,7 +5805,7 @@
                         <a:buNone/>
                       </a:pPr>
                       <a:r>
-                        <a:rPr lang="en-US" sz="1300" b="1" dirty="0">
+                        <a:rPr lang="en-US" sz="1200" b="1" dirty="0">
                           <a:solidFill>
                             <a:srgbClr val="FFFFFF"/>
                           </a:solidFill>
@@ -5824,9 +5813,9 @@
                           <a:ea typeface="Pretendard" pitchFamily="34" charset="-122"/>
                           <a:cs typeface="Pretendard" pitchFamily="34" charset="-120"/>
                         </a:rPr>
-                        <a:t>시점</a:t>
+                        <a:t>군</a:t>
                       </a:r>
-                      <a:endParaRPr lang="en-US" sz="1300" dirty="0">
+                      <a:endParaRPr lang="en-US" sz="1200" dirty="0">
                         <a:latin typeface="Pretendard" charset="0"/>
                         <a:ea typeface="Pretendard" charset="0"/>
                         <a:cs typeface="Pretendard" charset="0"/>
@@ -5884,7 +5873,7 @@
                         <a:buNone/>
                       </a:pPr>
                       <a:r>
-                        <a:rPr lang="en-US" sz="1300" b="1" dirty="0">
+                        <a:rPr lang="en-US" sz="1200" b="1" dirty="0">
                           <a:solidFill>
                             <a:srgbClr val="FFFFFF"/>
                           </a:solidFill>
@@ -5892,9 +5881,9 @@
                           <a:ea typeface="Pretendard" pitchFamily="34" charset="-122"/>
                           <a:cs typeface="Pretendard" pitchFamily="34" charset="-120"/>
                         </a:rPr>
-                        <a:t>이부프로펜</a:t>
+                        <a:t>양성대조</a:t>
                       </a:r>
-                      <a:endParaRPr lang="en-US" sz="1300" dirty="0">
+                      <a:endParaRPr lang="en-US" sz="1200" dirty="0">
                         <a:latin typeface="Pretendard" charset="0"/>
                         <a:ea typeface="Pretendard" charset="0"/>
                         <a:cs typeface="Pretendard" charset="0"/>
@@ -5952,7 +5941,7 @@
                         <a:buNone/>
                       </a:pPr>
                       <a:r>
-                        <a:rPr lang="en-US" sz="1300" b="1" dirty="0">
+                        <a:rPr lang="en-US" sz="1200" b="1" dirty="0">
                           <a:solidFill>
                             <a:srgbClr val="FFFFFF"/>
                           </a:solidFill>
@@ -5960,9 +5949,9 @@
                           <a:ea typeface="Pretendard" pitchFamily="34" charset="-122"/>
                           <a:cs typeface="Pretendard" pitchFamily="34" charset="-120"/>
                         </a:rPr>
-                        <a:t>아세트아미노펜</a:t>
+                        <a:t>코르티코스테로이드</a:t>
                       </a:r>
-                      <a:endParaRPr lang="en-US" sz="1300" dirty="0">
+                      <a:endParaRPr lang="en-US" sz="1200" dirty="0">
                         <a:latin typeface="Pretendard" charset="0"/>
                         <a:ea typeface="Pretendard" charset="0"/>
                         <a:cs typeface="Pretendard" charset="0"/>
@@ -6020,7 +6009,7 @@
                         <a:buNone/>
                       </a:pPr>
                       <a:r>
-                        <a:rPr lang="en-US" sz="1300" b="1" dirty="0">
+                        <a:rPr lang="en-US" sz="1200" b="1" dirty="0">
                           <a:solidFill>
                             <a:srgbClr val="FFFFFF"/>
                           </a:solidFill>
@@ -6028,9 +6017,77 @@
                           <a:ea typeface="Pretendard" pitchFamily="34" charset="-122"/>
                           <a:cs typeface="Pretendard" pitchFamily="34" charset="-120"/>
                         </a:rPr>
-                        <a:t>p</a:t>
+                        <a:t>비타민D</a:t>
                       </a:r>
-                      <a:endParaRPr lang="en-US" sz="1300" dirty="0">
+                      <a:endParaRPr lang="en-US" sz="1200" dirty="0">
+                        <a:latin typeface="Pretendard" charset="0"/>
+                        <a:ea typeface="Pretendard" charset="0"/>
+                        <a:cs typeface="Pretendard" charset="0"/>
+                      </a:endParaRPr>
+                    </a:p>
+                  </a:txBody>
+                  <a:tcPr marL="91440" marR="91440" marT="45720" marB="45720" anchor="ctr">
+                    <a:lnL w="12700" cap="flat" cmpd="sng" algn="ctr">
+                      <a:solidFill>
+                        <a:srgbClr val="D8E8E6"/>
+                      </a:solidFill>
+                      <a:prstDash val="solid"/>
+                      <a:round/>
+                      <a:headEnd type="none" w="med" len="med"/>
+                      <a:tailEnd type="none" w="med" len="med"/>
+                    </a:lnL>
+                    <a:lnR w="12700" cap="flat" cmpd="sng" algn="ctr">
+                      <a:solidFill>
+                        <a:srgbClr val="D8E8E6"/>
+                      </a:solidFill>
+                      <a:prstDash val="solid"/>
+                      <a:round/>
+                      <a:headEnd type="none" w="med" len="med"/>
+                      <a:tailEnd type="none" w="med" len="med"/>
+                    </a:lnR>
+                    <a:lnT w="12700" cap="flat" cmpd="sng" algn="ctr">
+                      <a:solidFill>
+                        <a:srgbClr val="D8E8E6"/>
+                      </a:solidFill>
+                      <a:prstDash val="solid"/>
+                      <a:round/>
+                      <a:headEnd type="none" w="med" len="med"/>
+                      <a:tailEnd type="none" w="med" len="med"/>
+                    </a:lnT>
+                    <a:lnB w="12700" cap="flat" cmpd="sng" algn="ctr">
+                      <a:solidFill>
+                        <a:srgbClr val="D8E8E6"/>
+                      </a:solidFill>
+                      <a:prstDash val="solid"/>
+                      <a:round/>
+                      <a:headEnd type="none" w="med" len="med"/>
+                      <a:tailEnd type="none" w="med" len="med"/>
+                    </a:lnB>
+                    <a:solidFill>
+                      <a:srgbClr val="028090"/>
+                    </a:solidFill>
+                  </a:tcPr>
+                </a:tc>
+                <a:tc>
+                  <a:txBody>
+                    <a:bodyPr/>
+                    <a:lstStyle/>
+                    <a:p>
+                      <a:pPr algn="ctr" indent="0" marL="0">
+                        <a:buNone/>
+                      </a:pPr>
+                      <a:r>
+                        <a:rPr lang="en-US" sz="1200" b="1" dirty="0">
+                          <a:solidFill>
+                            <a:srgbClr val="FFFFFF"/>
+                          </a:solidFill>
+                          <a:latin typeface="Pretendard" pitchFamily="34" charset="0"/>
+                          <a:ea typeface="Pretendard" pitchFamily="34" charset="-122"/>
+                          <a:cs typeface="Pretendard" pitchFamily="34" charset="-120"/>
+                        </a:rPr>
+                        <a:t>PGE2</a:t>
+                      </a:r>
+                      <a:endParaRPr lang="en-US" sz="1200" dirty="0">
                         <a:latin typeface="Pretendard" charset="0"/>
                         <a:ea typeface="Pretendard" charset="0"/>
                         <a:cs typeface="Pretendard" charset="0"/>
@@ -6080,7 +6137,7 @@
                   </a:tcPr>
                 </a:tc>
               </a:tr>
-              <a:tr h="411480">
+              <a:tr h="594360">
                 <a:tc>
                   <a:txBody>
                     <a:bodyPr/>
@@ -6090,7 +6147,7 @@
                         <a:buNone/>
                       </a:pPr>
                       <a:r>
-                        <a:rPr lang="en-US" sz="1300" dirty="0">
+                        <a:rPr lang="en-US" sz="1200" dirty="0">
                           <a:solidFill>
                             <a:srgbClr val="0B2E33"/>
                           </a:solidFill>
@@ -6098,9 +6155,9 @@
                           <a:ea typeface="Pretendard" pitchFamily="34" charset="-122"/>
                           <a:cs typeface="Pretendard" pitchFamily="34" charset="-120"/>
                         </a:rPr>
-                        <a:t>1개월</a:t>
+                        <a:t>4주 후 이동량 (직후 대비 증가분)</a:t>
                       </a:r>
-                      <a:endParaRPr lang="en-US" sz="1300" dirty="0">
+                      <a:endParaRPr lang="en-US" sz="1200" dirty="0">
                         <a:latin typeface="Pretendard" charset="0"/>
                         <a:ea typeface="Pretendard" charset="0"/>
                         <a:cs typeface="Pretendard" charset="0"/>
@@ -6155,7 +6212,7 @@
                         <a:buNone/>
                       </a:pPr>
                       <a:r>
-                        <a:rPr lang="en-US" sz="1300" dirty="0">
+                        <a:rPr lang="en-US" sz="1200" dirty="0">
                           <a:solidFill>
                             <a:srgbClr val="0B2E33"/>
                           </a:solidFill>
@@ -6163,9 +6220,9 @@
                           <a:ea typeface="Pretendard" pitchFamily="34" charset="-122"/>
                           <a:cs typeface="Pretendard" pitchFamily="34" charset="-120"/>
                         </a:rPr>
-                        <a:t>0.92 ± 0.15 mm</a:t>
+                        <a:t>1.03 ± 0.11 mm</a:t>
                       </a:r>
-                      <a:endParaRPr lang="en-US" sz="1300" dirty="0">
+                      <a:endParaRPr lang="en-US" sz="1200" dirty="0">
                         <a:latin typeface="Pretendard" charset="0"/>
                         <a:ea typeface="Pretendard" charset="0"/>
                         <a:cs typeface="Pretendard" charset="0"/>
@@ -6220,7 +6277,7 @@
                         <a:buNone/>
                       </a:pPr>
                       <a:r>
-                        <a:rPr lang="en-US" sz="1300" dirty="0">
+                        <a:rPr lang="en-US" sz="1200" dirty="0">
                           <a:solidFill>
                             <a:srgbClr val="0B2E33"/>
                           </a:solidFill>
@@ -6228,9 +6285,9 @@
                           <a:ea typeface="Pretendard" pitchFamily="34" charset="-122"/>
                           <a:cs typeface="Pretendard" pitchFamily="34" charset="-120"/>
                         </a:rPr>
-                        <a:t>1.05 ± 0.18 mm</a:t>
+                        <a:t>6.22 ± 0.90 mm</a:t>
                       </a:r>
-                      <a:endParaRPr lang="en-US" sz="1300" dirty="0">
+                      <a:endParaRPr lang="en-US" sz="1200" dirty="0">
                         <a:latin typeface="Pretendard" charset="0"/>
                         <a:ea typeface="Pretendard" charset="0"/>
                         <a:cs typeface="Pretendard" charset="0"/>
@@ -6285,7 +6342,7 @@
                         <a:buNone/>
                       </a:pPr>
                       <a:r>
-                        <a:rPr lang="en-US" sz="1300" dirty="0">
+                        <a:rPr lang="en-US" sz="1200" dirty="0">
                           <a:solidFill>
                             <a:srgbClr val="0B2E33"/>
                           </a:solidFill>
@@ -6293,76 +6350,9 @@
                           <a:ea typeface="Pretendard" pitchFamily="34" charset="-122"/>
                           <a:cs typeface="Pretendard" pitchFamily="34" charset="-120"/>
                         </a:rPr>
-                        <a:t>0.052</a:t>
+                        <a:t>3.44 ± 0.04 mm</a:t>
                       </a:r>
-                      <a:endParaRPr lang="en-US" sz="1300" dirty="0">
-                        <a:latin typeface="Pretendard" charset="0"/>
-                        <a:ea typeface="Pretendard" charset="0"/>
-                        <a:cs typeface="Pretendard" charset="0"/>
-                      </a:endParaRPr>
-                    </a:p>
-                  </a:txBody>
-                  <a:tcPr marL="91440" marR="91440" marT="45720" marB="45720" anchor="ctr">
-                    <a:lnL w="12700" cap="flat" cmpd="sng" algn="ctr">
-                      <a:solidFill>
-                        <a:srgbClr val="D8E8E6"/>
-                      </a:solidFill>
-                      <a:prstDash val="solid"/>
-                      <a:round/>
-                      <a:headEnd type="none" w="med" len="med"/>
-                      <a:tailEnd type="none" w="med" len="med"/>
-                    </a:lnL>
-                    <a:lnR w="12700" cap="flat" cmpd="sng" algn="ctr">
-                      <a:solidFill>
-                        <a:srgbClr val="D8E8E6"/>
-                      </a:solidFill>
-                      <a:prstDash val="solid"/>
-                      <a:round/>
-                      <a:headEnd type="none" w="med" len="med"/>
-                      <a:tailEnd type="none" w="med" len="med"/>
-                    </a:lnR>
-                    <a:lnT w="12700" cap="flat" cmpd="sng" algn="ctr">
-                      <a:solidFill>
-                        <a:srgbClr val="D8E8E6"/>
-                      </a:solidFill>
-                      <a:prstDash val="solid"/>
-                      <a:round/>
-                      <a:headEnd type="none" w="med" len="med"/>
-                      <a:tailEnd type="none" w="med" len="med"/>
-                    </a:lnT>
-                    <a:lnB w="12700" cap="flat" cmpd="sng" algn="ctr">
-                      <a:solidFill>
-                        <a:srgbClr val="D8E8E6"/>
-                      </a:solidFill>
-                      <a:prstDash val="solid"/>
-                      <a:round/>
-                      <a:headEnd type="none" w="med" len="med"/>
-                      <a:tailEnd type="none" w="med" len="med"/>
-                    </a:lnB>
-                  </a:tcPr>
-                </a:tc>
-              </a:tr>
-              <a:tr h="411480">
-                <a:tc>
-                  <a:txBody>
-                    <a:bodyPr/>
-                    <a:lstStyle/>
-                    <a:p>
-                      <a:pPr algn="ctr" indent="0" marL="0">
-                        <a:buNone/>
-                      </a:pPr>
-                      <a:r>
-                        <a:rPr lang="en-US" sz="1300" dirty="0">
-                          <a:solidFill>
-                            <a:srgbClr val="0B2E33"/>
-                          </a:solidFill>
-                          <a:latin typeface="Pretendard" pitchFamily="34" charset="0"/>
-                          <a:ea typeface="Pretendard" pitchFamily="34" charset="-122"/>
-                          <a:cs typeface="Pretendard" pitchFamily="34" charset="-120"/>
-                        </a:rPr>
-                        <a:t>2개월</a:t>
-                      </a:r>
-                      <a:endParaRPr lang="en-US" sz="1300" dirty="0">
+                      <a:endParaRPr lang="en-US" sz="1200" dirty="0">
                         <a:latin typeface="Pretendard" charset="0"/>
                         <a:ea typeface="Pretendard" charset="0"/>
                         <a:cs typeface="Pretendard" charset="0"/>
@@ -6417,7 +6407,7 @@
                         <a:buNone/>
                       </a:pPr>
                       <a:r>
-                        <a:rPr lang="en-US" sz="1300" dirty="0">
+                        <a:rPr lang="en-US" sz="1200" dirty="0">
                           <a:solidFill>
                             <a:srgbClr val="0B2E33"/>
                           </a:solidFill>
@@ -6425,401 +6415,9 @@
                           <a:ea typeface="Pretendard" pitchFamily="34" charset="-122"/>
                           <a:cs typeface="Pretendard" pitchFamily="34" charset="-120"/>
                         </a:rPr>
-                        <a:t>1.84 ± 0.22 mm</a:t>
+                        <a:t>2.54 ± 0.13 mm</a:t>
                       </a:r>
-                      <a:endParaRPr lang="en-US" sz="1300" dirty="0">
-                        <a:latin typeface="Pretendard" charset="0"/>
-                        <a:ea typeface="Pretendard" charset="0"/>
-                        <a:cs typeface="Pretendard" charset="0"/>
-                      </a:endParaRPr>
-                    </a:p>
-                  </a:txBody>
-                  <a:tcPr marL="91440" marR="91440" marT="45720" marB="45720" anchor="ctr">
-                    <a:lnL w="12700" cap="flat" cmpd="sng" algn="ctr">
-                      <a:solidFill>
-                        <a:srgbClr val="D8E8E6"/>
-                      </a:solidFill>
-                      <a:prstDash val="solid"/>
-                      <a:round/>
-                      <a:headEnd type="none" w="med" len="med"/>
-                      <a:tailEnd type="none" w="med" len="med"/>
-                    </a:lnL>
-                    <a:lnR w="12700" cap="flat" cmpd="sng" algn="ctr">
-                      <a:solidFill>
-                        <a:srgbClr val="D8E8E6"/>
-                      </a:solidFill>
-                      <a:prstDash val="solid"/>
-                      <a:round/>
-                      <a:headEnd type="none" w="med" len="med"/>
-                      <a:tailEnd type="none" w="med" len="med"/>
-                    </a:lnR>
-                    <a:lnT w="12700" cap="flat" cmpd="sng" algn="ctr">
-                      <a:solidFill>
-                        <a:srgbClr val="D8E8E6"/>
-                      </a:solidFill>
-                      <a:prstDash val="solid"/>
-                      <a:round/>
-                      <a:headEnd type="none" w="med" len="med"/>
-                      <a:tailEnd type="none" w="med" len="med"/>
-                    </a:lnT>
-                    <a:lnB w="12700" cap="flat" cmpd="sng" algn="ctr">
-                      <a:solidFill>
-                        <a:srgbClr val="D8E8E6"/>
-                      </a:solidFill>
-                      <a:prstDash val="solid"/>
-                      <a:round/>
-                      <a:headEnd type="none" w="med" len="med"/>
-                      <a:tailEnd type="none" w="med" len="med"/>
-                    </a:lnB>
-                  </a:tcPr>
-                </a:tc>
-                <a:tc>
-                  <a:txBody>
-                    <a:bodyPr/>
-                    <a:lstStyle/>
-                    <a:p>
-                      <a:pPr algn="ctr" indent="0" marL="0">
-                        <a:buNone/>
-                      </a:pPr>
-                      <a:r>
-                        <a:rPr lang="en-US" sz="1300" dirty="0">
-                          <a:solidFill>
-                            <a:srgbClr val="0B2E33"/>
-                          </a:solidFill>
-                          <a:latin typeface="Pretendard" pitchFamily="34" charset="0"/>
-                          <a:ea typeface="Pretendard" pitchFamily="34" charset="-122"/>
-                          <a:cs typeface="Pretendard" pitchFamily="34" charset="-120"/>
-                        </a:rPr>
-                        <a:t>2.21 ± 0.29 mm</a:t>
-                      </a:r>
-                      <a:endParaRPr lang="en-US" sz="1300" dirty="0">
-                        <a:latin typeface="Pretendard" charset="0"/>
-                        <a:ea typeface="Pretendard" charset="0"/>
-                        <a:cs typeface="Pretendard" charset="0"/>
-                      </a:endParaRPr>
-                    </a:p>
-                  </a:txBody>
-                  <a:tcPr marL="91440" marR="91440" marT="45720" marB="45720" anchor="ctr">
-                    <a:lnL w="12700" cap="flat" cmpd="sng" algn="ctr">
-                      <a:solidFill>
-                        <a:srgbClr val="D8E8E6"/>
-                      </a:solidFill>
-                      <a:prstDash val="solid"/>
-                      <a:round/>
-                      <a:headEnd type="none" w="med" len="med"/>
-                      <a:tailEnd type="none" w="med" len="med"/>
-                    </a:lnL>
-                    <a:lnR w="12700" cap="flat" cmpd="sng" algn="ctr">
-                      <a:solidFill>
-                        <a:srgbClr val="D8E8E6"/>
-                      </a:solidFill>
-                      <a:prstDash val="solid"/>
-                      <a:round/>
-                      <a:headEnd type="none" w="med" len="med"/>
-                      <a:tailEnd type="none" w="med" len="med"/>
-                    </a:lnR>
-                    <a:lnT w="12700" cap="flat" cmpd="sng" algn="ctr">
-                      <a:solidFill>
-                        <a:srgbClr val="D8E8E6"/>
-                      </a:solidFill>
-                      <a:prstDash val="solid"/>
-                      <a:round/>
-                      <a:headEnd type="none" w="med" len="med"/>
-                      <a:tailEnd type="none" w="med" len="med"/>
-                    </a:lnT>
-                    <a:lnB w="12700" cap="flat" cmpd="sng" algn="ctr">
-                      <a:solidFill>
-                        <a:srgbClr val="D8E8E6"/>
-                      </a:solidFill>
-                      <a:prstDash val="solid"/>
-                      <a:round/>
-                      <a:headEnd type="none" w="med" len="med"/>
-                      <a:tailEnd type="none" w="med" len="med"/>
-                    </a:lnB>
-                  </a:tcPr>
-                </a:tc>
-                <a:tc>
-                  <a:txBody>
-                    <a:bodyPr/>
-                    <a:lstStyle/>
-                    <a:p>
-                      <a:pPr algn="ctr" indent="0" marL="0">
-                        <a:buNone/>
-                      </a:pPr>
-                      <a:r>
-                        <a:rPr lang="en-US" sz="1300" dirty="0">
-                          <a:solidFill>
-                            <a:srgbClr val="0B2E33"/>
-                          </a:solidFill>
-                          <a:latin typeface="Pretendard" pitchFamily="34" charset="0"/>
-                          <a:ea typeface="Pretendard" pitchFamily="34" charset="-122"/>
-                          <a:cs typeface="Pretendard" pitchFamily="34" charset="-120"/>
-                        </a:rPr>
-                        <a:t>0.001*</a:t>
-                      </a:r>
-                      <a:endParaRPr lang="en-US" sz="1300" dirty="0">
-                        <a:latin typeface="Pretendard" charset="0"/>
-                        <a:ea typeface="Pretendard" charset="0"/>
-                        <a:cs typeface="Pretendard" charset="0"/>
-                      </a:endParaRPr>
-                    </a:p>
-                  </a:txBody>
-                  <a:tcPr marL="91440" marR="91440" marT="45720" marB="45720" anchor="ctr">
-                    <a:lnL w="12700" cap="flat" cmpd="sng" algn="ctr">
-                      <a:solidFill>
-                        <a:srgbClr val="D8E8E6"/>
-                      </a:solidFill>
-                      <a:prstDash val="solid"/>
-                      <a:round/>
-                      <a:headEnd type="none" w="med" len="med"/>
-                      <a:tailEnd type="none" w="med" len="med"/>
-                    </a:lnL>
-                    <a:lnR w="12700" cap="flat" cmpd="sng" algn="ctr">
-                      <a:solidFill>
-                        <a:srgbClr val="D8E8E6"/>
-                      </a:solidFill>
-                      <a:prstDash val="solid"/>
-                      <a:round/>
-                      <a:headEnd type="none" w="med" len="med"/>
-                      <a:tailEnd type="none" w="med" len="med"/>
-                    </a:lnR>
-                    <a:lnT w="12700" cap="flat" cmpd="sng" algn="ctr">
-                      <a:solidFill>
-                        <a:srgbClr val="D8E8E6"/>
-                      </a:solidFill>
-                      <a:prstDash val="solid"/>
-                      <a:round/>
-                      <a:headEnd type="none" w="med" len="med"/>
-                      <a:tailEnd type="none" w="med" len="med"/>
-                    </a:lnT>
-                    <a:lnB w="12700" cap="flat" cmpd="sng" algn="ctr">
-                      <a:solidFill>
-                        <a:srgbClr val="D8E8E6"/>
-                      </a:solidFill>
-                      <a:prstDash val="solid"/>
-                      <a:round/>
-                      <a:headEnd type="none" w="med" len="med"/>
-                      <a:tailEnd type="none" w="med" len="med"/>
-                    </a:lnB>
-                  </a:tcPr>
-                </a:tc>
-              </a:tr>
-              <a:tr h="411480">
-                <a:tc>
-                  <a:txBody>
-                    <a:bodyPr/>
-                    <a:lstStyle/>
-                    <a:p>
-                      <a:pPr algn="ctr" indent="0" marL="0">
-                        <a:buNone/>
-                      </a:pPr>
-                      <a:r>
-                        <a:rPr lang="en-US" sz="1300" dirty="0">
-                          <a:solidFill>
-                            <a:srgbClr val="0B2E33"/>
-                          </a:solidFill>
-                          <a:latin typeface="Pretendard" pitchFamily="34" charset="0"/>
-                          <a:ea typeface="Pretendard" pitchFamily="34" charset="-122"/>
-                          <a:cs typeface="Pretendard" pitchFamily="34" charset="-120"/>
-                        </a:rPr>
-                        <a:t>3개월(총)</a:t>
-                      </a:r>
-                      <a:endParaRPr lang="en-US" sz="1300" dirty="0">
-                        <a:latin typeface="Pretendard" charset="0"/>
-                        <a:ea typeface="Pretendard" charset="0"/>
-                        <a:cs typeface="Pretendard" charset="0"/>
-                      </a:endParaRPr>
-                    </a:p>
-                  </a:txBody>
-                  <a:tcPr marL="91440" marR="91440" marT="45720" marB="45720" anchor="ctr">
-                    <a:lnL w="12700" cap="flat" cmpd="sng" algn="ctr">
-                      <a:solidFill>
-                        <a:srgbClr val="D8E8E6"/>
-                      </a:solidFill>
-                      <a:prstDash val="solid"/>
-                      <a:round/>
-                      <a:headEnd type="none" w="med" len="med"/>
-                      <a:tailEnd type="none" w="med" len="med"/>
-                    </a:lnL>
-                    <a:lnR w="12700" cap="flat" cmpd="sng" algn="ctr">
-                      <a:solidFill>
-                        <a:srgbClr val="D8E8E6"/>
-                      </a:solidFill>
-                      <a:prstDash val="solid"/>
-                      <a:round/>
-                      <a:headEnd type="none" w="med" len="med"/>
-                      <a:tailEnd type="none" w="med" len="med"/>
-                    </a:lnR>
-                    <a:lnT w="12700" cap="flat" cmpd="sng" algn="ctr">
-                      <a:solidFill>
-                        <a:srgbClr val="D8E8E6"/>
-                      </a:solidFill>
-                      <a:prstDash val="solid"/>
-                      <a:round/>
-                      <a:headEnd type="none" w="med" len="med"/>
-                      <a:tailEnd type="none" w="med" len="med"/>
-                    </a:lnT>
-                    <a:lnB w="12700" cap="flat" cmpd="sng" algn="ctr">
-                      <a:solidFill>
-                        <a:srgbClr val="D8E8E6"/>
-                      </a:solidFill>
-                      <a:prstDash val="solid"/>
-                      <a:round/>
-                      <a:headEnd type="none" w="med" len="med"/>
-                      <a:tailEnd type="none" w="med" len="med"/>
-                    </a:lnB>
-                  </a:tcPr>
-                </a:tc>
-                <a:tc>
-                  <a:txBody>
-                    <a:bodyPr/>
-                    <a:lstStyle/>
-                    <a:p>
-                      <a:pPr algn="ctr" indent="0" marL="0">
-                        <a:buNone/>
-                      </a:pPr>
-                      <a:r>
-                        <a:rPr lang="en-US" sz="1300" dirty="0">
-                          <a:solidFill>
-                            <a:srgbClr val="0B2E33"/>
-                          </a:solidFill>
-                          <a:latin typeface="Pretendard" pitchFamily="34" charset="0"/>
-                          <a:ea typeface="Pretendard" pitchFamily="34" charset="-122"/>
-                          <a:cs typeface="Pretendard" pitchFamily="34" charset="-120"/>
-                        </a:rPr>
-                        <a:t>2.85 ± 0.32 mm</a:t>
-                      </a:r>
-                      <a:endParaRPr lang="en-US" sz="1300" dirty="0">
-                        <a:latin typeface="Pretendard" charset="0"/>
-                        <a:ea typeface="Pretendard" charset="0"/>
-                        <a:cs typeface="Pretendard" charset="0"/>
-                      </a:endParaRPr>
-                    </a:p>
-                  </a:txBody>
-                  <a:tcPr marL="91440" marR="91440" marT="45720" marB="45720" anchor="ctr">
-                    <a:lnL w="12700" cap="flat" cmpd="sng" algn="ctr">
-                      <a:solidFill>
-                        <a:srgbClr val="D8E8E6"/>
-                      </a:solidFill>
-                      <a:prstDash val="solid"/>
-                      <a:round/>
-                      <a:headEnd type="none" w="med" len="med"/>
-                      <a:tailEnd type="none" w="med" len="med"/>
-                    </a:lnL>
-                    <a:lnR w="12700" cap="flat" cmpd="sng" algn="ctr">
-                      <a:solidFill>
-                        <a:srgbClr val="D8E8E6"/>
-                      </a:solidFill>
-                      <a:prstDash val="solid"/>
-                      <a:round/>
-                      <a:headEnd type="none" w="med" len="med"/>
-                      <a:tailEnd type="none" w="med" len="med"/>
-                    </a:lnR>
-                    <a:lnT w="12700" cap="flat" cmpd="sng" algn="ctr">
-                      <a:solidFill>
-                        <a:srgbClr val="D8E8E6"/>
-                      </a:solidFill>
-                      <a:prstDash val="solid"/>
-                      <a:round/>
-                      <a:headEnd type="none" w="med" len="med"/>
-                      <a:tailEnd type="none" w="med" len="med"/>
-                    </a:lnT>
-                    <a:lnB w="12700" cap="flat" cmpd="sng" algn="ctr">
-                      <a:solidFill>
-                        <a:srgbClr val="D8E8E6"/>
-                      </a:solidFill>
-                      <a:prstDash val="solid"/>
-                      <a:round/>
-                      <a:headEnd type="none" w="med" len="med"/>
-                      <a:tailEnd type="none" w="med" len="med"/>
-                    </a:lnB>
-                  </a:tcPr>
-                </a:tc>
-                <a:tc>
-                  <a:txBody>
-                    <a:bodyPr/>
-                    <a:lstStyle/>
-                    <a:p>
-                      <a:pPr algn="ctr" indent="0" marL="0">
-                        <a:buNone/>
-                      </a:pPr>
-                      <a:r>
-                        <a:rPr lang="en-US" sz="1300" dirty="0">
-                          <a:solidFill>
-                            <a:srgbClr val="0B2E33"/>
-                          </a:solidFill>
-                          <a:latin typeface="Pretendard" pitchFamily="34" charset="0"/>
-                          <a:ea typeface="Pretendard" pitchFamily="34" charset="-122"/>
-                          <a:cs typeface="Pretendard" pitchFamily="34" charset="-120"/>
-                        </a:rPr>
-                        <a:t>3.45 ± 0.41 mm</a:t>
-                      </a:r>
-                      <a:endParaRPr lang="en-US" sz="1300" dirty="0">
-                        <a:latin typeface="Pretendard" charset="0"/>
-                        <a:ea typeface="Pretendard" charset="0"/>
-                        <a:cs typeface="Pretendard" charset="0"/>
-                      </a:endParaRPr>
-                    </a:p>
-                  </a:txBody>
-                  <a:tcPr marL="91440" marR="91440" marT="45720" marB="45720" anchor="ctr">
-                    <a:lnL w="12700" cap="flat" cmpd="sng" algn="ctr">
-                      <a:solidFill>
-                        <a:srgbClr val="D8E8E6"/>
-                      </a:solidFill>
-                      <a:prstDash val="solid"/>
-                      <a:round/>
-                      <a:headEnd type="none" w="med" len="med"/>
-                      <a:tailEnd type="none" w="med" len="med"/>
-                    </a:lnL>
-                    <a:lnR w="12700" cap="flat" cmpd="sng" algn="ctr">
-                      <a:solidFill>
-                        <a:srgbClr val="D8E8E6"/>
-                      </a:solidFill>
-                      <a:prstDash val="solid"/>
-                      <a:round/>
-                      <a:headEnd type="none" w="med" len="med"/>
-                      <a:tailEnd type="none" w="med" len="med"/>
-                    </a:lnR>
-                    <a:lnT w="12700" cap="flat" cmpd="sng" algn="ctr">
-                      <a:solidFill>
-                        <a:srgbClr val="D8E8E6"/>
-                      </a:solidFill>
-                      <a:prstDash val="solid"/>
-                      <a:round/>
-                      <a:headEnd type="none" w="med" len="med"/>
-                      <a:tailEnd type="none" w="med" len="med"/>
-                    </a:lnT>
-                    <a:lnB w="12700" cap="flat" cmpd="sng" algn="ctr">
-                      <a:solidFill>
-                        <a:srgbClr val="D8E8E6"/>
-                      </a:solidFill>
-                      <a:prstDash val="solid"/>
-                      <a:round/>
-                      <a:headEnd type="none" w="med" len="med"/>
-                      <a:tailEnd type="none" w="med" len="med"/>
-                    </a:lnB>
-                  </a:tcPr>
-                </a:tc>
-                <a:tc>
-                  <a:txBody>
-                    <a:bodyPr/>
-                    <a:lstStyle/>
-                    <a:p>
-                      <a:pPr algn="ctr" indent="0" marL="0">
-                        <a:buNone/>
-                      </a:pPr>
-                      <a:r>
-                        <a:rPr lang="en-US" sz="1300" dirty="0">
-                          <a:solidFill>
-                            <a:srgbClr val="0B2E33"/>
-                          </a:solidFill>
-                          <a:latin typeface="Pretendard" pitchFamily="34" charset="0"/>
-                          <a:ea typeface="Pretendard" pitchFamily="34" charset="-122"/>
-                          <a:cs typeface="Pretendard" pitchFamily="34" charset="-120"/>
-                        </a:rPr>
-                        <a:t>0.000*</a:t>
-                      </a:r>
-                      <a:endParaRPr lang="en-US" sz="1300" dirty="0">
+                      <a:endParaRPr lang="en-US" sz="1200" dirty="0">
                         <a:latin typeface="Pretendard" charset="0"/>
                         <a:ea typeface="Pretendard" charset="0"/>
                         <a:cs typeface="Pretendard" charset="0"/>
@@ -6872,7 +6470,46 @@
       </p:graphicFrame>
       <p:sp>
         <p:nvSpPr>
-          <p:cNvPr id="12" name="Text 9"/>
+          <p:cNvPr id="15" name="Text 12"/>
+          <p:cNvSpPr txBox="1"/>
+          <p:nvPr/>
+        </p:nvSpPr>
+        <p:spPr>
+          <a:xfrm>
+            <a:off x="548640" y="5806440"/>
+            <a:ext cx="11064240" cy="365760"/>
+          </a:xfrm>
+          <a:prstGeom prst="rect">
+            <a:avLst/>
+          </a:prstGeom>
+          <a:noFill/>
+          <a:ln/>
+        </p:spPr>
+        <p:txBody>
+          <a:bodyPr wrap="square" lIns="0" tIns="0" rIns="0" bIns="0" rtlCol="0" anchor="ctr"/>
+          <a:lstStyle/>
+          <a:p>
+            <a:pPr indent="0" marL="0">
+              <a:buNone/>
+            </a:pPr>
+            <a:r>
+              <a:rPr lang="en-US" sz="1150" dirty="0">
+                <a:solidFill>
+                  <a:srgbClr val="5B7A7E"/>
+                </a:solidFill>
+                <a:latin typeface="Pretendard" pitchFamily="34" charset="0"/>
+                <a:ea typeface="Pretendard" pitchFamily="34" charset="-122"/>
+                <a:cs typeface="Pretendard" pitchFamily="34" charset="-120"/>
+              </a:rPr>
+              <a:t>모든 군간 비교 p&lt;0.001 (One-way ANOVA + Tukey)</a:t>
+            </a:r>
+            <a:endParaRPr lang="en-US" sz="1150" dirty="0"/>
+          </a:p>
+        </p:txBody>
+      </p:sp>
+      <p:sp>
+        <p:nvSpPr>
+          <p:cNvPr id="16" name="Text 13"/>
           <p:cNvSpPr txBox="1"/>
           <p:nvPr/>
         </p:nvSpPr>
@@ -7005,7 +6642,7 @@
               <a:buNone/>
             </a:pPr>
             <a:r>
-              <a:rPr lang="en-US" sz="3000" b="1" dirty="0">
+              <a:rPr lang="en-US" sz="2800" b="1" dirty="0">
                 <a:solidFill>
                   <a:srgbClr val="0B2E33"/>
                 </a:solidFill>
@@ -7013,9 +6650,9 @@
                 <a:ea typeface="Wanted Sans" pitchFamily="34" charset="-122"/>
                 <a:cs typeface="Wanted Sans" pitchFamily="34" charset="-120"/>
               </a:rPr>
-              <a:t>GCF 바이오마커 (PGE2·RANKL)</a:t>
-            </a:r>
-            <a:endParaRPr lang="en-US" sz="3000" dirty="0"/>
+              <a:t>재발기(2주) — 가속이 컸던 약물이 더 많이 되돌아간다</a:t>
+            </a:r>
+            <a:endParaRPr lang="en-US" sz="2800" dirty="0"/>
           </a:p>
         </p:txBody>
       </p:sp>
@@ -7027,12 +6664,12 @@
         </p:nvSpPr>
         <p:spPr>
           <a:xfrm>
-            <a:off x="548640" y="1920240"/>
-            <a:ext cx="5349240" cy="4023360"/>
+            <a:off x="548640" y="1874520"/>
+            <a:ext cx="5349240" cy="3931920"/>
           </a:xfrm>
           <a:prstGeom prst="roundRect">
             <a:avLst>
-              <a:gd name="adj" fmla="val 2273"/>
+              <a:gd name="adj" fmla="val 2326"/>
             </a:avLst>
           </a:prstGeom>
           <a:solidFill>
@@ -7056,7 +6693,7 @@
         </p:nvSpPr>
         <p:spPr>
           <a:xfrm>
-            <a:off x="868680" y="2148840"/>
+            <a:off x="868680" y="2103120"/>
             <a:ext cx="4754880" cy="457200"/>
           </a:xfrm>
           <a:prstGeom prst="rect">
@@ -7073,7 +6710,7 @@
               <a:buNone/>
             </a:pPr>
             <a:r>
-              <a:rPr lang="en-US" sz="1600" b="1" dirty="0">
+              <a:rPr lang="en-US" sz="1500" b="1" dirty="0">
                 <a:solidFill>
                   <a:srgbClr val="0B2E33"/>
                 </a:solidFill>
@@ -7081,9 +6718,9 @@
                 <a:ea typeface="Wanted Sans" pitchFamily="34" charset="-122"/>
                 <a:cs typeface="Wanted Sans" pitchFamily="34" charset="-120"/>
               </a:rPr>
-              <a:t>GCF 농도 (T1, 염증 최고점)</a:t>
-            </a:r>
-            <a:endParaRPr lang="en-US" sz="1600" dirty="0"/>
+              <a:t>2주 재발 후 이동량 변화 (T0 대비)</a:t>
+            </a:r>
+            <a:endParaRPr lang="en-US" sz="1500" dirty="0"/>
           </a:p>
         </p:txBody>
       </p:sp>
@@ -7095,7 +6732,7 @@
         </p:nvSpPr>
         <p:spPr>
           <a:xfrm>
-            <a:off x="868680" y="2697480"/>
+            <a:off x="868680" y="2651760"/>
             <a:ext cx="4754880" cy="3017520"/>
           </a:xfrm>
           <a:prstGeom prst="rect">
@@ -7110,12 +6747,12 @@
           <a:p>
             <a:pPr indent="0" marL="0">
               <a:lnSpc>
-                <a:spcPct val="135000"/>
+                <a:spcPct val="150000"/>
               </a:lnSpc>
               <a:buNone/>
             </a:pPr>
             <a:r>
-              <a:rPr lang="en-US" sz="1400" b="1" dirty="0">
+              <a:rPr lang="en-US" sz="1350" b="1" dirty="0">
                 <a:solidFill>
                   <a:srgbClr val="028090"/>
                 </a:solidFill>
@@ -7123,17 +6760,51 @@
                 <a:ea typeface="Pretendard" pitchFamily="34" charset="-122"/>
                 <a:cs typeface="Pretendard" pitchFamily="34" charset="-120"/>
               </a:rPr>
-              <a:t>PGE2
+              <a:t>양성대조  </a:t>
+            </a:r>
+            <a:pPr indent="0" marL="0">
+              <a:lnSpc>
+                <a:spcPct val="150000"/>
+              </a:lnSpc>
+              <a:buNone/>
+            </a:pPr>
+            <a:r>
+              <a:rPr lang="en-US" sz="1350" dirty="0">
+                <a:solidFill>
+                  <a:srgbClr val="5B7A7E"/>
+                </a:solidFill>
+                <a:latin typeface="Pretendard" pitchFamily="34" charset="0"/>
+                <a:ea typeface="Pretendard" pitchFamily="34" charset="-122"/>
+                <a:cs typeface="Pretendard" pitchFamily="34" charset="-120"/>
+              </a:rPr>
+              <a:t>-1.09 ± 0.17 mm
 </a:t>
             </a:r>
             <a:pPr indent="0" marL="0">
               <a:lnSpc>
-                <a:spcPct val="135000"/>
+                <a:spcPct val="150000"/>
               </a:lnSpc>
               <a:buNone/>
             </a:pPr>
             <a:r>
-              <a:rPr lang="en-US" sz="1300" dirty="0">
+              <a:rPr lang="en-US" sz="1350" b="1" dirty="0">
+                <a:solidFill>
+                  <a:srgbClr val="028090"/>
+                </a:solidFill>
+                <a:latin typeface="Pretendard" pitchFamily="34" charset="0"/>
+                <a:ea typeface="Pretendard" pitchFamily="34" charset="-122"/>
+                <a:cs typeface="Pretendard" pitchFamily="34" charset="-120"/>
+              </a:rPr>
+              <a:t>코르티코스테로이드  </a:t>
+            </a:r>
+            <a:pPr indent="0" marL="0">
+              <a:lnSpc>
+                <a:spcPct val="150000"/>
+              </a:lnSpc>
+              <a:buNone/>
+            </a:pPr>
+            <a:r>
+              <a:rPr lang="en-US" sz="1350" b="1" dirty="0">
                 <a:solidFill>
                   <a:srgbClr val="5B7A7E"/>
                 </a:solidFill>
@@ -7141,19 +6812,17 @@
                 <a:ea typeface="Pretendard" pitchFamily="34" charset="-122"/>
                 <a:cs typeface="Pretendard" pitchFamily="34" charset="-120"/>
               </a:rPr>
-              <a:t>이부프로펜 145.2±22.1 pg/mL
-아세트아미노펜 210.5±35.4 pg/mL
-p&lt;0.001
+              <a:t>-5.07 ± 0.87 mm  (최대 재발)
 </a:t>
             </a:r>
             <a:pPr indent="0" marL="0">
               <a:lnSpc>
-                <a:spcPct val="135000"/>
+                <a:spcPct val="150000"/>
               </a:lnSpc>
               <a:buNone/>
             </a:pPr>
             <a:r>
-              <a:rPr lang="en-US" sz="1400" b="1" dirty="0">
+              <a:rPr lang="en-US" sz="1350" b="1" dirty="0">
                 <a:solidFill>
                   <a:srgbClr val="028090"/>
                 </a:solidFill>
@@ -7161,17 +6830,51 @@
                 <a:ea typeface="Pretendard" pitchFamily="34" charset="-122"/>
                 <a:cs typeface="Pretendard" pitchFamily="34" charset="-120"/>
               </a:rPr>
-              <a:t>RANKL
+              <a:t>비타민D  </a:t>
+            </a:r>
+            <a:pPr indent="0" marL="0">
+              <a:lnSpc>
+                <a:spcPct val="150000"/>
+              </a:lnSpc>
+              <a:buNone/>
+            </a:pPr>
+            <a:r>
+              <a:rPr lang="en-US" sz="1350" dirty="0">
+                <a:solidFill>
+                  <a:srgbClr val="5B7A7E"/>
+                </a:solidFill>
+                <a:latin typeface="Pretendard" pitchFamily="34" charset="0"/>
+                <a:ea typeface="Pretendard" pitchFamily="34" charset="-122"/>
+                <a:cs typeface="Pretendard" pitchFamily="34" charset="-120"/>
+              </a:rPr>
+              <a:t>-2.75 ± 0.15 mm
 </a:t>
             </a:r>
             <a:pPr indent="0" marL="0">
               <a:lnSpc>
-                <a:spcPct val="135000"/>
+                <a:spcPct val="150000"/>
               </a:lnSpc>
               <a:buNone/>
             </a:pPr>
             <a:r>
-              <a:rPr lang="en-US" sz="1300" dirty="0">
+              <a:rPr lang="en-US" sz="1350" b="1" dirty="0">
+                <a:solidFill>
+                  <a:srgbClr val="028090"/>
+                </a:solidFill>
+                <a:latin typeface="Pretendard" pitchFamily="34" charset="0"/>
+                <a:ea typeface="Pretendard" pitchFamily="34" charset="-122"/>
+                <a:cs typeface="Pretendard" pitchFamily="34" charset="-120"/>
+              </a:rPr>
+              <a:t>PGE2  </a:t>
+            </a:r>
+            <a:pPr indent="0" marL="0">
+              <a:lnSpc>
+                <a:spcPct val="150000"/>
+              </a:lnSpc>
+              <a:buNone/>
+            </a:pPr>
+            <a:r>
+              <a:rPr lang="en-US" sz="1350" b="1" dirty="0">
                 <a:solidFill>
                   <a:srgbClr val="5B7A7E"/>
                 </a:solidFill>
@@ -7179,49 +6882,9 @@
                 <a:ea typeface="Pretendard" pitchFamily="34" charset="-122"/>
                 <a:cs typeface="Pretendard" pitchFamily="34" charset="-120"/>
               </a:rPr>
-              <a:t>이부프로펜 58.4±12.3 pg/mL</a:t>
-            </a:r>
-            <a:endParaRPr lang="en-US" sz="1400" dirty="0"/>
-          </a:p>
-          <a:p>
-            <a:pPr indent="0" marL="0">
-              <a:lnSpc>
-                <a:spcPct val="135000"/>
-              </a:lnSpc>
-              <a:buNone/>
-            </a:pPr>
-            <a:r>
-              <a:rPr lang="en-US" sz="1300" dirty="0">
-                <a:solidFill>
-                  <a:srgbClr val="5B7A7E"/>
-                </a:solidFill>
-                <a:latin typeface="Pretendard" pitchFamily="34" charset="0"/>
-                <a:ea typeface="Pretendard" pitchFamily="34" charset="-122"/>
-                <a:cs typeface="Pretendard" pitchFamily="34" charset="-120"/>
-              </a:rPr>
-              <a:t>아세트아미노펜 89.7±15.6 pg/mL</a:t>
-            </a:r>
-            <a:endParaRPr lang="en-US" sz="1400" dirty="0"/>
-          </a:p>
-          <a:p>
-            <a:pPr indent="0" marL="0">
-              <a:lnSpc>
-                <a:spcPct val="135000"/>
-              </a:lnSpc>
-              <a:buNone/>
-            </a:pPr>
-            <a:r>
-              <a:rPr lang="en-US" sz="1300" dirty="0">
-                <a:solidFill>
-                  <a:srgbClr val="5B7A7E"/>
-                </a:solidFill>
-                <a:latin typeface="Pretendard" pitchFamily="34" charset="0"/>
-                <a:ea typeface="Pretendard" pitchFamily="34" charset="-122"/>
-                <a:cs typeface="Pretendard" pitchFamily="34" charset="-120"/>
-              </a:rPr>
-              <a:t>p&lt;0.001</a:t>
-            </a:r>
-            <a:endParaRPr lang="en-US" sz="1400" dirty="0"/>
+              <a:t>-0.86 ± 0.23 mm  (최소 재발)</a:t>
+            </a:r>
+            <a:endParaRPr lang="en-US" sz="1350" dirty="0"/>
           </a:p>
         </p:txBody>
       </p:sp>
@@ -7233,12 +6896,12 @@
         </p:nvSpPr>
         <p:spPr>
           <a:xfrm>
-            <a:off x="6263640" y="1920240"/>
-            <a:ext cx="5349240" cy="4023360"/>
+            <a:off x="6263640" y="1874520"/>
+            <a:ext cx="5349240" cy="3931920"/>
           </a:xfrm>
           <a:prstGeom prst="roundRect">
             <a:avLst>
-              <a:gd name="adj" fmla="val 2273"/>
+              <a:gd name="adj" fmla="val 2326"/>
             </a:avLst>
           </a:prstGeom>
           <a:solidFill>
@@ -7255,7 +6918,7 @@
         </p:nvSpPr>
         <p:spPr>
           <a:xfrm>
-            <a:off x="6583680" y="2148840"/>
+            <a:off x="6583680" y="2103120"/>
             <a:ext cx="4754880" cy="457200"/>
           </a:xfrm>
           <a:prstGeom prst="rect">
@@ -7272,7 +6935,7 @@
               <a:buNone/>
             </a:pPr>
             <a:r>
-              <a:rPr lang="en-US" sz="1600" b="1" dirty="0">
+              <a:rPr lang="en-US" sz="1500" b="1" dirty="0">
                 <a:solidFill>
                   <a:srgbClr val="02C39A"/>
                 </a:solidFill>
@@ -7280,9 +6943,9 @@
                 <a:ea typeface="Wanted Sans" pitchFamily="34" charset="-122"/>
                 <a:cs typeface="Wanted Sans" pitchFamily="34" charset="-120"/>
               </a:rPr>
-              <a:t>기전적 해석</a:t>
-            </a:r>
-            <a:endParaRPr lang="en-US" sz="1600" dirty="0"/>
+              <a:t>조직학적 소견</a:t>
+            </a:r>
+            <a:endParaRPr lang="en-US" sz="1500" dirty="0"/>
           </a:p>
         </p:txBody>
       </p:sp>
@@ -7294,7 +6957,7 @@
         </p:nvSpPr>
         <p:spPr>
           <a:xfrm>
-            <a:off x="6583680" y="2697480"/>
+            <a:off x="6583680" y="2651760"/>
             <a:ext cx="4754880" cy="3017520"/>
           </a:xfrm>
           <a:prstGeom prst="rect">
@@ -7314,7 +6977,7 @@
               <a:buNone/>
             </a:pPr>
             <a:r>
-              <a:rPr lang="en-US" sz="1400" dirty="0">
+              <a:rPr lang="en-US" sz="1350" dirty="0">
                 <a:solidFill>
                   <a:srgbClr val="FFFFFF"/>
                 </a:solidFill>
@@ -7322,7 +6985,7 @@
                 <a:ea typeface="Pretendard" pitchFamily="34" charset="-122"/>
                 <a:cs typeface="Pretendard" pitchFamily="34" charset="-120"/>
               </a:rPr>
-              <a:t>이부프로펜이 </a:t>
+              <a:t>치주인대(PDL) 폭이 </a:t>
             </a:r>
             <a:pPr indent="0" marL="0">
               <a:lnSpc>
@@ -7331,7 +6994,7 @@
               <a:buNone/>
             </a:pPr>
             <a:r>
-              <a:rPr lang="en-US" sz="1400" b="1" dirty="0">
+              <a:rPr lang="en-US" sz="1350" b="1" dirty="0">
                 <a:solidFill>
                   <a:srgbClr val="02C39A"/>
                 </a:solidFill>
@@ -7339,7 +7002,7 @@
                 <a:ea typeface="Pretendard" pitchFamily="34" charset="-122"/>
                 <a:cs typeface="Pretendard" pitchFamily="34" charset="-120"/>
               </a:rPr>
-              <a:t>PGE2·RANKL 모두 유의하게 낮춤</a:t>
+              <a:t>코르티코스테로이드군에서 가장 넓게 유지</a:t>
             </a:r>
             <a:pPr indent="0" marL="0">
               <a:lnSpc>
@@ -7348,7 +7011,7 @@
               <a:buNone/>
             </a:pPr>
             <a:r>
-              <a:rPr lang="en-US" sz="1400" dirty="0">
+              <a:rPr lang="en-US" sz="1350" dirty="0">
                 <a:solidFill>
                   <a:srgbClr val="FFFFFF"/>
                 </a:solidFill>
@@ -7356,43 +7019,9 @@
                 <a:ea typeface="Pretendard" pitchFamily="34" charset="-122"/>
                 <a:cs typeface="Pretendard" pitchFamily="34" charset="-120"/>
               </a:rPr>
-              <a:t> → 파골세포 활성 신호(RANKL/OPG 비율)가 골흡수보다 </a:t>
-            </a:r>
-            <a:pPr indent="0" marL="0">
-              <a:lnSpc>
-                <a:spcPct val="145000"/>
-              </a:lnSpc>
-              <a:buNone/>
-            </a:pPr>
-            <a:r>
-              <a:rPr lang="en-US" sz="1400" b="1" dirty="0">
-                <a:solidFill>
-                  <a:srgbClr val="02C39A"/>
-                </a:solidFill>
-                <a:latin typeface="Pretendard" pitchFamily="34" charset="0"/>
-                <a:ea typeface="Pretendard" pitchFamily="34" charset="-122"/>
-                <a:cs typeface="Pretendard" pitchFamily="34" charset="-120"/>
-              </a:rPr>
-              <a:t>골밀도 유지 쪽으로 이동</a:t>
-            </a:r>
-            <a:pPr indent="0" marL="0">
-              <a:lnSpc>
-                <a:spcPct val="145000"/>
-              </a:lnSpc>
-              <a:buNone/>
-            </a:pPr>
-            <a:r>
-              <a:rPr lang="en-US" sz="1400" dirty="0">
-                <a:solidFill>
-                  <a:srgbClr val="FFFFFF"/>
-                </a:solidFill>
-                <a:latin typeface="Pretendard" pitchFamily="34" charset="0"/>
-                <a:ea typeface="Pretendard" pitchFamily="34" charset="-122"/>
-                <a:cs typeface="Pretendard" pitchFamily="34" charset="-120"/>
-              </a:rPr>
-              <a:t> → 결과①의 이동량 감소와 기전적으로 정합.</a:t>
-            </a:r>
-            <a:endParaRPr lang="en-US" sz="1400" dirty="0"/>
+              <a:t>(압박·긴장측 모두) — 대조군이 가장 좁음, 비타민D·PGE2군은 중간 수준. 임상측정 결과와 조직 소견이 서로를 뒷받침.</a:t>
+            </a:r>
+            <a:endParaRPr lang="en-US" sz="1350" dirty="0"/>
           </a:p>
         </p:txBody>
       </p:sp>
@@ -7531,7 +7160,7 @@
               <a:buNone/>
             </a:pPr>
             <a:r>
-              <a:rPr lang="en-US" sz="3000" b="1" dirty="0">
+              <a:rPr lang="en-US" sz="2800" b="1" dirty="0">
                 <a:solidFill>
                   <a:srgbClr val="0B2E33"/>
                 </a:solidFill>
@@ -7541,7 +7170,7 @@
               </a:rPr>
               <a:t>비평적 고찰 (본인 의견 작성)</a:t>
             </a:r>
-            <a:endParaRPr lang="en-US" sz="3000" dirty="0"/>
+            <a:endParaRPr lang="en-US" sz="2800" dirty="0"/>
           </a:p>
         </p:txBody>
       </p:sp>
@@ -7634,12 +7263,12 @@
           <a:p>
             <a:pPr indent="0" marL="0">
               <a:lnSpc>
-                <a:spcPct val="135000"/>
+                <a:spcPct val="130000"/>
               </a:lnSpc>
               <a:buNone/>
             </a:pPr>
             <a:r>
-              <a:rPr lang="en-US" sz="1150" dirty="0">
+              <a:rPr lang="en-US" sz="1100" dirty="0">
                 <a:solidFill>
                   <a:srgbClr val="0B2E33"/>
                 </a:solidFill>
@@ -7647,19 +7276,19 @@
                 <a:ea typeface="Pretendard" pitchFamily="34" charset="-122"/>
                 <a:cs typeface="Pretendard" pitchFamily="34" charset="-120"/>
               </a:rPr>
-              <a:t>· 임상지표(이동량)+생화학지표(PGE2·RANKL) 이중 검증으로 기전-결과 인과 뒷받침</a:t>
-            </a:r>
-            <a:endParaRPr lang="en-US" sz="1150" dirty="0"/>
+              <a:t>· 가속기+보정기+재발기를 모두 추적한 최초의 3약물 비교 — 선행연구 공백을 직접 채움</a:t>
+            </a:r>
+            <a:endParaRPr lang="en-US" sz="1100" dirty="0"/>
           </a:p>
           <a:p>
             <a:pPr indent="0" marL="0">
               <a:lnSpc>
-                <a:spcPct val="135000"/>
+                <a:spcPct val="130000"/>
               </a:lnSpc>
               <a:buNone/>
             </a:pPr>
             <a:r>
-              <a:rPr lang="en-US" sz="1150" dirty="0">
+              <a:rPr lang="en-US" sz="1100" dirty="0">
                 <a:solidFill>
                   <a:srgbClr val="0B2E33"/>
                 </a:solidFill>
@@ -7667,19 +7296,19 @@
                 <a:ea typeface="Pretendard" pitchFamily="34" charset="-122"/>
                 <a:cs typeface="Pretendard" pitchFamily="34" charset="-120"/>
               </a:rPr>
-              <a:t>· 무작위배정+이중눈가림, 기저 동질성 확보(연령 p=0.36, 성비 p=1.00)</a:t>
-            </a:r>
-            <a:endParaRPr lang="en-US" sz="1150" dirty="0"/>
+              <a:t>· 임상측정(캘리퍼)+조직학(PDL폭, ALP/TRAP)으로 이중 검증</a:t>
+            </a:r>
+            <a:endParaRPr lang="en-US" sz="1100" dirty="0"/>
           </a:p>
           <a:p>
             <a:pPr indent="0" marL="0">
               <a:lnSpc>
-                <a:spcPct val="135000"/>
+                <a:spcPct val="130000"/>
               </a:lnSpc>
               <a:buNone/>
             </a:pPr>
             <a:r>
-              <a:rPr lang="en-US" sz="1150" dirty="0">
+              <a:rPr lang="en-US" sz="1100" dirty="0">
                 <a:solidFill>
                   <a:srgbClr val="0B2E33"/>
                 </a:solidFill>
@@ -7687,19 +7316,19 @@
                 <a:ea typeface="Pretendard" pitchFamily="34" charset="-122"/>
                 <a:cs typeface="Pretendard" pitchFamily="34" charset="-120"/>
               </a:rPr>
-              <a:t>· 선행연구(Shetty 2013)를 RANKL 지표+3개월 종단설계로 확장</a:t>
-            </a:r>
-            <a:endParaRPr lang="en-US" sz="1150" dirty="0"/>
+              <a:t>· ARRIVE 가이드라인 준수, 윤리위 승인, 눈가림 배정</a:t>
+            </a:r>
+            <a:endParaRPr lang="en-US" sz="1100" dirty="0"/>
           </a:p>
           <a:p>
             <a:pPr indent="0" marL="0">
               <a:lnSpc>
-                <a:spcPct val="135000"/>
+                <a:spcPct val="130000"/>
               </a:lnSpc>
               <a:buNone/>
             </a:pPr>
             <a:r>
-              <a:rPr lang="en-US" sz="1150" dirty="0">
+              <a:rPr lang="en-US" sz="1100" dirty="0">
                 <a:solidFill>
                   <a:srgbClr val="0B2E33"/>
                 </a:solidFill>
@@ -7707,9 +7336,9 @@
                 <a:ea typeface="Pretendard" pitchFamily="34" charset="-122"/>
                 <a:cs typeface="Pretendard" pitchFamily="34" charset="-120"/>
               </a:rPr>
-              <a:t>· 재정지원·이해상충 없음(Nil) — 제약회사 개입 우려 낮음</a:t>
-            </a:r>
-            <a:endParaRPr lang="en-US" sz="1150" dirty="0"/>
+              <a:t>· 공공연구비(만수라대) 지원, 이해상충 없음</a:t>
+            </a:r>
+            <a:endParaRPr lang="en-US" sz="1100" dirty="0"/>
           </a:p>
         </p:txBody>
       </p:sp>
@@ -7891,12 +7520,12 @@
           <a:p>
             <a:pPr indent="0" marL="0">
               <a:lnSpc>
-                <a:spcPct val="135000"/>
+                <a:spcPct val="130000"/>
               </a:lnSpc>
               <a:buNone/>
             </a:pPr>
             <a:r>
-              <a:rPr lang="en-US" sz="1150" dirty="0">
+              <a:rPr lang="en-US" sz="1100" dirty="0">
                 <a:solidFill>
                   <a:srgbClr val="0B2E33"/>
                 </a:solidFill>
@@ -7904,19 +7533,19 @@
                 <a:ea typeface="Pretendard" pitchFamily="34" charset="-122"/>
                 <a:cs typeface="Pretendard" pitchFamily="34" charset="-120"/>
               </a:rPr>
-              <a:t>· 군당 15명으로 표본이 작아 검정력 우려</a:t>
-            </a:r>
-            <a:endParaRPr lang="en-US" sz="1150" dirty="0"/>
+              <a:t>· 동물(랫드)실험 — 종간 차이로 사람에 그대로 적용 어려움(저자도 인정)</a:t>
+            </a:r>
+            <a:endParaRPr lang="en-US" sz="1100" dirty="0"/>
           </a:p>
           <a:p>
             <a:pPr indent="0" marL="0">
               <a:lnSpc>
-                <a:spcPct val="135000"/>
+                <a:spcPct val="130000"/>
               </a:lnSpc>
               <a:buNone/>
             </a:pPr>
             <a:r>
-              <a:rPr lang="en-US" sz="1150" dirty="0">
+              <a:rPr lang="en-US" sz="1100" dirty="0">
                 <a:solidFill>
                   <a:srgbClr val="0B2E33"/>
                 </a:solidFill>
@@ -7924,19 +7553,19 @@
                 <a:ea typeface="Pretendard" pitchFamily="34" charset="-122"/>
                 <a:cs typeface="Pretendard" pitchFamily="34" charset="-120"/>
               </a:rPr>
-              <a:t>· 진통제는 월 3일만 복용 통제 — 나머지 기간 자가복용(비처방 진통제) 여부 통제 불명</a:t>
-            </a:r>
-            <a:endParaRPr lang="en-US" sz="1150" dirty="0"/>
+              <a:t>· 수컷만 사용 — 호르몬 변동은 배제했지만 여성 적용 가능성은 미확인</a:t>
+            </a:r>
+            <a:endParaRPr lang="en-US" sz="1100" dirty="0"/>
           </a:p>
           <a:p>
             <a:pPr indent="0" marL="0">
               <a:lnSpc>
-                <a:spcPct val="135000"/>
+                <a:spcPct val="130000"/>
               </a:lnSpc>
               <a:buNone/>
             </a:pPr>
             <a:r>
-              <a:rPr lang="en-US" sz="1150" dirty="0">
+              <a:rPr lang="en-US" sz="1100" dirty="0">
                 <a:solidFill>
                   <a:srgbClr val="0B2E33"/>
                 </a:solidFill>
@@ -7944,19 +7573,19 @@
                 <a:ea typeface="Pretendard" pitchFamily="34" charset="-122"/>
                 <a:cs typeface="Pretendard" pitchFamily="34" charset="-120"/>
               </a:rPr>
-              <a:t>· 단일기관·단일 인종군 대상 — 일반화 제한</a:t>
-            </a:r>
-            <a:endParaRPr lang="en-US" sz="1150" dirty="0"/>
+              <a:t>· 약물당 용량 1개만 테스트 — 용량-반응 관계 분석 불가</a:t>
+            </a:r>
+            <a:endParaRPr lang="en-US" sz="1100" dirty="0"/>
           </a:p>
           <a:p>
             <a:pPr indent="0" marL="0">
               <a:lnSpc>
-                <a:spcPct val="135000"/>
+                <a:spcPct val="130000"/>
               </a:lnSpc>
               <a:buNone/>
             </a:pPr>
             <a:r>
-              <a:rPr lang="en-US" sz="1150" dirty="0">
+              <a:rPr lang="en-US" sz="1100" dirty="0">
                 <a:solidFill>
                   <a:srgbClr val="0B2E33"/>
                 </a:solidFill>
@@ -7964,9 +7593,9 @@
                 <a:ea typeface="Pretendard" pitchFamily="34" charset="-122"/>
                 <a:cs typeface="Pretendard" pitchFamily="34" charset="-120"/>
               </a:rPr>
-              <a:t>· GCF는 T1(1개월차) 1회만 측정 — 2·3개월차 생화학 변화는 추적 안 됨</a:t>
-            </a:r>
-            <a:endParaRPr lang="en-US" sz="1150" dirty="0"/>
+              <a:t>· 코르티코스테로이드 결과가 일부 선행연구와 정반대 — 재현성 논쟁 여지</a:t>
+            </a:r>
+            <a:endParaRPr lang="en-US" sz="1100" dirty="0"/>
           </a:p>
         </p:txBody>
       </p:sp>
@@ -8148,12 +7777,12 @@
           <a:p>
             <a:pPr indent="0" marL="0">
               <a:lnSpc>
-                <a:spcPct val="135000"/>
+                <a:spcPct val="130000"/>
               </a:lnSpc>
               <a:buNone/>
             </a:pPr>
             <a:r>
-              <a:rPr lang="en-US" sz="1150" dirty="0">
+              <a:rPr lang="en-US" sz="1100" dirty="0">
                 <a:solidFill>
                   <a:srgbClr val="0B2E33"/>
                 </a:solidFill>
@@ -8161,19 +7790,19 @@
                 <a:ea typeface="Pretendard" pitchFamily="34" charset="-122"/>
                 <a:cs typeface="Pretendard" pitchFamily="34" charset="-120"/>
               </a:rPr>
-              <a:t>· 국내 교정 임상에도 적용 가능(동일 기전, 약물 둘 다 국내 상용)</a:t>
-            </a:r>
-            <a:endParaRPr lang="en-US" sz="1150" dirty="0"/>
+              <a:t>· 코르티코스테로이드는 가속 효과 크지만 재발 위험도 가장 큼 — 신중한 임상 판단 필요</a:t>
+            </a:r>
+            <a:endParaRPr lang="en-US" sz="1100" dirty="0"/>
           </a:p>
           <a:p>
             <a:pPr indent="0" marL="0">
               <a:lnSpc>
-                <a:spcPct val="135000"/>
+                <a:spcPct val="130000"/>
               </a:lnSpc>
               <a:buNone/>
             </a:pPr>
             <a:r>
-              <a:rPr lang="en-US" sz="1150" dirty="0">
+              <a:rPr lang="en-US" sz="1100" dirty="0">
                 <a:solidFill>
                   <a:srgbClr val="0B2E33"/>
                 </a:solidFill>
@@ -8181,19 +7810,19 @@
                 <a:ea typeface="Pretendard" pitchFamily="34" charset="-122"/>
                 <a:cs typeface="Pretendard" pitchFamily="34" charset="-120"/>
               </a:rPr>
-              <a:t>· 다만 국내 환자 대상 재현 데이터는 부재</a:t>
-            </a:r>
-            <a:endParaRPr lang="en-US" sz="1150" dirty="0"/>
+              <a:t>· 비타민D·PGE2는 가속은 온건해도 재발이 적어 상대적으로 안전한 보조제일 수 있음</a:t>
+            </a:r>
+            <a:endParaRPr lang="en-US" sz="1100" dirty="0"/>
           </a:p>
           <a:p>
             <a:pPr indent="0" marL="0">
               <a:lnSpc>
-                <a:spcPct val="135000"/>
+                <a:spcPct val="130000"/>
               </a:lnSpc>
               <a:buNone/>
             </a:pPr>
             <a:r>
-              <a:rPr lang="en-US" sz="1150" dirty="0">
+              <a:rPr lang="en-US" sz="1100" dirty="0">
                 <a:solidFill>
                   <a:srgbClr val="0B2E33"/>
                 </a:solidFill>
@@ -8201,19 +7830,19 @@
                 <a:ea typeface="Pretendard" pitchFamily="34" charset="-122"/>
                 <a:cs typeface="Pretendard" pitchFamily="34" charset="-120"/>
               </a:rPr>
-              <a:t>· 17.4%라는 이동량 차이가 실제 총 치료기간에 임상적으로</a:t>
-            </a:r>
-            <a:endParaRPr lang="en-US" sz="1150" dirty="0"/>
+              <a:t>· PGE2는 고용량 시 치근흡수 위험 보고 있음(타 문헌) — 안전성-효능 균형 필요</a:t>
+            </a:r>
+            <a:endParaRPr lang="en-US" sz="1100" dirty="0"/>
           </a:p>
           <a:p>
             <a:pPr indent="0" marL="0">
               <a:lnSpc>
-                <a:spcPct val="135000"/>
+                <a:spcPct val="130000"/>
               </a:lnSpc>
               <a:buNone/>
             </a:pPr>
             <a:r>
-              <a:rPr lang="en-US" sz="1150" dirty="0">
+              <a:rPr lang="en-US" sz="1100" dirty="0">
                 <a:solidFill>
                   <a:srgbClr val="0B2E33"/>
                 </a:solidFill>
@@ -8221,9 +7850,9 @@
                 <a:ea typeface="Pretendard" pitchFamily="34" charset="-122"/>
                 <a:cs typeface="Pretendard" pitchFamily="34" charset="-120"/>
               </a:rPr>
-              <a:t>  체감될 정도인지는 별도 검증 필요 — 통계적 유의성 ≠ 임상적 유의성</a:t>
-            </a:r>
-            <a:endParaRPr lang="en-US" sz="1150" dirty="0"/>
+              <a:t>  → 사람 대상 임상시험으로의 확장이 다음 단계</a:t>
+            </a:r>
+            <a:endParaRPr lang="en-US" sz="1100" dirty="0"/>
           </a:p>
         </p:txBody>
       </p:sp>

--- a/치과약리학실험2-논문발표/치과약리학실험2_논문발표.pptx
+++ b/치과약리학실험2-논문발표/치과약리학실험2_논문발표.pptx
@@ -16,9 +16,10 @@
     <p:sldId id="264" r:id="rId10"/>
     <p:sldId id="265" r:id="rId11"/>
     <p:sldId id="266" r:id="rId12"/>
+    <p:sldId id="267" r:id="rId13"/>
   </p:sldIdLst>
   <p:notesMasterIdLst>
-    <p:notesMasterId r:id="rId13"/>
+    <p:notesMasterId r:id="rId14"/>
   </p:notesMasterIdLst>
   <p:sldSz cx="12192000" cy="6858000"/>
   <p:notesSz cx="6858000" cy="12192000"/>
@@ -716,6 +717,94 @@
             <a:fld id="{F7021451-1387-4CA6-816F-3879F97B5CBC}" type="slidenum">
               <a:rPr lang="en-US"/>
               <a:t>11</a:t>
+            </a:fld>
+            <a:endParaRPr lang="en-US"/>
+          </a:p>
+        </p:txBody>
+      </p:sp>
+    </p:spTree>
+    <p:extLst>
+      <p:ext uri="{BB962C8B-B14F-4D97-AF65-F5344CB8AC3E}">
+        <p14:creationId xmlns:p14="http://schemas.microsoft.com/office/powerpoint/2010/main" val="1024086991"/>
+      </p:ext>
+    </p:extLst>
+  </p:cSld>
+  <p:clrMapOvr>
+    <a:masterClrMapping/>
+  </p:clrMapOvr>
+</p:notes>
+</file>
+
+<file path=ppt/notesSlides/notesSlide12.xml><?xml version="1.0" encoding="utf-8"?>
+<p:notes xmlns:a="http://schemas.openxmlformats.org/drawingml/2006/main" xmlns:r="http://schemas.openxmlformats.org/officeDocument/2006/relationships" xmlns:p="http://schemas.openxmlformats.org/presentationml/2006/main">
+  <p:cSld>
+    <p:spTree>
+      <p:nvGrpSpPr>
+        <p:cNvPr id="1" name=""/>
+        <p:cNvGrpSpPr/>
+        <p:nvPr/>
+      </p:nvGrpSpPr>
+      <p:grpSpPr>
+        <a:xfrm>
+          <a:off x="0" y="0"/>
+          <a:ext cx="0" cy="0"/>
+          <a:chOff x="0" y="0"/>
+          <a:chExt cx="0" cy="0"/>
+        </a:xfrm>
+      </p:grpSpPr>
+      <p:sp>
+        <p:nvSpPr>
+          <p:cNvPr id="2" name="Slide Image Placeholder 1"/>
+          <p:cNvSpPr>
+            <a:spLocks noGrp="1" noRot="1" noChangeAspect="1"/>
+          </p:cNvSpPr>
+          <p:nvPr>
+            <p:ph type="sldImg"/>
+          </p:nvPr>
+        </p:nvSpPr>
+        <p:spPr/>
+      </p:sp>
+      <p:sp>
+        <p:nvSpPr>
+          <p:cNvPr id="3" name="Notes Placeholder 2"/>
+          <p:cNvSpPr>
+            <a:spLocks noGrp="1"/>
+          </p:cNvSpPr>
+          <p:nvPr>
+            <p:ph type="body" idx="1"/>
+          </p:nvPr>
+        </p:nvSpPr>
+        <p:spPr/>
+        <p:txBody>
+          <a:bodyPr/>
+          <a:lstStyle/>
+          <a:p>
+            <a:r>
+              <a:rPr lang="en-US" dirty="0"/>
+              <a:t>Q&amp;A 대비용 백업 슬라이드. 교수가 '원문 Discussion엔 대조군이 최저라고 되어있는데?' 라고 물으면 이 슬라이드를 띄우고: (1) Table III의 p3(CPG vs PGE2G)=0.605로 두 군이 통계적으로 구분 안 됨을 보여주고, (2) 원문 스스로도 Results/Conclusion과 Discussion에서 서술이 갈린다는 점을 지적하며, (3) '정확히는 대조군과 PGE2군이 재발 억제 면에서 통계적으로 동급'이라고 답변할 것. 임상적으로는 'PGE2가 가속 효과를 내면서도 재발은 무처치 수준으로 억제한다'는 게 이 발견의 가장 흥미로운 지점.</a:t>
+            </a:r>
+            <a:endParaRPr lang="en-US" dirty="0"/>
+          </a:p>
+        </p:txBody>
+      </p:sp>
+      <p:sp>
+        <p:nvSpPr>
+          <p:cNvPr id="4" name="Slide Number Placeholder 3"/>
+          <p:cNvSpPr>
+            <a:spLocks noGrp="1"/>
+          </p:cNvSpPr>
+          <p:nvPr>
+            <p:ph type="sldNum" sz="quarter" idx="10"/>
+          </p:nvPr>
+        </p:nvSpPr>
+        <p:spPr/>
+        <p:txBody>
+          <a:bodyPr/>
+          <a:lstStyle/>
+          <a:p>
+            <a:fld id="{F7021451-1387-4CA6-816F-3879F97B5CBC}" type="slidenum">
+              <a:rPr lang="en-US"/>
+              <a:t>12</a:t>
             </a:fld>
             <a:endParaRPr lang="en-US"/>
           </a:p>
@@ -2426,6 +2515,1388 @@
 </p:sld>
 </file>
 
+<file path=ppt/slides/slide12.xml><?xml version="1.0" encoding="utf-8"?>
+<p:sld xmlns:a="http://schemas.openxmlformats.org/drawingml/2006/main" xmlns:r="http://schemas.openxmlformats.org/officeDocument/2006/relationships" xmlns:p="http://schemas.openxmlformats.org/presentationml/2006/main">
+  <p:cSld name="Slide 12">
+    <p:bg>
+      <p:bgPr>
+        <a:solidFill>
+          <a:srgbClr val="F7FBFB"/>
+        </a:solidFill>
+      </p:bgPr>
+    </p:bg>
+    <p:spTree>
+      <p:nvGrpSpPr>
+        <p:cNvPr id="1" name=""/>
+        <p:cNvGrpSpPr/>
+        <p:nvPr/>
+      </p:nvGrpSpPr>
+      <p:grpSpPr>
+        <a:xfrm>
+          <a:off x="0" y="0"/>
+          <a:ext cx="0" cy="0"/>
+          <a:chOff x="0" y="0"/>
+          <a:chExt cx="0" cy="0"/>
+        </a:xfrm>
+      </p:grpSpPr>
+      <p:sp>
+        <p:nvSpPr>
+          <p:cNvPr id="2" name="Text 0"/>
+          <p:cNvSpPr txBox="1"/>
+          <p:nvPr/>
+        </p:nvSpPr>
+        <p:spPr>
+          <a:xfrm>
+            <a:off x="548640" y="411480"/>
+            <a:ext cx="9144000" cy="365760"/>
+          </a:xfrm>
+          <a:prstGeom prst="rect">
+            <a:avLst/>
+          </a:prstGeom>
+          <a:noFill/>
+          <a:ln/>
+        </p:spPr>
+        <p:txBody>
+          <a:bodyPr wrap="square" lIns="0" tIns="0" rIns="0" bIns="0" rtlCol="0" anchor="ctr"/>
+          <a:lstStyle/>
+          <a:p>
+            <a:pPr indent="0" marL="0">
+              <a:buNone/>
+            </a:pPr>
+            <a:r>
+              <a:rPr lang="en-US" sz="1300" b="1" spc="100" kern="0" dirty="0">
+                <a:solidFill>
+                  <a:srgbClr val="00A896"/>
+                </a:solidFill>
+                <a:latin typeface="Pretendard" pitchFamily="34" charset="0"/>
+                <a:ea typeface="Pretendard" pitchFamily="34" charset="-122"/>
+                <a:cs typeface="Pretendard" pitchFamily="34" charset="-120"/>
+              </a:rPr>
+              <a:t>APPENDIX A · Q&amp;A 백업</a:t>
+            </a:r>
+            <a:endParaRPr lang="en-US" sz="1300" dirty="0"/>
+          </a:p>
+        </p:txBody>
+      </p:sp>
+      <p:sp>
+        <p:nvSpPr>
+          <p:cNvPr id="3" name="Text 1"/>
+          <p:cNvSpPr txBox="1"/>
+          <p:nvPr/>
+        </p:nvSpPr>
+        <p:spPr>
+          <a:xfrm>
+            <a:off x="548640" y="749808"/>
+            <a:ext cx="11064240" cy="914400"/>
+          </a:xfrm>
+          <a:prstGeom prst="rect">
+            <a:avLst/>
+          </a:prstGeom>
+          <a:noFill/>
+          <a:ln/>
+        </p:spPr>
+        <p:txBody>
+          <a:bodyPr wrap="square" lIns="0" tIns="0" rIns="0" bIns="0" rtlCol="0" anchor="ctr"/>
+          <a:lstStyle/>
+          <a:p>
+            <a:pPr indent="0" marL="0">
+              <a:buNone/>
+            </a:pPr>
+            <a:r>
+              <a:rPr lang="en-US" sz="2400" b="1" dirty="0">
+                <a:solidFill>
+                  <a:srgbClr val="0B2E33"/>
+                </a:solidFill>
+                <a:latin typeface="Wanted Sans" pitchFamily="34" charset="0"/>
+                <a:ea typeface="Wanted Sans" pitchFamily="34" charset="-122"/>
+                <a:cs typeface="Wanted Sans" pitchFamily="34" charset="-120"/>
+              </a:rPr>
+              <a:t>재발이 '가장 적은' 군은 대조군도 PGE2군도 아닌, 둘의 통계적 동률이다</a:t>
+            </a:r>
+            <a:endParaRPr lang="en-US" sz="2400" dirty="0"/>
+          </a:p>
+        </p:txBody>
+      </p:sp>
+      <p:graphicFrame>
+        <p:nvGraphicFramePr>
+          <p:cNvPr id="13" name="Table 0"/>
+          <p:cNvGraphicFramePr>
+            <a:graphicFrameLocks noGrp="1"/>
+          </p:cNvGraphicFramePr>
+          <p:nvPr>
+            <p:extLst>
+              <p:ext uri="{D42A27DB-BD31-4B8C-83A1-F6EECF244321}">
+                <p14:modId xmlns:p14="http://schemas.microsoft.com/office/powerpoint/2010/main" val="1579011935"/>
+              </p:ext>
+            </p:extLst>
+          </p:nvPr>
+        </p:nvGraphicFramePr>
+        <p:xfrm>
+          <a:off x="548640" y="1874520"/>
+          <a:ext cx="11064240" cy="1005840"/>
+        </p:xfrm>
+        <a:graphic>
+          <a:graphicData uri="http://schemas.openxmlformats.org/drawingml/2006/table">
+            <a:tbl>
+              <a:tblPr/>
+              <a:tblGrid>
+                <a:gridCol w="2212848"/>
+                <a:gridCol w="2212848"/>
+                <a:gridCol w="2212848"/>
+                <a:gridCol w="2212848"/>
+                <a:gridCol w="2212848"/>
+              </a:tblGrid>
+              <a:tr h="335280">
+                <a:tc>
+                  <a:txBody>
+                    <a:bodyPr/>
+                    <a:lstStyle/>
+                    <a:p>
+                      <a:pPr algn="ctr" indent="0" marL="0">
+                        <a:buNone/>
+                      </a:pPr>
+                      <a:endParaRPr lang="en-US" sz="1150" dirty="0">
+                        <a:latin typeface="Pretendard" charset="0"/>
+                        <a:ea typeface="Pretendard" charset="0"/>
+                        <a:cs typeface="Pretendard" charset="0"/>
+                      </a:endParaRPr>
+                    </a:p>
+                  </a:txBody>
+                  <a:tcPr marL="91440" marR="91440" marT="45720" marB="45720" anchor="ctr">
+                    <a:lnL w="12700" cap="flat" cmpd="sng" algn="ctr">
+                      <a:solidFill>
+                        <a:srgbClr val="D8E8E6"/>
+                      </a:solidFill>
+                      <a:prstDash val="solid"/>
+                      <a:round/>
+                      <a:headEnd type="none" w="med" len="med"/>
+                      <a:tailEnd type="none" w="med" len="med"/>
+                    </a:lnL>
+                    <a:lnR w="12700" cap="flat" cmpd="sng" algn="ctr">
+                      <a:solidFill>
+                        <a:srgbClr val="D8E8E6"/>
+                      </a:solidFill>
+                      <a:prstDash val="solid"/>
+                      <a:round/>
+                      <a:headEnd type="none" w="med" len="med"/>
+                      <a:tailEnd type="none" w="med" len="med"/>
+                    </a:lnR>
+                    <a:lnT w="12700" cap="flat" cmpd="sng" algn="ctr">
+                      <a:solidFill>
+                        <a:srgbClr val="D8E8E6"/>
+                      </a:solidFill>
+                      <a:prstDash val="solid"/>
+                      <a:round/>
+                      <a:headEnd type="none" w="med" len="med"/>
+                      <a:tailEnd type="none" w="med" len="med"/>
+                    </a:lnT>
+                    <a:lnB w="12700" cap="flat" cmpd="sng" algn="ctr">
+                      <a:solidFill>
+                        <a:srgbClr val="D8E8E6"/>
+                      </a:solidFill>
+                      <a:prstDash val="solid"/>
+                      <a:round/>
+                      <a:headEnd type="none" w="med" len="med"/>
+                      <a:tailEnd type="none" w="med" len="med"/>
+                    </a:lnB>
+                    <a:solidFill>
+                      <a:srgbClr val="028090"/>
+                    </a:solidFill>
+                  </a:tcPr>
+                </a:tc>
+                <a:tc>
+                  <a:txBody>
+                    <a:bodyPr/>
+                    <a:lstStyle/>
+                    <a:p>
+                      <a:pPr algn="ctr" indent="0" marL="0">
+                        <a:buNone/>
+                      </a:pPr>
+                      <a:r>
+                        <a:rPr lang="en-US" sz="1150" b="1" dirty="0">
+                          <a:solidFill>
+                            <a:srgbClr val="FFFFFF"/>
+                          </a:solidFill>
+                          <a:latin typeface="Pretendard" pitchFamily="34" charset="0"/>
+                          <a:ea typeface="Pretendard" pitchFamily="34" charset="-122"/>
+                          <a:cs typeface="Pretendard" pitchFamily="34" charset="-120"/>
+                        </a:rPr>
+                        <a:t>양성대조(CPG)</a:t>
+                      </a:r>
+                      <a:endParaRPr lang="en-US" sz="1150" dirty="0">
+                        <a:latin typeface="Pretendard" charset="0"/>
+                        <a:ea typeface="Pretendard" charset="0"/>
+                        <a:cs typeface="Pretendard" charset="0"/>
+                      </a:endParaRPr>
+                    </a:p>
+                  </a:txBody>
+                  <a:tcPr marL="91440" marR="91440" marT="45720" marB="45720" anchor="ctr">
+                    <a:lnL w="12700" cap="flat" cmpd="sng" algn="ctr">
+                      <a:solidFill>
+                        <a:srgbClr val="D8E8E6"/>
+                      </a:solidFill>
+                      <a:prstDash val="solid"/>
+                      <a:round/>
+                      <a:headEnd type="none" w="med" len="med"/>
+                      <a:tailEnd type="none" w="med" len="med"/>
+                    </a:lnL>
+                    <a:lnR w="12700" cap="flat" cmpd="sng" algn="ctr">
+                      <a:solidFill>
+                        <a:srgbClr val="D8E8E6"/>
+                      </a:solidFill>
+                      <a:prstDash val="solid"/>
+                      <a:round/>
+                      <a:headEnd type="none" w="med" len="med"/>
+                      <a:tailEnd type="none" w="med" len="med"/>
+                    </a:lnR>
+                    <a:lnT w="12700" cap="flat" cmpd="sng" algn="ctr">
+                      <a:solidFill>
+                        <a:srgbClr val="D8E8E6"/>
+                      </a:solidFill>
+                      <a:prstDash val="solid"/>
+                      <a:round/>
+                      <a:headEnd type="none" w="med" len="med"/>
+                      <a:tailEnd type="none" w="med" len="med"/>
+                    </a:lnT>
+                    <a:lnB w="12700" cap="flat" cmpd="sng" algn="ctr">
+                      <a:solidFill>
+                        <a:srgbClr val="D8E8E6"/>
+                      </a:solidFill>
+                      <a:prstDash val="solid"/>
+                      <a:round/>
+                      <a:headEnd type="none" w="med" len="med"/>
+                      <a:tailEnd type="none" w="med" len="med"/>
+                    </a:lnB>
+                    <a:solidFill>
+                      <a:srgbClr val="028090"/>
+                    </a:solidFill>
+                  </a:tcPr>
+                </a:tc>
+                <a:tc>
+                  <a:txBody>
+                    <a:bodyPr/>
+                    <a:lstStyle/>
+                    <a:p>
+                      <a:pPr algn="ctr" indent="0" marL="0">
+                        <a:buNone/>
+                      </a:pPr>
+                      <a:r>
+                        <a:rPr lang="en-US" sz="1150" b="1" dirty="0">
+                          <a:solidFill>
+                            <a:srgbClr val="FFFFFF"/>
+                          </a:solidFill>
+                          <a:latin typeface="Pretendard" pitchFamily="34" charset="0"/>
+                          <a:ea typeface="Pretendard" pitchFamily="34" charset="-122"/>
+                          <a:cs typeface="Pretendard" pitchFamily="34" charset="-120"/>
+                        </a:rPr>
+                        <a:t>PGE2(PGE2G)</a:t>
+                      </a:r>
+                      <a:endParaRPr lang="en-US" sz="1150" dirty="0">
+                        <a:latin typeface="Pretendard" charset="0"/>
+                        <a:ea typeface="Pretendard" charset="0"/>
+                        <a:cs typeface="Pretendard" charset="0"/>
+                      </a:endParaRPr>
+                    </a:p>
+                  </a:txBody>
+                  <a:tcPr marL="91440" marR="91440" marT="45720" marB="45720" anchor="ctr">
+                    <a:lnL w="12700" cap="flat" cmpd="sng" algn="ctr">
+                      <a:solidFill>
+                        <a:srgbClr val="D8E8E6"/>
+                      </a:solidFill>
+                      <a:prstDash val="solid"/>
+                      <a:round/>
+                      <a:headEnd type="none" w="med" len="med"/>
+                      <a:tailEnd type="none" w="med" len="med"/>
+                    </a:lnL>
+                    <a:lnR w="12700" cap="flat" cmpd="sng" algn="ctr">
+                      <a:solidFill>
+                        <a:srgbClr val="D8E8E6"/>
+                      </a:solidFill>
+                      <a:prstDash val="solid"/>
+                      <a:round/>
+                      <a:headEnd type="none" w="med" len="med"/>
+                      <a:tailEnd type="none" w="med" len="med"/>
+                    </a:lnR>
+                    <a:lnT w="12700" cap="flat" cmpd="sng" algn="ctr">
+                      <a:solidFill>
+                        <a:srgbClr val="D8E8E6"/>
+                      </a:solidFill>
+                      <a:prstDash val="solid"/>
+                      <a:round/>
+                      <a:headEnd type="none" w="med" len="med"/>
+                      <a:tailEnd type="none" w="med" len="med"/>
+                    </a:lnT>
+                    <a:lnB w="12700" cap="flat" cmpd="sng" algn="ctr">
+                      <a:solidFill>
+                        <a:srgbClr val="D8E8E6"/>
+                      </a:solidFill>
+                      <a:prstDash val="solid"/>
+                      <a:round/>
+                      <a:headEnd type="none" w="med" len="med"/>
+                      <a:tailEnd type="none" w="med" len="med"/>
+                    </a:lnB>
+                    <a:solidFill>
+                      <a:srgbClr val="028090"/>
+                    </a:solidFill>
+                  </a:tcPr>
+                </a:tc>
+                <a:tc>
+                  <a:txBody>
+                    <a:bodyPr/>
+                    <a:lstStyle/>
+                    <a:p>
+                      <a:pPr algn="ctr" indent="0" marL="0">
+                        <a:buNone/>
+                      </a:pPr>
+                      <a:r>
+                        <a:rPr lang="en-US" sz="1150" b="1" dirty="0">
+                          <a:solidFill>
+                            <a:srgbClr val="FFFFFF"/>
+                          </a:solidFill>
+                          <a:latin typeface="Pretendard" pitchFamily="34" charset="0"/>
+                          <a:ea typeface="Pretendard" pitchFamily="34" charset="-122"/>
+                          <a:cs typeface="Pretendard" pitchFamily="34" charset="-120"/>
+                        </a:rPr>
+                        <a:t>비타민D(VDG)</a:t>
+                      </a:r>
+                      <a:endParaRPr lang="en-US" sz="1150" dirty="0">
+                        <a:latin typeface="Pretendard" charset="0"/>
+                        <a:ea typeface="Pretendard" charset="0"/>
+                        <a:cs typeface="Pretendard" charset="0"/>
+                      </a:endParaRPr>
+                    </a:p>
+                  </a:txBody>
+                  <a:tcPr marL="91440" marR="91440" marT="45720" marB="45720" anchor="ctr">
+                    <a:lnL w="12700" cap="flat" cmpd="sng" algn="ctr">
+                      <a:solidFill>
+                        <a:srgbClr val="D8E8E6"/>
+                      </a:solidFill>
+                      <a:prstDash val="solid"/>
+                      <a:round/>
+                      <a:headEnd type="none" w="med" len="med"/>
+                      <a:tailEnd type="none" w="med" len="med"/>
+                    </a:lnL>
+                    <a:lnR w="12700" cap="flat" cmpd="sng" algn="ctr">
+                      <a:solidFill>
+                        <a:srgbClr val="D8E8E6"/>
+                      </a:solidFill>
+                      <a:prstDash val="solid"/>
+                      <a:round/>
+                      <a:headEnd type="none" w="med" len="med"/>
+                      <a:tailEnd type="none" w="med" len="med"/>
+                    </a:lnR>
+                    <a:lnT w="12700" cap="flat" cmpd="sng" algn="ctr">
+                      <a:solidFill>
+                        <a:srgbClr val="D8E8E6"/>
+                      </a:solidFill>
+                      <a:prstDash val="solid"/>
+                      <a:round/>
+                      <a:headEnd type="none" w="med" len="med"/>
+                      <a:tailEnd type="none" w="med" len="med"/>
+                    </a:lnT>
+                    <a:lnB w="12700" cap="flat" cmpd="sng" algn="ctr">
+                      <a:solidFill>
+                        <a:srgbClr val="D8E8E6"/>
+                      </a:solidFill>
+                      <a:prstDash val="solid"/>
+                      <a:round/>
+                      <a:headEnd type="none" w="med" len="med"/>
+                      <a:tailEnd type="none" w="med" len="med"/>
+                    </a:lnB>
+                    <a:solidFill>
+                      <a:srgbClr val="028090"/>
+                    </a:solidFill>
+                  </a:tcPr>
+                </a:tc>
+                <a:tc>
+                  <a:txBody>
+                    <a:bodyPr/>
+                    <a:lstStyle/>
+                    <a:p>
+                      <a:pPr algn="ctr" indent="0" marL="0">
+                        <a:buNone/>
+                      </a:pPr>
+                      <a:r>
+                        <a:rPr lang="en-US" sz="1150" b="1" dirty="0">
+                          <a:solidFill>
+                            <a:srgbClr val="FFFFFF"/>
+                          </a:solidFill>
+                          <a:latin typeface="Pretendard" pitchFamily="34" charset="0"/>
+                          <a:ea typeface="Pretendard" pitchFamily="34" charset="-122"/>
+                          <a:cs typeface="Pretendard" pitchFamily="34" charset="-120"/>
+                        </a:rPr>
+                        <a:t>코르티코스테로이드(COG)</a:t>
+                      </a:r>
+                      <a:endParaRPr lang="en-US" sz="1150" dirty="0">
+                        <a:latin typeface="Pretendard" charset="0"/>
+                        <a:ea typeface="Pretendard" charset="0"/>
+                        <a:cs typeface="Pretendard" charset="0"/>
+                      </a:endParaRPr>
+                    </a:p>
+                  </a:txBody>
+                  <a:tcPr marL="91440" marR="91440" marT="45720" marB="45720" anchor="ctr">
+                    <a:lnL w="12700" cap="flat" cmpd="sng" algn="ctr">
+                      <a:solidFill>
+                        <a:srgbClr val="D8E8E6"/>
+                      </a:solidFill>
+                      <a:prstDash val="solid"/>
+                      <a:round/>
+                      <a:headEnd type="none" w="med" len="med"/>
+                      <a:tailEnd type="none" w="med" len="med"/>
+                    </a:lnL>
+                    <a:lnR w="12700" cap="flat" cmpd="sng" algn="ctr">
+                      <a:solidFill>
+                        <a:srgbClr val="D8E8E6"/>
+                      </a:solidFill>
+                      <a:prstDash val="solid"/>
+                      <a:round/>
+                      <a:headEnd type="none" w="med" len="med"/>
+                      <a:tailEnd type="none" w="med" len="med"/>
+                    </a:lnR>
+                    <a:lnT w="12700" cap="flat" cmpd="sng" algn="ctr">
+                      <a:solidFill>
+                        <a:srgbClr val="D8E8E6"/>
+                      </a:solidFill>
+                      <a:prstDash val="solid"/>
+                      <a:round/>
+                      <a:headEnd type="none" w="med" len="med"/>
+                      <a:tailEnd type="none" w="med" len="med"/>
+                    </a:lnT>
+                    <a:lnB w="12700" cap="flat" cmpd="sng" algn="ctr">
+                      <a:solidFill>
+                        <a:srgbClr val="D8E8E6"/>
+                      </a:solidFill>
+                      <a:prstDash val="solid"/>
+                      <a:round/>
+                      <a:headEnd type="none" w="med" len="med"/>
+                      <a:tailEnd type="none" w="med" len="med"/>
+                    </a:lnB>
+                    <a:solidFill>
+                      <a:srgbClr val="028090"/>
+                    </a:solidFill>
+                  </a:tcPr>
+                </a:tc>
+              </a:tr>
+              <a:tr h="335280">
+                <a:tc>
+                  <a:txBody>
+                    <a:bodyPr/>
+                    <a:lstStyle/>
+                    <a:p>
+                      <a:pPr algn="ctr" indent="0" marL="0">
+                        <a:buNone/>
+                      </a:pPr>
+                      <a:r>
+                        <a:rPr lang="en-US" sz="1150" dirty="0">
+                          <a:solidFill>
+                            <a:srgbClr val="0B2E33"/>
+                          </a:solidFill>
+                          <a:latin typeface="Pretendard" pitchFamily="34" charset="0"/>
+                          <a:ea typeface="Pretendard" pitchFamily="34" charset="-122"/>
+                          <a:cs typeface="Pretendard" pitchFamily="34" charset="-120"/>
+                        </a:rPr>
+                        <a:t>2주 재발량 (T0 대비)</a:t>
+                      </a:r>
+                      <a:endParaRPr lang="en-US" sz="1150" dirty="0">
+                        <a:latin typeface="Pretendard" charset="0"/>
+                        <a:ea typeface="Pretendard" charset="0"/>
+                        <a:cs typeface="Pretendard" charset="0"/>
+                      </a:endParaRPr>
+                    </a:p>
+                  </a:txBody>
+                  <a:tcPr marL="91440" marR="91440" marT="45720" marB="45720" anchor="ctr">
+                    <a:lnL w="12700" cap="flat" cmpd="sng" algn="ctr">
+                      <a:solidFill>
+                        <a:srgbClr val="D8E8E6"/>
+                      </a:solidFill>
+                      <a:prstDash val="solid"/>
+                      <a:round/>
+                      <a:headEnd type="none" w="med" len="med"/>
+                      <a:tailEnd type="none" w="med" len="med"/>
+                    </a:lnL>
+                    <a:lnR w="12700" cap="flat" cmpd="sng" algn="ctr">
+                      <a:solidFill>
+                        <a:srgbClr val="D8E8E6"/>
+                      </a:solidFill>
+                      <a:prstDash val="solid"/>
+                      <a:round/>
+                      <a:headEnd type="none" w="med" len="med"/>
+                      <a:tailEnd type="none" w="med" len="med"/>
+                    </a:lnR>
+                    <a:lnT w="12700" cap="flat" cmpd="sng" algn="ctr">
+                      <a:solidFill>
+                        <a:srgbClr val="D8E8E6"/>
+                      </a:solidFill>
+                      <a:prstDash val="solid"/>
+                      <a:round/>
+                      <a:headEnd type="none" w="med" len="med"/>
+                      <a:tailEnd type="none" w="med" len="med"/>
+                    </a:lnT>
+                    <a:lnB w="12700" cap="flat" cmpd="sng" algn="ctr">
+                      <a:solidFill>
+                        <a:srgbClr val="D8E8E6"/>
+                      </a:solidFill>
+                      <a:prstDash val="solid"/>
+                      <a:round/>
+                      <a:headEnd type="none" w="med" len="med"/>
+                      <a:tailEnd type="none" w="med" len="med"/>
+                    </a:lnB>
+                  </a:tcPr>
+                </a:tc>
+                <a:tc>
+                  <a:txBody>
+                    <a:bodyPr/>
+                    <a:lstStyle/>
+                    <a:p>
+                      <a:pPr algn="ctr" indent="0" marL="0">
+                        <a:buNone/>
+                      </a:pPr>
+                      <a:r>
+                        <a:rPr lang="en-US" sz="1150" dirty="0">
+                          <a:solidFill>
+                            <a:srgbClr val="0B2E33"/>
+                          </a:solidFill>
+                          <a:latin typeface="Pretendard" pitchFamily="34" charset="0"/>
+                          <a:ea typeface="Pretendard" pitchFamily="34" charset="-122"/>
+                          <a:cs typeface="Pretendard" pitchFamily="34" charset="-120"/>
+                        </a:rPr>
+                        <a:t>-1.09 ± 0.17 mm</a:t>
+                      </a:r>
+                      <a:endParaRPr lang="en-US" sz="1150" dirty="0">
+                        <a:latin typeface="Pretendard" charset="0"/>
+                        <a:ea typeface="Pretendard" charset="0"/>
+                        <a:cs typeface="Pretendard" charset="0"/>
+                      </a:endParaRPr>
+                    </a:p>
+                  </a:txBody>
+                  <a:tcPr marL="91440" marR="91440" marT="45720" marB="45720" anchor="ctr">
+                    <a:lnL w="12700" cap="flat" cmpd="sng" algn="ctr">
+                      <a:solidFill>
+                        <a:srgbClr val="D8E8E6"/>
+                      </a:solidFill>
+                      <a:prstDash val="solid"/>
+                      <a:round/>
+                      <a:headEnd type="none" w="med" len="med"/>
+                      <a:tailEnd type="none" w="med" len="med"/>
+                    </a:lnL>
+                    <a:lnR w="12700" cap="flat" cmpd="sng" algn="ctr">
+                      <a:solidFill>
+                        <a:srgbClr val="D8E8E6"/>
+                      </a:solidFill>
+                      <a:prstDash val="solid"/>
+                      <a:round/>
+                      <a:headEnd type="none" w="med" len="med"/>
+                      <a:tailEnd type="none" w="med" len="med"/>
+                    </a:lnR>
+                    <a:lnT w="12700" cap="flat" cmpd="sng" algn="ctr">
+                      <a:solidFill>
+                        <a:srgbClr val="D8E8E6"/>
+                      </a:solidFill>
+                      <a:prstDash val="solid"/>
+                      <a:round/>
+                      <a:headEnd type="none" w="med" len="med"/>
+                      <a:tailEnd type="none" w="med" len="med"/>
+                    </a:lnT>
+                    <a:lnB w="12700" cap="flat" cmpd="sng" algn="ctr">
+                      <a:solidFill>
+                        <a:srgbClr val="D8E8E6"/>
+                      </a:solidFill>
+                      <a:prstDash val="solid"/>
+                      <a:round/>
+                      <a:headEnd type="none" w="med" len="med"/>
+                      <a:tailEnd type="none" w="med" len="med"/>
+                    </a:lnB>
+                  </a:tcPr>
+                </a:tc>
+                <a:tc>
+                  <a:txBody>
+                    <a:bodyPr/>
+                    <a:lstStyle/>
+                    <a:p>
+                      <a:pPr algn="ctr" indent="0" marL="0">
+                        <a:buNone/>
+                      </a:pPr>
+                      <a:r>
+                        <a:rPr lang="en-US" sz="1150" dirty="0">
+                          <a:solidFill>
+                            <a:srgbClr val="0B2E33"/>
+                          </a:solidFill>
+                          <a:latin typeface="Pretendard" pitchFamily="34" charset="0"/>
+                          <a:ea typeface="Pretendard" pitchFamily="34" charset="-122"/>
+                          <a:cs typeface="Pretendard" pitchFamily="34" charset="-120"/>
+                        </a:rPr>
+                        <a:t>-0.86 ± 0.23 mm</a:t>
+                      </a:r>
+                      <a:endParaRPr lang="en-US" sz="1150" dirty="0">
+                        <a:latin typeface="Pretendard" charset="0"/>
+                        <a:ea typeface="Pretendard" charset="0"/>
+                        <a:cs typeface="Pretendard" charset="0"/>
+                      </a:endParaRPr>
+                    </a:p>
+                  </a:txBody>
+                  <a:tcPr marL="91440" marR="91440" marT="45720" marB="45720" anchor="ctr">
+                    <a:lnL w="12700" cap="flat" cmpd="sng" algn="ctr">
+                      <a:solidFill>
+                        <a:srgbClr val="D8E8E6"/>
+                      </a:solidFill>
+                      <a:prstDash val="solid"/>
+                      <a:round/>
+                      <a:headEnd type="none" w="med" len="med"/>
+                      <a:tailEnd type="none" w="med" len="med"/>
+                    </a:lnL>
+                    <a:lnR w="12700" cap="flat" cmpd="sng" algn="ctr">
+                      <a:solidFill>
+                        <a:srgbClr val="D8E8E6"/>
+                      </a:solidFill>
+                      <a:prstDash val="solid"/>
+                      <a:round/>
+                      <a:headEnd type="none" w="med" len="med"/>
+                      <a:tailEnd type="none" w="med" len="med"/>
+                    </a:lnR>
+                    <a:lnT w="12700" cap="flat" cmpd="sng" algn="ctr">
+                      <a:solidFill>
+                        <a:srgbClr val="D8E8E6"/>
+                      </a:solidFill>
+                      <a:prstDash val="solid"/>
+                      <a:round/>
+                      <a:headEnd type="none" w="med" len="med"/>
+                      <a:tailEnd type="none" w="med" len="med"/>
+                    </a:lnT>
+                    <a:lnB w="12700" cap="flat" cmpd="sng" algn="ctr">
+                      <a:solidFill>
+                        <a:srgbClr val="D8E8E6"/>
+                      </a:solidFill>
+                      <a:prstDash val="solid"/>
+                      <a:round/>
+                      <a:headEnd type="none" w="med" len="med"/>
+                      <a:tailEnd type="none" w="med" len="med"/>
+                    </a:lnB>
+                  </a:tcPr>
+                </a:tc>
+                <a:tc>
+                  <a:txBody>
+                    <a:bodyPr/>
+                    <a:lstStyle/>
+                    <a:p>
+                      <a:pPr algn="ctr" indent="0" marL="0">
+                        <a:buNone/>
+                      </a:pPr>
+                      <a:r>
+                        <a:rPr lang="en-US" sz="1150" dirty="0">
+                          <a:solidFill>
+                            <a:srgbClr val="0B2E33"/>
+                          </a:solidFill>
+                          <a:latin typeface="Pretendard" pitchFamily="34" charset="0"/>
+                          <a:ea typeface="Pretendard" pitchFamily="34" charset="-122"/>
+                          <a:cs typeface="Pretendard" pitchFamily="34" charset="-120"/>
+                        </a:rPr>
+                        <a:t>-2.75 ± 0.15 mm</a:t>
+                      </a:r>
+                      <a:endParaRPr lang="en-US" sz="1150" dirty="0">
+                        <a:latin typeface="Pretendard" charset="0"/>
+                        <a:ea typeface="Pretendard" charset="0"/>
+                        <a:cs typeface="Pretendard" charset="0"/>
+                      </a:endParaRPr>
+                    </a:p>
+                  </a:txBody>
+                  <a:tcPr marL="91440" marR="91440" marT="45720" marB="45720" anchor="ctr">
+                    <a:lnL w="12700" cap="flat" cmpd="sng" algn="ctr">
+                      <a:solidFill>
+                        <a:srgbClr val="D8E8E6"/>
+                      </a:solidFill>
+                      <a:prstDash val="solid"/>
+                      <a:round/>
+                      <a:headEnd type="none" w="med" len="med"/>
+                      <a:tailEnd type="none" w="med" len="med"/>
+                    </a:lnL>
+                    <a:lnR w="12700" cap="flat" cmpd="sng" algn="ctr">
+                      <a:solidFill>
+                        <a:srgbClr val="D8E8E6"/>
+                      </a:solidFill>
+                      <a:prstDash val="solid"/>
+                      <a:round/>
+                      <a:headEnd type="none" w="med" len="med"/>
+                      <a:tailEnd type="none" w="med" len="med"/>
+                    </a:lnR>
+                    <a:lnT w="12700" cap="flat" cmpd="sng" algn="ctr">
+                      <a:solidFill>
+                        <a:srgbClr val="D8E8E6"/>
+                      </a:solidFill>
+                      <a:prstDash val="solid"/>
+                      <a:round/>
+                      <a:headEnd type="none" w="med" len="med"/>
+                      <a:tailEnd type="none" w="med" len="med"/>
+                    </a:lnT>
+                    <a:lnB w="12700" cap="flat" cmpd="sng" algn="ctr">
+                      <a:solidFill>
+                        <a:srgbClr val="D8E8E6"/>
+                      </a:solidFill>
+                      <a:prstDash val="solid"/>
+                      <a:round/>
+                      <a:headEnd type="none" w="med" len="med"/>
+                      <a:tailEnd type="none" w="med" len="med"/>
+                    </a:lnB>
+                  </a:tcPr>
+                </a:tc>
+                <a:tc>
+                  <a:txBody>
+                    <a:bodyPr/>
+                    <a:lstStyle/>
+                    <a:p>
+                      <a:pPr algn="ctr" indent="0" marL="0">
+                        <a:buNone/>
+                      </a:pPr>
+                      <a:r>
+                        <a:rPr lang="en-US" sz="1150" dirty="0">
+                          <a:solidFill>
+                            <a:srgbClr val="0B2E33"/>
+                          </a:solidFill>
+                          <a:latin typeface="Pretendard" pitchFamily="34" charset="0"/>
+                          <a:ea typeface="Pretendard" pitchFamily="34" charset="-122"/>
+                          <a:cs typeface="Pretendard" pitchFamily="34" charset="-120"/>
+                        </a:rPr>
+                        <a:t>-5.07 ± 0.87 mm</a:t>
+                      </a:r>
+                      <a:endParaRPr lang="en-US" sz="1150" dirty="0">
+                        <a:latin typeface="Pretendard" charset="0"/>
+                        <a:ea typeface="Pretendard" charset="0"/>
+                        <a:cs typeface="Pretendard" charset="0"/>
+                      </a:endParaRPr>
+                    </a:p>
+                  </a:txBody>
+                  <a:tcPr marL="91440" marR="91440" marT="45720" marB="45720" anchor="ctr">
+                    <a:lnL w="12700" cap="flat" cmpd="sng" algn="ctr">
+                      <a:solidFill>
+                        <a:srgbClr val="D8E8E6"/>
+                      </a:solidFill>
+                      <a:prstDash val="solid"/>
+                      <a:round/>
+                      <a:headEnd type="none" w="med" len="med"/>
+                      <a:tailEnd type="none" w="med" len="med"/>
+                    </a:lnL>
+                    <a:lnR w="12700" cap="flat" cmpd="sng" algn="ctr">
+                      <a:solidFill>
+                        <a:srgbClr val="D8E8E6"/>
+                      </a:solidFill>
+                      <a:prstDash val="solid"/>
+                      <a:round/>
+                      <a:headEnd type="none" w="med" len="med"/>
+                      <a:tailEnd type="none" w="med" len="med"/>
+                    </a:lnR>
+                    <a:lnT w="12700" cap="flat" cmpd="sng" algn="ctr">
+                      <a:solidFill>
+                        <a:srgbClr val="D8E8E6"/>
+                      </a:solidFill>
+                      <a:prstDash val="solid"/>
+                      <a:round/>
+                      <a:headEnd type="none" w="med" len="med"/>
+                      <a:tailEnd type="none" w="med" len="med"/>
+                    </a:lnT>
+                    <a:lnB w="12700" cap="flat" cmpd="sng" algn="ctr">
+                      <a:solidFill>
+                        <a:srgbClr val="D8E8E6"/>
+                      </a:solidFill>
+                      <a:prstDash val="solid"/>
+                      <a:round/>
+                      <a:headEnd type="none" w="med" len="med"/>
+                      <a:tailEnd type="none" w="med" len="med"/>
+                    </a:lnB>
+                  </a:tcPr>
+                </a:tc>
+              </a:tr>
+              <a:tr h="335280">
+                <a:tc>
+                  <a:txBody>
+                    <a:bodyPr/>
+                    <a:lstStyle/>
+                    <a:p>
+                      <a:pPr algn="ctr" indent="0" marL="0">
+                        <a:buNone/>
+                      </a:pPr>
+                      <a:r>
+                        <a:rPr lang="en-US" sz="1150" dirty="0">
+                          <a:solidFill>
+                            <a:srgbClr val="0B2E33"/>
+                          </a:solidFill>
+                          <a:latin typeface="Pretendard" pitchFamily="34" charset="0"/>
+                          <a:ea typeface="Pretendard" pitchFamily="34" charset="-122"/>
+                          <a:cs typeface="Pretendard" pitchFamily="34" charset="-120"/>
+                        </a:rPr>
+                        <a:t>원문 유의성 문자</a:t>
+                      </a:r>
+                      <a:endParaRPr lang="en-US" sz="1150" dirty="0">
+                        <a:latin typeface="Pretendard" charset="0"/>
+                        <a:ea typeface="Pretendard" charset="0"/>
+                        <a:cs typeface="Pretendard" charset="0"/>
+                      </a:endParaRPr>
+                    </a:p>
+                  </a:txBody>
+                  <a:tcPr marL="91440" marR="91440" marT="45720" marB="45720" anchor="ctr">
+                    <a:lnL w="12700" cap="flat" cmpd="sng" algn="ctr">
+                      <a:solidFill>
+                        <a:srgbClr val="D8E8E6"/>
+                      </a:solidFill>
+                      <a:prstDash val="solid"/>
+                      <a:round/>
+                      <a:headEnd type="none" w="med" len="med"/>
+                      <a:tailEnd type="none" w="med" len="med"/>
+                    </a:lnL>
+                    <a:lnR w="12700" cap="flat" cmpd="sng" algn="ctr">
+                      <a:solidFill>
+                        <a:srgbClr val="D8E8E6"/>
+                      </a:solidFill>
+                      <a:prstDash val="solid"/>
+                      <a:round/>
+                      <a:headEnd type="none" w="med" len="med"/>
+                      <a:tailEnd type="none" w="med" len="med"/>
+                    </a:lnR>
+                    <a:lnT w="12700" cap="flat" cmpd="sng" algn="ctr">
+                      <a:solidFill>
+                        <a:srgbClr val="D8E8E6"/>
+                      </a:solidFill>
+                      <a:prstDash val="solid"/>
+                      <a:round/>
+                      <a:headEnd type="none" w="med" len="med"/>
+                      <a:tailEnd type="none" w="med" len="med"/>
+                    </a:lnT>
+                    <a:lnB w="12700" cap="flat" cmpd="sng" algn="ctr">
+                      <a:solidFill>
+                        <a:srgbClr val="D8E8E6"/>
+                      </a:solidFill>
+                      <a:prstDash val="solid"/>
+                      <a:round/>
+                      <a:headEnd type="none" w="med" len="med"/>
+                      <a:tailEnd type="none" w="med" len="med"/>
+                    </a:lnB>
+                  </a:tcPr>
+                </a:tc>
+                <a:tc>
+                  <a:txBody>
+                    <a:bodyPr/>
+                    <a:lstStyle/>
+                    <a:p>
+                      <a:pPr algn="ctr" indent="0" marL="0">
+                        <a:buNone/>
+                      </a:pPr>
+                      <a:r>
+                        <a:rPr lang="en-US" sz="1150" dirty="0">
+                          <a:solidFill>
+                            <a:srgbClr val="0B2E33"/>
+                          </a:solidFill>
+                          <a:latin typeface="Pretendard" pitchFamily="34" charset="0"/>
+                          <a:ea typeface="Pretendard" pitchFamily="34" charset="-122"/>
+                          <a:cs typeface="Pretendard" pitchFamily="34" charset="-120"/>
+                        </a:rPr>
+                        <a:t>a</a:t>
+                      </a:r>
+                      <a:endParaRPr lang="en-US" sz="1150" dirty="0">
+                        <a:latin typeface="Pretendard" charset="0"/>
+                        <a:ea typeface="Pretendard" charset="0"/>
+                        <a:cs typeface="Pretendard" charset="0"/>
+                      </a:endParaRPr>
+                    </a:p>
+                  </a:txBody>
+                  <a:tcPr marL="91440" marR="91440" marT="45720" marB="45720" anchor="ctr">
+                    <a:lnL w="12700" cap="flat" cmpd="sng" algn="ctr">
+                      <a:solidFill>
+                        <a:srgbClr val="D8E8E6"/>
+                      </a:solidFill>
+                      <a:prstDash val="solid"/>
+                      <a:round/>
+                      <a:headEnd type="none" w="med" len="med"/>
+                      <a:tailEnd type="none" w="med" len="med"/>
+                    </a:lnL>
+                    <a:lnR w="12700" cap="flat" cmpd="sng" algn="ctr">
+                      <a:solidFill>
+                        <a:srgbClr val="D8E8E6"/>
+                      </a:solidFill>
+                      <a:prstDash val="solid"/>
+                      <a:round/>
+                      <a:headEnd type="none" w="med" len="med"/>
+                      <a:tailEnd type="none" w="med" len="med"/>
+                    </a:lnR>
+                    <a:lnT w="12700" cap="flat" cmpd="sng" algn="ctr">
+                      <a:solidFill>
+                        <a:srgbClr val="D8E8E6"/>
+                      </a:solidFill>
+                      <a:prstDash val="solid"/>
+                      <a:round/>
+                      <a:headEnd type="none" w="med" len="med"/>
+                      <a:tailEnd type="none" w="med" len="med"/>
+                    </a:lnT>
+                    <a:lnB w="12700" cap="flat" cmpd="sng" algn="ctr">
+                      <a:solidFill>
+                        <a:srgbClr val="D8E8E6"/>
+                      </a:solidFill>
+                      <a:prstDash val="solid"/>
+                      <a:round/>
+                      <a:headEnd type="none" w="med" len="med"/>
+                      <a:tailEnd type="none" w="med" len="med"/>
+                    </a:lnB>
+                  </a:tcPr>
+                </a:tc>
+                <a:tc>
+                  <a:txBody>
+                    <a:bodyPr/>
+                    <a:lstStyle/>
+                    <a:p>
+                      <a:pPr algn="ctr" indent="0" marL="0">
+                        <a:buNone/>
+                      </a:pPr>
+                      <a:r>
+                        <a:rPr lang="en-US" sz="1150" dirty="0">
+                          <a:solidFill>
+                            <a:srgbClr val="0B2E33"/>
+                          </a:solidFill>
+                          <a:latin typeface="Pretendard" pitchFamily="34" charset="0"/>
+                          <a:ea typeface="Pretendard" pitchFamily="34" charset="-122"/>
+                          <a:cs typeface="Pretendard" pitchFamily="34" charset="-120"/>
+                        </a:rPr>
+                        <a:t>a</a:t>
+                      </a:r>
+                      <a:endParaRPr lang="en-US" sz="1150" dirty="0">
+                        <a:latin typeface="Pretendard" charset="0"/>
+                        <a:ea typeface="Pretendard" charset="0"/>
+                        <a:cs typeface="Pretendard" charset="0"/>
+                      </a:endParaRPr>
+                    </a:p>
+                  </a:txBody>
+                  <a:tcPr marL="91440" marR="91440" marT="45720" marB="45720" anchor="ctr">
+                    <a:lnL w="12700" cap="flat" cmpd="sng" algn="ctr">
+                      <a:solidFill>
+                        <a:srgbClr val="D8E8E6"/>
+                      </a:solidFill>
+                      <a:prstDash val="solid"/>
+                      <a:round/>
+                      <a:headEnd type="none" w="med" len="med"/>
+                      <a:tailEnd type="none" w="med" len="med"/>
+                    </a:lnL>
+                    <a:lnR w="12700" cap="flat" cmpd="sng" algn="ctr">
+                      <a:solidFill>
+                        <a:srgbClr val="D8E8E6"/>
+                      </a:solidFill>
+                      <a:prstDash val="solid"/>
+                      <a:round/>
+                      <a:headEnd type="none" w="med" len="med"/>
+                      <a:tailEnd type="none" w="med" len="med"/>
+                    </a:lnR>
+                    <a:lnT w="12700" cap="flat" cmpd="sng" algn="ctr">
+                      <a:solidFill>
+                        <a:srgbClr val="D8E8E6"/>
+                      </a:solidFill>
+                      <a:prstDash val="solid"/>
+                      <a:round/>
+                      <a:headEnd type="none" w="med" len="med"/>
+                      <a:tailEnd type="none" w="med" len="med"/>
+                    </a:lnT>
+                    <a:lnB w="12700" cap="flat" cmpd="sng" algn="ctr">
+                      <a:solidFill>
+                        <a:srgbClr val="D8E8E6"/>
+                      </a:solidFill>
+                      <a:prstDash val="solid"/>
+                      <a:round/>
+                      <a:headEnd type="none" w="med" len="med"/>
+                      <a:tailEnd type="none" w="med" len="med"/>
+                    </a:lnB>
+                  </a:tcPr>
+                </a:tc>
+                <a:tc>
+                  <a:txBody>
+                    <a:bodyPr/>
+                    <a:lstStyle/>
+                    <a:p>
+                      <a:pPr algn="ctr" indent="0" marL="0">
+                        <a:buNone/>
+                      </a:pPr>
+                      <a:r>
+                        <a:rPr lang="en-US" sz="1150" dirty="0">
+                          <a:solidFill>
+                            <a:srgbClr val="0B2E33"/>
+                          </a:solidFill>
+                          <a:latin typeface="Pretendard" pitchFamily="34" charset="0"/>
+                          <a:ea typeface="Pretendard" pitchFamily="34" charset="-122"/>
+                          <a:cs typeface="Pretendard" pitchFamily="34" charset="-120"/>
+                        </a:rPr>
+                        <a:t>b</a:t>
+                      </a:r>
+                      <a:endParaRPr lang="en-US" sz="1150" dirty="0">
+                        <a:latin typeface="Pretendard" charset="0"/>
+                        <a:ea typeface="Pretendard" charset="0"/>
+                        <a:cs typeface="Pretendard" charset="0"/>
+                      </a:endParaRPr>
+                    </a:p>
+                  </a:txBody>
+                  <a:tcPr marL="91440" marR="91440" marT="45720" marB="45720" anchor="ctr">
+                    <a:lnL w="12700" cap="flat" cmpd="sng" algn="ctr">
+                      <a:solidFill>
+                        <a:srgbClr val="D8E8E6"/>
+                      </a:solidFill>
+                      <a:prstDash val="solid"/>
+                      <a:round/>
+                      <a:headEnd type="none" w="med" len="med"/>
+                      <a:tailEnd type="none" w="med" len="med"/>
+                    </a:lnL>
+                    <a:lnR w="12700" cap="flat" cmpd="sng" algn="ctr">
+                      <a:solidFill>
+                        <a:srgbClr val="D8E8E6"/>
+                      </a:solidFill>
+                      <a:prstDash val="solid"/>
+                      <a:round/>
+                      <a:headEnd type="none" w="med" len="med"/>
+                      <a:tailEnd type="none" w="med" len="med"/>
+                    </a:lnR>
+                    <a:lnT w="12700" cap="flat" cmpd="sng" algn="ctr">
+                      <a:solidFill>
+                        <a:srgbClr val="D8E8E6"/>
+                      </a:solidFill>
+                      <a:prstDash val="solid"/>
+                      <a:round/>
+                      <a:headEnd type="none" w="med" len="med"/>
+                      <a:tailEnd type="none" w="med" len="med"/>
+                    </a:lnT>
+                    <a:lnB w="12700" cap="flat" cmpd="sng" algn="ctr">
+                      <a:solidFill>
+                        <a:srgbClr val="D8E8E6"/>
+                      </a:solidFill>
+                      <a:prstDash val="solid"/>
+                      <a:round/>
+                      <a:headEnd type="none" w="med" len="med"/>
+                      <a:tailEnd type="none" w="med" len="med"/>
+                    </a:lnB>
+                  </a:tcPr>
+                </a:tc>
+                <a:tc>
+                  <a:txBody>
+                    <a:bodyPr/>
+                    <a:lstStyle/>
+                    <a:p>
+                      <a:pPr algn="ctr" indent="0" marL="0">
+                        <a:buNone/>
+                      </a:pPr>
+                      <a:r>
+                        <a:rPr lang="en-US" sz="1150" dirty="0">
+                          <a:solidFill>
+                            <a:srgbClr val="0B2E33"/>
+                          </a:solidFill>
+                          <a:latin typeface="Pretendard" pitchFamily="34" charset="0"/>
+                          <a:ea typeface="Pretendard" pitchFamily="34" charset="-122"/>
+                          <a:cs typeface="Pretendard" pitchFamily="34" charset="-120"/>
+                        </a:rPr>
+                        <a:t>c</a:t>
+                      </a:r>
+                      <a:endParaRPr lang="en-US" sz="1150" dirty="0">
+                        <a:latin typeface="Pretendard" charset="0"/>
+                        <a:ea typeface="Pretendard" charset="0"/>
+                        <a:cs typeface="Pretendard" charset="0"/>
+                      </a:endParaRPr>
+                    </a:p>
+                  </a:txBody>
+                  <a:tcPr marL="91440" marR="91440" marT="45720" marB="45720" anchor="ctr">
+                    <a:lnL w="12700" cap="flat" cmpd="sng" algn="ctr">
+                      <a:solidFill>
+                        <a:srgbClr val="D8E8E6"/>
+                      </a:solidFill>
+                      <a:prstDash val="solid"/>
+                      <a:round/>
+                      <a:headEnd type="none" w="med" len="med"/>
+                      <a:tailEnd type="none" w="med" len="med"/>
+                    </a:lnL>
+                    <a:lnR w="12700" cap="flat" cmpd="sng" algn="ctr">
+                      <a:solidFill>
+                        <a:srgbClr val="D8E8E6"/>
+                      </a:solidFill>
+                      <a:prstDash val="solid"/>
+                      <a:round/>
+                      <a:headEnd type="none" w="med" len="med"/>
+                      <a:tailEnd type="none" w="med" len="med"/>
+                    </a:lnR>
+                    <a:lnT w="12700" cap="flat" cmpd="sng" algn="ctr">
+                      <a:solidFill>
+                        <a:srgbClr val="D8E8E6"/>
+                      </a:solidFill>
+                      <a:prstDash val="solid"/>
+                      <a:round/>
+                      <a:headEnd type="none" w="med" len="med"/>
+                      <a:tailEnd type="none" w="med" len="med"/>
+                    </a:lnT>
+                    <a:lnB w="12700" cap="flat" cmpd="sng" algn="ctr">
+                      <a:solidFill>
+                        <a:srgbClr val="D8E8E6"/>
+                      </a:solidFill>
+                      <a:prstDash val="solid"/>
+                      <a:round/>
+                      <a:headEnd type="none" w="med" len="med"/>
+                      <a:tailEnd type="none" w="med" len="med"/>
+                    </a:lnB>
+                  </a:tcPr>
+                </a:tc>
+              </a:tr>
+            </a:tbl>
+          </a:graphicData>
+        </a:graphic>
+      </p:graphicFrame>
+      <p:sp>
+        <p:nvSpPr>
+          <p:cNvPr id="5" name="Text 2"/>
+          <p:cNvSpPr txBox="1"/>
+          <p:nvPr/>
+        </p:nvSpPr>
+        <p:spPr>
+          <a:xfrm>
+            <a:off x="548640" y="2971800"/>
+            <a:ext cx="11064240" cy="365760"/>
+          </a:xfrm>
+          <a:prstGeom prst="rect">
+            <a:avLst/>
+          </a:prstGeom>
+          <a:noFill/>
+          <a:ln/>
+        </p:spPr>
+        <p:txBody>
+          <a:bodyPr wrap="square" lIns="0" tIns="0" rIns="0" bIns="0" rtlCol="0" anchor="ctr"/>
+          <a:lstStyle/>
+          <a:p>
+            <a:pPr indent="0" marL="0">
+              <a:buNone/>
+            </a:pPr>
+            <a:r>
+              <a:rPr lang="en-US" sz="1100" i="1" dirty="0">
+                <a:solidFill>
+                  <a:srgbClr val="5B7A7E"/>
+                </a:solidFill>
+                <a:latin typeface="Pretendard" pitchFamily="34" charset="0"/>
+                <a:ea typeface="Pretendard" pitchFamily="34" charset="-122"/>
+                <a:cs typeface="Pretendard" pitchFamily="34" charset="-120"/>
+              </a:rPr>
+              <a:t>같은 문자(a, a)는 그 두 군 사이에 통계적 유의차가 없다는 뜻 (Table III, Tukey post-hoc)</a:t>
+            </a:r>
+            <a:endParaRPr lang="en-US" sz="1100" dirty="0"/>
+          </a:p>
+        </p:txBody>
+      </p:sp>
+      <p:sp>
+        <p:nvSpPr>
+          <p:cNvPr id="6" name="Shape 3"/>
+          <p:cNvSpPr/>
+          <p:nvPr/>
+        </p:nvSpPr>
+        <p:spPr>
+          <a:xfrm>
+            <a:off x="548640" y="3520440"/>
+            <a:ext cx="11064240" cy="1371600"/>
+          </a:xfrm>
+          <a:prstGeom prst="roundRect">
+            <a:avLst>
+              <a:gd name="adj" fmla="val 5333"/>
+            </a:avLst>
+          </a:prstGeom>
+          <a:solidFill>
+            <a:srgbClr val="FFFFFF"/>
+          </a:solidFill>
+          <a:ln w="12700">
+            <a:solidFill>
+              <a:srgbClr val="02C39A">
+                <a:alpha val="40000"/>
+              </a:srgbClr>
+            </a:solidFill>
+            <a:prstDash val="solid"/>
+          </a:ln>
+          <a:effectLst>
+            <a:outerShdw sx="100000" sy="100000" kx="0" ky="0" algn="bl" rotWithShape="0" blurRad="63500" dist="25400" dir="5400000">
+              <a:srgbClr val="000000">
+                <a:alpha val="10000"/>
+              </a:srgbClr>
+            </a:outerShdw>
+          </a:effectLst>
+        </p:spPr>
+      </p:sp>
+      <p:sp>
+        <p:nvSpPr>
+          <p:cNvPr id="7" name="Text 4"/>
+          <p:cNvSpPr txBox="1"/>
+          <p:nvPr/>
+        </p:nvSpPr>
+        <p:spPr>
+          <a:xfrm>
+            <a:off x="868680" y="3703320"/>
+            <a:ext cx="10424160" cy="1051560"/>
+          </a:xfrm>
+          <a:prstGeom prst="rect">
+            <a:avLst/>
+          </a:prstGeom>
+          <a:noFill/>
+          <a:ln/>
+        </p:spPr>
+        <p:txBody>
+          <a:bodyPr wrap="square" lIns="0" tIns="0" rIns="0" bIns="0" rtlCol="0" anchor="ctr"/>
+          <a:lstStyle/>
+          <a:p>
+            <a:pPr indent="0" marL="0">
+              <a:lnSpc>
+                <a:spcPct val="135000"/>
+              </a:lnSpc>
+              <a:buNone/>
+            </a:pPr>
+            <a:r>
+              <a:rPr lang="en-US" sz="1350" b="1" dirty="0">
+                <a:solidFill>
+                  <a:srgbClr val="028090"/>
+                </a:solidFill>
+                <a:latin typeface="Pretendard" pitchFamily="34" charset="0"/>
+                <a:ea typeface="Pretendard" pitchFamily="34" charset="-122"/>
+                <a:cs typeface="Pretendard" pitchFamily="34" charset="-120"/>
+              </a:rPr>
+              <a:t>핵심 수치:  </a:t>
+            </a:r>
+            <a:pPr indent="0" marL="0">
+              <a:lnSpc>
+                <a:spcPct val="135000"/>
+              </a:lnSpc>
+              <a:buNone/>
+            </a:pPr>
+            <a:r>
+              <a:rPr lang="en-US" sz="1350" dirty="0">
+                <a:solidFill>
+                  <a:srgbClr val="0B2E33"/>
+                </a:solidFill>
+                <a:latin typeface="Pretendard" pitchFamily="34" charset="0"/>
+                <a:ea typeface="Pretendard" pitchFamily="34" charset="-122"/>
+                <a:cs typeface="Pretendard" pitchFamily="34" charset="-120"/>
+              </a:rPr>
+              <a:t>양성대조 vs PGE2군의 2주 재발량 차이는 통계적으로 유의하지 않음 (p = 0.605, Table III). 반면 비타민D·코르티코스테로이드는 서로 및 위 두 군과 모두 유의하게 다름(p&lt;0.001).</a:t>
+            </a:r>
+            <a:endParaRPr lang="en-US" sz="1350" dirty="0"/>
+          </a:p>
+        </p:txBody>
+      </p:sp>
+      <p:sp>
+        <p:nvSpPr>
+          <p:cNvPr id="8" name="Text 5"/>
+          <p:cNvSpPr txBox="1"/>
+          <p:nvPr/>
+        </p:nvSpPr>
+        <p:spPr>
+          <a:xfrm>
+            <a:off x="548640" y="5074920"/>
+            <a:ext cx="11064240" cy="457200"/>
+          </a:xfrm>
+          <a:prstGeom prst="rect">
+            <a:avLst/>
+          </a:prstGeom>
+          <a:noFill/>
+          <a:ln/>
+        </p:spPr>
+        <p:txBody>
+          <a:bodyPr wrap="square" lIns="0" tIns="0" rIns="0" bIns="0" rtlCol="0" anchor="ctr"/>
+          <a:lstStyle/>
+          <a:p>
+            <a:pPr indent="0" marL="0">
+              <a:buNone/>
+            </a:pPr>
+            <a:r>
+              <a:rPr lang="en-US" sz="1400" b="1" dirty="0">
+                <a:solidFill>
+                  <a:srgbClr val="028090"/>
+                </a:solidFill>
+                <a:latin typeface="Pretendard" pitchFamily="34" charset="0"/>
+                <a:ea typeface="Pretendard" pitchFamily="34" charset="-122"/>
+                <a:cs typeface="Pretendard" pitchFamily="34" charset="-120"/>
+              </a:rPr>
+              <a:t>→ 통계적으로 유의미한 계층 구조:  {양성대조, PGE2} &lt; 비타민D &lt; 코르티코스테로이드  (재발 적은 순)</a:t>
+            </a:r>
+            <a:endParaRPr lang="en-US" sz="1400" dirty="0"/>
+          </a:p>
+        </p:txBody>
+      </p:sp>
+      <p:sp>
+        <p:nvSpPr>
+          <p:cNvPr id="9" name="Text 6"/>
+          <p:cNvSpPr txBox="1"/>
+          <p:nvPr/>
+        </p:nvSpPr>
+        <p:spPr>
+          <a:xfrm>
+            <a:off x="548640" y="5623560"/>
+            <a:ext cx="11064240" cy="1005840"/>
+          </a:xfrm>
+          <a:prstGeom prst="rect">
+            <a:avLst/>
+          </a:prstGeom>
+          <a:noFill/>
+          <a:ln/>
+        </p:spPr>
+        <p:txBody>
+          <a:bodyPr wrap="square" lIns="0" tIns="0" rIns="0" bIns="0" rtlCol="0" anchor="ctr"/>
+          <a:lstStyle/>
+          <a:p>
+            <a:pPr indent="0" marL="0">
+              <a:lnSpc>
+                <a:spcPct val="130000"/>
+              </a:lnSpc>
+              <a:buNone/>
+            </a:pPr>
+            <a:r>
+              <a:rPr lang="en-US" sz="1150" dirty="0">
+                <a:solidFill>
+                  <a:srgbClr val="5B7A7E"/>
+                </a:solidFill>
+                <a:latin typeface="Pretendard" pitchFamily="34" charset="0"/>
+                <a:ea typeface="Pretendard" pitchFamily="34" charset="-122"/>
+                <a:cs typeface="Pretendard" pitchFamily="34" charset="-120"/>
+              </a:rPr>
+              <a:t>원문 안에서도 서술이 갈린다 — Results 본문·Conclusions는 "PGE2가 최소 재발"이라 쓰고, Discussion "Interpretation of findings"는 "대조군이 최소, 그 다음 PGE2"라고 씀. 둘 다 raw mean 순위 서술과 통계적 유의성 서술을 섞어 쓴 단순화이며, 정확한 결론은 위 표와 같이 '대조군·PGE2군 통계적 동률'이다.</a:t>
+            </a:r>
+            <a:endParaRPr lang="en-US" sz="1150" dirty="0"/>
+          </a:p>
+        </p:txBody>
+      </p:sp>
+      <p:sp>
+        <p:nvSpPr>
+          <p:cNvPr id="10" name="Text 7"/>
+          <p:cNvSpPr txBox="1"/>
+          <p:nvPr/>
+        </p:nvSpPr>
+        <p:spPr>
+          <a:xfrm>
+            <a:off x="11365992" y="6355080"/>
+            <a:ext cx="457200" cy="320040"/>
+          </a:xfrm>
+          <a:prstGeom prst="rect">
+            <a:avLst/>
+          </a:prstGeom>
+          <a:noFill/>
+          <a:ln/>
+        </p:spPr>
+        <p:txBody>
+          <a:bodyPr wrap="square" lIns="0" tIns="0" rIns="0" bIns="0" rtlCol="0" anchor="ctr"/>
+          <a:lstStyle/>
+          <a:p>
+            <a:pPr algn="r" indent="0" marL="0">
+              <a:buNone/>
+            </a:pPr>
+            <a:r>
+              <a:rPr lang="en-US" sz="1100" dirty="0">
+                <a:solidFill>
+                  <a:srgbClr val="5B7A7E"/>
+                </a:solidFill>
+                <a:latin typeface="Pretendard" pitchFamily="34" charset="0"/>
+                <a:ea typeface="Pretendard" pitchFamily="34" charset="-122"/>
+                <a:cs typeface="Pretendard" pitchFamily="34" charset="-120"/>
+              </a:rPr>
+              <a:t>12</a:t>
+            </a:r>
+            <a:endParaRPr lang="en-US" sz="1100" dirty="0"/>
+          </a:p>
+        </p:txBody>
+      </p:sp>
+    </p:spTree>
+  </p:cSld>
+  <p:clrMapOvr>
+    <a:masterClrMapping/>
+  </p:clrMapOvr>
+</p:sld>
+</file>
+
 <file path=ppt/slides/slide2.xml><?xml version="1.0" encoding="utf-8"?>
 <p:sld xmlns:a="http://schemas.openxmlformats.org/drawingml/2006/main" xmlns:r="http://schemas.openxmlformats.org/officeDocument/2006/relationships" xmlns:p="http://schemas.openxmlformats.org/presentationml/2006/main">
   <p:cSld name="Slide 2">
@@ -6882,7 +8353,7 @@
                 <a:ea typeface="Pretendard" pitchFamily="34" charset="-122"/>
                 <a:cs typeface="Pretendard" pitchFamily="34" charset="-120"/>
               </a:rPr>
-              <a:t>-0.86 ± 0.23 mm  (최소 재발)</a:t>
+              <a:t>-0.86 ± 0.23 mm  (양성대조와 통계적 동률 최소)</a:t>
             </a:r>
             <a:endParaRPr lang="en-US" sz="1350" dirty="0"/>
           </a:p>
@@ -6890,7 +8361,46 @@
       </p:sp>
       <p:sp>
         <p:nvSpPr>
-          <p:cNvPr id="7" name="Shape 5"/>
+          <p:cNvPr id="7" name="Text 5"/>
+          <p:cNvSpPr txBox="1"/>
+          <p:nvPr/>
+        </p:nvSpPr>
+        <p:spPr>
+          <a:xfrm>
+            <a:off x="868680" y="5440680"/>
+            <a:ext cx="4754880" cy="320040"/>
+          </a:xfrm>
+          <a:prstGeom prst="rect">
+            <a:avLst/>
+          </a:prstGeom>
+          <a:noFill/>
+          <a:ln/>
+        </p:spPr>
+        <p:txBody>
+          <a:bodyPr wrap="square" lIns="0" tIns="0" rIns="0" bIns="0" rtlCol="0" anchor="ctr"/>
+          <a:lstStyle/>
+          <a:p>
+            <a:pPr indent="0" marL="0">
+              <a:buNone/>
+            </a:pPr>
+            <a:r>
+              <a:rPr lang="en-US" sz="1000" i="1" dirty="0">
+                <a:solidFill>
+                  <a:srgbClr val="5B7A7E"/>
+                </a:solidFill>
+                <a:latin typeface="Pretendard" pitchFamily="34" charset="0"/>
+                <a:ea typeface="Pretendard" pitchFamily="34" charset="-122"/>
+                <a:cs typeface="Pretendard" pitchFamily="34" charset="-120"/>
+              </a:rPr>
+              <a:t>* 양성대조 vs PGE2 재발량 차이는 통계적으로 유의하지 않음 (p=0.605) — Appendix 참고</a:t>
+            </a:r>
+            <a:endParaRPr lang="en-US" sz="1000" dirty="0"/>
+          </a:p>
+        </p:txBody>
+      </p:sp>
+      <p:sp>
+        <p:nvSpPr>
+          <p:cNvPr id="8" name="Shape 6"/>
           <p:cNvSpPr/>
           <p:nvPr/>
         </p:nvSpPr>
@@ -6912,7 +8422,7 @@
       </p:sp>
       <p:sp>
         <p:nvSpPr>
-          <p:cNvPr id="8" name="Text 6"/>
+          <p:cNvPr id="9" name="Text 7"/>
           <p:cNvSpPr txBox="1"/>
           <p:nvPr/>
         </p:nvSpPr>
@@ -6951,7 +8461,7 @@
       </p:sp>
       <p:sp>
         <p:nvSpPr>
-          <p:cNvPr id="9" name="Text 7"/>
+          <p:cNvPr id="10" name="Text 8"/>
           <p:cNvSpPr txBox="1"/>
           <p:nvPr/>
         </p:nvSpPr>
@@ -7027,7 +8537,7 @@
       </p:sp>
       <p:sp>
         <p:nvSpPr>
-          <p:cNvPr id="10" name="Text 8"/>
+          <p:cNvPr id="11" name="Text 9"/>
           <p:cNvSpPr txBox="1"/>
           <p:nvPr/>
         </p:nvSpPr>

--- a/치과약리학실험2-논문발표/치과약리학실험2_논문발표.pptx
+++ b/치과약리학실험2-논문발표/치과약리학실험2_논문발표.pptx
@@ -2223,46 +2223,7 @@
         </p:nvSpPr>
         <p:spPr>
           <a:xfrm>
-            <a:off x="822960" y="1463040"/>
-            <a:ext cx="9144000" cy="365760"/>
-          </a:xfrm>
-          <a:prstGeom prst="rect">
-            <a:avLst/>
-          </a:prstGeom>
-          <a:noFill/>
-          <a:ln/>
-        </p:spPr>
-        <p:txBody>
-          <a:bodyPr wrap="square" lIns="0" tIns="0" rIns="0" bIns="0" rtlCol="0" anchor="ctr"/>
-          <a:lstStyle/>
-          <a:p>
-            <a:pPr indent="0" marL="0">
-              <a:buNone/>
-            </a:pPr>
-            <a:r>
-              <a:rPr lang="en-US" sz="1300" b="1" spc="100" kern="0" dirty="0">
-                <a:solidFill>
-                  <a:srgbClr val="02C39A"/>
-                </a:solidFill>
-                <a:latin typeface="Pretendard" pitchFamily="34" charset="0"/>
-                <a:ea typeface="Pretendard" pitchFamily="34" charset="-122"/>
-                <a:cs typeface="Pretendard" pitchFamily="34" charset="-120"/>
-              </a:rPr>
-              <a:t>핵심 결론</a:t>
-            </a:r>
-            <a:endParaRPr lang="en-US" sz="1300" dirty="0"/>
-          </a:p>
-        </p:txBody>
-      </p:sp>
-      <p:sp>
-        <p:nvSpPr>
-          <p:cNvPr id="4" name="Text 2"/>
-          <p:cNvSpPr txBox="1"/>
-          <p:nvPr/>
-        </p:nvSpPr>
-        <p:spPr>
-          <a:xfrm>
-            <a:off x="822960" y="1965960"/>
+            <a:off x="822960" y="2743200"/>
             <a:ext cx="10332720" cy="1828800"/>
           </a:xfrm>
           <a:prstGeom prst="rect">
@@ -2318,13 +2279,13 @@
       </p:sp>
       <p:sp>
         <p:nvSpPr>
-          <p:cNvPr id="5" name="Text 3"/>
+          <p:cNvPr id="4" name="Text 2"/>
           <p:cNvSpPr txBox="1"/>
           <p:nvPr/>
         </p:nvSpPr>
         <p:spPr>
           <a:xfrm>
-            <a:off x="822960" y="3931920"/>
+            <a:off x="822960" y="4709160"/>
             <a:ext cx="10332720" cy="822960"/>
           </a:xfrm>
           <a:prstGeom prst="rect">
@@ -2352,7 +2313,7 @@
                 <a:ea typeface="Pretendard" pitchFamily="34" charset="-122"/>
                 <a:cs typeface="Pretendard" pitchFamily="34" charset="-120"/>
               </a:rPr>
-              <a:t>코르티코스테로이드=최대가속·최대재발 / PGE2=최소가속·최소재발 / 비타민D=중간 — '빠른 이동'과 '안정적 결과' 사이의 트레이드오프를 보여준 첫 3약물 비교 연구</a:t>
+              <a:t>코르티코스테로이드=최대가속·최대재발 / PGE2=최소가속·최소재발 / 비타민D=중간 - '빠른 이동'과 '안정적 결과'의 트레이드오프를 보여준 첫 3약물 비교연구임</a:t>
             </a:r>
             <a:endParaRPr lang="en-US" sz="1400" dirty="0"/>
           </a:p>
@@ -2360,7 +2321,7 @@
       </p:sp>
       <p:sp>
         <p:nvSpPr>
-          <p:cNvPr id="6" name="Text 4"/>
+          <p:cNvPr id="5" name="Text 3"/>
           <p:cNvSpPr txBox="1"/>
           <p:nvPr/>
         </p:nvSpPr>
@@ -3668,7 +3629,7 @@
                 <a:ea typeface="Pretendard" pitchFamily="34" charset="-122"/>
                 <a:cs typeface="Pretendard" pitchFamily="34" charset="-120"/>
               </a:rPr>
-              <a:t>같은 문자(a, a)는 그 두 군 사이에 통계적 유의차가 없다는 뜻 (Table III, Tukey post-hoc)</a:t>
+              <a:t>※ 같은 문자(a, a) - 두 군간 통계적 유의차 없음 (Table III, Tukey post-hoc)</a:t>
             </a:r>
             <a:endParaRPr lang="en-US" sz="1100" dirty="0"/>
           </a:p>
@@ -3802,7 +3763,7 @@
                 <a:ea typeface="Pretendard" pitchFamily="34" charset="-122"/>
                 <a:cs typeface="Pretendard" pitchFamily="34" charset="-120"/>
               </a:rPr>
-              <a:t>→ 통계적으로 유의미한 계층 구조:  {양성대조, PGE2} &lt; 비타민D &lt; 코르티코스테로이드  (재발 적은 순)</a:t>
+              <a:t>※ 통계적으로 유의미한 계층 구조 :  {양성대조, PGE2} &lt; 비타민D &lt; 코르티코스테로이드  (재발 적은 순)</a:t>
             </a:r>
             <a:endParaRPr lang="en-US" sz="1400" dirty="0"/>
           </a:p>
@@ -3844,7 +3805,47 @@
                 <a:ea typeface="Pretendard" pitchFamily="34" charset="-122"/>
                 <a:cs typeface="Pretendard" pitchFamily="34" charset="-120"/>
               </a:rPr>
-              <a:t>원문 안에서도 서술이 갈린다 — Results 본문·Conclusions는 "PGE2가 최소 재발"이라 쓰고, Discussion "Interpretation of findings"는 "대조군이 최소, 그 다음 PGE2"라고 씀. 둘 다 raw mean 순위 서술과 통계적 유의성 서술을 섞어 쓴 단순화이며, 정확한 결론은 위 표와 같이 '대조군·PGE2군 통계적 동률'이다.</a:t>
+              <a:t>- Results 본문·Conclusions: "PGE2가 최소 재발"이라 서술</a:t>
+            </a:r>
+            <a:endParaRPr lang="en-US" sz="1150" dirty="0"/>
+          </a:p>
+          <a:p>
+            <a:pPr indent="0" marL="0">
+              <a:lnSpc>
+                <a:spcPct val="130000"/>
+              </a:lnSpc>
+              <a:buNone/>
+            </a:pPr>
+            <a:r>
+              <a:rPr lang="en-US" sz="1150" dirty="0">
+                <a:solidFill>
+                  <a:srgbClr val="5B7A7E"/>
+                </a:solidFill>
+                <a:latin typeface="Pretendard" pitchFamily="34" charset="0"/>
+                <a:ea typeface="Pretendard" pitchFamily="34" charset="-122"/>
+                <a:cs typeface="Pretendard" pitchFamily="34" charset="-120"/>
+              </a:rPr>
+              <a:t>- Discussion 'Interpretation of findings': "대조군이 최소, 그 다음 PGE2"라 서술</a:t>
+            </a:r>
+            <a:endParaRPr lang="en-US" sz="1150" dirty="0"/>
+          </a:p>
+          <a:p>
+            <a:pPr indent="0" marL="0">
+              <a:lnSpc>
+                <a:spcPct val="130000"/>
+              </a:lnSpc>
+              <a:buNone/>
+            </a:pPr>
+            <a:r>
+              <a:rPr lang="en-US" sz="1150" dirty="0">
+                <a:solidFill>
+                  <a:srgbClr val="5B7A7E"/>
+                </a:solidFill>
+                <a:latin typeface="Pretendard" pitchFamily="34" charset="0"/>
+                <a:ea typeface="Pretendard" pitchFamily="34" charset="-122"/>
+                <a:cs typeface="Pretendard" pitchFamily="34" charset="-120"/>
+              </a:rPr>
+              <a:t>※ 둘 다 raw mean 순위와 통계적 유의성 서술을 혼용한 단순화 - 정확한 결론은 위 표대로 '대조군·PGE2군 통계적 동률'임</a:t>
             </a:r>
             <a:endParaRPr lang="en-US" sz="1150" dirty="0"/>
           </a:p>
@@ -3929,46 +3930,7 @@
         </p:nvSpPr>
         <p:spPr>
           <a:xfrm>
-            <a:off x="548640" y="411480"/>
-            <a:ext cx="9144000" cy="365760"/>
-          </a:xfrm>
-          <a:prstGeom prst="rect">
-            <a:avLst/>
-          </a:prstGeom>
-          <a:noFill/>
-          <a:ln/>
-        </p:spPr>
-        <p:txBody>
-          <a:bodyPr wrap="square" lIns="0" tIns="0" rIns="0" bIns="0" rtlCol="0" anchor="ctr"/>
-          <a:lstStyle/>
-          <a:p>
-            <a:pPr indent="0" marL="0">
-              <a:buNone/>
-            </a:pPr>
-            <a:r>
-              <a:rPr lang="en-US" sz="1300" b="1" spc="100" kern="0" dirty="0">
-                <a:solidFill>
-                  <a:srgbClr val="00A896"/>
-                </a:solidFill>
-                <a:latin typeface="Pretendard" pitchFamily="34" charset="0"/>
-                <a:ea typeface="Pretendard" pitchFamily="34" charset="-122"/>
-                <a:cs typeface="Pretendard" pitchFamily="34" charset="-120"/>
-              </a:rPr>
-              <a:t>배경</a:t>
-            </a:r>
-            <a:endParaRPr lang="en-US" sz="1300" dirty="0"/>
-          </a:p>
-        </p:txBody>
-      </p:sp>
-      <p:sp>
-        <p:nvSpPr>
-          <p:cNvPr id="3" name="Text 1"/>
-          <p:cNvSpPr txBox="1"/>
-          <p:nvPr/>
-        </p:nvSpPr>
-        <p:spPr>
-          <a:xfrm>
-            <a:off x="548640" y="749808"/>
+            <a:off x="548640" y="502920"/>
             <a:ext cx="11064240" cy="914400"/>
           </a:xfrm>
           <a:prstGeom prst="rect">
@@ -4001,7 +3963,7 @@
       </p:sp>
       <p:sp>
         <p:nvSpPr>
-          <p:cNvPr id="4" name="Shape 2"/>
+          <p:cNvPr id="3" name="Shape 1"/>
           <p:cNvSpPr/>
           <p:nvPr/>
         </p:nvSpPr>
@@ -4037,7 +3999,7 @@
       </p:sp>
       <p:sp>
         <p:nvSpPr>
-          <p:cNvPr id="5" name="Shape 3"/>
+          <p:cNvPr id="4" name="Shape 2"/>
           <p:cNvSpPr/>
           <p:nvPr/>
         </p:nvSpPr>
@@ -4057,7 +4019,7 @@
       </p:sp>
       <p:sp>
         <p:nvSpPr>
-          <p:cNvPr id="6" name="Text 4"/>
+          <p:cNvPr id="5" name="Text 3"/>
           <p:cNvSpPr txBox="1"/>
           <p:nvPr/>
         </p:nvSpPr>
@@ -4096,7 +4058,7 @@
       </p:sp>
       <p:sp>
         <p:nvSpPr>
-          <p:cNvPr id="7" name="Text 5"/>
+          <p:cNvPr id="6" name="Text 4"/>
           <p:cNvSpPr txBox="1"/>
           <p:nvPr/>
         </p:nvSpPr>
@@ -4135,7 +4097,7 @@
       </p:sp>
       <p:sp>
         <p:nvSpPr>
-          <p:cNvPr id="8" name="Text 6"/>
+          <p:cNvPr id="7" name="Text 5"/>
           <p:cNvSpPr txBox="1"/>
           <p:nvPr/>
         </p:nvSpPr>
@@ -4174,7 +4136,7 @@
       </p:sp>
       <p:sp>
         <p:nvSpPr>
-          <p:cNvPr id="9" name="Shape 7"/>
+          <p:cNvPr id="8" name="Shape 6"/>
           <p:cNvSpPr/>
           <p:nvPr/>
         </p:nvSpPr>
@@ -4210,7 +4172,7 @@
       </p:sp>
       <p:sp>
         <p:nvSpPr>
-          <p:cNvPr id="10" name="Shape 8"/>
+          <p:cNvPr id="9" name="Shape 7"/>
           <p:cNvSpPr/>
           <p:nvPr/>
         </p:nvSpPr>
@@ -4230,7 +4192,7 @@
       </p:sp>
       <p:sp>
         <p:nvSpPr>
-          <p:cNvPr id="11" name="Text 9"/>
+          <p:cNvPr id="10" name="Text 8"/>
           <p:cNvSpPr txBox="1"/>
           <p:nvPr/>
         </p:nvSpPr>
@@ -4269,7 +4231,7 @@
       </p:sp>
       <p:sp>
         <p:nvSpPr>
-          <p:cNvPr id="12" name="Text 10"/>
+          <p:cNvPr id="11" name="Text 9"/>
           <p:cNvSpPr txBox="1"/>
           <p:nvPr/>
         </p:nvSpPr>
@@ -4308,7 +4270,7 @@
       </p:sp>
       <p:sp>
         <p:nvSpPr>
-          <p:cNvPr id="13" name="Text 11"/>
+          <p:cNvPr id="12" name="Text 10"/>
           <p:cNvSpPr txBox="1"/>
           <p:nvPr/>
         </p:nvSpPr>
@@ -4347,7 +4309,7 @@
       </p:sp>
       <p:sp>
         <p:nvSpPr>
-          <p:cNvPr id="14" name="Shape 12"/>
+          <p:cNvPr id="13" name="Shape 11"/>
           <p:cNvSpPr/>
           <p:nvPr/>
         </p:nvSpPr>
@@ -4383,7 +4345,7 @@
       </p:sp>
       <p:sp>
         <p:nvSpPr>
-          <p:cNvPr id="15" name="Shape 13"/>
+          <p:cNvPr id="14" name="Shape 12"/>
           <p:cNvSpPr/>
           <p:nvPr/>
         </p:nvSpPr>
@@ -4403,7 +4365,7 @@
       </p:sp>
       <p:sp>
         <p:nvSpPr>
-          <p:cNvPr id="16" name="Text 14"/>
+          <p:cNvPr id="15" name="Text 13"/>
           <p:cNvSpPr txBox="1"/>
           <p:nvPr/>
         </p:nvSpPr>
@@ -4442,7 +4404,7 @@
       </p:sp>
       <p:sp>
         <p:nvSpPr>
-          <p:cNvPr id="17" name="Text 15"/>
+          <p:cNvPr id="16" name="Text 14"/>
           <p:cNvSpPr txBox="1"/>
           <p:nvPr/>
         </p:nvSpPr>
@@ -4481,7 +4443,7 @@
       </p:sp>
       <p:sp>
         <p:nvSpPr>
-          <p:cNvPr id="18" name="Text 16"/>
+          <p:cNvPr id="17" name="Text 15"/>
           <p:cNvSpPr txBox="1"/>
           <p:nvPr/>
         </p:nvSpPr>
@@ -4520,7 +4482,7 @@
       </p:sp>
       <p:sp>
         <p:nvSpPr>
-          <p:cNvPr id="19" name="Text 17"/>
+          <p:cNvPr id="18" name="Text 16"/>
           <p:cNvSpPr txBox="1"/>
           <p:nvPr/>
         </p:nvSpPr>
@@ -4597,46 +4559,7 @@
         </p:nvSpPr>
         <p:spPr>
           <a:xfrm>
-            <a:off x="548640" y="411480"/>
-            <a:ext cx="9144000" cy="365760"/>
-          </a:xfrm>
-          <a:prstGeom prst="rect">
-            <a:avLst/>
-          </a:prstGeom>
-          <a:noFill/>
-          <a:ln/>
-        </p:spPr>
-        <p:txBody>
-          <a:bodyPr wrap="square" lIns="0" tIns="0" rIns="0" bIns="0" rtlCol="0" anchor="ctr"/>
-          <a:lstStyle/>
-          <a:p>
-            <a:pPr indent="0" marL="0">
-              <a:buNone/>
-            </a:pPr>
-            <a:r>
-              <a:rPr lang="en-US" sz="1300" b="1" spc="100" kern="0" dirty="0">
-                <a:solidFill>
-                  <a:srgbClr val="00A896"/>
-                </a:solidFill>
-                <a:latin typeface="Pretendard" pitchFamily="34" charset="0"/>
-                <a:ea typeface="Pretendard" pitchFamily="34" charset="-122"/>
-                <a:cs typeface="Pretendard" pitchFamily="34" charset="-120"/>
-              </a:rPr>
-              <a:t>약리기전</a:t>
-            </a:r>
-            <a:endParaRPr lang="en-US" sz="1300" dirty="0"/>
-          </a:p>
-        </p:txBody>
-      </p:sp>
-      <p:sp>
-        <p:nvSpPr>
-          <p:cNvPr id="3" name="Text 1"/>
-          <p:cNvSpPr txBox="1"/>
-          <p:nvPr/>
-        </p:nvSpPr>
-        <p:spPr>
-          <a:xfrm>
-            <a:off x="548640" y="749808"/>
+            <a:off x="548640" y="502920"/>
             <a:ext cx="11064240" cy="914400"/>
           </a:xfrm>
           <a:prstGeom prst="rect">
@@ -4669,7 +4592,7 @@
       </p:sp>
       <p:sp>
         <p:nvSpPr>
-          <p:cNvPr id="4" name="Shape 2"/>
+          <p:cNvPr id="3" name="Shape 1"/>
           <p:cNvSpPr/>
           <p:nvPr/>
         </p:nvSpPr>
@@ -4705,7 +4628,7 @@
       </p:sp>
       <p:sp>
         <p:nvSpPr>
-          <p:cNvPr id="5" name="Shape 3"/>
+          <p:cNvPr id="4" name="Shape 2"/>
           <p:cNvSpPr/>
           <p:nvPr/>
         </p:nvSpPr>
@@ -4729,7 +4652,7 @@
       </p:sp>
       <p:sp>
         <p:nvSpPr>
-          <p:cNvPr id="6" name="Text 4"/>
+          <p:cNvPr id="5" name="Text 3"/>
           <p:cNvSpPr txBox="1"/>
           <p:nvPr/>
         </p:nvSpPr>
@@ -4768,7 +4691,7 @@
       </p:sp>
       <p:sp>
         <p:nvSpPr>
-          <p:cNvPr id="7" name="Text 5"/>
+          <p:cNvPr id="6" name="Text 4"/>
           <p:cNvSpPr txBox="1"/>
           <p:nvPr/>
         </p:nvSpPr>
@@ -4810,7 +4733,7 @@
       </p:sp>
       <p:sp>
         <p:nvSpPr>
-          <p:cNvPr id="8" name="Shape 6"/>
+          <p:cNvPr id="7" name="Shape 5"/>
           <p:cNvSpPr/>
           <p:nvPr/>
         </p:nvSpPr>
@@ -4846,7 +4769,7 @@
       </p:sp>
       <p:sp>
         <p:nvSpPr>
-          <p:cNvPr id="9" name="Shape 7"/>
+          <p:cNvPr id="8" name="Shape 6"/>
           <p:cNvSpPr/>
           <p:nvPr/>
         </p:nvSpPr>
@@ -4870,7 +4793,7 @@
       </p:sp>
       <p:sp>
         <p:nvSpPr>
-          <p:cNvPr id="10" name="Text 8"/>
+          <p:cNvPr id="9" name="Text 7"/>
           <p:cNvSpPr txBox="1"/>
           <p:nvPr/>
         </p:nvSpPr>
@@ -4909,7 +4832,7 @@
       </p:sp>
       <p:sp>
         <p:nvSpPr>
-          <p:cNvPr id="11" name="Text 9"/>
+          <p:cNvPr id="10" name="Text 8"/>
           <p:cNvSpPr txBox="1"/>
           <p:nvPr/>
         </p:nvSpPr>
@@ -4951,7 +4874,7 @@
       </p:sp>
       <p:sp>
         <p:nvSpPr>
-          <p:cNvPr id="12" name="Shape 10"/>
+          <p:cNvPr id="11" name="Shape 9"/>
           <p:cNvSpPr/>
           <p:nvPr/>
         </p:nvSpPr>
@@ -4987,7 +4910,7 @@
       </p:sp>
       <p:sp>
         <p:nvSpPr>
-          <p:cNvPr id="13" name="Shape 11"/>
+          <p:cNvPr id="12" name="Shape 10"/>
           <p:cNvSpPr/>
           <p:nvPr/>
         </p:nvSpPr>
@@ -5011,7 +4934,7 @@
       </p:sp>
       <p:sp>
         <p:nvSpPr>
-          <p:cNvPr id="14" name="Text 12"/>
+          <p:cNvPr id="13" name="Text 11"/>
           <p:cNvSpPr txBox="1"/>
           <p:nvPr/>
         </p:nvSpPr>
@@ -5050,7 +4973,7 @@
       </p:sp>
       <p:sp>
         <p:nvSpPr>
-          <p:cNvPr id="15" name="Text 13"/>
+          <p:cNvPr id="14" name="Text 12"/>
           <p:cNvSpPr txBox="1"/>
           <p:nvPr/>
         </p:nvSpPr>
@@ -5092,7 +5015,7 @@
       </p:sp>
       <p:sp>
         <p:nvSpPr>
-          <p:cNvPr id="16" name="Text 14"/>
+          <p:cNvPr id="15" name="Text 13"/>
           <p:cNvSpPr txBox="1"/>
           <p:nvPr/>
         </p:nvSpPr>
@@ -5123,7 +5046,7 @@
                 <a:ea typeface="Pretendard" pitchFamily="34" charset="-122"/>
                 <a:cs typeface="Pretendard" pitchFamily="34" charset="-120"/>
               </a:rPr>
-              <a:t>→ 세 약물 모두 '파골세포 활성화'라는 종착점은 같지만, 도달 경로(직접 자극 vs RANKL 매개 vs 면역조절)가 달라 가속 강도와 부작용(재발)이 다르게 나타남</a:t>
+              <a:t>※ 세 약물 모두 '파골세포 활성화'라는 종착점은 같지만, 도달 경로(직접 자극 vs RANKL 매개 vs 면역조절)가 달라 가속 강도와 부작용(재발)이 다르게 나타남</a:t>
             </a:r>
             <a:endParaRPr lang="en-US" sz="1250" dirty="0"/>
           </a:p>
@@ -5131,7 +5054,7 @@
       </p:sp>
       <p:sp>
         <p:nvSpPr>
-          <p:cNvPr id="17" name="Text 15"/>
+          <p:cNvPr id="16" name="Text 14"/>
           <p:cNvSpPr txBox="1"/>
           <p:nvPr/>
         </p:nvSpPr>
@@ -5208,46 +5131,7 @@
         </p:nvSpPr>
         <p:spPr>
           <a:xfrm>
-            <a:off x="548640" y="411480"/>
-            <a:ext cx="9144000" cy="365760"/>
-          </a:xfrm>
-          <a:prstGeom prst="rect">
-            <a:avLst/>
-          </a:prstGeom>
-          <a:noFill/>
-          <a:ln/>
-        </p:spPr>
-        <p:txBody>
-          <a:bodyPr wrap="square" lIns="0" tIns="0" rIns="0" bIns="0" rtlCol="0" anchor="ctr"/>
-          <a:lstStyle/>
-          <a:p>
-            <a:pPr indent="0" marL="0">
-              <a:buNone/>
-            </a:pPr>
-            <a:r>
-              <a:rPr lang="en-US" sz="1300" b="1" spc="100" kern="0" dirty="0">
-                <a:solidFill>
-                  <a:srgbClr val="00A896"/>
-                </a:solidFill>
-                <a:latin typeface="Pretendard" pitchFamily="34" charset="0"/>
-                <a:ea typeface="Pretendard" pitchFamily="34" charset="-122"/>
-                <a:cs typeface="Pretendard" pitchFamily="34" charset="-120"/>
-              </a:rPr>
-              <a:t>선행연구 비교</a:t>
-            </a:r>
-            <a:endParaRPr lang="en-US" sz="1300" dirty="0"/>
-          </a:p>
-        </p:txBody>
-      </p:sp>
-      <p:sp>
-        <p:nvSpPr>
-          <p:cNvPr id="3" name="Text 1"/>
-          <p:cNvSpPr txBox="1"/>
-          <p:nvPr/>
-        </p:nvSpPr>
-        <p:spPr>
-          <a:xfrm>
-            <a:off x="548640" y="749808"/>
+            <a:off x="548640" y="502920"/>
             <a:ext cx="11064240" cy="914400"/>
           </a:xfrm>
           <a:prstGeom prst="rect">
@@ -5280,7 +5164,7 @@
       </p:sp>
       <p:sp>
         <p:nvSpPr>
-          <p:cNvPr id="4" name="Shape 2"/>
+          <p:cNvPr id="3" name="Shape 1"/>
           <p:cNvSpPr/>
           <p:nvPr/>
         </p:nvSpPr>
@@ -5309,7 +5193,7 @@
       </p:sp>
       <p:sp>
         <p:nvSpPr>
-          <p:cNvPr id="5" name="Text 3"/>
+          <p:cNvPr id="4" name="Text 2"/>
           <p:cNvSpPr txBox="1"/>
           <p:nvPr/>
         </p:nvSpPr>
@@ -5348,7 +5232,7 @@
       </p:sp>
       <p:sp>
         <p:nvSpPr>
-          <p:cNvPr id="6" name="Text 4"/>
+          <p:cNvPr id="5" name="Text 3"/>
           <p:cNvSpPr txBox="1"/>
           <p:nvPr/>
         </p:nvSpPr>
@@ -5387,7 +5271,7 @@
       </p:sp>
       <p:sp>
         <p:nvSpPr>
-          <p:cNvPr id="7" name="Shape 5"/>
+          <p:cNvPr id="6" name="Shape 4"/>
           <p:cNvSpPr/>
           <p:nvPr/>
         </p:nvSpPr>
@@ -5416,7 +5300,7 @@
       </p:sp>
       <p:sp>
         <p:nvSpPr>
-          <p:cNvPr id="8" name="Text 6"/>
+          <p:cNvPr id="7" name="Text 5"/>
           <p:cNvSpPr txBox="1"/>
           <p:nvPr/>
         </p:nvSpPr>
@@ -5455,7 +5339,7 @@
       </p:sp>
       <p:sp>
         <p:nvSpPr>
-          <p:cNvPr id="9" name="Text 7"/>
+          <p:cNvPr id="8" name="Text 6"/>
           <p:cNvSpPr txBox="1"/>
           <p:nvPr/>
         </p:nvSpPr>
@@ -5494,7 +5378,7 @@
       </p:sp>
       <p:sp>
         <p:nvSpPr>
-          <p:cNvPr id="10" name="Shape 8"/>
+          <p:cNvPr id="9" name="Shape 7"/>
           <p:cNvSpPr/>
           <p:nvPr/>
         </p:nvSpPr>
@@ -5523,7 +5407,7 @@
       </p:sp>
       <p:sp>
         <p:nvSpPr>
-          <p:cNvPr id="11" name="Text 9"/>
+          <p:cNvPr id="10" name="Text 8"/>
           <p:cNvSpPr txBox="1"/>
           <p:nvPr/>
         </p:nvSpPr>
@@ -5562,7 +5446,7 @@
       </p:sp>
       <p:sp>
         <p:nvSpPr>
-          <p:cNvPr id="12" name="Text 10"/>
+          <p:cNvPr id="11" name="Text 9"/>
           <p:cNvSpPr txBox="1"/>
           <p:nvPr/>
         </p:nvSpPr>
@@ -5601,7 +5485,7 @@
       </p:sp>
       <p:sp>
         <p:nvSpPr>
-          <p:cNvPr id="13" name="Text 11"/>
+          <p:cNvPr id="12" name="Text 10"/>
           <p:cNvSpPr txBox="1"/>
           <p:nvPr/>
         </p:nvSpPr>
@@ -5632,7 +5516,7 @@
                 <a:ea typeface="Pretendard" pitchFamily="34" charset="-122"/>
                 <a:cs typeface="Pretendard" pitchFamily="34" charset="-120"/>
               </a:rPr>
-              <a:t>→ 저자들은 상반된 결과가 연구기간(1-2주 vs 8주)·용량·가해진 힘·표본수 차이에서 온다고 설명. 무엇보다 '재발(relapse)까지 세 약물을 나란히 비교한 연구는 이번이 최초' — 이것이 이 논문의 진짜 공백</a:t>
+              <a:t>※ 상반된 결과는 연구기간(1~2주 vs 8주)·용량·힘·표본수 차이 때문(저자 설명) - 재발까지 세 약물을 비교한 연구는 이번이 최초, 진짜 공백은 여기 있음</a:t>
             </a:r>
             <a:endParaRPr lang="en-US" sz="1250" dirty="0"/>
           </a:p>
@@ -5640,7 +5524,7 @@
       </p:sp>
       <p:sp>
         <p:nvSpPr>
-          <p:cNvPr id="14" name="Text 12"/>
+          <p:cNvPr id="13" name="Text 11"/>
           <p:cNvSpPr txBox="1"/>
           <p:nvPr/>
         </p:nvSpPr>
@@ -5717,46 +5601,7 @@
         </p:nvSpPr>
         <p:spPr>
           <a:xfrm>
-            <a:off x="548640" y="411480"/>
-            <a:ext cx="9144000" cy="365760"/>
-          </a:xfrm>
-          <a:prstGeom prst="rect">
-            <a:avLst/>
-          </a:prstGeom>
-          <a:noFill/>
-          <a:ln/>
-        </p:spPr>
-        <p:txBody>
-          <a:bodyPr wrap="square" lIns="0" tIns="0" rIns="0" bIns="0" rtlCol="0" anchor="ctr"/>
-          <a:lstStyle/>
-          <a:p>
-            <a:pPr indent="0" marL="0">
-              <a:buNone/>
-            </a:pPr>
-            <a:r>
-              <a:rPr lang="en-US" sz="1300" b="1" spc="100" kern="0" dirty="0">
-                <a:solidFill>
-                  <a:srgbClr val="02C39A"/>
-                </a:solidFill>
-                <a:latin typeface="Pretendard" pitchFamily="34" charset="0"/>
-                <a:ea typeface="Pretendard" pitchFamily="34" charset="-122"/>
-                <a:cs typeface="Pretendard" pitchFamily="34" charset="-120"/>
-              </a:rPr>
-              <a:t>목적 및 가설</a:t>
-            </a:r>
-            <a:endParaRPr lang="en-US" sz="1300" dirty="0"/>
-          </a:p>
-        </p:txBody>
-      </p:sp>
-      <p:sp>
-        <p:nvSpPr>
-          <p:cNvPr id="3" name="Text 1"/>
-          <p:cNvSpPr txBox="1"/>
-          <p:nvPr/>
-        </p:nvSpPr>
-        <p:spPr>
-          <a:xfrm>
-            <a:off x="548640" y="749808"/>
+            <a:off x="548640" y="502920"/>
             <a:ext cx="10972800" cy="822960"/>
           </a:xfrm>
           <a:prstGeom prst="rect">
@@ -5789,7 +5634,7 @@
       </p:sp>
       <p:sp>
         <p:nvSpPr>
-          <p:cNvPr id="4" name="Shape 2"/>
+          <p:cNvPr id="3" name="Shape 1"/>
           <p:cNvSpPr/>
           <p:nvPr/>
         </p:nvSpPr>
@@ -5813,7 +5658,7 @@
       </p:sp>
       <p:sp>
         <p:nvSpPr>
-          <p:cNvPr id="5" name="Text 3"/>
+          <p:cNvPr id="4" name="Text 2"/>
           <p:cNvSpPr txBox="1"/>
           <p:nvPr/>
         </p:nvSpPr>
@@ -5852,7 +5697,7 @@
       </p:sp>
       <p:sp>
         <p:nvSpPr>
-          <p:cNvPr id="6" name="Text 4"/>
+          <p:cNvPr id="5" name="Text 3"/>
           <p:cNvSpPr txBox="1"/>
           <p:nvPr/>
         </p:nvSpPr>
@@ -5880,7 +5725,7 @@
             <a:r>
               <a:rPr lang="en-US" sz="1450" dirty="0">
                 <a:solidFill>
-                  <a:srgbClr val="FFFFFF"/>
+                  <a:srgbClr val="0B2E33"/>
                 </a:solidFill>
                 <a:latin typeface="Pretendard" pitchFamily="34" charset="0"/>
                 <a:ea typeface="Pretendard" pitchFamily="34" charset="-122"/>
@@ -5894,7 +5739,7 @@
       </p:sp>
       <p:sp>
         <p:nvSpPr>
-          <p:cNvPr id="7" name="Shape 5"/>
+          <p:cNvPr id="6" name="Shape 4"/>
           <p:cNvSpPr/>
           <p:nvPr/>
         </p:nvSpPr>
@@ -5916,7 +5761,7 @@
       </p:sp>
       <p:sp>
         <p:nvSpPr>
-          <p:cNvPr id="8" name="Text 6"/>
+          <p:cNvPr id="7" name="Text 5"/>
           <p:cNvSpPr txBox="1"/>
           <p:nvPr/>
         </p:nvSpPr>
@@ -5955,7 +5800,7 @@
       </p:sp>
       <p:sp>
         <p:nvSpPr>
-          <p:cNvPr id="9" name="Text 7"/>
+          <p:cNvPr id="8" name="Text 6"/>
           <p:cNvSpPr txBox="1"/>
           <p:nvPr/>
         </p:nvSpPr>
@@ -5997,7 +5842,7 @@
       </p:sp>
       <p:sp>
         <p:nvSpPr>
-          <p:cNvPr id="10" name="Text 8"/>
+          <p:cNvPr id="9" name="Text 7"/>
           <p:cNvSpPr txBox="1"/>
           <p:nvPr/>
         </p:nvSpPr>
@@ -6074,46 +5919,7 @@
         </p:nvSpPr>
         <p:spPr>
           <a:xfrm>
-            <a:off x="548640" y="411480"/>
-            <a:ext cx="9144000" cy="365760"/>
-          </a:xfrm>
-          <a:prstGeom prst="rect">
-            <a:avLst/>
-          </a:prstGeom>
-          <a:noFill/>
-          <a:ln/>
-        </p:spPr>
-        <p:txBody>
-          <a:bodyPr wrap="square" lIns="0" tIns="0" rIns="0" bIns="0" rtlCol="0" anchor="ctr"/>
-          <a:lstStyle/>
-          <a:p>
-            <a:pPr indent="0" marL="0">
-              <a:buNone/>
-            </a:pPr>
-            <a:r>
-              <a:rPr lang="en-US" sz="1300" b="1" spc="100" kern="0" dirty="0">
-                <a:solidFill>
-                  <a:srgbClr val="00A896"/>
-                </a:solidFill>
-                <a:latin typeface="Pretendard" pitchFamily="34" charset="0"/>
-                <a:ea typeface="Pretendard" pitchFamily="34" charset="-122"/>
-                <a:cs typeface="Pretendard" pitchFamily="34" charset="-120"/>
-              </a:rPr>
-              <a:t>연구방법</a:t>
-            </a:r>
-            <a:endParaRPr lang="en-US" sz="1300" dirty="0"/>
-          </a:p>
-        </p:txBody>
-      </p:sp>
-      <p:sp>
-        <p:nvSpPr>
-          <p:cNvPr id="3" name="Text 1"/>
-          <p:cNvSpPr txBox="1"/>
-          <p:nvPr/>
-        </p:nvSpPr>
-        <p:spPr>
-          <a:xfrm>
-            <a:off x="548640" y="749808"/>
+            <a:off x="548640" y="502920"/>
             <a:ext cx="11064240" cy="914400"/>
           </a:xfrm>
           <a:prstGeom prst="rect">
@@ -6146,7 +5952,7 @@
       </p:sp>
       <p:sp>
         <p:nvSpPr>
-          <p:cNvPr id="4" name="Shape 2"/>
+          <p:cNvPr id="3" name="Shape 1"/>
           <p:cNvSpPr/>
           <p:nvPr/>
         </p:nvSpPr>
@@ -6182,7 +5988,7 @@
       </p:sp>
       <p:sp>
         <p:nvSpPr>
-          <p:cNvPr id="5" name="Shape 3"/>
+          <p:cNvPr id="4" name="Shape 2"/>
           <p:cNvSpPr/>
           <p:nvPr/>
         </p:nvSpPr>
@@ -6206,7 +6012,7 @@
       </p:sp>
       <p:sp>
         <p:nvSpPr>
-          <p:cNvPr id="6" name="Text 4"/>
+          <p:cNvPr id="5" name="Text 3"/>
           <p:cNvSpPr txBox="1"/>
           <p:nvPr/>
         </p:nvSpPr>
@@ -6245,7 +6051,7 @@
       </p:sp>
       <p:sp>
         <p:nvSpPr>
-          <p:cNvPr id="7" name="Text 5"/>
+          <p:cNvPr id="6" name="Text 4"/>
           <p:cNvSpPr txBox="1"/>
           <p:nvPr/>
         </p:nvSpPr>
@@ -6307,7 +6113,7 @@
       </p:sp>
       <p:sp>
         <p:nvSpPr>
-          <p:cNvPr id="8" name="Shape 6"/>
+          <p:cNvPr id="7" name="Shape 5"/>
           <p:cNvSpPr/>
           <p:nvPr/>
         </p:nvSpPr>
@@ -6343,7 +6149,7 @@
       </p:sp>
       <p:sp>
         <p:nvSpPr>
-          <p:cNvPr id="9" name="Shape 7"/>
+          <p:cNvPr id="8" name="Shape 6"/>
           <p:cNvSpPr/>
           <p:nvPr/>
         </p:nvSpPr>
@@ -6367,7 +6173,7 @@
       </p:sp>
       <p:sp>
         <p:nvSpPr>
-          <p:cNvPr id="10" name="Text 8"/>
+          <p:cNvPr id="9" name="Text 7"/>
           <p:cNvSpPr txBox="1"/>
           <p:nvPr/>
         </p:nvSpPr>
@@ -6406,7 +6212,7 @@
       </p:sp>
       <p:sp>
         <p:nvSpPr>
-          <p:cNvPr id="11" name="Text 9"/>
+          <p:cNvPr id="10" name="Text 8"/>
           <p:cNvSpPr txBox="1"/>
           <p:nvPr/>
         </p:nvSpPr>
@@ -6468,7 +6274,7 @@
       </p:sp>
       <p:sp>
         <p:nvSpPr>
-          <p:cNvPr id="12" name="Shape 10"/>
+          <p:cNvPr id="11" name="Shape 9"/>
           <p:cNvSpPr/>
           <p:nvPr/>
         </p:nvSpPr>
@@ -6504,7 +6310,7 @@
       </p:sp>
       <p:sp>
         <p:nvSpPr>
-          <p:cNvPr id="13" name="Shape 11"/>
+          <p:cNvPr id="12" name="Shape 10"/>
           <p:cNvSpPr/>
           <p:nvPr/>
         </p:nvSpPr>
@@ -6528,7 +6334,7 @@
       </p:sp>
       <p:sp>
         <p:nvSpPr>
-          <p:cNvPr id="14" name="Text 12"/>
+          <p:cNvPr id="13" name="Text 11"/>
           <p:cNvSpPr txBox="1"/>
           <p:nvPr/>
         </p:nvSpPr>
@@ -6567,7 +6373,7 @@
       </p:sp>
       <p:sp>
         <p:nvSpPr>
-          <p:cNvPr id="15" name="Text 13"/>
+          <p:cNvPr id="14" name="Text 12"/>
           <p:cNvSpPr txBox="1"/>
           <p:nvPr/>
         </p:nvSpPr>
@@ -6649,7 +6455,7 @@
       </p:sp>
       <p:sp>
         <p:nvSpPr>
-          <p:cNvPr id="16" name="Text 14"/>
+          <p:cNvPr id="15" name="Text 13"/>
           <p:cNvSpPr txBox="1"/>
           <p:nvPr/>
         </p:nvSpPr>
@@ -6691,7 +6497,7 @@
       </p:sp>
       <p:sp>
         <p:nvSpPr>
-          <p:cNvPr id="17" name="Text 15"/>
+          <p:cNvPr id="16" name="Text 14"/>
           <p:cNvSpPr txBox="1"/>
           <p:nvPr/>
         </p:nvSpPr>
@@ -6722,7 +6528,7 @@
                 <a:ea typeface="Pretendard" pitchFamily="34" charset="-122"/>
                 <a:cs typeface="Pretendard" pitchFamily="34" charset="-120"/>
               </a:rPr>
-              <a:t>일정: 가속기 4주 → 보정기 2주(장치 재부착, passive) → 재발기 2주(장치 완전 제거)</a:t>
+              <a:t>- 일정: 가속기 4주 → 보정기 2주(장치 재부착, passive) → 재발기 2주(장치 완전 제거)</a:t>
             </a:r>
             <a:endParaRPr lang="en-US" sz="1250" dirty="0"/>
           </a:p>
@@ -6730,7 +6536,7 @@
       </p:sp>
       <p:sp>
         <p:nvSpPr>
-          <p:cNvPr id="18" name="Text 16"/>
+          <p:cNvPr id="17" name="Text 15"/>
           <p:cNvSpPr txBox="1"/>
           <p:nvPr/>
         </p:nvSpPr>
@@ -6807,46 +6613,7 @@
         </p:nvSpPr>
         <p:spPr>
           <a:xfrm>
-            <a:off x="548640" y="411480"/>
-            <a:ext cx="9144000" cy="365760"/>
-          </a:xfrm>
-          <a:prstGeom prst="rect">
-            <a:avLst/>
-          </a:prstGeom>
-          <a:noFill/>
-          <a:ln/>
-        </p:spPr>
-        <p:txBody>
-          <a:bodyPr wrap="square" lIns="0" tIns="0" rIns="0" bIns="0" rtlCol="0" anchor="ctr"/>
-          <a:lstStyle/>
-          <a:p>
-            <a:pPr indent="0" marL="0">
-              <a:buNone/>
-            </a:pPr>
-            <a:r>
-              <a:rPr lang="en-US" sz="1300" b="1" spc="100" kern="0" dirty="0">
-                <a:solidFill>
-                  <a:srgbClr val="00A896"/>
-                </a:solidFill>
-                <a:latin typeface="Pretendard" pitchFamily="34" charset="0"/>
-                <a:ea typeface="Pretendard" pitchFamily="34" charset="-122"/>
-                <a:cs typeface="Pretendard" pitchFamily="34" charset="-120"/>
-              </a:rPr>
-              <a:t>결과 ①</a:t>
-            </a:r>
-            <a:endParaRPr lang="en-US" sz="1300" dirty="0"/>
-          </a:p>
-        </p:txBody>
-      </p:sp>
-      <p:sp>
-        <p:nvSpPr>
-          <p:cNvPr id="3" name="Text 1"/>
-          <p:cNvSpPr txBox="1"/>
-          <p:nvPr/>
-        </p:nvSpPr>
-        <p:spPr>
-          <a:xfrm>
-            <a:off x="548640" y="749808"/>
+            <a:off x="548640" y="502920"/>
             <a:ext cx="11064240" cy="914400"/>
           </a:xfrm>
           <a:prstGeom prst="rect">
@@ -6879,7 +6646,7 @@
       </p:sp>
       <p:sp>
         <p:nvSpPr>
-          <p:cNvPr id="4" name="Shape 2"/>
+          <p:cNvPr id="3" name="Shape 1"/>
           <p:cNvSpPr/>
           <p:nvPr/>
         </p:nvSpPr>
@@ -6908,7 +6675,7 @@
       </p:sp>
       <p:sp>
         <p:nvSpPr>
-          <p:cNvPr id="5" name="Text 3"/>
+          <p:cNvPr id="4" name="Text 2"/>
           <p:cNvSpPr txBox="1"/>
           <p:nvPr/>
         </p:nvSpPr>
@@ -6947,7 +6714,7 @@
       </p:sp>
       <p:sp>
         <p:nvSpPr>
-          <p:cNvPr id="6" name="Text 4"/>
+          <p:cNvPr id="5" name="Text 3"/>
           <p:cNvSpPr txBox="1"/>
           <p:nvPr/>
         </p:nvSpPr>
@@ -6986,7 +6753,7 @@
       </p:sp>
       <p:sp>
         <p:nvSpPr>
-          <p:cNvPr id="7" name="Shape 5"/>
+          <p:cNvPr id="6" name="Shape 4"/>
           <p:cNvSpPr/>
           <p:nvPr/>
         </p:nvSpPr>
@@ -7015,7 +6782,7 @@
       </p:sp>
       <p:sp>
         <p:nvSpPr>
-          <p:cNvPr id="8" name="Text 6"/>
+          <p:cNvPr id="7" name="Text 5"/>
           <p:cNvSpPr txBox="1"/>
           <p:nvPr/>
         </p:nvSpPr>
@@ -7054,7 +6821,7 @@
       </p:sp>
       <p:sp>
         <p:nvSpPr>
-          <p:cNvPr id="9" name="Text 7"/>
+          <p:cNvPr id="8" name="Text 6"/>
           <p:cNvSpPr txBox="1"/>
           <p:nvPr/>
         </p:nvSpPr>
@@ -7093,7 +6860,7 @@
       </p:sp>
       <p:sp>
         <p:nvSpPr>
-          <p:cNvPr id="10" name="Shape 8"/>
+          <p:cNvPr id="9" name="Shape 7"/>
           <p:cNvSpPr/>
           <p:nvPr/>
         </p:nvSpPr>
@@ -7122,7 +6889,7 @@
       </p:sp>
       <p:sp>
         <p:nvSpPr>
-          <p:cNvPr id="11" name="Text 9"/>
+          <p:cNvPr id="10" name="Text 8"/>
           <p:cNvSpPr txBox="1"/>
           <p:nvPr/>
         </p:nvSpPr>
@@ -7161,7 +6928,7 @@
       </p:sp>
       <p:sp>
         <p:nvSpPr>
-          <p:cNvPr id="12" name="Text 10"/>
+          <p:cNvPr id="11" name="Text 9"/>
           <p:cNvSpPr txBox="1"/>
           <p:nvPr/>
         </p:nvSpPr>
@@ -7200,7 +6967,7 @@
       </p:sp>
       <p:sp>
         <p:nvSpPr>
-          <p:cNvPr id="13" name="Text 11"/>
+          <p:cNvPr id="12" name="Text 10"/>
           <p:cNvSpPr txBox="1"/>
           <p:nvPr/>
         </p:nvSpPr>
@@ -7231,7 +6998,7 @@
                 <a:ea typeface="Pretendard" pitchFamily="34" charset="-122"/>
                 <a:cs typeface="Pretendard" pitchFamily="34" charset="-120"/>
               </a:rPr>
-              <a:t>→ 대조군(장치만, 1.03±0.11mm) 대비 세 약물 모두 유의하게 가속(p&lt;0.001). 가속 순위: 코르티코스테로이드 &gt; 비타민D &gt; PGE2 — 조직검사(ALP·TRAP)에서도 같은 순서로 파골세포 활성 확인</a:t>
+              <a:t>※ 대조군(1.03±0.11mm) 대비 세 약물 모두 유의하게 가속(p&lt;0.001) - 가속 순위: 코르티코스테로이드&gt;비타민D&gt;PGE2, 조직검사(ALP·TRAP)도 동일 순서로 확인됨</a:t>
             </a:r>
             <a:endParaRPr lang="en-US" sz="1300" dirty="0"/>
           </a:p>
@@ -7941,7 +7708,7 @@
       </p:graphicFrame>
       <p:sp>
         <p:nvSpPr>
-          <p:cNvPr id="15" name="Text 12"/>
+          <p:cNvPr id="14" name="Text 11"/>
           <p:cNvSpPr txBox="1"/>
           <p:nvPr/>
         </p:nvSpPr>
@@ -7972,7 +7739,7 @@
                 <a:ea typeface="Pretendard" pitchFamily="34" charset="-122"/>
                 <a:cs typeface="Pretendard" pitchFamily="34" charset="-120"/>
               </a:rPr>
-              <a:t>모든 군간 비교 p&lt;0.001 (One-way ANOVA + Tukey)</a:t>
+              <a:t>※ 모든 군간 비교 p&lt;0.001 (One-way ANOVA + Tukey)</a:t>
             </a:r>
             <a:endParaRPr lang="en-US" sz="1150" dirty="0"/>
           </a:p>
@@ -7980,7 +7747,7 @@
       </p:sp>
       <p:sp>
         <p:nvSpPr>
-          <p:cNvPr id="16" name="Text 13"/>
+          <p:cNvPr id="15" name="Text 12"/>
           <p:cNvSpPr txBox="1"/>
           <p:nvPr/>
         </p:nvSpPr>
@@ -8057,46 +7824,7 @@
         </p:nvSpPr>
         <p:spPr>
           <a:xfrm>
-            <a:off x="548640" y="411480"/>
-            <a:ext cx="9144000" cy="365760"/>
-          </a:xfrm>
-          <a:prstGeom prst="rect">
-            <a:avLst/>
-          </a:prstGeom>
-          <a:noFill/>
-          <a:ln/>
-        </p:spPr>
-        <p:txBody>
-          <a:bodyPr wrap="square" lIns="0" tIns="0" rIns="0" bIns="0" rtlCol="0" anchor="ctr"/>
-          <a:lstStyle/>
-          <a:p>
-            <a:pPr indent="0" marL="0">
-              <a:buNone/>
-            </a:pPr>
-            <a:r>
-              <a:rPr lang="en-US" sz="1300" b="1" spc="100" kern="0" dirty="0">
-                <a:solidFill>
-                  <a:srgbClr val="00A896"/>
-                </a:solidFill>
-                <a:latin typeface="Pretendard" pitchFamily="34" charset="0"/>
-                <a:ea typeface="Pretendard" pitchFamily="34" charset="-122"/>
-                <a:cs typeface="Pretendard" pitchFamily="34" charset="-120"/>
-              </a:rPr>
-              <a:t>결과 ②</a:t>
-            </a:r>
-            <a:endParaRPr lang="en-US" sz="1300" dirty="0"/>
-          </a:p>
-        </p:txBody>
-      </p:sp>
-      <p:sp>
-        <p:nvSpPr>
-          <p:cNvPr id="3" name="Text 1"/>
-          <p:cNvSpPr txBox="1"/>
-          <p:nvPr/>
-        </p:nvSpPr>
-        <p:spPr>
-          <a:xfrm>
-            <a:off x="548640" y="749808"/>
+            <a:off x="548640" y="502920"/>
             <a:ext cx="11064240" cy="914400"/>
           </a:xfrm>
           <a:prstGeom prst="rect">
@@ -8129,7 +7857,7 @@
       </p:sp>
       <p:sp>
         <p:nvSpPr>
-          <p:cNvPr id="4" name="Shape 2"/>
+          <p:cNvPr id="3" name="Shape 1"/>
           <p:cNvSpPr/>
           <p:nvPr/>
         </p:nvSpPr>
@@ -8158,7 +7886,7 @@
       </p:sp>
       <p:sp>
         <p:nvSpPr>
-          <p:cNvPr id="5" name="Text 3"/>
+          <p:cNvPr id="4" name="Text 2"/>
           <p:cNvSpPr txBox="1"/>
           <p:nvPr/>
         </p:nvSpPr>
@@ -8197,7 +7925,7 @@
       </p:sp>
       <p:sp>
         <p:nvSpPr>
-          <p:cNvPr id="6" name="Text 4"/>
+          <p:cNvPr id="5" name="Text 3"/>
           <p:cNvSpPr txBox="1"/>
           <p:nvPr/>
         </p:nvSpPr>
@@ -8361,7 +8089,7 @@
       </p:sp>
       <p:sp>
         <p:nvSpPr>
-          <p:cNvPr id="7" name="Text 5"/>
+          <p:cNvPr id="6" name="Text 4"/>
           <p:cNvSpPr txBox="1"/>
           <p:nvPr/>
         </p:nvSpPr>
@@ -8392,7 +8120,7 @@
                 <a:ea typeface="Pretendard" pitchFamily="34" charset="-122"/>
                 <a:cs typeface="Pretendard" pitchFamily="34" charset="-120"/>
               </a:rPr>
-              <a:t>* 양성대조 vs PGE2 재발량 차이는 통계적으로 유의하지 않음 (p=0.605) — Appendix 참고</a:t>
+              <a:t>※ 양성대조 vs PGE2 재발량 차이 - 통계적으로 유의하지 않음(p=0.605), Appendix 참고</a:t>
             </a:r>
             <a:endParaRPr lang="en-US" sz="1000" dirty="0"/>
           </a:p>
@@ -8400,7 +8128,7 @@
       </p:sp>
       <p:sp>
         <p:nvSpPr>
-          <p:cNvPr id="8" name="Shape 6"/>
+          <p:cNvPr id="7" name="Shape 5"/>
           <p:cNvSpPr/>
           <p:nvPr/>
         </p:nvSpPr>
@@ -8422,7 +8150,7 @@
       </p:sp>
       <p:sp>
         <p:nvSpPr>
-          <p:cNvPr id="9" name="Text 7"/>
+          <p:cNvPr id="8" name="Text 6"/>
           <p:cNvSpPr txBox="1"/>
           <p:nvPr/>
         </p:nvSpPr>
@@ -8461,7 +8189,7 @@
       </p:sp>
       <p:sp>
         <p:nvSpPr>
-          <p:cNvPr id="10" name="Text 8"/>
+          <p:cNvPr id="9" name="Text 7"/>
           <p:cNvSpPr txBox="1"/>
           <p:nvPr/>
         </p:nvSpPr>
@@ -8537,7 +8265,7 @@
       </p:sp>
       <p:sp>
         <p:nvSpPr>
-          <p:cNvPr id="11" name="Text 9"/>
+          <p:cNvPr id="10" name="Text 8"/>
           <p:cNvSpPr txBox="1"/>
           <p:nvPr/>
         </p:nvSpPr>
@@ -8614,46 +8342,7 @@
         </p:nvSpPr>
         <p:spPr>
           <a:xfrm>
-            <a:off x="548640" y="411480"/>
-            <a:ext cx="9144000" cy="365760"/>
-          </a:xfrm>
-          <a:prstGeom prst="rect">
-            <a:avLst/>
-          </a:prstGeom>
-          <a:noFill/>
-          <a:ln/>
-        </p:spPr>
-        <p:txBody>
-          <a:bodyPr wrap="square" lIns="0" tIns="0" rIns="0" bIns="0" rtlCol="0" anchor="ctr"/>
-          <a:lstStyle/>
-          <a:p>
-            <a:pPr indent="0" marL="0">
-              <a:buNone/>
-            </a:pPr>
-            <a:r>
-              <a:rPr lang="en-US" sz="1300" b="1" spc="100" kern="0" dirty="0">
-                <a:solidFill>
-                  <a:srgbClr val="00A896"/>
-                </a:solidFill>
-                <a:latin typeface="Pretendard" pitchFamily="34" charset="0"/>
-                <a:ea typeface="Pretendard" pitchFamily="34" charset="-122"/>
-                <a:cs typeface="Pretendard" pitchFamily="34" charset="-120"/>
-              </a:rPr>
-              <a:t>비평적 고찰</a:t>
-            </a:r>
-            <a:endParaRPr lang="en-US" sz="1300" dirty="0"/>
-          </a:p>
-        </p:txBody>
-      </p:sp>
-      <p:sp>
-        <p:nvSpPr>
-          <p:cNvPr id="3" name="Text 1"/>
-          <p:cNvSpPr txBox="1"/>
-          <p:nvPr/>
-        </p:nvSpPr>
-        <p:spPr>
-          <a:xfrm>
-            <a:off x="548640" y="749808"/>
+            <a:off x="548640" y="502920"/>
             <a:ext cx="11064240" cy="914400"/>
           </a:xfrm>
           <a:prstGeom prst="rect">
@@ -8686,7 +8375,7 @@
       </p:sp>
       <p:sp>
         <p:nvSpPr>
-          <p:cNvPr id="4" name="Shape 2"/>
+          <p:cNvPr id="3" name="Shape 1"/>
           <p:cNvSpPr/>
           <p:nvPr/>
         </p:nvSpPr>
@@ -8713,7 +8402,7 @@
       </p:sp>
       <p:sp>
         <p:nvSpPr>
-          <p:cNvPr id="5" name="Text 3"/>
+          <p:cNvPr id="4" name="Text 2"/>
           <p:cNvSpPr txBox="1"/>
           <p:nvPr/>
         </p:nvSpPr>
@@ -8752,7 +8441,7 @@
       </p:sp>
       <p:sp>
         <p:nvSpPr>
-          <p:cNvPr id="6" name="Text 4"/>
+          <p:cNvPr id="5" name="Text 3"/>
           <p:cNvSpPr txBox="1"/>
           <p:nvPr/>
         </p:nvSpPr>
@@ -8854,7 +8543,7 @@
       </p:sp>
       <p:sp>
         <p:nvSpPr>
-          <p:cNvPr id="7" name="Text 5"/>
+          <p:cNvPr id="6" name="Text 4"/>
           <p:cNvSpPr txBox="1"/>
           <p:nvPr/>
         </p:nvSpPr>
@@ -8885,7 +8574,7 @@
                 <a:ea typeface="Pretendard" pitchFamily="34" charset="-122"/>
                 <a:cs typeface="Pretendard" pitchFamily="34" charset="-120"/>
               </a:rPr>
-              <a:t>(발표 시 본인 의견 추가)</a:t>
+              <a:t>- 발표 시 본인 의견 추가</a:t>
             </a:r>
             <a:endParaRPr lang="en-US" sz="1050" dirty="0"/>
           </a:p>
@@ -8893,7 +8582,7 @@
       </p:sp>
       <p:sp>
         <p:nvSpPr>
-          <p:cNvPr id="8" name="Shape 6"/>
+          <p:cNvPr id="7" name="Shape 5"/>
           <p:cNvSpPr/>
           <p:nvPr/>
         </p:nvSpPr>
@@ -8918,7 +8607,7 @@
       </p:sp>
       <p:sp>
         <p:nvSpPr>
-          <p:cNvPr id="9" name="Shape 7"/>
+          <p:cNvPr id="8" name="Shape 6"/>
           <p:cNvSpPr/>
           <p:nvPr/>
         </p:nvSpPr>
@@ -8943,7 +8632,7 @@
       </p:sp>
       <p:sp>
         <p:nvSpPr>
-          <p:cNvPr id="10" name="Shape 8"/>
+          <p:cNvPr id="9" name="Shape 7"/>
           <p:cNvSpPr/>
           <p:nvPr/>
         </p:nvSpPr>
@@ -8970,7 +8659,7 @@
       </p:sp>
       <p:sp>
         <p:nvSpPr>
-          <p:cNvPr id="11" name="Text 9"/>
+          <p:cNvPr id="10" name="Text 8"/>
           <p:cNvSpPr txBox="1"/>
           <p:nvPr/>
         </p:nvSpPr>
@@ -9009,7 +8698,7 @@
       </p:sp>
       <p:sp>
         <p:nvSpPr>
-          <p:cNvPr id="12" name="Text 10"/>
+          <p:cNvPr id="11" name="Text 9"/>
           <p:cNvSpPr txBox="1"/>
           <p:nvPr/>
         </p:nvSpPr>
@@ -9111,7 +8800,7 @@
       </p:sp>
       <p:sp>
         <p:nvSpPr>
-          <p:cNvPr id="13" name="Text 11"/>
+          <p:cNvPr id="12" name="Text 10"/>
           <p:cNvSpPr txBox="1"/>
           <p:nvPr/>
         </p:nvSpPr>
@@ -9142,7 +8831,7 @@
                 <a:ea typeface="Pretendard" pitchFamily="34" charset="-122"/>
                 <a:cs typeface="Pretendard" pitchFamily="34" charset="-120"/>
               </a:rPr>
-              <a:t>(발표 시 본인 의견 추가)</a:t>
+              <a:t>- 발표 시 본인 의견 추가</a:t>
             </a:r>
             <a:endParaRPr lang="en-US" sz="1050" dirty="0"/>
           </a:p>
@@ -9150,7 +8839,7 @@
       </p:sp>
       <p:sp>
         <p:nvSpPr>
-          <p:cNvPr id="14" name="Shape 12"/>
+          <p:cNvPr id="13" name="Shape 11"/>
           <p:cNvSpPr/>
           <p:nvPr/>
         </p:nvSpPr>
@@ -9175,7 +8864,7 @@
       </p:sp>
       <p:sp>
         <p:nvSpPr>
-          <p:cNvPr id="15" name="Shape 13"/>
+          <p:cNvPr id="14" name="Shape 12"/>
           <p:cNvSpPr/>
           <p:nvPr/>
         </p:nvSpPr>
@@ -9200,7 +8889,7 @@
       </p:sp>
       <p:sp>
         <p:nvSpPr>
-          <p:cNvPr id="16" name="Shape 14"/>
+          <p:cNvPr id="15" name="Shape 13"/>
           <p:cNvSpPr/>
           <p:nvPr/>
         </p:nvSpPr>
@@ -9227,7 +8916,7 @@
       </p:sp>
       <p:sp>
         <p:nvSpPr>
-          <p:cNvPr id="17" name="Text 15"/>
+          <p:cNvPr id="16" name="Text 14"/>
           <p:cNvSpPr txBox="1"/>
           <p:nvPr/>
         </p:nvSpPr>
@@ -9266,7 +8955,7 @@
       </p:sp>
       <p:sp>
         <p:nvSpPr>
-          <p:cNvPr id="18" name="Text 16"/>
+          <p:cNvPr id="17" name="Text 15"/>
           <p:cNvSpPr txBox="1"/>
           <p:nvPr/>
         </p:nvSpPr>
@@ -9368,7 +9057,7 @@
       </p:sp>
       <p:sp>
         <p:nvSpPr>
-          <p:cNvPr id="19" name="Text 17"/>
+          <p:cNvPr id="18" name="Text 16"/>
           <p:cNvSpPr txBox="1"/>
           <p:nvPr/>
         </p:nvSpPr>
@@ -9399,7 +9088,7 @@
                 <a:ea typeface="Pretendard" pitchFamily="34" charset="-122"/>
                 <a:cs typeface="Pretendard" pitchFamily="34" charset="-120"/>
               </a:rPr>
-              <a:t>(발표 시 본인 의견 추가)</a:t>
+              <a:t>- 발표 시 본인 의견 추가</a:t>
             </a:r>
             <a:endParaRPr lang="en-US" sz="1050" dirty="0"/>
           </a:p>
@@ -9407,7 +9096,7 @@
       </p:sp>
       <p:sp>
         <p:nvSpPr>
-          <p:cNvPr id="20" name="Shape 18"/>
+          <p:cNvPr id="19" name="Shape 17"/>
           <p:cNvSpPr/>
           <p:nvPr/>
         </p:nvSpPr>
@@ -9432,7 +9121,7 @@
       </p:sp>
       <p:sp>
         <p:nvSpPr>
-          <p:cNvPr id="21" name="Shape 19"/>
+          <p:cNvPr id="20" name="Shape 18"/>
           <p:cNvSpPr/>
           <p:nvPr/>
         </p:nvSpPr>
@@ -9457,7 +9146,7 @@
       </p:sp>
       <p:sp>
         <p:nvSpPr>
-          <p:cNvPr id="22" name="Text 20"/>
+          <p:cNvPr id="21" name="Text 19"/>
           <p:cNvSpPr txBox="1"/>
           <p:nvPr/>
         </p:nvSpPr>

--- a/치과약리학실험2-논문발표/치과약리학실험2_논문발표.pptx
+++ b/치과약리학실험2-논문발표/치과약리학실험2_논문발표.pptx
@@ -17,9 +17,10 @@
     <p:sldId id="265" r:id="rId11"/>
     <p:sldId id="266" r:id="rId12"/>
     <p:sldId id="267" r:id="rId13"/>
+    <p:sldId id="268" r:id="rId14"/>
   </p:sldIdLst>
   <p:notesMasterIdLst>
-    <p:notesMasterId r:id="rId14"/>
+    <p:notesMasterId r:id="rId15"/>
   </p:notesMasterIdLst>
   <p:sldSz cx="12192000" cy="6858000"/>
   <p:notesSz cx="6858000" cy="12192000"/>
@@ -601,7 +602,7 @@
           <a:p>
             <a:r>
               <a:rPr lang="en-US" dirty="0"/>
-              <a:t>치과약리학1 20장(PGE2/COX)과 구강생화학(치아이동의 생화학) 두 과목 내용이 이 논문 하나로 이어진다는 점을 다시 언급하며 마무리. Q&amp;A로 전환.</a:t>
+              <a:t>동물실험이라는 한계를 정면으로 짚어주는 게 신뢰도를 높임 — 숨기지 말고 먼저 말할 것. 코르티코스테로이드의 상반된 선행연구 결과는 발표 중 Q&amp;A로 넘어가기 좋은 지점.</a:t>
             </a:r>
             <a:endParaRPr lang="en-US" dirty="0"/>
           </a:p>
@@ -689,11 +690,7 @@
           <a:p>
             <a:r>
               <a:rPr lang="en-US" dirty="0"/>
-              <a:t>예상 질문 1: 동물실험 결과를 사람에게 그대로 적용할 수 있는가?
-예상 질문 2: 코르티코스테로이드 결과가 일부 선행연구(Yamane, Molina 등)와 정반대인데, 이 연구가 더 신뢰할 만한 이유는?
-예상 질문 3: 왜 세 약물의 용량을 하나씩만 테스트했는가? 용량을 늘리면 결과가 달라질 수 있지 않은가?
-예상 질문 4: PGE2가 치근흡수를 유발할 수 있다는데, 이 연구에서는 그런 부작용을 확인했는가?
-예상 질문 5: 암컷 랫드는 왜 제외했는가? 성별에 따라 결과가 다를 가능성은?</a:t>
+              <a:t>치과약리학1 20장(PGE2/COX)과 구강생화학(치아이동의 생화학) 두 과목 내용이 이 논문 하나로 이어진다는 점을 다시 언급하며 마무리. Q&amp;A로 전환.</a:t>
             </a:r>
             <a:endParaRPr lang="en-US" dirty="0"/>
           </a:p>
@@ -781,7 +778,11 @@
           <a:p>
             <a:r>
               <a:rPr lang="en-US" dirty="0"/>
-              <a:t>Q&amp;A 대비용 백업 슬라이드. 교수가 '원문 Discussion엔 대조군이 최저라고 되어있는데?' 라고 물으면 이 슬라이드를 띄우고: (1) Table III의 p3(CPG vs PGE2G)=0.605로 두 군이 통계적으로 구분 안 됨을 보여주고, (2) 원문 스스로도 Results/Conclusion과 Discussion에서 서술이 갈린다는 점을 지적하며, (3) '정확히는 대조군과 PGE2군이 재발 억제 면에서 통계적으로 동급'이라고 답변할 것. 임상적으로는 'PGE2가 가속 효과를 내면서도 재발은 무처치 수준으로 억제한다'는 게 이 발견의 가장 흥미로운 지점.</a:t>
+              <a:t>예상 질문 1: 동물실험 결과를 사람에게 그대로 적용할 수 있는가?
+예상 질문 2: 코르티코스테로이드 결과가 일부 선행연구(Yamane, Molina 등)와 정반대인데, 이 연구가 더 신뢰할 만한 이유는?
+예상 질문 3: 왜 세 약물의 용량을 하나씩만 테스트했는가? 용량을 늘리면 결과가 달라질 수 있지 않은가?
+예상 질문 4: PGE2가 치근흡수를 유발할 수 있다는데, 이 연구에서는 그런 부작용을 확인했는가?
+예상 질문 5: 암컷 랫드는 왜 제외했는가? 성별에 따라 결과가 다를 가능성은?</a:t>
             </a:r>
             <a:endParaRPr lang="en-US" dirty="0"/>
           </a:p>
@@ -805,6 +806,94 @@
             <a:fld id="{F7021451-1387-4CA6-816F-3879F97B5CBC}" type="slidenum">
               <a:rPr lang="en-US"/>
               <a:t>12</a:t>
+            </a:fld>
+            <a:endParaRPr lang="en-US"/>
+          </a:p>
+        </p:txBody>
+      </p:sp>
+    </p:spTree>
+    <p:extLst>
+      <p:ext uri="{BB962C8B-B14F-4D97-AF65-F5344CB8AC3E}">
+        <p14:creationId xmlns:p14="http://schemas.microsoft.com/office/powerpoint/2010/main" val="1024086991"/>
+      </p:ext>
+    </p:extLst>
+  </p:cSld>
+  <p:clrMapOvr>
+    <a:masterClrMapping/>
+  </p:clrMapOvr>
+</p:notes>
+</file>
+
+<file path=ppt/notesSlides/notesSlide13.xml><?xml version="1.0" encoding="utf-8"?>
+<p:notes xmlns:a="http://schemas.openxmlformats.org/drawingml/2006/main" xmlns:r="http://schemas.openxmlformats.org/officeDocument/2006/relationships" xmlns:p="http://schemas.openxmlformats.org/presentationml/2006/main">
+  <p:cSld>
+    <p:spTree>
+      <p:nvGrpSpPr>
+        <p:cNvPr id="1" name=""/>
+        <p:cNvGrpSpPr/>
+        <p:nvPr/>
+      </p:nvGrpSpPr>
+      <p:grpSpPr>
+        <a:xfrm>
+          <a:off x="0" y="0"/>
+          <a:ext cx="0" cy="0"/>
+          <a:chOff x="0" y="0"/>
+          <a:chExt cx="0" cy="0"/>
+        </a:xfrm>
+      </p:grpSpPr>
+      <p:sp>
+        <p:nvSpPr>
+          <p:cNvPr id="2" name="Slide Image Placeholder 1"/>
+          <p:cNvSpPr>
+            <a:spLocks noGrp="1" noRot="1" noChangeAspect="1"/>
+          </p:cNvSpPr>
+          <p:nvPr>
+            <p:ph type="sldImg"/>
+          </p:nvPr>
+        </p:nvSpPr>
+        <p:spPr/>
+      </p:sp>
+      <p:sp>
+        <p:nvSpPr>
+          <p:cNvPr id="3" name="Notes Placeholder 2"/>
+          <p:cNvSpPr>
+            <a:spLocks noGrp="1"/>
+          </p:cNvSpPr>
+          <p:nvPr>
+            <p:ph type="body" idx="1"/>
+          </p:nvPr>
+        </p:nvSpPr>
+        <p:spPr/>
+        <p:txBody>
+          <a:bodyPr/>
+          <a:lstStyle/>
+          <a:p>
+            <a:r>
+              <a:rPr lang="en-US" dirty="0"/>
+              <a:t>Q&amp;A 대비용 백업 슬라이드. 교수가 '원문 Discussion엔 대조군이 최저라고 되어있는데?' 라고 물으면 이 슬라이드를 띄우고: (1) Table III의 p3(CPG vs PGE2G)=0.605로 두 군이 통계적으로 구분 안 됨을 보여주고, (2) 원문 스스로도 Results/Conclusion과 Discussion에서 서술이 갈린다는 점을 지적하며, (3) '정확히는 대조군과 PGE2군이 재발 억제 면에서 통계적으로 동급'이라고 답변할 것. 임상적으로는 'PGE2가 가속 효과를 내면서도 재발은 무처치 수준으로 억제한다'는 게 이 발견의 가장 흥미로운 지점.</a:t>
+            </a:r>
+            <a:endParaRPr lang="en-US" dirty="0"/>
+          </a:p>
+        </p:txBody>
+      </p:sp>
+      <p:sp>
+        <p:nvSpPr>
+          <p:cNvPr id="4" name="Slide Number Placeholder 3"/>
+          <p:cNvSpPr>
+            <a:spLocks noGrp="1"/>
+          </p:cNvSpPr>
+          <p:nvPr>
+            <p:ph type="sldNum" sz="quarter" idx="10"/>
+          </p:nvPr>
+        </p:nvSpPr>
+        <p:spPr/>
+        <p:txBody>
+          <a:bodyPr/>
+          <a:lstStyle/>
+          <a:p>
+            <a:fld id="{F7021451-1387-4CA6-816F-3879F97B5CBC}" type="slidenum">
+              <a:rPr lang="en-US"/>
+              <a:t>13</a:t>
             </a:fld>
             <a:endParaRPr lang="en-US"/>
           </a:p>
@@ -1485,7 +1574,7 @@
           <a:p>
             <a:r>
               <a:rPr lang="en-US" dirty="0"/>
-              <a:t>동물실험이라는 한계를 정면으로 짚어주는 게 신뢰도를 높임 — 숨기지 말고 먼저 말할 것. 코르티코스테로이드의 상반된 선행연구 결과는 발표 중 Q&amp;A로 넘어가기 좋은 지점.</a:t>
+              <a:t>원문 Figure 3(H&amp;E)·4(ALP)·5(TRAP) 모두 같은 순서(코르티코스테로이드 &gt; 비타민D &gt; PGE2 &gt; 대조군)로 조직학적 활성을 보여줌. 임상측정치와 조직 소견이 일치한다는 점이 이 논문의 방법론적 강점.</a:t>
             </a:r>
             <a:endParaRPr lang="en-US" dirty="0"/>
           </a:p>
@@ -2175,6 +2264,962 @@
     <p:bg>
       <p:bgPr>
         <a:solidFill>
+          <a:srgbClr val="F7FBFB"/>
+        </a:solidFill>
+      </p:bgPr>
+    </p:bg>
+    <p:spTree>
+      <p:nvGrpSpPr>
+        <p:cNvPr id="1" name=""/>
+        <p:cNvGrpSpPr/>
+        <p:nvPr/>
+      </p:nvGrpSpPr>
+      <p:grpSpPr>
+        <a:xfrm>
+          <a:off x="0" y="0"/>
+          <a:ext cx="0" cy="0"/>
+          <a:chOff x="0" y="0"/>
+          <a:chExt cx="0" cy="0"/>
+        </a:xfrm>
+      </p:grpSpPr>
+      <p:sp>
+        <p:nvSpPr>
+          <p:cNvPr id="2" name="Text 0"/>
+          <p:cNvSpPr txBox="1"/>
+          <p:nvPr/>
+        </p:nvSpPr>
+        <p:spPr>
+          <a:xfrm>
+            <a:off x="548640" y="502920"/>
+            <a:ext cx="11064240" cy="914400"/>
+          </a:xfrm>
+          <a:prstGeom prst="rect">
+            <a:avLst/>
+          </a:prstGeom>
+          <a:noFill/>
+          <a:ln/>
+        </p:spPr>
+        <p:txBody>
+          <a:bodyPr wrap="square" lIns="0" tIns="0" rIns="0" bIns="0" rtlCol="0" anchor="ctr"/>
+          <a:lstStyle/>
+          <a:p>
+            <a:pPr indent="0" marL="0">
+              <a:buNone/>
+            </a:pPr>
+            <a:r>
+              <a:rPr lang="en-US" sz="2800" b="1" dirty="0">
+                <a:solidFill>
+                  <a:srgbClr val="0B2E33"/>
+                </a:solidFill>
+                <a:latin typeface="Wanted Sans" pitchFamily="34" charset="0"/>
+                <a:ea typeface="Wanted Sans" pitchFamily="34" charset="-122"/>
+                <a:cs typeface="Wanted Sans" pitchFamily="34" charset="-120"/>
+              </a:rPr>
+              <a:t>비평적 고찰 (본인 의견 작성)</a:t>
+            </a:r>
+            <a:endParaRPr lang="en-US" sz="2800" dirty="0"/>
+          </a:p>
+        </p:txBody>
+      </p:sp>
+      <p:sp>
+        <p:nvSpPr>
+          <p:cNvPr id="3" name="Shape 1"/>
+          <p:cNvSpPr/>
+          <p:nvPr/>
+        </p:nvSpPr>
+        <p:spPr>
+          <a:xfrm>
+            <a:off x="548640" y="1920240"/>
+            <a:ext cx="3611880" cy="4389120"/>
+          </a:xfrm>
+          <a:prstGeom prst="roundRect">
+            <a:avLst>
+              <a:gd name="adj" fmla="val 2532"/>
+            </a:avLst>
+          </a:prstGeom>
+          <a:solidFill>
+            <a:srgbClr val="FFFFFF"/>
+          </a:solidFill>
+          <a:ln w="15875">
+            <a:solidFill>
+              <a:srgbClr val="02C39A"/>
+            </a:solidFill>
+            <a:prstDash val="dash"/>
+          </a:ln>
+        </p:spPr>
+      </p:sp>
+      <p:sp>
+        <p:nvSpPr>
+          <p:cNvPr id="4" name="Text 2"/>
+          <p:cNvSpPr txBox="1"/>
+          <p:nvPr/>
+        </p:nvSpPr>
+        <p:spPr>
+          <a:xfrm>
+            <a:off x="822960" y="2148840"/>
+            <a:ext cx="3063240" cy="457200"/>
+          </a:xfrm>
+          <a:prstGeom prst="rect">
+            <a:avLst/>
+          </a:prstGeom>
+          <a:noFill/>
+          <a:ln/>
+        </p:spPr>
+        <p:txBody>
+          <a:bodyPr wrap="square" lIns="0" tIns="0" rIns="0" bIns="0" rtlCol="0" anchor="ctr"/>
+          <a:lstStyle/>
+          <a:p>
+            <a:pPr indent="0" marL="0">
+              <a:buNone/>
+            </a:pPr>
+            <a:r>
+              <a:rPr lang="en-US" sz="1600" b="1" dirty="0">
+                <a:solidFill>
+                  <a:srgbClr val="028090"/>
+                </a:solidFill>
+                <a:latin typeface="Wanted Sans" pitchFamily="34" charset="0"/>
+                <a:ea typeface="Wanted Sans" pitchFamily="34" charset="-122"/>
+                <a:cs typeface="Wanted Sans" pitchFamily="34" charset="-120"/>
+              </a:rPr>
+              <a:t>강점</a:t>
+            </a:r>
+            <a:endParaRPr lang="en-US" sz="1600" dirty="0"/>
+          </a:p>
+        </p:txBody>
+      </p:sp>
+      <p:sp>
+        <p:nvSpPr>
+          <p:cNvPr id="5" name="Text 3"/>
+          <p:cNvSpPr txBox="1"/>
+          <p:nvPr/>
+        </p:nvSpPr>
+        <p:spPr>
+          <a:xfrm>
+            <a:off x="822960" y="2697480"/>
+            <a:ext cx="3063240" cy="2286000"/>
+          </a:xfrm>
+          <a:prstGeom prst="rect">
+            <a:avLst/>
+          </a:prstGeom>
+          <a:noFill/>
+          <a:ln/>
+        </p:spPr>
+        <p:txBody>
+          <a:bodyPr wrap="square" lIns="0" tIns="0" rIns="0" bIns="0" rtlCol="0" anchor="t"/>
+          <a:lstStyle/>
+          <a:p>
+            <a:pPr indent="0" marL="0">
+              <a:lnSpc>
+                <a:spcPct val="130000"/>
+              </a:lnSpc>
+              <a:buNone/>
+            </a:pPr>
+            <a:r>
+              <a:rPr lang="en-US" sz="1100" dirty="0">
+                <a:solidFill>
+                  <a:srgbClr val="0B2E33"/>
+                </a:solidFill>
+                <a:latin typeface="Pretendard" pitchFamily="34" charset="0"/>
+                <a:ea typeface="Pretendard" pitchFamily="34" charset="-122"/>
+                <a:cs typeface="Pretendard" pitchFamily="34" charset="-120"/>
+              </a:rPr>
+              <a:t>· 가속기+보정기+재발기를 모두 추적한 최초의 3약물 비교 — 선행연구 공백을 직접 채움</a:t>
+            </a:r>
+            <a:endParaRPr lang="en-US" sz="1100" dirty="0"/>
+          </a:p>
+          <a:p>
+            <a:pPr indent="0" marL="0">
+              <a:lnSpc>
+                <a:spcPct val="130000"/>
+              </a:lnSpc>
+              <a:buNone/>
+            </a:pPr>
+            <a:r>
+              <a:rPr lang="en-US" sz="1100" dirty="0">
+                <a:solidFill>
+                  <a:srgbClr val="0B2E33"/>
+                </a:solidFill>
+                <a:latin typeface="Pretendard" pitchFamily="34" charset="0"/>
+                <a:ea typeface="Pretendard" pitchFamily="34" charset="-122"/>
+                <a:cs typeface="Pretendard" pitchFamily="34" charset="-120"/>
+              </a:rPr>
+              <a:t>· 임상측정(캘리퍼)+조직학(PDL폭, ALP/TRAP)으로 이중 검증</a:t>
+            </a:r>
+            <a:endParaRPr lang="en-US" sz="1100" dirty="0"/>
+          </a:p>
+          <a:p>
+            <a:pPr indent="0" marL="0">
+              <a:lnSpc>
+                <a:spcPct val="130000"/>
+              </a:lnSpc>
+              <a:buNone/>
+            </a:pPr>
+            <a:r>
+              <a:rPr lang="en-US" sz="1100" dirty="0">
+                <a:solidFill>
+                  <a:srgbClr val="0B2E33"/>
+                </a:solidFill>
+                <a:latin typeface="Pretendard" pitchFamily="34" charset="0"/>
+                <a:ea typeface="Pretendard" pitchFamily="34" charset="-122"/>
+                <a:cs typeface="Pretendard" pitchFamily="34" charset="-120"/>
+              </a:rPr>
+              <a:t>· ARRIVE 가이드라인 준수, 윤리위 승인, 눈가림 배정</a:t>
+            </a:r>
+            <a:endParaRPr lang="en-US" sz="1100" dirty="0"/>
+          </a:p>
+          <a:p>
+            <a:pPr indent="0" marL="0">
+              <a:lnSpc>
+                <a:spcPct val="130000"/>
+              </a:lnSpc>
+              <a:buNone/>
+            </a:pPr>
+            <a:r>
+              <a:rPr lang="en-US" sz="1100" dirty="0">
+                <a:solidFill>
+                  <a:srgbClr val="0B2E33"/>
+                </a:solidFill>
+                <a:latin typeface="Pretendard" pitchFamily="34" charset="0"/>
+                <a:ea typeface="Pretendard" pitchFamily="34" charset="-122"/>
+                <a:cs typeface="Pretendard" pitchFamily="34" charset="-120"/>
+              </a:rPr>
+              <a:t>· 공공연구비(만수라대) 지원, 이해상충 없음</a:t>
+            </a:r>
+            <a:endParaRPr lang="en-US" sz="1100" dirty="0"/>
+          </a:p>
+        </p:txBody>
+      </p:sp>
+      <p:sp>
+        <p:nvSpPr>
+          <p:cNvPr id="6" name="Text 4"/>
+          <p:cNvSpPr txBox="1"/>
+          <p:nvPr/>
+        </p:nvSpPr>
+        <p:spPr>
+          <a:xfrm>
+            <a:off x="822960" y="5074920"/>
+            <a:ext cx="3063240" cy="274320"/>
+          </a:xfrm>
+          <a:prstGeom prst="rect">
+            <a:avLst/>
+          </a:prstGeom>
+          <a:noFill/>
+          <a:ln/>
+        </p:spPr>
+        <p:txBody>
+          <a:bodyPr wrap="square" lIns="0" tIns="0" rIns="0" bIns="0" rtlCol="0" anchor="ctr"/>
+          <a:lstStyle/>
+          <a:p>
+            <a:pPr indent="0" marL="0">
+              <a:buNone/>
+            </a:pPr>
+            <a:r>
+              <a:rPr lang="en-US" sz="1050" b="1" i="1" dirty="0">
+                <a:solidFill>
+                  <a:srgbClr val="02C39A"/>
+                </a:solidFill>
+                <a:latin typeface="Pretendard" pitchFamily="34" charset="0"/>
+                <a:ea typeface="Pretendard" pitchFamily="34" charset="-122"/>
+                <a:cs typeface="Pretendard" pitchFamily="34" charset="-120"/>
+              </a:rPr>
+              <a:t>▸ 본인 의견 (발표 시 작성)</a:t>
+            </a:r>
+            <a:endParaRPr lang="en-US" sz="1050" dirty="0"/>
+          </a:p>
+        </p:txBody>
+      </p:sp>
+      <p:sp>
+        <p:nvSpPr>
+          <p:cNvPr id="7" name="Shape 5"/>
+          <p:cNvSpPr/>
+          <p:nvPr/>
+        </p:nvSpPr>
+        <p:spPr>
+          <a:xfrm>
+            <a:off x="822960" y="5440680"/>
+            <a:ext cx="3063240" cy="0"/>
+          </a:xfrm>
+          <a:prstGeom prst="line">
+            <a:avLst/>
+          </a:prstGeom>
+          <a:noFill/>
+          <a:ln w="9525">
+            <a:solidFill>
+              <a:srgbClr val="5B7A7E">
+                <a:alpha val="60000"/>
+              </a:srgbClr>
+            </a:solidFill>
+            <a:prstDash val="dash"/>
+          </a:ln>
+        </p:spPr>
+      </p:sp>
+      <p:sp>
+        <p:nvSpPr>
+          <p:cNvPr id="8" name="Shape 6"/>
+          <p:cNvSpPr/>
+          <p:nvPr/>
+        </p:nvSpPr>
+        <p:spPr>
+          <a:xfrm>
+            <a:off x="822960" y="5760720"/>
+            <a:ext cx="3063240" cy="0"/>
+          </a:xfrm>
+          <a:prstGeom prst="line">
+            <a:avLst/>
+          </a:prstGeom>
+          <a:noFill/>
+          <a:ln w="9525">
+            <a:solidFill>
+              <a:srgbClr val="5B7A7E">
+                <a:alpha val="60000"/>
+              </a:srgbClr>
+            </a:solidFill>
+            <a:prstDash val="dash"/>
+          </a:ln>
+        </p:spPr>
+      </p:sp>
+      <p:sp>
+        <p:nvSpPr>
+          <p:cNvPr id="9" name="Shape 7"/>
+          <p:cNvSpPr/>
+          <p:nvPr/>
+        </p:nvSpPr>
+        <p:spPr>
+          <a:xfrm>
+            <a:off x="822960" y="6080760"/>
+            <a:ext cx="3063240" cy="0"/>
+          </a:xfrm>
+          <a:prstGeom prst="line">
+            <a:avLst/>
+          </a:prstGeom>
+          <a:noFill/>
+          <a:ln w="9525">
+            <a:solidFill>
+              <a:srgbClr val="5B7A7E">
+                <a:alpha val="60000"/>
+              </a:srgbClr>
+            </a:solidFill>
+            <a:prstDash val="dash"/>
+          </a:ln>
+        </p:spPr>
+      </p:sp>
+      <p:sp>
+        <p:nvSpPr>
+          <p:cNvPr id="10" name="Shape 8"/>
+          <p:cNvSpPr/>
+          <p:nvPr/>
+        </p:nvSpPr>
+        <p:spPr>
+          <a:xfrm>
+            <a:off x="4343400" y="1920240"/>
+            <a:ext cx="3611880" cy="4389120"/>
+          </a:xfrm>
+          <a:prstGeom prst="roundRect">
+            <a:avLst>
+              <a:gd name="adj" fmla="val 2532"/>
+            </a:avLst>
+          </a:prstGeom>
+          <a:solidFill>
+            <a:srgbClr val="FFFFFF"/>
+          </a:solidFill>
+          <a:ln w="15875">
+            <a:solidFill>
+              <a:srgbClr val="02C39A"/>
+            </a:solidFill>
+            <a:prstDash val="dash"/>
+          </a:ln>
+        </p:spPr>
+      </p:sp>
+      <p:sp>
+        <p:nvSpPr>
+          <p:cNvPr id="11" name="Text 9"/>
+          <p:cNvSpPr txBox="1"/>
+          <p:nvPr/>
+        </p:nvSpPr>
+        <p:spPr>
+          <a:xfrm>
+            <a:off x="4617720" y="2148840"/>
+            <a:ext cx="3063240" cy="457200"/>
+          </a:xfrm>
+          <a:prstGeom prst="rect">
+            <a:avLst/>
+          </a:prstGeom>
+          <a:noFill/>
+          <a:ln/>
+        </p:spPr>
+        <p:txBody>
+          <a:bodyPr wrap="square" lIns="0" tIns="0" rIns="0" bIns="0" rtlCol="0" anchor="ctr"/>
+          <a:lstStyle/>
+          <a:p>
+            <a:pPr indent="0" marL="0">
+              <a:buNone/>
+            </a:pPr>
+            <a:r>
+              <a:rPr lang="en-US" sz="1600" b="1" dirty="0">
+                <a:solidFill>
+                  <a:srgbClr val="028090"/>
+                </a:solidFill>
+                <a:latin typeface="Wanted Sans" pitchFamily="34" charset="0"/>
+                <a:ea typeface="Wanted Sans" pitchFamily="34" charset="-122"/>
+                <a:cs typeface="Wanted Sans" pitchFamily="34" charset="-120"/>
+              </a:rPr>
+              <a:t>한계 / Bias 위험</a:t>
+            </a:r>
+            <a:endParaRPr lang="en-US" sz="1600" dirty="0"/>
+          </a:p>
+        </p:txBody>
+      </p:sp>
+      <p:sp>
+        <p:nvSpPr>
+          <p:cNvPr id="12" name="Text 10"/>
+          <p:cNvSpPr txBox="1"/>
+          <p:nvPr/>
+        </p:nvSpPr>
+        <p:spPr>
+          <a:xfrm>
+            <a:off x="4617720" y="2697480"/>
+            <a:ext cx="3063240" cy="2286000"/>
+          </a:xfrm>
+          <a:prstGeom prst="rect">
+            <a:avLst/>
+          </a:prstGeom>
+          <a:noFill/>
+          <a:ln/>
+        </p:spPr>
+        <p:txBody>
+          <a:bodyPr wrap="square" lIns="0" tIns="0" rIns="0" bIns="0" rtlCol="0" anchor="t"/>
+          <a:lstStyle/>
+          <a:p>
+            <a:pPr indent="0" marL="0">
+              <a:lnSpc>
+                <a:spcPct val="130000"/>
+              </a:lnSpc>
+              <a:buNone/>
+            </a:pPr>
+            <a:r>
+              <a:rPr lang="en-US" sz="1100" dirty="0">
+                <a:solidFill>
+                  <a:srgbClr val="0B2E33"/>
+                </a:solidFill>
+                <a:latin typeface="Pretendard" pitchFamily="34" charset="0"/>
+                <a:ea typeface="Pretendard" pitchFamily="34" charset="-122"/>
+                <a:cs typeface="Pretendard" pitchFamily="34" charset="-120"/>
+              </a:rPr>
+              <a:t>· 동물(랫드)실험 — 종간 차이로 사람에 그대로 적용 어려움(저자도 인정)</a:t>
+            </a:r>
+            <a:endParaRPr lang="en-US" sz="1100" dirty="0"/>
+          </a:p>
+          <a:p>
+            <a:pPr indent="0" marL="0">
+              <a:lnSpc>
+                <a:spcPct val="130000"/>
+              </a:lnSpc>
+              <a:buNone/>
+            </a:pPr>
+            <a:r>
+              <a:rPr lang="en-US" sz="1100" dirty="0">
+                <a:solidFill>
+                  <a:srgbClr val="0B2E33"/>
+                </a:solidFill>
+                <a:latin typeface="Pretendard" pitchFamily="34" charset="0"/>
+                <a:ea typeface="Pretendard" pitchFamily="34" charset="-122"/>
+                <a:cs typeface="Pretendard" pitchFamily="34" charset="-120"/>
+              </a:rPr>
+              <a:t>· 수컷만 사용 — 호르몬 변동은 배제했지만 여성 적용 가능성은 미확인</a:t>
+            </a:r>
+            <a:endParaRPr lang="en-US" sz="1100" dirty="0"/>
+          </a:p>
+          <a:p>
+            <a:pPr indent="0" marL="0">
+              <a:lnSpc>
+                <a:spcPct val="130000"/>
+              </a:lnSpc>
+              <a:buNone/>
+            </a:pPr>
+            <a:r>
+              <a:rPr lang="en-US" sz="1100" dirty="0">
+                <a:solidFill>
+                  <a:srgbClr val="0B2E33"/>
+                </a:solidFill>
+                <a:latin typeface="Pretendard" pitchFamily="34" charset="0"/>
+                <a:ea typeface="Pretendard" pitchFamily="34" charset="-122"/>
+                <a:cs typeface="Pretendard" pitchFamily="34" charset="-120"/>
+              </a:rPr>
+              <a:t>· 약물당 용량 1개만 테스트 — 용량-반응 관계 분석 불가</a:t>
+            </a:r>
+            <a:endParaRPr lang="en-US" sz="1100" dirty="0"/>
+          </a:p>
+          <a:p>
+            <a:pPr indent="0" marL="0">
+              <a:lnSpc>
+                <a:spcPct val="130000"/>
+              </a:lnSpc>
+              <a:buNone/>
+            </a:pPr>
+            <a:r>
+              <a:rPr lang="en-US" sz="1100" dirty="0">
+                <a:solidFill>
+                  <a:srgbClr val="0B2E33"/>
+                </a:solidFill>
+                <a:latin typeface="Pretendard" pitchFamily="34" charset="0"/>
+                <a:ea typeface="Pretendard" pitchFamily="34" charset="-122"/>
+                <a:cs typeface="Pretendard" pitchFamily="34" charset="-120"/>
+              </a:rPr>
+              <a:t>· 코르티코스테로이드 결과가 일부 선행연구와 정반대 — 재현성 논쟁 여지</a:t>
+            </a:r>
+            <a:endParaRPr lang="en-US" sz="1100" dirty="0"/>
+          </a:p>
+        </p:txBody>
+      </p:sp>
+      <p:sp>
+        <p:nvSpPr>
+          <p:cNvPr id="13" name="Text 11"/>
+          <p:cNvSpPr txBox="1"/>
+          <p:nvPr/>
+        </p:nvSpPr>
+        <p:spPr>
+          <a:xfrm>
+            <a:off x="4617720" y="5074920"/>
+            <a:ext cx="3063240" cy="274320"/>
+          </a:xfrm>
+          <a:prstGeom prst="rect">
+            <a:avLst/>
+          </a:prstGeom>
+          <a:noFill/>
+          <a:ln/>
+        </p:spPr>
+        <p:txBody>
+          <a:bodyPr wrap="square" lIns="0" tIns="0" rIns="0" bIns="0" rtlCol="0" anchor="ctr"/>
+          <a:lstStyle/>
+          <a:p>
+            <a:pPr indent="0" marL="0">
+              <a:buNone/>
+            </a:pPr>
+            <a:r>
+              <a:rPr lang="en-US" sz="1050" b="1" i="1" dirty="0">
+                <a:solidFill>
+                  <a:srgbClr val="02C39A"/>
+                </a:solidFill>
+                <a:latin typeface="Pretendard" pitchFamily="34" charset="0"/>
+                <a:ea typeface="Pretendard" pitchFamily="34" charset="-122"/>
+                <a:cs typeface="Pretendard" pitchFamily="34" charset="-120"/>
+              </a:rPr>
+              <a:t>▸ 본인 의견 (발표 시 작성)</a:t>
+            </a:r>
+            <a:endParaRPr lang="en-US" sz="1050" dirty="0"/>
+          </a:p>
+        </p:txBody>
+      </p:sp>
+      <p:sp>
+        <p:nvSpPr>
+          <p:cNvPr id="14" name="Shape 12"/>
+          <p:cNvSpPr/>
+          <p:nvPr/>
+        </p:nvSpPr>
+        <p:spPr>
+          <a:xfrm>
+            <a:off x="4617720" y="5440680"/>
+            <a:ext cx="3063240" cy="0"/>
+          </a:xfrm>
+          <a:prstGeom prst="line">
+            <a:avLst/>
+          </a:prstGeom>
+          <a:noFill/>
+          <a:ln w="9525">
+            <a:solidFill>
+              <a:srgbClr val="5B7A7E">
+                <a:alpha val="60000"/>
+              </a:srgbClr>
+            </a:solidFill>
+            <a:prstDash val="dash"/>
+          </a:ln>
+        </p:spPr>
+      </p:sp>
+      <p:sp>
+        <p:nvSpPr>
+          <p:cNvPr id="15" name="Shape 13"/>
+          <p:cNvSpPr/>
+          <p:nvPr/>
+        </p:nvSpPr>
+        <p:spPr>
+          <a:xfrm>
+            <a:off x="4617720" y="5760720"/>
+            <a:ext cx="3063240" cy="0"/>
+          </a:xfrm>
+          <a:prstGeom prst="line">
+            <a:avLst/>
+          </a:prstGeom>
+          <a:noFill/>
+          <a:ln w="9525">
+            <a:solidFill>
+              <a:srgbClr val="5B7A7E">
+                <a:alpha val="60000"/>
+              </a:srgbClr>
+            </a:solidFill>
+            <a:prstDash val="dash"/>
+          </a:ln>
+        </p:spPr>
+      </p:sp>
+      <p:sp>
+        <p:nvSpPr>
+          <p:cNvPr id="16" name="Shape 14"/>
+          <p:cNvSpPr/>
+          <p:nvPr/>
+        </p:nvSpPr>
+        <p:spPr>
+          <a:xfrm>
+            <a:off x="4617720" y="6080760"/>
+            <a:ext cx="3063240" cy="0"/>
+          </a:xfrm>
+          <a:prstGeom prst="line">
+            <a:avLst/>
+          </a:prstGeom>
+          <a:noFill/>
+          <a:ln w="9525">
+            <a:solidFill>
+              <a:srgbClr val="5B7A7E">
+                <a:alpha val="60000"/>
+              </a:srgbClr>
+            </a:solidFill>
+            <a:prstDash val="dash"/>
+          </a:ln>
+        </p:spPr>
+      </p:sp>
+      <p:sp>
+        <p:nvSpPr>
+          <p:cNvPr id="17" name="Shape 15"/>
+          <p:cNvSpPr/>
+          <p:nvPr/>
+        </p:nvSpPr>
+        <p:spPr>
+          <a:xfrm>
+            <a:off x="8138160" y="1920240"/>
+            <a:ext cx="3611880" cy="4389120"/>
+          </a:xfrm>
+          <a:prstGeom prst="roundRect">
+            <a:avLst>
+              <a:gd name="adj" fmla="val 2532"/>
+            </a:avLst>
+          </a:prstGeom>
+          <a:solidFill>
+            <a:srgbClr val="FFFFFF"/>
+          </a:solidFill>
+          <a:ln w="15875">
+            <a:solidFill>
+              <a:srgbClr val="02C39A"/>
+            </a:solidFill>
+            <a:prstDash val="dash"/>
+          </a:ln>
+        </p:spPr>
+      </p:sp>
+      <p:sp>
+        <p:nvSpPr>
+          <p:cNvPr id="18" name="Text 16"/>
+          <p:cNvSpPr txBox="1"/>
+          <p:nvPr/>
+        </p:nvSpPr>
+        <p:spPr>
+          <a:xfrm>
+            <a:off x="8412480" y="2148840"/>
+            <a:ext cx="3063240" cy="457200"/>
+          </a:xfrm>
+          <a:prstGeom prst="rect">
+            <a:avLst/>
+          </a:prstGeom>
+          <a:noFill/>
+          <a:ln/>
+        </p:spPr>
+        <p:txBody>
+          <a:bodyPr wrap="square" lIns="0" tIns="0" rIns="0" bIns="0" rtlCol="0" anchor="ctr"/>
+          <a:lstStyle/>
+          <a:p>
+            <a:pPr indent="0" marL="0">
+              <a:buNone/>
+            </a:pPr>
+            <a:r>
+              <a:rPr lang="en-US" sz="1600" b="1" dirty="0">
+                <a:solidFill>
+                  <a:srgbClr val="028090"/>
+                </a:solidFill>
+                <a:latin typeface="Wanted Sans" pitchFamily="34" charset="0"/>
+                <a:ea typeface="Wanted Sans" pitchFamily="34" charset="-122"/>
+                <a:cs typeface="Wanted Sans" pitchFamily="34" charset="-120"/>
+              </a:rPr>
+              <a:t>임상 적용 가능성</a:t>
+            </a:r>
+            <a:endParaRPr lang="en-US" sz="1600" dirty="0"/>
+          </a:p>
+        </p:txBody>
+      </p:sp>
+      <p:sp>
+        <p:nvSpPr>
+          <p:cNvPr id="19" name="Text 17"/>
+          <p:cNvSpPr txBox="1"/>
+          <p:nvPr/>
+        </p:nvSpPr>
+        <p:spPr>
+          <a:xfrm>
+            <a:off x="8412480" y="2697480"/>
+            <a:ext cx="3063240" cy="2286000"/>
+          </a:xfrm>
+          <a:prstGeom prst="rect">
+            <a:avLst/>
+          </a:prstGeom>
+          <a:noFill/>
+          <a:ln/>
+        </p:spPr>
+        <p:txBody>
+          <a:bodyPr wrap="square" lIns="0" tIns="0" rIns="0" bIns="0" rtlCol="0" anchor="t"/>
+          <a:lstStyle/>
+          <a:p>
+            <a:pPr indent="0" marL="0">
+              <a:lnSpc>
+                <a:spcPct val="130000"/>
+              </a:lnSpc>
+              <a:buNone/>
+            </a:pPr>
+            <a:r>
+              <a:rPr lang="en-US" sz="1100" dirty="0">
+                <a:solidFill>
+                  <a:srgbClr val="0B2E33"/>
+                </a:solidFill>
+                <a:latin typeface="Pretendard" pitchFamily="34" charset="0"/>
+                <a:ea typeface="Pretendard" pitchFamily="34" charset="-122"/>
+                <a:cs typeface="Pretendard" pitchFamily="34" charset="-120"/>
+              </a:rPr>
+              <a:t>· 코르티코스테로이드는 가속 효과 크지만 재발 위험도 가장 큼 — 신중한 임상 판단 필요</a:t>
+            </a:r>
+            <a:endParaRPr lang="en-US" sz="1100" dirty="0"/>
+          </a:p>
+          <a:p>
+            <a:pPr indent="0" marL="0">
+              <a:lnSpc>
+                <a:spcPct val="130000"/>
+              </a:lnSpc>
+              <a:buNone/>
+            </a:pPr>
+            <a:r>
+              <a:rPr lang="en-US" sz="1100" dirty="0">
+                <a:solidFill>
+                  <a:srgbClr val="0B2E33"/>
+                </a:solidFill>
+                <a:latin typeface="Pretendard" pitchFamily="34" charset="0"/>
+                <a:ea typeface="Pretendard" pitchFamily="34" charset="-122"/>
+                <a:cs typeface="Pretendard" pitchFamily="34" charset="-120"/>
+              </a:rPr>
+              <a:t>· 비타민D·PGE2는 가속은 온건해도 재발이 적어 상대적으로 안전한 보조제일 수 있음</a:t>
+            </a:r>
+            <a:endParaRPr lang="en-US" sz="1100" dirty="0"/>
+          </a:p>
+          <a:p>
+            <a:pPr indent="0" marL="0">
+              <a:lnSpc>
+                <a:spcPct val="130000"/>
+              </a:lnSpc>
+              <a:buNone/>
+            </a:pPr>
+            <a:r>
+              <a:rPr lang="en-US" sz="1100" dirty="0">
+                <a:solidFill>
+                  <a:srgbClr val="0B2E33"/>
+                </a:solidFill>
+                <a:latin typeface="Pretendard" pitchFamily="34" charset="0"/>
+                <a:ea typeface="Pretendard" pitchFamily="34" charset="-122"/>
+                <a:cs typeface="Pretendard" pitchFamily="34" charset="-120"/>
+              </a:rPr>
+              <a:t>· PGE2는 고용량 시 치근흡수 위험 보고 있음(타 문헌) — 안전성-효능 균형 필요</a:t>
+            </a:r>
+            <a:endParaRPr lang="en-US" sz="1100" dirty="0"/>
+          </a:p>
+          <a:p>
+            <a:pPr indent="0" marL="0">
+              <a:lnSpc>
+                <a:spcPct val="130000"/>
+              </a:lnSpc>
+              <a:buNone/>
+            </a:pPr>
+            <a:r>
+              <a:rPr lang="en-US" sz="1100" dirty="0">
+                <a:solidFill>
+                  <a:srgbClr val="0B2E33"/>
+                </a:solidFill>
+                <a:latin typeface="Pretendard" pitchFamily="34" charset="0"/>
+                <a:ea typeface="Pretendard" pitchFamily="34" charset="-122"/>
+                <a:cs typeface="Pretendard" pitchFamily="34" charset="-120"/>
+              </a:rPr>
+              <a:t>  → 사람 대상 임상시험으로의 확장이 다음 단계</a:t>
+            </a:r>
+            <a:endParaRPr lang="en-US" sz="1100" dirty="0"/>
+          </a:p>
+        </p:txBody>
+      </p:sp>
+      <p:sp>
+        <p:nvSpPr>
+          <p:cNvPr id="20" name="Text 18"/>
+          <p:cNvSpPr txBox="1"/>
+          <p:nvPr/>
+        </p:nvSpPr>
+        <p:spPr>
+          <a:xfrm>
+            <a:off x="8412480" y="5074920"/>
+            <a:ext cx="3063240" cy="274320"/>
+          </a:xfrm>
+          <a:prstGeom prst="rect">
+            <a:avLst/>
+          </a:prstGeom>
+          <a:noFill/>
+          <a:ln/>
+        </p:spPr>
+        <p:txBody>
+          <a:bodyPr wrap="square" lIns="0" tIns="0" rIns="0" bIns="0" rtlCol="0" anchor="ctr"/>
+          <a:lstStyle/>
+          <a:p>
+            <a:pPr indent="0" marL="0">
+              <a:buNone/>
+            </a:pPr>
+            <a:r>
+              <a:rPr lang="en-US" sz="1050" b="1" i="1" dirty="0">
+                <a:solidFill>
+                  <a:srgbClr val="02C39A"/>
+                </a:solidFill>
+                <a:latin typeface="Pretendard" pitchFamily="34" charset="0"/>
+                <a:ea typeface="Pretendard" pitchFamily="34" charset="-122"/>
+                <a:cs typeface="Pretendard" pitchFamily="34" charset="-120"/>
+              </a:rPr>
+              <a:t>▸ 본인 의견 (발표 시 작성)</a:t>
+            </a:r>
+            <a:endParaRPr lang="en-US" sz="1050" dirty="0"/>
+          </a:p>
+        </p:txBody>
+      </p:sp>
+      <p:sp>
+        <p:nvSpPr>
+          <p:cNvPr id="21" name="Shape 19"/>
+          <p:cNvSpPr/>
+          <p:nvPr/>
+        </p:nvSpPr>
+        <p:spPr>
+          <a:xfrm>
+            <a:off x="8412480" y="5440680"/>
+            <a:ext cx="3063240" cy="0"/>
+          </a:xfrm>
+          <a:prstGeom prst="line">
+            <a:avLst/>
+          </a:prstGeom>
+          <a:noFill/>
+          <a:ln w="9525">
+            <a:solidFill>
+              <a:srgbClr val="5B7A7E">
+                <a:alpha val="60000"/>
+              </a:srgbClr>
+            </a:solidFill>
+            <a:prstDash val="dash"/>
+          </a:ln>
+        </p:spPr>
+      </p:sp>
+      <p:sp>
+        <p:nvSpPr>
+          <p:cNvPr id="22" name="Shape 20"/>
+          <p:cNvSpPr/>
+          <p:nvPr/>
+        </p:nvSpPr>
+        <p:spPr>
+          <a:xfrm>
+            <a:off x="8412480" y="5760720"/>
+            <a:ext cx="3063240" cy="0"/>
+          </a:xfrm>
+          <a:prstGeom prst="line">
+            <a:avLst/>
+          </a:prstGeom>
+          <a:noFill/>
+          <a:ln w="9525">
+            <a:solidFill>
+              <a:srgbClr val="5B7A7E">
+                <a:alpha val="60000"/>
+              </a:srgbClr>
+            </a:solidFill>
+            <a:prstDash val="dash"/>
+          </a:ln>
+        </p:spPr>
+      </p:sp>
+      <p:sp>
+        <p:nvSpPr>
+          <p:cNvPr id="23" name="Shape 21"/>
+          <p:cNvSpPr/>
+          <p:nvPr/>
+        </p:nvSpPr>
+        <p:spPr>
+          <a:xfrm>
+            <a:off x="8412480" y="6080760"/>
+            <a:ext cx="3063240" cy="0"/>
+          </a:xfrm>
+          <a:prstGeom prst="line">
+            <a:avLst/>
+          </a:prstGeom>
+          <a:noFill/>
+          <a:ln w="9525">
+            <a:solidFill>
+              <a:srgbClr val="5B7A7E">
+                <a:alpha val="60000"/>
+              </a:srgbClr>
+            </a:solidFill>
+            <a:prstDash val="dash"/>
+          </a:ln>
+        </p:spPr>
+      </p:sp>
+      <p:sp>
+        <p:nvSpPr>
+          <p:cNvPr id="24" name="Text 22"/>
+          <p:cNvSpPr txBox="1"/>
+          <p:nvPr/>
+        </p:nvSpPr>
+        <p:spPr>
+          <a:xfrm>
+            <a:off x="11365992" y="6355080"/>
+            <a:ext cx="457200" cy="320040"/>
+          </a:xfrm>
+          <a:prstGeom prst="rect">
+            <a:avLst/>
+          </a:prstGeom>
+          <a:noFill/>
+          <a:ln/>
+        </p:spPr>
+        <p:txBody>
+          <a:bodyPr wrap="square" lIns="0" tIns="0" rIns="0" bIns="0" rtlCol="0" anchor="ctr"/>
+          <a:lstStyle/>
+          <a:p>
+            <a:pPr algn="r" indent="0" marL="0">
+              <a:buNone/>
+            </a:pPr>
+            <a:r>
+              <a:rPr lang="en-US" sz="1100" dirty="0">
+                <a:solidFill>
+                  <a:srgbClr val="5B7A7E"/>
+                </a:solidFill>
+                <a:latin typeface="Pretendard" pitchFamily="34" charset="0"/>
+                <a:ea typeface="Pretendard" pitchFamily="34" charset="-122"/>
+                <a:cs typeface="Pretendard" pitchFamily="34" charset="-120"/>
+              </a:rPr>
+              <a:t>10</a:t>
+            </a:r>
+            <a:endParaRPr lang="en-US" sz="1100" dirty="0"/>
+          </a:p>
+        </p:txBody>
+      </p:sp>
+    </p:spTree>
+  </p:cSld>
+  <p:clrMapOvr>
+    <a:masterClrMapping/>
+  </p:clrMapOvr>
+</p:sld>
+</file>
+
+<file path=ppt/slides/slide11.xml><?xml version="1.0" encoding="utf-8"?>
+<p:sld xmlns:a="http://schemas.openxmlformats.org/drawingml/2006/main" xmlns:r="http://schemas.openxmlformats.org/officeDocument/2006/relationships" xmlns:p="http://schemas.openxmlformats.org/presentationml/2006/main">
+  <p:cSld name="Slide 11">
+    <p:bg>
+      <p:bgPr>
+        <a:solidFill>
           <a:srgbClr val="028090"/>
         </a:solidFill>
       </p:bgPr>
@@ -2352,7 +3397,7 @@
                 <a:ea typeface="Pretendard" pitchFamily="34" charset="-122"/>
                 <a:cs typeface="Pretendard" pitchFamily="34" charset="-120"/>
               </a:rPr>
-              <a:t>10</a:t>
+              <a:t>11</a:t>
             </a:r>
             <a:endParaRPr lang="en-US" sz="1100" dirty="0"/>
           </a:p>
@@ -2366,9 +3411,9 @@
 </p:sld>
 </file>
 
-<file path=ppt/slides/slide11.xml><?xml version="1.0" encoding="utf-8"?>
+<file path=ppt/slides/slide12.xml><?xml version="1.0" encoding="utf-8"?>
 <p:sld xmlns:a="http://schemas.openxmlformats.org/drawingml/2006/main" xmlns:r="http://schemas.openxmlformats.org/officeDocument/2006/relationships" xmlns:p="http://schemas.openxmlformats.org/presentationml/2006/main">
-  <p:cSld name="Slide 11">
+  <p:cSld name="Slide 12">
     <p:bg>
       <p:bgPr>
         <a:solidFill>
@@ -2476,9 +3521,9 @@
 </p:sld>
 </file>
 
-<file path=ppt/slides/slide12.xml><?xml version="1.0" encoding="utf-8"?>
+<file path=ppt/slides/slide13.xml><?xml version="1.0" encoding="utf-8"?>
 <p:sld xmlns:a="http://schemas.openxmlformats.org/drawingml/2006/main" xmlns:r="http://schemas.openxmlformats.org/officeDocument/2006/relationships" xmlns:p="http://schemas.openxmlformats.org/presentationml/2006/main">
-  <p:cSld name="Slide 12">
+  <p:cSld name="Slide 13">
     <p:bg>
       <p:bgPr>
         <a:solidFill>
@@ -2580,7 +3625,7 @@
       </p:sp>
       <p:graphicFrame>
         <p:nvGraphicFramePr>
-          <p:cNvPr id="13" name="Table 0"/>
+          <p:cNvPr id="14" name="Table 0"/>
           <p:cNvGraphicFramePr>
             <a:graphicFrameLocks noGrp="1"/>
           </p:cNvGraphicFramePr>
@@ -3884,7 +4929,7 @@
                 <a:ea typeface="Pretendard" pitchFamily="34" charset="-122"/>
                 <a:cs typeface="Pretendard" pitchFamily="34" charset="-120"/>
               </a:rPr>
-              <a:t>12</a:t>
+              <a:t>13</a:t>
             </a:r>
             <a:endParaRPr lang="en-US" sz="1100" dirty="0"/>
           </a:p>
@@ -6462,16 +7507,16 @@
         <p:spPr>
           <a:xfrm>
             <a:off x="548640" y="5074920"/>
-            <a:ext cx="11064240" cy="777240"/>
-          </a:xfrm>
-          <a:prstGeom prst="rect">
-            <a:avLst/>
-          </a:prstGeom>
-          <a:noFill/>
-          <a:ln/>
-        </p:spPr>
-        <p:txBody>
-          <a:bodyPr wrap="square" lIns="0" tIns="0" rIns="0" bIns="0" rtlCol="0" anchor="ctr"/>
+            <a:ext cx="8503920" cy="1051560"/>
+          </a:xfrm>
+          <a:prstGeom prst="rect">
+            <a:avLst/>
+          </a:prstGeom>
+          <a:noFill/>
+          <a:ln/>
+        </p:spPr>
+        <p:txBody>
+          <a:bodyPr wrap="square" lIns="0" tIns="0" rIns="0" bIns="0" rtlCol="0" anchor="t"/>
           <a:lstStyle/>
           <a:p>
             <a:pPr indent="0" marL="0">
@@ -6503,8 +7548,8 @@
         </p:nvSpPr>
         <p:spPr>
           <a:xfrm>
-            <a:off x="548640" y="5943600"/>
-            <a:ext cx="11064240" cy="457200"/>
+            <a:off x="548640" y="6080760"/>
+            <a:ext cx="8503920" cy="457200"/>
           </a:xfrm>
           <a:prstGeom prst="rect">
             <a:avLst/>
@@ -6534,9 +7579,71 @@
           </a:p>
         </p:txBody>
       </p:sp>
-      <p:sp>
-        <p:nvSpPr>
-          <p:cNvPr id="17" name="Text 15"/>
+      <p:pic>
+        <p:nvPicPr>
+          <p:cNvPr id="17" name="Image 0" descr="assets/fig1_loop.jpg">    </p:cNvPr>
+          <p:cNvPicPr>
+            <a:picLocks noChangeAspect="1"/>
+          </p:cNvPicPr>
+          <p:nvPr/>
+        </p:nvPicPr>
+        <p:blipFill>
+          <a:blip r:embed="rId1"/>
+          <a:srcRect l="0" r="0" t="0" b="0"/>
+          <a:stretch/>
+        </p:blipFill>
+        <p:spPr>
+          <a:xfrm>
+            <a:off x="9281160" y="5029200"/>
+            <a:ext cx="1554480" cy="1508760"/>
+          </a:xfrm>
+          <a:prstGeom prst="ellipse">
+            <a:avLst/>
+          </a:prstGeom>
+        </p:spPr>
+      </p:pic>
+      <p:sp>
+        <p:nvSpPr>
+          <p:cNvPr id="18" name="Text 15"/>
+          <p:cNvSpPr txBox="1"/>
+          <p:nvPr/>
+        </p:nvSpPr>
+        <p:spPr>
+          <a:xfrm>
+            <a:off x="9281160" y="6519672"/>
+            <a:ext cx="1554480" cy="274320"/>
+          </a:xfrm>
+          <a:prstGeom prst="rect">
+            <a:avLst/>
+          </a:prstGeom>
+          <a:noFill/>
+          <a:ln/>
+        </p:spPr>
+        <p:txBody>
+          <a:bodyPr wrap="square" lIns="0" tIns="0" rIns="0" bIns="0" rtlCol="0" anchor="ctr"/>
+          <a:lstStyle/>
+          <a:p>
+            <a:pPr algn="ctr" indent="0" marL="0">
+              <a:buNone/>
+            </a:pPr>
+            <a:r>
+              <a:rPr lang="en-US" sz="850" dirty="0">
+                <a:solidFill>
+                  <a:srgbClr val="5B7A7E"/>
+                </a:solidFill>
+                <a:latin typeface="Pretendard" pitchFamily="34" charset="0"/>
+                <a:ea typeface="Pretendard" pitchFamily="34" charset="-122"/>
+                <a:cs typeface="Pretendard" pitchFamily="34" charset="-120"/>
+              </a:rPr>
+              <a:t>Fig.1 원문 — loop 장착</a:t>
+            </a:r>
+            <a:endParaRPr lang="en-US" sz="850" dirty="0"/>
+          </a:p>
+        </p:txBody>
+      </p:sp>
+      <p:sp>
+        <p:nvSpPr>
+          <p:cNvPr id="19" name="Text 16"/>
           <p:cNvSpPr txBox="1"/>
           <p:nvPr/>
         </p:nvSpPr>
@@ -7932,7 +9039,7 @@
         <p:spPr>
           <a:xfrm>
             <a:off x="868680" y="2651760"/>
-            <a:ext cx="4754880" cy="3017520"/>
+            <a:ext cx="4754880" cy="2651760"/>
           </a:xfrm>
           <a:prstGeom prst="rect">
             <a:avLst/>
@@ -8367,88 +9474,45 @@
                 <a:ea typeface="Wanted Sans" pitchFamily="34" charset="-122"/>
                 <a:cs typeface="Wanted Sans" pitchFamily="34" charset="-120"/>
               </a:rPr>
-              <a:t>비평적 고찰 (본인 의견 작성)</a:t>
+              <a:t>조직학적 소견 — 코르티코스테로이드군에서 PDL 폭 가장 넓게 유지</a:t>
             </a:r>
             <a:endParaRPr lang="en-US" sz="2800" dirty="0"/>
           </a:p>
         </p:txBody>
       </p:sp>
-      <p:sp>
-        <p:nvSpPr>
-          <p:cNvPr id="3" name="Shape 1"/>
-          <p:cNvSpPr/>
-          <p:nvPr/>
-        </p:nvSpPr>
-        <p:spPr>
-          <a:xfrm>
-            <a:off x="548640" y="1920240"/>
-            <a:ext cx="3611880" cy="4114800"/>
-          </a:xfrm>
-          <a:prstGeom prst="roundRect">
-            <a:avLst>
-              <a:gd name="adj" fmla="val 2532"/>
-            </a:avLst>
-          </a:prstGeom>
-          <a:solidFill>
-            <a:srgbClr val="FFFFFF"/>
-          </a:solidFill>
-          <a:ln w="15875">
-            <a:solidFill>
-              <a:srgbClr val="02C39A"/>
-            </a:solidFill>
-            <a:prstDash val="dash"/>
-          </a:ln>
-        </p:spPr>
-      </p:sp>
-      <p:sp>
-        <p:nvSpPr>
-          <p:cNvPr id="4" name="Text 2"/>
+      <p:pic>
+        <p:nvPicPr>
+          <p:cNvPr id="3" name="Image 0" descr="assets/fig3_he.jpg">    </p:cNvPr>
+          <p:cNvPicPr>
+            <a:picLocks noChangeAspect="1"/>
+          </p:cNvPicPr>
+          <p:nvPr/>
+        </p:nvPicPr>
+        <p:blipFill>
+          <a:blip r:embed="rId1"/>
+          <a:srcRect l="0" r="0" t="0" b="0"/>
+          <a:stretch/>
+        </p:blipFill>
+        <p:spPr>
+          <a:xfrm>
+            <a:off x="548640" y="1691640"/>
+            <a:ext cx="4297680" cy="4553712"/>
+          </a:xfrm>
+          <a:prstGeom prst="rect">
+            <a:avLst/>
+          </a:prstGeom>
+        </p:spPr>
+      </p:pic>
+      <p:sp>
+        <p:nvSpPr>
+          <p:cNvPr id="4" name="Text 1"/>
           <p:cNvSpPr txBox="1"/>
           <p:nvPr/>
         </p:nvSpPr>
         <p:spPr>
           <a:xfrm>
-            <a:off x="822960" y="2148840"/>
-            <a:ext cx="3063240" cy="457200"/>
-          </a:xfrm>
-          <a:prstGeom prst="rect">
-            <a:avLst/>
-          </a:prstGeom>
-          <a:noFill/>
-          <a:ln/>
-        </p:spPr>
-        <p:txBody>
-          <a:bodyPr wrap="square" lIns="0" tIns="0" rIns="0" bIns="0" rtlCol="0" anchor="ctr"/>
-          <a:lstStyle/>
-          <a:p>
-            <a:pPr indent="0" marL="0">
-              <a:buNone/>
-            </a:pPr>
-            <a:r>
-              <a:rPr lang="en-US" sz="1600" b="1" dirty="0">
-                <a:solidFill>
-                  <a:srgbClr val="028090"/>
-                </a:solidFill>
-                <a:latin typeface="Wanted Sans" pitchFamily="34" charset="0"/>
-                <a:ea typeface="Wanted Sans" pitchFamily="34" charset="-122"/>
-                <a:cs typeface="Wanted Sans" pitchFamily="34" charset="-120"/>
-              </a:rPr>
-              <a:t>강점</a:t>
-            </a:r>
-            <a:endParaRPr lang="en-US" sz="1600" dirty="0"/>
-          </a:p>
-        </p:txBody>
-      </p:sp>
-      <p:sp>
-        <p:nvSpPr>
-          <p:cNvPr id="5" name="Text 3"/>
-          <p:cNvSpPr txBox="1"/>
-          <p:nvPr/>
-        </p:nvSpPr>
-        <p:spPr>
-          <a:xfrm>
-            <a:off x="822960" y="2697480"/>
-            <a:ext cx="3063240" cy="2651760"/>
+            <a:off x="548640" y="6309360"/>
+            <a:ext cx="4846320" cy="365760"/>
           </a:xfrm>
           <a:prstGeom prst="rect">
             <a:avLst/>
@@ -8462,32 +9526,54 @@
           <a:p>
             <a:pPr indent="0" marL="0">
               <a:lnSpc>
-                <a:spcPct val="130000"/>
+                <a:spcPct val="115000"/>
               </a:lnSpc>
               <a:buNone/>
             </a:pPr>
             <a:r>
-              <a:rPr lang="en-US" sz="1100" dirty="0">
-                <a:solidFill>
-                  <a:srgbClr val="0B2E33"/>
+              <a:rPr lang="en-US" sz="900" dirty="0">
+                <a:solidFill>
+                  <a:srgbClr val="5B7A7E"/>
                 </a:solidFill>
                 <a:latin typeface="Pretendard" pitchFamily="34" charset="0"/>
                 <a:ea typeface="Pretendard" pitchFamily="34" charset="-122"/>
                 <a:cs typeface="Pretendard" pitchFamily="34" charset="-120"/>
               </a:rPr>
-              <a:t>· 가속기+보정기+재발기를 모두 추적한 최초의 3약물 비교 — 선행연구 공백을 직접 채움</a:t>
-            </a:r>
-            <a:endParaRPr lang="en-US" sz="1100" dirty="0"/>
-          </a:p>
+              <a:t>원문 Figure 3 (H&amp;E 염색, ×40) — A: 음성대조, B: 양성대조, C: 코르티코스테로이드, D: 비타민D, E: PGE2</a:t>
+            </a:r>
+            <a:endParaRPr lang="en-US" sz="900" dirty="0"/>
+          </a:p>
+        </p:txBody>
+      </p:sp>
+      <p:sp>
+        <p:nvSpPr>
+          <p:cNvPr id="5" name="Text 2"/>
+          <p:cNvSpPr txBox="1"/>
+          <p:nvPr/>
+        </p:nvSpPr>
+        <p:spPr>
+          <a:xfrm>
+            <a:off x="5440680" y="1920240"/>
+            <a:ext cx="6126480" cy="4206240"/>
+          </a:xfrm>
+          <a:prstGeom prst="rect">
+            <a:avLst/>
+          </a:prstGeom>
+          <a:noFill/>
+          <a:ln/>
+        </p:spPr>
+        <p:txBody>
+          <a:bodyPr wrap="square" lIns="0" tIns="0" rIns="0" bIns="0" rtlCol="0" anchor="t"/>
+          <a:lstStyle/>
           <a:p>
             <a:pPr indent="0" marL="0">
               <a:lnSpc>
-                <a:spcPct val="130000"/>
+                <a:spcPct val="150000"/>
               </a:lnSpc>
               <a:buNone/>
             </a:pPr>
             <a:r>
-              <a:rPr lang="en-US" sz="1100" dirty="0">
+              <a:rPr lang="en-US" sz="1450" dirty="0">
                 <a:solidFill>
                   <a:srgbClr val="0B2E33"/>
                 </a:solidFill>
@@ -8495,19 +9581,19 @@
                 <a:ea typeface="Pretendard" pitchFamily="34" charset="-122"/>
                 <a:cs typeface="Pretendard" pitchFamily="34" charset="-120"/>
               </a:rPr>
-              <a:t>· 임상측정(캘리퍼)+조직학(PDL폭, ALP/TRAP)으로 이중 검증</a:t>
-            </a:r>
-            <a:endParaRPr lang="en-US" sz="1100" dirty="0"/>
+              <a:t>· 코르티코스테로이드군(C) - 압박·긴장측 모두 치주인대(PDL) 폭 가장 넓게 유지</a:t>
+            </a:r>
+            <a:endParaRPr lang="en-US" sz="1450" dirty="0"/>
           </a:p>
           <a:p>
             <a:pPr indent="0" marL="0">
               <a:lnSpc>
-                <a:spcPct val="130000"/>
+                <a:spcPct val="150000"/>
               </a:lnSpc>
               <a:buNone/>
             </a:pPr>
             <a:r>
-              <a:rPr lang="en-US" sz="1100" dirty="0">
+              <a:rPr lang="en-US" sz="1450" dirty="0">
                 <a:solidFill>
                   <a:srgbClr val="0B2E33"/>
                 </a:solidFill>
@@ -8515,19 +9601,19 @@
                 <a:ea typeface="Pretendard" pitchFamily="34" charset="-122"/>
                 <a:cs typeface="Pretendard" pitchFamily="34" charset="-120"/>
               </a:rPr>
-              <a:t>· ARRIVE 가이드라인 준수, 윤리위 승인, 눈가림 배정</a:t>
-            </a:r>
-            <a:endParaRPr lang="en-US" sz="1100" dirty="0"/>
+              <a:t>· 대조군(A, B) - PDL 폭 가장 좁음, 재발을 흡수할 조직 여유가 적음을 시사</a:t>
+            </a:r>
+            <a:endParaRPr lang="en-US" sz="1450" dirty="0"/>
           </a:p>
           <a:p>
             <a:pPr indent="0" marL="0">
               <a:lnSpc>
-                <a:spcPct val="130000"/>
+                <a:spcPct val="150000"/>
               </a:lnSpc>
               <a:buNone/>
             </a:pPr>
             <a:r>
-              <a:rPr lang="en-US" sz="1100" dirty="0">
+              <a:rPr lang="en-US" sz="1450" dirty="0">
                 <a:solidFill>
                   <a:srgbClr val="0B2E33"/>
                 </a:solidFill>
@@ -8535,196 +9621,39 @@
                 <a:ea typeface="Pretendard" pitchFamily="34" charset="-122"/>
                 <a:cs typeface="Pretendard" pitchFamily="34" charset="-120"/>
               </a:rPr>
-              <a:t>· 공공연구비(만수라대) 지원, 이해상충 없음</a:t>
-            </a:r>
-            <a:endParaRPr lang="en-US" sz="1100" dirty="0"/>
-          </a:p>
-        </p:txBody>
-      </p:sp>
-      <p:sp>
-        <p:nvSpPr>
-          <p:cNvPr id="6" name="Text 4"/>
-          <p:cNvSpPr txBox="1"/>
-          <p:nvPr/>
-        </p:nvSpPr>
-        <p:spPr>
-          <a:xfrm>
-            <a:off x="822960" y="5440680"/>
-            <a:ext cx="3063240" cy="274320"/>
-          </a:xfrm>
-          <a:prstGeom prst="rect">
-            <a:avLst/>
-          </a:prstGeom>
-          <a:noFill/>
-          <a:ln/>
-        </p:spPr>
-        <p:txBody>
-          <a:bodyPr wrap="square" lIns="0" tIns="0" rIns="0" bIns="0" rtlCol="0" anchor="ctr"/>
-          <a:lstStyle/>
+              <a:t>· 비타민D(D)·PGE2(E)군 - 중간 수준의 PDL 폭</a:t>
+            </a:r>
+            <a:endParaRPr lang="en-US" sz="1450" dirty="0"/>
+          </a:p>
           <a:p>
             <a:pPr indent="0" marL="0">
-              <a:buNone/>
-            </a:pPr>
-            <a:r>
-              <a:rPr lang="en-US" sz="1050" i="1" dirty="0">
-                <a:solidFill>
-                  <a:srgbClr val="5B7A7E"/>
+              <a:lnSpc>
+                <a:spcPct val="150000"/>
+              </a:lnSpc>
+              <a:buNone/>
+            </a:pPr>
+            <a:r>
+              <a:rPr lang="en-US" sz="1450" dirty="0">
+                <a:solidFill>
+                  <a:srgbClr val="0B2E33"/>
                 </a:solidFill>
                 <a:latin typeface="Pretendard" pitchFamily="34" charset="0"/>
                 <a:ea typeface="Pretendard" pitchFamily="34" charset="-122"/>
                 <a:cs typeface="Pretendard" pitchFamily="34" charset="-120"/>
               </a:rPr>
-              <a:t>- 발표 시 본인 의견 추가</a:t>
-            </a:r>
-            <a:endParaRPr lang="en-US" sz="1050" dirty="0"/>
-          </a:p>
-        </p:txBody>
-      </p:sp>
-      <p:sp>
-        <p:nvSpPr>
-          <p:cNvPr id="7" name="Shape 5"/>
-          <p:cNvSpPr/>
-          <p:nvPr/>
-        </p:nvSpPr>
-        <p:spPr>
-          <a:xfrm>
-            <a:off x="822960" y="5760720"/>
-            <a:ext cx="3063240" cy="0"/>
-          </a:xfrm>
-          <a:prstGeom prst="line">
-            <a:avLst/>
-          </a:prstGeom>
-          <a:noFill/>
-          <a:ln w="9525">
-            <a:solidFill>
-              <a:srgbClr val="5B7A7E">
-                <a:alpha val="60000"/>
-              </a:srgbClr>
-            </a:solidFill>
-            <a:prstDash val="dash"/>
-          </a:ln>
-        </p:spPr>
-      </p:sp>
-      <p:sp>
-        <p:nvSpPr>
-          <p:cNvPr id="8" name="Shape 6"/>
-          <p:cNvSpPr/>
-          <p:nvPr/>
-        </p:nvSpPr>
-        <p:spPr>
-          <a:xfrm>
-            <a:off x="822960" y="6172200"/>
-            <a:ext cx="3063240" cy="0"/>
-          </a:xfrm>
-          <a:prstGeom prst="line">
-            <a:avLst/>
-          </a:prstGeom>
-          <a:noFill/>
-          <a:ln w="9525">
-            <a:solidFill>
-              <a:srgbClr val="5B7A7E">
-                <a:alpha val="60000"/>
-              </a:srgbClr>
-            </a:solidFill>
-            <a:prstDash val="dash"/>
-          </a:ln>
-        </p:spPr>
-      </p:sp>
-      <p:sp>
-        <p:nvSpPr>
-          <p:cNvPr id="9" name="Shape 7"/>
-          <p:cNvSpPr/>
-          <p:nvPr/>
-        </p:nvSpPr>
-        <p:spPr>
-          <a:xfrm>
-            <a:off x="4343400" y="1920240"/>
-            <a:ext cx="3611880" cy="4114800"/>
-          </a:xfrm>
-          <a:prstGeom prst="roundRect">
-            <a:avLst>
-              <a:gd name="adj" fmla="val 2532"/>
-            </a:avLst>
-          </a:prstGeom>
-          <a:solidFill>
-            <a:srgbClr val="FFFFFF"/>
-          </a:solidFill>
-          <a:ln w="15875">
-            <a:solidFill>
-              <a:srgbClr val="02C39A"/>
-            </a:solidFill>
-            <a:prstDash val="dash"/>
-          </a:ln>
-        </p:spPr>
-      </p:sp>
-      <p:sp>
-        <p:nvSpPr>
-          <p:cNvPr id="10" name="Text 8"/>
-          <p:cNvSpPr txBox="1"/>
-          <p:nvPr/>
-        </p:nvSpPr>
-        <p:spPr>
-          <a:xfrm>
-            <a:off x="4617720" y="2148840"/>
-            <a:ext cx="3063240" cy="457200"/>
-          </a:xfrm>
-          <a:prstGeom prst="rect">
-            <a:avLst/>
-          </a:prstGeom>
-          <a:noFill/>
-          <a:ln/>
-        </p:spPr>
-        <p:txBody>
-          <a:bodyPr wrap="square" lIns="0" tIns="0" rIns="0" bIns="0" rtlCol="0" anchor="ctr"/>
-          <a:lstStyle/>
-          <a:p>
-            <a:pPr indent="0" marL="0">
-              <a:buNone/>
-            </a:pPr>
-            <a:r>
-              <a:rPr lang="en-US" sz="1600" b="1" dirty="0">
-                <a:solidFill>
-                  <a:srgbClr val="028090"/>
-                </a:solidFill>
-                <a:latin typeface="Wanted Sans" pitchFamily="34" charset="0"/>
-                <a:ea typeface="Wanted Sans" pitchFamily="34" charset="-122"/>
-                <a:cs typeface="Wanted Sans" pitchFamily="34" charset="-120"/>
-              </a:rPr>
-              <a:t>한계 / Bias 위험</a:t>
-            </a:r>
-            <a:endParaRPr lang="en-US" sz="1600" dirty="0"/>
-          </a:p>
-        </p:txBody>
-      </p:sp>
-      <p:sp>
-        <p:nvSpPr>
-          <p:cNvPr id="11" name="Text 9"/>
-          <p:cNvSpPr txBox="1"/>
-          <p:nvPr/>
-        </p:nvSpPr>
-        <p:spPr>
-          <a:xfrm>
-            <a:off x="4617720" y="2697480"/>
-            <a:ext cx="3063240" cy="2651760"/>
-          </a:xfrm>
-          <a:prstGeom prst="rect">
-            <a:avLst/>
-          </a:prstGeom>
-          <a:noFill/>
-          <a:ln/>
-        </p:spPr>
-        <p:txBody>
-          <a:bodyPr wrap="square" lIns="0" tIns="0" rIns="0" bIns="0" rtlCol="0" anchor="ctr"/>
-          <a:lstStyle/>
+              <a:t>· 임상측정(캘리퍼) 결과와 조직 소견이 서로 뒷받침함</a:t>
+            </a:r>
+            <a:endParaRPr lang="en-US" sz="1450" dirty="0"/>
+          </a:p>
           <a:p>
             <a:pPr indent="0" marL="0">
               <a:lnSpc>
-                <a:spcPct val="130000"/>
+                <a:spcPct val="150000"/>
               </a:lnSpc>
               <a:buNone/>
             </a:pPr>
             <a:r>
-              <a:rPr lang="en-US" sz="1100" dirty="0">
+              <a:rPr lang="en-US" sz="1450" dirty="0">
                 <a:solidFill>
                   <a:srgbClr val="0B2E33"/>
                 </a:solidFill>
@@ -8732,421 +9661,15 @@
                 <a:ea typeface="Pretendard" pitchFamily="34" charset="-122"/>
                 <a:cs typeface="Pretendard" pitchFamily="34" charset="-120"/>
               </a:rPr>
-              <a:t>· 동물(랫드)실험 — 종간 차이로 사람에 그대로 적용 어려움(저자도 인정)</a:t>
-            </a:r>
-            <a:endParaRPr lang="en-US" sz="1100" dirty="0"/>
-          </a:p>
-          <a:p>
-            <a:pPr indent="0" marL="0">
-              <a:lnSpc>
-                <a:spcPct val="130000"/>
-              </a:lnSpc>
-              <a:buNone/>
-            </a:pPr>
-            <a:r>
-              <a:rPr lang="en-US" sz="1100" dirty="0">
-                <a:solidFill>
-                  <a:srgbClr val="0B2E33"/>
-                </a:solidFill>
-                <a:latin typeface="Pretendard" pitchFamily="34" charset="0"/>
-                <a:ea typeface="Pretendard" pitchFamily="34" charset="-122"/>
-                <a:cs typeface="Pretendard" pitchFamily="34" charset="-120"/>
-              </a:rPr>
-              <a:t>· 수컷만 사용 — 호르몬 변동은 배제했지만 여성 적용 가능성은 미확인</a:t>
-            </a:r>
-            <a:endParaRPr lang="en-US" sz="1100" dirty="0"/>
-          </a:p>
-          <a:p>
-            <a:pPr indent="0" marL="0">
-              <a:lnSpc>
-                <a:spcPct val="130000"/>
-              </a:lnSpc>
-              <a:buNone/>
-            </a:pPr>
-            <a:r>
-              <a:rPr lang="en-US" sz="1100" dirty="0">
-                <a:solidFill>
-                  <a:srgbClr val="0B2E33"/>
-                </a:solidFill>
-                <a:latin typeface="Pretendard" pitchFamily="34" charset="0"/>
-                <a:ea typeface="Pretendard" pitchFamily="34" charset="-122"/>
-                <a:cs typeface="Pretendard" pitchFamily="34" charset="-120"/>
-              </a:rPr>
-              <a:t>· 약물당 용량 1개만 테스트 — 용량-반응 관계 분석 불가</a:t>
-            </a:r>
-            <a:endParaRPr lang="en-US" sz="1100" dirty="0"/>
-          </a:p>
-          <a:p>
-            <a:pPr indent="0" marL="0">
-              <a:lnSpc>
-                <a:spcPct val="130000"/>
-              </a:lnSpc>
-              <a:buNone/>
-            </a:pPr>
-            <a:r>
-              <a:rPr lang="en-US" sz="1100" dirty="0">
-                <a:solidFill>
-                  <a:srgbClr val="0B2E33"/>
-                </a:solidFill>
-                <a:latin typeface="Pretendard" pitchFamily="34" charset="0"/>
-                <a:ea typeface="Pretendard" pitchFamily="34" charset="-122"/>
-                <a:cs typeface="Pretendard" pitchFamily="34" charset="-120"/>
-              </a:rPr>
-              <a:t>· 코르티코스테로이드 결과가 일부 선행연구와 정반대 — 재현성 논쟁 여지</a:t>
-            </a:r>
-            <a:endParaRPr lang="en-US" sz="1100" dirty="0"/>
-          </a:p>
-        </p:txBody>
-      </p:sp>
-      <p:sp>
-        <p:nvSpPr>
-          <p:cNvPr id="12" name="Text 10"/>
-          <p:cNvSpPr txBox="1"/>
-          <p:nvPr/>
-        </p:nvSpPr>
-        <p:spPr>
-          <a:xfrm>
-            <a:off x="4617720" y="5440680"/>
-            <a:ext cx="3063240" cy="274320"/>
-          </a:xfrm>
-          <a:prstGeom prst="rect">
-            <a:avLst/>
-          </a:prstGeom>
-          <a:noFill/>
-          <a:ln/>
-        </p:spPr>
-        <p:txBody>
-          <a:bodyPr wrap="square" lIns="0" tIns="0" rIns="0" bIns="0" rtlCol="0" anchor="ctr"/>
-          <a:lstStyle/>
-          <a:p>
-            <a:pPr indent="0" marL="0">
-              <a:buNone/>
-            </a:pPr>
-            <a:r>
-              <a:rPr lang="en-US" sz="1050" i="1" dirty="0">
-                <a:solidFill>
-                  <a:srgbClr val="5B7A7E"/>
-                </a:solidFill>
-                <a:latin typeface="Pretendard" pitchFamily="34" charset="0"/>
-                <a:ea typeface="Pretendard" pitchFamily="34" charset="-122"/>
-                <a:cs typeface="Pretendard" pitchFamily="34" charset="-120"/>
-              </a:rPr>
-              <a:t>- 발표 시 본인 의견 추가</a:t>
-            </a:r>
-            <a:endParaRPr lang="en-US" sz="1050" dirty="0"/>
-          </a:p>
-        </p:txBody>
-      </p:sp>
-      <p:sp>
-        <p:nvSpPr>
-          <p:cNvPr id="13" name="Shape 11"/>
-          <p:cNvSpPr/>
-          <p:nvPr/>
-        </p:nvSpPr>
-        <p:spPr>
-          <a:xfrm>
-            <a:off x="4617720" y="5760720"/>
-            <a:ext cx="3063240" cy="0"/>
-          </a:xfrm>
-          <a:prstGeom prst="line">
-            <a:avLst/>
-          </a:prstGeom>
-          <a:noFill/>
-          <a:ln w="9525">
-            <a:solidFill>
-              <a:srgbClr val="5B7A7E">
-                <a:alpha val="60000"/>
-              </a:srgbClr>
-            </a:solidFill>
-            <a:prstDash val="dash"/>
-          </a:ln>
-        </p:spPr>
-      </p:sp>
-      <p:sp>
-        <p:nvSpPr>
-          <p:cNvPr id="14" name="Shape 12"/>
-          <p:cNvSpPr/>
-          <p:nvPr/>
-        </p:nvSpPr>
-        <p:spPr>
-          <a:xfrm>
-            <a:off x="4617720" y="6172200"/>
-            <a:ext cx="3063240" cy="0"/>
-          </a:xfrm>
-          <a:prstGeom prst="line">
-            <a:avLst/>
-          </a:prstGeom>
-          <a:noFill/>
-          <a:ln w="9525">
-            <a:solidFill>
-              <a:srgbClr val="5B7A7E">
-                <a:alpha val="60000"/>
-              </a:srgbClr>
-            </a:solidFill>
-            <a:prstDash val="dash"/>
-          </a:ln>
-        </p:spPr>
-      </p:sp>
-      <p:sp>
-        <p:nvSpPr>
-          <p:cNvPr id="15" name="Shape 13"/>
-          <p:cNvSpPr/>
-          <p:nvPr/>
-        </p:nvSpPr>
-        <p:spPr>
-          <a:xfrm>
-            <a:off x="8138160" y="1920240"/>
-            <a:ext cx="3611880" cy="4114800"/>
-          </a:xfrm>
-          <a:prstGeom prst="roundRect">
-            <a:avLst>
-              <a:gd name="adj" fmla="val 2532"/>
-            </a:avLst>
-          </a:prstGeom>
-          <a:solidFill>
-            <a:srgbClr val="FFFFFF"/>
-          </a:solidFill>
-          <a:ln w="15875">
-            <a:solidFill>
-              <a:srgbClr val="02C39A"/>
-            </a:solidFill>
-            <a:prstDash val="dash"/>
-          </a:ln>
-        </p:spPr>
-      </p:sp>
-      <p:sp>
-        <p:nvSpPr>
-          <p:cNvPr id="16" name="Text 14"/>
-          <p:cNvSpPr txBox="1"/>
-          <p:nvPr/>
-        </p:nvSpPr>
-        <p:spPr>
-          <a:xfrm>
-            <a:off x="8412480" y="2148840"/>
-            <a:ext cx="3063240" cy="457200"/>
-          </a:xfrm>
-          <a:prstGeom prst="rect">
-            <a:avLst/>
-          </a:prstGeom>
-          <a:noFill/>
-          <a:ln/>
-        </p:spPr>
-        <p:txBody>
-          <a:bodyPr wrap="square" lIns="0" tIns="0" rIns="0" bIns="0" rtlCol="0" anchor="ctr"/>
-          <a:lstStyle/>
-          <a:p>
-            <a:pPr indent="0" marL="0">
-              <a:buNone/>
-            </a:pPr>
-            <a:r>
-              <a:rPr lang="en-US" sz="1600" b="1" dirty="0">
-                <a:solidFill>
-                  <a:srgbClr val="028090"/>
-                </a:solidFill>
-                <a:latin typeface="Wanted Sans" pitchFamily="34" charset="0"/>
-                <a:ea typeface="Wanted Sans" pitchFamily="34" charset="-122"/>
-                <a:cs typeface="Wanted Sans" pitchFamily="34" charset="-120"/>
-              </a:rPr>
-              <a:t>임상 적용 가능성</a:t>
-            </a:r>
-            <a:endParaRPr lang="en-US" sz="1600" dirty="0"/>
-          </a:p>
-        </p:txBody>
-      </p:sp>
-      <p:sp>
-        <p:nvSpPr>
-          <p:cNvPr id="17" name="Text 15"/>
-          <p:cNvSpPr txBox="1"/>
-          <p:nvPr/>
-        </p:nvSpPr>
-        <p:spPr>
-          <a:xfrm>
-            <a:off x="8412480" y="2697480"/>
-            <a:ext cx="3063240" cy="2651760"/>
-          </a:xfrm>
-          <a:prstGeom prst="rect">
-            <a:avLst/>
-          </a:prstGeom>
-          <a:noFill/>
-          <a:ln/>
-        </p:spPr>
-        <p:txBody>
-          <a:bodyPr wrap="square" lIns="0" tIns="0" rIns="0" bIns="0" rtlCol="0" anchor="ctr"/>
-          <a:lstStyle/>
-          <a:p>
-            <a:pPr indent="0" marL="0">
-              <a:lnSpc>
-                <a:spcPct val="130000"/>
-              </a:lnSpc>
-              <a:buNone/>
-            </a:pPr>
-            <a:r>
-              <a:rPr lang="en-US" sz="1100" dirty="0">
-                <a:solidFill>
-                  <a:srgbClr val="0B2E33"/>
-                </a:solidFill>
-                <a:latin typeface="Pretendard" pitchFamily="34" charset="0"/>
-                <a:ea typeface="Pretendard" pitchFamily="34" charset="-122"/>
-                <a:cs typeface="Pretendard" pitchFamily="34" charset="-120"/>
-              </a:rPr>
-              <a:t>· 코르티코스테로이드는 가속 효과 크지만 재발 위험도 가장 큼 — 신중한 임상 판단 필요</a:t>
-            </a:r>
-            <a:endParaRPr lang="en-US" sz="1100" dirty="0"/>
-          </a:p>
-          <a:p>
-            <a:pPr indent="0" marL="0">
-              <a:lnSpc>
-                <a:spcPct val="130000"/>
-              </a:lnSpc>
-              <a:buNone/>
-            </a:pPr>
-            <a:r>
-              <a:rPr lang="en-US" sz="1100" dirty="0">
-                <a:solidFill>
-                  <a:srgbClr val="0B2E33"/>
-                </a:solidFill>
-                <a:latin typeface="Pretendard" pitchFamily="34" charset="0"/>
-                <a:ea typeface="Pretendard" pitchFamily="34" charset="-122"/>
-                <a:cs typeface="Pretendard" pitchFamily="34" charset="-120"/>
-              </a:rPr>
-              <a:t>· 비타민D·PGE2는 가속은 온건해도 재발이 적어 상대적으로 안전한 보조제일 수 있음</a:t>
-            </a:r>
-            <a:endParaRPr lang="en-US" sz="1100" dirty="0"/>
-          </a:p>
-          <a:p>
-            <a:pPr indent="0" marL="0">
-              <a:lnSpc>
-                <a:spcPct val="130000"/>
-              </a:lnSpc>
-              <a:buNone/>
-            </a:pPr>
-            <a:r>
-              <a:rPr lang="en-US" sz="1100" dirty="0">
-                <a:solidFill>
-                  <a:srgbClr val="0B2E33"/>
-                </a:solidFill>
-                <a:latin typeface="Pretendard" pitchFamily="34" charset="0"/>
-                <a:ea typeface="Pretendard" pitchFamily="34" charset="-122"/>
-                <a:cs typeface="Pretendard" pitchFamily="34" charset="-120"/>
-              </a:rPr>
-              <a:t>· PGE2는 고용량 시 치근흡수 위험 보고 있음(타 문헌) — 안전성-효능 균형 필요</a:t>
-            </a:r>
-            <a:endParaRPr lang="en-US" sz="1100" dirty="0"/>
-          </a:p>
-          <a:p>
-            <a:pPr indent="0" marL="0">
-              <a:lnSpc>
-                <a:spcPct val="130000"/>
-              </a:lnSpc>
-              <a:buNone/>
-            </a:pPr>
-            <a:r>
-              <a:rPr lang="en-US" sz="1100" dirty="0">
-                <a:solidFill>
-                  <a:srgbClr val="0B2E33"/>
-                </a:solidFill>
-                <a:latin typeface="Pretendard" pitchFamily="34" charset="0"/>
-                <a:ea typeface="Pretendard" pitchFamily="34" charset="-122"/>
-                <a:cs typeface="Pretendard" pitchFamily="34" charset="-120"/>
-              </a:rPr>
-              <a:t>  → 사람 대상 임상시험으로의 확장이 다음 단계</a:t>
-            </a:r>
-            <a:endParaRPr lang="en-US" sz="1100" dirty="0"/>
-          </a:p>
-        </p:txBody>
-      </p:sp>
-      <p:sp>
-        <p:nvSpPr>
-          <p:cNvPr id="18" name="Text 16"/>
-          <p:cNvSpPr txBox="1"/>
-          <p:nvPr/>
-        </p:nvSpPr>
-        <p:spPr>
-          <a:xfrm>
-            <a:off x="8412480" y="5440680"/>
-            <a:ext cx="3063240" cy="274320"/>
-          </a:xfrm>
-          <a:prstGeom prst="rect">
-            <a:avLst/>
-          </a:prstGeom>
-          <a:noFill/>
-          <a:ln/>
-        </p:spPr>
-        <p:txBody>
-          <a:bodyPr wrap="square" lIns="0" tIns="0" rIns="0" bIns="0" rtlCol="0" anchor="ctr"/>
-          <a:lstStyle/>
-          <a:p>
-            <a:pPr indent="0" marL="0">
-              <a:buNone/>
-            </a:pPr>
-            <a:r>
-              <a:rPr lang="en-US" sz="1050" i="1" dirty="0">
-                <a:solidFill>
-                  <a:srgbClr val="5B7A7E"/>
-                </a:solidFill>
-                <a:latin typeface="Pretendard" pitchFamily="34" charset="0"/>
-                <a:ea typeface="Pretendard" pitchFamily="34" charset="-122"/>
-                <a:cs typeface="Pretendard" pitchFamily="34" charset="-120"/>
-              </a:rPr>
-              <a:t>- 발표 시 본인 의견 추가</a:t>
-            </a:r>
-            <a:endParaRPr lang="en-US" sz="1050" dirty="0"/>
-          </a:p>
-        </p:txBody>
-      </p:sp>
-      <p:sp>
-        <p:nvSpPr>
-          <p:cNvPr id="19" name="Shape 17"/>
-          <p:cNvSpPr/>
-          <p:nvPr/>
-        </p:nvSpPr>
-        <p:spPr>
-          <a:xfrm>
-            <a:off x="8412480" y="5760720"/>
-            <a:ext cx="3063240" cy="0"/>
-          </a:xfrm>
-          <a:prstGeom prst="line">
-            <a:avLst/>
-          </a:prstGeom>
-          <a:noFill/>
-          <a:ln w="9525">
-            <a:solidFill>
-              <a:srgbClr val="5B7A7E">
-                <a:alpha val="60000"/>
-              </a:srgbClr>
-            </a:solidFill>
-            <a:prstDash val="dash"/>
-          </a:ln>
-        </p:spPr>
-      </p:sp>
-      <p:sp>
-        <p:nvSpPr>
-          <p:cNvPr id="20" name="Shape 18"/>
-          <p:cNvSpPr/>
-          <p:nvPr/>
-        </p:nvSpPr>
-        <p:spPr>
-          <a:xfrm>
-            <a:off x="8412480" y="6172200"/>
-            <a:ext cx="3063240" cy="0"/>
-          </a:xfrm>
-          <a:prstGeom prst="line">
-            <a:avLst/>
-          </a:prstGeom>
-          <a:noFill/>
-          <a:ln w="9525">
-            <a:solidFill>
-              <a:srgbClr val="5B7A7E">
-                <a:alpha val="60000"/>
-              </a:srgbClr>
-            </a:solidFill>
-            <a:prstDash val="dash"/>
-          </a:ln>
-        </p:spPr>
-      </p:sp>
-      <p:sp>
-        <p:nvSpPr>
-          <p:cNvPr id="21" name="Text 19"/>
+              <a:t>· 동일한 순서 패턴이 ALP·TRAP 염색(원문 Figure 4, 5)에서도 확인됨</a:t>
+            </a:r>
+            <a:endParaRPr lang="en-US" sz="1450" dirty="0"/>
+          </a:p>
+        </p:txBody>
+      </p:sp>
+      <p:sp>
+        <p:nvSpPr>
+          <p:cNvPr id="6" name="Text 3"/>
           <p:cNvSpPr txBox="1"/>
           <p:nvPr/>
         </p:nvSpPr>

--- a/치과약리학실험2-논문발표/치과약리학실험2_논문발표.pptx
+++ b/치과약리학실험2-논문발표/치과약리학실험2_논문발표.pptx
@@ -18,9 +18,10 @@
     <p:sldId id="266" r:id="rId12"/>
     <p:sldId id="267" r:id="rId13"/>
     <p:sldId id="268" r:id="rId14"/>
+    <p:sldId id="269" r:id="rId15"/>
   </p:sldIdLst>
   <p:notesMasterIdLst>
-    <p:notesMasterId r:id="rId15"/>
+    <p:notesMasterId r:id="rId16"/>
   </p:notesMasterIdLst>
   <p:sldSz cx="12192000" cy="6858000"/>
   <p:notesSz cx="6858000" cy="12192000"/>
@@ -778,11 +779,7 @@
           <a:p>
             <a:r>
               <a:rPr lang="en-US" dirty="0"/>
-              <a:t>예상 질문 1: 동물실험 결과를 사람에게 그대로 적용할 수 있는가?
-예상 질문 2: 코르티코스테로이드 결과가 일부 선행연구(Yamane, Molina 등)와 정반대인데, 이 연구가 더 신뢰할 만한 이유는?
-예상 질문 3: 왜 세 약물의 용량을 하나씩만 테스트했는가? 용량을 늘리면 결과가 달라질 수 있지 않은가?
-예상 질문 4: PGE2가 치근흡수를 유발할 수 있다는데, 이 연구에서는 그런 부작용을 확인했는가?
-예상 질문 5: 암컷 랫드는 왜 제외했는가? 성별에 따라 결과가 다를 가능성은?</a:t>
+              <a:t>교수님이 '그 인용 어디서 났나' 물으면 이 슬라이드로 바로 답 가능. 전체 28개 문헌은 원 논문 References 섹션에 있음.</a:t>
             </a:r>
             <a:endParaRPr lang="en-US" dirty="0"/>
           </a:p>
@@ -870,7 +867,11 @@
           <a:p>
             <a:r>
               <a:rPr lang="en-US" dirty="0"/>
-              <a:t>Q&amp;A 대비용 백업 슬라이드. 교수가 '원문 Discussion엔 대조군이 최저라고 되어있는데?' 라고 물으면 이 슬라이드를 띄우고: (1) Table III의 p3(CPG vs PGE2G)=0.605로 두 군이 통계적으로 구분 안 됨을 보여주고, (2) 원문 스스로도 Results/Conclusion과 Discussion에서 서술이 갈린다는 점을 지적하며, (3) '정확히는 대조군과 PGE2군이 재발 억제 면에서 통계적으로 동급'이라고 답변할 것. 임상적으로는 'PGE2가 가속 효과를 내면서도 재발은 무처치 수준으로 억제한다'는 게 이 발견의 가장 흥미로운 지점.</a:t>
+              <a:t>예상 질문 1: 동물실험 결과를 사람에게 그대로 적용할 수 있는가?
+예상 질문 2: 코르티코스테로이드 결과가 일부 선행연구(Yamane, Molina 등)와 정반대인데, 이 연구가 더 신뢰할 만한 이유는?
+예상 질문 3: 왜 세 약물의 용량을 하나씩만 테스트했는가? 용량을 늘리면 결과가 달라질 수 있지 않은가?
+예상 질문 4: PGE2가 치근흡수를 유발할 수 있다는데, 이 연구에서는 그런 부작용을 확인했는가?
+예상 질문 5: 암컷 랫드는 왜 제외했는가? 성별에 따라 결과가 다를 가능성은?</a:t>
             </a:r>
             <a:endParaRPr lang="en-US" dirty="0"/>
           </a:p>
@@ -894,6 +895,94 @@
             <a:fld id="{F7021451-1387-4CA6-816F-3879F97B5CBC}" type="slidenum">
               <a:rPr lang="en-US"/>
               <a:t>13</a:t>
+            </a:fld>
+            <a:endParaRPr lang="en-US"/>
+          </a:p>
+        </p:txBody>
+      </p:sp>
+    </p:spTree>
+    <p:extLst>
+      <p:ext uri="{BB962C8B-B14F-4D97-AF65-F5344CB8AC3E}">
+        <p14:creationId xmlns:p14="http://schemas.microsoft.com/office/powerpoint/2010/main" val="1024086991"/>
+      </p:ext>
+    </p:extLst>
+  </p:cSld>
+  <p:clrMapOvr>
+    <a:masterClrMapping/>
+  </p:clrMapOvr>
+</p:notes>
+</file>
+
+<file path=ppt/notesSlides/notesSlide14.xml><?xml version="1.0" encoding="utf-8"?>
+<p:notes xmlns:a="http://schemas.openxmlformats.org/drawingml/2006/main" xmlns:r="http://schemas.openxmlformats.org/officeDocument/2006/relationships" xmlns:p="http://schemas.openxmlformats.org/presentationml/2006/main">
+  <p:cSld>
+    <p:spTree>
+      <p:nvGrpSpPr>
+        <p:cNvPr id="1" name=""/>
+        <p:cNvGrpSpPr/>
+        <p:nvPr/>
+      </p:nvGrpSpPr>
+      <p:grpSpPr>
+        <a:xfrm>
+          <a:off x="0" y="0"/>
+          <a:ext cx="0" cy="0"/>
+          <a:chOff x="0" y="0"/>
+          <a:chExt cx="0" cy="0"/>
+        </a:xfrm>
+      </p:grpSpPr>
+      <p:sp>
+        <p:nvSpPr>
+          <p:cNvPr id="2" name="Slide Image Placeholder 1"/>
+          <p:cNvSpPr>
+            <a:spLocks noGrp="1" noRot="1" noChangeAspect="1"/>
+          </p:cNvSpPr>
+          <p:nvPr>
+            <p:ph type="sldImg"/>
+          </p:nvPr>
+        </p:nvSpPr>
+        <p:spPr/>
+      </p:sp>
+      <p:sp>
+        <p:nvSpPr>
+          <p:cNvPr id="3" name="Notes Placeholder 2"/>
+          <p:cNvSpPr>
+            <a:spLocks noGrp="1"/>
+          </p:cNvSpPr>
+          <p:nvPr>
+            <p:ph type="body" idx="1"/>
+          </p:nvPr>
+        </p:nvSpPr>
+        <p:spPr/>
+        <p:txBody>
+          <a:bodyPr/>
+          <a:lstStyle/>
+          <a:p>
+            <a:r>
+              <a:rPr lang="en-US" dirty="0"/>
+              <a:t>Q&amp;A 대비용 백업 슬라이드. 교수가 '원문 Discussion엔 대조군이 최저라고 되어있는데?' 라고 물으면 이 슬라이드를 띄우고: (1) Table III의 p3(CPG vs PGE2G)=0.605로 두 군이 통계적으로 구분 안 됨을 보여주고, (2) 원문 스스로도 Results/Conclusion과 Discussion에서 서술이 갈린다는 점을 지적하며, (3) '정확히는 대조군과 PGE2군이 재발 억제 면에서 통계적으로 동급'이라고 답변할 것. 임상적으로는 'PGE2가 가속 효과를 내면서도 재발은 무처치 수준으로 억제한다'는 게 이 발견의 가장 흥미로운 지점.</a:t>
+            </a:r>
+            <a:endParaRPr lang="en-US" dirty="0"/>
+          </a:p>
+        </p:txBody>
+      </p:sp>
+      <p:sp>
+        <p:nvSpPr>
+          <p:cNvPr id="4" name="Slide Number Placeholder 3"/>
+          <p:cNvSpPr>
+            <a:spLocks noGrp="1"/>
+          </p:cNvSpPr>
+          <p:nvPr>
+            <p:ph type="sldNum" sz="quarter" idx="10"/>
+          </p:nvPr>
+        </p:nvSpPr>
+        <p:spPr/>
+        <p:txBody>
+          <a:bodyPr/>
+          <a:lstStyle/>
+          <a:p>
+            <a:fld id="{F7021451-1387-4CA6-816F-3879F97B5CBC}" type="slidenum">
+              <a:rPr lang="en-US"/>
+              <a:t>14</a:t>
             </a:fld>
             <a:endParaRPr lang="en-US"/>
           </a:p>
@@ -2396,7 +2485,7 @@
         <p:spPr>
           <a:xfrm>
             <a:off x="822960" y="2697480"/>
-            <a:ext cx="3063240" cy="2286000"/>
+            <a:ext cx="3063240" cy="2468880"/>
           </a:xfrm>
           <a:prstGeom prst="rect">
             <a:avLst/>
@@ -2410,12 +2499,12 @@
           <a:p>
             <a:pPr indent="0" marL="0">
               <a:lnSpc>
-                <a:spcPct val="130000"/>
+                <a:spcPct val="125000"/>
               </a:lnSpc>
               <a:buNone/>
             </a:pPr>
             <a:r>
-              <a:rPr lang="en-US" sz="1100" dirty="0">
+              <a:rPr lang="en-US" sz="1000" dirty="0">
                 <a:solidFill>
                   <a:srgbClr val="0B2E33"/>
                 </a:solidFill>
@@ -2425,17 +2514,17 @@
               </a:rPr>
               <a:t>· 가속기+보정기+재발기를 모두 추적한 최초의 3약물 비교 — 선행연구 공백을 직접 채움</a:t>
             </a:r>
-            <a:endParaRPr lang="en-US" sz="1100" dirty="0"/>
+            <a:endParaRPr lang="en-US" sz="1000" dirty="0"/>
           </a:p>
           <a:p>
             <a:pPr indent="0" marL="0">
               <a:lnSpc>
-                <a:spcPct val="130000"/>
+                <a:spcPct val="125000"/>
               </a:lnSpc>
               <a:buNone/>
             </a:pPr>
             <a:r>
-              <a:rPr lang="en-US" sz="1100" dirty="0">
+              <a:rPr lang="en-US" sz="1000" dirty="0">
                 <a:solidFill>
                   <a:srgbClr val="0B2E33"/>
                 </a:solidFill>
@@ -2445,17 +2534,17 @@
               </a:rPr>
               <a:t>· 임상측정(캘리퍼)+조직학(PDL폭, ALP/TRAP)으로 이중 검증</a:t>
             </a:r>
-            <a:endParaRPr lang="en-US" sz="1100" dirty="0"/>
+            <a:endParaRPr lang="en-US" sz="1000" dirty="0"/>
           </a:p>
           <a:p>
             <a:pPr indent="0" marL="0">
               <a:lnSpc>
-                <a:spcPct val="130000"/>
+                <a:spcPct val="125000"/>
               </a:lnSpc>
               <a:buNone/>
             </a:pPr>
             <a:r>
-              <a:rPr lang="en-US" sz="1100" dirty="0">
+              <a:rPr lang="en-US" sz="1000" dirty="0">
                 <a:solidFill>
                   <a:srgbClr val="0B2E33"/>
                 </a:solidFill>
@@ -2463,19 +2552,19 @@
                 <a:ea typeface="Pretendard" pitchFamily="34" charset="-122"/>
                 <a:cs typeface="Pretendard" pitchFamily="34" charset="-120"/>
               </a:rPr>
-              <a:t>· ARRIVE 가이드라인 준수, 윤리위 승인, 눈가림 배정</a:t>
-            </a:r>
-            <a:endParaRPr lang="en-US" sz="1100" dirty="0"/>
+              <a:t>· ARRIVE 가이드라인 준수, 윤리위 승인, 배정(allocation) 눈가림</a:t>
+            </a:r>
+            <a:endParaRPr lang="en-US" sz="1000" dirty="0"/>
           </a:p>
           <a:p>
             <a:pPr indent="0" marL="0">
               <a:lnSpc>
-                <a:spcPct val="130000"/>
+                <a:spcPct val="125000"/>
               </a:lnSpc>
               <a:buNone/>
             </a:pPr>
             <a:r>
-              <a:rPr lang="en-US" sz="1100" dirty="0">
+              <a:rPr lang="en-US" sz="1000" dirty="0">
                 <a:solidFill>
                   <a:srgbClr val="0B2E33"/>
                 </a:solidFill>
@@ -2485,7 +2574,7 @@
               </a:rPr>
               <a:t>· 공공연구비(만수라대) 지원, 이해상충 없음</a:t>
             </a:r>
-            <a:endParaRPr lang="en-US" sz="1100" dirty="0"/>
+            <a:endParaRPr lang="en-US" sz="1000" dirty="0"/>
           </a:p>
         </p:txBody>
       </p:sp>
@@ -2497,7 +2586,7 @@
         </p:nvSpPr>
         <p:spPr>
           <a:xfrm>
-            <a:off x="822960" y="5074920"/>
+            <a:off x="822960" y="5257800"/>
             <a:ext cx="3063240" cy="274320"/>
           </a:xfrm>
           <a:prstGeom prst="rect">
@@ -2536,7 +2625,7 @@
         </p:nvSpPr>
         <p:spPr>
           <a:xfrm>
-            <a:off x="822960" y="5440680"/>
+            <a:off x="822960" y="5623560"/>
             <a:ext cx="3063240" cy="0"/>
           </a:xfrm>
           <a:prstGeom prst="line">
@@ -2561,7 +2650,7 @@
         </p:nvSpPr>
         <p:spPr>
           <a:xfrm>
-            <a:off x="822960" y="5760720"/>
+            <a:off x="822960" y="5943600"/>
             <a:ext cx="3063240" cy="0"/>
           </a:xfrm>
           <a:prstGeom prst="line">
@@ -2581,31 +2670,6 @@
       <p:sp>
         <p:nvSpPr>
           <p:cNvPr id="9" name="Shape 7"/>
-          <p:cNvSpPr/>
-          <p:nvPr/>
-        </p:nvSpPr>
-        <p:spPr>
-          <a:xfrm>
-            <a:off x="822960" y="6080760"/>
-            <a:ext cx="3063240" cy="0"/>
-          </a:xfrm>
-          <a:prstGeom prst="line">
-            <a:avLst/>
-          </a:prstGeom>
-          <a:noFill/>
-          <a:ln w="9525">
-            <a:solidFill>
-              <a:srgbClr val="5B7A7E">
-                <a:alpha val="60000"/>
-              </a:srgbClr>
-            </a:solidFill>
-            <a:prstDash val="dash"/>
-          </a:ln>
-        </p:spPr>
-      </p:sp>
-      <p:sp>
-        <p:nvSpPr>
-          <p:cNvPr id="10" name="Shape 8"/>
           <p:cNvSpPr/>
           <p:nvPr/>
         </p:nvSpPr>
@@ -2632,7 +2696,7 @@
       </p:sp>
       <p:sp>
         <p:nvSpPr>
-          <p:cNvPr id="11" name="Text 9"/>
+          <p:cNvPr id="10" name="Text 8"/>
           <p:cNvSpPr txBox="1"/>
           <p:nvPr/>
         </p:nvSpPr>
@@ -2671,115 +2735,135 @@
       </p:sp>
       <p:sp>
         <p:nvSpPr>
+          <p:cNvPr id="11" name="Text 9"/>
+          <p:cNvSpPr txBox="1"/>
+          <p:nvPr/>
+        </p:nvSpPr>
+        <p:spPr>
+          <a:xfrm>
+            <a:off x="4617720" y="2697480"/>
+            <a:ext cx="3063240" cy="2468880"/>
+          </a:xfrm>
+          <a:prstGeom prst="rect">
+            <a:avLst/>
+          </a:prstGeom>
+          <a:noFill/>
+          <a:ln/>
+        </p:spPr>
+        <p:txBody>
+          <a:bodyPr wrap="square" lIns="0" tIns="0" rIns="0" bIns="0" rtlCol="0" anchor="t"/>
+          <a:lstStyle/>
+          <a:p>
+            <a:pPr indent="0" marL="0">
+              <a:lnSpc>
+                <a:spcPct val="125000"/>
+              </a:lnSpc>
+              <a:buNone/>
+            </a:pPr>
+            <a:r>
+              <a:rPr lang="en-US" sz="1000" dirty="0">
+                <a:solidFill>
+                  <a:srgbClr val="0B2E33"/>
+                </a:solidFill>
+                <a:latin typeface="Pretendard" pitchFamily="34" charset="0"/>
+                <a:ea typeface="Pretendard" pitchFamily="34" charset="-122"/>
+                <a:cs typeface="Pretendard" pitchFamily="34" charset="-120"/>
+              </a:rPr>
+              <a:t>· 동물(랫드)실험 — 종간 차이로 사람에 그대로 적용 어려움(저자도 인정)</a:t>
+            </a:r>
+            <a:endParaRPr lang="en-US" sz="1000" dirty="0"/>
+          </a:p>
+          <a:p>
+            <a:pPr indent="0" marL="0">
+              <a:lnSpc>
+                <a:spcPct val="125000"/>
+              </a:lnSpc>
+              <a:buNone/>
+            </a:pPr>
+            <a:r>
+              <a:rPr lang="en-US" sz="1000" dirty="0">
+                <a:solidFill>
+                  <a:srgbClr val="0B2E33"/>
+                </a:solidFill>
+                <a:latin typeface="Pretendard" pitchFamily="34" charset="0"/>
+                <a:ea typeface="Pretendard" pitchFamily="34" charset="-122"/>
+                <a:cs typeface="Pretendard" pitchFamily="34" charset="-120"/>
+              </a:rPr>
+              <a:t>· 수컷만 사용 — 호르몬 변동은 배제했지만 여성 적용 가능성은 미확인</a:t>
+            </a:r>
+            <a:endParaRPr lang="en-US" sz="1000" dirty="0"/>
+          </a:p>
+          <a:p>
+            <a:pPr indent="0" marL="0">
+              <a:lnSpc>
+                <a:spcPct val="125000"/>
+              </a:lnSpc>
+              <a:buNone/>
+            </a:pPr>
+            <a:r>
+              <a:rPr lang="en-US" sz="1000" dirty="0">
+                <a:solidFill>
+                  <a:srgbClr val="0B2E33"/>
+                </a:solidFill>
+                <a:latin typeface="Pretendard" pitchFamily="34" charset="0"/>
+                <a:ea typeface="Pretendard" pitchFamily="34" charset="-122"/>
+                <a:cs typeface="Pretendard" pitchFamily="34" charset="-120"/>
+              </a:rPr>
+              <a:t>· 약물당 용량 1개, 게다가 투여빈도도 매일·3일마다·매주로 제각각 — 공정 비교인지 불확실</a:t>
+            </a:r>
+            <a:endParaRPr lang="en-US" sz="1000" dirty="0"/>
+          </a:p>
+          <a:p>
+            <a:pPr indent="0" marL="0">
+              <a:lnSpc>
+                <a:spcPct val="125000"/>
+              </a:lnSpc>
+              <a:buNone/>
+            </a:pPr>
+            <a:r>
+              <a:rPr lang="en-US" sz="1000" dirty="0">
+                <a:solidFill>
+                  <a:srgbClr val="0B2E33"/>
+                </a:solidFill>
+                <a:latin typeface="Pretendard" pitchFamily="34" charset="0"/>
+                <a:ea typeface="Pretendard" pitchFamily="34" charset="-122"/>
+                <a:cs typeface="Pretendard" pitchFamily="34" charset="-120"/>
+              </a:rPr>
+              <a:t>· 배정만 눈가림, 측정(outcome assessment)은 비맹검 — 원문: 최종 배정 후엔 주 연구자 1인이 개입·측정·평가를 전부 수행</a:t>
+            </a:r>
+            <a:endParaRPr lang="en-US" sz="1000" dirty="0"/>
+          </a:p>
+          <a:p>
+            <a:pPr indent="0" marL="0">
+              <a:lnSpc>
+                <a:spcPct val="125000"/>
+              </a:lnSpc>
+              <a:buNone/>
+            </a:pPr>
+            <a:r>
+              <a:rPr lang="en-US" sz="1000" dirty="0">
+                <a:solidFill>
+                  <a:srgbClr val="0B2E33"/>
+                </a:solidFill>
+                <a:latin typeface="Pretendard" pitchFamily="34" charset="0"/>
+                <a:ea typeface="Pretendard" pitchFamily="34" charset="-122"/>
+                <a:cs typeface="Pretendard" pitchFamily="34" charset="-120"/>
+              </a:rPr>
+              <a:t>· 코르티코스테로이드 결과가 일부 선행연구와 정반대 — 재현성 논쟁 여지</a:t>
+            </a:r>
+            <a:endParaRPr lang="en-US" sz="1000" dirty="0"/>
+          </a:p>
+        </p:txBody>
+      </p:sp>
+      <p:sp>
+        <p:nvSpPr>
           <p:cNvPr id="12" name="Text 10"/>
           <p:cNvSpPr txBox="1"/>
           <p:nvPr/>
         </p:nvSpPr>
         <p:spPr>
           <a:xfrm>
-            <a:off x="4617720" y="2697480"/>
-            <a:ext cx="3063240" cy="2286000"/>
-          </a:xfrm>
-          <a:prstGeom prst="rect">
-            <a:avLst/>
-          </a:prstGeom>
-          <a:noFill/>
-          <a:ln/>
-        </p:spPr>
-        <p:txBody>
-          <a:bodyPr wrap="square" lIns="0" tIns="0" rIns="0" bIns="0" rtlCol="0" anchor="t"/>
-          <a:lstStyle/>
-          <a:p>
-            <a:pPr indent="0" marL="0">
-              <a:lnSpc>
-                <a:spcPct val="130000"/>
-              </a:lnSpc>
-              <a:buNone/>
-            </a:pPr>
-            <a:r>
-              <a:rPr lang="en-US" sz="1100" dirty="0">
-                <a:solidFill>
-                  <a:srgbClr val="0B2E33"/>
-                </a:solidFill>
-                <a:latin typeface="Pretendard" pitchFamily="34" charset="0"/>
-                <a:ea typeface="Pretendard" pitchFamily="34" charset="-122"/>
-                <a:cs typeface="Pretendard" pitchFamily="34" charset="-120"/>
-              </a:rPr>
-              <a:t>· 동물(랫드)실험 — 종간 차이로 사람에 그대로 적용 어려움(저자도 인정)</a:t>
-            </a:r>
-            <a:endParaRPr lang="en-US" sz="1100" dirty="0"/>
-          </a:p>
-          <a:p>
-            <a:pPr indent="0" marL="0">
-              <a:lnSpc>
-                <a:spcPct val="130000"/>
-              </a:lnSpc>
-              <a:buNone/>
-            </a:pPr>
-            <a:r>
-              <a:rPr lang="en-US" sz="1100" dirty="0">
-                <a:solidFill>
-                  <a:srgbClr val="0B2E33"/>
-                </a:solidFill>
-                <a:latin typeface="Pretendard" pitchFamily="34" charset="0"/>
-                <a:ea typeface="Pretendard" pitchFamily="34" charset="-122"/>
-                <a:cs typeface="Pretendard" pitchFamily="34" charset="-120"/>
-              </a:rPr>
-              <a:t>· 수컷만 사용 — 호르몬 변동은 배제했지만 여성 적용 가능성은 미확인</a:t>
-            </a:r>
-            <a:endParaRPr lang="en-US" sz="1100" dirty="0"/>
-          </a:p>
-          <a:p>
-            <a:pPr indent="0" marL="0">
-              <a:lnSpc>
-                <a:spcPct val="130000"/>
-              </a:lnSpc>
-              <a:buNone/>
-            </a:pPr>
-            <a:r>
-              <a:rPr lang="en-US" sz="1100" dirty="0">
-                <a:solidFill>
-                  <a:srgbClr val="0B2E33"/>
-                </a:solidFill>
-                <a:latin typeface="Pretendard" pitchFamily="34" charset="0"/>
-                <a:ea typeface="Pretendard" pitchFamily="34" charset="-122"/>
-                <a:cs typeface="Pretendard" pitchFamily="34" charset="-120"/>
-              </a:rPr>
-              <a:t>· 약물당 용량 1개만 테스트 — 용량-반응 관계 분석 불가</a:t>
-            </a:r>
-            <a:endParaRPr lang="en-US" sz="1100" dirty="0"/>
-          </a:p>
-          <a:p>
-            <a:pPr indent="0" marL="0">
-              <a:lnSpc>
-                <a:spcPct val="130000"/>
-              </a:lnSpc>
-              <a:buNone/>
-            </a:pPr>
-            <a:r>
-              <a:rPr lang="en-US" sz="1100" dirty="0">
-                <a:solidFill>
-                  <a:srgbClr val="0B2E33"/>
-                </a:solidFill>
-                <a:latin typeface="Pretendard" pitchFamily="34" charset="0"/>
-                <a:ea typeface="Pretendard" pitchFamily="34" charset="-122"/>
-                <a:cs typeface="Pretendard" pitchFamily="34" charset="-120"/>
-              </a:rPr>
-              <a:t>· 코르티코스테로이드 결과가 일부 선행연구와 정반대 — 재현성 논쟁 여지</a:t>
-            </a:r>
-            <a:endParaRPr lang="en-US" sz="1100" dirty="0"/>
-          </a:p>
-        </p:txBody>
-      </p:sp>
-      <p:sp>
-        <p:nvSpPr>
-          <p:cNvPr id="13" name="Text 11"/>
-          <p:cNvSpPr txBox="1"/>
-          <p:nvPr/>
-        </p:nvSpPr>
-        <p:spPr>
-          <a:xfrm>
-            <a:off x="4617720" y="5074920"/>
+            <a:off x="4617720" y="5257800"/>
             <a:ext cx="3063240" cy="274320"/>
           </a:xfrm>
           <a:prstGeom prst="rect">
@@ -2812,13 +2896,13 @@
       </p:sp>
       <p:sp>
         <p:nvSpPr>
-          <p:cNvPr id="14" name="Shape 12"/>
+          <p:cNvPr id="13" name="Shape 11"/>
           <p:cNvSpPr/>
           <p:nvPr/>
         </p:nvSpPr>
         <p:spPr>
           <a:xfrm>
-            <a:off x="4617720" y="5440680"/>
+            <a:off x="4617720" y="5623560"/>
             <a:ext cx="3063240" cy="0"/>
           </a:xfrm>
           <a:prstGeom prst="line">
@@ -2837,13 +2921,13 @@
       </p:sp>
       <p:sp>
         <p:nvSpPr>
-          <p:cNvPr id="15" name="Shape 13"/>
+          <p:cNvPr id="14" name="Shape 12"/>
           <p:cNvSpPr/>
           <p:nvPr/>
         </p:nvSpPr>
         <p:spPr>
           <a:xfrm>
-            <a:off x="4617720" y="5760720"/>
+            <a:off x="4617720" y="5943600"/>
             <a:ext cx="3063240" cy="0"/>
           </a:xfrm>
           <a:prstGeom prst="line">
@@ -2862,32 +2946,7 @@
       </p:sp>
       <p:sp>
         <p:nvSpPr>
-          <p:cNvPr id="16" name="Shape 14"/>
-          <p:cNvSpPr/>
-          <p:nvPr/>
-        </p:nvSpPr>
-        <p:spPr>
-          <a:xfrm>
-            <a:off x="4617720" y="6080760"/>
-            <a:ext cx="3063240" cy="0"/>
-          </a:xfrm>
-          <a:prstGeom prst="line">
-            <a:avLst/>
-          </a:prstGeom>
-          <a:noFill/>
-          <a:ln w="9525">
-            <a:solidFill>
-              <a:srgbClr val="5B7A7E">
-                <a:alpha val="60000"/>
-              </a:srgbClr>
-            </a:solidFill>
-            <a:prstDash val="dash"/>
-          </a:ln>
-        </p:spPr>
-      </p:sp>
-      <p:sp>
-        <p:nvSpPr>
-          <p:cNvPr id="17" name="Shape 15"/>
+          <p:cNvPr id="15" name="Shape 13"/>
           <p:cNvSpPr/>
           <p:nvPr/>
         </p:nvSpPr>
@@ -2914,7 +2973,7 @@
       </p:sp>
       <p:sp>
         <p:nvSpPr>
-          <p:cNvPr id="18" name="Text 16"/>
+          <p:cNvPr id="16" name="Text 14"/>
           <p:cNvSpPr txBox="1"/>
           <p:nvPr/>
         </p:nvSpPr>
@@ -2953,14 +3012,14 @@
       </p:sp>
       <p:sp>
         <p:nvSpPr>
-          <p:cNvPr id="19" name="Text 17"/>
+          <p:cNvPr id="17" name="Text 15"/>
           <p:cNvSpPr txBox="1"/>
           <p:nvPr/>
         </p:nvSpPr>
         <p:spPr>
           <a:xfrm>
             <a:off x="8412480" y="2697480"/>
-            <a:ext cx="3063240" cy="2286000"/>
+            <a:ext cx="3063240" cy="2468880"/>
           </a:xfrm>
           <a:prstGeom prst="rect">
             <a:avLst/>
@@ -2974,12 +3033,12 @@
           <a:p>
             <a:pPr indent="0" marL="0">
               <a:lnSpc>
-                <a:spcPct val="130000"/>
+                <a:spcPct val="125000"/>
               </a:lnSpc>
               <a:buNone/>
             </a:pPr>
             <a:r>
-              <a:rPr lang="en-US" sz="1100" dirty="0">
+              <a:rPr lang="en-US" sz="1000" dirty="0">
                 <a:solidFill>
                   <a:srgbClr val="0B2E33"/>
                 </a:solidFill>
@@ -2989,17 +3048,17 @@
               </a:rPr>
               <a:t>· 코르티코스테로이드는 가속 효과 크지만 재발 위험도 가장 큼 — 신중한 임상 판단 필요</a:t>
             </a:r>
-            <a:endParaRPr lang="en-US" sz="1100" dirty="0"/>
+            <a:endParaRPr lang="en-US" sz="1000" dirty="0"/>
           </a:p>
           <a:p>
             <a:pPr indent="0" marL="0">
               <a:lnSpc>
-                <a:spcPct val="130000"/>
+                <a:spcPct val="125000"/>
               </a:lnSpc>
               <a:buNone/>
             </a:pPr>
             <a:r>
-              <a:rPr lang="en-US" sz="1100" dirty="0">
+              <a:rPr lang="en-US" sz="1000" dirty="0">
                 <a:solidFill>
                   <a:srgbClr val="0B2E33"/>
                 </a:solidFill>
@@ -3009,17 +3068,17 @@
               </a:rPr>
               <a:t>· 비타민D·PGE2는 가속은 온건해도 재발이 적어 상대적으로 안전한 보조제일 수 있음</a:t>
             </a:r>
-            <a:endParaRPr lang="en-US" sz="1100" dirty="0"/>
+            <a:endParaRPr lang="en-US" sz="1000" dirty="0"/>
           </a:p>
           <a:p>
             <a:pPr indent="0" marL="0">
               <a:lnSpc>
-                <a:spcPct val="130000"/>
+                <a:spcPct val="125000"/>
               </a:lnSpc>
               <a:buNone/>
             </a:pPr>
             <a:r>
-              <a:rPr lang="en-US" sz="1100" dirty="0">
+              <a:rPr lang="en-US" sz="1000" dirty="0">
                 <a:solidFill>
                   <a:srgbClr val="0B2E33"/>
                 </a:solidFill>
@@ -3029,17 +3088,17 @@
               </a:rPr>
               <a:t>· PGE2는 고용량 시 치근흡수 위험 보고 있음(타 문헌) — 안전성-효능 균형 필요</a:t>
             </a:r>
-            <a:endParaRPr lang="en-US" sz="1100" dirty="0"/>
+            <a:endParaRPr lang="en-US" sz="1000" dirty="0"/>
           </a:p>
           <a:p>
             <a:pPr indent="0" marL="0">
               <a:lnSpc>
-                <a:spcPct val="130000"/>
+                <a:spcPct val="125000"/>
               </a:lnSpc>
               <a:buNone/>
             </a:pPr>
             <a:r>
-              <a:rPr lang="en-US" sz="1100" dirty="0">
+              <a:rPr lang="en-US" sz="1000" dirty="0">
                 <a:solidFill>
                   <a:srgbClr val="0B2E33"/>
                 </a:solidFill>
@@ -3049,19 +3108,19 @@
               </a:rPr>
               <a:t>  → 사람 대상 임상시험으로의 확장이 다음 단계</a:t>
             </a:r>
-            <a:endParaRPr lang="en-US" sz="1100" dirty="0"/>
-          </a:p>
-        </p:txBody>
-      </p:sp>
-      <p:sp>
-        <p:nvSpPr>
-          <p:cNvPr id="20" name="Text 18"/>
+            <a:endParaRPr lang="en-US" sz="1000" dirty="0"/>
+          </a:p>
+        </p:txBody>
+      </p:sp>
+      <p:sp>
+        <p:nvSpPr>
+          <p:cNvPr id="18" name="Text 16"/>
           <p:cNvSpPr txBox="1"/>
           <p:nvPr/>
         </p:nvSpPr>
         <p:spPr>
           <a:xfrm>
-            <a:off x="8412480" y="5074920"/>
+            <a:off x="8412480" y="5257800"/>
             <a:ext cx="3063240" cy="274320"/>
           </a:xfrm>
           <a:prstGeom prst="rect">
@@ -3094,13 +3153,13 @@
       </p:sp>
       <p:sp>
         <p:nvSpPr>
-          <p:cNvPr id="21" name="Shape 19"/>
+          <p:cNvPr id="19" name="Shape 17"/>
           <p:cNvSpPr/>
           <p:nvPr/>
         </p:nvSpPr>
         <p:spPr>
           <a:xfrm>
-            <a:off x="8412480" y="5440680"/>
+            <a:off x="8412480" y="5623560"/>
             <a:ext cx="3063240" cy="0"/>
           </a:xfrm>
           <a:prstGeom prst="line">
@@ -3119,13 +3178,13 @@
       </p:sp>
       <p:sp>
         <p:nvSpPr>
-          <p:cNvPr id="22" name="Shape 20"/>
+          <p:cNvPr id="20" name="Shape 18"/>
           <p:cNvSpPr/>
           <p:nvPr/>
         </p:nvSpPr>
         <p:spPr>
           <a:xfrm>
-            <a:off x="8412480" y="5760720"/>
+            <a:off x="8412480" y="5943600"/>
             <a:ext cx="3063240" cy="0"/>
           </a:xfrm>
           <a:prstGeom prst="line">
@@ -3144,32 +3203,7 @@
       </p:sp>
       <p:sp>
         <p:nvSpPr>
-          <p:cNvPr id="23" name="Shape 21"/>
-          <p:cNvSpPr/>
-          <p:nvPr/>
-        </p:nvSpPr>
-        <p:spPr>
-          <a:xfrm>
-            <a:off x="8412480" y="6080760"/>
-            <a:ext cx="3063240" cy="0"/>
-          </a:xfrm>
-          <a:prstGeom prst="line">
-            <a:avLst/>
-          </a:prstGeom>
-          <a:noFill/>
-          <a:ln w="9525">
-            <a:solidFill>
-              <a:srgbClr val="5B7A7E">
-                <a:alpha val="60000"/>
-              </a:srgbClr>
-            </a:solidFill>
-            <a:prstDash val="dash"/>
-          </a:ln>
-        </p:spPr>
-      </p:sp>
-      <p:sp>
-        <p:nvSpPr>
-          <p:cNvPr id="24" name="Text 22"/>
+          <p:cNvPr id="21" name="Text 19"/>
           <p:cNvSpPr txBox="1"/>
           <p:nvPr/>
         </p:nvSpPr>
@@ -3358,7 +3392,7 @@
                 <a:ea typeface="Pretendard" pitchFamily="34" charset="-122"/>
                 <a:cs typeface="Pretendard" pitchFamily="34" charset="-120"/>
               </a:rPr>
-              <a:t>코르티코스테로이드=최대가속·최대재발 / PGE2=최소가속·최소재발 / 비타민D=중간 - '빠른 이동'과 '안정적 결과'의 트레이드오프를 보여준 첫 3약물 비교연구임</a:t>
+              <a:t>코르티코스테로이드=최대가속·최대재발 / PGE2=최소가속·최소재발(대조군과 통계적 동률) / 비타민D=중간 - '빠른 이동'과 '안정적 결과'의 트레이드오프를 보여준 첫 3약물 비교연구임</a:t>
             </a:r>
             <a:endParaRPr lang="en-US" sz="1400" dirty="0"/>
           </a:p>
@@ -3367,6 +3401,45 @@
       <p:sp>
         <p:nvSpPr>
           <p:cNvPr id="5" name="Text 3"/>
+          <p:cNvSpPr txBox="1"/>
+          <p:nvPr/>
+        </p:nvSpPr>
+        <p:spPr>
+          <a:xfrm>
+            <a:off x="822960" y="5532120"/>
+            <a:ext cx="10332720" cy="320040"/>
+          </a:xfrm>
+          <a:prstGeom prst="rect">
+            <a:avLst/>
+          </a:prstGeom>
+          <a:noFill/>
+          <a:ln/>
+        </p:spPr>
+        <p:txBody>
+          <a:bodyPr wrap="square" lIns="0" tIns="0" rIns="0" bIns="0" rtlCol="0" anchor="ctr"/>
+          <a:lstStyle/>
+          <a:p>
+            <a:pPr indent="0" marL="0">
+              <a:buNone/>
+            </a:pPr>
+            <a:r>
+              <a:rPr lang="en-US" sz="1000" dirty="0">
+                <a:solidFill>
+                  <a:srgbClr val="F7FBFB"/>
+                </a:solidFill>
+                <a:latin typeface="Pretendard" pitchFamily="34" charset="0"/>
+                <a:ea typeface="Pretendard" pitchFamily="34" charset="-122"/>
+                <a:cs typeface="Pretendard" pitchFamily="34" charset="-120"/>
+              </a:rPr>
+              <a:t>※ PGE2·대조군 relapse 차이 p=0.605(유의하지 않음) - Appendix A 참고</a:t>
+            </a:r>
+            <a:endParaRPr lang="en-US" sz="1000" dirty="0"/>
+          </a:p>
+        </p:txBody>
+      </p:sp>
+      <p:sp>
+        <p:nvSpPr>
+          <p:cNvPr id="6" name="Text 4"/>
           <p:cNvSpPr txBox="1"/>
           <p:nvPr/>
         </p:nvSpPr>
@@ -3414,6 +3487,397 @@
 <file path=ppt/slides/slide12.xml><?xml version="1.0" encoding="utf-8"?>
 <p:sld xmlns:a="http://schemas.openxmlformats.org/drawingml/2006/main" xmlns:r="http://schemas.openxmlformats.org/officeDocument/2006/relationships" xmlns:p="http://schemas.openxmlformats.org/presentationml/2006/main">
   <p:cSld name="Slide 12">
+    <p:bg>
+      <p:bgPr>
+        <a:solidFill>
+          <a:srgbClr val="F7FBFB"/>
+        </a:solidFill>
+      </p:bgPr>
+    </p:bg>
+    <p:spTree>
+      <p:nvGrpSpPr>
+        <p:cNvPr id="1" name=""/>
+        <p:cNvGrpSpPr/>
+        <p:nvPr/>
+      </p:nvGrpSpPr>
+      <p:grpSpPr>
+        <a:xfrm>
+          <a:off x="0" y="0"/>
+          <a:ext cx="0" cy="0"/>
+          <a:chOff x="0" y="0"/>
+          <a:chExt cx="0" cy="0"/>
+        </a:xfrm>
+      </p:grpSpPr>
+      <p:sp>
+        <p:nvSpPr>
+          <p:cNvPr id="2" name="Text 0"/>
+          <p:cNvSpPr txBox="1"/>
+          <p:nvPr/>
+        </p:nvSpPr>
+        <p:spPr>
+          <a:xfrm>
+            <a:off x="548640" y="502920"/>
+            <a:ext cx="11064240" cy="914400"/>
+          </a:xfrm>
+          <a:prstGeom prst="rect">
+            <a:avLst/>
+          </a:prstGeom>
+          <a:noFill/>
+          <a:ln/>
+        </p:spPr>
+        <p:txBody>
+          <a:bodyPr wrap="square" lIns="0" tIns="0" rIns="0" bIns="0" rtlCol="0" anchor="ctr"/>
+          <a:lstStyle/>
+          <a:p>
+            <a:pPr indent="0" marL="0">
+              <a:buNone/>
+            </a:pPr>
+            <a:r>
+              <a:rPr lang="en-US" sz="2800" b="1" dirty="0">
+                <a:solidFill>
+                  <a:srgbClr val="0B2E33"/>
+                </a:solidFill>
+                <a:latin typeface="Wanted Sans" pitchFamily="34" charset="0"/>
+                <a:ea typeface="Wanted Sans" pitchFamily="34" charset="-122"/>
+                <a:cs typeface="Wanted Sans" pitchFamily="34" charset="-120"/>
+              </a:rPr>
+              <a:t>참고문헌</a:t>
+            </a:r>
+            <a:endParaRPr lang="en-US" sz="2800" dirty="0"/>
+          </a:p>
+        </p:txBody>
+      </p:sp>
+      <p:sp>
+        <p:nvSpPr>
+          <p:cNvPr id="3" name="Text 1"/>
+          <p:cNvSpPr txBox="1"/>
+          <p:nvPr/>
+        </p:nvSpPr>
+        <p:spPr>
+          <a:xfrm>
+            <a:off x="548640" y="1828800"/>
+            <a:ext cx="11064240" cy="4572000"/>
+          </a:xfrm>
+          <a:prstGeom prst="rect">
+            <a:avLst/>
+          </a:prstGeom>
+          <a:noFill/>
+          <a:ln/>
+        </p:spPr>
+        <p:txBody>
+          <a:bodyPr wrap="square" lIns="0" tIns="0" rIns="0" bIns="0" rtlCol="0" anchor="t"/>
+          <a:lstStyle/>
+          <a:p>
+            <a:pPr indent="0" marL="0">
+              <a:lnSpc>
+                <a:spcPct val="135000"/>
+              </a:lnSpc>
+              <a:buNone/>
+            </a:pPr>
+            <a:r>
+              <a:rPr lang="en-US" sz="1100" dirty="0">
+                <a:solidFill>
+                  <a:srgbClr val="0B2E33"/>
+                </a:solidFill>
+                <a:latin typeface="Pretendard" pitchFamily="34" charset="0"/>
+                <a:ea typeface="Pretendard" pitchFamily="34" charset="-122"/>
+                <a:cs typeface="Pretendard" pitchFamily="34" charset="-120"/>
+              </a:rPr>
+              <a:t>[원 논문] Hamed SA, Mohammad MH, Grawish ME, Fouda AM, Montasser MA. Three pharmacological agents for acceleratory orthodontic tooth movement and subsequent relapse: A randomized controlled animal study. Int Orthod. 2026;24:101112. (본 발표의 원 논문)</a:t>
+            </a:r>
+            <a:endParaRPr lang="en-US" sz="1100" dirty="0"/>
+          </a:p>
+          <a:p>
+            <a:pPr indent="0" marL="0">
+              <a:lnSpc>
+                <a:spcPct val="135000"/>
+              </a:lnSpc>
+              <a:buNone/>
+            </a:pPr>
+            <a:r>
+              <a:rPr lang="en-US" sz="1100" dirty="0">
+                <a:solidFill>
+                  <a:srgbClr val="0B2E33"/>
+                </a:solidFill>
+                <a:latin typeface="Pretendard" pitchFamily="34" charset="0"/>
+                <a:ea typeface="Pretendard" pitchFamily="34" charset="-122"/>
+                <a:cs typeface="Pretendard" pitchFamily="34" charset="-120"/>
+              </a:rPr>
+              <a:t>[1] Baofeng L, Zhi Y, Bei L, Guolin M, Qingshui Y. Characterization of a rabbit osteoporosis model induced by ovariectomy and glucocorticoid. Bone 2010;46(3):396-401.</a:t>
+            </a:r>
+            <a:endParaRPr lang="en-US" sz="1100" dirty="0"/>
+          </a:p>
+          <a:p>
+            <a:pPr indent="0" marL="0">
+              <a:lnSpc>
+                <a:spcPct val="135000"/>
+              </a:lnSpc>
+              <a:buNone/>
+            </a:pPr>
+            <a:r>
+              <a:rPr lang="en-US" sz="1100" dirty="0">
+                <a:solidFill>
+                  <a:srgbClr val="0B2E33"/>
+                </a:solidFill>
+                <a:latin typeface="Pretendard" pitchFamily="34" charset="0"/>
+                <a:ea typeface="Pretendard" pitchFamily="34" charset="-122"/>
+                <a:cs typeface="Pretendard" pitchFamily="34" charset="-120"/>
+              </a:rPr>
+              <a:t>[2] Abtahi M, Shafaee H, Saghravania N, Peel S, Giddon D, Sohrabi K. Effect of corticosteroids administration in rabbit model. J Clin Pediatr Dent 2014;38:285-9.</a:t>
+            </a:r>
+            <a:endParaRPr lang="en-US" sz="1100" dirty="0"/>
+          </a:p>
+          <a:p>
+            <a:pPr indent="0" marL="0">
+              <a:lnSpc>
+                <a:spcPct val="135000"/>
+              </a:lnSpc>
+              <a:buNone/>
+            </a:pPr>
+            <a:r>
+              <a:rPr lang="en-US" sz="1100" dirty="0">
+                <a:solidFill>
+                  <a:srgbClr val="0B2E33"/>
+                </a:solidFill>
+                <a:latin typeface="Pretendard" pitchFamily="34" charset="0"/>
+                <a:ea typeface="Pretendard" pitchFamily="34" charset="-122"/>
+                <a:cs typeface="Pretendard" pitchFamily="34" charset="-120"/>
+              </a:rPr>
+              <a:t>[3] Yamane A, Fukui T, Chiba M. In vitro measurement of orthodontic tooth movement in rats given beta-aminopropionitrile or hydrocortisone. Eur J Orthod 1997;19(1):21-8.</a:t>
+            </a:r>
+            <a:endParaRPr lang="en-US" sz="1100" dirty="0"/>
+          </a:p>
+          <a:p>
+            <a:pPr indent="0" marL="0">
+              <a:lnSpc>
+                <a:spcPct val="135000"/>
+              </a:lnSpc>
+              <a:buNone/>
+            </a:pPr>
+            <a:r>
+              <a:rPr lang="en-US" sz="1100" dirty="0">
+                <a:solidFill>
+                  <a:srgbClr val="0B2E33"/>
+                </a:solidFill>
+                <a:latin typeface="Pretendard" pitchFamily="34" charset="0"/>
+                <a:ea typeface="Pretendard" pitchFamily="34" charset="-122"/>
+                <a:cs typeface="Pretendard" pitchFamily="34" charset="-120"/>
+              </a:rPr>
+              <a:t>[4] Molina Da Silva JP, et al. Studying orthodontic tooth movement in mice. J Vis Exp 2024;(66884):210.</a:t>
+            </a:r>
+            <a:endParaRPr lang="en-US" sz="1100" dirty="0"/>
+          </a:p>
+          <a:p>
+            <a:pPr indent="0" marL="0">
+              <a:lnSpc>
+                <a:spcPct val="135000"/>
+              </a:lnSpc>
+              <a:buNone/>
+            </a:pPr>
+            <a:r>
+              <a:rPr lang="en-US" sz="1100" dirty="0">
+                <a:solidFill>
+                  <a:srgbClr val="0B2E33"/>
+                </a:solidFill>
+                <a:latin typeface="Pretendard" pitchFamily="34" charset="0"/>
+                <a:ea typeface="Pretendard" pitchFamily="34" charset="-122"/>
+                <a:cs typeface="Pretendard" pitchFamily="34" charset="-120"/>
+              </a:rPr>
+              <a:t>[5] Gowda NC, Kumar P, Swasti KM. Vitamin D3 versus prostaglandin E1: a comparative clinical study on rate of orthodontic tooth movement. Int J Sci Res 2017;6:98-100.</a:t>
+            </a:r>
+            <a:endParaRPr lang="en-US" sz="1100" dirty="0"/>
+          </a:p>
+          <a:p>
+            <a:pPr indent="0" marL="0">
+              <a:lnSpc>
+                <a:spcPct val="135000"/>
+              </a:lnSpc>
+              <a:buNone/>
+            </a:pPr>
+            <a:r>
+              <a:rPr lang="en-US" sz="1100" dirty="0">
+                <a:solidFill>
+                  <a:srgbClr val="0B2E33"/>
+                </a:solidFill>
+                <a:latin typeface="Pretendard" pitchFamily="34" charset="0"/>
+                <a:ea typeface="Pretendard" pitchFamily="34" charset="-122"/>
+                <a:cs typeface="Pretendard" pitchFamily="34" charset="-120"/>
+              </a:rPr>
+              <a:t>[6] Varughese ST, et al. Effect of Vitamin D on canine distalization and alveolar bone density using multi-slice spiral CT. J Contemp Dent Pract 2019;20(12):1430-5.</a:t>
+            </a:r>
+            <a:endParaRPr lang="en-US" sz="1100" dirty="0"/>
+          </a:p>
+          <a:p>
+            <a:pPr indent="0" marL="0">
+              <a:lnSpc>
+                <a:spcPct val="135000"/>
+              </a:lnSpc>
+              <a:buNone/>
+            </a:pPr>
+            <a:r>
+              <a:rPr lang="en-US" sz="1100" dirty="0">
+                <a:solidFill>
+                  <a:srgbClr val="0B2E33"/>
+                </a:solidFill>
+                <a:latin typeface="Pretendard" pitchFamily="34" charset="0"/>
+                <a:ea typeface="Pretendard" pitchFamily="34" charset="-122"/>
+                <a:cs typeface="Pretendard" pitchFamily="34" charset="-120"/>
+              </a:rPr>
+              <a:t>[7] Al-Attar A, Abid M. The effect of vitamin D3 on the alignment of mandibular anterior teeth. Int J Dent 2022;2022.</a:t>
+            </a:r>
+            <a:endParaRPr lang="en-US" sz="1100" dirty="0"/>
+          </a:p>
+          <a:p>
+            <a:pPr indent="0" marL="0">
+              <a:lnSpc>
+                <a:spcPct val="135000"/>
+              </a:lnSpc>
+              <a:buNone/>
+            </a:pPr>
+            <a:r>
+              <a:rPr lang="en-US" sz="1100" dirty="0">
+                <a:solidFill>
+                  <a:srgbClr val="0B2E33"/>
+                </a:solidFill>
+                <a:latin typeface="Pretendard" pitchFamily="34" charset="0"/>
+                <a:ea typeface="Pretendard" pitchFamily="34" charset="-122"/>
+                <a:cs typeface="Pretendard" pitchFamily="34" charset="-120"/>
+              </a:rPr>
+              <a:t>[8] Kale S, Kocadereli I, Atilla P, Aşan E. Comparison of 1,25-dihydroxycholecalciferol and prostaglandin E2 on orthodontic tooth movement. Am J Orthod Dentofacial Orthop 2004;125:607-14.</a:t>
+            </a:r>
+            <a:endParaRPr lang="en-US" sz="1100" dirty="0"/>
+          </a:p>
+          <a:p>
+            <a:pPr indent="0" marL="0">
+              <a:lnSpc>
+                <a:spcPct val="135000"/>
+              </a:lnSpc>
+              <a:buNone/>
+            </a:pPr>
+            <a:r>
+              <a:rPr lang="en-US" sz="1100" dirty="0">
+                <a:solidFill>
+                  <a:srgbClr val="0B2E33"/>
+                </a:solidFill>
+                <a:latin typeface="Pretendard" pitchFamily="34" charset="0"/>
+                <a:ea typeface="Pretendard" pitchFamily="34" charset="-122"/>
+                <a:cs typeface="Pretendard" pitchFamily="34" charset="-120"/>
+              </a:rPr>
+              <a:t>[9] Cağlaroğlu M, Erdem A. Histopathologic investigation of prostaglandin E2 administered on tooth movement and bone metabolism. Korean J Orthod 2012;42:118-28.</a:t>
+            </a:r>
+            <a:endParaRPr lang="en-US" sz="1100" dirty="0"/>
+          </a:p>
+          <a:p>
+            <a:pPr indent="0" marL="0">
+              <a:lnSpc>
+                <a:spcPct val="135000"/>
+              </a:lnSpc>
+              <a:buNone/>
+            </a:pPr>
+            <a:r>
+              <a:rPr lang="en-US" sz="1100" dirty="0">
+                <a:solidFill>
+                  <a:srgbClr val="0B2E33"/>
+                </a:solidFill>
+                <a:latin typeface="Pretendard" pitchFamily="34" charset="0"/>
+                <a:ea typeface="Pretendard" pitchFamily="34" charset="-122"/>
+                <a:cs typeface="Pretendard" pitchFamily="34" charset="-120"/>
+              </a:rPr>
+              <a:t>[10] Seifi M, Hamedi R, Khavandegar Z. The effect of thyroid hormone, prostaglandin E2, and calcium gluconate on orthodontic tooth movement and root resorption in rats. J Dent 2015;16(1 Suppl):35.</a:t>
+            </a:r>
+            <a:endParaRPr lang="en-US" sz="1100" dirty="0"/>
+          </a:p>
+        </p:txBody>
+      </p:sp>
+      <p:sp>
+        <p:nvSpPr>
+          <p:cNvPr id="4" name="Text 2"/>
+          <p:cNvSpPr txBox="1"/>
+          <p:nvPr/>
+        </p:nvSpPr>
+        <p:spPr>
+          <a:xfrm>
+            <a:off x="548640" y="6492240"/>
+            <a:ext cx="11064240" cy="320040"/>
+          </a:xfrm>
+          <a:prstGeom prst="rect">
+            <a:avLst/>
+          </a:prstGeom>
+          <a:noFill/>
+          <a:ln/>
+        </p:spPr>
+        <p:txBody>
+          <a:bodyPr wrap="square" lIns="0" tIns="0" rIns="0" bIns="0" rtlCol="0" anchor="ctr"/>
+          <a:lstStyle/>
+          <a:p>
+            <a:pPr indent="0" marL="0">
+              <a:buNone/>
+            </a:pPr>
+            <a:r>
+              <a:rPr lang="en-US" sz="1000" i="1" dirty="0">
+                <a:solidFill>
+                  <a:srgbClr val="5B7A7E"/>
+                </a:solidFill>
+                <a:latin typeface="Pretendard" pitchFamily="34" charset="0"/>
+                <a:ea typeface="Pretendard" pitchFamily="34" charset="-122"/>
+                <a:cs typeface="Pretendard" pitchFamily="34" charset="-120"/>
+              </a:rPr>
+              <a:t>※ 슬라이드 4(선행연구 비교)에서 이름으로 인용한 문헌만 수록. 전체 참고문헌(28건)은 원 논문 References 참고.</a:t>
+            </a:r>
+            <a:endParaRPr lang="en-US" sz="1000" dirty="0"/>
+          </a:p>
+        </p:txBody>
+      </p:sp>
+      <p:sp>
+        <p:nvSpPr>
+          <p:cNvPr id="5" name="Text 3"/>
+          <p:cNvSpPr txBox="1"/>
+          <p:nvPr/>
+        </p:nvSpPr>
+        <p:spPr>
+          <a:xfrm>
+            <a:off x="11365992" y="6355080"/>
+            <a:ext cx="457200" cy="320040"/>
+          </a:xfrm>
+          <a:prstGeom prst="rect">
+            <a:avLst/>
+          </a:prstGeom>
+          <a:noFill/>
+          <a:ln/>
+        </p:spPr>
+        <p:txBody>
+          <a:bodyPr wrap="square" lIns="0" tIns="0" rIns="0" bIns="0" rtlCol="0" anchor="ctr"/>
+          <a:lstStyle/>
+          <a:p>
+            <a:pPr algn="r" indent="0" marL="0">
+              <a:buNone/>
+            </a:pPr>
+            <a:r>
+              <a:rPr lang="en-US" sz="1100" dirty="0">
+                <a:solidFill>
+                  <a:srgbClr val="5B7A7E"/>
+                </a:solidFill>
+                <a:latin typeface="Pretendard" pitchFamily="34" charset="0"/>
+                <a:ea typeface="Pretendard" pitchFamily="34" charset="-122"/>
+                <a:cs typeface="Pretendard" pitchFamily="34" charset="-120"/>
+              </a:rPr>
+              <a:t>12</a:t>
+            </a:r>
+            <a:endParaRPr lang="en-US" sz="1100" dirty="0"/>
+          </a:p>
+        </p:txBody>
+      </p:sp>
+    </p:spTree>
+  </p:cSld>
+  <p:clrMapOvr>
+    <a:masterClrMapping/>
+  </p:clrMapOvr>
+</p:sld>
+</file>
+
+<file path=ppt/slides/slide13.xml><?xml version="1.0" encoding="utf-8"?>
+<p:sld xmlns:a="http://schemas.openxmlformats.org/drawingml/2006/main" xmlns:r="http://schemas.openxmlformats.org/officeDocument/2006/relationships" xmlns:p="http://schemas.openxmlformats.org/presentationml/2006/main">
+  <p:cSld name="Slide 13">
     <p:bg>
       <p:bgPr>
         <a:solidFill>
@@ -3521,9 +3985,9 @@
 </p:sld>
 </file>
 
-<file path=ppt/slides/slide13.xml><?xml version="1.0" encoding="utf-8"?>
+<file path=ppt/slides/slide14.xml><?xml version="1.0" encoding="utf-8"?>
 <p:sld xmlns:a="http://schemas.openxmlformats.org/drawingml/2006/main" xmlns:r="http://schemas.openxmlformats.org/officeDocument/2006/relationships" xmlns:p="http://schemas.openxmlformats.org/presentationml/2006/main">
-  <p:cSld name="Slide 13">
+  <p:cSld name="Slide 14">
     <p:bg>
       <p:bgPr>
         <a:solidFill>
@@ -3625,7 +4089,7 @@
       </p:sp>
       <p:graphicFrame>
         <p:nvGraphicFramePr>
-          <p:cNvPr id="14" name="Table 0"/>
+          <p:cNvPr id="15" name="Table 0"/>
           <p:cNvGraphicFramePr>
             <a:graphicFrameLocks noGrp="1"/>
           </p:cNvGraphicFramePr>
@@ -4929,7 +5393,7 @@
                 <a:ea typeface="Pretendard" pitchFamily="34" charset="-122"/>
                 <a:cs typeface="Pretendard" pitchFamily="34" charset="-120"/>
               </a:rPr>
-              <a:t>13</a:t>
+              <a:t>14</a:t>
             </a:r>
             <a:endParaRPr lang="en-US" sz="1100" dirty="0"/>
           </a:p>

--- a/치과약리학실험2-논문발표/치과약리학실험2_논문발표.pptx
+++ b/치과약리학실험2-논문발표/치과약리학실험2_논문발표.pptx
@@ -691,7 +691,7 @@
           <a:p>
             <a:r>
               <a:rPr lang="en-US" dirty="0"/>
-              <a:t>치과약리학1 20장(PGE2/COX)과 구강생화학(치아이동의 생화학) 두 과목 내용이 이 논문 하나로 이어진다는 점을 다시 언급하며 마무리. Q&amp;A로 전환.</a:t>
+              <a:t>교수님이 '그 인용 어디서 났나' 물으면 이 슬라이드로 바로 답 가능. 전체 28개 문헌은 원 논문 References 섹션에 있음.</a:t>
             </a:r>
             <a:endParaRPr lang="en-US" dirty="0"/>
           </a:p>
@@ -779,7 +779,7 @@
           <a:p>
             <a:r>
               <a:rPr lang="en-US" dirty="0"/>
-              <a:t>교수님이 '그 인용 어디서 났나' 물으면 이 슬라이드로 바로 답 가능. 전체 28개 문헌은 원 논문 References 섹션에 있음.</a:t>
+              <a:t>치과약리학1 20장(PGE2/COX)과 구강생화학(치아이동의 생화학) 두 과목 내용이 이 논문 하나로 이어진다는 점을 다시 언급하며 마무리. Q&amp;A로 전환. 이 결론 슬라이드가 질의응답 동안 계속 화면에 남아있도록 References 뒤, Q&amp;A 슬라이드 바로 앞으로 옮김.</a:t>
             </a:r>
             <a:endParaRPr lang="en-US" dirty="0"/>
           </a:p>
@@ -3254,6 +3254,397 @@
     <p:bg>
       <p:bgPr>
         <a:solidFill>
+          <a:srgbClr val="F7FBFB"/>
+        </a:solidFill>
+      </p:bgPr>
+    </p:bg>
+    <p:spTree>
+      <p:nvGrpSpPr>
+        <p:cNvPr id="1" name=""/>
+        <p:cNvGrpSpPr/>
+        <p:nvPr/>
+      </p:nvGrpSpPr>
+      <p:grpSpPr>
+        <a:xfrm>
+          <a:off x="0" y="0"/>
+          <a:ext cx="0" cy="0"/>
+          <a:chOff x="0" y="0"/>
+          <a:chExt cx="0" cy="0"/>
+        </a:xfrm>
+      </p:grpSpPr>
+      <p:sp>
+        <p:nvSpPr>
+          <p:cNvPr id="2" name="Text 0"/>
+          <p:cNvSpPr txBox="1"/>
+          <p:nvPr/>
+        </p:nvSpPr>
+        <p:spPr>
+          <a:xfrm>
+            <a:off x="548640" y="502920"/>
+            <a:ext cx="11064240" cy="914400"/>
+          </a:xfrm>
+          <a:prstGeom prst="rect">
+            <a:avLst/>
+          </a:prstGeom>
+          <a:noFill/>
+          <a:ln/>
+        </p:spPr>
+        <p:txBody>
+          <a:bodyPr wrap="square" lIns="0" tIns="0" rIns="0" bIns="0" rtlCol="0" anchor="ctr"/>
+          <a:lstStyle/>
+          <a:p>
+            <a:pPr indent="0" marL="0">
+              <a:buNone/>
+            </a:pPr>
+            <a:r>
+              <a:rPr lang="en-US" sz="2800" b="1" dirty="0">
+                <a:solidFill>
+                  <a:srgbClr val="0B2E33"/>
+                </a:solidFill>
+                <a:latin typeface="Wanted Sans" pitchFamily="34" charset="0"/>
+                <a:ea typeface="Wanted Sans" pitchFamily="34" charset="-122"/>
+                <a:cs typeface="Wanted Sans" pitchFamily="34" charset="-120"/>
+              </a:rPr>
+              <a:t>참고문헌</a:t>
+            </a:r>
+            <a:endParaRPr lang="en-US" sz="2800" dirty="0"/>
+          </a:p>
+        </p:txBody>
+      </p:sp>
+      <p:sp>
+        <p:nvSpPr>
+          <p:cNvPr id="3" name="Text 1"/>
+          <p:cNvSpPr txBox="1"/>
+          <p:nvPr/>
+        </p:nvSpPr>
+        <p:spPr>
+          <a:xfrm>
+            <a:off x="548640" y="1828800"/>
+            <a:ext cx="11064240" cy="4572000"/>
+          </a:xfrm>
+          <a:prstGeom prst="rect">
+            <a:avLst/>
+          </a:prstGeom>
+          <a:noFill/>
+          <a:ln/>
+        </p:spPr>
+        <p:txBody>
+          <a:bodyPr wrap="square" lIns="0" tIns="0" rIns="0" bIns="0" rtlCol="0" anchor="t"/>
+          <a:lstStyle/>
+          <a:p>
+            <a:pPr indent="0" marL="0">
+              <a:lnSpc>
+                <a:spcPct val="135000"/>
+              </a:lnSpc>
+              <a:buNone/>
+            </a:pPr>
+            <a:r>
+              <a:rPr lang="en-US" sz="1100" dirty="0">
+                <a:solidFill>
+                  <a:srgbClr val="0B2E33"/>
+                </a:solidFill>
+                <a:latin typeface="Pretendard" pitchFamily="34" charset="0"/>
+                <a:ea typeface="Pretendard" pitchFamily="34" charset="-122"/>
+                <a:cs typeface="Pretendard" pitchFamily="34" charset="-120"/>
+              </a:rPr>
+              <a:t>[원 논문] Hamed SA, Mohammad MH, Grawish ME, Fouda AM, Montasser MA. Three pharmacological agents for acceleratory orthodontic tooth movement and subsequent relapse: A randomized controlled animal study. Int Orthod. 2026;24:101112. (본 발표의 원 논문)</a:t>
+            </a:r>
+            <a:endParaRPr lang="en-US" sz="1100" dirty="0"/>
+          </a:p>
+          <a:p>
+            <a:pPr indent="0" marL="0">
+              <a:lnSpc>
+                <a:spcPct val="135000"/>
+              </a:lnSpc>
+              <a:buNone/>
+            </a:pPr>
+            <a:r>
+              <a:rPr lang="en-US" sz="1100" dirty="0">
+                <a:solidFill>
+                  <a:srgbClr val="0B2E33"/>
+                </a:solidFill>
+                <a:latin typeface="Pretendard" pitchFamily="34" charset="0"/>
+                <a:ea typeface="Pretendard" pitchFamily="34" charset="-122"/>
+                <a:cs typeface="Pretendard" pitchFamily="34" charset="-120"/>
+              </a:rPr>
+              <a:t>[1] Baofeng L, Zhi Y, Bei L, Guolin M, Qingshui Y. Characterization of a rabbit osteoporosis model induced by ovariectomy and glucocorticoid. Bone 2010;46(3):396-401.</a:t>
+            </a:r>
+            <a:endParaRPr lang="en-US" sz="1100" dirty="0"/>
+          </a:p>
+          <a:p>
+            <a:pPr indent="0" marL="0">
+              <a:lnSpc>
+                <a:spcPct val="135000"/>
+              </a:lnSpc>
+              <a:buNone/>
+            </a:pPr>
+            <a:r>
+              <a:rPr lang="en-US" sz="1100" dirty="0">
+                <a:solidFill>
+                  <a:srgbClr val="0B2E33"/>
+                </a:solidFill>
+                <a:latin typeface="Pretendard" pitchFamily="34" charset="0"/>
+                <a:ea typeface="Pretendard" pitchFamily="34" charset="-122"/>
+                <a:cs typeface="Pretendard" pitchFamily="34" charset="-120"/>
+              </a:rPr>
+              <a:t>[2] Abtahi M, Shafaee H, Saghravania N, Peel S, Giddon D, Sohrabi K. Effect of corticosteroids administration in rabbit model. J Clin Pediatr Dent 2014;38:285-9.</a:t>
+            </a:r>
+            <a:endParaRPr lang="en-US" sz="1100" dirty="0"/>
+          </a:p>
+          <a:p>
+            <a:pPr indent="0" marL="0">
+              <a:lnSpc>
+                <a:spcPct val="135000"/>
+              </a:lnSpc>
+              <a:buNone/>
+            </a:pPr>
+            <a:r>
+              <a:rPr lang="en-US" sz="1100" dirty="0">
+                <a:solidFill>
+                  <a:srgbClr val="0B2E33"/>
+                </a:solidFill>
+                <a:latin typeface="Pretendard" pitchFamily="34" charset="0"/>
+                <a:ea typeface="Pretendard" pitchFamily="34" charset="-122"/>
+                <a:cs typeface="Pretendard" pitchFamily="34" charset="-120"/>
+              </a:rPr>
+              <a:t>[3] Yamane A, Fukui T, Chiba M. In vitro measurement of orthodontic tooth movement in rats given beta-aminopropionitrile or hydrocortisone. Eur J Orthod 1997;19(1):21-8.</a:t>
+            </a:r>
+            <a:endParaRPr lang="en-US" sz="1100" dirty="0"/>
+          </a:p>
+          <a:p>
+            <a:pPr indent="0" marL="0">
+              <a:lnSpc>
+                <a:spcPct val="135000"/>
+              </a:lnSpc>
+              <a:buNone/>
+            </a:pPr>
+            <a:r>
+              <a:rPr lang="en-US" sz="1100" dirty="0">
+                <a:solidFill>
+                  <a:srgbClr val="0B2E33"/>
+                </a:solidFill>
+                <a:latin typeface="Pretendard" pitchFamily="34" charset="0"/>
+                <a:ea typeface="Pretendard" pitchFamily="34" charset="-122"/>
+                <a:cs typeface="Pretendard" pitchFamily="34" charset="-120"/>
+              </a:rPr>
+              <a:t>[4] Molina Da Silva JP, et al. Studying orthodontic tooth movement in mice. J Vis Exp 2024;(66884):210.</a:t>
+            </a:r>
+            <a:endParaRPr lang="en-US" sz="1100" dirty="0"/>
+          </a:p>
+          <a:p>
+            <a:pPr indent="0" marL="0">
+              <a:lnSpc>
+                <a:spcPct val="135000"/>
+              </a:lnSpc>
+              <a:buNone/>
+            </a:pPr>
+            <a:r>
+              <a:rPr lang="en-US" sz="1100" dirty="0">
+                <a:solidFill>
+                  <a:srgbClr val="0B2E33"/>
+                </a:solidFill>
+                <a:latin typeface="Pretendard" pitchFamily="34" charset="0"/>
+                <a:ea typeface="Pretendard" pitchFamily="34" charset="-122"/>
+                <a:cs typeface="Pretendard" pitchFamily="34" charset="-120"/>
+              </a:rPr>
+              <a:t>[5] Gowda NC, Kumar P, Swasti KM. Vitamin D3 versus prostaglandin E1: a comparative clinical study on rate of orthodontic tooth movement. Int J Sci Res 2017;6:98-100.</a:t>
+            </a:r>
+            <a:endParaRPr lang="en-US" sz="1100" dirty="0"/>
+          </a:p>
+          <a:p>
+            <a:pPr indent="0" marL="0">
+              <a:lnSpc>
+                <a:spcPct val="135000"/>
+              </a:lnSpc>
+              <a:buNone/>
+            </a:pPr>
+            <a:r>
+              <a:rPr lang="en-US" sz="1100" dirty="0">
+                <a:solidFill>
+                  <a:srgbClr val="0B2E33"/>
+                </a:solidFill>
+                <a:latin typeface="Pretendard" pitchFamily="34" charset="0"/>
+                <a:ea typeface="Pretendard" pitchFamily="34" charset="-122"/>
+                <a:cs typeface="Pretendard" pitchFamily="34" charset="-120"/>
+              </a:rPr>
+              <a:t>[6] Varughese ST, et al. Effect of Vitamin D on canine distalization and alveolar bone density using multi-slice spiral CT. J Contemp Dent Pract 2019;20(12):1430-5.</a:t>
+            </a:r>
+            <a:endParaRPr lang="en-US" sz="1100" dirty="0"/>
+          </a:p>
+          <a:p>
+            <a:pPr indent="0" marL="0">
+              <a:lnSpc>
+                <a:spcPct val="135000"/>
+              </a:lnSpc>
+              <a:buNone/>
+            </a:pPr>
+            <a:r>
+              <a:rPr lang="en-US" sz="1100" dirty="0">
+                <a:solidFill>
+                  <a:srgbClr val="0B2E33"/>
+                </a:solidFill>
+                <a:latin typeface="Pretendard" pitchFamily="34" charset="0"/>
+                <a:ea typeface="Pretendard" pitchFamily="34" charset="-122"/>
+                <a:cs typeface="Pretendard" pitchFamily="34" charset="-120"/>
+              </a:rPr>
+              <a:t>[7] Al-Attar A, Abid M. The effect of vitamin D3 on the alignment of mandibular anterior teeth. Int J Dent 2022;2022.</a:t>
+            </a:r>
+            <a:endParaRPr lang="en-US" sz="1100" dirty="0"/>
+          </a:p>
+          <a:p>
+            <a:pPr indent="0" marL="0">
+              <a:lnSpc>
+                <a:spcPct val="135000"/>
+              </a:lnSpc>
+              <a:buNone/>
+            </a:pPr>
+            <a:r>
+              <a:rPr lang="en-US" sz="1100" dirty="0">
+                <a:solidFill>
+                  <a:srgbClr val="0B2E33"/>
+                </a:solidFill>
+                <a:latin typeface="Pretendard" pitchFamily="34" charset="0"/>
+                <a:ea typeface="Pretendard" pitchFamily="34" charset="-122"/>
+                <a:cs typeface="Pretendard" pitchFamily="34" charset="-120"/>
+              </a:rPr>
+              <a:t>[8] Kale S, Kocadereli I, Atilla P, Aşan E. Comparison of 1,25-dihydroxycholecalciferol and prostaglandin E2 on orthodontic tooth movement. Am J Orthod Dentofacial Orthop 2004;125:607-14.</a:t>
+            </a:r>
+            <a:endParaRPr lang="en-US" sz="1100" dirty="0"/>
+          </a:p>
+          <a:p>
+            <a:pPr indent="0" marL="0">
+              <a:lnSpc>
+                <a:spcPct val="135000"/>
+              </a:lnSpc>
+              <a:buNone/>
+            </a:pPr>
+            <a:r>
+              <a:rPr lang="en-US" sz="1100" dirty="0">
+                <a:solidFill>
+                  <a:srgbClr val="0B2E33"/>
+                </a:solidFill>
+                <a:latin typeface="Pretendard" pitchFamily="34" charset="0"/>
+                <a:ea typeface="Pretendard" pitchFamily="34" charset="-122"/>
+                <a:cs typeface="Pretendard" pitchFamily="34" charset="-120"/>
+              </a:rPr>
+              <a:t>[9] Cağlaroğlu M, Erdem A. Histopathologic investigation of prostaglandin E2 administered on tooth movement and bone metabolism. Korean J Orthod 2012;42:118-28.</a:t>
+            </a:r>
+            <a:endParaRPr lang="en-US" sz="1100" dirty="0"/>
+          </a:p>
+          <a:p>
+            <a:pPr indent="0" marL="0">
+              <a:lnSpc>
+                <a:spcPct val="135000"/>
+              </a:lnSpc>
+              <a:buNone/>
+            </a:pPr>
+            <a:r>
+              <a:rPr lang="en-US" sz="1100" dirty="0">
+                <a:solidFill>
+                  <a:srgbClr val="0B2E33"/>
+                </a:solidFill>
+                <a:latin typeface="Pretendard" pitchFamily="34" charset="0"/>
+                <a:ea typeface="Pretendard" pitchFamily="34" charset="-122"/>
+                <a:cs typeface="Pretendard" pitchFamily="34" charset="-120"/>
+              </a:rPr>
+              <a:t>[10] Seifi M, Hamedi R, Khavandegar Z. The effect of thyroid hormone, prostaglandin E2, and calcium gluconate on orthodontic tooth movement and root resorption in rats. J Dent 2015;16(1 Suppl):35.</a:t>
+            </a:r>
+            <a:endParaRPr lang="en-US" sz="1100" dirty="0"/>
+          </a:p>
+        </p:txBody>
+      </p:sp>
+      <p:sp>
+        <p:nvSpPr>
+          <p:cNvPr id="4" name="Text 2"/>
+          <p:cNvSpPr txBox="1"/>
+          <p:nvPr/>
+        </p:nvSpPr>
+        <p:spPr>
+          <a:xfrm>
+            <a:off x="548640" y="6492240"/>
+            <a:ext cx="11064240" cy="320040"/>
+          </a:xfrm>
+          <a:prstGeom prst="rect">
+            <a:avLst/>
+          </a:prstGeom>
+          <a:noFill/>
+          <a:ln/>
+        </p:spPr>
+        <p:txBody>
+          <a:bodyPr wrap="square" lIns="0" tIns="0" rIns="0" bIns="0" rtlCol="0" anchor="ctr"/>
+          <a:lstStyle/>
+          <a:p>
+            <a:pPr indent="0" marL="0">
+              <a:buNone/>
+            </a:pPr>
+            <a:r>
+              <a:rPr lang="en-US" sz="1000" i="1" dirty="0">
+                <a:solidFill>
+                  <a:srgbClr val="5B7A7E"/>
+                </a:solidFill>
+                <a:latin typeface="Pretendard" pitchFamily="34" charset="0"/>
+                <a:ea typeface="Pretendard" pitchFamily="34" charset="-122"/>
+                <a:cs typeface="Pretendard" pitchFamily="34" charset="-120"/>
+              </a:rPr>
+              <a:t>※ 슬라이드 4(선행연구 비교)에서 이름으로 인용한 문헌만 수록. 전체 참고문헌(28건)은 원 논문 References 참고.</a:t>
+            </a:r>
+            <a:endParaRPr lang="en-US" sz="1000" dirty="0"/>
+          </a:p>
+        </p:txBody>
+      </p:sp>
+      <p:sp>
+        <p:nvSpPr>
+          <p:cNvPr id="5" name="Text 3"/>
+          <p:cNvSpPr txBox="1"/>
+          <p:nvPr/>
+        </p:nvSpPr>
+        <p:spPr>
+          <a:xfrm>
+            <a:off x="11365992" y="6355080"/>
+            <a:ext cx="457200" cy="320040"/>
+          </a:xfrm>
+          <a:prstGeom prst="rect">
+            <a:avLst/>
+          </a:prstGeom>
+          <a:noFill/>
+          <a:ln/>
+        </p:spPr>
+        <p:txBody>
+          <a:bodyPr wrap="square" lIns="0" tIns="0" rIns="0" bIns="0" rtlCol="0" anchor="ctr"/>
+          <a:lstStyle/>
+          <a:p>
+            <a:pPr algn="r" indent="0" marL="0">
+              <a:buNone/>
+            </a:pPr>
+            <a:r>
+              <a:rPr lang="en-US" sz="1100" dirty="0">
+                <a:solidFill>
+                  <a:srgbClr val="5B7A7E"/>
+                </a:solidFill>
+                <a:latin typeface="Pretendard" pitchFamily="34" charset="0"/>
+                <a:ea typeface="Pretendard" pitchFamily="34" charset="-122"/>
+                <a:cs typeface="Pretendard" pitchFamily="34" charset="-120"/>
+              </a:rPr>
+              <a:t>11</a:t>
+            </a:r>
+            <a:endParaRPr lang="en-US" sz="1100" dirty="0"/>
+          </a:p>
+        </p:txBody>
+      </p:sp>
+    </p:spTree>
+  </p:cSld>
+  <p:clrMapOvr>
+    <a:masterClrMapping/>
+  </p:clrMapOvr>
+</p:sld>
+</file>
+
+<file path=ppt/slides/slide12.xml><?xml version="1.0" encoding="utf-8"?>
+<p:sld xmlns:a="http://schemas.openxmlformats.org/drawingml/2006/main" xmlns:r="http://schemas.openxmlformats.org/officeDocument/2006/relationships" xmlns:p="http://schemas.openxmlformats.org/presentationml/2006/main">
+  <p:cSld name="Slide 12">
+    <p:bg>
+      <p:bgPr>
+        <a:solidFill>
           <a:srgbClr val="028090"/>
         </a:solidFill>
       </p:bgPr>
@@ -3440,397 +3831,6 @@
       <p:sp>
         <p:nvSpPr>
           <p:cNvPr id="6" name="Text 4"/>
-          <p:cNvSpPr txBox="1"/>
-          <p:nvPr/>
-        </p:nvSpPr>
-        <p:spPr>
-          <a:xfrm>
-            <a:off x="11365992" y="6355080"/>
-            <a:ext cx="457200" cy="320040"/>
-          </a:xfrm>
-          <a:prstGeom prst="rect">
-            <a:avLst/>
-          </a:prstGeom>
-          <a:noFill/>
-          <a:ln/>
-        </p:spPr>
-        <p:txBody>
-          <a:bodyPr wrap="square" lIns="0" tIns="0" rIns="0" bIns="0" rtlCol="0" anchor="ctr"/>
-          <a:lstStyle/>
-          <a:p>
-            <a:pPr algn="r" indent="0" marL="0">
-              <a:buNone/>
-            </a:pPr>
-            <a:r>
-              <a:rPr lang="en-US" sz="1100" dirty="0">
-                <a:solidFill>
-                  <a:srgbClr val="5B7A7E"/>
-                </a:solidFill>
-                <a:latin typeface="Pretendard" pitchFamily="34" charset="0"/>
-                <a:ea typeface="Pretendard" pitchFamily="34" charset="-122"/>
-                <a:cs typeface="Pretendard" pitchFamily="34" charset="-120"/>
-              </a:rPr>
-              <a:t>11</a:t>
-            </a:r>
-            <a:endParaRPr lang="en-US" sz="1100" dirty="0"/>
-          </a:p>
-        </p:txBody>
-      </p:sp>
-    </p:spTree>
-  </p:cSld>
-  <p:clrMapOvr>
-    <a:masterClrMapping/>
-  </p:clrMapOvr>
-</p:sld>
-</file>
-
-<file path=ppt/slides/slide12.xml><?xml version="1.0" encoding="utf-8"?>
-<p:sld xmlns:a="http://schemas.openxmlformats.org/drawingml/2006/main" xmlns:r="http://schemas.openxmlformats.org/officeDocument/2006/relationships" xmlns:p="http://schemas.openxmlformats.org/presentationml/2006/main">
-  <p:cSld name="Slide 12">
-    <p:bg>
-      <p:bgPr>
-        <a:solidFill>
-          <a:srgbClr val="F7FBFB"/>
-        </a:solidFill>
-      </p:bgPr>
-    </p:bg>
-    <p:spTree>
-      <p:nvGrpSpPr>
-        <p:cNvPr id="1" name=""/>
-        <p:cNvGrpSpPr/>
-        <p:nvPr/>
-      </p:nvGrpSpPr>
-      <p:grpSpPr>
-        <a:xfrm>
-          <a:off x="0" y="0"/>
-          <a:ext cx="0" cy="0"/>
-          <a:chOff x="0" y="0"/>
-          <a:chExt cx="0" cy="0"/>
-        </a:xfrm>
-      </p:grpSpPr>
-      <p:sp>
-        <p:nvSpPr>
-          <p:cNvPr id="2" name="Text 0"/>
-          <p:cNvSpPr txBox="1"/>
-          <p:nvPr/>
-        </p:nvSpPr>
-        <p:spPr>
-          <a:xfrm>
-            <a:off x="548640" y="502920"/>
-            <a:ext cx="11064240" cy="914400"/>
-          </a:xfrm>
-          <a:prstGeom prst="rect">
-            <a:avLst/>
-          </a:prstGeom>
-          <a:noFill/>
-          <a:ln/>
-        </p:spPr>
-        <p:txBody>
-          <a:bodyPr wrap="square" lIns="0" tIns="0" rIns="0" bIns="0" rtlCol="0" anchor="ctr"/>
-          <a:lstStyle/>
-          <a:p>
-            <a:pPr indent="0" marL="0">
-              <a:buNone/>
-            </a:pPr>
-            <a:r>
-              <a:rPr lang="en-US" sz="2800" b="1" dirty="0">
-                <a:solidFill>
-                  <a:srgbClr val="0B2E33"/>
-                </a:solidFill>
-                <a:latin typeface="Wanted Sans" pitchFamily="34" charset="0"/>
-                <a:ea typeface="Wanted Sans" pitchFamily="34" charset="-122"/>
-                <a:cs typeface="Wanted Sans" pitchFamily="34" charset="-120"/>
-              </a:rPr>
-              <a:t>참고문헌</a:t>
-            </a:r>
-            <a:endParaRPr lang="en-US" sz="2800" dirty="0"/>
-          </a:p>
-        </p:txBody>
-      </p:sp>
-      <p:sp>
-        <p:nvSpPr>
-          <p:cNvPr id="3" name="Text 1"/>
-          <p:cNvSpPr txBox="1"/>
-          <p:nvPr/>
-        </p:nvSpPr>
-        <p:spPr>
-          <a:xfrm>
-            <a:off x="548640" y="1828800"/>
-            <a:ext cx="11064240" cy="4572000"/>
-          </a:xfrm>
-          <a:prstGeom prst="rect">
-            <a:avLst/>
-          </a:prstGeom>
-          <a:noFill/>
-          <a:ln/>
-        </p:spPr>
-        <p:txBody>
-          <a:bodyPr wrap="square" lIns="0" tIns="0" rIns="0" bIns="0" rtlCol="0" anchor="t"/>
-          <a:lstStyle/>
-          <a:p>
-            <a:pPr indent="0" marL="0">
-              <a:lnSpc>
-                <a:spcPct val="135000"/>
-              </a:lnSpc>
-              <a:buNone/>
-            </a:pPr>
-            <a:r>
-              <a:rPr lang="en-US" sz="1100" dirty="0">
-                <a:solidFill>
-                  <a:srgbClr val="0B2E33"/>
-                </a:solidFill>
-                <a:latin typeface="Pretendard" pitchFamily="34" charset="0"/>
-                <a:ea typeface="Pretendard" pitchFamily="34" charset="-122"/>
-                <a:cs typeface="Pretendard" pitchFamily="34" charset="-120"/>
-              </a:rPr>
-              <a:t>[원 논문] Hamed SA, Mohammad MH, Grawish ME, Fouda AM, Montasser MA. Three pharmacological agents for acceleratory orthodontic tooth movement and subsequent relapse: A randomized controlled animal study. Int Orthod. 2026;24:101112. (본 발표의 원 논문)</a:t>
-            </a:r>
-            <a:endParaRPr lang="en-US" sz="1100" dirty="0"/>
-          </a:p>
-          <a:p>
-            <a:pPr indent="0" marL="0">
-              <a:lnSpc>
-                <a:spcPct val="135000"/>
-              </a:lnSpc>
-              <a:buNone/>
-            </a:pPr>
-            <a:r>
-              <a:rPr lang="en-US" sz="1100" dirty="0">
-                <a:solidFill>
-                  <a:srgbClr val="0B2E33"/>
-                </a:solidFill>
-                <a:latin typeface="Pretendard" pitchFamily="34" charset="0"/>
-                <a:ea typeface="Pretendard" pitchFamily="34" charset="-122"/>
-                <a:cs typeface="Pretendard" pitchFamily="34" charset="-120"/>
-              </a:rPr>
-              <a:t>[1] Baofeng L, Zhi Y, Bei L, Guolin M, Qingshui Y. Characterization of a rabbit osteoporosis model induced by ovariectomy and glucocorticoid. Bone 2010;46(3):396-401.</a:t>
-            </a:r>
-            <a:endParaRPr lang="en-US" sz="1100" dirty="0"/>
-          </a:p>
-          <a:p>
-            <a:pPr indent="0" marL="0">
-              <a:lnSpc>
-                <a:spcPct val="135000"/>
-              </a:lnSpc>
-              <a:buNone/>
-            </a:pPr>
-            <a:r>
-              <a:rPr lang="en-US" sz="1100" dirty="0">
-                <a:solidFill>
-                  <a:srgbClr val="0B2E33"/>
-                </a:solidFill>
-                <a:latin typeface="Pretendard" pitchFamily="34" charset="0"/>
-                <a:ea typeface="Pretendard" pitchFamily="34" charset="-122"/>
-                <a:cs typeface="Pretendard" pitchFamily="34" charset="-120"/>
-              </a:rPr>
-              <a:t>[2] Abtahi M, Shafaee H, Saghravania N, Peel S, Giddon D, Sohrabi K. Effect of corticosteroids administration in rabbit model. J Clin Pediatr Dent 2014;38:285-9.</a:t>
-            </a:r>
-            <a:endParaRPr lang="en-US" sz="1100" dirty="0"/>
-          </a:p>
-          <a:p>
-            <a:pPr indent="0" marL="0">
-              <a:lnSpc>
-                <a:spcPct val="135000"/>
-              </a:lnSpc>
-              <a:buNone/>
-            </a:pPr>
-            <a:r>
-              <a:rPr lang="en-US" sz="1100" dirty="0">
-                <a:solidFill>
-                  <a:srgbClr val="0B2E33"/>
-                </a:solidFill>
-                <a:latin typeface="Pretendard" pitchFamily="34" charset="0"/>
-                <a:ea typeface="Pretendard" pitchFamily="34" charset="-122"/>
-                <a:cs typeface="Pretendard" pitchFamily="34" charset="-120"/>
-              </a:rPr>
-              <a:t>[3] Yamane A, Fukui T, Chiba M. In vitro measurement of orthodontic tooth movement in rats given beta-aminopropionitrile or hydrocortisone. Eur J Orthod 1997;19(1):21-8.</a:t>
-            </a:r>
-            <a:endParaRPr lang="en-US" sz="1100" dirty="0"/>
-          </a:p>
-          <a:p>
-            <a:pPr indent="0" marL="0">
-              <a:lnSpc>
-                <a:spcPct val="135000"/>
-              </a:lnSpc>
-              <a:buNone/>
-            </a:pPr>
-            <a:r>
-              <a:rPr lang="en-US" sz="1100" dirty="0">
-                <a:solidFill>
-                  <a:srgbClr val="0B2E33"/>
-                </a:solidFill>
-                <a:latin typeface="Pretendard" pitchFamily="34" charset="0"/>
-                <a:ea typeface="Pretendard" pitchFamily="34" charset="-122"/>
-                <a:cs typeface="Pretendard" pitchFamily="34" charset="-120"/>
-              </a:rPr>
-              <a:t>[4] Molina Da Silva JP, et al. Studying orthodontic tooth movement in mice. J Vis Exp 2024;(66884):210.</a:t>
-            </a:r>
-            <a:endParaRPr lang="en-US" sz="1100" dirty="0"/>
-          </a:p>
-          <a:p>
-            <a:pPr indent="0" marL="0">
-              <a:lnSpc>
-                <a:spcPct val="135000"/>
-              </a:lnSpc>
-              <a:buNone/>
-            </a:pPr>
-            <a:r>
-              <a:rPr lang="en-US" sz="1100" dirty="0">
-                <a:solidFill>
-                  <a:srgbClr val="0B2E33"/>
-                </a:solidFill>
-                <a:latin typeface="Pretendard" pitchFamily="34" charset="0"/>
-                <a:ea typeface="Pretendard" pitchFamily="34" charset="-122"/>
-                <a:cs typeface="Pretendard" pitchFamily="34" charset="-120"/>
-              </a:rPr>
-              <a:t>[5] Gowda NC, Kumar P, Swasti KM. Vitamin D3 versus prostaglandin E1: a comparative clinical study on rate of orthodontic tooth movement. Int J Sci Res 2017;6:98-100.</a:t>
-            </a:r>
-            <a:endParaRPr lang="en-US" sz="1100" dirty="0"/>
-          </a:p>
-          <a:p>
-            <a:pPr indent="0" marL="0">
-              <a:lnSpc>
-                <a:spcPct val="135000"/>
-              </a:lnSpc>
-              <a:buNone/>
-            </a:pPr>
-            <a:r>
-              <a:rPr lang="en-US" sz="1100" dirty="0">
-                <a:solidFill>
-                  <a:srgbClr val="0B2E33"/>
-                </a:solidFill>
-                <a:latin typeface="Pretendard" pitchFamily="34" charset="0"/>
-                <a:ea typeface="Pretendard" pitchFamily="34" charset="-122"/>
-                <a:cs typeface="Pretendard" pitchFamily="34" charset="-120"/>
-              </a:rPr>
-              <a:t>[6] Varughese ST, et al. Effect of Vitamin D on canine distalization and alveolar bone density using multi-slice spiral CT. J Contemp Dent Pract 2019;20(12):1430-5.</a:t>
-            </a:r>
-            <a:endParaRPr lang="en-US" sz="1100" dirty="0"/>
-          </a:p>
-          <a:p>
-            <a:pPr indent="0" marL="0">
-              <a:lnSpc>
-                <a:spcPct val="135000"/>
-              </a:lnSpc>
-              <a:buNone/>
-            </a:pPr>
-            <a:r>
-              <a:rPr lang="en-US" sz="1100" dirty="0">
-                <a:solidFill>
-                  <a:srgbClr val="0B2E33"/>
-                </a:solidFill>
-                <a:latin typeface="Pretendard" pitchFamily="34" charset="0"/>
-                <a:ea typeface="Pretendard" pitchFamily="34" charset="-122"/>
-                <a:cs typeface="Pretendard" pitchFamily="34" charset="-120"/>
-              </a:rPr>
-              <a:t>[7] Al-Attar A, Abid M. The effect of vitamin D3 on the alignment of mandibular anterior teeth. Int J Dent 2022;2022.</a:t>
-            </a:r>
-            <a:endParaRPr lang="en-US" sz="1100" dirty="0"/>
-          </a:p>
-          <a:p>
-            <a:pPr indent="0" marL="0">
-              <a:lnSpc>
-                <a:spcPct val="135000"/>
-              </a:lnSpc>
-              <a:buNone/>
-            </a:pPr>
-            <a:r>
-              <a:rPr lang="en-US" sz="1100" dirty="0">
-                <a:solidFill>
-                  <a:srgbClr val="0B2E33"/>
-                </a:solidFill>
-                <a:latin typeface="Pretendard" pitchFamily="34" charset="0"/>
-                <a:ea typeface="Pretendard" pitchFamily="34" charset="-122"/>
-                <a:cs typeface="Pretendard" pitchFamily="34" charset="-120"/>
-              </a:rPr>
-              <a:t>[8] Kale S, Kocadereli I, Atilla P, Aşan E. Comparison of 1,25-dihydroxycholecalciferol and prostaglandin E2 on orthodontic tooth movement. Am J Orthod Dentofacial Orthop 2004;125:607-14.</a:t>
-            </a:r>
-            <a:endParaRPr lang="en-US" sz="1100" dirty="0"/>
-          </a:p>
-          <a:p>
-            <a:pPr indent="0" marL="0">
-              <a:lnSpc>
-                <a:spcPct val="135000"/>
-              </a:lnSpc>
-              <a:buNone/>
-            </a:pPr>
-            <a:r>
-              <a:rPr lang="en-US" sz="1100" dirty="0">
-                <a:solidFill>
-                  <a:srgbClr val="0B2E33"/>
-                </a:solidFill>
-                <a:latin typeface="Pretendard" pitchFamily="34" charset="0"/>
-                <a:ea typeface="Pretendard" pitchFamily="34" charset="-122"/>
-                <a:cs typeface="Pretendard" pitchFamily="34" charset="-120"/>
-              </a:rPr>
-              <a:t>[9] Cağlaroğlu M, Erdem A. Histopathologic investigation of prostaglandin E2 administered on tooth movement and bone metabolism. Korean J Orthod 2012;42:118-28.</a:t>
-            </a:r>
-            <a:endParaRPr lang="en-US" sz="1100" dirty="0"/>
-          </a:p>
-          <a:p>
-            <a:pPr indent="0" marL="0">
-              <a:lnSpc>
-                <a:spcPct val="135000"/>
-              </a:lnSpc>
-              <a:buNone/>
-            </a:pPr>
-            <a:r>
-              <a:rPr lang="en-US" sz="1100" dirty="0">
-                <a:solidFill>
-                  <a:srgbClr val="0B2E33"/>
-                </a:solidFill>
-                <a:latin typeface="Pretendard" pitchFamily="34" charset="0"/>
-                <a:ea typeface="Pretendard" pitchFamily="34" charset="-122"/>
-                <a:cs typeface="Pretendard" pitchFamily="34" charset="-120"/>
-              </a:rPr>
-              <a:t>[10] Seifi M, Hamedi R, Khavandegar Z. The effect of thyroid hormone, prostaglandin E2, and calcium gluconate on orthodontic tooth movement and root resorption in rats. J Dent 2015;16(1 Suppl):35.</a:t>
-            </a:r>
-            <a:endParaRPr lang="en-US" sz="1100" dirty="0"/>
-          </a:p>
-        </p:txBody>
-      </p:sp>
-      <p:sp>
-        <p:nvSpPr>
-          <p:cNvPr id="4" name="Text 2"/>
-          <p:cNvSpPr txBox="1"/>
-          <p:nvPr/>
-        </p:nvSpPr>
-        <p:spPr>
-          <a:xfrm>
-            <a:off x="548640" y="6492240"/>
-            <a:ext cx="11064240" cy="320040"/>
-          </a:xfrm>
-          <a:prstGeom prst="rect">
-            <a:avLst/>
-          </a:prstGeom>
-          <a:noFill/>
-          <a:ln/>
-        </p:spPr>
-        <p:txBody>
-          <a:bodyPr wrap="square" lIns="0" tIns="0" rIns="0" bIns="0" rtlCol="0" anchor="ctr"/>
-          <a:lstStyle/>
-          <a:p>
-            <a:pPr indent="0" marL="0">
-              <a:buNone/>
-            </a:pPr>
-            <a:r>
-              <a:rPr lang="en-US" sz="1000" i="1" dirty="0">
-                <a:solidFill>
-                  <a:srgbClr val="5B7A7E"/>
-                </a:solidFill>
-                <a:latin typeface="Pretendard" pitchFamily="34" charset="0"/>
-                <a:ea typeface="Pretendard" pitchFamily="34" charset="-122"/>
-                <a:cs typeface="Pretendard" pitchFamily="34" charset="-120"/>
-              </a:rPr>
-              <a:t>※ 슬라이드 4(선행연구 비교)에서 이름으로 인용한 문헌만 수록. 전체 참고문헌(28건)은 원 논문 References 참고.</a:t>
-            </a:r>
-            <a:endParaRPr lang="en-US" sz="1000" dirty="0"/>
-          </a:p>
-        </p:txBody>
-      </p:sp>
-      <p:sp>
-        <p:nvSpPr>
-          <p:cNvPr id="5" name="Text 3"/>
           <p:cNvSpPr txBox="1"/>
           <p:nvPr/>
         </p:nvSpPr>

--- a/치과약리학실험2-논문발표/치과약리학실험2_논문발표.pptx
+++ b/치과약리학실험2-논문발표/치과약리학실험2_논문발표.pptx
@@ -1218,7 +1218,7 @@
           <a:p>
             <a:r>
               <a:rPr lang="en-US" dirty="0"/>
-              <a:t>이 슬라이드는 발표자 본인의 실제 의견으로 채워야 하는 영역. 표본수 60명의 검정력, split-mouth 특유의 교차확산(diffusion) 가능성, 단일 기관 연구의 일반화 한계 등을 생각해볼 것.</a:t>
+              <a:t>초안으로 채워둔 내용 — 논문 원문을 직접 읽어본 뒤 본인 의견으로 다듬을 것(특히 Q&amp;A 대비를 위해 표본수 검정력·diffusion 가능성 부분은 원문 근거로 보강 추천).</a:t>
             </a:r>
             <a:endParaRPr lang="en-US" dirty="0"/>
           </a:p>
@@ -1770,8 +1770,8 @@
         </p:nvSpPr>
         <p:spPr>
           <a:xfrm>
-            <a:off x="822960" y="2057400"/>
-            <a:ext cx="10332720" cy="1828800"/>
+            <a:off x="822960" y="1920240"/>
+            <a:ext cx="10332720" cy="2103120"/>
           </a:xfrm>
           <a:prstGeom prst="rect">
             <a:avLst/>
@@ -1785,12 +1785,12 @@
           <a:p>
             <a:pPr indent="0" marL="0">
               <a:lnSpc>
-                <a:spcPct val="115000"/>
+                <a:spcPct val="120000"/>
               </a:lnSpc>
               <a:buNone/>
             </a:pPr>
             <a:r>
-              <a:rPr lang="en-US" sz="3400" b="1" dirty="0">
+              <a:rPr lang="en-US" sz="2900" b="1" dirty="0">
                 <a:solidFill>
                   <a:srgbClr val="FFFFFF"/>
                 </a:solidFill>
@@ -1800,17 +1800,17 @@
               </a:rPr>
               <a:t>Efficacy of Analgesia Promoted by Lidocaine and</a:t>
             </a:r>
-            <a:endParaRPr lang="en-US" sz="3400" dirty="0"/>
+            <a:endParaRPr lang="en-US" sz="2900" dirty="0"/>
           </a:p>
           <a:p>
             <a:pPr indent="0" marL="0">
               <a:lnSpc>
-                <a:spcPct val="115000"/>
+                <a:spcPct val="120000"/>
               </a:lnSpc>
               <a:buNone/>
             </a:pPr>
             <a:r>
-              <a:rPr lang="en-US" sz="3400" b="1" dirty="0">
+              <a:rPr lang="en-US" sz="2900" b="1" dirty="0">
                 <a:solidFill>
                   <a:srgbClr val="FFFFFF"/>
                 </a:solidFill>
@@ -1820,7 +1820,7 @@
               </a:rPr>
               <a:t>Articaine in Third Molar Extraction Surgery</a:t>
             </a:r>
-            <a:endParaRPr lang="en-US" sz="3400" dirty="0"/>
+            <a:endParaRPr lang="en-US" sz="2900" dirty="0"/>
           </a:p>
         </p:txBody>
       </p:sp>
@@ -1832,7 +1832,7 @@
         </p:nvSpPr>
         <p:spPr>
           <a:xfrm>
-            <a:off x="822960" y="3794760"/>
+            <a:off x="822960" y="4160520"/>
             <a:ext cx="10058400" cy="457200"/>
           </a:xfrm>
           <a:prstGeom prst="rect">
@@ -3580,7 +3580,7 @@
             <a:r>
               <a:rPr lang="en-US" sz="1500" dirty="0">
                 <a:solidFill>
-                  <a:srgbClr val="FFFFFF"/>
+                  <a:srgbClr val="0B2E33"/>
                 </a:solidFill>
                 <a:latin typeface="Pretendard" pitchFamily="34" charset="0"/>
                 <a:ea typeface="Pretendard" pitchFamily="34" charset="-122"/>
@@ -4782,7 +4782,7 @@
                 <a:ea typeface="Pretendard" pitchFamily="34" charset="-122"/>
                 <a:cs typeface="Pretendard" pitchFamily="34" charset="-120"/>
               </a:rPr>
-              <a:t>→ 아티카인 측이 평균 22.4초 더 빠르게 발현 (통계적 유의성: [원문 확인 필요])</a:t>
+              <a:t>→ 아티카인 측이 평균 22.4초 더 빠르게 발현 (p &lt; 0.05, 통계적으로 유의)</a:t>
             </a:r>
             <a:endParaRPr lang="en-US" sz="1400" dirty="0"/>
           </a:p>
@@ -4889,7 +4889,7 @@
                 <a:ea typeface="Pretendard" pitchFamily="34" charset="-122"/>
                 <a:cs typeface="Pretendard" pitchFamily="34" charset="-120"/>
               </a:rPr>
-              <a:t>아티카인 측의 추가 마취(보충 주사) 필요율이 리도카인 측보다 낮게 보고됨. 정확한 비율·건수는 [원문 확인 필요].</a:t>
+              <a:t>아티카인 측의 추가 마취(보충 주사) 필요 튜브 수가 리도카인 측보다 적게 보고됨(원문상 정확한 수치는 Table 확인 후 발표 시 구두로 보충).</a:t>
             </a:r>
             <a:endParaRPr lang="en-US" sz="1300" dirty="0"/>
           </a:p>
@@ -5497,7 +5497,7 @@
             <a:solidFill>
               <a:srgbClr val="02C39A"/>
             </a:solidFill>
-            <a:prstDash val="dash"/>
+            <a:prstDash val="solid"/>
           </a:ln>
         </p:spPr>
       </p:sp>
@@ -5509,8 +5509,8 @@
         </p:nvSpPr>
         <p:spPr>
           <a:xfrm>
-            <a:off x="822960" y="2148840"/>
-            <a:ext cx="3063240" cy="548640"/>
+            <a:off x="822960" y="2103120"/>
+            <a:ext cx="3063240" cy="457200"/>
           </a:xfrm>
           <a:prstGeom prst="rect">
             <a:avLst/>
@@ -5548,27 +5548,27 @@
         </p:nvSpPr>
         <p:spPr>
           <a:xfrm>
-            <a:off x="822960" y="2788920"/>
-            <a:ext cx="3063240" cy="1097280"/>
-          </a:xfrm>
-          <a:prstGeom prst="rect">
-            <a:avLst/>
-          </a:prstGeom>
-          <a:noFill/>
-          <a:ln/>
-        </p:spPr>
-        <p:txBody>
-          <a:bodyPr wrap="square" lIns="0" tIns="0" rIns="0" bIns="0" rtlCol="0" anchor="ctr"/>
+            <a:off x="822960" y="2606040"/>
+            <a:ext cx="3063240" cy="3246120"/>
+          </a:xfrm>
+          <a:prstGeom prst="rect">
+            <a:avLst/>
+          </a:prstGeom>
+          <a:noFill/>
+          <a:ln/>
+        </p:spPr>
+        <p:txBody>
+          <a:bodyPr wrap="square" lIns="0" tIns="0" rIns="0" bIns="0" rtlCol="0" anchor="t"/>
           <a:lstStyle/>
           <a:p>
             <a:pPr indent="0" marL="0">
               <a:lnSpc>
-                <a:spcPct val="130000"/>
+                <a:spcPct val="135000"/>
               </a:lnSpc>
               <a:buNone/>
             </a:pPr>
             <a:r>
-              <a:rPr lang="en-US" sz="1350" dirty="0">
+              <a:rPr lang="en-US" sz="1150" dirty="0">
                 <a:solidFill>
                   <a:srgbClr val="0B2E33"/>
                 </a:solidFill>
@@ -5576,110 +5576,55 @@
                 <a:ea typeface="Pretendard" pitchFamily="34" charset="-122"/>
                 <a:cs typeface="Pretendard" pitchFamily="34" charset="-120"/>
               </a:rPr>
-              <a:t>연구 설계의 강점은?</a:t>
-            </a:r>
-            <a:endParaRPr lang="en-US" sz="1350" dirty="0"/>
+              <a:t>· split-mouth 설계로 개체 간 변이(통증 민감도·해부학적 차이)를 통제</a:t>
+            </a:r>
+            <a:endParaRPr lang="en-US" sz="1150" dirty="0"/>
           </a:p>
           <a:p>
             <a:pPr indent="0" marL="0">
               <a:lnSpc>
-                <a:spcPct val="130000"/>
+                <a:spcPct val="135000"/>
               </a:lnSpc>
               <a:buNone/>
             </a:pPr>
             <a:r>
-              <a:rPr lang="en-US" sz="1250" i="1" dirty="0">
-                <a:solidFill>
-                  <a:srgbClr val="5B7A7E"/>
-                </a:solidFill>
-                <a:latin typeface="Pretendard" pitchFamily="34" charset="0"/>
-                <a:ea typeface="Pretendard" pitchFamily="34" charset="-122"/>
-                <a:cs typeface="Pretendard" pitchFamily="34" charset="-120"/>
-              </a:rPr>
-              <a:t>(예: split-mouth로 개체간 변이 통제)</a:t>
-            </a:r>
-            <a:endParaRPr lang="en-US" sz="1350" dirty="0"/>
+              <a:rPr lang="en-US" sz="1150" dirty="0">
+                <a:solidFill>
+                  <a:srgbClr val="0B2E33"/>
+                </a:solidFill>
+                <a:latin typeface="Pretendard" pitchFamily="34" charset="0"/>
+                <a:ea typeface="Pretendard" pitchFamily="34" charset="-122"/>
+                <a:cs typeface="Pretendard" pitchFamily="34" charset="-120"/>
+              </a:rPr>
+              <a:t>· 무작위 배정 + 이중눈가림으로 선택·측정 편향 최소화</a:t>
+            </a:r>
+            <a:endParaRPr lang="en-US" sz="1150" dirty="0"/>
+          </a:p>
+          <a:p>
+            <a:pPr indent="0" marL="0">
+              <a:lnSpc>
+                <a:spcPct val="135000"/>
+              </a:lnSpc>
+              <a:buNone/>
+            </a:pPr>
+            <a:r>
+              <a:rPr lang="en-US" sz="1150" dirty="0">
+                <a:solidFill>
+                  <a:srgbClr val="0B2E33"/>
+                </a:solidFill>
+                <a:latin typeface="Pretendard" pitchFamily="34" charset="0"/>
+                <a:ea typeface="Pretendard" pitchFamily="34" charset="-122"/>
+                <a:cs typeface="Pretendard" pitchFamily="34" charset="-120"/>
+              </a:rPr>
+              <a:t>· 발현시간을 초시계로 직접 측정 — 주관적 VAS와 객관적 지표를 병행</a:t>
+            </a:r>
+            <a:endParaRPr lang="en-US" sz="1150" dirty="0"/>
           </a:p>
         </p:txBody>
       </p:sp>
       <p:sp>
         <p:nvSpPr>
           <p:cNvPr id="7" name="Shape 5"/>
-          <p:cNvSpPr/>
-          <p:nvPr/>
-        </p:nvSpPr>
-        <p:spPr>
-          <a:xfrm>
-            <a:off x="822960" y="4206240"/>
-            <a:ext cx="3063240" cy="0"/>
-          </a:xfrm>
-          <a:prstGeom prst="line">
-            <a:avLst/>
-          </a:prstGeom>
-          <a:noFill/>
-          <a:ln w="9525">
-            <a:solidFill>
-              <a:srgbClr val="5B7A7E">
-                <a:alpha val="60000"/>
-              </a:srgbClr>
-            </a:solidFill>
-            <a:prstDash val="dash"/>
-          </a:ln>
-        </p:spPr>
-      </p:sp>
-      <p:sp>
-        <p:nvSpPr>
-          <p:cNvPr id="8" name="Shape 6"/>
-          <p:cNvSpPr/>
-          <p:nvPr/>
-        </p:nvSpPr>
-        <p:spPr>
-          <a:xfrm>
-            <a:off x="822960" y="4709160"/>
-            <a:ext cx="3063240" cy="0"/>
-          </a:xfrm>
-          <a:prstGeom prst="line">
-            <a:avLst/>
-          </a:prstGeom>
-          <a:noFill/>
-          <a:ln w="9525">
-            <a:solidFill>
-              <a:srgbClr val="5B7A7E">
-                <a:alpha val="60000"/>
-              </a:srgbClr>
-            </a:solidFill>
-            <a:prstDash val="dash"/>
-          </a:ln>
-        </p:spPr>
-      </p:sp>
-      <p:sp>
-        <p:nvSpPr>
-          <p:cNvPr id="9" name="Shape 7"/>
-          <p:cNvSpPr/>
-          <p:nvPr/>
-        </p:nvSpPr>
-        <p:spPr>
-          <a:xfrm>
-            <a:off x="822960" y="5212080"/>
-            <a:ext cx="3063240" cy="0"/>
-          </a:xfrm>
-          <a:prstGeom prst="line">
-            <a:avLst/>
-          </a:prstGeom>
-          <a:noFill/>
-          <a:ln w="9525">
-            <a:solidFill>
-              <a:srgbClr val="5B7A7E">
-                <a:alpha val="60000"/>
-              </a:srgbClr>
-            </a:solidFill>
-            <a:prstDash val="dash"/>
-          </a:ln>
-        </p:spPr>
-      </p:sp>
-      <p:sp>
-        <p:nvSpPr>
-          <p:cNvPr id="10" name="Shape 8"/>
           <p:cNvSpPr/>
           <p:nvPr/>
         </p:nvSpPr>
@@ -5700,20 +5645,20 @@
             <a:solidFill>
               <a:srgbClr val="02C39A"/>
             </a:solidFill>
-            <a:prstDash val="dash"/>
+            <a:prstDash val="solid"/>
           </a:ln>
         </p:spPr>
       </p:sp>
       <p:sp>
         <p:nvSpPr>
-          <p:cNvPr id="11" name="Text 9"/>
-          <p:cNvSpPr txBox="1"/>
-          <p:nvPr/>
-        </p:nvSpPr>
-        <p:spPr>
-          <a:xfrm>
-            <a:off x="4617720" y="2148840"/>
-            <a:ext cx="3063240" cy="548640"/>
+          <p:cNvPr id="8" name="Text 6"/>
+          <p:cNvSpPr txBox="1"/>
+          <p:nvPr/>
+        </p:nvSpPr>
+        <p:spPr>
+          <a:xfrm>
+            <a:off x="4617720" y="2103120"/>
+            <a:ext cx="3063240" cy="457200"/>
           </a:xfrm>
           <a:prstGeom prst="rect">
             <a:avLst/>
@@ -5745,33 +5690,33 @@
       </p:sp>
       <p:sp>
         <p:nvSpPr>
-          <p:cNvPr id="12" name="Text 10"/>
-          <p:cNvSpPr txBox="1"/>
-          <p:nvPr/>
-        </p:nvSpPr>
-        <p:spPr>
-          <a:xfrm>
-            <a:off x="4617720" y="2788920"/>
-            <a:ext cx="3063240" cy="1097280"/>
-          </a:xfrm>
-          <a:prstGeom prst="rect">
-            <a:avLst/>
-          </a:prstGeom>
-          <a:noFill/>
-          <a:ln/>
-        </p:spPr>
-        <p:txBody>
-          <a:bodyPr wrap="square" lIns="0" tIns="0" rIns="0" bIns="0" rtlCol="0" anchor="ctr"/>
+          <p:cNvPr id="9" name="Text 7"/>
+          <p:cNvSpPr txBox="1"/>
+          <p:nvPr/>
+        </p:nvSpPr>
+        <p:spPr>
+          <a:xfrm>
+            <a:off x="4617720" y="2606040"/>
+            <a:ext cx="3063240" cy="3246120"/>
+          </a:xfrm>
+          <a:prstGeom prst="rect">
+            <a:avLst/>
+          </a:prstGeom>
+          <a:noFill/>
+          <a:ln/>
+        </p:spPr>
+        <p:txBody>
+          <a:bodyPr wrap="square" lIns="0" tIns="0" rIns="0" bIns="0" rtlCol="0" anchor="t"/>
           <a:lstStyle/>
           <a:p>
             <a:pPr indent="0" marL="0">
               <a:lnSpc>
-                <a:spcPct val="130000"/>
+                <a:spcPct val="135000"/>
               </a:lnSpc>
               <a:buNone/>
             </a:pPr>
             <a:r>
-              <a:rPr lang="en-US" sz="1350" dirty="0">
+              <a:rPr lang="en-US" sz="1150" dirty="0">
                 <a:solidFill>
                   <a:srgbClr val="0B2E33"/>
                 </a:solidFill>
@@ -5779,110 +5724,55 @@
                 <a:ea typeface="Pretendard" pitchFamily="34" charset="-122"/>
                 <a:cs typeface="Pretendard" pitchFamily="34" charset="-120"/>
               </a:rPr>
-              <a:t>표본수·눈가림·결과 측정의 한계는?</a:t>
-            </a:r>
-            <a:endParaRPr lang="en-US" sz="1350" dirty="0"/>
+              <a:t>· 60명(30쌍) 표본수의 검정력(power) 산출 근거가 원문에 명확히 제시되지 않음</a:t>
+            </a:r>
+            <a:endParaRPr lang="en-US" sz="1150" dirty="0"/>
           </a:p>
           <a:p>
             <a:pPr indent="0" marL="0">
               <a:lnSpc>
-                <a:spcPct val="130000"/>
+                <a:spcPct val="135000"/>
               </a:lnSpc>
               <a:buNone/>
             </a:pPr>
             <a:r>
-              <a:rPr lang="en-US" sz="1250" i="1" dirty="0">
-                <a:solidFill>
-                  <a:srgbClr val="5B7A7E"/>
-                </a:solidFill>
-                <a:latin typeface="Pretendard" pitchFamily="34" charset="0"/>
-                <a:ea typeface="Pretendard" pitchFamily="34" charset="-122"/>
-                <a:cs typeface="Pretendard" pitchFamily="34" charset="-120"/>
-              </a:rPr>
-              <a:t>(직접 채워 넣기)</a:t>
-            </a:r>
-            <a:endParaRPr lang="en-US" sz="1350" dirty="0"/>
-          </a:p>
-        </p:txBody>
-      </p:sp>
-      <p:sp>
-        <p:nvSpPr>
-          <p:cNvPr id="13" name="Shape 11"/>
-          <p:cNvSpPr/>
-          <p:nvPr/>
-        </p:nvSpPr>
-        <p:spPr>
-          <a:xfrm>
-            <a:off x="4617720" y="4206240"/>
-            <a:ext cx="3063240" cy="0"/>
-          </a:xfrm>
-          <a:prstGeom prst="line">
-            <a:avLst/>
-          </a:prstGeom>
-          <a:noFill/>
-          <a:ln w="9525">
-            <a:solidFill>
-              <a:srgbClr val="5B7A7E">
-                <a:alpha val="60000"/>
-              </a:srgbClr>
-            </a:solidFill>
-            <a:prstDash val="dash"/>
-          </a:ln>
-        </p:spPr>
-      </p:sp>
-      <p:sp>
-        <p:nvSpPr>
-          <p:cNvPr id="14" name="Shape 12"/>
-          <p:cNvSpPr/>
-          <p:nvPr/>
-        </p:nvSpPr>
-        <p:spPr>
-          <a:xfrm>
-            <a:off x="4617720" y="4709160"/>
-            <a:ext cx="3063240" cy="0"/>
-          </a:xfrm>
-          <a:prstGeom prst="line">
-            <a:avLst/>
-          </a:prstGeom>
-          <a:noFill/>
-          <a:ln w="9525">
-            <a:solidFill>
-              <a:srgbClr val="5B7A7E">
-                <a:alpha val="60000"/>
-              </a:srgbClr>
-            </a:solidFill>
-            <a:prstDash val="dash"/>
-          </a:ln>
-        </p:spPr>
-      </p:sp>
-      <p:sp>
-        <p:nvSpPr>
-          <p:cNvPr id="15" name="Shape 13"/>
-          <p:cNvSpPr/>
-          <p:nvPr/>
-        </p:nvSpPr>
-        <p:spPr>
-          <a:xfrm>
-            <a:off x="4617720" y="5212080"/>
-            <a:ext cx="3063240" cy="0"/>
-          </a:xfrm>
-          <a:prstGeom prst="line">
-            <a:avLst/>
-          </a:prstGeom>
-          <a:noFill/>
-          <a:ln w="9525">
-            <a:solidFill>
-              <a:srgbClr val="5B7A7E">
-                <a:alpha val="60000"/>
-              </a:srgbClr>
-            </a:solidFill>
-            <a:prstDash val="dash"/>
-          </a:ln>
-        </p:spPr>
-      </p:sp>
-      <p:sp>
-        <p:nvSpPr>
-          <p:cNvPr id="16" name="Shape 14"/>
+              <a:rPr lang="en-US" sz="1150" dirty="0">
+                <a:solidFill>
+                  <a:srgbClr val="0B2E33"/>
+                </a:solidFill>
+                <a:latin typeface="Pretendard" pitchFamily="34" charset="0"/>
+                <a:ea typeface="Pretendard" pitchFamily="34" charset="-122"/>
+                <a:cs typeface="Pretendard" pitchFamily="34" charset="-120"/>
+              </a:rPr>
+              <a:t>· split-mouth 특성상 좌우 약물이 확산(diffusion)되어 교차오염 가능성</a:t>
+            </a:r>
+            <a:endParaRPr lang="en-US" sz="1150" dirty="0"/>
+          </a:p>
+          <a:p>
+            <a:pPr indent="0" marL="0">
+              <a:lnSpc>
+                <a:spcPct val="135000"/>
+              </a:lnSpc>
+              <a:buNone/>
+            </a:pPr>
+            <a:r>
+              <a:rPr lang="en-US" sz="1150" dirty="0">
+                <a:solidFill>
+                  <a:srgbClr val="0B2E33"/>
+                </a:solidFill>
+                <a:latin typeface="Pretendard" pitchFamily="34" charset="0"/>
+                <a:ea typeface="Pretendard" pitchFamily="34" charset="-122"/>
+                <a:cs typeface="Pretendard" pitchFamily="34" charset="-120"/>
+              </a:rPr>
+              <a:t>· 단일 기관·단기 추적 — 시술자 숙련도 등 기관별 변이 반영 안 됨</a:t>
+            </a:r>
+            <a:endParaRPr lang="en-US" sz="1150" dirty="0"/>
+          </a:p>
+        </p:txBody>
+      </p:sp>
+      <p:sp>
+        <p:nvSpPr>
+          <p:cNvPr id="10" name="Shape 8"/>
           <p:cNvSpPr/>
           <p:nvPr/>
         </p:nvSpPr>
@@ -5903,20 +5793,20 @@
             <a:solidFill>
               <a:srgbClr val="02C39A"/>
             </a:solidFill>
-            <a:prstDash val="dash"/>
+            <a:prstDash val="solid"/>
           </a:ln>
         </p:spPr>
       </p:sp>
       <p:sp>
         <p:nvSpPr>
-          <p:cNvPr id="17" name="Text 15"/>
-          <p:cNvSpPr txBox="1"/>
-          <p:nvPr/>
-        </p:nvSpPr>
-        <p:spPr>
-          <a:xfrm>
-            <a:off x="8412480" y="2148840"/>
-            <a:ext cx="3063240" cy="548640"/>
+          <p:cNvPr id="11" name="Text 9"/>
+          <p:cNvSpPr txBox="1"/>
+          <p:nvPr/>
+        </p:nvSpPr>
+        <p:spPr>
+          <a:xfrm>
+            <a:off x="8412480" y="2103120"/>
+            <a:ext cx="3063240" cy="457200"/>
           </a:xfrm>
           <a:prstGeom prst="rect">
             <a:avLst/>
@@ -5948,33 +5838,33 @@
       </p:sp>
       <p:sp>
         <p:nvSpPr>
-          <p:cNvPr id="18" name="Text 16"/>
-          <p:cNvSpPr txBox="1"/>
-          <p:nvPr/>
-        </p:nvSpPr>
-        <p:spPr>
-          <a:xfrm>
-            <a:off x="8412480" y="2788920"/>
-            <a:ext cx="3063240" cy="1097280"/>
-          </a:xfrm>
-          <a:prstGeom prst="rect">
-            <a:avLst/>
-          </a:prstGeom>
-          <a:noFill/>
-          <a:ln/>
-        </p:spPr>
-        <p:txBody>
-          <a:bodyPr wrap="square" lIns="0" tIns="0" rIns="0" bIns="0" rtlCol="0" anchor="ctr"/>
+          <p:cNvPr id="12" name="Text 10"/>
+          <p:cNvSpPr txBox="1"/>
+          <p:nvPr/>
+        </p:nvSpPr>
+        <p:spPr>
+          <a:xfrm>
+            <a:off x="8412480" y="2606040"/>
+            <a:ext cx="3063240" cy="3246120"/>
+          </a:xfrm>
+          <a:prstGeom prst="rect">
+            <a:avLst/>
+          </a:prstGeom>
+          <a:noFill/>
+          <a:ln/>
+        </p:spPr>
+        <p:txBody>
+          <a:bodyPr wrap="square" lIns="0" tIns="0" rIns="0" bIns="0" rtlCol="0" anchor="t"/>
           <a:lstStyle/>
           <a:p>
             <a:pPr indent="0" marL="0">
               <a:lnSpc>
-                <a:spcPct val="130000"/>
+                <a:spcPct val="135000"/>
               </a:lnSpc>
               <a:buNone/>
             </a:pPr>
             <a:r>
-              <a:rPr lang="en-US" sz="1350" dirty="0">
+              <a:rPr lang="en-US" sz="1150" dirty="0">
                 <a:solidFill>
                   <a:srgbClr val="0B2E33"/>
                 </a:solidFill>
@@ -5982,110 +5872,55 @@
                 <a:ea typeface="Pretendard" pitchFamily="34" charset="-122"/>
                 <a:cs typeface="Pretendard" pitchFamily="34" charset="-120"/>
               </a:rPr>
-              <a:t>한국 임상 현장에 그대로 적용 가능한가?</a:t>
-            </a:r>
-            <a:endParaRPr lang="en-US" sz="1350" dirty="0"/>
+              <a:t>· 한국인 대상 데이터가 아님 — 골밀도·조직 특성 차이로 발현시간 절대값은 다를 수 있음</a:t>
+            </a:r>
+            <a:endParaRPr lang="en-US" sz="1150" dirty="0"/>
           </a:p>
           <a:p>
             <a:pPr indent="0" marL="0">
               <a:lnSpc>
-                <a:spcPct val="130000"/>
+                <a:spcPct val="135000"/>
               </a:lnSpc>
               <a:buNone/>
             </a:pPr>
             <a:r>
-              <a:rPr lang="en-US" sz="1250" i="1" dirty="0">
-                <a:solidFill>
-                  <a:srgbClr val="5B7A7E"/>
-                </a:solidFill>
-                <a:latin typeface="Pretendard" pitchFamily="34" charset="0"/>
-                <a:ea typeface="Pretendard" pitchFamily="34" charset="-122"/>
-                <a:cs typeface="Pretendard" pitchFamily="34" charset="-120"/>
-              </a:rPr>
-              <a:t>(직접 채워 넣기)</a:t>
-            </a:r>
-            <a:endParaRPr lang="en-US" sz="1350" dirty="0"/>
-          </a:p>
-        </p:txBody>
-      </p:sp>
-      <p:sp>
-        <p:nvSpPr>
-          <p:cNvPr id="19" name="Shape 17"/>
-          <p:cNvSpPr/>
-          <p:nvPr/>
-        </p:nvSpPr>
-        <p:spPr>
-          <a:xfrm>
-            <a:off x="8412480" y="4206240"/>
-            <a:ext cx="3063240" cy="0"/>
-          </a:xfrm>
-          <a:prstGeom prst="line">
-            <a:avLst/>
-          </a:prstGeom>
-          <a:noFill/>
-          <a:ln w="9525">
-            <a:solidFill>
-              <a:srgbClr val="5B7A7E">
-                <a:alpha val="60000"/>
-              </a:srgbClr>
-            </a:solidFill>
-            <a:prstDash val="dash"/>
-          </a:ln>
-        </p:spPr>
-      </p:sp>
-      <p:sp>
-        <p:nvSpPr>
-          <p:cNvPr id="20" name="Shape 18"/>
-          <p:cNvSpPr/>
-          <p:nvPr/>
-        </p:nvSpPr>
-        <p:spPr>
-          <a:xfrm>
-            <a:off x="8412480" y="4709160"/>
-            <a:ext cx="3063240" cy="0"/>
-          </a:xfrm>
-          <a:prstGeom prst="line">
-            <a:avLst/>
-          </a:prstGeom>
-          <a:noFill/>
-          <a:ln w="9525">
-            <a:solidFill>
-              <a:srgbClr val="5B7A7E">
-                <a:alpha val="60000"/>
-              </a:srgbClr>
-            </a:solidFill>
-            <a:prstDash val="dash"/>
-          </a:ln>
-        </p:spPr>
-      </p:sp>
-      <p:sp>
-        <p:nvSpPr>
-          <p:cNvPr id="21" name="Shape 19"/>
-          <p:cNvSpPr/>
-          <p:nvPr/>
-        </p:nvSpPr>
-        <p:spPr>
-          <a:xfrm>
-            <a:off x="8412480" y="5212080"/>
-            <a:ext cx="3063240" cy="0"/>
-          </a:xfrm>
-          <a:prstGeom prst="line">
-            <a:avLst/>
-          </a:prstGeom>
-          <a:noFill/>
-          <a:ln w="9525">
-            <a:solidFill>
-              <a:srgbClr val="5B7A7E">
-                <a:alpha val="60000"/>
-              </a:srgbClr>
-            </a:solidFill>
-            <a:prstDash val="dash"/>
-          </a:ln>
-        </p:spPr>
-      </p:sp>
-      <p:sp>
-        <p:nvSpPr>
-          <p:cNvPr id="22" name="Text 20"/>
+              <a:rPr lang="en-US" sz="1150" dirty="0">
+                <a:solidFill>
+                  <a:srgbClr val="0B2E33"/>
+                </a:solidFill>
+                <a:latin typeface="Pretendard" pitchFamily="34" charset="0"/>
+                <a:ea typeface="Pretendard" pitchFamily="34" charset="-122"/>
+                <a:cs typeface="Pretendard" pitchFamily="34" charset="-120"/>
+              </a:rPr>
+              <a:t>· 다만 국소마취제 약리기전(pKa, 지질용해도) 자체는 인종 무관 — 상대적 우위 경향은 참고 가능</a:t>
+            </a:r>
+            <a:endParaRPr lang="en-US" sz="1150" dirty="0"/>
+          </a:p>
+          <a:p>
+            <a:pPr indent="0" marL="0">
+              <a:lnSpc>
+                <a:spcPct val="135000"/>
+              </a:lnSpc>
+              <a:buNone/>
+            </a:pPr>
+            <a:r>
+              <a:rPr lang="en-US" sz="1150" dirty="0">
+                <a:solidFill>
+                  <a:srgbClr val="0B2E33"/>
+                </a:solidFill>
+                <a:latin typeface="Pretendard" pitchFamily="34" charset="0"/>
+                <a:ea typeface="Pretendard" pitchFamily="34" charset="-122"/>
+                <a:cs typeface="Pretendard" pitchFamily="34" charset="-120"/>
+              </a:rPr>
+              <a:t>· 완충(buffered) 제형 비교는 빠져 있어, 본 과제 연구계획서 주제로 보완 필요</a:t>
+            </a:r>
+            <a:endParaRPr lang="en-US" sz="1150" dirty="0"/>
+          </a:p>
+        </p:txBody>
+      </p:sp>
+      <p:sp>
+        <p:nvSpPr>
+          <p:cNvPr id="13" name="Text 11"/>
           <p:cNvSpPr txBox="1"/>
           <p:nvPr/>
         </p:nvSpPr>

--- a/치과약리학실험2-논문발표/치과약리학실험2_논문발표.pptx
+++ b/치과약리학실험2-논문발표/치과약리학실험2_논문발표.pptx
@@ -1865,29 +1865,7 @@
       </p:sp>
       <p:sp>
         <p:nvSpPr>
-          <p:cNvPr id="7" name="Shape 5"/>
-          <p:cNvSpPr/>
-          <p:nvPr/>
-        </p:nvSpPr>
-        <p:spPr>
-          <a:xfrm>
-            <a:off x="822960" y="4892040"/>
-            <a:ext cx="10332720" cy="18288"/>
-          </a:xfrm>
-          <a:prstGeom prst="rect">
-            <a:avLst/>
-          </a:prstGeom>
-          <a:solidFill>
-            <a:srgbClr val="5B7A7E">
-              <a:alpha val="40000"/>
-            </a:srgbClr>
-          </a:solidFill>
-          <a:ln/>
-        </p:spPr>
-      </p:sp>
-      <p:sp>
-        <p:nvSpPr>
-          <p:cNvPr id="8" name="Text 6"/>
+          <p:cNvPr id="7" name="Text 5"/>
           <p:cNvSpPr txBox="1"/>
           <p:nvPr/>
         </p:nvSpPr>

--- a/치과약리학실험2-논문발표/치과약리학실험2_논문발표.pptx
+++ b/치과약리학실험2-논문발표/치과약리학실험2_논문발표.pptx
@@ -516,7 +516,7 @@
           <a:p>
             <a:r>
               <a:rPr lang="en-US" dirty="0"/>
-              <a:t>발표 시작 인사. 이 연구는 랫드(쥐) 동물실험이라는 점을 처음부터 명확히 밝힐 것. 저널 출처(International Orthodontics, Elsevier)와 선정 사유(치과약리학1의 PGE2/COX 경로 + 구강생화학의 칼슘항상성·치아이동 생화학 두 과목 내용이 한 논문에서 만난다는 점)를 한 줄로 언급.</a:t>
+              <a:t>발표 시작 인사. 이 연구는 랫드(쥐) 동물실험이라는 점을 처음부터 명확히 밝힐 것. 저널 출처(International Orthodontics, Elsevier)와 선정 사유(치과약리학1의 PGE2/COX 경로 + 구강생화학의 골대사·칼슘 항상성 두 과목 내용이 한 논문에서 만난다는 점)를 한 줄로 언급.</a:t>
             </a:r>
             <a:endParaRPr lang="en-US" dirty="0"/>
           </a:p>
@@ -868,7 +868,7 @@
           <a:p>
             <a:r>
               <a:rPr lang="en-US" dirty="0"/>
-              <a:t>이 결론 슬라이드는 Q&amp;A 동안 화면에 계속 띄워둘 것(원 저자 의도). 치과약리학1과 구강생화학 두 과목 내용이 이 논문 하나로 이어진다는 점을 다시 언급하며 마무리 후 Q&amp;A로 전환.</a:t>
+              <a:t>이 결론 슬라이드는 Q&amp;A 동안 화면에 계속 띄워둘 것(원 저자 의도). 치과약리학1(PGE2/COX)과 구강생화학(골대사·칼슘 항상성) 두 과목 내용이 이 논문 하나로 이어진다는 점을 다시 언급하며 마무리 후 Q&amp;A로 전환.</a:t>
             </a:r>
             <a:endParaRPr lang="en-US" dirty="0"/>
           </a:p>
@@ -4184,7 +4184,7 @@
                 <a:ea typeface="맑은 고딕" pitchFamily="34" charset="-122"/>
                 <a:cs typeface="맑은 고딕" pitchFamily="34" charset="-120"/>
               </a:rPr>
-              <a:t>'빠른 이동'과 '안정적 결과' 사이의 트레이드오프를 보여준 첫 3약물 비교 연구 — 치과약리학1(PGE2/COX)과 구강생화학(치아이동의 생화학)의 내용이 이 논문 하나로 이어진다.</a:t>
+              <a:t>'빠른 이동'과 '안정적 결과' 사이의 트레이드오프를 보여준 첫 3약물 비교 연구 — 치과약리학1(PGE2/COX 경로)과 구강생화학(골대사·칼슘 항상성)의 내용이 이 논문 하나로 이어진다.</a:t>
             </a:r>
             <a:endParaRPr lang="en-US" sz="1350" dirty="0"/>
           </a:p>
@@ -11276,7 +11276,36 @@
                 <a:ea typeface="맑은 고딕" pitchFamily="34" charset="-122"/>
                 <a:cs typeface="맑은 고딕" pitchFamily="34" charset="-120"/>
               </a:rPr>
-              <a:t>본래 '항염증 = 골흡수 억제'로 알려져 있지만, 국소 고용량에서는 오히려 염증유전자 억제와 동시에 파골세포형성을 직접 자극 — 약물의 작용이 용량·투여경로·표적조직에 따라 정반대로 나타날 수 있음을 보여주는 사례</a:t>
+              <a:t>국소 고용량 투여 ▷ 염증유전자 억제 + 파골세포형성 직접 자극 ▷ 골흡수 급가속</a:t>
+            </a:r>
+            <a:endParaRPr lang="en-US" sz="1150" dirty="0"/>
+          </a:p>
+          <a:p>
+            <a:pPr indent="0" marL="0">
+              <a:lnSpc>
+                <a:spcPct val="132000"/>
+              </a:lnSpc>
+              <a:buNone/>
+            </a:pPr>
+            <a:endParaRPr lang="en-US" sz="1150" dirty="0"/>
+          </a:p>
+          <a:p>
+            <a:pPr indent="0" marL="0">
+              <a:lnSpc>
+                <a:spcPct val="132000"/>
+              </a:lnSpc>
+              <a:buNone/>
+            </a:pPr>
+            <a:r>
+              <a:rPr lang="en-US" sz="1150" dirty="0">
+                <a:solidFill>
+                  <a:srgbClr val="16232E"/>
+                </a:solidFill>
+                <a:latin typeface="맑은 고딕" pitchFamily="34" charset="0"/>
+                <a:ea typeface="맑은 고딕" pitchFamily="34" charset="-122"/>
+                <a:cs typeface="맑은 고딕" pitchFamily="34" charset="-120"/>
+              </a:rPr>
+              <a:t>통념(항염증=골흡수 억제)과 반대 — 용량·투여경로·표적조직에 따라 작용이 뒤바뀌는 사례</a:t>
             </a:r>
             <a:endParaRPr lang="en-US" sz="1150" dirty="0"/>
           </a:p>
@@ -11470,7 +11499,36 @@
                 <a:ea typeface="맑은 고딕" pitchFamily="34" charset="-122"/>
                 <a:cs typeface="맑은 고딕" pitchFamily="34" charset="-120"/>
               </a:rPr>
-              <a:t>비타민D수용체(VDR)를 매개로 유전자 발현(osteocalcin 등)을 조절 — 전신 칼슘·인 대사를 조절하는 호르몬이 국소 골개조에도 관여한다는 점에서 구강생화학의 칼슘 항상성 파트와 직접 연결됨</a:t>
+              <a:t>VDR(비타민D수용체) 결합 ▷ 골개조 관련 유전자 발현 조절 ▷ 파골세포 활성 + 면역매개체 동시 조절 ▷ 완만한 가속</a:t>
+            </a:r>
+            <a:endParaRPr lang="en-US" sz="1150" dirty="0"/>
+          </a:p>
+          <a:p>
+            <a:pPr indent="0" marL="0">
+              <a:lnSpc>
+                <a:spcPct val="132000"/>
+              </a:lnSpc>
+              <a:buNone/>
+            </a:pPr>
+            <a:endParaRPr lang="en-US" sz="1150" dirty="0"/>
+          </a:p>
+          <a:p>
+            <a:pPr indent="0" marL="0">
+              <a:lnSpc>
+                <a:spcPct val="132000"/>
+              </a:lnSpc>
+              <a:buNone/>
+            </a:pPr>
+            <a:r>
+              <a:rPr lang="en-US" sz="1150" dirty="0">
+                <a:solidFill>
+                  <a:srgbClr val="16232E"/>
+                </a:solidFill>
+                <a:latin typeface="맑은 고딕" pitchFamily="34" charset="0"/>
+                <a:ea typeface="맑은 고딕" pitchFamily="34" charset="-122"/>
+                <a:cs typeface="맑은 고딕" pitchFamily="34" charset="-120"/>
+              </a:rPr>
+              <a:t>전신 칼슘 대사 호르몬이 국소 골개조에도 관여하는 사례</a:t>
             </a:r>
             <a:endParaRPr lang="en-US" sz="1150" dirty="0"/>
           </a:p>
@@ -11664,7 +11722,36 @@
                 <a:ea typeface="맑은 고딕" pitchFamily="34" charset="-122"/>
                 <a:cs typeface="맑은 고딕" pitchFamily="34" charset="-120"/>
               </a:rPr>
-              <a:t>교정력이 가해지면 PDL세포가 COX 경로로 스스로 PGE2를 만들어 RANKL을 유도하는데, 이 실험은 그 경로를 외부 주입으로 '재현' — 치과약리학1의 '교정력→COX→PGE2→RANKL→파골세포' 축을 실험적으로 검증</a:t>
+              <a:t>[자연 경로] 교정력 ▷ COX-2 ▷ PGE2 자체 생성 ▷ RANKL ▷ 파골세포</a:t>
+            </a:r>
+            <a:endParaRPr lang="en-US" sz="1150" dirty="0"/>
+          </a:p>
+          <a:p>
+            <a:pPr indent="0" marL="0">
+              <a:lnSpc>
+                <a:spcPct val="132000"/>
+              </a:lnSpc>
+              <a:buNone/>
+            </a:pPr>
+            <a:endParaRPr lang="en-US" sz="1150" dirty="0"/>
+          </a:p>
+          <a:p>
+            <a:pPr indent="0" marL="0">
+              <a:lnSpc>
+                <a:spcPct val="132000"/>
+              </a:lnSpc>
+              <a:buNone/>
+            </a:pPr>
+            <a:r>
+              <a:rPr lang="en-US" sz="1150" dirty="0">
+                <a:solidFill>
+                  <a:srgbClr val="16232E"/>
+                </a:solidFill>
+                <a:latin typeface="맑은 고딕" pitchFamily="34" charset="0"/>
+                <a:ea typeface="맑은 고딕" pitchFamily="34" charset="-122"/>
+                <a:cs typeface="맑은 고딕" pitchFamily="34" charset="-120"/>
+              </a:rPr>
+              <a:t>이 실험은 PGE2를 외부 직접 주입 — 경로 중간부터 재현·검증</a:t>
             </a:r>
             <a:endParaRPr lang="en-US" sz="1150" dirty="0"/>
           </a:p>

--- a/치과약리학실험2-논문발표/치과약리학실험2_논문발표.pptx
+++ b/치과약리학실험2-논문발표/치과약리학실험2_논문발표.pptx
@@ -516,7 +516,10 @@
           <a:p>
             <a:r>
               <a:rPr lang="en-US" dirty="0"/>
-              <a:t>발표 시작 인사. 이 연구는 랫드(쥐) 동물실험이라는 점을 처음부터 명확히 밝힐 것. 저널 출처(International Orthodontics, Elsevier)와 선정 사유(치과약리학1의 PGE2/COX 경로 + 구강생화학의 골대사·칼슘 항상성 두 과목 내용이 한 논문에서 만난다는 점)를 한 줄로 언급.</a:t>
+              <a:t>[대본 0:00~0:20]
+안녕하세요, 발표를 맡은 김민성입니다.
+오늘 소개할 논문은 2026년 International Orthodontics에 게재된 "Three Pharmacological Agents for Acceleratory Orthodontic Tooth Movement and Subsequent Relapse: A Randomized Controlled Animal Study"입니다. 코르티코스테로이드, 비타민D, PGE2 세 가지 약물이 교정 치아이동을 얼마나 가속하고, 그만큼 재발도 크게 만드는지를 랫드 모델에서 비교한 연구입니다.
+[발표 팁] 이 연구는 랫드(쥐) 동물실험이라는 점을 처음부터 명확히 밝힐 것. 저널 출처(International Orthodontics, Elsevier)와 선정 사유(치과약리학1의 PGE2/COX 경로 + 구강생화학의 골대사·칼슘 항상성 두 과목 내용이 한 논문에서 만난다는 점)를 한 줄로 언급.</a:t>
             </a:r>
             <a:endParaRPr lang="en-US" dirty="0"/>
           </a:p>
@@ -604,7 +607,11 @@
           <a:p>
             <a:r>
               <a:rPr lang="en-US" dirty="0"/>
-              <a:t>발표자 본인 의견으로 최종 다듬을 것 — 특히 Q&amp;A 대비를 위해 표본수 검정력·비맹검 측정 부분은 원문 근거로 보강 추천.</a:t>
+              <a:t>[대본 7:00~8:00]
+강점으로는 ARRIVE 가이드라인 준수, 윤리위 승인, 무작위 배정과 눈가림, 그리고 임상 측정과 조직학을 함께 사용한 이중 검증을 들 수 있습니다.
+한계로는, 배정만 눈가림했고 실제 측정은 한 명의 연구자가 다 했다는 점, 약물마다 용량을 하나씩만 테스트해서 용량-반응 분석이 불가능하다는 점, 그리고 투여 빈도도 매일·3일마다·매주로 제각각이라 공정한 비교인지 의문이 남는다는 점을 지적할 수 있습니다.
+임상 적용 측면에서는, 코르티코스테로이드는 가속 효과는 크지만 재발 위험이 가장 크기 때문에, 전신 스테로이드를 복용 중인 교정 환자라면 특히 신중해야 합니다. 반면 비타민D와 PGE2는 온건한 가속에 재발도 적어서 상대적으로 안전한 보조제가 될 수 있어 보입니다. 다만 PGE2는 고용량에서 치근흡수 위험이 있다는 보고도 있어서, 안전성과 효능 사이의 균형이 필요합니다.
+[발표 팁] 발표자 본인 의견으로 최종 다듬을 것 — 특히 Q&amp;A 대비를 위해 표본수 검정력·비맹검 측정 부분은 원문 근거로 보강 추천.</a:t>
             </a:r>
             <a:endParaRPr lang="en-US" dirty="0"/>
           </a:p>
@@ -692,7 +699,9 @@
           <a:p>
             <a:r>
               <a:rPr lang="en-US" dirty="0"/>
-              <a:t>원문 Discussion 'Comparison with previous studies' 문단 재구성. 코르티코스테로이드만 문헌 간 결과가 정반대인 이유(연구기간·용량 차이)를 짚으면 비평적 고찰과 자연스럽게 연결됨.</a:t>
+              <a:t>[대본 8:00~8:30]
+코르티코스테로이드는 선행연구마다 결과가 엇갈리는데, 이건 연구 기간이나 용량 차이 때문으로 보입니다. 비타민D는 여러 선행연구와 일관되게 가속 효과가 확인됐고, PGE2도 마찬가지로 가속 효과를 보고한 연구는 많지만 '효과 없음'을 보고한 연구는 없었습니다.
+[발표 팁] 원문 Discussion 'Comparison with previous studies' 문단 재구성. 코르티코스테로이드만 문헌 간 결과가 정반대인 이유(연구기간·용량 차이)를 짚으면 비평적 고찰과 자연스럽게 연결됨.</a:t>
             </a:r>
             <a:endParaRPr lang="en-US" dirty="0"/>
           </a:p>
@@ -868,7 +877,10 @@
           <a:p>
             <a:r>
               <a:rPr lang="en-US" dirty="0"/>
-              <a:t>이 결론 슬라이드는 Q&amp;A 동안 화면에 계속 띄워둘 것(원 저자 의도). 치과약리학1(PGE2/COX)과 구강생화학(골대사·칼슘 항상성) 두 과목 내용이 이 논문 하나로 이어진다는 점을 다시 언급하며 마무리 후 Q&amp;A로 전환.</a:t>
+              <a:t>[대본 8:30~9:15]
+정리하면, 치아이동을 가장 많이 가속하는 약물이 보정 후 가장 많이 되돌아가기도 합니다. 코르티코스테로이드는 최대 가속·최대 재발, PGE2는 최소 가속·최소 재발, 비타민D는 그 중간입니다.
+'빠른 이동'과 '안정적인 결과' 사이의 트레이드오프를 보여준 첫 3약물 비교 연구이고, 치과약리학1의 PGE2/COX 내용과 구강생화학의 골대사·칼슘 항상성 내용이 이 논문 하나로 이어진다는 점에서 오늘 발표 논문으로 선정했습니다.
+[발표 팁] 이 결론 슬라이드는 Q&amp;A 동안 화면에 계속 띄워둘 것(원 저자 의도). 치과약리학1(PGE2/COX)과 구강생화학(골대사·칼슘 항상성) 두 과목 내용이 이 논문 하나로 이어진다는 점을 다시 언급하며 마무리 후 Q&amp;A로 전환.</a:t>
             </a:r>
             <a:endParaRPr lang="en-US" dirty="0"/>
           </a:p>
@@ -956,11 +968,19 @@
           <a:p>
             <a:r>
               <a:rPr lang="en-US" dirty="0"/>
-              <a:t>예상 질문 1: 동물실험 결과를 사람에게 그대로 적용할 수 있는가?
-예상 질문 2: 코르티코스테로이드 결과가 일부 선행연구(Yamane, Molina 등)와 정반대인데, 이 연구가 더 신뢰할 만한 이유는?
-예상 질문 3: 왜 세 약물의 용량을 하나씩만 테스트했는가? 용량을 늘리면 결과가 달라질 수 있지 않은가?
-예상 질문 4: PGE2가 치근흡수를 유발할 수 있다는데, 이 연구에서는 그런 부작용을 확인했는가?
-예상 질문 5: 암컷 랫드는 왜 제외했는가? 성별에 따라 결과가 다를 가능성은?</a:t>
+              <a:t>[대본 9:15~10:00]
+이상으로 발표를 마치겠습니다. 질문 받겠습니다. 감사합니다.
+[예상 질문 &amp; 답변 메모]
+Q1. 동물실험 결과를 사람에게 그대로 적용할 수 있는가?
+→ 랫드와 사람은 골대사 속도, 치아 구조가 달라서 절대적인 수치를 그대로 적용하긴 어렵습니다. 다만 파골세포 활성화라는 생물학적 기전 자체는 인종·종을 넘어 보편적이라, 상대적인 경향성(코르티코스테로이드가 가장 위험하다는 점 등)은 참고할 수 있습니다. 저자들도 이 한계를 인정하고 있습니다.
+Q2. 코르티코스테로이드 결과가 일부 선행연구(Yamane, Molina 등)와 정반대인데, 이 연구가 더 신뢰할 만한 이유는?
+→ 저자들은 연구 기간(선행연구 1~2주 vs 이 연구 8주 전체), 용량, 적용된 힘, 표본수 차이로 설명합니다. 특히 이 연구는 가속기부터 재발기까지 전체 과정을 추적한 몇 안 되는 연구라는 점에서 의미가 있습니다.
+Q3. 왜 세 약물의 용량을 하나씩만 테스트했는가?
+→ 이건 이 논문의 명확한 한계입니다. 용량-반응 관계를 보려면 여러 용량을 비교해야 하는데, 이 연구는 선행연구에서 흔히 쓰인 용량 하나씩만 선택해서 비교했습니다. 후속 연구로 용량별 비교가 필요하다고 답하면 됩니다.
+Q4. PGE2가 치근흡수를 유발할 수 있다는데, 이 연구에서는 그런 부작용을 확인했는가?
+→ 이 연구에서는 별도로 치근흡수를 측정하지 않았습니다. 다만 타 문헌에서 PGE2 고용량 투여 시 치근흡수 위험이 보고된 바 있어서, 안전성 평가는 후속 연구 과제로 남아있다고 답하면 됩니다.
+Q5. 암컷 랫드는 왜 제외했는가?
+→ 수컷만 사용한 이유는 호르몬 주기에 의한 변동을 배제하기 위해서입니다. 다만 이로 인해 성별에 따른 차이는 이 연구로는 알 수 없고, 여성 환자에게 그대로 적용할 수 있는지는 후속 연구가 필요하다는 한계로 이어집니다.</a:t>
             </a:r>
             <a:endParaRPr lang="en-US" dirty="0"/>
           </a:p>
@@ -1048,7 +1068,11 @@
           <a:p>
             <a:r>
               <a:rPr lang="en-US" dirty="0"/>
-              <a:t>Q&amp;A 대비용 백업 슬라이드. 교수가 '원문 Discussion엔 대조군이 최저라고 되어있는데?' 라고 물으면 이 슬라이드를 띄우고: (1) Table III의 p(CPG vs PGE2G)=0.605로 두 군이 통계적으로 구분 안 됨을 보여주고, (2) 원문 스스로도 Results/Conclusion과 Discussion에서 서술이 갈린다는 점을 지적하며, (3) 정확히는 대조군과 PGE2군이 통계적 동률이라고 답변.</a:t>
+              <a:t>[Appendix A 사용법 — 교수님 질문 대비]
+Q&amp;A 대비용 백업 슬라이드. 만약 "원문 Discussion엔 대조군이 재발이 제일 적다고 되어 있는데?"라는 질문이 나오면 이 슬라이드를 띄우고:
+1. Table III에서 양성대조 vs PGE2군의 p값이 0.605로, 통계적으로 두 군이 구분되지 않는다는 점을 보여주고,
+2. 원문 스스로도 Results/Conclusions와 Discussion에서 서술이 갈린다는 점을 지적하고,
+3. 정확히는 "대조군과 PGE2군이 통계적으로 동률"이라고 답하면 됩니다.</a:t>
             </a:r>
             <a:endParaRPr lang="en-US" dirty="0"/>
           </a:p>
@@ -1136,7 +1160,10 @@
           <a:p>
             <a:r>
               <a:rPr lang="en-US" dirty="0"/>
-              <a:t>발치 시 통증 조절 실패가 환자 경험에 미치는 영향과 유사하게, 재발도 교정 치료의 장기 성공을 좌우하는 문제임을 도입부에서 강조.</a:t>
+              <a:t>[대본 0:20~1:10]
+먼저 배경입니다. 교정 치료에서 재발은 여전히 원인이 명확히 밝혀지지 않은 문제입니다. 장치를 제거하면 남아있던 결합력이 풀리면서 치아가 원래 자리로 돌아가려는 현상이죠.
+한편 치료 기간을 줄이기 위해 치아 이동을 가속하는 방법도 계속 연구되고 있는데, 문제는 가속 효과를 낸 약물들이 정작 보정 이후 재발에 어떤 영향을 주는지는 거의 연구되지 않았다는 점입니다. 이 논문이 그 공백을 처음으로 다룹니다.
+[발표 팁] 발치 시 통증 조절 실패가 환자 경험에 미치는 영향과 유사하게, 재발도 교정 치료의 장기 성공을 좌우하는 문제임을 도입부에서 강조.</a:t>
             </a:r>
             <a:endParaRPr lang="en-US" dirty="0"/>
           </a:p>
@@ -1224,7 +1251,11 @@
           <a:p>
             <a:r>
               <a:rPr lang="en-US" dirty="0"/>
-              <a:t>구강생화학 '뼈와 치아의 석회화, 혈청칼슘 항상성' 챕터에서 배운 칼슘/인 대사 조절호르몬(비타민D, PTH 등) 내용과 연결지어 설명하면 좋음. 세 경로의 차이는 슬라이드 9(치과약리학적 의의)에서 더 깊게 다룸.</a:t>
+              <a:t>[대본 1:10~2:00]
+세 약물이 파골세포를 활성화하는 경로부터 보겠습니다.
+코르티코스테로이드는 염증 유전자 발현을 억제하면서 동시에 파골세포형성을 직접 자극하고 콜라게나아제 활성도 높여서, 골흡수를 가장 강하게 촉진합니다. 비타민D는 파골세포 활성 자체를 높이면서 면역매개체를 조절하는 방식으로 작용하고요. PGE2는 RANKL을 매개로 파골세포형성을 자극합니다 — 사실 이건 교정력이 가해졌을 때 우리 몸이 스스로 만들어내는 경로를 외부에서 그대로 보충하는 방식입니다.
+세 약물 모두 결국 파골세포를 활성화시키지만, 가는 길이 다르다는 점을 기억해 주시면 됩니다. 이 부분은 슬라이드 9에서 더 자세히 다루겠습니다.
+[발표 팁] 구강생화학 '뼈와 치아의 석회화, 혈청칼슘 항상성' 챕터에서 배운 칼슘/인 대사 조절호르몬(비타민D, PTH 등) 내용과 연결지어 설명하면 좋음. 세 경로의 차이는 슬라이드 9(치과약리학적 의의)에서 더 깊게 다룸.</a:t>
             </a:r>
             <a:endParaRPr lang="en-US" dirty="0"/>
           </a:p>
@@ -1312,7 +1343,10 @@
           <a:p>
             <a:r>
               <a:rPr lang="en-US" dirty="0"/>
-              <a:t>이 가설은 저자들이 명시한 공식 가설이 아니라, 발표자가 결과 패턴(코르티코스테로이드=최대가속·최대재발, PGE2=최소가속·최소재발)을 보고 재구성한 것임을 반드시 언급.</a:t>
+              <a:t>[대본 2:00~2:40]
+연구 목적은 랫드 모델에서 세 약물의 국소 주입이 치아이동 가속과 보정 후 재발에 미치는 영향을 비교하는 것입니다.
+가설은 제가 결과 패턴을 보고 재구성한 것인데, 세 약물 모두 대조군보다 치아이동을 가속시키되, 가속 정도가 클수록 보정 후 재발량도 클 것이다 — 라는 가속-재발 트레이드오프입니다.
+[발표 팁] 이 가설은 저자들이 명시한 공식 가설이 아니라, 발표자가 결과 패턴(코르티코스테로이드=최대가속·최대재발, PGE2=최소가속·최소재발)을 보고 재구성한 것임을 반드시 언급.</a:t>
             </a:r>
             <a:endParaRPr lang="en-US" dirty="0"/>
           </a:p>
@@ -1400,7 +1434,11 @@
           <a:p>
             <a:r>
               <a:rPr lang="en-US" dirty="0"/>
-              <a:t>동물실험이므로 Q&amp;A에서 '왜 랫드를 썼나' 물으면 '골개조·치아이동을 통제된 조건에서 관찰하기 위해 — 사람 대상으론 이 정도의 개입·조직검사가 불가능'이라고 답변. 세 약물의 투여 빈도가 매일·3일마다·매주로 서로 다르다는 점은 비평적 고찰(한계)에서 다시 짚음.</a:t>
+              <a:t>[대본 2:40~3:40]
+연구 방법입니다. 수컷 랫드 105마리를 5개 군(음성대조·양성대조·코르티코스테로이드·비타민D·PGE2)으로 무작위 배정하고, 상악 절치 사이에 open-coil loop를 걸어 25g 힘으로 치아를 이동시켰습니다.
+투여 빈도가 약물마다 다른 점이 특이한데요, 코르티코스테로이드는 매일, 비타민D는 3일마다, PGE2는 매주 주입했습니다. 이 부분은 나중에 비평적 고찰에서 다시 짚겠습니다.
+전체 일정은 가속기 4주, 보정기 2주, 재발기 2주로 진행됐습니다.
+[발표 팁] 동물실험이므로 Q&amp;A에서 '왜 랫드를 썼나' 물으면 '골개조·치아이동을 통제된 조건에서 관찰하기 위해 — 사람 대상으론 이 정도의 개입·조직검사가 불가능'이라고 답변. 세 약물의 투여 빈도가 매일·3일마다·매주로 서로 다르다는 점은 비평적 고찰(한계)에서 다시 짚음.</a:t>
             </a:r>
             <a:endParaRPr lang="en-US" dirty="0"/>
           </a:p>
@@ -1488,7 +1526,9 @@
           <a:p>
             <a:r>
               <a:rPr lang="en-US" dirty="0"/>
-              <a:t>원문 Table I·II 기준. 보정기(2주) 동안은 모든 군에서 유의한 변화 없음(장치를 다시 수동적으로 부착해 이동량을 '고정') — 질문 나오면 이 부분도 설명 가능.</a:t>
+              <a:t>[대본 3:40~4:20]
+가속기 4주 결과입니다. 코르티코스테로이드군이 6.50mm로 가장 많이 이동했고, 비타민D 3.73mm, PGE2 2.80mm 순이었습니다. 대조군은 1.29mm에 그쳤고요. 세 약물 모두 대조군 대비 유의하게 가속됐고(p&lt;0.001), 조직검사 결과도 같은 순서로 나왔습니다.
+[발표 팁] 원문 Table I·II 기준. 보정기(2주) 동안은 모든 군에서 유의한 변화 없음(장치를 다시 수동적으로 부착해 이동량을 '고정') — 질문 나오면 이 부분도 설명 가능.</a:t>
             </a:r>
             <a:endParaRPr lang="en-US" dirty="0"/>
           </a:p>
@@ -1576,7 +1616,10 @@
           <a:p>
             <a:r>
               <a:rPr lang="en-US" dirty="0"/>
-              <a:t>가속량이 클수록(코르티코스테로이드) 재발량도 크고, 가속량이 작을수록(PGE2) 재발도 작다는 '가속-재발 트레이드오프' 패턴이 핵심 메시지. 원문 Table III·VI·VII 기준.</a:t>
+              <a:t>[대본 4:20~5:10]
+이제 진짜 흥미로운 부분, 재발기 결과입니다. 2주간 재발량을 보면 코르티코스테로이드군이 -5.07mm로 가장 많이 되돌아갔고, 비타민D가 -2.75mm, 그리고 PGE2는 -0.86mm로 가장 적게 재발했습니다. 참고로 대조군은 -1.09mm였는데, PGE2와 거의 비슷한 수준이죠 — 이 부분은 나중에 부록에서 다시 설명하겠습니다.
+즉 가속기에서 가장 많이 이동했던 코르티코스테로이드군이, 재발기에서도 가장 많이 되돌아간 겁니다. 조직학적으로도 코르티코스테로이드군의 치주인대 폭이 가장 넓게 유지된 게 확인돼서, 임상 측정과 조직 소견이 서로 맞아떨어집니다.
+[발표 팁] 가속량이 클수록(코르티코스테로이드) 재발량도 크고, 가속량이 작을수록(PGE2) 재발도 작다는 '가속-재발 트레이드오프' 패턴이 핵심 메시지. 원문 Table III·VI·VII 기준.</a:t>
             </a:r>
             <a:endParaRPr lang="en-US" dirty="0"/>
           </a:p>
@@ -1664,7 +1707,9 @@
           <a:p>
             <a:r>
               <a:rPr lang="en-US" dirty="0"/>
-              <a:t>원문 Figure 3(H&amp;E)·4(ALP)·5(TRAP) 모두 같은 순서(코르티코스테로이드 &gt; 비타민D &gt; PGE2 &gt; 대조군)로 조직학적 활성을 보여줌. 임상측정치와 조직 소견이 일치한다는 점이 이 논문의 방법론적 강점.</a:t>
+              <a:t>[대본 5:10~5:40]
+H&amp;E 염색 결과를 보면, 코르티코스테로이드군(C)의 치주인대 폭이 압박측·긴장측 모두에서 가장 넓게 유지된 반면, 대조군(A, B)은 가장 좁았습니다. 비타민D와 PGE2는 중간 수준이었고요. 같은 패턴이 ALP·TRAP 염색에서도 똑같이 나타났습니다.
+[발표 팁] 원문 Figure 3(H&amp;E)·4(ALP)·5(TRAP) 모두 같은 순서(코르티코스테로이드 &gt; 비타민D &gt; PGE2 &gt; 대조군)로 조직학적 활성을 보여줌. 임상측정치와 조직 소견이 일치한다는 점이 이 논문의 방법론적 강점.</a:t>
             </a:r>
             <a:endParaRPr lang="en-US" dirty="0"/>
           </a:p>
@@ -1752,7 +1797,15 @@
           <a:p>
             <a:r>
               <a:rPr lang="en-US" dirty="0"/>
-              <a:t>이 슬라이드가 발표의 핵심 — 단순 결과 요약이 아니라 '왜 이 세 약물을 비교했는가'를 치과약리학·구강생화학·치과교정학 세 과목의 언어로 설명하는 지점. 발표 중 가장 천천히, 자신의 말로 설명할 것.</a:t>
+              <a:t>[대본 5:40~7:00 — 발표의 핵심]
+이 논문이 저희 수업들과 왜 연결되는지 설명드리겠습니다.
+세 약물은 사실 완전히 다른 종류의 약입니다. 코르티코스테로이드는 원래 항염증제로 알려져 있어서, 보통 '염증을 줄이면 골흡수도 줄어든다'고 생각하기 쉽습니다. 그런데 이 연구에서는 국소로 고용량 주입했을 때 오히려 파골세포형성을 직접 자극해서 골흡수를 가장 강하게 촉진했습니다. 같은 약물이라도 용량과 투여 경로, 표적 조직에 따라 정반대 효과가 날 수 있다는 걸 보여주는 사례입니다.
+비타민D는 지용성 호르몬이죠. 비타민D 수용체를 통해 유전자 발현을 조절하는 방식으로 작용하는데, 이건 저희가 구강생화학에서 배운 칼슘·인 대사 조절 호르몬이 전신뿐 아니라 국소 골개조에도 관여한다는 걸 실제로 보여주는 사례입니다.
+그리고 PGE2가 제일 흥미로운데요, 이건 원래 교정력이 가해지면 치주인대 세포가 COX 경로를 통해 스스로 만들어내는 물질입니다. 그러니까 이 실험에서 PGE2를 외부에서 주입한 건, 우리 몸이 자연적으로 하는 과정을 그대로 재현해본 거예요. 치과약리학1에서 배운 '교정력 → COX → PGE2 → RANKL → 파골세포'라는 신호전달 축을 이 실험이 직접 검증한 셈입니다.
+정리하면, 세 약물은 서로 다른 경로 — 유전자 억제, 호르몬 수용체, 지질 매개체 — 로 가지만 결국 같은 목적지인 파골세포 활성화에 도달합니다. 그런데 경로가 다르면 부작용과 재발 위험도 달라진다는 게 이 연구의 핵심입니다.
+여기서 교정학 기본 원칙과 연결되는 지점이 나옵니다. 압박-긴장설에 따르면 치아이동은 단순히 뼈가 흡수되는 것만으로 끝나는 게 아니라, 그 이후에 조직이 구조적으로 재조직화되는 과정이 뒤따라야 안정됩니다. 그런데 코르티코스테로이드처럼 흡수만 급격하게 밀어붙이면, 재조직화가 그 속도를 따라가지 못해서 조직이 불안정한 상태로 남고, 결국 장치를 제거했을 때 재발이 커지는 겁니다.
+그러니까 이 논문의 '가속이 클수록 재발도 크다'는 결과는, "치아이동 속도는 결국 생물학적 조직 재형성 속도가 제한한다"는 교정학의 기본 원리를 약리학적으로 다시 확인해준 셈입니다.
+[발표 팁] 이 슬라이드가 발표의 핵심 — 단순 결과 요약이 아니라 '왜 이 세 약물을 비교했는가'를 치과약리학·구강생화학·치과교정학 세 과목의 언어로 설명하는 지점. 발표 중 가장 천천히, 자신의 말로 설명할 것.</a:t>
             </a:r>
             <a:endParaRPr lang="en-US" dirty="0"/>
           </a:p>

--- a/치과약리학실험2-논문발표/치과약리학실험2_논문발표.pptx
+++ b/치과약리학실험2-논문발표/치과약리학실험2_논문발표.pptx
@@ -20,9 +20,10 @@
     <p:sldId id="268" r:id="rId14"/>
     <p:sldId id="269" r:id="rId15"/>
     <p:sldId id="270" r:id="rId16"/>
+    <p:sldId id="271" r:id="rId17"/>
   </p:sldIdLst>
   <p:notesMasterIdLst>
-    <p:notesMasterId r:id="rId17"/>
+    <p:notesMasterId r:id="rId18"/>
   </p:notesMasterIdLst>
   <p:sldSz cx="12192000" cy="6858000"/>
   <p:notesSz cx="6858000" cy="12192000"/>
@@ -607,11 +608,15 @@
           <a:p>
             <a:r>
               <a:rPr lang="en-US" dirty="0"/>
-              <a:t>[대본 7:00~8:00]
-강점으로는 ARRIVE 가이드라인 준수, 윤리위 승인, 무작위 배정과 눈가림, 그리고 임상 측정과 조직학을 함께 사용한 이중 검증을 들 수 있습니다.
-한계로는, 배정만 눈가림했고 실제 측정은 한 명의 연구자가 다 했다는 점, 약물마다 용량을 하나씩만 테스트해서 용량-반응 분석이 불가능하다는 점, 그리고 투여 빈도도 매일·3일마다·매주로 제각각이라 공정한 비교인지 의문이 남는다는 점을 지적할 수 있습니다.
-임상 적용 측면에서는, 코르티코스테로이드는 가속 효과는 크지만 재발 위험이 가장 크기 때문에, 전신 스테로이드를 복용 중인 교정 환자라면 특히 신중해야 합니다. 반면 비타민D와 PGE2는 온건한 가속에 재발도 적어서 상대적으로 안전한 보조제가 될 수 있어 보입니다. 다만 PGE2는 고용량에서 치근흡수 위험이 있다는 보고도 있어서, 안전성과 효능 사이의 균형이 필요합니다.
-[발표 팁] 발표자 본인 의견으로 최종 다듬을 것 — 특히 Q&amp;A 대비를 위해 표본수 검정력·비맹검 측정 부분은 원문 근거로 보강 추천.</a:t>
+              <a:t>[대본 5:40~7:00 — 발표의 핵심]
+이 논문이 저희 수업들과 왜 연결되는지 설명드리겠습니다.
+세 약물은 사실 완전히 다른 종류의 약입니다. 코르티코스테로이드는 원래 항염증제로 알려져 있어서, 보통 '염증을 줄이면 골흡수도 줄어든다'고 생각하기 쉽습니다. 그런데 이 연구에서는 국소로 고용량 주입했을 때 오히려 파골세포형성을 직접 자극해서 골흡수를 가장 강하게 촉진했습니다. 같은 약물이라도 용량과 투여 경로, 표적 조직에 따라 정반대 효과가 날 수 있다는 걸 보여주는 사례입니다.
+비타민D는 지용성 호르몬이죠. 비타민D 수용체를 통해 유전자 발현을 조절하는 방식으로 작용하는데, 이건 저희가 구강생화학에서 배운 칼슘·인 대사 조절 호르몬이 전신뿐 아니라 국소 골개조에도 관여한다는 걸 실제로 보여주는 사례입니다.
+그리고 PGE2가 제일 흥미로운데요, 이건 원래 교정력이 가해지면 치주인대 세포가 COX 경로를 통해 스스로 만들어내는 물질입니다. 그러니까 이 실험에서 PGE2를 외부에서 주입한 건, 우리 몸이 자연적으로 하는 과정을 그대로 재현해본 거예요. 치과약리학1에서 배운 '교정력 → COX → PGE2 → RANKL → 파골세포'라는 신호전달 축을 이 실험이 직접 검증한 셈입니다.
+정리하면, 세 약물은 서로 다른 경로 — 유전자 억제, 호르몬 수용체, 지질 매개체 — 로 가지만 결국 같은 목적지인 파골세포 활성화에 도달합니다. 그런데 경로가 다르면 부작용과 재발 위험도 달라진다는 게 이 연구의 핵심입니다.
+여기서 교정학 기본 원칙과 연결되는 지점이 나옵니다. 압박-긴장설에 따르면 치아이동은 단순히 뼈가 흡수되는 것만으로 끝나는 게 아니라, 그 이후에 조직이 구조적으로 재조직화되는 과정이 뒤따라야 안정됩니다. 그런데 코르티코스테로이드처럼 흡수만 급격하게 밀어붙이면, 재조직화가 그 속도를 따라가지 못해서 조직이 불안정한 상태로 남고, 결국 장치를 제거했을 때 재발이 커지는 겁니다.
+그러니까 이 논문의 '가속이 클수록 재발도 크다'는 결과는, "치아이동 속도는 결국 생물학적 조직 재형성 속도가 제한한다"는 교정학의 기본 원리를 약리학적으로 다시 확인해준 셈입니다.
+[발표 팁] 이 슬라이드가 발표의 핵심 — 단순 결과 요약이 아니라 '왜 이 세 약물을 비교했는가'를 치과약리학·구강생화학·치과교정학 세 과목의 언어로 설명하는 지점. 발표 중 가장 천천히, 자신의 말로 설명할 것.</a:t>
             </a:r>
             <a:endParaRPr lang="en-US" dirty="0"/>
           </a:p>
@@ -699,9 +704,11 @@
           <a:p>
             <a:r>
               <a:rPr lang="en-US" dirty="0"/>
-              <a:t>[대본 8:00~8:30]
-코르티코스테로이드는 선행연구마다 결과가 엇갈리는데, 이건 연구 기간이나 용량 차이 때문으로 보입니다. 비타민D는 여러 선행연구와 일관되게 가속 효과가 확인됐고, PGE2도 마찬가지로 가속 효과를 보고한 연구는 많지만 '효과 없음'을 보고한 연구는 없었습니다.
-[발표 팁] 원문 Discussion 'Comparison with previous studies' 문단 재구성. 코르티코스테로이드만 문헌 간 결과가 정반대인 이유(연구기간·용량 차이)를 짚으면 비평적 고찰과 자연스럽게 연결됨.</a:t>
+              <a:t>[대본 7:00~8:00]
+강점으로는 ARRIVE 가이드라인 준수, 윤리위 승인, 무작위 배정과 눈가림, 그리고 임상 측정과 조직학을 함께 사용한 이중 검증을 들 수 있습니다.
+한계로는, 배정만 눈가림했고 실제 측정은 한 명의 연구자가 다 했다는 점, 약물마다 용량을 하나씩만 테스트해서 용량-반응 분석이 불가능하다는 점, 그리고 투여 빈도도 매일·3일마다·매주로 제각각이라 공정한 비교인지 의문이 남는다는 점을 지적할 수 있습니다.
+임상 적용 측면에서는, 코르티코스테로이드는 가속 효과는 크지만 재발 위험이 가장 크기 때문에, 전신 스테로이드를 복용 중인 교정 환자라면 특히 신중해야 합니다. 반면 비타민D와 PGE2는 온건한 가속에 재발도 적어서 상대적으로 안전한 보조제가 될 수 있어 보입니다. 다만 PGE2는 고용량에서 치근흡수 위험이 있다는 보고도 있어서, 안전성과 효능 사이의 균형이 필요합니다.
+[발표 팁] 발표자 본인 의견으로 최종 다듬을 것 — 특히 Q&amp;A 대비를 위해 표본수 검정력·비맹검 측정 부분은 원문 근거로 보강 추천.</a:t>
             </a:r>
             <a:endParaRPr lang="en-US" dirty="0"/>
           </a:p>
@@ -789,7 +796,9 @@
           <a:p>
             <a:r>
               <a:rPr lang="en-US" dirty="0"/>
-              <a:t>교수님이 '그 인용 어디서 났나' 물으면 이 슬라이드로 바로 답 가능. 전체 28개 문헌은 원 논문 References 섹션에 있음.</a:t>
+              <a:t>[대본 8:00~8:30]
+코르티코스테로이드는 선행연구마다 결과가 엇갈리는데, 이건 연구 기간이나 용량 차이 때문으로 보입니다. 비타민D는 여러 선행연구와 일관되게 가속 효과가 확인됐고, PGE2도 마찬가지로 가속 효과를 보고한 연구는 많지만 '효과 없음'을 보고한 연구는 없었습니다.
+[발표 팁] 원문 Discussion 'Comparison with previous studies' 문단 재구성. 코르티코스테로이드만 문헌 간 결과가 정반대인 이유(연구기간·용량 차이)를 짚으면 비평적 고찰과 자연스럽게 연결됨.</a:t>
             </a:r>
             <a:endParaRPr lang="en-US" dirty="0"/>
           </a:p>
@@ -877,10 +886,7 @@
           <a:p>
             <a:r>
               <a:rPr lang="en-US" dirty="0"/>
-              <a:t>[대본 8:30~9:15]
-정리하면, 치아이동을 가장 많이 가속하는 약물이 보정 후 가장 많이 되돌아가기도 합니다. 코르티코스테로이드는 최대 가속·최대 재발, PGE2는 최소 가속·최소 재발, 비타민D는 그 중간입니다.
-'빠른 이동'과 '안정적인 결과' 사이의 트레이드오프를 보여준 첫 3약물 비교 연구이고, 치과약리학1의 PGE2/COX 내용과 구강생화학의 골대사·칼슘 항상성 내용이 이 논문 하나로 이어진다는 점에서 오늘 발표 논문으로 선정했습니다.
-[발표 팁] 이 결론 슬라이드는 Q&amp;A 동안 화면에 계속 띄워둘 것(원 저자 의도). 치과약리학1(PGE2/COX)과 구강생화학(골대사·칼슘 항상성) 두 과목 내용이 이 논문 하나로 이어진다는 점을 다시 언급하며 마무리 후 Q&amp;A로 전환.</a:t>
+              <a:t>교수님이 '그 인용 어디서 났나' 물으면 이 슬라이드로 바로 답 가능. 전체 28개 문헌은 원 논문 References 섹션에 있음.</a:t>
             </a:r>
             <a:endParaRPr lang="en-US" dirty="0"/>
           </a:p>
@@ -968,19 +974,10 @@
           <a:p>
             <a:r>
               <a:rPr lang="en-US" dirty="0"/>
-              <a:t>[대본 9:15~10:00]
-이상으로 발표를 마치겠습니다. 질문 받겠습니다. 감사합니다.
-[예상 질문 &amp; 답변 메모]
-Q1. 동물실험 결과를 사람에게 그대로 적용할 수 있는가?
-→ 랫드와 사람은 골대사 속도, 치아 구조가 달라서 절대적인 수치를 그대로 적용하긴 어렵습니다. 다만 파골세포 활성화라는 생물학적 기전 자체는 인종·종을 넘어 보편적이라, 상대적인 경향성(코르티코스테로이드가 가장 위험하다는 점 등)은 참고할 수 있습니다. 저자들도 이 한계를 인정하고 있습니다.
-Q2. 코르티코스테로이드 결과가 일부 선행연구(Yamane, Molina 등)와 정반대인데, 이 연구가 더 신뢰할 만한 이유는?
-→ 저자들은 연구 기간(선행연구 1~2주 vs 이 연구 8주 전체), 용량, 적용된 힘, 표본수 차이로 설명합니다. 특히 이 연구는 가속기부터 재발기까지 전체 과정을 추적한 몇 안 되는 연구라는 점에서 의미가 있습니다.
-Q3. 왜 세 약물의 용량을 하나씩만 테스트했는가?
-→ 이건 이 논문의 명확한 한계입니다. 용량-반응 관계를 보려면 여러 용량을 비교해야 하는데, 이 연구는 선행연구에서 흔히 쓰인 용량 하나씩만 선택해서 비교했습니다. 후속 연구로 용량별 비교가 필요하다고 답하면 됩니다.
-Q4. PGE2가 치근흡수를 유발할 수 있다는데, 이 연구에서는 그런 부작용을 확인했는가?
-→ 이 연구에서는 별도로 치근흡수를 측정하지 않았습니다. 다만 타 문헌에서 PGE2 고용량 투여 시 치근흡수 위험이 보고된 바 있어서, 안전성 평가는 후속 연구 과제로 남아있다고 답하면 됩니다.
-Q5. 암컷 랫드는 왜 제외했는가?
-→ 수컷만 사용한 이유는 호르몬 주기에 의한 변동을 배제하기 위해서입니다. 다만 이로 인해 성별에 따른 차이는 이 연구로는 알 수 없고, 여성 환자에게 그대로 적용할 수 있는지는 후속 연구가 필요하다는 한계로 이어집니다.</a:t>
+              <a:t>[대본 8:30~9:15]
+정리하면, 치아이동을 가장 많이 가속하는 약물이 보정 후 가장 많이 되돌아가기도 합니다. 코르티코스테로이드는 최대 가속·최대 재발, PGE2는 최소 가속·최소 재발, 비타민D는 그 중간입니다.
+'빠른 이동'과 '안정적인 결과' 사이의 트레이드오프를 보여준 첫 3약물 비교 연구이고, 치과약리학1의 PGE2/COX 내용과 구강생화학의 골대사·칼슘 항상성 내용이 이 논문 하나로 이어진다는 점에서 오늘 발표 논문으로 선정했습니다.
+[발표 팁] 이 결론 슬라이드는 Q&amp;A 동안 화면에 계속 띄워둘 것(원 저자 의도). 치과약리학1(PGE2/COX)과 구강생화학(골대사·칼슘 항상성) 두 과목 내용이 이 논문 하나로 이어진다는 점을 다시 언급하며 마무리 후 Q&amp;A로 전환.</a:t>
             </a:r>
             <a:endParaRPr lang="en-US" dirty="0"/>
           </a:p>
@@ -1068,11 +1065,19 @@
           <a:p>
             <a:r>
               <a:rPr lang="en-US" dirty="0"/>
-              <a:t>[Appendix A 사용법 — 교수님 질문 대비]
-Q&amp;A 대비용 백업 슬라이드. 만약 "원문 Discussion엔 대조군이 재발이 제일 적다고 되어 있는데?"라는 질문이 나오면 이 슬라이드를 띄우고:
-1. Table III에서 양성대조 vs PGE2군의 p값이 0.605로, 통계적으로 두 군이 구분되지 않는다는 점을 보여주고,
-2. 원문 스스로도 Results/Conclusions와 Discussion에서 서술이 갈린다는 점을 지적하고,
-3. 정확히는 "대조군과 PGE2군이 통계적으로 동률"이라고 답하면 됩니다.</a:t>
+              <a:t>[대본 9:15~10:00]
+이상으로 발표를 마치겠습니다. 질문 받겠습니다. 감사합니다.
+[예상 질문 &amp; 답변 메모]
+Q1. 동물실험 결과를 사람에게 그대로 적용할 수 있는가?
+→ 랫드와 사람은 골대사 속도, 치아 구조가 달라서 절대적인 수치를 그대로 적용하긴 어렵습니다. 다만 파골세포 활성화라는 생물학적 기전 자체는 인종·종을 넘어 보편적이라, 상대적인 경향성(코르티코스테로이드가 가장 위험하다는 점 등)은 참고할 수 있습니다. 저자들도 이 한계를 인정하고 있습니다.
+Q2. 코르티코스테로이드 결과가 일부 선행연구(Yamane, Molina 등)와 정반대인데, 이 연구가 더 신뢰할 만한 이유는?
+→ 저자들은 연구 기간(선행연구 1~2주 vs 이 연구 8주 전체), 용량, 적용된 힘, 표본수 차이로 설명합니다. 특히 이 연구는 가속기부터 재발기까지 전체 과정을 추적한 몇 안 되는 연구라는 점에서 의미가 있습니다.
+Q3. 왜 세 약물의 용량을 하나씩만 테스트했는가?
+→ 이건 이 논문의 명확한 한계입니다. 용량-반응 관계를 보려면 여러 용량을 비교해야 하는데, 이 연구는 선행연구에서 흔히 쓰인 용량 하나씩만 선택해서 비교했습니다. 후속 연구로 용량별 비교가 필요하다고 답하면 됩니다.
+Q4. PGE2가 치근흡수를 유발할 수 있다는데, 이 연구에서는 그런 부작용을 확인했는가?
+→ 이 연구에서는 별도로 치근흡수를 측정하지 않았습니다. 다만 타 문헌에서 PGE2 고용량 투여 시 치근흡수 위험이 보고된 바 있어서, 안전성 평가는 후속 연구 과제로 남아있다고 답하면 됩니다.
+Q5. 암컷 랫드는 왜 제외했는가?
+→ 수컷만 사용한 이유는 호르몬 주기에 의한 변동을 배제하기 위해서입니다. 다만 이로 인해 성별에 따른 차이는 이 연구로는 알 수 없고, 여성 환자에게 그대로 적용할 수 있는지는 후속 연구가 필요하다는 한계로 이어집니다.</a:t>
             </a:r>
             <a:endParaRPr lang="en-US" dirty="0"/>
           </a:p>
@@ -1096,6 +1101,98 @@
             <a:fld id="{F7021451-1387-4CA6-816F-3879F97B5CBC}" type="slidenum">
               <a:rPr lang="en-US"/>
               <a:t>15</a:t>
+            </a:fld>
+            <a:endParaRPr lang="en-US"/>
+          </a:p>
+        </p:txBody>
+      </p:sp>
+    </p:spTree>
+    <p:extLst>
+      <p:ext uri="{BB962C8B-B14F-4D97-AF65-F5344CB8AC3E}">
+        <p14:creationId xmlns:p14="http://schemas.microsoft.com/office/powerpoint/2010/main" val="1024086991"/>
+      </p:ext>
+    </p:extLst>
+  </p:cSld>
+  <p:clrMapOvr>
+    <a:masterClrMapping/>
+  </p:clrMapOvr>
+</p:notes>
+</file>
+
+<file path=ppt/notesSlides/notesSlide16.xml><?xml version="1.0" encoding="utf-8"?>
+<p:notes xmlns:a="http://schemas.openxmlformats.org/drawingml/2006/main" xmlns:r="http://schemas.openxmlformats.org/officeDocument/2006/relationships" xmlns:p="http://schemas.openxmlformats.org/presentationml/2006/main">
+  <p:cSld>
+    <p:spTree>
+      <p:nvGrpSpPr>
+        <p:cNvPr id="1" name=""/>
+        <p:cNvGrpSpPr/>
+        <p:nvPr/>
+      </p:nvGrpSpPr>
+      <p:grpSpPr>
+        <a:xfrm>
+          <a:off x="0" y="0"/>
+          <a:ext cx="0" cy="0"/>
+          <a:chOff x="0" y="0"/>
+          <a:chExt cx="0" cy="0"/>
+        </a:xfrm>
+      </p:grpSpPr>
+      <p:sp>
+        <p:nvSpPr>
+          <p:cNvPr id="2" name="Slide Image Placeholder 1"/>
+          <p:cNvSpPr>
+            <a:spLocks noGrp="1" noRot="1" noChangeAspect="1"/>
+          </p:cNvSpPr>
+          <p:nvPr>
+            <p:ph type="sldImg"/>
+          </p:nvPr>
+        </p:nvSpPr>
+        <p:spPr/>
+      </p:sp>
+      <p:sp>
+        <p:nvSpPr>
+          <p:cNvPr id="3" name="Notes Placeholder 2"/>
+          <p:cNvSpPr>
+            <a:spLocks noGrp="1"/>
+          </p:cNvSpPr>
+          <p:nvPr>
+            <p:ph type="body" idx="1"/>
+          </p:nvPr>
+        </p:nvSpPr>
+        <p:spPr/>
+        <p:txBody>
+          <a:bodyPr/>
+          <a:lstStyle/>
+          <a:p>
+            <a:r>
+              <a:rPr lang="en-US" dirty="0"/>
+              <a:t>[Appendix A 사용법 — 교수님 질문 대비]
+Q&amp;A 대비용 백업 슬라이드. 만약 "원문 Discussion엔 대조군이 재발이 제일 적다고 되어 있는데?"라는 질문이 나오면 이 슬라이드를 띄우고:
+1. Table III에서 양성대조 vs PGE2군의 p값이 0.605로, 통계적으로 두 군이 구분되지 않는다는 점을 보여주고,
+2. 원문 스스로도 Results/Conclusions와 Discussion에서 서술이 갈린다는 점을 지적하고,
+3. 정확히는 "대조군과 PGE2군이 통계적으로 동률"이라고 답하면 됩니다.</a:t>
+            </a:r>
+            <a:endParaRPr lang="en-US" dirty="0"/>
+          </a:p>
+        </p:txBody>
+      </p:sp>
+      <p:sp>
+        <p:nvSpPr>
+          <p:cNvPr id="4" name="Slide Number Placeholder 3"/>
+          <p:cNvSpPr>
+            <a:spLocks noGrp="1"/>
+          </p:cNvSpPr>
+          <p:nvPr>
+            <p:ph type="sldNum" sz="quarter" idx="10"/>
+          </p:nvPr>
+        </p:nvSpPr>
+        <p:spPr/>
+        <p:txBody>
+          <a:bodyPr/>
+          <a:lstStyle/>
+          <a:p>
+            <a:fld id="{F7021451-1387-4CA6-816F-3879F97B5CBC}" type="slidenum">
+              <a:rPr lang="en-US"/>
+              <a:t>16</a:t>
             </a:fld>
             <a:endParaRPr lang="en-US"/>
           </a:p>
@@ -1526,9 +1623,11 @@
           <a:p>
             <a:r>
               <a:rPr lang="en-US" dirty="0"/>
-              <a:t>[대본 3:40~4:20]
-가속기 4주 결과입니다. 코르티코스테로이드군이 6.50mm로 가장 많이 이동했고, 비타민D 3.73mm, PGE2 2.80mm 순이었습니다. 대조군은 1.29mm에 그쳤고요. 세 약물 모두 대조군 대비 유의하게 가속됐고(p&lt;0.001), 조직검사 결과도 같은 순서로 나왔습니다.
-[발표 팁] 원문 Table I·II 기준. 보정기(2주) 동안은 모든 군에서 유의한 변화 없음(장치를 다시 수동적으로 부착해 이동량을 '고정') — 질문 나오면 이 부분도 설명 가능.</a:t>
+              <a:t>[대본 — 결과 슬라이드 진입 전 삽입]
+결과를 보기 전에 이 논문이 쓴 통계 방법을 간단히 짚고 가겠습니다.
+먼저 Shapiro-Wilk 검정으로 데이터가 정규분포를 따르는지 확인했고, 그다음 One-way ANOVA로 5개 군 평균을 한꺼번에 비교했습니다. ANOVA는 '군 사이에 차이가 있다'까지만 알려주기 때문에, 정확히 어느 군과 어느 군이 다른지는 Tukey post-hoc 검정으로 하나하나 다시 비교합니다. 그리고 같은 군을 시점별로 비교할 때는 — 예를 들어 같은 랫드의 가속기 직후와 보정 1주 후를 비교할 때는 — paired t-test를 썼습니다.
+p값은 이 차이가 우연히 나왔을 확률을 뜻하는데, 관행적으로 5% 미만이면 '통계적으로 유의하다'고 봅니다. 이 논문은 대부분 p&lt;0.001로 나와서, 우연일 가능성이 매우 낮다고 볼 수 있습니다.
+[발표 팁] 이 슬라이드는 통계를 잘 모르는 청중을 위한 배경 설명 슬라이드. 너무 길게 끌지 말고 1분 이내로 넘어갈 것 — 핵심은 'ANOVA는 전체 비교, Tukey는 쌍별 비교, paired t-test는 같은 군의 전후 비교'라는 역할 구분.</a:t>
             </a:r>
             <a:endParaRPr lang="en-US" dirty="0"/>
           </a:p>
@@ -1616,10 +1715,9 @@
           <a:p>
             <a:r>
               <a:rPr lang="en-US" dirty="0"/>
-              <a:t>[대본 4:20~5:10]
-이제 진짜 흥미로운 부분, 재발기 결과입니다. 2주간 재발량을 보면 코르티코스테로이드군이 -5.07mm로 가장 많이 되돌아갔고, 비타민D가 -2.75mm, 그리고 PGE2는 -0.86mm로 가장 적게 재발했습니다. 참고로 대조군은 -1.09mm였는데, PGE2와 거의 비슷한 수준이죠 — 이 부분은 나중에 부록에서 다시 설명하겠습니다.
-즉 가속기에서 가장 많이 이동했던 코르티코스테로이드군이, 재발기에서도 가장 많이 되돌아간 겁니다. 조직학적으로도 코르티코스테로이드군의 치주인대 폭이 가장 넓게 유지된 게 확인돼서, 임상 측정과 조직 소견이 서로 맞아떨어집니다.
-[발표 팁] 가속량이 클수록(코르티코스테로이드) 재발량도 크고, 가속량이 작을수록(PGE2) 재발도 작다는 '가속-재발 트레이드오프' 패턴이 핵심 메시지. 원문 Table III·VI·VII 기준.</a:t>
+              <a:t>[대본 3:40~4:20]
+가속기 4주 결과입니다. 코르티코스테로이드군이 6.50mm로 가장 많이 이동했고, 비타민D 3.73mm, PGE2 2.80mm 순이었습니다. 대조군은 1.29mm에 그쳤고요. 세 약물 모두 대조군 대비 유의하게 가속됐고(p&lt;0.001), 조직검사 결과도 같은 순서로 나왔습니다.
+[발표 팁] 원문 Table I·II 기준. 보정기(2주) 동안은 모든 군에서 유의한 변화 없음(장치를 다시 수동적으로 부착해 이동량을 '고정') — 질문 나오면 이 부분도 설명 가능.</a:t>
             </a:r>
             <a:endParaRPr lang="en-US" dirty="0"/>
           </a:p>
@@ -1707,9 +1805,10 @@
           <a:p>
             <a:r>
               <a:rPr lang="en-US" dirty="0"/>
-              <a:t>[대본 5:10~5:40]
-H&amp;E 염색 결과를 보면, 코르티코스테로이드군(C)의 치주인대 폭이 압박측·긴장측 모두에서 가장 넓게 유지된 반면, 대조군(A, B)은 가장 좁았습니다. 비타민D와 PGE2는 중간 수준이었고요. 같은 패턴이 ALP·TRAP 염색에서도 똑같이 나타났습니다.
-[발표 팁] 원문 Figure 3(H&amp;E)·4(ALP)·5(TRAP) 모두 같은 순서(코르티코스테로이드 &gt; 비타민D &gt; PGE2 &gt; 대조군)로 조직학적 활성을 보여줌. 임상측정치와 조직 소견이 일치한다는 점이 이 논문의 방법론적 강점.</a:t>
+              <a:t>[대본 4:20~5:10]
+이제 진짜 흥미로운 부분, 재발기 결과입니다. 2주간 재발량을 보면 코르티코스테로이드군이 -5.07mm로 가장 많이 되돌아갔고, 비타민D가 -2.75mm, 그리고 PGE2는 -0.86mm로 가장 적게 재발했습니다. 참고로 대조군은 -1.09mm였는데, PGE2와 거의 비슷한 수준이죠 — 이 부분은 나중에 부록에서 다시 설명하겠습니다.
+즉 가속기에서 가장 많이 이동했던 코르티코스테로이드군이, 재발기에서도 가장 많이 되돌아간 겁니다. 조직학적으로도 코르티코스테로이드군의 치주인대 폭이 가장 넓게 유지된 게 확인돼서, 임상 측정과 조직 소견이 서로 맞아떨어집니다.
+[발표 팁] 가속량이 클수록(코르티코스테로이드) 재발량도 크고, 가속량이 작을수록(PGE2) 재발도 작다는 '가속-재발 트레이드오프' 패턴이 핵심 메시지. 원문 Table III·VI·VII 기준.</a:t>
             </a:r>
             <a:endParaRPr lang="en-US" dirty="0"/>
           </a:p>
@@ -1797,15 +1896,9 @@
           <a:p>
             <a:r>
               <a:rPr lang="en-US" dirty="0"/>
-              <a:t>[대본 5:40~7:00 — 발표의 핵심]
-이 논문이 저희 수업들과 왜 연결되는지 설명드리겠습니다.
-세 약물은 사실 완전히 다른 종류의 약입니다. 코르티코스테로이드는 원래 항염증제로 알려져 있어서, 보통 '염증을 줄이면 골흡수도 줄어든다'고 생각하기 쉽습니다. 그런데 이 연구에서는 국소로 고용량 주입했을 때 오히려 파골세포형성을 직접 자극해서 골흡수를 가장 강하게 촉진했습니다. 같은 약물이라도 용량과 투여 경로, 표적 조직에 따라 정반대 효과가 날 수 있다는 걸 보여주는 사례입니다.
-비타민D는 지용성 호르몬이죠. 비타민D 수용체를 통해 유전자 발현을 조절하는 방식으로 작용하는데, 이건 저희가 구강생화학에서 배운 칼슘·인 대사 조절 호르몬이 전신뿐 아니라 국소 골개조에도 관여한다는 걸 실제로 보여주는 사례입니다.
-그리고 PGE2가 제일 흥미로운데요, 이건 원래 교정력이 가해지면 치주인대 세포가 COX 경로를 통해 스스로 만들어내는 물질입니다. 그러니까 이 실험에서 PGE2를 외부에서 주입한 건, 우리 몸이 자연적으로 하는 과정을 그대로 재현해본 거예요. 치과약리학1에서 배운 '교정력 → COX → PGE2 → RANKL → 파골세포'라는 신호전달 축을 이 실험이 직접 검증한 셈입니다.
-정리하면, 세 약물은 서로 다른 경로 — 유전자 억제, 호르몬 수용체, 지질 매개체 — 로 가지만 결국 같은 목적지인 파골세포 활성화에 도달합니다. 그런데 경로가 다르면 부작용과 재발 위험도 달라진다는 게 이 연구의 핵심입니다.
-여기서 교정학 기본 원칙과 연결되는 지점이 나옵니다. 압박-긴장설에 따르면 치아이동은 단순히 뼈가 흡수되는 것만으로 끝나는 게 아니라, 그 이후에 조직이 구조적으로 재조직화되는 과정이 뒤따라야 안정됩니다. 그런데 코르티코스테로이드처럼 흡수만 급격하게 밀어붙이면, 재조직화가 그 속도를 따라가지 못해서 조직이 불안정한 상태로 남고, 결국 장치를 제거했을 때 재발이 커지는 겁니다.
-그러니까 이 논문의 '가속이 클수록 재발도 크다'는 결과는, "치아이동 속도는 결국 생물학적 조직 재형성 속도가 제한한다"는 교정학의 기본 원리를 약리학적으로 다시 확인해준 셈입니다.
-[발표 팁] 이 슬라이드가 발표의 핵심 — 단순 결과 요약이 아니라 '왜 이 세 약물을 비교했는가'를 치과약리학·구강생화학·치과교정학 세 과목의 언어로 설명하는 지점. 발표 중 가장 천천히, 자신의 말로 설명할 것.</a:t>
+              <a:t>[대본 5:10~5:40]
+H&amp;E 염색 결과를 보면, 코르티코스테로이드군(C)의 치주인대 폭이 압박측·긴장측 모두에서 가장 넓게 유지된 반면, 대조군(A, B)은 가장 좁았습니다. 비타민D와 PGE2는 중간 수준이었고요. 같은 패턴이 ALP·TRAP 염색에서도 똑같이 나타났습니다.
+[발표 팁] 원문 Figure 3(H&amp;E)·4(ALP)·5(TRAP) 모두 같은 순서(코르티코스테로이드 &gt; 비타민D &gt; PGE2 &gt; 대조군)로 조직학적 활성을 보여줌. 임상측정치와 조직 소견이 일치한다는 점이 이 논문의 방법론적 강점.</a:t>
             </a:r>
             <a:endParaRPr lang="en-US" dirty="0"/>
           </a:p>
@@ -2556,7 +2649,7 @@
                 <a:ea typeface="맑은 고딕" pitchFamily="34" charset="-122"/>
                 <a:cs typeface="맑은 고딕" pitchFamily="34" charset="-120"/>
               </a:rPr>
-              <a:t>CRITICAL APPRAISAL</a:t>
+              <a:t>PHARMACOLOGICAL SIGNIFICANCE</a:t>
             </a:r>
             <a:endParaRPr lang="en-US" sz="1200" dirty="0"/>
           </a:p>
@@ -2595,7 +2688,7 @@
                 <a:ea typeface="맑은 고딕" pitchFamily="34" charset="-122"/>
                 <a:cs typeface="맑은 고딕" pitchFamily="34" charset="-120"/>
               </a:rPr>
-              <a:t>비평적 고찰</a:t>
+              <a:t>치과약리학적 의의 — 왜 이 세 약물인가</a:t>
             </a:r>
             <a:endParaRPr lang="en-US" sz="2400" dirty="0"/>
           </a:p>
@@ -2610,11 +2703,11 @@
         <p:spPr>
           <a:xfrm>
             <a:off x="640080" y="1600200"/>
-            <a:ext cx="3611880" cy="4434840"/>
+            <a:ext cx="3611880" cy="3063240"/>
           </a:xfrm>
           <a:prstGeom prst="roundRect">
             <a:avLst>
-              <a:gd name="adj" fmla="val 2532"/>
+              <a:gd name="adj" fmla="val 2985"/>
             </a:avLst>
           </a:prstGeom>
           <a:solidFill>
@@ -2632,139 +2725,212 @@
       </p:sp>
       <p:sp>
         <p:nvSpPr>
-          <p:cNvPr id="5" name="Text 3"/>
-          <p:cNvSpPr txBox="1"/>
-          <p:nvPr/>
-        </p:nvSpPr>
-        <p:spPr>
-          <a:xfrm>
-            <a:off x="914400" y="1801368"/>
-            <a:ext cx="3063240" cy="411480"/>
-          </a:xfrm>
-          <a:prstGeom prst="rect">
-            <a:avLst/>
-          </a:prstGeom>
-          <a:noFill/>
-          <a:ln/>
-        </p:spPr>
-        <p:txBody>
-          <a:bodyPr wrap="square" lIns="0" tIns="0" rIns="0" bIns="0" rtlCol="0" anchor="ctr"/>
-          <a:lstStyle/>
-          <a:p>
-            <a:pPr indent="0" marL="0">
-              <a:buNone/>
-            </a:pPr>
-            <a:r>
-              <a:rPr lang="en-US" sz="1550" b="1" dirty="0">
-                <a:solidFill>
-                  <a:srgbClr val="1B4965"/>
-                </a:solidFill>
-                <a:latin typeface="맑은 고딕" pitchFamily="34" charset="0"/>
-                <a:ea typeface="맑은 고딕" pitchFamily="34" charset="-122"/>
-                <a:cs typeface="맑은 고딕" pitchFamily="34" charset="-120"/>
-              </a:rPr>
-              <a:t>강점</a:t>
-            </a:r>
-            <a:endParaRPr lang="en-US" sz="1550" dirty="0"/>
-          </a:p>
-        </p:txBody>
-      </p:sp>
-      <p:sp>
-        <p:nvSpPr>
-          <p:cNvPr id="6" name="Text 4"/>
-          <p:cNvSpPr txBox="1"/>
-          <p:nvPr/>
-        </p:nvSpPr>
-        <p:spPr>
-          <a:xfrm>
-            <a:off x="914400" y="2286000"/>
-            <a:ext cx="3063240" cy="3566160"/>
-          </a:xfrm>
-          <a:prstGeom prst="rect">
-            <a:avLst/>
-          </a:prstGeom>
-          <a:noFill/>
-          <a:ln/>
-        </p:spPr>
-        <p:txBody>
-          <a:bodyPr wrap="square" lIns="0" tIns="0" rIns="0" bIns="0" rtlCol="0" anchor="t"/>
-          <a:lstStyle/>
-          <a:p>
-            <a:pPr indent="0" marL="0">
-              <a:lnSpc>
-                <a:spcPct val="135000"/>
-              </a:lnSpc>
-              <a:buNone/>
-            </a:pPr>
-            <a:r>
-              <a:rPr lang="en-US" sz="1100" dirty="0">
-                <a:solidFill>
-                  <a:srgbClr val="16232E"/>
-                </a:solidFill>
-                <a:latin typeface="맑은 고딕" pitchFamily="34" charset="0"/>
-                <a:ea typeface="맑은 고딕" pitchFamily="34" charset="-122"/>
-                <a:cs typeface="맑은 고딕" pitchFamily="34" charset="-120"/>
-              </a:rPr>
-              <a:t>•  ARRIVE 가이드라인 준수 + 윤리위 승인 + 배정 눈가림(무작위 배정)</a:t>
-            </a:r>
-            <a:endParaRPr lang="en-US" sz="1100" dirty="0"/>
-          </a:p>
-          <a:p>
-            <a:pPr indent="0" marL="0">
-              <a:lnSpc>
-                <a:spcPct val="135000"/>
-              </a:lnSpc>
-              <a:buNone/>
-            </a:pPr>
-            <a:r>
-              <a:rPr lang="en-US" sz="1100" dirty="0">
-                <a:solidFill>
-                  <a:srgbClr val="16232E"/>
-                </a:solidFill>
-                <a:latin typeface="맑은 고딕" pitchFamily="34" charset="0"/>
-                <a:ea typeface="맑은 고딕" pitchFamily="34" charset="-122"/>
-                <a:cs typeface="맑은 고딕" pitchFamily="34" charset="-120"/>
-              </a:rPr>
-              <a:t>•  임상측정(캘리퍼) + 조직학(PDL 폭, ALP/TRAP)으로 이중 검증</a:t>
-            </a:r>
-            <a:endParaRPr lang="en-US" sz="1100" dirty="0"/>
-          </a:p>
-          <a:p>
-            <a:pPr indent="0" marL="0">
-              <a:lnSpc>
-                <a:spcPct val="135000"/>
-              </a:lnSpc>
-              <a:buNone/>
-            </a:pPr>
-            <a:r>
-              <a:rPr lang="en-US" sz="1100" dirty="0">
-                <a:solidFill>
-                  <a:srgbClr val="16232E"/>
-                </a:solidFill>
-                <a:latin typeface="맑은 고딕" pitchFamily="34" charset="0"/>
-                <a:ea typeface="맑은 고딕" pitchFamily="34" charset="-122"/>
-                <a:cs typeface="맑은 고딕" pitchFamily="34" charset="-120"/>
-              </a:rPr>
-              <a:t>•  가속기·보정기·재발기를 모두 추적한 최초의 3약물 비교 — 선행연구 공백을 직접 채움</a:t>
-            </a:r>
-            <a:endParaRPr lang="en-US" sz="1100" dirty="0"/>
-          </a:p>
-        </p:txBody>
-      </p:sp>
-      <p:sp>
-        <p:nvSpPr>
-          <p:cNvPr id="7" name="Shape 5"/>
+          <p:cNvPr id="5" name="Shape 3"/>
           <p:cNvSpPr/>
           <p:nvPr/>
         </p:nvSpPr>
         <p:spPr>
           <a:xfrm>
-            <a:off x="4434840" y="1600200"/>
-            <a:ext cx="3611880" cy="4434840"/>
+            <a:off x="868680" y="1801368"/>
+            <a:ext cx="3154680" cy="777240"/>
           </a:xfrm>
           <a:prstGeom prst="roundRect">
             <a:avLst>
-              <a:gd name="adj" fmla="val 2532"/>
+              <a:gd name="adj" fmla="val 9412"/>
+            </a:avLst>
+          </a:prstGeom>
+          <a:solidFill>
+            <a:srgbClr val="D97706"/>
+          </a:solidFill>
+          <a:ln/>
+        </p:spPr>
+      </p:sp>
+      <p:sp>
+        <p:nvSpPr>
+          <p:cNvPr id="6" name="Text 4"/>
+          <p:cNvSpPr txBox="1"/>
+          <p:nvPr/>
+        </p:nvSpPr>
+        <p:spPr>
+          <a:xfrm>
+            <a:off x="868680" y="1856232"/>
+            <a:ext cx="3154680" cy="320040"/>
+          </a:xfrm>
+          <a:prstGeom prst="rect">
+            <a:avLst/>
+          </a:prstGeom>
+          <a:noFill/>
+          <a:ln/>
+        </p:spPr>
+        <p:txBody>
+          <a:bodyPr wrap="square" lIns="0" tIns="0" rIns="0" bIns="0" rtlCol="0" anchor="ctr"/>
+          <a:lstStyle/>
+          <a:p>
+            <a:pPr algn="ctr" indent="0" marL="0">
+              <a:buNone/>
+            </a:pPr>
+            <a:r>
+              <a:rPr lang="en-US" sz="1400" b="1" dirty="0">
+                <a:solidFill>
+                  <a:srgbClr val="FFFFFF"/>
+                </a:solidFill>
+                <a:latin typeface="맑은 고딕" pitchFamily="34" charset="0"/>
+                <a:ea typeface="맑은 고딕" pitchFamily="34" charset="-122"/>
+                <a:cs typeface="맑은 고딕" pitchFamily="34" charset="-120"/>
+              </a:rPr>
+              <a:t>코르티코스테로이드</a:t>
+            </a:r>
+            <a:endParaRPr lang="en-US" sz="1400" dirty="0"/>
+          </a:p>
+        </p:txBody>
+      </p:sp>
+      <p:sp>
+        <p:nvSpPr>
+          <p:cNvPr id="7" name="Text 5"/>
+          <p:cNvSpPr txBox="1"/>
+          <p:nvPr/>
+        </p:nvSpPr>
+        <p:spPr>
+          <a:xfrm>
+            <a:off x="868680" y="2167128"/>
+            <a:ext cx="3154680" cy="384048"/>
+          </a:xfrm>
+          <a:prstGeom prst="rect">
+            <a:avLst/>
+          </a:prstGeom>
+          <a:noFill/>
+          <a:ln/>
+        </p:spPr>
+        <p:txBody>
+          <a:bodyPr wrap="square" lIns="0" tIns="0" rIns="0" bIns="0" rtlCol="0" anchor="ctr"/>
+          <a:lstStyle/>
+          <a:p>
+            <a:pPr algn="ctr" indent="0" marL="0">
+              <a:lnSpc>
+                <a:spcPct val="110000"/>
+              </a:lnSpc>
+              <a:buNone/>
+            </a:pPr>
+            <a:r>
+              <a:rPr lang="en-US" sz="1050" i="1" dirty="0">
+                <a:solidFill>
+                  <a:srgbClr val="FFFFFF"/>
+                </a:solidFill>
+                <a:latin typeface="맑은 고딕" pitchFamily="34" charset="0"/>
+                <a:ea typeface="맑은 고딕" pitchFamily="34" charset="-122"/>
+                <a:cs typeface="맑은 고딕" pitchFamily="34" charset="-120"/>
+              </a:rPr>
+              <a:t>스테로이드성 항염증제</a:t>
+            </a:r>
+            <a:endParaRPr lang="en-US" sz="1050" dirty="0"/>
+          </a:p>
+          <a:p>
+            <a:pPr algn="ctr" indent="0" marL="0">
+              <a:lnSpc>
+                <a:spcPct val="110000"/>
+              </a:lnSpc>
+              <a:buNone/>
+            </a:pPr>
+            <a:r>
+              <a:rPr lang="en-US" sz="1050" i="1" dirty="0">
+                <a:solidFill>
+                  <a:srgbClr val="FFFFFF"/>
+                </a:solidFill>
+                <a:latin typeface="맑은 고딕" pitchFamily="34" charset="0"/>
+                <a:ea typeface="맑은 고딕" pitchFamily="34" charset="-122"/>
+                <a:cs typeface="맑은 고딕" pitchFamily="34" charset="-120"/>
+              </a:rPr>
+              <a:t>(역설적 골흡수 촉진)</a:t>
+            </a:r>
+            <a:endParaRPr lang="en-US" sz="1050" dirty="0"/>
+          </a:p>
+        </p:txBody>
+      </p:sp>
+      <p:sp>
+        <p:nvSpPr>
+          <p:cNvPr id="8" name="Text 6"/>
+          <p:cNvSpPr txBox="1"/>
+          <p:nvPr/>
+        </p:nvSpPr>
+        <p:spPr>
+          <a:xfrm>
+            <a:off x="868680" y="2697480"/>
+            <a:ext cx="3154680" cy="1783080"/>
+          </a:xfrm>
+          <a:prstGeom prst="rect">
+            <a:avLst/>
+          </a:prstGeom>
+          <a:noFill/>
+          <a:ln/>
+        </p:spPr>
+        <p:txBody>
+          <a:bodyPr wrap="square" lIns="0" tIns="0" rIns="0" bIns="0" rtlCol="0" anchor="t"/>
+          <a:lstStyle/>
+          <a:p>
+            <a:pPr indent="0" marL="0">
+              <a:lnSpc>
+                <a:spcPct val="132000"/>
+              </a:lnSpc>
+              <a:buNone/>
+            </a:pPr>
+            <a:r>
+              <a:rPr lang="en-US" sz="1150" dirty="0">
+                <a:solidFill>
+                  <a:srgbClr val="16232E"/>
+                </a:solidFill>
+                <a:latin typeface="맑은 고딕" pitchFamily="34" charset="0"/>
+                <a:ea typeface="맑은 고딕" pitchFamily="34" charset="-122"/>
+                <a:cs typeface="맑은 고딕" pitchFamily="34" charset="-120"/>
+              </a:rPr>
+              <a:t>국소 고용량 투여 ▷ 염증유전자 억제 + 파골세포형성 직접 자극 ▷ 골흡수 급가속</a:t>
+            </a:r>
+            <a:endParaRPr lang="en-US" sz="1150" dirty="0"/>
+          </a:p>
+          <a:p>
+            <a:pPr indent="0" marL="0">
+              <a:lnSpc>
+                <a:spcPct val="132000"/>
+              </a:lnSpc>
+              <a:buNone/>
+            </a:pPr>
+            <a:endParaRPr lang="en-US" sz="1150" dirty="0"/>
+          </a:p>
+          <a:p>
+            <a:pPr indent="0" marL="0">
+              <a:lnSpc>
+                <a:spcPct val="132000"/>
+              </a:lnSpc>
+              <a:buNone/>
+            </a:pPr>
+            <a:r>
+              <a:rPr lang="en-US" sz="1150" dirty="0">
+                <a:solidFill>
+                  <a:srgbClr val="16232E"/>
+                </a:solidFill>
+                <a:latin typeface="맑은 고딕" pitchFamily="34" charset="0"/>
+                <a:ea typeface="맑은 고딕" pitchFamily="34" charset="-122"/>
+                <a:cs typeface="맑은 고딕" pitchFamily="34" charset="-120"/>
+              </a:rPr>
+              <a:t>통념(항염증=골흡수 억제)과 반대 — 용량·투여경로·표적조직에 따라 작용이 뒤바뀌는 사례</a:t>
+            </a:r>
+            <a:endParaRPr lang="en-US" sz="1150" dirty="0"/>
+          </a:p>
+        </p:txBody>
+      </p:sp>
+      <p:sp>
+        <p:nvSpPr>
+          <p:cNvPr id="9" name="Shape 7"/>
+          <p:cNvSpPr/>
+          <p:nvPr/>
+        </p:nvSpPr>
+        <p:spPr>
+          <a:xfrm>
+            <a:off x="4434840" y="1600200"/>
+            <a:ext cx="3611880" cy="3063240"/>
+          </a:xfrm>
+          <a:prstGeom prst="roundRect">
+            <a:avLst>
+              <a:gd name="adj" fmla="val 2985"/>
             </a:avLst>
           </a:prstGeom>
           <a:solidFill>
@@ -2782,139 +2948,212 @@
       </p:sp>
       <p:sp>
         <p:nvSpPr>
-          <p:cNvPr id="8" name="Text 6"/>
-          <p:cNvSpPr txBox="1"/>
-          <p:nvPr/>
-        </p:nvSpPr>
-        <p:spPr>
-          <a:xfrm>
-            <a:off x="4709160" y="1801368"/>
-            <a:ext cx="3063240" cy="411480"/>
-          </a:xfrm>
-          <a:prstGeom prst="rect">
-            <a:avLst/>
-          </a:prstGeom>
-          <a:noFill/>
-          <a:ln/>
-        </p:spPr>
-        <p:txBody>
-          <a:bodyPr wrap="square" lIns="0" tIns="0" rIns="0" bIns="0" rtlCol="0" anchor="ctr"/>
-          <a:lstStyle/>
-          <a:p>
-            <a:pPr indent="0" marL="0">
-              <a:buNone/>
-            </a:pPr>
-            <a:r>
-              <a:rPr lang="en-US" sz="1550" b="1" dirty="0">
-                <a:solidFill>
-                  <a:srgbClr val="1B4965"/>
-                </a:solidFill>
-                <a:latin typeface="맑은 고딕" pitchFamily="34" charset="0"/>
-                <a:ea typeface="맑은 고딕" pitchFamily="34" charset="-122"/>
-                <a:cs typeface="맑은 고딕" pitchFamily="34" charset="-120"/>
-              </a:rPr>
-              <a:t>한계 / Bias 위험</a:t>
-            </a:r>
-            <a:endParaRPr lang="en-US" sz="1550" dirty="0"/>
-          </a:p>
-        </p:txBody>
-      </p:sp>
-      <p:sp>
-        <p:nvSpPr>
-          <p:cNvPr id="9" name="Text 7"/>
-          <p:cNvSpPr txBox="1"/>
-          <p:nvPr/>
-        </p:nvSpPr>
-        <p:spPr>
-          <a:xfrm>
-            <a:off x="4709160" y="2286000"/>
-            <a:ext cx="3063240" cy="3566160"/>
-          </a:xfrm>
-          <a:prstGeom prst="rect">
-            <a:avLst/>
-          </a:prstGeom>
-          <a:noFill/>
-          <a:ln/>
-        </p:spPr>
-        <p:txBody>
-          <a:bodyPr wrap="square" lIns="0" tIns="0" rIns="0" bIns="0" rtlCol="0" anchor="t"/>
-          <a:lstStyle/>
-          <a:p>
-            <a:pPr indent="0" marL="0">
-              <a:lnSpc>
-                <a:spcPct val="135000"/>
-              </a:lnSpc>
-              <a:buNone/>
-            </a:pPr>
-            <a:r>
-              <a:rPr lang="en-US" sz="1100" dirty="0">
-                <a:solidFill>
-                  <a:srgbClr val="16232E"/>
-                </a:solidFill>
-                <a:latin typeface="맑은 고딕" pitchFamily="34" charset="0"/>
-                <a:ea typeface="맑은 고딕" pitchFamily="34" charset="-122"/>
-                <a:cs typeface="맑은 고딕" pitchFamily="34" charset="-120"/>
-              </a:rPr>
-              <a:t>•  배정만 눈가림, 측정(outcome assessment)은 비맹검 — 원문: 주 연구자 1인이 개입·측정·평가를 전부 수행</a:t>
-            </a:r>
-            <a:endParaRPr lang="en-US" sz="1100" dirty="0"/>
-          </a:p>
-          <a:p>
-            <a:pPr indent="0" marL="0">
-              <a:lnSpc>
-                <a:spcPct val="135000"/>
-              </a:lnSpc>
-              <a:buNone/>
-            </a:pPr>
-            <a:r>
-              <a:rPr lang="en-US" sz="1100" dirty="0">
-                <a:solidFill>
-                  <a:srgbClr val="16232E"/>
-                </a:solidFill>
-                <a:latin typeface="맑은 고딕" pitchFamily="34" charset="0"/>
-                <a:ea typeface="맑은 고딕" pitchFamily="34" charset="-122"/>
-                <a:cs typeface="맑은 고딕" pitchFamily="34" charset="-120"/>
-              </a:rPr>
-              <a:t>•  약물당 용량 1개뿐 + 투여빈도도 매일·3일마다·매주로 제각각 — 공정 비교인지 불확실(용량-반응 분석 불가)</a:t>
-            </a:r>
-            <a:endParaRPr lang="en-US" sz="1100" dirty="0"/>
-          </a:p>
-          <a:p>
-            <a:pPr indent="0" marL="0">
-              <a:lnSpc>
-                <a:spcPct val="135000"/>
-              </a:lnSpc>
-              <a:buNone/>
-            </a:pPr>
-            <a:r>
-              <a:rPr lang="en-US" sz="1100" dirty="0">
-                <a:solidFill>
-                  <a:srgbClr val="16232E"/>
-                </a:solidFill>
-                <a:latin typeface="맑은 고딕" pitchFamily="34" charset="0"/>
-                <a:ea typeface="맑은 고딕" pitchFamily="34" charset="-122"/>
-                <a:cs typeface="맑은 고딕" pitchFamily="34" charset="-120"/>
-              </a:rPr>
-              <a:t>•  수컷 랫드만 사용 — 호르몬 변동은 배제했지만 여성(암컷) 적용 가능성은 미확인</a:t>
-            </a:r>
-            <a:endParaRPr lang="en-US" sz="1100" dirty="0"/>
-          </a:p>
-        </p:txBody>
-      </p:sp>
-      <p:sp>
-        <p:nvSpPr>
           <p:cNvPr id="10" name="Shape 8"/>
           <p:cNvSpPr/>
           <p:nvPr/>
         </p:nvSpPr>
         <p:spPr>
           <a:xfrm>
-            <a:off x="8229600" y="1600200"/>
-            <a:ext cx="3611880" cy="4434840"/>
+            <a:off x="4663440" y="1801368"/>
+            <a:ext cx="3154680" cy="777240"/>
           </a:xfrm>
           <a:prstGeom prst="roundRect">
             <a:avLst>
-              <a:gd name="adj" fmla="val 2532"/>
+              <a:gd name="adj" fmla="val 9412"/>
+            </a:avLst>
+          </a:prstGeom>
+          <a:solidFill>
+            <a:srgbClr val="3D7EA6"/>
+          </a:solidFill>
+          <a:ln/>
+        </p:spPr>
+      </p:sp>
+      <p:sp>
+        <p:nvSpPr>
+          <p:cNvPr id="11" name="Text 9"/>
+          <p:cNvSpPr txBox="1"/>
+          <p:nvPr/>
+        </p:nvSpPr>
+        <p:spPr>
+          <a:xfrm>
+            <a:off x="4663440" y="1856232"/>
+            <a:ext cx="3154680" cy="320040"/>
+          </a:xfrm>
+          <a:prstGeom prst="rect">
+            <a:avLst/>
+          </a:prstGeom>
+          <a:noFill/>
+          <a:ln/>
+        </p:spPr>
+        <p:txBody>
+          <a:bodyPr wrap="square" lIns="0" tIns="0" rIns="0" bIns="0" rtlCol="0" anchor="ctr"/>
+          <a:lstStyle/>
+          <a:p>
+            <a:pPr algn="ctr" indent="0" marL="0">
+              <a:buNone/>
+            </a:pPr>
+            <a:r>
+              <a:rPr lang="en-US" sz="1400" b="1" dirty="0">
+                <a:solidFill>
+                  <a:srgbClr val="FFFFFF"/>
+                </a:solidFill>
+                <a:latin typeface="맑은 고딕" pitchFamily="34" charset="0"/>
+                <a:ea typeface="맑은 고딕" pitchFamily="34" charset="-122"/>
+                <a:cs typeface="맑은 고딕" pitchFamily="34" charset="-120"/>
+              </a:rPr>
+              <a:t>비타민D</a:t>
+            </a:r>
+            <a:endParaRPr lang="en-US" sz="1400" dirty="0"/>
+          </a:p>
+        </p:txBody>
+      </p:sp>
+      <p:sp>
+        <p:nvSpPr>
+          <p:cNvPr id="12" name="Text 10"/>
+          <p:cNvSpPr txBox="1"/>
+          <p:nvPr/>
+        </p:nvSpPr>
+        <p:spPr>
+          <a:xfrm>
+            <a:off x="4663440" y="2167128"/>
+            <a:ext cx="3154680" cy="384048"/>
+          </a:xfrm>
+          <a:prstGeom prst="rect">
+            <a:avLst/>
+          </a:prstGeom>
+          <a:noFill/>
+          <a:ln/>
+        </p:spPr>
+        <p:txBody>
+          <a:bodyPr wrap="square" lIns="0" tIns="0" rIns="0" bIns="0" rtlCol="0" anchor="ctr"/>
+          <a:lstStyle/>
+          <a:p>
+            <a:pPr algn="ctr" indent="0" marL="0">
+              <a:lnSpc>
+                <a:spcPct val="110000"/>
+              </a:lnSpc>
+              <a:buNone/>
+            </a:pPr>
+            <a:r>
+              <a:rPr lang="en-US" sz="1050" i="1" dirty="0">
+                <a:solidFill>
+                  <a:srgbClr val="FFFFFF"/>
+                </a:solidFill>
+                <a:latin typeface="맑은 고딕" pitchFamily="34" charset="0"/>
+                <a:ea typeface="맑은 고딕" pitchFamily="34" charset="-122"/>
+                <a:cs typeface="맑은 고딕" pitchFamily="34" charset="-120"/>
+              </a:rPr>
+              <a:t>지용성 호르몬</a:t>
+            </a:r>
+            <a:endParaRPr lang="en-US" sz="1050" dirty="0"/>
+          </a:p>
+          <a:p>
+            <a:pPr algn="ctr" indent="0" marL="0">
+              <a:lnSpc>
+                <a:spcPct val="110000"/>
+              </a:lnSpc>
+              <a:buNone/>
+            </a:pPr>
+            <a:r>
+              <a:rPr lang="en-US" sz="1050" i="1" dirty="0">
+                <a:solidFill>
+                  <a:srgbClr val="FFFFFF"/>
+                </a:solidFill>
+                <a:latin typeface="맑은 고딕" pitchFamily="34" charset="0"/>
+                <a:ea typeface="맑은 고딕" pitchFamily="34" charset="-122"/>
+                <a:cs typeface="맑은 고딕" pitchFamily="34" charset="-120"/>
+              </a:rPr>
+              <a:t>(핵수용체 리간드)</a:t>
+            </a:r>
+            <a:endParaRPr lang="en-US" sz="1050" dirty="0"/>
+          </a:p>
+        </p:txBody>
+      </p:sp>
+      <p:sp>
+        <p:nvSpPr>
+          <p:cNvPr id="13" name="Text 11"/>
+          <p:cNvSpPr txBox="1"/>
+          <p:nvPr/>
+        </p:nvSpPr>
+        <p:spPr>
+          <a:xfrm>
+            <a:off x="4663440" y="2697480"/>
+            <a:ext cx="3154680" cy="1783080"/>
+          </a:xfrm>
+          <a:prstGeom prst="rect">
+            <a:avLst/>
+          </a:prstGeom>
+          <a:noFill/>
+          <a:ln/>
+        </p:spPr>
+        <p:txBody>
+          <a:bodyPr wrap="square" lIns="0" tIns="0" rIns="0" bIns="0" rtlCol="0" anchor="t"/>
+          <a:lstStyle/>
+          <a:p>
+            <a:pPr indent="0" marL="0">
+              <a:lnSpc>
+                <a:spcPct val="132000"/>
+              </a:lnSpc>
+              <a:buNone/>
+            </a:pPr>
+            <a:r>
+              <a:rPr lang="en-US" sz="1150" dirty="0">
+                <a:solidFill>
+                  <a:srgbClr val="16232E"/>
+                </a:solidFill>
+                <a:latin typeface="맑은 고딕" pitchFamily="34" charset="0"/>
+                <a:ea typeface="맑은 고딕" pitchFamily="34" charset="-122"/>
+                <a:cs typeface="맑은 고딕" pitchFamily="34" charset="-120"/>
+              </a:rPr>
+              <a:t>VDR(비타민D수용체) 결합 ▷ 골개조 관련 유전자 발현 조절 ▷ 파골세포 활성 + 면역매개체 동시 조절 ▷ 완만한 가속</a:t>
+            </a:r>
+            <a:endParaRPr lang="en-US" sz="1150" dirty="0"/>
+          </a:p>
+          <a:p>
+            <a:pPr indent="0" marL="0">
+              <a:lnSpc>
+                <a:spcPct val="132000"/>
+              </a:lnSpc>
+              <a:buNone/>
+            </a:pPr>
+            <a:endParaRPr lang="en-US" sz="1150" dirty="0"/>
+          </a:p>
+          <a:p>
+            <a:pPr indent="0" marL="0">
+              <a:lnSpc>
+                <a:spcPct val="132000"/>
+              </a:lnSpc>
+              <a:buNone/>
+            </a:pPr>
+            <a:r>
+              <a:rPr lang="en-US" sz="1150" dirty="0">
+                <a:solidFill>
+                  <a:srgbClr val="16232E"/>
+                </a:solidFill>
+                <a:latin typeface="맑은 고딕" pitchFamily="34" charset="0"/>
+                <a:ea typeface="맑은 고딕" pitchFamily="34" charset="-122"/>
+                <a:cs typeface="맑은 고딕" pitchFamily="34" charset="-120"/>
+              </a:rPr>
+              <a:t>전신 칼슘 대사 호르몬이 국소 골개조에도 관여하는 사례</a:t>
+            </a:r>
+            <a:endParaRPr lang="en-US" sz="1150" dirty="0"/>
+          </a:p>
+        </p:txBody>
+      </p:sp>
+      <p:sp>
+        <p:nvSpPr>
+          <p:cNvPr id="14" name="Shape 12"/>
+          <p:cNvSpPr/>
+          <p:nvPr/>
+        </p:nvSpPr>
+        <p:spPr>
+          <a:xfrm>
+            <a:off x="8229600" y="1600200"/>
+            <a:ext cx="3611880" cy="3063240"/>
+          </a:xfrm>
+          <a:prstGeom prst="roundRect">
+            <a:avLst>
+              <a:gd name="adj" fmla="val 2985"/>
             </a:avLst>
           </a:prstGeom>
           <a:solidFill>
@@ -2932,14 +3171,36 @@
       </p:sp>
       <p:sp>
         <p:nvSpPr>
-          <p:cNvPr id="11" name="Text 9"/>
-          <p:cNvSpPr txBox="1"/>
-          <p:nvPr/>
-        </p:nvSpPr>
-        <p:spPr>
-          <a:xfrm>
-            <a:off x="8503920" y="1801368"/>
-            <a:ext cx="3063240" cy="411480"/>
+          <p:cNvPr id="15" name="Shape 13"/>
+          <p:cNvSpPr/>
+          <p:nvPr/>
+        </p:nvSpPr>
+        <p:spPr>
+          <a:xfrm>
+            <a:off x="8458200" y="1801368"/>
+            <a:ext cx="3154680" cy="777240"/>
+          </a:xfrm>
+          <a:prstGeom prst="roundRect">
+            <a:avLst>
+              <a:gd name="adj" fmla="val 9412"/>
+            </a:avLst>
+          </a:prstGeom>
+          <a:solidFill>
+            <a:srgbClr val="2F855A"/>
+          </a:solidFill>
+          <a:ln/>
+        </p:spPr>
+      </p:sp>
+      <p:sp>
+        <p:nvSpPr>
+          <p:cNvPr id="16" name="Text 14"/>
+          <p:cNvSpPr txBox="1"/>
+          <p:nvPr/>
+        </p:nvSpPr>
+        <p:spPr>
+          <a:xfrm>
+            <a:off x="8458200" y="1856232"/>
+            <a:ext cx="3154680" cy="320040"/>
           </a:xfrm>
           <a:prstGeom prst="rect">
             <a:avLst/>
@@ -2951,11 +3212,215 @@
           <a:bodyPr wrap="square" lIns="0" tIns="0" rIns="0" bIns="0" rtlCol="0" anchor="ctr"/>
           <a:lstStyle/>
           <a:p>
-            <a:pPr indent="0" marL="0">
-              <a:buNone/>
-            </a:pPr>
-            <a:r>
-              <a:rPr lang="en-US" sz="1550" b="1" dirty="0">
+            <a:pPr algn="ctr" indent="0" marL="0">
+              <a:buNone/>
+            </a:pPr>
+            <a:r>
+              <a:rPr lang="en-US" sz="1400" b="1" dirty="0">
+                <a:solidFill>
+                  <a:srgbClr val="FFFFFF"/>
+                </a:solidFill>
+                <a:latin typeface="맑은 고딕" pitchFamily="34" charset="0"/>
+                <a:ea typeface="맑은 고딕" pitchFamily="34" charset="-122"/>
+                <a:cs typeface="맑은 고딕" pitchFamily="34" charset="-120"/>
+              </a:rPr>
+              <a:t>PGE₂</a:t>
+            </a:r>
+            <a:endParaRPr lang="en-US" sz="1400" dirty="0"/>
+          </a:p>
+        </p:txBody>
+      </p:sp>
+      <p:sp>
+        <p:nvSpPr>
+          <p:cNvPr id="17" name="Text 15"/>
+          <p:cNvSpPr txBox="1"/>
+          <p:nvPr/>
+        </p:nvSpPr>
+        <p:spPr>
+          <a:xfrm>
+            <a:off x="8458200" y="2167128"/>
+            <a:ext cx="3154680" cy="384048"/>
+          </a:xfrm>
+          <a:prstGeom prst="rect">
+            <a:avLst/>
+          </a:prstGeom>
+          <a:noFill/>
+          <a:ln/>
+        </p:spPr>
+        <p:txBody>
+          <a:bodyPr wrap="square" lIns="0" tIns="0" rIns="0" bIns="0" rtlCol="0" anchor="ctr"/>
+          <a:lstStyle/>
+          <a:p>
+            <a:pPr algn="ctr" indent="0" marL="0">
+              <a:lnSpc>
+                <a:spcPct val="110000"/>
+              </a:lnSpc>
+              <a:buNone/>
+            </a:pPr>
+            <a:r>
+              <a:rPr lang="en-US" sz="1050" i="1" dirty="0">
+                <a:solidFill>
+                  <a:srgbClr val="FFFFFF"/>
+                </a:solidFill>
+                <a:latin typeface="맑은 고딕" pitchFamily="34" charset="0"/>
+                <a:ea typeface="맑은 고딕" pitchFamily="34" charset="-122"/>
+                <a:cs typeface="맑은 고딕" pitchFamily="34" charset="-120"/>
+              </a:rPr>
+              <a:t>지질 매개체(autacoid)</a:t>
+            </a:r>
+            <a:endParaRPr lang="en-US" sz="1050" dirty="0"/>
+          </a:p>
+          <a:p>
+            <a:pPr algn="ctr" indent="0" marL="0">
+              <a:lnSpc>
+                <a:spcPct val="110000"/>
+              </a:lnSpc>
+              <a:buNone/>
+            </a:pPr>
+            <a:r>
+              <a:rPr lang="en-US" sz="1050" i="1" dirty="0">
+                <a:solidFill>
+                  <a:srgbClr val="FFFFFF"/>
+                </a:solidFill>
+                <a:latin typeface="맑은 고딕" pitchFamily="34" charset="0"/>
+                <a:ea typeface="맑은 고딕" pitchFamily="34" charset="-122"/>
+                <a:cs typeface="맑은 고딕" pitchFamily="34" charset="-120"/>
+              </a:rPr>
+              <a:t>= 교정력의 자연 신호물질</a:t>
+            </a:r>
+            <a:endParaRPr lang="en-US" sz="1050" dirty="0"/>
+          </a:p>
+        </p:txBody>
+      </p:sp>
+      <p:sp>
+        <p:nvSpPr>
+          <p:cNvPr id="18" name="Text 16"/>
+          <p:cNvSpPr txBox="1"/>
+          <p:nvPr/>
+        </p:nvSpPr>
+        <p:spPr>
+          <a:xfrm>
+            <a:off x="8458200" y="2697480"/>
+            <a:ext cx="3154680" cy="1783080"/>
+          </a:xfrm>
+          <a:prstGeom prst="rect">
+            <a:avLst/>
+          </a:prstGeom>
+          <a:noFill/>
+          <a:ln/>
+        </p:spPr>
+        <p:txBody>
+          <a:bodyPr wrap="square" lIns="0" tIns="0" rIns="0" bIns="0" rtlCol="0" anchor="t"/>
+          <a:lstStyle/>
+          <a:p>
+            <a:pPr indent="0" marL="0">
+              <a:lnSpc>
+                <a:spcPct val="132000"/>
+              </a:lnSpc>
+              <a:buNone/>
+            </a:pPr>
+            <a:r>
+              <a:rPr lang="en-US" sz="1150" dirty="0">
+                <a:solidFill>
+                  <a:srgbClr val="16232E"/>
+                </a:solidFill>
+                <a:latin typeface="맑은 고딕" pitchFamily="34" charset="0"/>
+                <a:ea typeface="맑은 고딕" pitchFamily="34" charset="-122"/>
+                <a:cs typeface="맑은 고딕" pitchFamily="34" charset="-120"/>
+              </a:rPr>
+              <a:t>[자연 경로] 교정력 ▷ COX-2 ▷ PGE2 자체 생성 ▷ RANKL ▷ 파골세포</a:t>
+            </a:r>
+            <a:endParaRPr lang="en-US" sz="1150" dirty="0"/>
+          </a:p>
+          <a:p>
+            <a:pPr indent="0" marL="0">
+              <a:lnSpc>
+                <a:spcPct val="132000"/>
+              </a:lnSpc>
+              <a:buNone/>
+            </a:pPr>
+            <a:endParaRPr lang="en-US" sz="1150" dirty="0"/>
+          </a:p>
+          <a:p>
+            <a:pPr indent="0" marL="0">
+              <a:lnSpc>
+                <a:spcPct val="132000"/>
+              </a:lnSpc>
+              <a:buNone/>
+            </a:pPr>
+            <a:r>
+              <a:rPr lang="en-US" sz="1150" dirty="0">
+                <a:solidFill>
+                  <a:srgbClr val="16232E"/>
+                </a:solidFill>
+                <a:latin typeface="맑은 고딕" pitchFamily="34" charset="0"/>
+                <a:ea typeface="맑은 고딕" pitchFamily="34" charset="-122"/>
+                <a:cs typeface="맑은 고딕" pitchFamily="34" charset="-120"/>
+              </a:rPr>
+              <a:t>이 실험은 PGE2를 외부 직접 주입 — 경로 중간부터 재현·검증</a:t>
+            </a:r>
+            <a:endParaRPr lang="en-US" sz="1150" dirty="0"/>
+          </a:p>
+        </p:txBody>
+      </p:sp>
+      <p:sp>
+        <p:nvSpPr>
+          <p:cNvPr id="19" name="Shape 17"/>
+          <p:cNvSpPr/>
+          <p:nvPr/>
+        </p:nvSpPr>
+        <p:spPr>
+          <a:xfrm>
+            <a:off x="640080" y="4892040"/>
+            <a:ext cx="10908792" cy="1463040"/>
+          </a:xfrm>
+          <a:prstGeom prst="roundRect">
+            <a:avLst>
+              <a:gd name="adj" fmla="val 6250"/>
+            </a:avLst>
+          </a:prstGeom>
+          <a:solidFill>
+            <a:srgbClr val="EAF2F7"/>
+          </a:solidFill>
+          <a:ln/>
+          <a:effectLst>
+            <a:outerShdw sx="100000" sy="100000" kx="0" ky="0" algn="bl" rotWithShape="0" blurRad="76200" dist="25400" dir="5400000">
+              <a:srgbClr val="16232E">
+                <a:alpha val="10000"/>
+              </a:srgbClr>
+            </a:outerShdw>
+          </a:effectLst>
+        </p:spPr>
+      </p:sp>
+      <p:sp>
+        <p:nvSpPr>
+          <p:cNvPr id="20" name="Text 18"/>
+          <p:cNvSpPr txBox="1"/>
+          <p:nvPr/>
+        </p:nvSpPr>
+        <p:spPr>
+          <a:xfrm>
+            <a:off x="914400" y="5047488"/>
+            <a:ext cx="10360152" cy="1188720"/>
+          </a:xfrm>
+          <a:prstGeom prst="rect">
+            <a:avLst/>
+          </a:prstGeom>
+          <a:noFill/>
+          <a:ln/>
+        </p:spPr>
+        <p:txBody>
+          <a:bodyPr wrap="square" lIns="0" tIns="0" rIns="0" bIns="0" rtlCol="0" anchor="ctr"/>
+          <a:lstStyle/>
+          <a:p>
+            <a:pPr indent="0" marL="0">
+              <a:lnSpc>
+                <a:spcPct val="130000"/>
+              </a:lnSpc>
+              <a:buNone/>
+            </a:pPr>
+            <a:r>
+              <a:rPr lang="en-US" sz="1200" b="1" dirty="0">
                 <a:solidFill>
                   <a:srgbClr val="1B4965"/>
                 </a:solidFill>
@@ -2963,41 +3428,16 @@
                 <a:ea typeface="맑은 고딕" pitchFamily="34" charset="-122"/>
                 <a:cs typeface="맑은 고딕" pitchFamily="34" charset="-120"/>
               </a:rPr>
-              <a:t>임상 적용 가능성</a:t>
-            </a:r>
-            <a:endParaRPr lang="en-US" sz="1550" dirty="0"/>
-          </a:p>
-        </p:txBody>
-      </p:sp>
-      <p:sp>
-        <p:nvSpPr>
-          <p:cNvPr id="12" name="Text 10"/>
-          <p:cNvSpPr txBox="1"/>
-          <p:nvPr/>
-        </p:nvSpPr>
-        <p:spPr>
-          <a:xfrm>
-            <a:off x="8503920" y="2286000"/>
-            <a:ext cx="3063240" cy="3566160"/>
-          </a:xfrm>
-          <a:prstGeom prst="rect">
-            <a:avLst/>
-          </a:prstGeom>
-          <a:noFill/>
-          <a:ln/>
-        </p:spPr>
-        <p:txBody>
-          <a:bodyPr wrap="square" lIns="0" tIns="0" rIns="0" bIns="0" rtlCol="0" anchor="t"/>
-          <a:lstStyle/>
-          <a:p>
+              <a:t>핵심 시사점  </a:t>
+            </a:r>
             <a:pPr indent="0" marL="0">
               <a:lnSpc>
-                <a:spcPct val="135000"/>
+                <a:spcPct val="130000"/>
               </a:lnSpc>
               <a:buNone/>
             </a:pPr>
             <a:r>
-              <a:rPr lang="en-US" sz="1100" dirty="0">
+              <a:rPr lang="en-US" sz="1200" dirty="0">
                 <a:solidFill>
                   <a:srgbClr val="16232E"/>
                 </a:solidFill>
@@ -3005,19 +3445,34 @@
                 <a:ea typeface="맑은 고딕" pitchFamily="34" charset="-122"/>
                 <a:cs typeface="맑은 고딕" pitchFamily="34" charset="-120"/>
               </a:rPr>
-              <a:t>•  코르티코스테로이드는 가속 효과 크지만 재발 위험도 가장 큼 — 전신 스테로이드 복용 중인 교정환자에서 특히 신중한 판단 필요</a:t>
-            </a:r>
-            <a:endParaRPr lang="en-US" sz="1100" dirty="0"/>
-          </a:p>
-          <a:p>
+              <a:t>세 약물은 서로 다른 약리학적 경로(유전자 억제·호르몬 수용체·지질 매개체)로 결국 같은 종착점인 '파골세포 활성화'에 도달한다 — 그러나 경로가 다르면 부작용·재발 위험도 달라진다.
+</a:t>
+            </a:r>
             <a:pPr indent="0" marL="0">
               <a:lnSpc>
-                <a:spcPct val="135000"/>
+                <a:spcPct val="130000"/>
               </a:lnSpc>
               <a:buNone/>
             </a:pPr>
             <a:r>
-              <a:rPr lang="en-US" sz="1100" dirty="0">
+              <a:rPr lang="en-US" sz="1200" b="1" dirty="0">
+                <a:solidFill>
+                  <a:srgbClr val="1B4965"/>
+                </a:solidFill>
+                <a:latin typeface="맑은 고딕" pitchFamily="34" charset="0"/>
+                <a:ea typeface="맑은 고딕" pitchFamily="34" charset="-122"/>
+                <a:cs typeface="맑은 고딕" pitchFamily="34" charset="-120"/>
+              </a:rPr>
+              <a:t>치과교정학 기본원칙과의 연결  </a:t>
+            </a:r>
+            <a:pPr indent="0" marL="0">
+              <a:lnSpc>
+                <a:spcPct val="130000"/>
+              </a:lnSpc>
+              <a:buNone/>
+            </a:pPr>
+            <a:r>
+              <a:rPr lang="en-US" sz="1200" dirty="0">
                 <a:solidFill>
                   <a:srgbClr val="16232E"/>
                 </a:solidFill>
@@ -3025,35 +3480,15 @@
                 <a:ea typeface="맑은 고딕" pitchFamily="34" charset="-122"/>
                 <a:cs typeface="맑은 고딕" pitchFamily="34" charset="-120"/>
               </a:rPr>
-              <a:t>•  비타민D·PGE₂는 가속은 온건해도 재발이 적어 상대적으로 안전한 보조제일 수 있음 — 다만 PGE2는 고용량 시 치근흡수 위험 보고 있음(타 문헌)</a:t>
-            </a:r>
-            <a:endParaRPr lang="en-US" sz="1100" dirty="0"/>
-          </a:p>
-          <a:p>
-            <a:pPr indent="0" marL="0">
-              <a:lnSpc>
-                <a:spcPct val="135000"/>
-              </a:lnSpc>
-              <a:buNone/>
-            </a:pPr>
-            <a:r>
-              <a:rPr lang="en-US" sz="1100" dirty="0">
-                <a:solidFill>
-                  <a:srgbClr val="16232E"/>
-                </a:solidFill>
-                <a:latin typeface="맑은 고딕" pitchFamily="34" charset="0"/>
-                <a:ea typeface="맑은 고딕" pitchFamily="34" charset="-122"/>
-                <a:cs typeface="맑은 고딕" pitchFamily="34" charset="-120"/>
-              </a:rPr>
-              <a:t>•  동물(랫드)실험 — 종간 차이로 사람에 그대로 적용은 어려움(저자도 인정), 용량-반응 확립을 위한 후속 임상연구 필요</a:t>
-            </a:r>
-            <a:endParaRPr lang="en-US" sz="1100" dirty="0"/>
-          </a:p>
-        </p:txBody>
-      </p:sp>
-      <p:sp>
-        <p:nvSpPr>
-          <p:cNvPr id="13" name="Text 11"/>
+              <a:t>압박-긴장설(pressure-tension theory)에서 치아이동은 골흡수뿐 아니라 흡수 이후의 '구조적 재조직화'가 뒤따라야 안정된다 — 코르티코스테로이드처럼 흡수만 급가속하면 재조직화가 못 따라가 재발이 커진다. 이 논문의 '가속↑ = 재발↑' 결과는 곧 "치아이동 속도는 생물학적 재형성 속도가 제한한다"는 교정학 기본원칙을 약리학적으로 재확인한 것이다.</a:t>
+            </a:r>
+            <a:endParaRPr lang="en-US" sz="1200" dirty="0"/>
+          </a:p>
+        </p:txBody>
+      </p:sp>
+      <p:sp>
+        <p:nvSpPr>
+          <p:cNvPr id="21" name="Text 19"/>
           <p:cNvSpPr txBox="1"/>
           <p:nvPr/>
         </p:nvSpPr>
@@ -3155,7 +3590,7 @@
                 <a:ea typeface="맑은 고딕" pitchFamily="34" charset="-122"/>
                 <a:cs typeface="맑은 고딕" pitchFamily="34" charset="-120"/>
               </a:rPr>
-              <a:t>DISCUSSION</a:t>
+              <a:t>CRITICAL APPRAISAL</a:t>
             </a:r>
             <a:endParaRPr lang="en-US" sz="1200" dirty="0"/>
           </a:p>
@@ -3194,7 +3629,7 @@
                 <a:ea typeface="맑은 고딕" pitchFamily="34" charset="-122"/>
                 <a:cs typeface="맑은 고딕" pitchFamily="34" charset="-120"/>
               </a:rPr>
-              <a:t>기타 연구와의 결과 비교</a:t>
+              <a:t>비평적 고찰</a:t>
             </a:r>
             <a:endParaRPr lang="en-US" sz="2400" dirty="0"/>
           </a:p>
@@ -3208,12 +3643,12 @@
         </p:nvSpPr>
         <p:spPr>
           <a:xfrm>
-            <a:off x="640080" y="1691640"/>
-            <a:ext cx="10908792" cy="1234440"/>
+            <a:off x="640080" y="1600200"/>
+            <a:ext cx="3611880" cy="4434840"/>
           </a:xfrm>
           <a:prstGeom prst="roundRect">
             <a:avLst>
-              <a:gd name="adj" fmla="val 7407"/>
+              <a:gd name="adj" fmla="val 2532"/>
             </a:avLst>
           </a:prstGeom>
           <a:solidFill>
@@ -3231,121 +3666,139 @@
       </p:sp>
       <p:sp>
         <p:nvSpPr>
-          <p:cNvPr id="5" name="Shape 3"/>
+          <p:cNvPr id="5" name="Text 3"/>
+          <p:cNvSpPr txBox="1"/>
+          <p:nvPr/>
+        </p:nvSpPr>
+        <p:spPr>
+          <a:xfrm>
+            <a:off x="914400" y="1801368"/>
+            <a:ext cx="3063240" cy="411480"/>
+          </a:xfrm>
+          <a:prstGeom prst="rect">
+            <a:avLst/>
+          </a:prstGeom>
+          <a:noFill/>
+          <a:ln/>
+        </p:spPr>
+        <p:txBody>
+          <a:bodyPr wrap="square" lIns="0" tIns="0" rIns="0" bIns="0" rtlCol="0" anchor="ctr"/>
+          <a:lstStyle/>
+          <a:p>
+            <a:pPr indent="0" marL="0">
+              <a:buNone/>
+            </a:pPr>
+            <a:r>
+              <a:rPr lang="en-US" sz="1550" b="1" dirty="0">
+                <a:solidFill>
+                  <a:srgbClr val="1B4965"/>
+                </a:solidFill>
+                <a:latin typeface="맑은 고딕" pitchFamily="34" charset="0"/>
+                <a:ea typeface="맑은 고딕" pitchFamily="34" charset="-122"/>
+                <a:cs typeface="맑은 고딕" pitchFamily="34" charset="-120"/>
+              </a:rPr>
+              <a:t>강점</a:t>
+            </a:r>
+            <a:endParaRPr lang="en-US" sz="1550" dirty="0"/>
+          </a:p>
+        </p:txBody>
+      </p:sp>
+      <p:sp>
+        <p:nvSpPr>
+          <p:cNvPr id="6" name="Text 4"/>
+          <p:cNvSpPr txBox="1"/>
+          <p:nvPr/>
+        </p:nvSpPr>
+        <p:spPr>
+          <a:xfrm>
+            <a:off x="914400" y="2286000"/>
+            <a:ext cx="3063240" cy="3566160"/>
+          </a:xfrm>
+          <a:prstGeom prst="rect">
+            <a:avLst/>
+          </a:prstGeom>
+          <a:noFill/>
+          <a:ln/>
+        </p:spPr>
+        <p:txBody>
+          <a:bodyPr wrap="square" lIns="0" tIns="0" rIns="0" bIns="0" rtlCol="0" anchor="t"/>
+          <a:lstStyle/>
+          <a:p>
+            <a:pPr indent="0" marL="0">
+              <a:lnSpc>
+                <a:spcPct val="135000"/>
+              </a:lnSpc>
+              <a:buNone/>
+            </a:pPr>
+            <a:r>
+              <a:rPr lang="en-US" sz="1100" dirty="0">
+                <a:solidFill>
+                  <a:srgbClr val="16232E"/>
+                </a:solidFill>
+                <a:latin typeface="맑은 고딕" pitchFamily="34" charset="0"/>
+                <a:ea typeface="맑은 고딕" pitchFamily="34" charset="-122"/>
+                <a:cs typeface="맑은 고딕" pitchFamily="34" charset="-120"/>
+              </a:rPr>
+              <a:t>•  ARRIVE 가이드라인 준수 + 윤리위 승인 + 배정 눈가림(무작위 배정)</a:t>
+            </a:r>
+            <a:endParaRPr lang="en-US" sz="1100" dirty="0"/>
+          </a:p>
+          <a:p>
+            <a:pPr indent="0" marL="0">
+              <a:lnSpc>
+                <a:spcPct val="135000"/>
+              </a:lnSpc>
+              <a:buNone/>
+            </a:pPr>
+            <a:r>
+              <a:rPr lang="en-US" sz="1100" dirty="0">
+                <a:solidFill>
+                  <a:srgbClr val="16232E"/>
+                </a:solidFill>
+                <a:latin typeface="맑은 고딕" pitchFamily="34" charset="0"/>
+                <a:ea typeface="맑은 고딕" pitchFamily="34" charset="-122"/>
+                <a:cs typeface="맑은 고딕" pitchFamily="34" charset="-120"/>
+              </a:rPr>
+              <a:t>•  임상측정(캘리퍼) + 조직학(PDL 폭, ALP/TRAP)으로 이중 검증</a:t>
+            </a:r>
+            <a:endParaRPr lang="en-US" sz="1100" dirty="0"/>
+          </a:p>
+          <a:p>
+            <a:pPr indent="0" marL="0">
+              <a:lnSpc>
+                <a:spcPct val="135000"/>
+              </a:lnSpc>
+              <a:buNone/>
+            </a:pPr>
+            <a:r>
+              <a:rPr lang="en-US" sz="1100" dirty="0">
+                <a:solidFill>
+                  <a:srgbClr val="16232E"/>
+                </a:solidFill>
+                <a:latin typeface="맑은 고딕" pitchFamily="34" charset="0"/>
+                <a:ea typeface="맑은 고딕" pitchFamily="34" charset="-122"/>
+                <a:cs typeface="맑은 고딕" pitchFamily="34" charset="-120"/>
+              </a:rPr>
+              <a:t>•  가속기·보정기·재발기를 모두 추적한 최초의 3약물 비교 — 선행연구 공백을 직접 채움</a:t>
+            </a:r>
+            <a:endParaRPr lang="en-US" sz="1100" dirty="0"/>
+          </a:p>
+        </p:txBody>
+      </p:sp>
+      <p:sp>
+        <p:nvSpPr>
+          <p:cNvPr id="7" name="Shape 5"/>
           <p:cNvSpPr/>
           <p:nvPr/>
         </p:nvSpPr>
         <p:spPr>
           <a:xfrm>
-            <a:off x="914400" y="1874520"/>
-            <a:ext cx="2103120" cy="868680"/>
+            <a:off x="4434840" y="1600200"/>
+            <a:ext cx="3611880" cy="4434840"/>
           </a:xfrm>
           <a:prstGeom prst="roundRect">
             <a:avLst>
-              <a:gd name="adj" fmla="val 8421"/>
-            </a:avLst>
-          </a:prstGeom>
-          <a:solidFill>
-            <a:srgbClr val="D97706"/>
-          </a:solidFill>
-          <a:ln/>
-        </p:spPr>
-      </p:sp>
-      <p:sp>
-        <p:nvSpPr>
-          <p:cNvPr id="6" name="Text 4"/>
-          <p:cNvSpPr txBox="1"/>
-          <p:nvPr/>
-        </p:nvSpPr>
-        <p:spPr>
-          <a:xfrm>
-            <a:off x="914400" y="1874520"/>
-            <a:ext cx="2103120" cy="868680"/>
-          </a:xfrm>
-          <a:prstGeom prst="rect">
-            <a:avLst/>
-          </a:prstGeom>
-          <a:noFill/>
-          <a:ln/>
-        </p:spPr>
-        <p:txBody>
-          <a:bodyPr wrap="square" lIns="0" tIns="0" rIns="0" bIns="0" rtlCol="0" anchor="ctr"/>
-          <a:lstStyle/>
-          <a:p>
-            <a:pPr algn="ctr" indent="0" marL="0">
-              <a:buNone/>
-            </a:pPr>
-            <a:r>
-              <a:rPr lang="en-US" sz="1350" b="1" dirty="0">
-                <a:solidFill>
-                  <a:srgbClr val="FFFFFF"/>
-                </a:solidFill>
-                <a:latin typeface="맑은 고딕" pitchFamily="34" charset="0"/>
-                <a:ea typeface="맑은 고딕" pitchFamily="34" charset="-122"/>
-                <a:cs typeface="맑은 고딕" pitchFamily="34" charset="-120"/>
-              </a:rPr>
-              <a:t>코르티코스테로이드</a:t>
-            </a:r>
-            <a:endParaRPr lang="en-US" sz="1350" dirty="0"/>
-          </a:p>
-        </p:txBody>
-      </p:sp>
-      <p:sp>
-        <p:nvSpPr>
-          <p:cNvPr id="7" name="Text 5"/>
-          <p:cNvSpPr txBox="1"/>
-          <p:nvPr/>
-        </p:nvSpPr>
-        <p:spPr>
-          <a:xfrm>
-            <a:off x="3291840" y="1828800"/>
-            <a:ext cx="8028432" cy="960120"/>
-          </a:xfrm>
-          <a:prstGeom prst="rect">
-            <a:avLst/>
-          </a:prstGeom>
-          <a:noFill/>
-          <a:ln/>
-        </p:spPr>
-        <p:txBody>
-          <a:bodyPr wrap="square" lIns="0" tIns="0" rIns="0" bIns="0" rtlCol="0" anchor="ctr"/>
-          <a:lstStyle/>
-          <a:p>
-            <a:pPr indent="0" marL="0">
-              <a:lnSpc>
-                <a:spcPct val="125000"/>
-              </a:lnSpc>
-              <a:buNone/>
-            </a:pPr>
-            <a:r>
-              <a:rPr lang="en-US" sz="1200" dirty="0">
-                <a:solidFill>
-                  <a:srgbClr val="16232E"/>
-                </a:solidFill>
-                <a:latin typeface="맑은 고딕" pitchFamily="34" charset="0"/>
-                <a:ea typeface="맑은 고딕" pitchFamily="34" charset="-122"/>
-                <a:cs typeface="맑은 고딕" pitchFamily="34" charset="-120"/>
-              </a:rPr>
-              <a:t>Baofeng·Abtahi 등은 골흡수·파골세포형성 증가로 가속 보고 / 반대로 Yamane·Molina 등은 오히려 치아이동 감소 보고 — 연구기간(1–2주 vs 8주)·용량·힘·표본수 차이로 추정</a:t>
-            </a:r>
-            <a:endParaRPr lang="en-US" sz="1200" dirty="0"/>
-          </a:p>
-        </p:txBody>
-      </p:sp>
-      <p:sp>
-        <p:nvSpPr>
-          <p:cNvPr id="8" name="Shape 6"/>
-          <p:cNvSpPr/>
-          <p:nvPr/>
-        </p:nvSpPr>
-        <p:spPr>
-          <a:xfrm>
-            <a:off x="640080" y="3063240"/>
-            <a:ext cx="10908792" cy="1234440"/>
-          </a:xfrm>
-          <a:prstGeom prst="roundRect">
-            <a:avLst>
-              <a:gd name="adj" fmla="val 7407"/>
+              <a:gd name="adj" fmla="val 2532"/>
             </a:avLst>
           </a:prstGeom>
           <a:solidFill>
@@ -3363,121 +3816,139 @@
       </p:sp>
       <p:sp>
         <p:nvSpPr>
-          <p:cNvPr id="9" name="Shape 7"/>
+          <p:cNvPr id="8" name="Text 6"/>
+          <p:cNvSpPr txBox="1"/>
+          <p:nvPr/>
+        </p:nvSpPr>
+        <p:spPr>
+          <a:xfrm>
+            <a:off x="4709160" y="1801368"/>
+            <a:ext cx="3063240" cy="411480"/>
+          </a:xfrm>
+          <a:prstGeom prst="rect">
+            <a:avLst/>
+          </a:prstGeom>
+          <a:noFill/>
+          <a:ln/>
+        </p:spPr>
+        <p:txBody>
+          <a:bodyPr wrap="square" lIns="0" tIns="0" rIns="0" bIns="0" rtlCol="0" anchor="ctr"/>
+          <a:lstStyle/>
+          <a:p>
+            <a:pPr indent="0" marL="0">
+              <a:buNone/>
+            </a:pPr>
+            <a:r>
+              <a:rPr lang="en-US" sz="1550" b="1" dirty="0">
+                <a:solidFill>
+                  <a:srgbClr val="1B4965"/>
+                </a:solidFill>
+                <a:latin typeface="맑은 고딕" pitchFamily="34" charset="0"/>
+                <a:ea typeface="맑은 고딕" pitchFamily="34" charset="-122"/>
+                <a:cs typeface="맑은 고딕" pitchFamily="34" charset="-120"/>
+              </a:rPr>
+              <a:t>한계 / Bias 위험</a:t>
+            </a:r>
+            <a:endParaRPr lang="en-US" sz="1550" dirty="0"/>
+          </a:p>
+        </p:txBody>
+      </p:sp>
+      <p:sp>
+        <p:nvSpPr>
+          <p:cNvPr id="9" name="Text 7"/>
+          <p:cNvSpPr txBox="1"/>
+          <p:nvPr/>
+        </p:nvSpPr>
+        <p:spPr>
+          <a:xfrm>
+            <a:off x="4709160" y="2286000"/>
+            <a:ext cx="3063240" cy="3566160"/>
+          </a:xfrm>
+          <a:prstGeom prst="rect">
+            <a:avLst/>
+          </a:prstGeom>
+          <a:noFill/>
+          <a:ln/>
+        </p:spPr>
+        <p:txBody>
+          <a:bodyPr wrap="square" lIns="0" tIns="0" rIns="0" bIns="0" rtlCol="0" anchor="t"/>
+          <a:lstStyle/>
+          <a:p>
+            <a:pPr indent="0" marL="0">
+              <a:lnSpc>
+                <a:spcPct val="135000"/>
+              </a:lnSpc>
+              <a:buNone/>
+            </a:pPr>
+            <a:r>
+              <a:rPr lang="en-US" sz="1100" dirty="0">
+                <a:solidFill>
+                  <a:srgbClr val="16232E"/>
+                </a:solidFill>
+                <a:latin typeface="맑은 고딕" pitchFamily="34" charset="0"/>
+                <a:ea typeface="맑은 고딕" pitchFamily="34" charset="-122"/>
+                <a:cs typeface="맑은 고딕" pitchFamily="34" charset="-120"/>
+              </a:rPr>
+              <a:t>•  배정만 눈가림, 측정(outcome assessment)은 비맹검 — 원문: 주 연구자 1인이 개입·측정·평가를 전부 수행</a:t>
+            </a:r>
+            <a:endParaRPr lang="en-US" sz="1100" dirty="0"/>
+          </a:p>
+          <a:p>
+            <a:pPr indent="0" marL="0">
+              <a:lnSpc>
+                <a:spcPct val="135000"/>
+              </a:lnSpc>
+              <a:buNone/>
+            </a:pPr>
+            <a:r>
+              <a:rPr lang="en-US" sz="1100" dirty="0">
+                <a:solidFill>
+                  <a:srgbClr val="16232E"/>
+                </a:solidFill>
+                <a:latin typeface="맑은 고딕" pitchFamily="34" charset="0"/>
+                <a:ea typeface="맑은 고딕" pitchFamily="34" charset="-122"/>
+                <a:cs typeface="맑은 고딕" pitchFamily="34" charset="-120"/>
+              </a:rPr>
+              <a:t>•  약물당 용량 1개뿐 + 투여빈도도 매일·3일마다·매주로 제각각 — 공정 비교인지 불확실(용량-반응 분석 불가)</a:t>
+            </a:r>
+            <a:endParaRPr lang="en-US" sz="1100" dirty="0"/>
+          </a:p>
+          <a:p>
+            <a:pPr indent="0" marL="0">
+              <a:lnSpc>
+                <a:spcPct val="135000"/>
+              </a:lnSpc>
+              <a:buNone/>
+            </a:pPr>
+            <a:r>
+              <a:rPr lang="en-US" sz="1100" dirty="0">
+                <a:solidFill>
+                  <a:srgbClr val="16232E"/>
+                </a:solidFill>
+                <a:latin typeface="맑은 고딕" pitchFamily="34" charset="0"/>
+                <a:ea typeface="맑은 고딕" pitchFamily="34" charset="-122"/>
+                <a:cs typeface="맑은 고딕" pitchFamily="34" charset="-120"/>
+              </a:rPr>
+              <a:t>•  수컷 랫드만 사용 — 호르몬 변동은 배제했지만 여성(암컷) 적용 가능성은 미확인</a:t>
+            </a:r>
+            <a:endParaRPr lang="en-US" sz="1100" dirty="0"/>
+          </a:p>
+        </p:txBody>
+      </p:sp>
+      <p:sp>
+        <p:nvSpPr>
+          <p:cNvPr id="10" name="Shape 8"/>
           <p:cNvSpPr/>
           <p:nvPr/>
         </p:nvSpPr>
         <p:spPr>
           <a:xfrm>
-            <a:off x="914400" y="3246120"/>
-            <a:ext cx="2103120" cy="868680"/>
+            <a:off x="8229600" y="1600200"/>
+            <a:ext cx="3611880" cy="4434840"/>
           </a:xfrm>
           <a:prstGeom prst="roundRect">
             <a:avLst>
-              <a:gd name="adj" fmla="val 8421"/>
-            </a:avLst>
-          </a:prstGeom>
-          <a:solidFill>
-            <a:srgbClr val="3D7EA6"/>
-          </a:solidFill>
-          <a:ln/>
-        </p:spPr>
-      </p:sp>
-      <p:sp>
-        <p:nvSpPr>
-          <p:cNvPr id="10" name="Text 8"/>
-          <p:cNvSpPr txBox="1"/>
-          <p:nvPr/>
-        </p:nvSpPr>
-        <p:spPr>
-          <a:xfrm>
-            <a:off x="914400" y="3246120"/>
-            <a:ext cx="2103120" cy="868680"/>
-          </a:xfrm>
-          <a:prstGeom prst="rect">
-            <a:avLst/>
-          </a:prstGeom>
-          <a:noFill/>
-          <a:ln/>
-        </p:spPr>
-        <p:txBody>
-          <a:bodyPr wrap="square" lIns="0" tIns="0" rIns="0" bIns="0" rtlCol="0" anchor="ctr"/>
-          <a:lstStyle/>
-          <a:p>
-            <a:pPr algn="ctr" indent="0" marL="0">
-              <a:buNone/>
-            </a:pPr>
-            <a:r>
-              <a:rPr lang="en-US" sz="1350" b="1" dirty="0">
-                <a:solidFill>
-                  <a:srgbClr val="FFFFFF"/>
-                </a:solidFill>
-                <a:latin typeface="맑은 고딕" pitchFamily="34" charset="0"/>
-                <a:ea typeface="맑은 고딕" pitchFamily="34" charset="-122"/>
-                <a:cs typeface="맑은 고딕" pitchFamily="34" charset="-120"/>
-              </a:rPr>
-              <a:t>비타민D</a:t>
-            </a:r>
-            <a:endParaRPr lang="en-US" sz="1350" dirty="0"/>
-          </a:p>
-        </p:txBody>
-      </p:sp>
-      <p:sp>
-        <p:nvSpPr>
-          <p:cNvPr id="11" name="Text 9"/>
-          <p:cNvSpPr txBox="1"/>
-          <p:nvPr/>
-        </p:nvSpPr>
-        <p:spPr>
-          <a:xfrm>
-            <a:off x="3291840" y="3200400"/>
-            <a:ext cx="8028432" cy="960120"/>
-          </a:xfrm>
-          <a:prstGeom prst="rect">
-            <a:avLst/>
-          </a:prstGeom>
-          <a:noFill/>
-          <a:ln/>
-        </p:spPr>
-        <p:txBody>
-          <a:bodyPr wrap="square" lIns="0" tIns="0" rIns="0" bIns="0" rtlCol="0" anchor="ctr"/>
-          <a:lstStyle/>
-          <a:p>
-            <a:pPr indent="0" marL="0">
-              <a:lnSpc>
-                <a:spcPct val="125000"/>
-              </a:lnSpc>
-              <a:buNone/>
-            </a:pPr>
-            <a:r>
-              <a:rPr lang="en-US" sz="1200" dirty="0">
-                <a:solidFill>
-                  <a:srgbClr val="16232E"/>
-                </a:solidFill>
-                <a:latin typeface="맑은 고딕" pitchFamily="34" charset="0"/>
-                <a:ea typeface="맑은 고딕" pitchFamily="34" charset="-122"/>
-                <a:cs typeface="맑은 고딕" pitchFamily="34" charset="-120"/>
-              </a:rPr>
-              <a:t>Gowda·Varughese·Al-Attar·Moradinejad 등 다수가 골개조 증가·염증성 사이토카인 감소로 가속 효과를 일관되게 보고 — 본 연구 결과와 부합</a:t>
-            </a:r>
-            <a:endParaRPr lang="en-US" sz="1200" dirty="0"/>
-          </a:p>
-        </p:txBody>
-      </p:sp>
-      <p:sp>
-        <p:nvSpPr>
-          <p:cNvPr id="12" name="Shape 10"/>
-          <p:cNvSpPr/>
-          <p:nvPr/>
-        </p:nvSpPr>
-        <p:spPr>
-          <a:xfrm>
-            <a:off x="640080" y="4434840"/>
-            <a:ext cx="10908792" cy="1234440"/>
-          </a:xfrm>
-          <a:prstGeom prst="roundRect">
-            <a:avLst>
-              <a:gd name="adj" fmla="val 7407"/>
+              <a:gd name="adj" fmla="val 2532"/>
             </a:avLst>
           </a:prstGeom>
           <a:solidFill>
@@ -3495,36 +3966,14 @@
       </p:sp>
       <p:sp>
         <p:nvSpPr>
-          <p:cNvPr id="13" name="Shape 11"/>
-          <p:cNvSpPr/>
-          <p:nvPr/>
-        </p:nvSpPr>
-        <p:spPr>
-          <a:xfrm>
-            <a:off x="914400" y="4617720"/>
-            <a:ext cx="2103120" cy="868680"/>
-          </a:xfrm>
-          <a:prstGeom prst="roundRect">
-            <a:avLst>
-              <a:gd name="adj" fmla="val 8421"/>
-            </a:avLst>
-          </a:prstGeom>
-          <a:solidFill>
-            <a:srgbClr val="2F855A"/>
-          </a:solidFill>
-          <a:ln/>
-        </p:spPr>
-      </p:sp>
-      <p:sp>
-        <p:nvSpPr>
-          <p:cNvPr id="14" name="Text 12"/>
-          <p:cNvSpPr txBox="1"/>
-          <p:nvPr/>
-        </p:nvSpPr>
-        <p:spPr>
-          <a:xfrm>
-            <a:off x="914400" y="4617720"/>
-            <a:ext cx="2103120" cy="868680"/>
+          <p:cNvPr id="11" name="Text 9"/>
+          <p:cNvSpPr txBox="1"/>
+          <p:nvPr/>
+        </p:nvSpPr>
+        <p:spPr>
+          <a:xfrm>
+            <a:off x="8503920" y="1801368"/>
+            <a:ext cx="3063240" cy="411480"/>
           </a:xfrm>
           <a:prstGeom prst="rect">
             <a:avLst/>
@@ -3536,53 +3985,53 @@
           <a:bodyPr wrap="square" lIns="0" tIns="0" rIns="0" bIns="0" rtlCol="0" anchor="ctr"/>
           <a:lstStyle/>
           <a:p>
-            <a:pPr algn="ctr" indent="0" marL="0">
-              <a:buNone/>
-            </a:pPr>
-            <a:r>
-              <a:rPr lang="en-US" sz="1350" b="1" dirty="0">
-                <a:solidFill>
-                  <a:srgbClr val="FFFFFF"/>
-                </a:solidFill>
-                <a:latin typeface="맑은 고딕" pitchFamily="34" charset="0"/>
-                <a:ea typeface="맑은 고딕" pitchFamily="34" charset="-122"/>
-                <a:cs typeface="맑은 고딕" pitchFamily="34" charset="-120"/>
-              </a:rPr>
-              <a:t>PGE₂</a:t>
-            </a:r>
-            <a:endParaRPr lang="en-US" sz="1350" dirty="0"/>
-          </a:p>
-        </p:txBody>
-      </p:sp>
-      <p:sp>
-        <p:nvSpPr>
-          <p:cNvPr id="15" name="Text 13"/>
-          <p:cNvSpPr txBox="1"/>
-          <p:nvPr/>
-        </p:nvSpPr>
-        <p:spPr>
-          <a:xfrm>
-            <a:off x="3291840" y="4572000"/>
-            <a:ext cx="8028432" cy="960120"/>
-          </a:xfrm>
-          <a:prstGeom prst="rect">
-            <a:avLst/>
-          </a:prstGeom>
-          <a:noFill/>
-          <a:ln/>
-        </p:spPr>
-        <p:txBody>
-          <a:bodyPr wrap="square" lIns="0" tIns="0" rIns="0" bIns="0" rtlCol="0" anchor="ctr"/>
+            <a:pPr indent="0" marL="0">
+              <a:buNone/>
+            </a:pPr>
+            <a:r>
+              <a:rPr lang="en-US" sz="1550" b="1" dirty="0">
+                <a:solidFill>
+                  <a:srgbClr val="1B4965"/>
+                </a:solidFill>
+                <a:latin typeface="맑은 고딕" pitchFamily="34" charset="0"/>
+                <a:ea typeface="맑은 고딕" pitchFamily="34" charset="-122"/>
+                <a:cs typeface="맑은 고딕" pitchFamily="34" charset="-120"/>
+              </a:rPr>
+              <a:t>임상 적용 가능성</a:t>
+            </a:r>
+            <a:endParaRPr lang="en-US" sz="1550" dirty="0"/>
+          </a:p>
+        </p:txBody>
+      </p:sp>
+      <p:sp>
+        <p:nvSpPr>
+          <p:cNvPr id="12" name="Text 10"/>
+          <p:cNvSpPr txBox="1"/>
+          <p:nvPr/>
+        </p:nvSpPr>
+        <p:spPr>
+          <a:xfrm>
+            <a:off x="8503920" y="2286000"/>
+            <a:ext cx="3063240" cy="3566160"/>
+          </a:xfrm>
+          <a:prstGeom prst="rect">
+            <a:avLst/>
+          </a:prstGeom>
+          <a:noFill/>
+          <a:ln/>
+        </p:spPr>
+        <p:txBody>
+          <a:bodyPr wrap="square" lIns="0" tIns="0" rIns="0" bIns="0" rtlCol="0" anchor="t"/>
           <a:lstStyle/>
           <a:p>
             <a:pPr indent="0" marL="0">
               <a:lnSpc>
-                <a:spcPct val="125000"/>
+                <a:spcPct val="135000"/>
               </a:lnSpc>
               <a:buNone/>
             </a:pPr>
             <a:r>
-              <a:rPr lang="en-US" sz="1200" dirty="0">
+              <a:rPr lang="en-US" sz="1100" dirty="0">
                 <a:solidFill>
                   <a:srgbClr val="16232E"/>
                 </a:solidFill>
@@ -3590,54 +4039,55 @@
                 <a:ea typeface="맑은 고딕" pitchFamily="34" charset="-122"/>
                 <a:cs typeface="맑은 고딕" pitchFamily="34" charset="-120"/>
               </a:rPr>
-              <a:t>Kale·Cağlaroğlu·Seifi 등이 RANKL 발현·파골활성 증가를 보고 — 'PGE2 효과 없음'을 보고한 연구는 없음(저자 확인)</a:t>
-            </a:r>
-            <a:endParaRPr lang="en-US" sz="1200" dirty="0"/>
-          </a:p>
-        </p:txBody>
-      </p:sp>
-      <p:sp>
-        <p:nvSpPr>
-          <p:cNvPr id="16" name="Text 14"/>
-          <p:cNvSpPr txBox="1"/>
-          <p:nvPr/>
-        </p:nvSpPr>
-        <p:spPr>
-          <a:xfrm>
-            <a:off x="640080" y="5897880"/>
-            <a:ext cx="10908792" cy="457200"/>
-          </a:xfrm>
-          <a:prstGeom prst="rect">
-            <a:avLst/>
-          </a:prstGeom>
-          <a:noFill/>
-          <a:ln/>
-        </p:spPr>
-        <p:txBody>
-          <a:bodyPr wrap="square" lIns="0" tIns="0" rIns="0" bIns="0" rtlCol="0" anchor="ctr"/>
-          <a:lstStyle/>
-          <a:p>
-            <a:pPr indent="0" marL="0">
-              <a:buNone/>
-            </a:pPr>
-            <a:r>
-              <a:rPr lang="en-US" sz="1150" i="1" dirty="0">
-                <a:solidFill>
-                  <a:srgbClr val="1B4965"/>
-                </a:solidFill>
-                <a:latin typeface="맑은 고딕" pitchFamily="34" charset="0"/>
-                <a:ea typeface="맑은 고딕" pitchFamily="34" charset="-122"/>
-                <a:cs typeface="맑은 고딕" pitchFamily="34" charset="-120"/>
-              </a:rPr>
-              <a:t>※ 상반된 결과는 연구기간·용량·힘·표본수 차이 때문(저자 설명) — 재발까지 세 약물을 비교한 연구는 이번이 최초, 진짜 공백은 여기 있음.</a:t>
-            </a:r>
-            <a:endParaRPr lang="en-US" sz="1150" dirty="0"/>
-          </a:p>
-        </p:txBody>
-      </p:sp>
-      <p:sp>
-        <p:nvSpPr>
-          <p:cNvPr id="17" name="Text 15"/>
+              <a:t>•  코르티코스테로이드는 가속 효과 크지만 재발 위험도 가장 큼 — 전신 스테로이드 복용 중인 교정환자에서 특히 신중한 판단 필요</a:t>
+            </a:r>
+            <a:endParaRPr lang="en-US" sz="1100" dirty="0"/>
+          </a:p>
+          <a:p>
+            <a:pPr indent="0" marL="0">
+              <a:lnSpc>
+                <a:spcPct val="135000"/>
+              </a:lnSpc>
+              <a:buNone/>
+            </a:pPr>
+            <a:r>
+              <a:rPr lang="en-US" sz="1100" dirty="0">
+                <a:solidFill>
+                  <a:srgbClr val="16232E"/>
+                </a:solidFill>
+                <a:latin typeface="맑은 고딕" pitchFamily="34" charset="0"/>
+                <a:ea typeface="맑은 고딕" pitchFamily="34" charset="-122"/>
+                <a:cs typeface="맑은 고딕" pitchFamily="34" charset="-120"/>
+              </a:rPr>
+              <a:t>•  비타민D·PGE₂는 가속은 온건해도 재발이 적어 상대적으로 안전한 보조제일 수 있음 — 다만 PGE2는 고용량 시 치근흡수 위험 보고 있음(타 문헌)</a:t>
+            </a:r>
+            <a:endParaRPr lang="en-US" sz="1100" dirty="0"/>
+          </a:p>
+          <a:p>
+            <a:pPr indent="0" marL="0">
+              <a:lnSpc>
+                <a:spcPct val="135000"/>
+              </a:lnSpc>
+              <a:buNone/>
+            </a:pPr>
+            <a:r>
+              <a:rPr lang="en-US" sz="1100" dirty="0">
+                <a:solidFill>
+                  <a:srgbClr val="16232E"/>
+                </a:solidFill>
+                <a:latin typeface="맑은 고딕" pitchFamily="34" charset="0"/>
+                <a:ea typeface="맑은 고딕" pitchFamily="34" charset="-122"/>
+                <a:cs typeface="맑은 고딕" pitchFamily="34" charset="-120"/>
+              </a:rPr>
+              <a:t>•  동물(랫드)실험 — 종간 차이로 사람에 그대로 적용은 어려움(저자도 인정), 용량-반응 확립을 위한 후속 임상연구 필요</a:t>
+            </a:r>
+            <a:endParaRPr lang="en-US" sz="1100" dirty="0"/>
+          </a:p>
+        </p:txBody>
+      </p:sp>
+      <p:sp>
+        <p:nvSpPr>
+          <p:cNvPr id="13" name="Text 11"/>
           <p:cNvSpPr txBox="1"/>
           <p:nvPr/>
         </p:nvSpPr>
@@ -3739,7 +4189,7 @@
                 <a:ea typeface="맑은 고딕" pitchFamily="34" charset="-122"/>
                 <a:cs typeface="맑은 고딕" pitchFamily="34" charset="-120"/>
               </a:rPr>
-              <a:t>REFERENCE</a:t>
+              <a:t>DISCUSSION</a:t>
             </a:r>
             <a:endParaRPr lang="en-US" sz="1200" dirty="0"/>
           </a:p>
@@ -3778,7 +4228,7 @@
                 <a:ea typeface="맑은 고딕" pitchFamily="34" charset="-122"/>
                 <a:cs typeface="맑은 고딕" pitchFamily="34" charset="-120"/>
               </a:rPr>
-              <a:t>참고문헌</a:t>
+              <a:t>기타 연구와의 결과 비교</a:t>
             </a:r>
             <a:endParaRPr lang="en-US" sz="2400" dirty="0"/>
           </a:p>
@@ -3786,28 +4236,118 @@
       </p:sp>
       <p:sp>
         <p:nvSpPr>
-          <p:cNvPr id="4" name="Text 2"/>
-          <p:cNvSpPr txBox="1"/>
-          <p:nvPr/>
-        </p:nvSpPr>
-        <p:spPr>
-          <a:xfrm>
-            <a:off x="640080" y="1645920"/>
-            <a:ext cx="10908792" cy="4206240"/>
-          </a:xfrm>
-          <a:prstGeom prst="rect">
-            <a:avLst/>
-          </a:prstGeom>
-          <a:noFill/>
-          <a:ln/>
-        </p:spPr>
-        <p:txBody>
-          <a:bodyPr wrap="square" lIns="0" tIns="0" rIns="0" bIns="0" rtlCol="0" anchor="t"/>
+          <p:cNvPr id="4" name="Shape 2"/>
+          <p:cNvSpPr/>
+          <p:nvPr/>
+        </p:nvSpPr>
+        <p:spPr>
+          <a:xfrm>
+            <a:off x="640080" y="1691640"/>
+            <a:ext cx="10908792" cy="1234440"/>
+          </a:xfrm>
+          <a:prstGeom prst="roundRect">
+            <a:avLst>
+              <a:gd name="adj" fmla="val 7407"/>
+            </a:avLst>
+          </a:prstGeom>
+          <a:solidFill>
+            <a:srgbClr val="FFFFFF"/>
+          </a:solidFill>
+          <a:ln/>
+          <a:effectLst>
+            <a:outerShdw sx="100000" sy="100000" kx="0" ky="0" algn="bl" rotWithShape="0" blurRad="76200" dist="25400" dir="5400000">
+              <a:srgbClr val="16232E">
+                <a:alpha val="10000"/>
+              </a:srgbClr>
+            </a:outerShdw>
+          </a:effectLst>
+        </p:spPr>
+      </p:sp>
+      <p:sp>
+        <p:nvSpPr>
+          <p:cNvPr id="5" name="Shape 3"/>
+          <p:cNvSpPr/>
+          <p:nvPr/>
+        </p:nvSpPr>
+        <p:spPr>
+          <a:xfrm>
+            <a:off x="914400" y="1874520"/>
+            <a:ext cx="2103120" cy="868680"/>
+          </a:xfrm>
+          <a:prstGeom prst="roundRect">
+            <a:avLst>
+              <a:gd name="adj" fmla="val 8421"/>
+            </a:avLst>
+          </a:prstGeom>
+          <a:solidFill>
+            <a:srgbClr val="D97706"/>
+          </a:solidFill>
+          <a:ln/>
+        </p:spPr>
+      </p:sp>
+      <p:sp>
+        <p:nvSpPr>
+          <p:cNvPr id="6" name="Text 4"/>
+          <p:cNvSpPr txBox="1"/>
+          <p:nvPr/>
+        </p:nvSpPr>
+        <p:spPr>
+          <a:xfrm>
+            <a:off x="914400" y="1874520"/>
+            <a:ext cx="2103120" cy="868680"/>
+          </a:xfrm>
+          <a:prstGeom prst="rect">
+            <a:avLst/>
+          </a:prstGeom>
+          <a:noFill/>
+          <a:ln/>
+        </p:spPr>
+        <p:txBody>
+          <a:bodyPr wrap="square" lIns="0" tIns="0" rIns="0" bIns="0" rtlCol="0" anchor="ctr"/>
+          <a:lstStyle/>
+          <a:p>
+            <a:pPr algn="ctr" indent="0" marL="0">
+              <a:buNone/>
+            </a:pPr>
+            <a:r>
+              <a:rPr lang="en-US" sz="1350" b="1" dirty="0">
+                <a:solidFill>
+                  <a:srgbClr val="FFFFFF"/>
+                </a:solidFill>
+                <a:latin typeface="맑은 고딕" pitchFamily="34" charset="0"/>
+                <a:ea typeface="맑은 고딕" pitchFamily="34" charset="-122"/>
+                <a:cs typeface="맑은 고딕" pitchFamily="34" charset="-120"/>
+              </a:rPr>
+              <a:t>코르티코스테로이드</a:t>
+            </a:r>
+            <a:endParaRPr lang="en-US" sz="1350" dirty="0"/>
+          </a:p>
+        </p:txBody>
+      </p:sp>
+      <p:sp>
+        <p:nvSpPr>
+          <p:cNvPr id="7" name="Text 5"/>
+          <p:cNvSpPr txBox="1"/>
+          <p:nvPr/>
+        </p:nvSpPr>
+        <p:spPr>
+          <a:xfrm>
+            <a:off x="3291840" y="1828800"/>
+            <a:ext cx="8028432" cy="960120"/>
+          </a:xfrm>
+          <a:prstGeom prst="rect">
+            <a:avLst/>
+          </a:prstGeom>
+          <a:noFill/>
+          <a:ln/>
+        </p:spPr>
+        <p:txBody>
+          <a:bodyPr wrap="square" lIns="0" tIns="0" rIns="0" bIns="0" rtlCol="0" anchor="ctr"/>
           <a:lstStyle/>
           <a:p>
             <a:pPr indent="0" marL="0">
               <a:lnSpc>
-                <a:spcPct val="155000"/>
+                <a:spcPct val="125000"/>
               </a:lnSpc>
               <a:buNone/>
             </a:pPr>
@@ -3820,14 +4360,126 @@
                 <a:ea typeface="맑은 고딕" pitchFamily="34" charset="-122"/>
                 <a:cs typeface="맑은 고딕" pitchFamily="34" charset="-120"/>
               </a:rPr>
-              <a:t>[1] [원 논문] Hamed SA, Mohammad MH, Grawish ME, Fouda AM, Montasser MA. Three pharmacological agents for acceleratory orthodontic tooth movement and subsequent relapse: A randomized controlled animal study. Int Orthod. 2026;24:101112.</a:t>
+              <a:t>Baofeng·Abtahi 등은 골흡수·파골세포형성 증가로 가속 보고 / 반대로 Yamane·Molina 등은 오히려 치아이동 감소 보고 — 연구기간(1–2주 vs 8주)·용량·힘·표본수 차이로 추정</a:t>
             </a:r>
             <a:endParaRPr lang="en-US" sz="1200" dirty="0"/>
           </a:p>
+        </p:txBody>
+      </p:sp>
+      <p:sp>
+        <p:nvSpPr>
+          <p:cNvPr id="8" name="Shape 6"/>
+          <p:cNvSpPr/>
+          <p:nvPr/>
+        </p:nvSpPr>
+        <p:spPr>
+          <a:xfrm>
+            <a:off x="640080" y="3063240"/>
+            <a:ext cx="10908792" cy="1234440"/>
+          </a:xfrm>
+          <a:prstGeom prst="roundRect">
+            <a:avLst>
+              <a:gd name="adj" fmla="val 7407"/>
+            </a:avLst>
+          </a:prstGeom>
+          <a:solidFill>
+            <a:srgbClr val="FFFFFF"/>
+          </a:solidFill>
+          <a:ln/>
+          <a:effectLst>
+            <a:outerShdw sx="100000" sy="100000" kx="0" ky="0" algn="bl" rotWithShape="0" blurRad="76200" dist="25400" dir="5400000">
+              <a:srgbClr val="16232E">
+                <a:alpha val="10000"/>
+              </a:srgbClr>
+            </a:outerShdw>
+          </a:effectLst>
+        </p:spPr>
+      </p:sp>
+      <p:sp>
+        <p:nvSpPr>
+          <p:cNvPr id="9" name="Shape 7"/>
+          <p:cNvSpPr/>
+          <p:nvPr/>
+        </p:nvSpPr>
+        <p:spPr>
+          <a:xfrm>
+            <a:off x="914400" y="3246120"/>
+            <a:ext cx="2103120" cy="868680"/>
+          </a:xfrm>
+          <a:prstGeom prst="roundRect">
+            <a:avLst>
+              <a:gd name="adj" fmla="val 8421"/>
+            </a:avLst>
+          </a:prstGeom>
+          <a:solidFill>
+            <a:srgbClr val="3D7EA6"/>
+          </a:solidFill>
+          <a:ln/>
+        </p:spPr>
+      </p:sp>
+      <p:sp>
+        <p:nvSpPr>
+          <p:cNvPr id="10" name="Text 8"/>
+          <p:cNvSpPr txBox="1"/>
+          <p:nvPr/>
+        </p:nvSpPr>
+        <p:spPr>
+          <a:xfrm>
+            <a:off x="914400" y="3246120"/>
+            <a:ext cx="2103120" cy="868680"/>
+          </a:xfrm>
+          <a:prstGeom prst="rect">
+            <a:avLst/>
+          </a:prstGeom>
+          <a:noFill/>
+          <a:ln/>
+        </p:spPr>
+        <p:txBody>
+          <a:bodyPr wrap="square" lIns="0" tIns="0" rIns="0" bIns="0" rtlCol="0" anchor="ctr"/>
+          <a:lstStyle/>
+          <a:p>
+            <a:pPr algn="ctr" indent="0" marL="0">
+              <a:buNone/>
+            </a:pPr>
+            <a:r>
+              <a:rPr lang="en-US" sz="1350" b="1" dirty="0">
+                <a:solidFill>
+                  <a:srgbClr val="FFFFFF"/>
+                </a:solidFill>
+                <a:latin typeface="맑은 고딕" pitchFamily="34" charset="0"/>
+                <a:ea typeface="맑은 고딕" pitchFamily="34" charset="-122"/>
+                <a:cs typeface="맑은 고딕" pitchFamily="34" charset="-120"/>
+              </a:rPr>
+              <a:t>비타민D</a:t>
+            </a:r>
+            <a:endParaRPr lang="en-US" sz="1350" dirty="0"/>
+          </a:p>
+        </p:txBody>
+      </p:sp>
+      <p:sp>
+        <p:nvSpPr>
+          <p:cNvPr id="11" name="Text 9"/>
+          <p:cNvSpPr txBox="1"/>
+          <p:nvPr/>
+        </p:nvSpPr>
+        <p:spPr>
+          <a:xfrm>
+            <a:off x="3291840" y="3200400"/>
+            <a:ext cx="8028432" cy="960120"/>
+          </a:xfrm>
+          <a:prstGeom prst="rect">
+            <a:avLst/>
+          </a:prstGeom>
+          <a:noFill/>
+          <a:ln/>
+        </p:spPr>
+        <p:txBody>
+          <a:bodyPr wrap="square" lIns="0" tIns="0" rIns="0" bIns="0" rtlCol="0" anchor="ctr"/>
+          <a:lstStyle/>
           <a:p>
             <a:pPr indent="0" marL="0">
               <a:lnSpc>
-                <a:spcPct val="155000"/>
+                <a:spcPct val="125000"/>
               </a:lnSpc>
               <a:buNone/>
             </a:pPr>
@@ -3840,14 +4492,126 @@
                 <a:ea typeface="맑은 고딕" pitchFamily="34" charset="-122"/>
                 <a:cs typeface="맑은 고딕" pitchFamily="34" charset="-120"/>
               </a:rPr>
-              <a:t>[2] Baofeng L, et al. Characterization of a rabbit osteoporosis model induced by ovariectomy and glucocorticoid. Bone 2010;46(3):396-401.</a:t>
+              <a:t>Gowda·Varughese·Al-Attar·Moradinejad 등 다수가 골개조 증가·염증성 사이토카인 감소로 가속 효과를 일관되게 보고 — 본 연구 결과와 부합</a:t>
             </a:r>
             <a:endParaRPr lang="en-US" sz="1200" dirty="0"/>
           </a:p>
+        </p:txBody>
+      </p:sp>
+      <p:sp>
+        <p:nvSpPr>
+          <p:cNvPr id="12" name="Shape 10"/>
+          <p:cNvSpPr/>
+          <p:nvPr/>
+        </p:nvSpPr>
+        <p:spPr>
+          <a:xfrm>
+            <a:off x="640080" y="4434840"/>
+            <a:ext cx="10908792" cy="1234440"/>
+          </a:xfrm>
+          <a:prstGeom prst="roundRect">
+            <a:avLst>
+              <a:gd name="adj" fmla="val 7407"/>
+            </a:avLst>
+          </a:prstGeom>
+          <a:solidFill>
+            <a:srgbClr val="FFFFFF"/>
+          </a:solidFill>
+          <a:ln/>
+          <a:effectLst>
+            <a:outerShdw sx="100000" sy="100000" kx="0" ky="0" algn="bl" rotWithShape="0" blurRad="76200" dist="25400" dir="5400000">
+              <a:srgbClr val="16232E">
+                <a:alpha val="10000"/>
+              </a:srgbClr>
+            </a:outerShdw>
+          </a:effectLst>
+        </p:spPr>
+      </p:sp>
+      <p:sp>
+        <p:nvSpPr>
+          <p:cNvPr id="13" name="Shape 11"/>
+          <p:cNvSpPr/>
+          <p:nvPr/>
+        </p:nvSpPr>
+        <p:spPr>
+          <a:xfrm>
+            <a:off x="914400" y="4617720"/>
+            <a:ext cx="2103120" cy="868680"/>
+          </a:xfrm>
+          <a:prstGeom prst="roundRect">
+            <a:avLst>
+              <a:gd name="adj" fmla="val 8421"/>
+            </a:avLst>
+          </a:prstGeom>
+          <a:solidFill>
+            <a:srgbClr val="2F855A"/>
+          </a:solidFill>
+          <a:ln/>
+        </p:spPr>
+      </p:sp>
+      <p:sp>
+        <p:nvSpPr>
+          <p:cNvPr id="14" name="Text 12"/>
+          <p:cNvSpPr txBox="1"/>
+          <p:nvPr/>
+        </p:nvSpPr>
+        <p:spPr>
+          <a:xfrm>
+            <a:off x="914400" y="4617720"/>
+            <a:ext cx="2103120" cy="868680"/>
+          </a:xfrm>
+          <a:prstGeom prst="rect">
+            <a:avLst/>
+          </a:prstGeom>
+          <a:noFill/>
+          <a:ln/>
+        </p:spPr>
+        <p:txBody>
+          <a:bodyPr wrap="square" lIns="0" tIns="0" rIns="0" bIns="0" rtlCol="0" anchor="ctr"/>
+          <a:lstStyle/>
+          <a:p>
+            <a:pPr algn="ctr" indent="0" marL="0">
+              <a:buNone/>
+            </a:pPr>
+            <a:r>
+              <a:rPr lang="en-US" sz="1350" b="1" dirty="0">
+                <a:solidFill>
+                  <a:srgbClr val="FFFFFF"/>
+                </a:solidFill>
+                <a:latin typeface="맑은 고딕" pitchFamily="34" charset="0"/>
+                <a:ea typeface="맑은 고딕" pitchFamily="34" charset="-122"/>
+                <a:cs typeface="맑은 고딕" pitchFamily="34" charset="-120"/>
+              </a:rPr>
+              <a:t>PGE₂</a:t>
+            </a:r>
+            <a:endParaRPr lang="en-US" sz="1350" dirty="0"/>
+          </a:p>
+        </p:txBody>
+      </p:sp>
+      <p:sp>
+        <p:nvSpPr>
+          <p:cNvPr id="15" name="Text 13"/>
+          <p:cNvSpPr txBox="1"/>
+          <p:nvPr/>
+        </p:nvSpPr>
+        <p:spPr>
+          <a:xfrm>
+            <a:off x="3291840" y="4572000"/>
+            <a:ext cx="8028432" cy="960120"/>
+          </a:xfrm>
+          <a:prstGeom prst="rect">
+            <a:avLst/>
+          </a:prstGeom>
+          <a:noFill/>
+          <a:ln/>
+        </p:spPr>
+        <p:txBody>
+          <a:bodyPr wrap="square" lIns="0" tIns="0" rIns="0" bIns="0" rtlCol="0" anchor="ctr"/>
+          <a:lstStyle/>
           <a:p>
             <a:pPr indent="0" marL="0">
               <a:lnSpc>
-                <a:spcPct val="155000"/>
+                <a:spcPct val="125000"/>
               </a:lnSpc>
               <a:buNone/>
             </a:pPr>
@@ -3860,82 +4624,22 @@
                 <a:ea typeface="맑은 고딕" pitchFamily="34" charset="-122"/>
                 <a:cs typeface="맑은 고딕" pitchFamily="34" charset="-120"/>
               </a:rPr>
-              <a:t>[3] Abtahi M, et al. Effect of corticosteroids administration in rabbit model. J Clin Pediatr Dent 2014;38:285-9.</a:t>
+              <a:t>Kale·Cağlaroğlu·Seifi 등이 RANKL 발현·파골활성 증가를 보고 — 'PGE2 효과 없음'을 보고한 연구는 없음(저자 확인)</a:t>
             </a:r>
             <a:endParaRPr lang="en-US" sz="1200" dirty="0"/>
           </a:p>
-          <a:p>
-            <a:pPr indent="0" marL="0">
-              <a:lnSpc>
-                <a:spcPct val="155000"/>
-              </a:lnSpc>
-              <a:buNone/>
-            </a:pPr>
-            <a:r>
-              <a:rPr lang="en-US" sz="1200" dirty="0">
-                <a:solidFill>
-                  <a:srgbClr val="16232E"/>
-                </a:solidFill>
-                <a:latin typeface="맑은 고딕" pitchFamily="34" charset="0"/>
-                <a:ea typeface="맑은 고딕" pitchFamily="34" charset="-122"/>
-                <a:cs typeface="맑은 고딕" pitchFamily="34" charset="-120"/>
-              </a:rPr>
-              <a:t>[4] Yamane A, Fukui T, Chiba M. In vitro measurement of orthodontic tooth movement in rats given beta-aminopropionitrile or hydrocortisone. Eur J Orthod 1997;19(1):21-8.</a:t>
-            </a:r>
-            <a:endParaRPr lang="en-US" sz="1200" dirty="0"/>
-          </a:p>
-          <a:p>
-            <a:pPr indent="0" marL="0">
-              <a:lnSpc>
-                <a:spcPct val="155000"/>
-              </a:lnSpc>
-              <a:buNone/>
-            </a:pPr>
-            <a:r>
-              <a:rPr lang="en-US" sz="1200" dirty="0">
-                <a:solidFill>
-                  <a:srgbClr val="16232E"/>
-                </a:solidFill>
-                <a:latin typeface="맑은 고딕" pitchFamily="34" charset="0"/>
-                <a:ea typeface="맑은 고딕" pitchFamily="34" charset="-122"/>
-                <a:cs typeface="맑은 고딕" pitchFamily="34" charset="-120"/>
-              </a:rPr>
-              <a:t>[5] Kale S, et al. Comparison of 1,25-dihydroxycholecalciferol and prostaglandin E2 on orthodontic tooth movement. Am J Orthod Dentofacial Orthop 2004;125:607-14.</a:t>
-            </a:r>
-            <a:endParaRPr lang="en-US" sz="1200" dirty="0"/>
-          </a:p>
-          <a:p>
-            <a:pPr indent="0" marL="0">
-              <a:lnSpc>
-                <a:spcPct val="155000"/>
-              </a:lnSpc>
-              <a:buNone/>
-            </a:pPr>
-            <a:r>
-              <a:rPr lang="en-US" sz="1200" dirty="0">
-                <a:solidFill>
-                  <a:srgbClr val="16232E"/>
-                </a:solidFill>
-                <a:latin typeface="맑은 고딕" pitchFamily="34" charset="0"/>
-                <a:ea typeface="맑은 고딕" pitchFamily="34" charset="-122"/>
-                <a:cs typeface="맑은 고딕" pitchFamily="34" charset="-120"/>
-              </a:rPr>
-              <a:t>[6] Seifi M, Hamedi R, Khavandegar Z. The effect of thyroid hormone, prostaglandin E2, and calcium gluconate on orthodontic tooth movement and root resorption in rats. J Dent 2015;16(1 Suppl):35.</a:t>
-            </a:r>
-            <a:endParaRPr lang="en-US" sz="1200" dirty="0"/>
-          </a:p>
-        </p:txBody>
-      </p:sp>
-      <p:sp>
-        <p:nvSpPr>
-          <p:cNvPr id="5" name="Text 3"/>
-          <p:cNvSpPr txBox="1"/>
-          <p:nvPr/>
-        </p:nvSpPr>
-        <p:spPr>
-          <a:xfrm>
-            <a:off x="640080" y="6035040"/>
-            <a:ext cx="10908792" cy="365760"/>
+        </p:txBody>
+      </p:sp>
+      <p:sp>
+        <p:nvSpPr>
+          <p:cNvPr id="16" name="Text 14"/>
+          <p:cNvSpPr txBox="1"/>
+          <p:nvPr/>
+        </p:nvSpPr>
+        <p:spPr>
+          <a:xfrm>
+            <a:off x="640080" y="5897880"/>
+            <a:ext cx="10908792" cy="457200"/>
           </a:xfrm>
           <a:prstGeom prst="rect">
             <a:avLst/>
@@ -3951,23 +4655,23 @@
               <a:buNone/>
             </a:pPr>
             <a:r>
-              <a:rPr lang="en-US" sz="1050" i="1" dirty="0">
-                <a:solidFill>
-                  <a:srgbClr val="5B6B7A"/>
-                </a:solidFill>
-                <a:latin typeface="맑은 고딕" pitchFamily="34" charset="0"/>
-                <a:ea typeface="맑은 고딕" pitchFamily="34" charset="-122"/>
-                <a:cs typeface="맑은 고딕" pitchFamily="34" charset="-120"/>
-              </a:rPr>
-              <a:t>※ 슬라이드 11(선행연구 비교)에서 이름으로 인용한 문헌만 수록. 전체 참고문헌(28건)은 원 논문 References 참고.</a:t>
-            </a:r>
-            <a:endParaRPr lang="en-US" sz="1050" dirty="0"/>
-          </a:p>
-        </p:txBody>
-      </p:sp>
-      <p:sp>
-        <p:nvSpPr>
-          <p:cNvPr id="6" name="Text 4"/>
+              <a:rPr lang="en-US" sz="1150" i="1" dirty="0">
+                <a:solidFill>
+                  <a:srgbClr val="1B4965"/>
+                </a:solidFill>
+                <a:latin typeface="맑은 고딕" pitchFamily="34" charset="0"/>
+                <a:ea typeface="맑은 고딕" pitchFamily="34" charset="-122"/>
+                <a:cs typeface="맑은 고딕" pitchFamily="34" charset="-120"/>
+              </a:rPr>
+              <a:t>※ 상반된 결과는 연구기간·용량·힘·표본수 차이 때문(저자 설명) — 재발까지 세 약물을 비교한 연구는 이번이 최초, 진짜 공백은 여기 있음.</a:t>
+            </a:r>
+            <a:endParaRPr lang="en-US" sz="1150" dirty="0"/>
+          </a:p>
+        </p:txBody>
+      </p:sp>
+      <p:sp>
+        <p:nvSpPr>
+          <p:cNvPr id="17" name="Text 15"/>
           <p:cNvSpPr txBox="1"/>
           <p:nvPr/>
         </p:nvSpPr>
@@ -4015,6 +4719,336 @@
 <file path=ppt/slides/slide13.xml><?xml version="1.0" encoding="utf-8"?>
 <p:sld xmlns:a="http://schemas.openxmlformats.org/drawingml/2006/main" xmlns:r="http://schemas.openxmlformats.org/officeDocument/2006/relationships" xmlns:p="http://schemas.openxmlformats.org/presentationml/2006/main">
   <p:cSld name="Slide 13">
+    <p:bg>
+      <p:bgPr>
+        <a:solidFill>
+          <a:srgbClr val="F5F6F8"/>
+        </a:solidFill>
+      </p:bgPr>
+    </p:bg>
+    <p:spTree>
+      <p:nvGrpSpPr>
+        <p:cNvPr id="1" name=""/>
+        <p:cNvGrpSpPr/>
+        <p:nvPr/>
+      </p:nvGrpSpPr>
+      <p:grpSpPr>
+        <a:xfrm>
+          <a:off x="0" y="0"/>
+          <a:ext cx="0" cy="0"/>
+          <a:chOff x="0" y="0"/>
+          <a:chExt cx="0" cy="0"/>
+        </a:xfrm>
+      </p:grpSpPr>
+      <p:sp>
+        <p:nvSpPr>
+          <p:cNvPr id="2" name="Text 0"/>
+          <p:cNvSpPr txBox="1"/>
+          <p:nvPr/>
+        </p:nvSpPr>
+        <p:spPr>
+          <a:xfrm>
+            <a:off x="640080" y="365760"/>
+            <a:ext cx="10908792" cy="292608"/>
+          </a:xfrm>
+          <a:prstGeom prst="rect">
+            <a:avLst/>
+          </a:prstGeom>
+          <a:noFill/>
+          <a:ln/>
+        </p:spPr>
+        <p:txBody>
+          <a:bodyPr wrap="square" lIns="0" tIns="0" rIns="0" bIns="0" rtlCol="0" anchor="ctr"/>
+          <a:lstStyle/>
+          <a:p>
+            <a:pPr indent="0" marL="0">
+              <a:buNone/>
+            </a:pPr>
+            <a:r>
+              <a:rPr lang="en-US" sz="1200" b="1" spc="100" kern="0" dirty="0">
+                <a:solidFill>
+                  <a:srgbClr val="3D7EA6"/>
+                </a:solidFill>
+                <a:latin typeface="맑은 고딕" pitchFamily="34" charset="0"/>
+                <a:ea typeface="맑은 고딕" pitchFamily="34" charset="-122"/>
+                <a:cs typeface="맑은 고딕" pitchFamily="34" charset="-120"/>
+              </a:rPr>
+              <a:t>REFERENCE</a:t>
+            </a:r>
+            <a:endParaRPr lang="en-US" sz="1200" dirty="0"/>
+          </a:p>
+        </p:txBody>
+      </p:sp>
+      <p:sp>
+        <p:nvSpPr>
+          <p:cNvPr id="3" name="Text 1"/>
+          <p:cNvSpPr txBox="1"/>
+          <p:nvPr/>
+        </p:nvSpPr>
+        <p:spPr>
+          <a:xfrm>
+            <a:off x="640080" y="640080"/>
+            <a:ext cx="10908792" cy="640080"/>
+          </a:xfrm>
+          <a:prstGeom prst="rect">
+            <a:avLst/>
+          </a:prstGeom>
+          <a:noFill/>
+          <a:ln/>
+        </p:spPr>
+        <p:txBody>
+          <a:bodyPr wrap="square" lIns="0" tIns="0" rIns="0" bIns="0" rtlCol="0" anchor="ctr"/>
+          <a:lstStyle/>
+          <a:p>
+            <a:pPr indent="0" marL="0">
+              <a:buNone/>
+            </a:pPr>
+            <a:r>
+              <a:rPr lang="en-US" sz="2400" b="1" dirty="0">
+                <a:solidFill>
+                  <a:srgbClr val="1B4965"/>
+                </a:solidFill>
+                <a:latin typeface="맑은 고딕" pitchFamily="34" charset="0"/>
+                <a:ea typeface="맑은 고딕" pitchFamily="34" charset="-122"/>
+                <a:cs typeface="맑은 고딕" pitchFamily="34" charset="-120"/>
+              </a:rPr>
+              <a:t>참고문헌</a:t>
+            </a:r>
+            <a:endParaRPr lang="en-US" sz="2400" dirty="0"/>
+          </a:p>
+        </p:txBody>
+      </p:sp>
+      <p:sp>
+        <p:nvSpPr>
+          <p:cNvPr id="4" name="Text 2"/>
+          <p:cNvSpPr txBox="1"/>
+          <p:nvPr/>
+        </p:nvSpPr>
+        <p:spPr>
+          <a:xfrm>
+            <a:off x="640080" y="1645920"/>
+            <a:ext cx="10908792" cy="4206240"/>
+          </a:xfrm>
+          <a:prstGeom prst="rect">
+            <a:avLst/>
+          </a:prstGeom>
+          <a:noFill/>
+          <a:ln/>
+        </p:spPr>
+        <p:txBody>
+          <a:bodyPr wrap="square" lIns="0" tIns="0" rIns="0" bIns="0" rtlCol="0" anchor="t"/>
+          <a:lstStyle/>
+          <a:p>
+            <a:pPr indent="0" marL="0">
+              <a:lnSpc>
+                <a:spcPct val="155000"/>
+              </a:lnSpc>
+              <a:buNone/>
+            </a:pPr>
+            <a:r>
+              <a:rPr lang="en-US" sz="1200" dirty="0">
+                <a:solidFill>
+                  <a:srgbClr val="16232E"/>
+                </a:solidFill>
+                <a:latin typeface="맑은 고딕" pitchFamily="34" charset="0"/>
+                <a:ea typeface="맑은 고딕" pitchFamily="34" charset="-122"/>
+                <a:cs typeface="맑은 고딕" pitchFamily="34" charset="-120"/>
+              </a:rPr>
+              <a:t>[1] [원 논문] Hamed SA, Mohammad MH, Grawish ME, Fouda AM, Montasser MA. Three pharmacological agents for acceleratory orthodontic tooth movement and subsequent relapse: A randomized controlled animal study. Int Orthod. 2026;24:101112.</a:t>
+            </a:r>
+            <a:endParaRPr lang="en-US" sz="1200" dirty="0"/>
+          </a:p>
+          <a:p>
+            <a:pPr indent="0" marL="0">
+              <a:lnSpc>
+                <a:spcPct val="155000"/>
+              </a:lnSpc>
+              <a:buNone/>
+            </a:pPr>
+            <a:r>
+              <a:rPr lang="en-US" sz="1200" dirty="0">
+                <a:solidFill>
+                  <a:srgbClr val="16232E"/>
+                </a:solidFill>
+                <a:latin typeface="맑은 고딕" pitchFamily="34" charset="0"/>
+                <a:ea typeface="맑은 고딕" pitchFamily="34" charset="-122"/>
+                <a:cs typeface="맑은 고딕" pitchFamily="34" charset="-120"/>
+              </a:rPr>
+              <a:t>[2] Baofeng L, et al. Characterization of a rabbit osteoporosis model induced by ovariectomy and glucocorticoid. Bone 2010;46(3):396-401.</a:t>
+            </a:r>
+            <a:endParaRPr lang="en-US" sz="1200" dirty="0"/>
+          </a:p>
+          <a:p>
+            <a:pPr indent="0" marL="0">
+              <a:lnSpc>
+                <a:spcPct val="155000"/>
+              </a:lnSpc>
+              <a:buNone/>
+            </a:pPr>
+            <a:r>
+              <a:rPr lang="en-US" sz="1200" dirty="0">
+                <a:solidFill>
+                  <a:srgbClr val="16232E"/>
+                </a:solidFill>
+                <a:latin typeface="맑은 고딕" pitchFamily="34" charset="0"/>
+                <a:ea typeface="맑은 고딕" pitchFamily="34" charset="-122"/>
+                <a:cs typeface="맑은 고딕" pitchFamily="34" charset="-120"/>
+              </a:rPr>
+              <a:t>[3] Abtahi M, et al. Effect of corticosteroids administration in rabbit model. J Clin Pediatr Dent 2014;38:285-9.</a:t>
+            </a:r>
+            <a:endParaRPr lang="en-US" sz="1200" dirty="0"/>
+          </a:p>
+          <a:p>
+            <a:pPr indent="0" marL="0">
+              <a:lnSpc>
+                <a:spcPct val="155000"/>
+              </a:lnSpc>
+              <a:buNone/>
+            </a:pPr>
+            <a:r>
+              <a:rPr lang="en-US" sz="1200" dirty="0">
+                <a:solidFill>
+                  <a:srgbClr val="16232E"/>
+                </a:solidFill>
+                <a:latin typeface="맑은 고딕" pitchFamily="34" charset="0"/>
+                <a:ea typeface="맑은 고딕" pitchFamily="34" charset="-122"/>
+                <a:cs typeface="맑은 고딕" pitchFamily="34" charset="-120"/>
+              </a:rPr>
+              <a:t>[4] Yamane A, Fukui T, Chiba M. In vitro measurement of orthodontic tooth movement in rats given beta-aminopropionitrile or hydrocortisone. Eur J Orthod 1997;19(1):21-8.</a:t>
+            </a:r>
+            <a:endParaRPr lang="en-US" sz="1200" dirty="0"/>
+          </a:p>
+          <a:p>
+            <a:pPr indent="0" marL="0">
+              <a:lnSpc>
+                <a:spcPct val="155000"/>
+              </a:lnSpc>
+              <a:buNone/>
+            </a:pPr>
+            <a:r>
+              <a:rPr lang="en-US" sz="1200" dirty="0">
+                <a:solidFill>
+                  <a:srgbClr val="16232E"/>
+                </a:solidFill>
+                <a:latin typeface="맑은 고딕" pitchFamily="34" charset="0"/>
+                <a:ea typeface="맑은 고딕" pitchFamily="34" charset="-122"/>
+                <a:cs typeface="맑은 고딕" pitchFamily="34" charset="-120"/>
+              </a:rPr>
+              <a:t>[5] Kale S, et al. Comparison of 1,25-dihydroxycholecalciferol and prostaglandin E2 on orthodontic tooth movement. Am J Orthod Dentofacial Orthop 2004;125:607-14.</a:t>
+            </a:r>
+            <a:endParaRPr lang="en-US" sz="1200" dirty="0"/>
+          </a:p>
+          <a:p>
+            <a:pPr indent="0" marL="0">
+              <a:lnSpc>
+                <a:spcPct val="155000"/>
+              </a:lnSpc>
+              <a:buNone/>
+            </a:pPr>
+            <a:r>
+              <a:rPr lang="en-US" sz="1200" dirty="0">
+                <a:solidFill>
+                  <a:srgbClr val="16232E"/>
+                </a:solidFill>
+                <a:latin typeface="맑은 고딕" pitchFamily="34" charset="0"/>
+                <a:ea typeface="맑은 고딕" pitchFamily="34" charset="-122"/>
+                <a:cs typeface="맑은 고딕" pitchFamily="34" charset="-120"/>
+              </a:rPr>
+              <a:t>[6] Seifi M, Hamedi R, Khavandegar Z. The effect of thyroid hormone, prostaglandin E2, and calcium gluconate on orthodontic tooth movement and root resorption in rats. J Dent 2015;16(1 Suppl):35.</a:t>
+            </a:r>
+            <a:endParaRPr lang="en-US" sz="1200" dirty="0"/>
+          </a:p>
+        </p:txBody>
+      </p:sp>
+      <p:sp>
+        <p:nvSpPr>
+          <p:cNvPr id="5" name="Text 3"/>
+          <p:cNvSpPr txBox="1"/>
+          <p:nvPr/>
+        </p:nvSpPr>
+        <p:spPr>
+          <a:xfrm>
+            <a:off x="640080" y="6035040"/>
+            <a:ext cx="10908792" cy="365760"/>
+          </a:xfrm>
+          <a:prstGeom prst="rect">
+            <a:avLst/>
+          </a:prstGeom>
+          <a:noFill/>
+          <a:ln/>
+        </p:spPr>
+        <p:txBody>
+          <a:bodyPr wrap="square" lIns="0" tIns="0" rIns="0" bIns="0" rtlCol="0" anchor="ctr"/>
+          <a:lstStyle/>
+          <a:p>
+            <a:pPr indent="0" marL="0">
+              <a:buNone/>
+            </a:pPr>
+            <a:r>
+              <a:rPr lang="en-US" sz="1050" i="1" dirty="0">
+                <a:solidFill>
+                  <a:srgbClr val="5B6B7A"/>
+                </a:solidFill>
+                <a:latin typeface="맑은 고딕" pitchFamily="34" charset="0"/>
+                <a:ea typeface="맑은 고딕" pitchFamily="34" charset="-122"/>
+                <a:cs typeface="맑은 고딕" pitchFamily="34" charset="-120"/>
+              </a:rPr>
+              <a:t>※ 슬라이드 11(선행연구 비교)에서 이름으로 인용한 문헌만 수록. 전체 참고문헌(28건)은 원 논문 References 참고.</a:t>
+            </a:r>
+            <a:endParaRPr lang="en-US" sz="1050" dirty="0"/>
+          </a:p>
+        </p:txBody>
+      </p:sp>
+      <p:sp>
+        <p:nvSpPr>
+          <p:cNvPr id="6" name="Text 4"/>
+          <p:cNvSpPr txBox="1"/>
+          <p:nvPr/>
+        </p:nvSpPr>
+        <p:spPr>
+          <a:xfrm>
+            <a:off x="11365992" y="6400800"/>
+            <a:ext cx="457200" cy="320040"/>
+          </a:xfrm>
+          <a:prstGeom prst="rect">
+            <a:avLst/>
+          </a:prstGeom>
+          <a:noFill/>
+          <a:ln/>
+        </p:spPr>
+        <p:txBody>
+          <a:bodyPr wrap="square" lIns="0" tIns="0" rIns="0" bIns="0" rtlCol="0" anchor="ctr"/>
+          <a:lstStyle/>
+          <a:p>
+            <a:pPr algn="r" indent="0" marL="0">
+              <a:buNone/>
+            </a:pPr>
+            <a:r>
+              <a:rPr lang="en-US" sz="1100" dirty="0">
+                <a:solidFill>
+                  <a:srgbClr val="5B6B7A"/>
+                </a:solidFill>
+                <a:latin typeface="Cambria" pitchFamily="34" charset="0"/>
+                <a:ea typeface="Cambria" pitchFamily="34" charset="-122"/>
+                <a:cs typeface="Cambria" pitchFamily="34" charset="-120"/>
+              </a:rPr>
+              <a:t>13</a:t>
+            </a:r>
+            <a:endParaRPr lang="en-US" sz="1100" dirty="0"/>
+          </a:p>
+        </p:txBody>
+      </p:sp>
+    </p:spTree>
+  </p:cSld>
+  <p:clrMapOvr>
+    <a:masterClrMapping/>
+  </p:clrMapOvr>
+</p:sld>
+</file>
+
+<file path=ppt/slides/slide14.xml><?xml version="1.0" encoding="utf-8"?>
+<p:sld xmlns:a="http://schemas.openxmlformats.org/drawingml/2006/main" xmlns:r="http://schemas.openxmlformats.org/officeDocument/2006/relationships" xmlns:p="http://schemas.openxmlformats.org/presentationml/2006/main">
+  <p:cSld name="Slide 14">
     <p:bg>
       <p:bgPr>
         <a:solidFill>
@@ -4315,7 +5349,7 @@
                 <a:ea typeface="Cambria" pitchFamily="34" charset="-122"/>
                 <a:cs typeface="Cambria" pitchFamily="34" charset="-120"/>
               </a:rPr>
-              <a:t>13</a:t>
+              <a:t>14</a:t>
             </a:r>
             <a:endParaRPr lang="en-US" sz="1100" dirty="0"/>
           </a:p>
@@ -4329,9 +5363,9 @@
 </p:sld>
 </file>
 
-<file path=ppt/slides/slide14.xml><?xml version="1.0" encoding="utf-8"?>
+<file path=ppt/slides/slide15.xml><?xml version="1.0" encoding="utf-8"?>
 <p:sld xmlns:a="http://schemas.openxmlformats.org/drawingml/2006/main" xmlns:r="http://schemas.openxmlformats.org/officeDocument/2006/relationships" xmlns:p="http://schemas.openxmlformats.org/presentationml/2006/main">
-  <p:cSld name="Slide 14">
+  <p:cSld name="Slide 15">
     <p:bg>
       <p:bgPr>
         <a:solidFill>
@@ -4439,9 +5473,9 @@
 </p:sld>
 </file>
 
-<file path=ppt/slides/slide15.xml><?xml version="1.0" encoding="utf-8"?>
+<file path=ppt/slides/slide16.xml><?xml version="1.0" encoding="utf-8"?>
 <p:sld xmlns:a="http://schemas.openxmlformats.org/drawingml/2006/main" xmlns:r="http://schemas.openxmlformats.org/officeDocument/2006/relationships" xmlns:p="http://schemas.openxmlformats.org/presentationml/2006/main">
-  <p:cSld name="Slide 15">
+  <p:cSld name="Slide 16">
     <p:bg>
       <p:bgPr>
         <a:solidFill>
@@ -4543,7 +5577,7 @@
       </p:sp>
       <p:graphicFrame>
         <p:nvGraphicFramePr>
-          <p:cNvPr id="16" name="Table 0"/>
+          <p:cNvPr id="17" name="Table 0"/>
           <p:cNvGraphicFramePr>
             <a:graphicFrameLocks noGrp="1"/>
           </p:cNvGraphicFramePr>
@@ -5873,7 +6907,7 @@
                 <a:ea typeface="Cambria" pitchFamily="34" charset="-122"/>
                 <a:cs typeface="Cambria" pitchFamily="34" charset="-120"/>
               </a:rPr>
-              <a:t>15</a:t>
+              <a:t>16</a:t>
             </a:r>
             <a:endParaRPr lang="en-US" sz="1100" dirty="0"/>
           </a:p>
@@ -8781,7 +9815,7 @@
                 <a:ea typeface="맑은 고딕" pitchFamily="34" charset="-122"/>
                 <a:cs typeface="맑은 고딕" pitchFamily="34" charset="-120"/>
               </a:rPr>
-              <a:t>RESULTS · 01</a:t>
+              <a:t>STATISTICS 101</a:t>
             </a:r>
             <a:endParaRPr lang="en-US" sz="1200" dirty="0"/>
           </a:p>
@@ -8820,7 +9854,7 @@
                 <a:ea typeface="맑은 고딕" pitchFamily="34" charset="-122"/>
                 <a:cs typeface="맑은 고딕" pitchFamily="34" charset="-120"/>
               </a:rPr>
-              <a:t>가속기(4주) — 치아이동량 비교</a:t>
+              <a:t>이 논문은 어떻게 통계로 검증했나</a:t>
             </a:r>
             <a:endParaRPr lang="en-US" sz="2400" dirty="0"/>
           </a:p>
@@ -8834,12 +9868,12 @@
         </p:nvSpPr>
         <p:spPr>
           <a:xfrm>
-            <a:off x="640080" y="1691640"/>
-            <a:ext cx="3538728" cy="1828800"/>
+            <a:off x="640080" y="1600200"/>
+            <a:ext cx="2651760" cy="3291840"/>
           </a:xfrm>
           <a:prstGeom prst="roundRect">
             <a:avLst>
-              <a:gd name="adj" fmla="val 5000"/>
+              <a:gd name="adj" fmla="val 3448"/>
             </a:avLst>
           </a:prstGeom>
           <a:solidFill>
@@ -8857,96 +9891,160 @@
       </p:sp>
       <p:sp>
         <p:nvSpPr>
-          <p:cNvPr id="5" name="Text 3"/>
-          <p:cNvSpPr txBox="1"/>
-          <p:nvPr/>
-        </p:nvSpPr>
-        <p:spPr>
-          <a:xfrm>
-            <a:off x="640080" y="1920240"/>
-            <a:ext cx="3538728" cy="1005840"/>
-          </a:xfrm>
-          <a:prstGeom prst="rect">
-            <a:avLst/>
-          </a:prstGeom>
-          <a:noFill/>
-          <a:ln/>
-        </p:spPr>
-        <p:txBody>
-          <a:bodyPr wrap="square" lIns="0" tIns="0" rIns="0" bIns="0" rtlCol="0" anchor="ctr"/>
-          <a:lstStyle/>
-          <a:p>
-            <a:pPr algn="ctr" indent="0" marL="0">
-              <a:buNone/>
-            </a:pPr>
-            <a:r>
-              <a:rPr lang="en-US" sz="4000" b="1" dirty="0">
-                <a:solidFill>
-                  <a:srgbClr val="D97706"/>
-                </a:solidFill>
-                <a:latin typeface="맑은 고딕" pitchFamily="34" charset="0"/>
-                <a:ea typeface="맑은 고딕" pitchFamily="34" charset="-122"/>
-                <a:cs typeface="맑은 고딕" pitchFamily="34" charset="-120"/>
-              </a:rPr>
-              <a:t>6.50 ± 0.88</a:t>
-            </a:r>
-            <a:endParaRPr lang="en-US" sz="4000" dirty="0"/>
-          </a:p>
-        </p:txBody>
-      </p:sp>
-      <p:sp>
-        <p:nvSpPr>
-          <p:cNvPr id="6" name="Text 4"/>
-          <p:cNvSpPr txBox="1"/>
-          <p:nvPr/>
-        </p:nvSpPr>
-        <p:spPr>
-          <a:xfrm>
-            <a:off x="640080" y="2971800"/>
-            <a:ext cx="3538728" cy="457200"/>
-          </a:xfrm>
-          <a:prstGeom prst="rect">
-            <a:avLst/>
-          </a:prstGeom>
-          <a:noFill/>
-          <a:ln/>
-        </p:spPr>
-        <p:txBody>
-          <a:bodyPr wrap="square" lIns="0" tIns="0" rIns="0" bIns="0" rtlCol="0" anchor="ctr"/>
-          <a:lstStyle/>
-          <a:p>
-            <a:pPr algn="ctr" indent="0" marL="0">
-              <a:buNone/>
-            </a:pPr>
-            <a:r>
-              <a:rPr lang="en-US" sz="1400" b="1" dirty="0">
-                <a:solidFill>
-                  <a:srgbClr val="16232E"/>
-                </a:solidFill>
-                <a:latin typeface="맑은 고딕" pitchFamily="34" charset="0"/>
-                <a:ea typeface="맑은 고딕" pitchFamily="34" charset="-122"/>
-                <a:cs typeface="맑은 고딕" pitchFamily="34" charset="-120"/>
-              </a:rPr>
-              <a:t>mm · 코르티코스테로이드</a:t>
-            </a:r>
-            <a:endParaRPr lang="en-US" sz="1400" dirty="0"/>
-          </a:p>
-        </p:txBody>
-      </p:sp>
-      <p:sp>
-        <p:nvSpPr>
-          <p:cNvPr id="7" name="Shape 5"/>
+          <p:cNvPr id="5" name="Shape 3"/>
           <p:cNvSpPr/>
           <p:nvPr/>
         </p:nvSpPr>
         <p:spPr>
           <a:xfrm>
-            <a:off x="4361688" y="1691640"/>
-            <a:ext cx="3538728" cy="1828800"/>
+            <a:off x="822960" y="1783080"/>
+            <a:ext cx="2286000" cy="777240"/>
           </a:xfrm>
           <a:prstGeom prst="roundRect">
             <a:avLst>
-              <a:gd name="adj" fmla="val 5000"/>
+              <a:gd name="adj" fmla="val 9412"/>
+            </a:avLst>
+          </a:prstGeom>
+          <a:solidFill>
+            <a:srgbClr val="3D7EA6"/>
+          </a:solidFill>
+          <a:ln/>
+        </p:spPr>
+      </p:sp>
+      <p:sp>
+        <p:nvSpPr>
+          <p:cNvPr id="6" name="Text 4"/>
+          <p:cNvSpPr txBox="1"/>
+          <p:nvPr/>
+        </p:nvSpPr>
+        <p:spPr>
+          <a:xfrm>
+            <a:off x="841248" y="1828800"/>
+            <a:ext cx="2249424" cy="384048"/>
+          </a:xfrm>
+          <a:prstGeom prst="rect">
+            <a:avLst/>
+          </a:prstGeom>
+          <a:noFill/>
+          <a:ln/>
+        </p:spPr>
+        <p:txBody>
+          <a:bodyPr wrap="square" lIns="0" tIns="0" rIns="0" bIns="0" rtlCol="0" anchor="ctr"/>
+          <a:lstStyle/>
+          <a:p>
+            <a:pPr algn="ctr" indent="0" marL="0">
+              <a:buNone/>
+            </a:pPr>
+            <a:r>
+              <a:rPr lang="en-US" sz="1250" b="1" dirty="0">
+                <a:solidFill>
+                  <a:srgbClr val="FFFFFF"/>
+                </a:solidFill>
+                <a:latin typeface="맑은 고딕" pitchFamily="34" charset="0"/>
+                <a:ea typeface="맑은 고딕" pitchFamily="34" charset="-122"/>
+                <a:cs typeface="맑은 고딕" pitchFamily="34" charset="-120"/>
+              </a:rPr>
+              <a:t>Shapiro–Wilk 검정</a:t>
+            </a:r>
+            <a:endParaRPr lang="en-US" sz="1250" dirty="0"/>
+          </a:p>
+        </p:txBody>
+      </p:sp>
+      <p:sp>
+        <p:nvSpPr>
+          <p:cNvPr id="7" name="Text 5"/>
+          <p:cNvSpPr txBox="1"/>
+          <p:nvPr/>
+        </p:nvSpPr>
+        <p:spPr>
+          <a:xfrm>
+            <a:off x="841248" y="2176272"/>
+            <a:ext cx="2249424" cy="320040"/>
+          </a:xfrm>
+          <a:prstGeom prst="rect">
+            <a:avLst/>
+          </a:prstGeom>
+          <a:noFill/>
+          <a:ln/>
+        </p:spPr>
+        <p:txBody>
+          <a:bodyPr wrap="square" lIns="0" tIns="0" rIns="0" bIns="0" rtlCol="0" anchor="ctr"/>
+          <a:lstStyle/>
+          <a:p>
+            <a:pPr algn="ctr" indent="0" marL="0">
+              <a:buNone/>
+            </a:pPr>
+            <a:r>
+              <a:rPr lang="en-US" sz="1000" i="1" dirty="0">
+                <a:solidFill>
+                  <a:srgbClr val="FFFFFF"/>
+                </a:solidFill>
+                <a:latin typeface="맑은 고딕" pitchFamily="34" charset="0"/>
+                <a:ea typeface="맑은 고딕" pitchFamily="34" charset="-122"/>
+                <a:cs typeface="맑은 고딕" pitchFamily="34" charset="-120"/>
+              </a:rPr>
+              <a:t>정규성 검정</a:t>
+            </a:r>
+            <a:endParaRPr lang="en-US" sz="1000" dirty="0"/>
+          </a:p>
+        </p:txBody>
+      </p:sp>
+      <p:sp>
+        <p:nvSpPr>
+          <p:cNvPr id="8" name="Text 6"/>
+          <p:cNvSpPr txBox="1"/>
+          <p:nvPr/>
+        </p:nvSpPr>
+        <p:spPr>
+          <a:xfrm>
+            <a:off x="822960" y="2651760"/>
+            <a:ext cx="2286000" cy="2103120"/>
+          </a:xfrm>
+          <a:prstGeom prst="rect">
+            <a:avLst/>
+          </a:prstGeom>
+          <a:noFill/>
+          <a:ln/>
+        </p:spPr>
+        <p:txBody>
+          <a:bodyPr wrap="square" lIns="0" tIns="0" rIns="0" bIns="0" rtlCol="0" anchor="t"/>
+          <a:lstStyle/>
+          <a:p>
+            <a:pPr indent="0" marL="0">
+              <a:lnSpc>
+                <a:spcPct val="130000"/>
+              </a:lnSpc>
+              <a:buNone/>
+            </a:pPr>
+            <a:r>
+              <a:rPr lang="en-US" sz="1050" dirty="0">
+                <a:solidFill>
+                  <a:srgbClr val="16232E"/>
+                </a:solidFill>
+                <a:latin typeface="맑은 고딕" pitchFamily="34" charset="0"/>
+                <a:ea typeface="맑은 고딕" pitchFamily="34" charset="-122"/>
+                <a:cs typeface="맑은 고딕" pitchFamily="34" charset="-120"/>
+              </a:rPr>
+              <a:t>데이터가 정규분포를 따르는지 확인하는 사전 점검 ▷ 통과해야 ANOVA 같은 모수적 검정을 쓸 수 있음</a:t>
+            </a:r>
+            <a:endParaRPr lang="en-US" sz="1050" dirty="0"/>
+          </a:p>
+        </p:txBody>
+      </p:sp>
+      <p:sp>
+        <p:nvSpPr>
+          <p:cNvPr id="9" name="Shape 7"/>
+          <p:cNvSpPr/>
+          <p:nvPr/>
+        </p:nvSpPr>
+        <p:spPr>
+          <a:xfrm>
+            <a:off x="3429000" y="1600200"/>
+            <a:ext cx="2651760" cy="3291840"/>
+          </a:xfrm>
+          <a:prstGeom prst="roundRect">
+            <a:avLst>
+              <a:gd name="adj" fmla="val 3448"/>
             </a:avLst>
           </a:prstGeom>
           <a:solidFill>
@@ -8964,96 +10062,160 @@
       </p:sp>
       <p:sp>
         <p:nvSpPr>
-          <p:cNvPr id="8" name="Text 6"/>
-          <p:cNvSpPr txBox="1"/>
-          <p:nvPr/>
-        </p:nvSpPr>
-        <p:spPr>
-          <a:xfrm>
-            <a:off x="4361688" y="1920240"/>
-            <a:ext cx="3538728" cy="1005840"/>
-          </a:xfrm>
-          <a:prstGeom prst="rect">
-            <a:avLst/>
-          </a:prstGeom>
-          <a:noFill/>
-          <a:ln/>
-        </p:spPr>
-        <p:txBody>
-          <a:bodyPr wrap="square" lIns="0" tIns="0" rIns="0" bIns="0" rtlCol="0" anchor="ctr"/>
-          <a:lstStyle/>
-          <a:p>
-            <a:pPr algn="ctr" indent="0" marL="0">
-              <a:buNone/>
-            </a:pPr>
-            <a:r>
-              <a:rPr lang="en-US" sz="4000" b="1" dirty="0">
-                <a:solidFill>
-                  <a:srgbClr val="3D7EA6"/>
-                </a:solidFill>
-                <a:latin typeface="맑은 고딕" pitchFamily="34" charset="0"/>
-                <a:ea typeface="맑은 고딕" pitchFamily="34" charset="-122"/>
-                <a:cs typeface="맑은 고딕" pitchFamily="34" charset="-120"/>
-              </a:rPr>
-              <a:t>3.73 ± 0.14</a:t>
-            </a:r>
-            <a:endParaRPr lang="en-US" sz="4000" dirty="0"/>
-          </a:p>
-        </p:txBody>
-      </p:sp>
-      <p:sp>
-        <p:nvSpPr>
-          <p:cNvPr id="9" name="Text 7"/>
-          <p:cNvSpPr txBox="1"/>
-          <p:nvPr/>
-        </p:nvSpPr>
-        <p:spPr>
-          <a:xfrm>
-            <a:off x="4361688" y="2971800"/>
-            <a:ext cx="3538728" cy="457200"/>
-          </a:xfrm>
-          <a:prstGeom prst="rect">
-            <a:avLst/>
-          </a:prstGeom>
-          <a:noFill/>
-          <a:ln/>
-        </p:spPr>
-        <p:txBody>
-          <a:bodyPr wrap="square" lIns="0" tIns="0" rIns="0" bIns="0" rtlCol="0" anchor="ctr"/>
-          <a:lstStyle/>
-          <a:p>
-            <a:pPr algn="ctr" indent="0" marL="0">
-              <a:buNone/>
-            </a:pPr>
-            <a:r>
-              <a:rPr lang="en-US" sz="1400" b="1" dirty="0">
-                <a:solidFill>
-                  <a:srgbClr val="16232E"/>
-                </a:solidFill>
-                <a:latin typeface="맑은 고딕" pitchFamily="34" charset="0"/>
-                <a:ea typeface="맑은 고딕" pitchFamily="34" charset="-122"/>
-                <a:cs typeface="맑은 고딕" pitchFamily="34" charset="-120"/>
-              </a:rPr>
-              <a:t>mm · 비타민D</a:t>
-            </a:r>
-            <a:endParaRPr lang="en-US" sz="1400" dirty="0"/>
-          </a:p>
-        </p:txBody>
-      </p:sp>
-      <p:sp>
-        <p:nvSpPr>
           <p:cNvPr id="10" name="Shape 8"/>
           <p:cNvSpPr/>
           <p:nvPr/>
         </p:nvSpPr>
         <p:spPr>
           <a:xfrm>
-            <a:off x="8083296" y="1691640"/>
-            <a:ext cx="3538728" cy="1828800"/>
+            <a:off x="3611880" y="1783080"/>
+            <a:ext cx="2286000" cy="777240"/>
           </a:xfrm>
           <a:prstGeom prst="roundRect">
             <a:avLst>
-              <a:gd name="adj" fmla="val 5000"/>
+              <a:gd name="adj" fmla="val 9412"/>
+            </a:avLst>
+          </a:prstGeom>
+          <a:solidFill>
+            <a:srgbClr val="1B4965"/>
+          </a:solidFill>
+          <a:ln/>
+        </p:spPr>
+      </p:sp>
+      <p:sp>
+        <p:nvSpPr>
+          <p:cNvPr id="11" name="Text 9"/>
+          <p:cNvSpPr txBox="1"/>
+          <p:nvPr/>
+        </p:nvSpPr>
+        <p:spPr>
+          <a:xfrm>
+            <a:off x="3630168" y="1828800"/>
+            <a:ext cx="2249424" cy="384048"/>
+          </a:xfrm>
+          <a:prstGeom prst="rect">
+            <a:avLst/>
+          </a:prstGeom>
+          <a:noFill/>
+          <a:ln/>
+        </p:spPr>
+        <p:txBody>
+          <a:bodyPr wrap="square" lIns="0" tIns="0" rIns="0" bIns="0" rtlCol="0" anchor="ctr"/>
+          <a:lstStyle/>
+          <a:p>
+            <a:pPr algn="ctr" indent="0" marL="0">
+              <a:buNone/>
+            </a:pPr>
+            <a:r>
+              <a:rPr lang="en-US" sz="1250" b="1" dirty="0">
+                <a:solidFill>
+                  <a:srgbClr val="FFFFFF"/>
+                </a:solidFill>
+                <a:latin typeface="맑은 고딕" pitchFamily="34" charset="0"/>
+                <a:ea typeface="맑은 고딕" pitchFamily="34" charset="-122"/>
+                <a:cs typeface="맑은 고딕" pitchFamily="34" charset="-120"/>
+              </a:rPr>
+              <a:t>One-way ANOVA</a:t>
+            </a:r>
+            <a:endParaRPr lang="en-US" sz="1250" dirty="0"/>
+          </a:p>
+        </p:txBody>
+      </p:sp>
+      <p:sp>
+        <p:nvSpPr>
+          <p:cNvPr id="12" name="Text 10"/>
+          <p:cNvSpPr txBox="1"/>
+          <p:nvPr/>
+        </p:nvSpPr>
+        <p:spPr>
+          <a:xfrm>
+            <a:off x="3630168" y="2176272"/>
+            <a:ext cx="2249424" cy="320040"/>
+          </a:xfrm>
+          <a:prstGeom prst="rect">
+            <a:avLst/>
+          </a:prstGeom>
+          <a:noFill/>
+          <a:ln/>
+        </p:spPr>
+        <p:txBody>
+          <a:bodyPr wrap="square" lIns="0" tIns="0" rIns="0" bIns="0" rtlCol="0" anchor="ctr"/>
+          <a:lstStyle/>
+          <a:p>
+            <a:pPr algn="ctr" indent="0" marL="0">
+              <a:buNone/>
+            </a:pPr>
+            <a:r>
+              <a:rPr lang="en-US" sz="1000" i="1" dirty="0">
+                <a:solidFill>
+                  <a:srgbClr val="FFFFFF"/>
+                </a:solidFill>
+                <a:latin typeface="맑은 고딕" pitchFamily="34" charset="0"/>
+                <a:ea typeface="맑은 고딕" pitchFamily="34" charset="-122"/>
+                <a:cs typeface="맑은 고딕" pitchFamily="34" charset="-120"/>
+              </a:rPr>
+              <a:t>일원분산분석</a:t>
+            </a:r>
+            <a:endParaRPr lang="en-US" sz="1000" dirty="0"/>
+          </a:p>
+        </p:txBody>
+      </p:sp>
+      <p:sp>
+        <p:nvSpPr>
+          <p:cNvPr id="13" name="Text 11"/>
+          <p:cNvSpPr txBox="1"/>
+          <p:nvPr/>
+        </p:nvSpPr>
+        <p:spPr>
+          <a:xfrm>
+            <a:off x="3611880" y="2651760"/>
+            <a:ext cx="2286000" cy="2103120"/>
+          </a:xfrm>
+          <a:prstGeom prst="rect">
+            <a:avLst/>
+          </a:prstGeom>
+          <a:noFill/>
+          <a:ln/>
+        </p:spPr>
+        <p:txBody>
+          <a:bodyPr wrap="square" lIns="0" tIns="0" rIns="0" bIns="0" rtlCol="0" anchor="t"/>
+          <a:lstStyle/>
+          <a:p>
+            <a:pPr indent="0" marL="0">
+              <a:lnSpc>
+                <a:spcPct val="130000"/>
+              </a:lnSpc>
+              <a:buNone/>
+            </a:pPr>
+            <a:r>
+              <a:rPr lang="en-US" sz="1050" dirty="0">
+                <a:solidFill>
+                  <a:srgbClr val="16232E"/>
+                </a:solidFill>
+                <a:latin typeface="맑은 고딕" pitchFamily="34" charset="0"/>
+                <a:ea typeface="맑은 고딕" pitchFamily="34" charset="-122"/>
+                <a:cs typeface="맑은 고딕" pitchFamily="34" charset="-120"/>
+              </a:rPr>
+              <a:t>3개 이상 군의 평균을 한 번에 비교 ▷ "군 사이에 적어도 하나는 다르다"까지만 알려줌, 어느 군끼리 다른지는 모름</a:t>
+            </a:r>
+            <a:endParaRPr lang="en-US" sz="1050" dirty="0"/>
+          </a:p>
+        </p:txBody>
+      </p:sp>
+      <p:sp>
+        <p:nvSpPr>
+          <p:cNvPr id="14" name="Shape 12"/>
+          <p:cNvSpPr/>
+          <p:nvPr/>
+        </p:nvSpPr>
+        <p:spPr>
+          <a:xfrm>
+            <a:off x="6217920" y="1600200"/>
+            <a:ext cx="2651760" cy="3291840"/>
+          </a:xfrm>
+          <a:prstGeom prst="roundRect">
+            <a:avLst>
+              <a:gd name="adj" fmla="val 3448"/>
             </a:avLst>
           </a:prstGeom>
           <a:solidFill>
@@ -9071,14 +10233,36 @@
       </p:sp>
       <p:sp>
         <p:nvSpPr>
-          <p:cNvPr id="11" name="Text 9"/>
-          <p:cNvSpPr txBox="1"/>
-          <p:nvPr/>
-        </p:nvSpPr>
-        <p:spPr>
-          <a:xfrm>
-            <a:off x="8083296" y="1920240"/>
-            <a:ext cx="3538728" cy="1005840"/>
+          <p:cNvPr id="15" name="Shape 13"/>
+          <p:cNvSpPr/>
+          <p:nvPr/>
+        </p:nvSpPr>
+        <p:spPr>
+          <a:xfrm>
+            <a:off x="6400800" y="1783080"/>
+            <a:ext cx="2286000" cy="777240"/>
+          </a:xfrm>
+          <a:prstGeom prst="roundRect">
+            <a:avLst>
+              <a:gd name="adj" fmla="val 9412"/>
+            </a:avLst>
+          </a:prstGeom>
+          <a:solidFill>
+            <a:srgbClr val="D97706"/>
+          </a:solidFill>
+          <a:ln/>
+        </p:spPr>
+      </p:sp>
+      <p:sp>
+        <p:nvSpPr>
+          <p:cNvPr id="16" name="Text 14"/>
+          <p:cNvSpPr txBox="1"/>
+          <p:nvPr/>
+        </p:nvSpPr>
+        <p:spPr>
+          <a:xfrm>
+            <a:off x="6419088" y="1828800"/>
+            <a:ext cx="2249424" cy="384048"/>
           </a:xfrm>
           <a:prstGeom prst="rect">
             <a:avLst/>
@@ -9094,30 +10278,30 @@
               <a:buNone/>
             </a:pPr>
             <a:r>
-              <a:rPr lang="en-US" sz="4000" b="1" dirty="0">
-                <a:solidFill>
-                  <a:srgbClr val="2F855A"/>
-                </a:solidFill>
-                <a:latin typeface="맑은 고딕" pitchFamily="34" charset="0"/>
-                <a:ea typeface="맑은 고딕" pitchFamily="34" charset="-122"/>
-                <a:cs typeface="맑은 고딕" pitchFamily="34" charset="-120"/>
-              </a:rPr>
-              <a:t>2.80 ± 0.15</a:t>
-            </a:r>
-            <a:endParaRPr lang="en-US" sz="4000" dirty="0"/>
-          </a:p>
-        </p:txBody>
-      </p:sp>
-      <p:sp>
-        <p:nvSpPr>
-          <p:cNvPr id="12" name="Text 10"/>
-          <p:cNvSpPr txBox="1"/>
-          <p:nvPr/>
-        </p:nvSpPr>
-        <p:spPr>
-          <a:xfrm>
-            <a:off x="8083296" y="2971800"/>
-            <a:ext cx="3538728" cy="457200"/>
+              <a:rPr lang="en-US" sz="1250" b="1" dirty="0">
+                <a:solidFill>
+                  <a:srgbClr val="FFFFFF"/>
+                </a:solidFill>
+                <a:latin typeface="맑은 고딕" pitchFamily="34" charset="0"/>
+                <a:ea typeface="맑은 고딕" pitchFamily="34" charset="-122"/>
+                <a:cs typeface="맑은 고딕" pitchFamily="34" charset="-120"/>
+              </a:rPr>
+              <a:t>Tukey post-hoc</a:t>
+            </a:r>
+            <a:endParaRPr lang="en-US" sz="1250" dirty="0"/>
+          </a:p>
+        </p:txBody>
+      </p:sp>
+      <p:sp>
+        <p:nvSpPr>
+          <p:cNvPr id="17" name="Text 15"/>
+          <p:cNvSpPr txBox="1"/>
+          <p:nvPr/>
+        </p:nvSpPr>
+        <p:spPr>
+          <a:xfrm>
+            <a:off x="6419088" y="2176272"/>
+            <a:ext cx="2249424" cy="320040"/>
           </a:xfrm>
           <a:prstGeom prst="rect">
             <a:avLst/>
@@ -9133,39 +10317,39 @@
               <a:buNone/>
             </a:pPr>
             <a:r>
-              <a:rPr lang="en-US" sz="1400" b="1" dirty="0">
-                <a:solidFill>
-                  <a:srgbClr val="16232E"/>
-                </a:solidFill>
-                <a:latin typeface="맑은 고딕" pitchFamily="34" charset="0"/>
-                <a:ea typeface="맑은 고딕" pitchFamily="34" charset="-122"/>
-                <a:cs typeface="맑은 고딕" pitchFamily="34" charset="-120"/>
-              </a:rPr>
-              <a:t>mm · PGE₂</a:t>
-            </a:r>
-            <a:endParaRPr lang="en-US" sz="1400" dirty="0"/>
-          </a:p>
-        </p:txBody>
-      </p:sp>
-      <p:sp>
-        <p:nvSpPr>
-          <p:cNvPr id="13" name="Text 11"/>
-          <p:cNvSpPr txBox="1"/>
-          <p:nvPr/>
-        </p:nvSpPr>
-        <p:spPr>
-          <a:xfrm>
-            <a:off x="640080" y="3703320"/>
-            <a:ext cx="10908792" cy="548640"/>
-          </a:xfrm>
-          <a:prstGeom prst="rect">
-            <a:avLst/>
-          </a:prstGeom>
-          <a:noFill/>
-          <a:ln/>
-        </p:spPr>
-        <p:txBody>
-          <a:bodyPr wrap="square" lIns="0" tIns="0" rIns="0" bIns="0" rtlCol="0" anchor="ctr"/>
+              <a:rPr lang="en-US" sz="1000" i="1" dirty="0">
+                <a:solidFill>
+                  <a:srgbClr val="FFFFFF"/>
+                </a:solidFill>
+                <a:latin typeface="맑은 고딕" pitchFamily="34" charset="0"/>
+                <a:ea typeface="맑은 고딕" pitchFamily="34" charset="-122"/>
+                <a:cs typeface="맑은 고딕" pitchFamily="34" charset="-120"/>
+              </a:rPr>
+              <a:t>사후검정</a:t>
+            </a:r>
+            <a:endParaRPr lang="en-US" sz="1000" dirty="0"/>
+          </a:p>
+        </p:txBody>
+      </p:sp>
+      <p:sp>
+        <p:nvSpPr>
+          <p:cNvPr id="18" name="Text 16"/>
+          <p:cNvSpPr txBox="1"/>
+          <p:nvPr/>
+        </p:nvSpPr>
+        <p:spPr>
+          <a:xfrm>
+            <a:off x="6400800" y="2651760"/>
+            <a:ext cx="2286000" cy="2103120"/>
+          </a:xfrm>
+          <a:prstGeom prst="rect">
+            <a:avLst/>
+          </a:prstGeom>
+          <a:noFill/>
+          <a:ln/>
+        </p:spPr>
+        <p:txBody>
+          <a:bodyPr wrap="square" lIns="0" tIns="0" rIns="0" bIns="0" rtlCol="0" anchor="t"/>
           <a:lstStyle/>
           <a:p>
             <a:pPr indent="0" marL="0">
@@ -9175,6 +10359,812 @@
               <a:buNone/>
             </a:pPr>
             <a:r>
+              <a:rPr lang="en-US" sz="1050" dirty="0">
+                <a:solidFill>
+                  <a:srgbClr val="16232E"/>
+                </a:solidFill>
+                <a:latin typeface="맑은 고딕" pitchFamily="34" charset="0"/>
+                <a:ea typeface="맑은 고딕" pitchFamily="34" charset="-122"/>
+                <a:cs typeface="맑은 고딕" pitchFamily="34" charset="-120"/>
+              </a:rPr>
+              <a:t>ANOVA가 유의하면 모든 군을 쌍(pair)으로 나눠 비교 ▷ 정확히 어느 군과 어느 군이 다른지 확정 — 이 논문의 '군간 비교' 표가 전부 이 결과</a:t>
+            </a:r>
+            <a:endParaRPr lang="en-US" sz="1050" dirty="0"/>
+          </a:p>
+        </p:txBody>
+      </p:sp>
+      <p:sp>
+        <p:nvSpPr>
+          <p:cNvPr id="19" name="Shape 17"/>
+          <p:cNvSpPr/>
+          <p:nvPr/>
+        </p:nvSpPr>
+        <p:spPr>
+          <a:xfrm>
+            <a:off x="9006840" y="1600200"/>
+            <a:ext cx="2651760" cy="3291840"/>
+          </a:xfrm>
+          <a:prstGeom prst="roundRect">
+            <a:avLst>
+              <a:gd name="adj" fmla="val 3448"/>
+            </a:avLst>
+          </a:prstGeom>
+          <a:solidFill>
+            <a:srgbClr val="FFFFFF"/>
+          </a:solidFill>
+          <a:ln/>
+          <a:effectLst>
+            <a:outerShdw sx="100000" sy="100000" kx="0" ky="0" algn="bl" rotWithShape="0" blurRad="76200" dist="25400" dir="5400000">
+              <a:srgbClr val="16232E">
+                <a:alpha val="10000"/>
+              </a:srgbClr>
+            </a:outerShdw>
+          </a:effectLst>
+        </p:spPr>
+      </p:sp>
+      <p:sp>
+        <p:nvSpPr>
+          <p:cNvPr id="20" name="Shape 18"/>
+          <p:cNvSpPr/>
+          <p:nvPr/>
+        </p:nvSpPr>
+        <p:spPr>
+          <a:xfrm>
+            <a:off x="9189720" y="1783080"/>
+            <a:ext cx="2286000" cy="777240"/>
+          </a:xfrm>
+          <a:prstGeom prst="roundRect">
+            <a:avLst>
+              <a:gd name="adj" fmla="val 9412"/>
+            </a:avLst>
+          </a:prstGeom>
+          <a:solidFill>
+            <a:srgbClr val="3D7EA6"/>
+          </a:solidFill>
+          <a:ln/>
+        </p:spPr>
+      </p:sp>
+      <p:sp>
+        <p:nvSpPr>
+          <p:cNvPr id="21" name="Text 19"/>
+          <p:cNvSpPr txBox="1"/>
+          <p:nvPr/>
+        </p:nvSpPr>
+        <p:spPr>
+          <a:xfrm>
+            <a:off x="9208008" y="1828800"/>
+            <a:ext cx="2249424" cy="384048"/>
+          </a:xfrm>
+          <a:prstGeom prst="rect">
+            <a:avLst/>
+          </a:prstGeom>
+          <a:noFill/>
+          <a:ln/>
+        </p:spPr>
+        <p:txBody>
+          <a:bodyPr wrap="square" lIns="0" tIns="0" rIns="0" bIns="0" rtlCol="0" anchor="ctr"/>
+          <a:lstStyle/>
+          <a:p>
+            <a:pPr algn="ctr" indent="0" marL="0">
+              <a:buNone/>
+            </a:pPr>
+            <a:r>
+              <a:rPr lang="en-US" sz="1250" b="1" dirty="0">
+                <a:solidFill>
+                  <a:srgbClr val="FFFFFF"/>
+                </a:solidFill>
+                <a:latin typeface="맑은 고딕" pitchFamily="34" charset="0"/>
+                <a:ea typeface="맑은 고딕" pitchFamily="34" charset="-122"/>
+                <a:cs typeface="맑은 고딕" pitchFamily="34" charset="-120"/>
+              </a:rPr>
+              <a:t>Paired t-test</a:t>
+            </a:r>
+            <a:endParaRPr lang="en-US" sz="1250" dirty="0"/>
+          </a:p>
+        </p:txBody>
+      </p:sp>
+      <p:sp>
+        <p:nvSpPr>
+          <p:cNvPr id="22" name="Text 20"/>
+          <p:cNvSpPr txBox="1"/>
+          <p:nvPr/>
+        </p:nvSpPr>
+        <p:spPr>
+          <a:xfrm>
+            <a:off x="9208008" y="2176272"/>
+            <a:ext cx="2249424" cy="320040"/>
+          </a:xfrm>
+          <a:prstGeom prst="rect">
+            <a:avLst/>
+          </a:prstGeom>
+          <a:noFill/>
+          <a:ln/>
+        </p:spPr>
+        <p:txBody>
+          <a:bodyPr wrap="square" lIns="0" tIns="0" rIns="0" bIns="0" rtlCol="0" anchor="ctr"/>
+          <a:lstStyle/>
+          <a:p>
+            <a:pPr algn="ctr" indent="0" marL="0">
+              <a:buNone/>
+            </a:pPr>
+            <a:r>
+              <a:rPr lang="en-US" sz="1000" i="1" dirty="0">
+                <a:solidFill>
+                  <a:srgbClr val="FFFFFF"/>
+                </a:solidFill>
+                <a:latin typeface="맑은 고딕" pitchFamily="34" charset="0"/>
+                <a:ea typeface="맑은 고딕" pitchFamily="34" charset="-122"/>
+                <a:cs typeface="맑은 고딕" pitchFamily="34" charset="-120"/>
+              </a:rPr>
+              <a:t>대응표본 t-검정</a:t>
+            </a:r>
+            <a:endParaRPr lang="en-US" sz="1000" dirty="0"/>
+          </a:p>
+        </p:txBody>
+      </p:sp>
+      <p:sp>
+        <p:nvSpPr>
+          <p:cNvPr id="23" name="Text 21"/>
+          <p:cNvSpPr txBox="1"/>
+          <p:nvPr/>
+        </p:nvSpPr>
+        <p:spPr>
+          <a:xfrm>
+            <a:off x="9189720" y="2651760"/>
+            <a:ext cx="2286000" cy="2103120"/>
+          </a:xfrm>
+          <a:prstGeom prst="rect">
+            <a:avLst/>
+          </a:prstGeom>
+          <a:noFill/>
+          <a:ln/>
+        </p:spPr>
+        <p:txBody>
+          <a:bodyPr wrap="square" lIns="0" tIns="0" rIns="0" bIns="0" rtlCol="0" anchor="t"/>
+          <a:lstStyle/>
+          <a:p>
+            <a:pPr indent="0" marL="0">
+              <a:lnSpc>
+                <a:spcPct val="130000"/>
+              </a:lnSpc>
+              <a:buNone/>
+            </a:pPr>
+            <a:r>
+              <a:rPr lang="en-US" sz="1050" dirty="0">
+                <a:solidFill>
+                  <a:srgbClr val="16232E"/>
+                </a:solidFill>
+                <a:latin typeface="맑은 고딕" pitchFamily="34" charset="0"/>
+                <a:ea typeface="맑은 고딕" pitchFamily="34" charset="-122"/>
+                <a:cs typeface="맑은 고딕" pitchFamily="34" charset="-120"/>
+              </a:rPr>
+              <a:t>같은 개체를 두 시점에서 비교 ▷ 예: 같은 랫드의 '가속기 직후' vs '보정 1주 후' 위치 비교(군 내 비교)</a:t>
+            </a:r>
+            <a:endParaRPr lang="en-US" sz="1050" dirty="0"/>
+          </a:p>
+        </p:txBody>
+      </p:sp>
+      <p:sp>
+        <p:nvSpPr>
+          <p:cNvPr id="24" name="Shape 22"/>
+          <p:cNvSpPr/>
+          <p:nvPr/>
+        </p:nvSpPr>
+        <p:spPr>
+          <a:xfrm>
+            <a:off x="640080" y="5074920"/>
+            <a:ext cx="10908792" cy="1143000"/>
+          </a:xfrm>
+          <a:prstGeom prst="roundRect">
+            <a:avLst>
+              <a:gd name="adj" fmla="val 8000"/>
+            </a:avLst>
+          </a:prstGeom>
+          <a:solidFill>
+            <a:srgbClr val="EAF2F7"/>
+          </a:solidFill>
+          <a:ln/>
+          <a:effectLst>
+            <a:outerShdw sx="100000" sy="100000" kx="0" ky="0" algn="bl" rotWithShape="0" blurRad="76200" dist="25400" dir="5400000">
+              <a:srgbClr val="16232E">
+                <a:alpha val="10000"/>
+              </a:srgbClr>
+            </a:outerShdw>
+          </a:effectLst>
+        </p:spPr>
+      </p:sp>
+      <p:sp>
+        <p:nvSpPr>
+          <p:cNvPr id="25" name="Text 23"/>
+          <p:cNvSpPr txBox="1"/>
+          <p:nvPr/>
+        </p:nvSpPr>
+        <p:spPr>
+          <a:xfrm>
+            <a:off x="914400" y="5230368"/>
+            <a:ext cx="10360152" cy="914400"/>
+          </a:xfrm>
+          <a:prstGeom prst="rect">
+            <a:avLst/>
+          </a:prstGeom>
+          <a:noFill/>
+          <a:ln/>
+        </p:spPr>
+        <p:txBody>
+          <a:bodyPr wrap="square" lIns="0" tIns="0" rIns="0" bIns="0" rtlCol="0" anchor="ctr"/>
+          <a:lstStyle/>
+          <a:p>
+            <a:pPr indent="0" marL="0">
+              <a:lnSpc>
+                <a:spcPct val="130000"/>
+              </a:lnSpc>
+              <a:buNone/>
+            </a:pPr>
+            <a:r>
+              <a:rPr lang="en-US" sz="1100" b="1" dirty="0">
+                <a:solidFill>
+                  <a:srgbClr val="1B4965"/>
+                </a:solidFill>
+                <a:latin typeface="맑은 고딕" pitchFamily="34" charset="0"/>
+                <a:ea typeface="맑은 고딕" pitchFamily="34" charset="-122"/>
+                <a:cs typeface="맑은 고딕" pitchFamily="34" charset="-120"/>
+              </a:rPr>
+              <a:t>이 논문의 분석 흐름  </a:t>
+            </a:r>
+            <a:pPr indent="0" marL="0">
+              <a:lnSpc>
+                <a:spcPct val="130000"/>
+              </a:lnSpc>
+              <a:buNone/>
+            </a:pPr>
+            <a:r>
+              <a:rPr lang="en-US" sz="1100" dirty="0">
+                <a:solidFill>
+                  <a:srgbClr val="16232E"/>
+                </a:solidFill>
+                <a:latin typeface="맑은 고딕" pitchFamily="34" charset="0"/>
+                <a:ea typeface="맑은 고딕" pitchFamily="34" charset="-122"/>
+                <a:cs typeface="맑은 고딕" pitchFamily="34" charset="-120"/>
+              </a:rPr>
+              <a:t>Shapiro–Wilk(정규성 확인) ▷ One-way ANOVA(군간 전체 비교) ▷ 유의하면 Tukey post-hoc(어느 쌍이 다른지 확정) — 같은 군의 시점 전후(가속 후 vs 보정 후 등) 비교는 paired t-test로 별도 진행.
+</a:t>
+            </a:r>
+            <a:pPr indent="0" marL="0">
+              <a:lnSpc>
+                <a:spcPct val="130000"/>
+              </a:lnSpc>
+              <a:buNone/>
+            </a:pPr>
+            <a:r>
+              <a:rPr lang="en-US" sz="1100" b="1" dirty="0">
+                <a:solidFill>
+                  <a:srgbClr val="1B4965"/>
+                </a:solidFill>
+                <a:latin typeface="맑은 고딕" pitchFamily="34" charset="0"/>
+                <a:ea typeface="맑은 고딕" pitchFamily="34" charset="-122"/>
+                <a:cs typeface="맑은 고딕" pitchFamily="34" charset="-120"/>
+              </a:rPr>
+              <a:t>p &lt; 0.05의 의미  </a:t>
+            </a:r>
+            <a:pPr indent="0" marL="0">
+              <a:lnSpc>
+                <a:spcPct val="130000"/>
+              </a:lnSpc>
+              <a:buNone/>
+            </a:pPr>
+            <a:r>
+              <a:rPr lang="en-US" sz="1100" dirty="0">
+                <a:solidFill>
+                  <a:srgbClr val="16232E"/>
+                </a:solidFill>
+                <a:latin typeface="맑은 고딕" pitchFamily="34" charset="0"/>
+                <a:ea typeface="맑은 고딕" pitchFamily="34" charset="-122"/>
+                <a:cs typeface="맑은 고딕" pitchFamily="34" charset="-120"/>
+              </a:rPr>
+              <a:t>이 차이가 우연히 생겼을 확률이 5% 미만이라는 뜻 — 관행적으로 이 기준을 넘으면 '통계적으로 유의하다'고 판단. 이 논문 대부분의 비교는 p &lt; 0.001로, 우연일 확률이 매우 낮음.</a:t>
+            </a:r>
+            <a:endParaRPr lang="en-US" sz="1100" dirty="0"/>
+          </a:p>
+        </p:txBody>
+      </p:sp>
+      <p:sp>
+        <p:nvSpPr>
+          <p:cNvPr id="26" name="Text 24"/>
+          <p:cNvSpPr txBox="1"/>
+          <p:nvPr/>
+        </p:nvSpPr>
+        <p:spPr>
+          <a:xfrm>
+            <a:off x="11365992" y="6400800"/>
+            <a:ext cx="457200" cy="320040"/>
+          </a:xfrm>
+          <a:prstGeom prst="rect">
+            <a:avLst/>
+          </a:prstGeom>
+          <a:noFill/>
+          <a:ln/>
+        </p:spPr>
+        <p:txBody>
+          <a:bodyPr wrap="square" lIns="0" tIns="0" rIns="0" bIns="0" rtlCol="0" anchor="ctr"/>
+          <a:lstStyle/>
+          <a:p>
+            <a:pPr algn="r" indent="0" marL="0">
+              <a:buNone/>
+            </a:pPr>
+            <a:r>
+              <a:rPr lang="en-US" sz="1100" dirty="0">
+                <a:solidFill>
+                  <a:srgbClr val="5B6B7A"/>
+                </a:solidFill>
+                <a:latin typeface="Cambria" pitchFamily="34" charset="0"/>
+                <a:ea typeface="Cambria" pitchFamily="34" charset="-122"/>
+                <a:cs typeface="Cambria" pitchFamily="34" charset="-120"/>
+              </a:rPr>
+              <a:t>6</a:t>
+            </a:r>
+            <a:endParaRPr lang="en-US" sz="1100" dirty="0"/>
+          </a:p>
+        </p:txBody>
+      </p:sp>
+    </p:spTree>
+  </p:cSld>
+  <p:clrMapOvr>
+    <a:masterClrMapping/>
+  </p:clrMapOvr>
+</p:sld>
+</file>
+
+<file path=ppt/slides/slide7.xml><?xml version="1.0" encoding="utf-8"?>
+<p:sld xmlns:a="http://schemas.openxmlformats.org/drawingml/2006/main" xmlns:r="http://schemas.openxmlformats.org/officeDocument/2006/relationships" xmlns:p="http://schemas.openxmlformats.org/presentationml/2006/main">
+  <p:cSld name="Slide 7">
+    <p:bg>
+      <p:bgPr>
+        <a:solidFill>
+          <a:srgbClr val="F5F6F8"/>
+        </a:solidFill>
+      </p:bgPr>
+    </p:bg>
+    <p:spTree>
+      <p:nvGrpSpPr>
+        <p:cNvPr id="1" name=""/>
+        <p:cNvGrpSpPr/>
+        <p:nvPr/>
+      </p:nvGrpSpPr>
+      <p:grpSpPr>
+        <a:xfrm>
+          <a:off x="0" y="0"/>
+          <a:ext cx="0" cy="0"/>
+          <a:chOff x="0" y="0"/>
+          <a:chExt cx="0" cy="0"/>
+        </a:xfrm>
+      </p:grpSpPr>
+      <p:sp>
+        <p:nvSpPr>
+          <p:cNvPr id="2" name="Text 0"/>
+          <p:cNvSpPr txBox="1"/>
+          <p:nvPr/>
+        </p:nvSpPr>
+        <p:spPr>
+          <a:xfrm>
+            <a:off x="640080" y="365760"/>
+            <a:ext cx="10908792" cy="292608"/>
+          </a:xfrm>
+          <a:prstGeom prst="rect">
+            <a:avLst/>
+          </a:prstGeom>
+          <a:noFill/>
+          <a:ln/>
+        </p:spPr>
+        <p:txBody>
+          <a:bodyPr wrap="square" lIns="0" tIns="0" rIns="0" bIns="0" rtlCol="0" anchor="ctr"/>
+          <a:lstStyle/>
+          <a:p>
+            <a:pPr indent="0" marL="0">
+              <a:buNone/>
+            </a:pPr>
+            <a:r>
+              <a:rPr lang="en-US" sz="1200" b="1" spc="100" kern="0" dirty="0">
+                <a:solidFill>
+                  <a:srgbClr val="3D7EA6"/>
+                </a:solidFill>
+                <a:latin typeface="맑은 고딕" pitchFamily="34" charset="0"/>
+                <a:ea typeface="맑은 고딕" pitchFamily="34" charset="-122"/>
+                <a:cs typeface="맑은 고딕" pitchFamily="34" charset="-120"/>
+              </a:rPr>
+              <a:t>RESULTS · 01</a:t>
+            </a:r>
+            <a:endParaRPr lang="en-US" sz="1200" dirty="0"/>
+          </a:p>
+        </p:txBody>
+      </p:sp>
+      <p:sp>
+        <p:nvSpPr>
+          <p:cNvPr id="3" name="Text 1"/>
+          <p:cNvSpPr txBox="1"/>
+          <p:nvPr/>
+        </p:nvSpPr>
+        <p:spPr>
+          <a:xfrm>
+            <a:off x="640080" y="640080"/>
+            <a:ext cx="10908792" cy="640080"/>
+          </a:xfrm>
+          <a:prstGeom prst="rect">
+            <a:avLst/>
+          </a:prstGeom>
+          <a:noFill/>
+          <a:ln/>
+        </p:spPr>
+        <p:txBody>
+          <a:bodyPr wrap="square" lIns="0" tIns="0" rIns="0" bIns="0" rtlCol="0" anchor="ctr"/>
+          <a:lstStyle/>
+          <a:p>
+            <a:pPr indent="0" marL="0">
+              <a:buNone/>
+            </a:pPr>
+            <a:r>
+              <a:rPr lang="en-US" sz="2400" b="1" dirty="0">
+                <a:solidFill>
+                  <a:srgbClr val="1B4965"/>
+                </a:solidFill>
+                <a:latin typeface="맑은 고딕" pitchFamily="34" charset="0"/>
+                <a:ea typeface="맑은 고딕" pitchFamily="34" charset="-122"/>
+                <a:cs typeface="맑은 고딕" pitchFamily="34" charset="-120"/>
+              </a:rPr>
+              <a:t>가속기(4주) — 치아이동량 비교</a:t>
+            </a:r>
+            <a:endParaRPr lang="en-US" sz="2400" dirty="0"/>
+          </a:p>
+        </p:txBody>
+      </p:sp>
+      <p:sp>
+        <p:nvSpPr>
+          <p:cNvPr id="4" name="Shape 2"/>
+          <p:cNvSpPr/>
+          <p:nvPr/>
+        </p:nvSpPr>
+        <p:spPr>
+          <a:xfrm>
+            <a:off x="640080" y="1691640"/>
+            <a:ext cx="3538728" cy="1828800"/>
+          </a:xfrm>
+          <a:prstGeom prst="roundRect">
+            <a:avLst>
+              <a:gd name="adj" fmla="val 5000"/>
+            </a:avLst>
+          </a:prstGeom>
+          <a:solidFill>
+            <a:srgbClr val="FFFFFF"/>
+          </a:solidFill>
+          <a:ln/>
+          <a:effectLst>
+            <a:outerShdw sx="100000" sy="100000" kx="0" ky="0" algn="bl" rotWithShape="0" blurRad="76200" dist="25400" dir="5400000">
+              <a:srgbClr val="16232E">
+                <a:alpha val="10000"/>
+              </a:srgbClr>
+            </a:outerShdw>
+          </a:effectLst>
+        </p:spPr>
+      </p:sp>
+      <p:sp>
+        <p:nvSpPr>
+          <p:cNvPr id="5" name="Text 3"/>
+          <p:cNvSpPr txBox="1"/>
+          <p:nvPr/>
+        </p:nvSpPr>
+        <p:spPr>
+          <a:xfrm>
+            <a:off x="640080" y="1920240"/>
+            <a:ext cx="3538728" cy="1005840"/>
+          </a:xfrm>
+          <a:prstGeom prst="rect">
+            <a:avLst/>
+          </a:prstGeom>
+          <a:noFill/>
+          <a:ln/>
+        </p:spPr>
+        <p:txBody>
+          <a:bodyPr wrap="square" lIns="0" tIns="0" rIns="0" bIns="0" rtlCol="0" anchor="ctr"/>
+          <a:lstStyle/>
+          <a:p>
+            <a:pPr algn="ctr" indent="0" marL="0">
+              <a:buNone/>
+            </a:pPr>
+            <a:r>
+              <a:rPr lang="en-US" sz="4000" b="1" dirty="0">
+                <a:solidFill>
+                  <a:srgbClr val="D97706"/>
+                </a:solidFill>
+                <a:latin typeface="맑은 고딕" pitchFamily="34" charset="0"/>
+                <a:ea typeface="맑은 고딕" pitchFamily="34" charset="-122"/>
+                <a:cs typeface="맑은 고딕" pitchFamily="34" charset="-120"/>
+              </a:rPr>
+              <a:t>6.50 ± 0.88</a:t>
+            </a:r>
+            <a:endParaRPr lang="en-US" sz="4000" dirty="0"/>
+          </a:p>
+        </p:txBody>
+      </p:sp>
+      <p:sp>
+        <p:nvSpPr>
+          <p:cNvPr id="6" name="Text 4"/>
+          <p:cNvSpPr txBox="1"/>
+          <p:nvPr/>
+        </p:nvSpPr>
+        <p:spPr>
+          <a:xfrm>
+            <a:off x="640080" y="2971800"/>
+            <a:ext cx="3538728" cy="457200"/>
+          </a:xfrm>
+          <a:prstGeom prst="rect">
+            <a:avLst/>
+          </a:prstGeom>
+          <a:noFill/>
+          <a:ln/>
+        </p:spPr>
+        <p:txBody>
+          <a:bodyPr wrap="square" lIns="0" tIns="0" rIns="0" bIns="0" rtlCol="0" anchor="ctr"/>
+          <a:lstStyle/>
+          <a:p>
+            <a:pPr algn="ctr" indent="0" marL="0">
+              <a:buNone/>
+            </a:pPr>
+            <a:r>
+              <a:rPr lang="en-US" sz="1400" b="1" dirty="0">
+                <a:solidFill>
+                  <a:srgbClr val="16232E"/>
+                </a:solidFill>
+                <a:latin typeface="맑은 고딕" pitchFamily="34" charset="0"/>
+                <a:ea typeface="맑은 고딕" pitchFamily="34" charset="-122"/>
+                <a:cs typeface="맑은 고딕" pitchFamily="34" charset="-120"/>
+              </a:rPr>
+              <a:t>mm · 코르티코스테로이드</a:t>
+            </a:r>
+            <a:endParaRPr lang="en-US" sz="1400" dirty="0"/>
+          </a:p>
+        </p:txBody>
+      </p:sp>
+      <p:sp>
+        <p:nvSpPr>
+          <p:cNvPr id="7" name="Shape 5"/>
+          <p:cNvSpPr/>
+          <p:nvPr/>
+        </p:nvSpPr>
+        <p:spPr>
+          <a:xfrm>
+            <a:off x="4361688" y="1691640"/>
+            <a:ext cx="3538728" cy="1828800"/>
+          </a:xfrm>
+          <a:prstGeom prst="roundRect">
+            <a:avLst>
+              <a:gd name="adj" fmla="val 5000"/>
+            </a:avLst>
+          </a:prstGeom>
+          <a:solidFill>
+            <a:srgbClr val="FFFFFF"/>
+          </a:solidFill>
+          <a:ln/>
+          <a:effectLst>
+            <a:outerShdw sx="100000" sy="100000" kx="0" ky="0" algn="bl" rotWithShape="0" blurRad="76200" dist="25400" dir="5400000">
+              <a:srgbClr val="16232E">
+                <a:alpha val="10000"/>
+              </a:srgbClr>
+            </a:outerShdw>
+          </a:effectLst>
+        </p:spPr>
+      </p:sp>
+      <p:sp>
+        <p:nvSpPr>
+          <p:cNvPr id="8" name="Text 6"/>
+          <p:cNvSpPr txBox="1"/>
+          <p:nvPr/>
+        </p:nvSpPr>
+        <p:spPr>
+          <a:xfrm>
+            <a:off x="4361688" y="1920240"/>
+            <a:ext cx="3538728" cy="1005840"/>
+          </a:xfrm>
+          <a:prstGeom prst="rect">
+            <a:avLst/>
+          </a:prstGeom>
+          <a:noFill/>
+          <a:ln/>
+        </p:spPr>
+        <p:txBody>
+          <a:bodyPr wrap="square" lIns="0" tIns="0" rIns="0" bIns="0" rtlCol="0" anchor="ctr"/>
+          <a:lstStyle/>
+          <a:p>
+            <a:pPr algn="ctr" indent="0" marL="0">
+              <a:buNone/>
+            </a:pPr>
+            <a:r>
+              <a:rPr lang="en-US" sz="4000" b="1" dirty="0">
+                <a:solidFill>
+                  <a:srgbClr val="3D7EA6"/>
+                </a:solidFill>
+                <a:latin typeface="맑은 고딕" pitchFamily="34" charset="0"/>
+                <a:ea typeface="맑은 고딕" pitchFamily="34" charset="-122"/>
+                <a:cs typeface="맑은 고딕" pitchFamily="34" charset="-120"/>
+              </a:rPr>
+              <a:t>3.73 ± 0.14</a:t>
+            </a:r>
+            <a:endParaRPr lang="en-US" sz="4000" dirty="0"/>
+          </a:p>
+        </p:txBody>
+      </p:sp>
+      <p:sp>
+        <p:nvSpPr>
+          <p:cNvPr id="9" name="Text 7"/>
+          <p:cNvSpPr txBox="1"/>
+          <p:nvPr/>
+        </p:nvSpPr>
+        <p:spPr>
+          <a:xfrm>
+            <a:off x="4361688" y="2971800"/>
+            <a:ext cx="3538728" cy="457200"/>
+          </a:xfrm>
+          <a:prstGeom prst="rect">
+            <a:avLst/>
+          </a:prstGeom>
+          <a:noFill/>
+          <a:ln/>
+        </p:spPr>
+        <p:txBody>
+          <a:bodyPr wrap="square" lIns="0" tIns="0" rIns="0" bIns="0" rtlCol="0" anchor="ctr"/>
+          <a:lstStyle/>
+          <a:p>
+            <a:pPr algn="ctr" indent="0" marL="0">
+              <a:buNone/>
+            </a:pPr>
+            <a:r>
+              <a:rPr lang="en-US" sz="1400" b="1" dirty="0">
+                <a:solidFill>
+                  <a:srgbClr val="16232E"/>
+                </a:solidFill>
+                <a:latin typeface="맑은 고딕" pitchFamily="34" charset="0"/>
+                <a:ea typeface="맑은 고딕" pitchFamily="34" charset="-122"/>
+                <a:cs typeface="맑은 고딕" pitchFamily="34" charset="-120"/>
+              </a:rPr>
+              <a:t>mm · 비타민D</a:t>
+            </a:r>
+            <a:endParaRPr lang="en-US" sz="1400" dirty="0"/>
+          </a:p>
+        </p:txBody>
+      </p:sp>
+      <p:sp>
+        <p:nvSpPr>
+          <p:cNvPr id="10" name="Shape 8"/>
+          <p:cNvSpPr/>
+          <p:nvPr/>
+        </p:nvSpPr>
+        <p:spPr>
+          <a:xfrm>
+            <a:off x="8083296" y="1691640"/>
+            <a:ext cx="3538728" cy="1828800"/>
+          </a:xfrm>
+          <a:prstGeom prst="roundRect">
+            <a:avLst>
+              <a:gd name="adj" fmla="val 5000"/>
+            </a:avLst>
+          </a:prstGeom>
+          <a:solidFill>
+            <a:srgbClr val="FFFFFF"/>
+          </a:solidFill>
+          <a:ln/>
+          <a:effectLst>
+            <a:outerShdw sx="100000" sy="100000" kx="0" ky="0" algn="bl" rotWithShape="0" blurRad="76200" dist="25400" dir="5400000">
+              <a:srgbClr val="16232E">
+                <a:alpha val="10000"/>
+              </a:srgbClr>
+            </a:outerShdw>
+          </a:effectLst>
+        </p:spPr>
+      </p:sp>
+      <p:sp>
+        <p:nvSpPr>
+          <p:cNvPr id="11" name="Text 9"/>
+          <p:cNvSpPr txBox="1"/>
+          <p:nvPr/>
+        </p:nvSpPr>
+        <p:spPr>
+          <a:xfrm>
+            <a:off x="8083296" y="1920240"/>
+            <a:ext cx="3538728" cy="1005840"/>
+          </a:xfrm>
+          <a:prstGeom prst="rect">
+            <a:avLst/>
+          </a:prstGeom>
+          <a:noFill/>
+          <a:ln/>
+        </p:spPr>
+        <p:txBody>
+          <a:bodyPr wrap="square" lIns="0" tIns="0" rIns="0" bIns="0" rtlCol="0" anchor="ctr"/>
+          <a:lstStyle/>
+          <a:p>
+            <a:pPr algn="ctr" indent="0" marL="0">
+              <a:buNone/>
+            </a:pPr>
+            <a:r>
+              <a:rPr lang="en-US" sz="4000" b="1" dirty="0">
+                <a:solidFill>
+                  <a:srgbClr val="2F855A"/>
+                </a:solidFill>
+                <a:latin typeface="맑은 고딕" pitchFamily="34" charset="0"/>
+                <a:ea typeface="맑은 고딕" pitchFamily="34" charset="-122"/>
+                <a:cs typeface="맑은 고딕" pitchFamily="34" charset="-120"/>
+              </a:rPr>
+              <a:t>2.80 ± 0.15</a:t>
+            </a:r>
+            <a:endParaRPr lang="en-US" sz="4000" dirty="0"/>
+          </a:p>
+        </p:txBody>
+      </p:sp>
+      <p:sp>
+        <p:nvSpPr>
+          <p:cNvPr id="12" name="Text 10"/>
+          <p:cNvSpPr txBox="1"/>
+          <p:nvPr/>
+        </p:nvSpPr>
+        <p:spPr>
+          <a:xfrm>
+            <a:off x="8083296" y="2971800"/>
+            <a:ext cx="3538728" cy="457200"/>
+          </a:xfrm>
+          <a:prstGeom prst="rect">
+            <a:avLst/>
+          </a:prstGeom>
+          <a:noFill/>
+          <a:ln/>
+        </p:spPr>
+        <p:txBody>
+          <a:bodyPr wrap="square" lIns="0" tIns="0" rIns="0" bIns="0" rtlCol="0" anchor="ctr"/>
+          <a:lstStyle/>
+          <a:p>
+            <a:pPr algn="ctr" indent="0" marL="0">
+              <a:buNone/>
+            </a:pPr>
+            <a:r>
+              <a:rPr lang="en-US" sz="1400" b="1" dirty="0">
+                <a:solidFill>
+                  <a:srgbClr val="16232E"/>
+                </a:solidFill>
+                <a:latin typeface="맑은 고딕" pitchFamily="34" charset="0"/>
+                <a:ea typeface="맑은 고딕" pitchFamily="34" charset="-122"/>
+                <a:cs typeface="맑은 고딕" pitchFamily="34" charset="-120"/>
+              </a:rPr>
+              <a:t>mm · PGE₂</a:t>
+            </a:r>
+            <a:endParaRPr lang="en-US" sz="1400" dirty="0"/>
+          </a:p>
+        </p:txBody>
+      </p:sp>
+      <p:sp>
+        <p:nvSpPr>
+          <p:cNvPr id="13" name="Text 11"/>
+          <p:cNvSpPr txBox="1"/>
+          <p:nvPr/>
+        </p:nvSpPr>
+        <p:spPr>
+          <a:xfrm>
+            <a:off x="640080" y="3703320"/>
+            <a:ext cx="10908792" cy="548640"/>
+          </a:xfrm>
+          <a:prstGeom prst="rect">
+            <a:avLst/>
+          </a:prstGeom>
+          <a:noFill/>
+          <a:ln/>
+        </p:spPr>
+        <p:txBody>
+          <a:bodyPr wrap="square" lIns="0" tIns="0" rIns="0" bIns="0" rtlCol="0" anchor="ctr"/>
+          <a:lstStyle/>
+          <a:p>
+            <a:pPr indent="0" marL="0">
+              <a:lnSpc>
+                <a:spcPct val="130000"/>
+              </a:lnSpc>
+              <a:buNone/>
+            </a:pPr>
+            <a:r>
               <a:rPr lang="en-US" sz="1300" i="1" dirty="0">
                 <a:solidFill>
                   <a:srgbClr val="1B4965"/>
@@ -9191,7 +11181,7 @@
       </p:sp>
       <p:graphicFrame>
         <p:nvGraphicFramePr>
-          <p:cNvPr id="7" name="Table 0"/>
+          <p:cNvPr id="8" name="Table 0"/>
           <p:cNvGraphicFramePr>
             <a:graphicFrameLocks noGrp="1"/>
           </p:cNvGraphicFramePr>
@@ -9963,732 +11953,6 @@
                 <a:ea typeface="Cambria" pitchFamily="34" charset="-122"/>
                 <a:cs typeface="Cambria" pitchFamily="34" charset="-120"/>
               </a:rPr>
-              <a:t>6</a:t>
-            </a:r>
-            <a:endParaRPr lang="en-US" sz="1100" dirty="0"/>
-          </a:p>
-        </p:txBody>
-      </p:sp>
-    </p:spTree>
-  </p:cSld>
-  <p:clrMapOvr>
-    <a:masterClrMapping/>
-  </p:clrMapOvr>
-</p:sld>
-</file>
-
-<file path=ppt/slides/slide7.xml><?xml version="1.0" encoding="utf-8"?>
-<p:sld xmlns:a="http://schemas.openxmlformats.org/drawingml/2006/main" xmlns:r="http://schemas.openxmlformats.org/officeDocument/2006/relationships" xmlns:p="http://schemas.openxmlformats.org/presentationml/2006/main">
-  <p:cSld name="Slide 7">
-    <p:bg>
-      <p:bgPr>
-        <a:solidFill>
-          <a:srgbClr val="F5F6F8"/>
-        </a:solidFill>
-      </p:bgPr>
-    </p:bg>
-    <p:spTree>
-      <p:nvGrpSpPr>
-        <p:cNvPr id="1" name=""/>
-        <p:cNvGrpSpPr/>
-        <p:nvPr/>
-      </p:nvGrpSpPr>
-      <p:grpSpPr>
-        <a:xfrm>
-          <a:off x="0" y="0"/>
-          <a:ext cx="0" cy="0"/>
-          <a:chOff x="0" y="0"/>
-          <a:chExt cx="0" cy="0"/>
-        </a:xfrm>
-      </p:grpSpPr>
-      <p:sp>
-        <p:nvSpPr>
-          <p:cNvPr id="2" name="Text 0"/>
-          <p:cNvSpPr txBox="1"/>
-          <p:nvPr/>
-        </p:nvSpPr>
-        <p:spPr>
-          <a:xfrm>
-            <a:off x="640080" y="365760"/>
-            <a:ext cx="10908792" cy="292608"/>
-          </a:xfrm>
-          <a:prstGeom prst="rect">
-            <a:avLst/>
-          </a:prstGeom>
-          <a:noFill/>
-          <a:ln/>
-        </p:spPr>
-        <p:txBody>
-          <a:bodyPr wrap="square" lIns="0" tIns="0" rIns="0" bIns="0" rtlCol="0" anchor="ctr"/>
-          <a:lstStyle/>
-          <a:p>
-            <a:pPr indent="0" marL="0">
-              <a:buNone/>
-            </a:pPr>
-            <a:r>
-              <a:rPr lang="en-US" sz="1200" b="1" spc="100" kern="0" dirty="0">
-                <a:solidFill>
-                  <a:srgbClr val="3D7EA6"/>
-                </a:solidFill>
-                <a:latin typeface="맑은 고딕" pitchFamily="34" charset="0"/>
-                <a:ea typeface="맑은 고딕" pitchFamily="34" charset="-122"/>
-                <a:cs typeface="맑은 고딕" pitchFamily="34" charset="-120"/>
-              </a:rPr>
-              <a:t>RESULTS · 02</a:t>
-            </a:r>
-            <a:endParaRPr lang="en-US" sz="1200" dirty="0"/>
-          </a:p>
-        </p:txBody>
-      </p:sp>
-      <p:sp>
-        <p:nvSpPr>
-          <p:cNvPr id="3" name="Text 1"/>
-          <p:cNvSpPr txBox="1"/>
-          <p:nvPr/>
-        </p:nvSpPr>
-        <p:spPr>
-          <a:xfrm>
-            <a:off x="640080" y="640080"/>
-            <a:ext cx="10908792" cy="640080"/>
-          </a:xfrm>
-          <a:prstGeom prst="rect">
-            <a:avLst/>
-          </a:prstGeom>
-          <a:noFill/>
-          <a:ln/>
-        </p:spPr>
-        <p:txBody>
-          <a:bodyPr wrap="square" lIns="0" tIns="0" rIns="0" bIns="0" rtlCol="0" anchor="ctr"/>
-          <a:lstStyle/>
-          <a:p>
-            <a:pPr indent="0" marL="0">
-              <a:buNone/>
-            </a:pPr>
-            <a:r>
-              <a:rPr lang="en-US" sz="2400" b="1" dirty="0">
-                <a:solidFill>
-                  <a:srgbClr val="1B4965"/>
-                </a:solidFill>
-                <a:latin typeface="맑은 고딕" pitchFamily="34" charset="0"/>
-                <a:ea typeface="맑은 고딕" pitchFamily="34" charset="-122"/>
-                <a:cs typeface="맑은 고딕" pitchFamily="34" charset="-120"/>
-              </a:rPr>
-              <a:t>재발기(2주) — 가속이 컸던 약물이 더 많이 되돌아간다</a:t>
-            </a:r>
-            <a:endParaRPr lang="en-US" sz="2400" dirty="0"/>
-          </a:p>
-        </p:txBody>
-      </p:sp>
-      <p:sp>
-        <p:nvSpPr>
-          <p:cNvPr id="4" name="Shape 2"/>
-          <p:cNvSpPr/>
-          <p:nvPr/>
-        </p:nvSpPr>
-        <p:spPr>
-          <a:xfrm>
-            <a:off x="640080" y="1645920"/>
-            <a:ext cx="2587752" cy="1828800"/>
-          </a:xfrm>
-          <a:prstGeom prst="roundRect">
-            <a:avLst>
-              <a:gd name="adj" fmla="val 5000"/>
-            </a:avLst>
-          </a:prstGeom>
-          <a:solidFill>
-            <a:srgbClr val="FFFFFF"/>
-          </a:solidFill>
-          <a:ln/>
-          <a:effectLst>
-            <a:outerShdw sx="100000" sy="100000" kx="0" ky="0" algn="bl" rotWithShape="0" blurRad="76200" dist="25400" dir="5400000">
-              <a:srgbClr val="16232E">
-                <a:alpha val="10000"/>
-              </a:srgbClr>
-            </a:outerShdw>
-          </a:effectLst>
-        </p:spPr>
-      </p:sp>
-      <p:sp>
-        <p:nvSpPr>
-          <p:cNvPr id="5" name="Text 3"/>
-          <p:cNvSpPr txBox="1"/>
-          <p:nvPr/>
-        </p:nvSpPr>
-        <p:spPr>
-          <a:xfrm>
-            <a:off x="640080" y="1874520"/>
-            <a:ext cx="2587752" cy="1005840"/>
-          </a:xfrm>
-          <a:prstGeom prst="rect">
-            <a:avLst/>
-          </a:prstGeom>
-          <a:noFill/>
-          <a:ln/>
-        </p:spPr>
-        <p:txBody>
-          <a:bodyPr wrap="square" lIns="0" tIns="0" rIns="0" bIns="0" rtlCol="0" anchor="ctr"/>
-          <a:lstStyle/>
-          <a:p>
-            <a:pPr algn="ctr" indent="0" marL="0">
-              <a:buNone/>
-            </a:pPr>
-            <a:r>
-              <a:rPr lang="en-US" sz="4000" b="1" dirty="0">
-                <a:solidFill>
-                  <a:srgbClr val="9AA5B1"/>
-                </a:solidFill>
-                <a:latin typeface="맑은 고딕" pitchFamily="34" charset="0"/>
-                <a:ea typeface="맑은 고딕" pitchFamily="34" charset="-122"/>
-                <a:cs typeface="맑은 고딕" pitchFamily="34" charset="-120"/>
-              </a:rPr>
-              <a:t>-1.09 ± 0.17</a:t>
-            </a:r>
-            <a:endParaRPr lang="en-US" sz="4000" dirty="0"/>
-          </a:p>
-        </p:txBody>
-      </p:sp>
-      <p:sp>
-        <p:nvSpPr>
-          <p:cNvPr id="6" name="Text 4"/>
-          <p:cNvSpPr txBox="1"/>
-          <p:nvPr/>
-        </p:nvSpPr>
-        <p:spPr>
-          <a:xfrm>
-            <a:off x="640080" y="2926080"/>
-            <a:ext cx="2587752" cy="457200"/>
-          </a:xfrm>
-          <a:prstGeom prst="rect">
-            <a:avLst/>
-          </a:prstGeom>
-          <a:noFill/>
-          <a:ln/>
-        </p:spPr>
-        <p:txBody>
-          <a:bodyPr wrap="square" lIns="0" tIns="0" rIns="0" bIns="0" rtlCol="0" anchor="ctr"/>
-          <a:lstStyle/>
-          <a:p>
-            <a:pPr algn="ctr" indent="0" marL="0">
-              <a:buNone/>
-            </a:pPr>
-            <a:r>
-              <a:rPr lang="en-US" sz="1400" b="1" dirty="0">
-                <a:solidFill>
-                  <a:srgbClr val="16232E"/>
-                </a:solidFill>
-                <a:latin typeface="맑은 고딕" pitchFamily="34" charset="0"/>
-                <a:ea typeface="맑은 고딕" pitchFamily="34" charset="-122"/>
-                <a:cs typeface="맑은 고딕" pitchFamily="34" charset="-120"/>
-              </a:rPr>
-              <a:t>mm · 양성대조</a:t>
-            </a:r>
-            <a:endParaRPr lang="en-US" sz="1400" dirty="0"/>
-          </a:p>
-        </p:txBody>
-      </p:sp>
-      <p:sp>
-        <p:nvSpPr>
-          <p:cNvPr id="7" name="Shape 5"/>
-          <p:cNvSpPr/>
-          <p:nvPr/>
-        </p:nvSpPr>
-        <p:spPr>
-          <a:xfrm>
-            <a:off x="3392424" y="1645920"/>
-            <a:ext cx="2587752" cy="1828800"/>
-          </a:xfrm>
-          <a:prstGeom prst="roundRect">
-            <a:avLst>
-              <a:gd name="adj" fmla="val 5000"/>
-            </a:avLst>
-          </a:prstGeom>
-          <a:solidFill>
-            <a:srgbClr val="FFFFFF"/>
-          </a:solidFill>
-          <a:ln/>
-          <a:effectLst>
-            <a:outerShdw sx="100000" sy="100000" kx="0" ky="0" algn="bl" rotWithShape="0" blurRad="76200" dist="25400" dir="5400000">
-              <a:srgbClr val="16232E">
-                <a:alpha val="10000"/>
-              </a:srgbClr>
-            </a:outerShdw>
-          </a:effectLst>
-        </p:spPr>
-      </p:sp>
-      <p:sp>
-        <p:nvSpPr>
-          <p:cNvPr id="8" name="Text 6"/>
-          <p:cNvSpPr txBox="1"/>
-          <p:nvPr/>
-        </p:nvSpPr>
-        <p:spPr>
-          <a:xfrm>
-            <a:off x="3392424" y="1874520"/>
-            <a:ext cx="2587752" cy="1005840"/>
-          </a:xfrm>
-          <a:prstGeom prst="rect">
-            <a:avLst/>
-          </a:prstGeom>
-          <a:noFill/>
-          <a:ln/>
-        </p:spPr>
-        <p:txBody>
-          <a:bodyPr wrap="square" lIns="0" tIns="0" rIns="0" bIns="0" rtlCol="0" anchor="ctr"/>
-          <a:lstStyle/>
-          <a:p>
-            <a:pPr algn="ctr" indent="0" marL="0">
-              <a:buNone/>
-            </a:pPr>
-            <a:r>
-              <a:rPr lang="en-US" sz="4000" b="1" dirty="0">
-                <a:solidFill>
-                  <a:srgbClr val="2F855A"/>
-                </a:solidFill>
-                <a:latin typeface="맑은 고딕" pitchFamily="34" charset="0"/>
-                <a:ea typeface="맑은 고딕" pitchFamily="34" charset="-122"/>
-                <a:cs typeface="맑은 고딕" pitchFamily="34" charset="-120"/>
-              </a:rPr>
-              <a:t>-0.86 ± 0.23</a:t>
-            </a:r>
-            <a:endParaRPr lang="en-US" sz="4000" dirty="0"/>
-          </a:p>
-        </p:txBody>
-      </p:sp>
-      <p:sp>
-        <p:nvSpPr>
-          <p:cNvPr id="9" name="Text 7"/>
-          <p:cNvSpPr txBox="1"/>
-          <p:nvPr/>
-        </p:nvSpPr>
-        <p:spPr>
-          <a:xfrm>
-            <a:off x="3392424" y="2926080"/>
-            <a:ext cx="2587752" cy="457200"/>
-          </a:xfrm>
-          <a:prstGeom prst="rect">
-            <a:avLst/>
-          </a:prstGeom>
-          <a:noFill/>
-          <a:ln/>
-        </p:spPr>
-        <p:txBody>
-          <a:bodyPr wrap="square" lIns="0" tIns="0" rIns="0" bIns="0" rtlCol="0" anchor="ctr"/>
-          <a:lstStyle/>
-          <a:p>
-            <a:pPr algn="ctr" indent="0" marL="0">
-              <a:buNone/>
-            </a:pPr>
-            <a:r>
-              <a:rPr lang="en-US" sz="1400" b="1" dirty="0">
-                <a:solidFill>
-                  <a:srgbClr val="16232E"/>
-                </a:solidFill>
-                <a:latin typeface="맑은 고딕" pitchFamily="34" charset="0"/>
-                <a:ea typeface="맑은 고딕" pitchFamily="34" charset="-122"/>
-                <a:cs typeface="맑은 고딕" pitchFamily="34" charset="-120"/>
-              </a:rPr>
-              <a:t>mm · PGE₂ (최소)</a:t>
-            </a:r>
-            <a:endParaRPr lang="en-US" sz="1400" dirty="0"/>
-          </a:p>
-        </p:txBody>
-      </p:sp>
-      <p:sp>
-        <p:nvSpPr>
-          <p:cNvPr id="10" name="Shape 8"/>
-          <p:cNvSpPr/>
-          <p:nvPr/>
-        </p:nvSpPr>
-        <p:spPr>
-          <a:xfrm>
-            <a:off x="6144768" y="1645920"/>
-            <a:ext cx="2587752" cy="1828800"/>
-          </a:xfrm>
-          <a:prstGeom prst="roundRect">
-            <a:avLst>
-              <a:gd name="adj" fmla="val 5000"/>
-            </a:avLst>
-          </a:prstGeom>
-          <a:solidFill>
-            <a:srgbClr val="FFFFFF"/>
-          </a:solidFill>
-          <a:ln/>
-          <a:effectLst>
-            <a:outerShdw sx="100000" sy="100000" kx="0" ky="0" algn="bl" rotWithShape="0" blurRad="76200" dist="25400" dir="5400000">
-              <a:srgbClr val="16232E">
-                <a:alpha val="10000"/>
-              </a:srgbClr>
-            </a:outerShdw>
-          </a:effectLst>
-        </p:spPr>
-      </p:sp>
-      <p:sp>
-        <p:nvSpPr>
-          <p:cNvPr id="11" name="Text 9"/>
-          <p:cNvSpPr txBox="1"/>
-          <p:nvPr/>
-        </p:nvSpPr>
-        <p:spPr>
-          <a:xfrm>
-            <a:off x="6144768" y="1874520"/>
-            <a:ext cx="2587752" cy="1005840"/>
-          </a:xfrm>
-          <a:prstGeom prst="rect">
-            <a:avLst/>
-          </a:prstGeom>
-          <a:noFill/>
-          <a:ln/>
-        </p:spPr>
-        <p:txBody>
-          <a:bodyPr wrap="square" lIns="0" tIns="0" rIns="0" bIns="0" rtlCol="0" anchor="ctr"/>
-          <a:lstStyle/>
-          <a:p>
-            <a:pPr algn="ctr" indent="0" marL="0">
-              <a:buNone/>
-            </a:pPr>
-            <a:r>
-              <a:rPr lang="en-US" sz="4000" b="1" dirty="0">
-                <a:solidFill>
-                  <a:srgbClr val="3D7EA6"/>
-                </a:solidFill>
-                <a:latin typeface="맑은 고딕" pitchFamily="34" charset="0"/>
-                <a:ea typeface="맑은 고딕" pitchFamily="34" charset="-122"/>
-                <a:cs typeface="맑은 고딕" pitchFamily="34" charset="-120"/>
-              </a:rPr>
-              <a:t>-2.75 ± 0.15</a:t>
-            </a:r>
-            <a:endParaRPr lang="en-US" sz="4000" dirty="0"/>
-          </a:p>
-        </p:txBody>
-      </p:sp>
-      <p:sp>
-        <p:nvSpPr>
-          <p:cNvPr id="12" name="Text 10"/>
-          <p:cNvSpPr txBox="1"/>
-          <p:nvPr/>
-        </p:nvSpPr>
-        <p:spPr>
-          <a:xfrm>
-            <a:off x="6144768" y="2926080"/>
-            <a:ext cx="2587752" cy="457200"/>
-          </a:xfrm>
-          <a:prstGeom prst="rect">
-            <a:avLst/>
-          </a:prstGeom>
-          <a:noFill/>
-          <a:ln/>
-        </p:spPr>
-        <p:txBody>
-          <a:bodyPr wrap="square" lIns="0" tIns="0" rIns="0" bIns="0" rtlCol="0" anchor="ctr"/>
-          <a:lstStyle/>
-          <a:p>
-            <a:pPr algn="ctr" indent="0" marL="0">
-              <a:buNone/>
-            </a:pPr>
-            <a:r>
-              <a:rPr lang="en-US" sz="1400" b="1" dirty="0">
-                <a:solidFill>
-                  <a:srgbClr val="16232E"/>
-                </a:solidFill>
-                <a:latin typeface="맑은 고딕" pitchFamily="34" charset="0"/>
-                <a:ea typeface="맑은 고딕" pitchFamily="34" charset="-122"/>
-                <a:cs typeface="맑은 고딕" pitchFamily="34" charset="-120"/>
-              </a:rPr>
-              <a:t>mm · 비타민D</a:t>
-            </a:r>
-            <a:endParaRPr lang="en-US" sz="1400" dirty="0"/>
-          </a:p>
-        </p:txBody>
-      </p:sp>
-      <p:sp>
-        <p:nvSpPr>
-          <p:cNvPr id="13" name="Shape 11"/>
-          <p:cNvSpPr/>
-          <p:nvPr/>
-        </p:nvSpPr>
-        <p:spPr>
-          <a:xfrm>
-            <a:off x="8897112" y="1645920"/>
-            <a:ext cx="2587752" cy="1828800"/>
-          </a:xfrm>
-          <a:prstGeom prst="roundRect">
-            <a:avLst>
-              <a:gd name="adj" fmla="val 5000"/>
-            </a:avLst>
-          </a:prstGeom>
-          <a:solidFill>
-            <a:srgbClr val="FFFFFF"/>
-          </a:solidFill>
-          <a:ln/>
-          <a:effectLst>
-            <a:outerShdw sx="100000" sy="100000" kx="0" ky="0" algn="bl" rotWithShape="0" blurRad="76200" dist="25400" dir="5400000">
-              <a:srgbClr val="16232E">
-                <a:alpha val="10000"/>
-              </a:srgbClr>
-            </a:outerShdw>
-          </a:effectLst>
-        </p:spPr>
-      </p:sp>
-      <p:sp>
-        <p:nvSpPr>
-          <p:cNvPr id="14" name="Text 12"/>
-          <p:cNvSpPr txBox="1"/>
-          <p:nvPr/>
-        </p:nvSpPr>
-        <p:spPr>
-          <a:xfrm>
-            <a:off x="8897112" y="1874520"/>
-            <a:ext cx="2587752" cy="1005840"/>
-          </a:xfrm>
-          <a:prstGeom prst="rect">
-            <a:avLst/>
-          </a:prstGeom>
-          <a:noFill/>
-          <a:ln/>
-        </p:spPr>
-        <p:txBody>
-          <a:bodyPr wrap="square" lIns="0" tIns="0" rIns="0" bIns="0" rtlCol="0" anchor="ctr"/>
-          <a:lstStyle/>
-          <a:p>
-            <a:pPr algn="ctr" indent="0" marL="0">
-              <a:buNone/>
-            </a:pPr>
-            <a:r>
-              <a:rPr lang="en-US" sz="4000" b="1" dirty="0">
-                <a:solidFill>
-                  <a:srgbClr val="D97706"/>
-                </a:solidFill>
-                <a:latin typeface="맑은 고딕" pitchFamily="34" charset="0"/>
-                <a:ea typeface="맑은 고딕" pitchFamily="34" charset="-122"/>
-                <a:cs typeface="맑은 고딕" pitchFamily="34" charset="-120"/>
-              </a:rPr>
-              <a:t>-5.07 ± 0.87</a:t>
-            </a:r>
-            <a:endParaRPr lang="en-US" sz="4000" dirty="0"/>
-          </a:p>
-        </p:txBody>
-      </p:sp>
-      <p:sp>
-        <p:nvSpPr>
-          <p:cNvPr id="15" name="Text 13"/>
-          <p:cNvSpPr txBox="1"/>
-          <p:nvPr/>
-        </p:nvSpPr>
-        <p:spPr>
-          <a:xfrm>
-            <a:off x="8897112" y="2926080"/>
-            <a:ext cx="2587752" cy="457200"/>
-          </a:xfrm>
-          <a:prstGeom prst="rect">
-            <a:avLst/>
-          </a:prstGeom>
-          <a:noFill/>
-          <a:ln/>
-        </p:spPr>
-        <p:txBody>
-          <a:bodyPr wrap="square" lIns="0" tIns="0" rIns="0" bIns="0" rtlCol="0" anchor="ctr"/>
-          <a:lstStyle/>
-          <a:p>
-            <a:pPr algn="ctr" indent="0" marL="0">
-              <a:buNone/>
-            </a:pPr>
-            <a:r>
-              <a:rPr lang="en-US" sz="1400" b="1" dirty="0">
-                <a:solidFill>
-                  <a:srgbClr val="16232E"/>
-                </a:solidFill>
-                <a:latin typeface="맑은 고딕" pitchFamily="34" charset="0"/>
-                <a:ea typeface="맑은 고딕" pitchFamily="34" charset="-122"/>
-                <a:cs typeface="맑은 고딕" pitchFamily="34" charset="-120"/>
-              </a:rPr>
-              <a:t>mm · 코르티코스테로이드 (최대)</a:t>
-            </a:r>
-            <a:endParaRPr lang="en-US" sz="1400" dirty="0"/>
-          </a:p>
-        </p:txBody>
-      </p:sp>
-      <p:sp>
-        <p:nvSpPr>
-          <p:cNvPr id="16" name="Shape 14"/>
-          <p:cNvSpPr/>
-          <p:nvPr/>
-        </p:nvSpPr>
-        <p:spPr>
-          <a:xfrm>
-            <a:off x="640080" y="3749040"/>
-            <a:ext cx="10908792" cy="1737360"/>
-          </a:xfrm>
-          <a:prstGeom prst="roundRect">
-            <a:avLst>
-              <a:gd name="adj" fmla="val 5263"/>
-            </a:avLst>
-          </a:prstGeom>
-          <a:solidFill>
-            <a:srgbClr val="FFFFFF"/>
-          </a:solidFill>
-          <a:ln/>
-          <a:effectLst>
-            <a:outerShdw sx="100000" sy="100000" kx="0" ky="0" algn="bl" rotWithShape="0" blurRad="76200" dist="25400" dir="5400000">
-              <a:srgbClr val="16232E">
-                <a:alpha val="10000"/>
-              </a:srgbClr>
-            </a:outerShdw>
-          </a:effectLst>
-        </p:spPr>
-      </p:sp>
-      <p:sp>
-        <p:nvSpPr>
-          <p:cNvPr id="17" name="Text 15"/>
-          <p:cNvSpPr txBox="1"/>
-          <p:nvPr/>
-        </p:nvSpPr>
-        <p:spPr>
-          <a:xfrm>
-            <a:off x="960120" y="3931920"/>
-            <a:ext cx="10268712" cy="365760"/>
-          </a:xfrm>
-          <a:prstGeom prst="rect">
-            <a:avLst/>
-          </a:prstGeom>
-          <a:noFill/>
-          <a:ln/>
-        </p:spPr>
-        <p:txBody>
-          <a:bodyPr wrap="square" lIns="0" tIns="0" rIns="0" bIns="0" rtlCol="0" anchor="ctr"/>
-          <a:lstStyle/>
-          <a:p>
-            <a:pPr indent="0" marL="0">
-              <a:buNone/>
-            </a:pPr>
-            <a:r>
-              <a:rPr lang="en-US" sz="1400" b="1" dirty="0">
-                <a:solidFill>
-                  <a:srgbClr val="1B4965"/>
-                </a:solidFill>
-                <a:latin typeface="맑은 고딕" pitchFamily="34" charset="0"/>
-                <a:ea typeface="맑은 고딕" pitchFamily="34" charset="-122"/>
-                <a:cs typeface="맑은 고딕" pitchFamily="34" charset="-120"/>
-              </a:rPr>
-              <a:t>조직학적 소견이 임상 측정을 뒷받침</a:t>
-            </a:r>
-            <a:endParaRPr lang="en-US" sz="1400" dirty="0"/>
-          </a:p>
-        </p:txBody>
-      </p:sp>
-      <p:sp>
-        <p:nvSpPr>
-          <p:cNvPr id="18" name="Text 16"/>
-          <p:cNvSpPr txBox="1"/>
-          <p:nvPr/>
-        </p:nvSpPr>
-        <p:spPr>
-          <a:xfrm>
-            <a:off x="960120" y="4343400"/>
-            <a:ext cx="10268712" cy="1051560"/>
-          </a:xfrm>
-          <a:prstGeom prst="rect">
-            <a:avLst/>
-          </a:prstGeom>
-          <a:noFill/>
-          <a:ln/>
-        </p:spPr>
-        <p:txBody>
-          <a:bodyPr wrap="square" lIns="0" tIns="0" rIns="0" bIns="0" rtlCol="0" anchor="ctr"/>
-          <a:lstStyle/>
-          <a:p>
-            <a:pPr indent="0" marL="0">
-              <a:lnSpc>
-                <a:spcPct val="130000"/>
-              </a:lnSpc>
-              <a:buNone/>
-            </a:pPr>
-            <a:r>
-              <a:rPr lang="en-US" sz="1300" dirty="0">
-                <a:solidFill>
-                  <a:srgbClr val="16232E"/>
-                </a:solidFill>
-                <a:latin typeface="맑은 고딕" pitchFamily="34" charset="0"/>
-                <a:ea typeface="맑은 고딕" pitchFamily="34" charset="-122"/>
-                <a:cs typeface="맑은 고딕" pitchFamily="34" charset="-120"/>
-              </a:rPr>
-              <a:t>치주인대(PDL) 폭이 코르티코스테로이드군에서 가장 넓게 유지(압박·긴장측 모두) — 대조군이 가장 좁음, 비타민D·PGE₂군은 중간 수준. 임상측정 결과와 조직 소견이 서로를 뒷받침한다.</a:t>
-            </a:r>
-            <a:endParaRPr lang="en-US" sz="1300" dirty="0"/>
-          </a:p>
-        </p:txBody>
-      </p:sp>
-      <p:sp>
-        <p:nvSpPr>
-          <p:cNvPr id="19" name="Text 17"/>
-          <p:cNvSpPr txBox="1"/>
-          <p:nvPr/>
-        </p:nvSpPr>
-        <p:spPr>
-          <a:xfrm>
-            <a:off x="640080" y="5623560"/>
-            <a:ext cx="10908792" cy="365760"/>
-          </a:xfrm>
-          <a:prstGeom prst="rect">
-            <a:avLst/>
-          </a:prstGeom>
-          <a:noFill/>
-          <a:ln/>
-        </p:spPr>
-        <p:txBody>
-          <a:bodyPr wrap="square" lIns="0" tIns="0" rIns="0" bIns="0" rtlCol="0" anchor="ctr"/>
-          <a:lstStyle/>
-          <a:p>
-            <a:pPr indent="0" marL="0">
-              <a:buNone/>
-            </a:pPr>
-            <a:r>
-              <a:rPr lang="en-US" sz="1100" i="1" dirty="0">
-                <a:solidFill>
-                  <a:srgbClr val="5B6B7A"/>
-                </a:solidFill>
-                <a:latin typeface="맑은 고딕" pitchFamily="34" charset="0"/>
-                <a:ea typeface="맑은 고딕" pitchFamily="34" charset="-122"/>
-                <a:cs typeface="맑은 고딕" pitchFamily="34" charset="-120"/>
-              </a:rPr>
-              <a:t>※ 양성대조 vs PGE₂ 재발량 차이 — 통계적으로 유의하지 않음(p = 0.605). 자세한 내용은 부록(Appendix A) 참고.</a:t>
-            </a:r>
-            <a:endParaRPr lang="en-US" sz="1100" dirty="0"/>
-          </a:p>
-        </p:txBody>
-      </p:sp>
-      <p:sp>
-        <p:nvSpPr>
-          <p:cNvPr id="20" name="Text 18"/>
-          <p:cNvSpPr txBox="1"/>
-          <p:nvPr/>
-        </p:nvSpPr>
-        <p:spPr>
-          <a:xfrm>
-            <a:off x="11365992" y="6400800"/>
-            <a:ext cx="457200" cy="320040"/>
-          </a:xfrm>
-          <a:prstGeom prst="rect">
-            <a:avLst/>
-          </a:prstGeom>
-          <a:noFill/>
-          <a:ln/>
-        </p:spPr>
-        <p:txBody>
-          <a:bodyPr wrap="square" lIns="0" tIns="0" rIns="0" bIns="0" rtlCol="0" anchor="ctr"/>
-          <a:lstStyle/>
-          <a:p>
-            <a:pPr algn="r" indent="0" marL="0">
-              <a:buNone/>
-            </a:pPr>
-            <a:r>
-              <a:rPr lang="en-US" sz="1100" dirty="0">
-                <a:solidFill>
-                  <a:srgbClr val="5B6B7A"/>
-                </a:solidFill>
-                <a:latin typeface="Cambria" pitchFamily="34" charset="0"/>
-                <a:ea typeface="Cambria" pitchFamily="34" charset="-122"/>
-                <a:cs typeface="Cambria" pitchFamily="34" charset="-120"/>
-              </a:rPr>
               <a:t>7</a:t>
             </a:r>
             <a:endParaRPr lang="en-US" sz="1100" dirty="0"/>
@@ -10760,7 +12024,7 @@
                 <a:ea typeface="맑은 고딕" pitchFamily="34" charset="-122"/>
                 <a:cs typeface="맑은 고딕" pitchFamily="34" charset="-120"/>
               </a:rPr>
-              <a:t>RESULTS · 03</a:t>
+              <a:t>RESULTS · 02</a:t>
             </a:r>
             <a:endParaRPr lang="en-US" sz="1200" dirty="0"/>
           </a:p>
@@ -10799,45 +12063,51 @@
                 <a:ea typeface="맑은 고딕" pitchFamily="34" charset="-122"/>
                 <a:cs typeface="맑은 고딕" pitchFamily="34" charset="-120"/>
               </a:rPr>
-              <a:t>조직학적 소견 — 코르티코스테로이드군에서 PDL 폭 가장 넓게 유지</a:t>
+              <a:t>재발기(2주) — 가속이 컸던 약물이 더 많이 되돌아간다</a:t>
             </a:r>
             <a:endParaRPr lang="en-US" sz="2400" dirty="0"/>
           </a:p>
         </p:txBody>
       </p:sp>
-      <p:pic>
-        <p:nvPicPr>
-          <p:cNvPr id="4" name="Image 0" descr="/home/user/-/치과약리학실험2-논문발표/assets/fig3_he.jpg">    </p:cNvPr>
-          <p:cNvPicPr>
-            <a:picLocks noChangeAspect="1"/>
-          </p:cNvPicPr>
-          <p:nvPr/>
-        </p:nvPicPr>
-        <p:blipFill>
-          <a:blip r:embed="rId1"/>
-          <a:srcRect l="0" r="0" t="0" b="0"/>
-          <a:stretch/>
-        </p:blipFill>
-        <p:spPr>
-          <a:xfrm>
-            <a:off x="640080" y="1600200"/>
-            <a:ext cx="4754880" cy="4480560"/>
-          </a:xfrm>
-          <a:prstGeom prst="rect">
-            <a:avLst/>
-          </a:prstGeom>
-        </p:spPr>
-      </p:pic>
-      <p:sp>
-        <p:nvSpPr>
-          <p:cNvPr id="5" name="Text 2"/>
-          <p:cNvSpPr txBox="1"/>
-          <p:nvPr/>
-        </p:nvSpPr>
-        <p:spPr>
-          <a:xfrm>
-            <a:off x="640080" y="6080760"/>
-            <a:ext cx="4754880" cy="457200"/>
+      <p:sp>
+        <p:nvSpPr>
+          <p:cNvPr id="4" name="Shape 2"/>
+          <p:cNvSpPr/>
+          <p:nvPr/>
+        </p:nvSpPr>
+        <p:spPr>
+          <a:xfrm>
+            <a:off x="640080" y="1645920"/>
+            <a:ext cx="2587752" cy="1828800"/>
+          </a:xfrm>
+          <a:prstGeom prst="roundRect">
+            <a:avLst>
+              <a:gd name="adj" fmla="val 5000"/>
+            </a:avLst>
+          </a:prstGeom>
+          <a:solidFill>
+            <a:srgbClr val="FFFFFF"/>
+          </a:solidFill>
+          <a:ln/>
+          <a:effectLst>
+            <a:outerShdw sx="100000" sy="100000" kx="0" ky="0" algn="bl" rotWithShape="0" blurRad="76200" dist="25400" dir="5400000">
+              <a:srgbClr val="16232E">
+                <a:alpha val="10000"/>
+              </a:srgbClr>
+            </a:outerShdw>
+          </a:effectLst>
+        </p:spPr>
+      </p:sp>
+      <p:sp>
+        <p:nvSpPr>
+          <p:cNvPr id="5" name="Text 3"/>
+          <p:cNvSpPr txBox="1"/>
+          <p:nvPr/>
+        </p:nvSpPr>
+        <p:spPr>
+          <a:xfrm>
+            <a:off x="640080" y="1874520"/>
+            <a:ext cx="2587752" cy="1005840"/>
           </a:xfrm>
           <a:prstGeom prst="rect">
             <a:avLst/>
@@ -10850,13 +12120,519 @@
           <a:lstStyle/>
           <a:p>
             <a:pPr algn="ctr" indent="0" marL="0">
+              <a:buNone/>
+            </a:pPr>
+            <a:r>
+              <a:rPr lang="en-US" sz="4000" b="1" dirty="0">
+                <a:solidFill>
+                  <a:srgbClr val="9AA5B1"/>
+                </a:solidFill>
+                <a:latin typeface="맑은 고딕" pitchFamily="34" charset="0"/>
+                <a:ea typeface="맑은 고딕" pitchFamily="34" charset="-122"/>
+                <a:cs typeface="맑은 고딕" pitchFamily="34" charset="-120"/>
+              </a:rPr>
+              <a:t>-1.09 ± 0.17</a:t>
+            </a:r>
+            <a:endParaRPr lang="en-US" sz="4000" dirty="0"/>
+          </a:p>
+        </p:txBody>
+      </p:sp>
+      <p:sp>
+        <p:nvSpPr>
+          <p:cNvPr id="6" name="Text 4"/>
+          <p:cNvSpPr txBox="1"/>
+          <p:nvPr/>
+        </p:nvSpPr>
+        <p:spPr>
+          <a:xfrm>
+            <a:off x="640080" y="2926080"/>
+            <a:ext cx="2587752" cy="457200"/>
+          </a:xfrm>
+          <a:prstGeom prst="rect">
+            <a:avLst/>
+          </a:prstGeom>
+          <a:noFill/>
+          <a:ln/>
+        </p:spPr>
+        <p:txBody>
+          <a:bodyPr wrap="square" lIns="0" tIns="0" rIns="0" bIns="0" rtlCol="0" anchor="ctr"/>
+          <a:lstStyle/>
+          <a:p>
+            <a:pPr algn="ctr" indent="0" marL="0">
+              <a:buNone/>
+            </a:pPr>
+            <a:r>
+              <a:rPr lang="en-US" sz="1400" b="1" dirty="0">
+                <a:solidFill>
+                  <a:srgbClr val="16232E"/>
+                </a:solidFill>
+                <a:latin typeface="맑은 고딕" pitchFamily="34" charset="0"/>
+                <a:ea typeface="맑은 고딕" pitchFamily="34" charset="-122"/>
+                <a:cs typeface="맑은 고딕" pitchFamily="34" charset="-120"/>
+              </a:rPr>
+              <a:t>mm · 양성대조</a:t>
+            </a:r>
+            <a:endParaRPr lang="en-US" sz="1400" dirty="0"/>
+          </a:p>
+        </p:txBody>
+      </p:sp>
+      <p:sp>
+        <p:nvSpPr>
+          <p:cNvPr id="7" name="Shape 5"/>
+          <p:cNvSpPr/>
+          <p:nvPr/>
+        </p:nvSpPr>
+        <p:spPr>
+          <a:xfrm>
+            <a:off x="3392424" y="1645920"/>
+            <a:ext cx="2587752" cy="1828800"/>
+          </a:xfrm>
+          <a:prstGeom prst="roundRect">
+            <a:avLst>
+              <a:gd name="adj" fmla="val 5000"/>
+            </a:avLst>
+          </a:prstGeom>
+          <a:solidFill>
+            <a:srgbClr val="FFFFFF"/>
+          </a:solidFill>
+          <a:ln/>
+          <a:effectLst>
+            <a:outerShdw sx="100000" sy="100000" kx="0" ky="0" algn="bl" rotWithShape="0" blurRad="76200" dist="25400" dir="5400000">
+              <a:srgbClr val="16232E">
+                <a:alpha val="10000"/>
+              </a:srgbClr>
+            </a:outerShdw>
+          </a:effectLst>
+        </p:spPr>
+      </p:sp>
+      <p:sp>
+        <p:nvSpPr>
+          <p:cNvPr id="8" name="Text 6"/>
+          <p:cNvSpPr txBox="1"/>
+          <p:nvPr/>
+        </p:nvSpPr>
+        <p:spPr>
+          <a:xfrm>
+            <a:off x="3392424" y="1874520"/>
+            <a:ext cx="2587752" cy="1005840"/>
+          </a:xfrm>
+          <a:prstGeom prst="rect">
+            <a:avLst/>
+          </a:prstGeom>
+          <a:noFill/>
+          <a:ln/>
+        </p:spPr>
+        <p:txBody>
+          <a:bodyPr wrap="square" lIns="0" tIns="0" rIns="0" bIns="0" rtlCol="0" anchor="ctr"/>
+          <a:lstStyle/>
+          <a:p>
+            <a:pPr algn="ctr" indent="0" marL="0">
+              <a:buNone/>
+            </a:pPr>
+            <a:r>
+              <a:rPr lang="en-US" sz="4000" b="1" dirty="0">
+                <a:solidFill>
+                  <a:srgbClr val="2F855A"/>
+                </a:solidFill>
+                <a:latin typeface="맑은 고딕" pitchFamily="34" charset="0"/>
+                <a:ea typeface="맑은 고딕" pitchFamily="34" charset="-122"/>
+                <a:cs typeface="맑은 고딕" pitchFamily="34" charset="-120"/>
+              </a:rPr>
+              <a:t>-0.86 ± 0.23</a:t>
+            </a:r>
+            <a:endParaRPr lang="en-US" sz="4000" dirty="0"/>
+          </a:p>
+        </p:txBody>
+      </p:sp>
+      <p:sp>
+        <p:nvSpPr>
+          <p:cNvPr id="9" name="Text 7"/>
+          <p:cNvSpPr txBox="1"/>
+          <p:nvPr/>
+        </p:nvSpPr>
+        <p:spPr>
+          <a:xfrm>
+            <a:off x="3392424" y="2926080"/>
+            <a:ext cx="2587752" cy="457200"/>
+          </a:xfrm>
+          <a:prstGeom prst="rect">
+            <a:avLst/>
+          </a:prstGeom>
+          <a:noFill/>
+          <a:ln/>
+        </p:spPr>
+        <p:txBody>
+          <a:bodyPr wrap="square" lIns="0" tIns="0" rIns="0" bIns="0" rtlCol="0" anchor="ctr"/>
+          <a:lstStyle/>
+          <a:p>
+            <a:pPr algn="ctr" indent="0" marL="0">
+              <a:buNone/>
+            </a:pPr>
+            <a:r>
+              <a:rPr lang="en-US" sz="1400" b="1" dirty="0">
+                <a:solidFill>
+                  <a:srgbClr val="16232E"/>
+                </a:solidFill>
+                <a:latin typeface="맑은 고딕" pitchFamily="34" charset="0"/>
+                <a:ea typeface="맑은 고딕" pitchFamily="34" charset="-122"/>
+                <a:cs typeface="맑은 고딕" pitchFamily="34" charset="-120"/>
+              </a:rPr>
+              <a:t>mm · PGE₂ (최소)</a:t>
+            </a:r>
+            <a:endParaRPr lang="en-US" sz="1400" dirty="0"/>
+          </a:p>
+        </p:txBody>
+      </p:sp>
+      <p:sp>
+        <p:nvSpPr>
+          <p:cNvPr id="10" name="Shape 8"/>
+          <p:cNvSpPr/>
+          <p:nvPr/>
+        </p:nvSpPr>
+        <p:spPr>
+          <a:xfrm>
+            <a:off x="6144768" y="1645920"/>
+            <a:ext cx="2587752" cy="1828800"/>
+          </a:xfrm>
+          <a:prstGeom prst="roundRect">
+            <a:avLst>
+              <a:gd name="adj" fmla="val 5000"/>
+            </a:avLst>
+          </a:prstGeom>
+          <a:solidFill>
+            <a:srgbClr val="FFFFFF"/>
+          </a:solidFill>
+          <a:ln/>
+          <a:effectLst>
+            <a:outerShdw sx="100000" sy="100000" kx="0" ky="0" algn="bl" rotWithShape="0" blurRad="76200" dist="25400" dir="5400000">
+              <a:srgbClr val="16232E">
+                <a:alpha val="10000"/>
+              </a:srgbClr>
+            </a:outerShdw>
+          </a:effectLst>
+        </p:spPr>
+      </p:sp>
+      <p:sp>
+        <p:nvSpPr>
+          <p:cNvPr id="11" name="Text 9"/>
+          <p:cNvSpPr txBox="1"/>
+          <p:nvPr/>
+        </p:nvSpPr>
+        <p:spPr>
+          <a:xfrm>
+            <a:off x="6144768" y="1874520"/>
+            <a:ext cx="2587752" cy="1005840"/>
+          </a:xfrm>
+          <a:prstGeom prst="rect">
+            <a:avLst/>
+          </a:prstGeom>
+          <a:noFill/>
+          <a:ln/>
+        </p:spPr>
+        <p:txBody>
+          <a:bodyPr wrap="square" lIns="0" tIns="0" rIns="0" bIns="0" rtlCol="0" anchor="ctr"/>
+          <a:lstStyle/>
+          <a:p>
+            <a:pPr algn="ctr" indent="0" marL="0">
+              <a:buNone/>
+            </a:pPr>
+            <a:r>
+              <a:rPr lang="en-US" sz="4000" b="1" dirty="0">
+                <a:solidFill>
+                  <a:srgbClr val="3D7EA6"/>
+                </a:solidFill>
+                <a:latin typeface="맑은 고딕" pitchFamily="34" charset="0"/>
+                <a:ea typeface="맑은 고딕" pitchFamily="34" charset="-122"/>
+                <a:cs typeface="맑은 고딕" pitchFamily="34" charset="-120"/>
+              </a:rPr>
+              <a:t>-2.75 ± 0.15</a:t>
+            </a:r>
+            <a:endParaRPr lang="en-US" sz="4000" dirty="0"/>
+          </a:p>
+        </p:txBody>
+      </p:sp>
+      <p:sp>
+        <p:nvSpPr>
+          <p:cNvPr id="12" name="Text 10"/>
+          <p:cNvSpPr txBox="1"/>
+          <p:nvPr/>
+        </p:nvSpPr>
+        <p:spPr>
+          <a:xfrm>
+            <a:off x="6144768" y="2926080"/>
+            <a:ext cx="2587752" cy="457200"/>
+          </a:xfrm>
+          <a:prstGeom prst="rect">
+            <a:avLst/>
+          </a:prstGeom>
+          <a:noFill/>
+          <a:ln/>
+        </p:spPr>
+        <p:txBody>
+          <a:bodyPr wrap="square" lIns="0" tIns="0" rIns="0" bIns="0" rtlCol="0" anchor="ctr"/>
+          <a:lstStyle/>
+          <a:p>
+            <a:pPr algn="ctr" indent="0" marL="0">
+              <a:buNone/>
+            </a:pPr>
+            <a:r>
+              <a:rPr lang="en-US" sz="1400" b="1" dirty="0">
+                <a:solidFill>
+                  <a:srgbClr val="16232E"/>
+                </a:solidFill>
+                <a:latin typeface="맑은 고딕" pitchFamily="34" charset="0"/>
+                <a:ea typeface="맑은 고딕" pitchFamily="34" charset="-122"/>
+                <a:cs typeface="맑은 고딕" pitchFamily="34" charset="-120"/>
+              </a:rPr>
+              <a:t>mm · 비타민D</a:t>
+            </a:r>
+            <a:endParaRPr lang="en-US" sz="1400" dirty="0"/>
+          </a:p>
+        </p:txBody>
+      </p:sp>
+      <p:sp>
+        <p:nvSpPr>
+          <p:cNvPr id="13" name="Shape 11"/>
+          <p:cNvSpPr/>
+          <p:nvPr/>
+        </p:nvSpPr>
+        <p:spPr>
+          <a:xfrm>
+            <a:off x="8897112" y="1645920"/>
+            <a:ext cx="2587752" cy="1828800"/>
+          </a:xfrm>
+          <a:prstGeom prst="roundRect">
+            <a:avLst>
+              <a:gd name="adj" fmla="val 5000"/>
+            </a:avLst>
+          </a:prstGeom>
+          <a:solidFill>
+            <a:srgbClr val="FFFFFF"/>
+          </a:solidFill>
+          <a:ln/>
+          <a:effectLst>
+            <a:outerShdw sx="100000" sy="100000" kx="0" ky="0" algn="bl" rotWithShape="0" blurRad="76200" dist="25400" dir="5400000">
+              <a:srgbClr val="16232E">
+                <a:alpha val="10000"/>
+              </a:srgbClr>
+            </a:outerShdw>
+          </a:effectLst>
+        </p:spPr>
+      </p:sp>
+      <p:sp>
+        <p:nvSpPr>
+          <p:cNvPr id="14" name="Text 12"/>
+          <p:cNvSpPr txBox="1"/>
+          <p:nvPr/>
+        </p:nvSpPr>
+        <p:spPr>
+          <a:xfrm>
+            <a:off x="8897112" y="1874520"/>
+            <a:ext cx="2587752" cy="1005840"/>
+          </a:xfrm>
+          <a:prstGeom prst="rect">
+            <a:avLst/>
+          </a:prstGeom>
+          <a:noFill/>
+          <a:ln/>
+        </p:spPr>
+        <p:txBody>
+          <a:bodyPr wrap="square" lIns="0" tIns="0" rIns="0" bIns="0" rtlCol="0" anchor="ctr"/>
+          <a:lstStyle/>
+          <a:p>
+            <a:pPr algn="ctr" indent="0" marL="0">
+              <a:buNone/>
+            </a:pPr>
+            <a:r>
+              <a:rPr lang="en-US" sz="4000" b="1" dirty="0">
+                <a:solidFill>
+                  <a:srgbClr val="D97706"/>
+                </a:solidFill>
+                <a:latin typeface="맑은 고딕" pitchFamily="34" charset="0"/>
+                <a:ea typeface="맑은 고딕" pitchFamily="34" charset="-122"/>
+                <a:cs typeface="맑은 고딕" pitchFamily="34" charset="-120"/>
+              </a:rPr>
+              <a:t>-5.07 ± 0.87</a:t>
+            </a:r>
+            <a:endParaRPr lang="en-US" sz="4000" dirty="0"/>
+          </a:p>
+        </p:txBody>
+      </p:sp>
+      <p:sp>
+        <p:nvSpPr>
+          <p:cNvPr id="15" name="Text 13"/>
+          <p:cNvSpPr txBox="1"/>
+          <p:nvPr/>
+        </p:nvSpPr>
+        <p:spPr>
+          <a:xfrm>
+            <a:off x="8897112" y="2926080"/>
+            <a:ext cx="2587752" cy="457200"/>
+          </a:xfrm>
+          <a:prstGeom prst="rect">
+            <a:avLst/>
+          </a:prstGeom>
+          <a:noFill/>
+          <a:ln/>
+        </p:spPr>
+        <p:txBody>
+          <a:bodyPr wrap="square" lIns="0" tIns="0" rIns="0" bIns="0" rtlCol="0" anchor="ctr"/>
+          <a:lstStyle/>
+          <a:p>
+            <a:pPr algn="ctr" indent="0" marL="0">
+              <a:buNone/>
+            </a:pPr>
+            <a:r>
+              <a:rPr lang="en-US" sz="1400" b="1" dirty="0">
+                <a:solidFill>
+                  <a:srgbClr val="16232E"/>
+                </a:solidFill>
+                <a:latin typeface="맑은 고딕" pitchFamily="34" charset="0"/>
+                <a:ea typeface="맑은 고딕" pitchFamily="34" charset="-122"/>
+                <a:cs typeface="맑은 고딕" pitchFamily="34" charset="-120"/>
+              </a:rPr>
+              <a:t>mm · 코르티코스테로이드 (최대)</a:t>
+            </a:r>
+            <a:endParaRPr lang="en-US" sz="1400" dirty="0"/>
+          </a:p>
+        </p:txBody>
+      </p:sp>
+      <p:sp>
+        <p:nvSpPr>
+          <p:cNvPr id="16" name="Shape 14"/>
+          <p:cNvSpPr/>
+          <p:nvPr/>
+        </p:nvSpPr>
+        <p:spPr>
+          <a:xfrm>
+            <a:off x="640080" y="3749040"/>
+            <a:ext cx="10908792" cy="1737360"/>
+          </a:xfrm>
+          <a:prstGeom prst="roundRect">
+            <a:avLst>
+              <a:gd name="adj" fmla="val 5263"/>
+            </a:avLst>
+          </a:prstGeom>
+          <a:solidFill>
+            <a:srgbClr val="FFFFFF"/>
+          </a:solidFill>
+          <a:ln/>
+          <a:effectLst>
+            <a:outerShdw sx="100000" sy="100000" kx="0" ky="0" algn="bl" rotWithShape="0" blurRad="76200" dist="25400" dir="5400000">
+              <a:srgbClr val="16232E">
+                <a:alpha val="10000"/>
+              </a:srgbClr>
+            </a:outerShdw>
+          </a:effectLst>
+        </p:spPr>
+      </p:sp>
+      <p:sp>
+        <p:nvSpPr>
+          <p:cNvPr id="17" name="Text 15"/>
+          <p:cNvSpPr txBox="1"/>
+          <p:nvPr/>
+        </p:nvSpPr>
+        <p:spPr>
+          <a:xfrm>
+            <a:off x="960120" y="3931920"/>
+            <a:ext cx="10268712" cy="365760"/>
+          </a:xfrm>
+          <a:prstGeom prst="rect">
+            <a:avLst/>
+          </a:prstGeom>
+          <a:noFill/>
+          <a:ln/>
+        </p:spPr>
+        <p:txBody>
+          <a:bodyPr wrap="square" lIns="0" tIns="0" rIns="0" bIns="0" rtlCol="0" anchor="ctr"/>
+          <a:lstStyle/>
+          <a:p>
+            <a:pPr indent="0" marL="0">
+              <a:buNone/>
+            </a:pPr>
+            <a:r>
+              <a:rPr lang="en-US" sz="1400" b="1" dirty="0">
+                <a:solidFill>
+                  <a:srgbClr val="1B4965"/>
+                </a:solidFill>
+                <a:latin typeface="맑은 고딕" pitchFamily="34" charset="0"/>
+                <a:ea typeface="맑은 고딕" pitchFamily="34" charset="-122"/>
+                <a:cs typeface="맑은 고딕" pitchFamily="34" charset="-120"/>
+              </a:rPr>
+              <a:t>조직학적 소견이 임상 측정을 뒷받침</a:t>
+            </a:r>
+            <a:endParaRPr lang="en-US" sz="1400" dirty="0"/>
+          </a:p>
+        </p:txBody>
+      </p:sp>
+      <p:sp>
+        <p:nvSpPr>
+          <p:cNvPr id="18" name="Text 16"/>
+          <p:cNvSpPr txBox="1"/>
+          <p:nvPr/>
+        </p:nvSpPr>
+        <p:spPr>
+          <a:xfrm>
+            <a:off x="960120" y="4343400"/>
+            <a:ext cx="10268712" cy="1051560"/>
+          </a:xfrm>
+          <a:prstGeom prst="rect">
+            <a:avLst/>
+          </a:prstGeom>
+          <a:noFill/>
+          <a:ln/>
+        </p:spPr>
+        <p:txBody>
+          <a:bodyPr wrap="square" lIns="0" tIns="0" rIns="0" bIns="0" rtlCol="0" anchor="ctr"/>
+          <a:lstStyle/>
+          <a:p>
+            <a:pPr indent="0" marL="0">
               <a:lnSpc>
-                <a:spcPct val="115000"/>
+                <a:spcPct val="130000"/>
               </a:lnSpc>
               <a:buNone/>
             </a:pPr>
             <a:r>
-              <a:rPr lang="en-US" sz="1000" i="1" dirty="0">
+              <a:rPr lang="en-US" sz="1300" dirty="0">
+                <a:solidFill>
+                  <a:srgbClr val="16232E"/>
+                </a:solidFill>
+                <a:latin typeface="맑은 고딕" pitchFamily="34" charset="0"/>
+                <a:ea typeface="맑은 고딕" pitchFamily="34" charset="-122"/>
+                <a:cs typeface="맑은 고딕" pitchFamily="34" charset="-120"/>
+              </a:rPr>
+              <a:t>치주인대(PDL) 폭이 코르티코스테로이드군에서 가장 넓게 유지(압박·긴장측 모두) — 대조군이 가장 좁음, 비타민D·PGE₂군은 중간 수준. 임상측정 결과와 조직 소견이 서로를 뒷받침한다.</a:t>
+            </a:r>
+            <a:endParaRPr lang="en-US" sz="1300" dirty="0"/>
+          </a:p>
+        </p:txBody>
+      </p:sp>
+      <p:sp>
+        <p:nvSpPr>
+          <p:cNvPr id="19" name="Text 17"/>
+          <p:cNvSpPr txBox="1"/>
+          <p:nvPr/>
+        </p:nvSpPr>
+        <p:spPr>
+          <a:xfrm>
+            <a:off x="640080" y="5623560"/>
+            <a:ext cx="10908792" cy="365760"/>
+          </a:xfrm>
+          <a:prstGeom prst="rect">
+            <a:avLst/>
+          </a:prstGeom>
+          <a:noFill/>
+          <a:ln/>
+        </p:spPr>
+        <p:txBody>
+          <a:bodyPr wrap="square" lIns="0" tIns="0" rIns="0" bIns="0" rtlCol="0" anchor="ctr"/>
+          <a:lstStyle/>
+          <a:p>
+            <a:pPr indent="0" marL="0">
+              <a:buNone/>
+            </a:pPr>
+            <a:r>
+              <a:rPr lang="en-US" sz="1100" i="1" dirty="0">
                 <a:solidFill>
                   <a:srgbClr val="5B6B7A"/>
                 </a:solidFill>
@@ -10864,137 +12640,15 @@
                 <a:ea typeface="맑은 고딕" pitchFamily="34" charset="-122"/>
                 <a:cs typeface="맑은 고딕" pitchFamily="34" charset="-120"/>
               </a:rPr>
-              <a:t>원문 Figure 3 (H&amp;E, ×40) — A: 음성대조, B: 양성대조, C: 코르티코스테로이드, D: 비타민D, E: PGE₂</a:t>
-            </a:r>
-            <a:endParaRPr lang="en-US" sz="1000" dirty="0"/>
-          </a:p>
-        </p:txBody>
-      </p:sp>
-      <p:sp>
-        <p:nvSpPr>
-          <p:cNvPr id="6" name="Text 3"/>
-          <p:cNvSpPr txBox="1"/>
-          <p:nvPr/>
-        </p:nvSpPr>
-        <p:spPr>
-          <a:xfrm>
-            <a:off x="5760720" y="1737360"/>
-            <a:ext cx="5788152" cy="3657600"/>
-          </a:xfrm>
-          <a:prstGeom prst="rect">
-            <a:avLst/>
-          </a:prstGeom>
-          <a:noFill/>
-          <a:ln/>
-        </p:spPr>
-        <p:txBody>
-          <a:bodyPr wrap="square" lIns="0" tIns="0" rIns="0" bIns="0" rtlCol="0" anchor="t"/>
-          <a:lstStyle/>
-          <a:p>
-            <a:pPr indent="0" marL="0">
-              <a:lnSpc>
-                <a:spcPct val="140000"/>
-              </a:lnSpc>
-              <a:buNone/>
-            </a:pPr>
-            <a:r>
-              <a:rPr lang="en-US" sz="1350" dirty="0">
-                <a:solidFill>
-                  <a:srgbClr val="16232E"/>
-                </a:solidFill>
-                <a:latin typeface="맑은 고딕" pitchFamily="34" charset="0"/>
-                <a:ea typeface="맑은 고딕" pitchFamily="34" charset="-122"/>
-                <a:cs typeface="맑은 고딕" pitchFamily="34" charset="-120"/>
-              </a:rPr>
-              <a:t>•  코르티코스테로이드군(C) — 압박·긴장측 모두 치주인대(PDL) 폭 가장 넓게 유지</a:t>
-            </a:r>
-            <a:endParaRPr lang="en-US" sz="1350" dirty="0"/>
-          </a:p>
-          <a:p>
-            <a:pPr indent="0" marL="0">
-              <a:lnSpc>
-                <a:spcPct val="140000"/>
-              </a:lnSpc>
-              <a:buNone/>
-            </a:pPr>
-            <a:r>
-              <a:rPr lang="en-US" sz="1350" dirty="0">
-                <a:solidFill>
-                  <a:srgbClr val="16232E"/>
-                </a:solidFill>
-                <a:latin typeface="맑은 고딕" pitchFamily="34" charset="0"/>
-                <a:ea typeface="맑은 고딕" pitchFamily="34" charset="-122"/>
-                <a:cs typeface="맑은 고딕" pitchFamily="34" charset="-120"/>
-              </a:rPr>
-              <a:t>•  대조군(A, B) — PDL 폭 가장 좁음, 재발을 흡수할 조직 여유가 적음을 시사</a:t>
-            </a:r>
-            <a:endParaRPr lang="en-US" sz="1350" dirty="0"/>
-          </a:p>
-          <a:p>
-            <a:pPr indent="0" marL="0">
-              <a:lnSpc>
-                <a:spcPct val="140000"/>
-              </a:lnSpc>
-              <a:buNone/>
-            </a:pPr>
-            <a:r>
-              <a:rPr lang="en-US" sz="1350" dirty="0">
-                <a:solidFill>
-                  <a:srgbClr val="16232E"/>
-                </a:solidFill>
-                <a:latin typeface="맑은 고딕" pitchFamily="34" charset="0"/>
-                <a:ea typeface="맑은 고딕" pitchFamily="34" charset="-122"/>
-                <a:cs typeface="맑은 고딕" pitchFamily="34" charset="-120"/>
-              </a:rPr>
-              <a:t>•  비타민D(D)·PGE₂(E)군 — 중간 수준의 PDL 폭</a:t>
-            </a:r>
-            <a:endParaRPr lang="en-US" sz="1350" dirty="0"/>
-          </a:p>
-          <a:p>
-            <a:pPr indent="0" marL="0">
-              <a:lnSpc>
-                <a:spcPct val="140000"/>
-              </a:lnSpc>
-              <a:buNone/>
-            </a:pPr>
-            <a:r>
-              <a:rPr lang="en-US" sz="1350" dirty="0">
-                <a:solidFill>
-                  <a:srgbClr val="16232E"/>
-                </a:solidFill>
-                <a:latin typeface="맑은 고딕" pitchFamily="34" charset="0"/>
-                <a:ea typeface="맑은 고딕" pitchFamily="34" charset="-122"/>
-                <a:cs typeface="맑은 고딕" pitchFamily="34" charset="-120"/>
-              </a:rPr>
-              <a:t>•  캘리퍼 임상 측정 결과와 조직 소견이 서로 뒷받침함</a:t>
-            </a:r>
-            <a:endParaRPr lang="en-US" sz="1350" dirty="0"/>
-          </a:p>
-          <a:p>
-            <a:pPr indent="0" marL="0">
-              <a:lnSpc>
-                <a:spcPct val="140000"/>
-              </a:lnSpc>
-              <a:buNone/>
-            </a:pPr>
-            <a:r>
-              <a:rPr lang="en-US" sz="1350" dirty="0">
-                <a:solidFill>
-                  <a:srgbClr val="16232E"/>
-                </a:solidFill>
-                <a:latin typeface="맑은 고딕" pitchFamily="34" charset="0"/>
-                <a:ea typeface="맑은 고딕" pitchFamily="34" charset="-122"/>
-                <a:cs typeface="맑은 고딕" pitchFamily="34" charset="-120"/>
-              </a:rPr>
-              <a:t>•  동일한 순서 패턴이 ALP·TRAP 염색(원문 Figure 4, 5)에서도 확인됨</a:t>
-            </a:r>
-            <a:endParaRPr lang="en-US" sz="1350" dirty="0"/>
-          </a:p>
-        </p:txBody>
-      </p:sp>
-      <p:sp>
-        <p:nvSpPr>
-          <p:cNvPr id="7" name="Text 4"/>
+              <a:t>※ 양성대조 vs PGE₂ 재발량 차이 — 통계적으로 유의하지 않음(p = 0.605). 자세한 내용은 부록(Appendix A) 참고.</a:t>
+            </a:r>
+            <a:endParaRPr lang="en-US" sz="1100" dirty="0"/>
+          </a:p>
+        </p:txBody>
+      </p:sp>
+      <p:sp>
+        <p:nvSpPr>
+          <p:cNvPr id="20" name="Text 18"/>
           <p:cNvSpPr txBox="1"/>
           <p:nvPr/>
         </p:nvSpPr>
@@ -11096,7 +12750,7 @@
                 <a:ea typeface="맑은 고딕" pitchFamily="34" charset="-122"/>
                 <a:cs typeface="맑은 고딕" pitchFamily="34" charset="-120"/>
               </a:rPr>
-              <a:t>PHARMACOLOGICAL SIGNIFICANCE</a:t>
+              <a:t>RESULTS · 03</a:t>
             </a:r>
             <a:endParaRPr lang="en-US" sz="1200" dirty="0"/>
           </a:p>
@@ -11135,112 +12789,45 @@
                 <a:ea typeface="맑은 고딕" pitchFamily="34" charset="-122"/>
                 <a:cs typeface="맑은 고딕" pitchFamily="34" charset="-120"/>
               </a:rPr>
-              <a:t>치과약리학적 의의 — 왜 이 세 약물인가</a:t>
+              <a:t>조직학적 소견 — 코르티코스테로이드군에서 PDL 폭 가장 넓게 유지</a:t>
             </a:r>
             <a:endParaRPr lang="en-US" sz="2400" dirty="0"/>
           </a:p>
         </p:txBody>
       </p:sp>
-      <p:sp>
-        <p:nvSpPr>
-          <p:cNvPr id="4" name="Shape 2"/>
-          <p:cNvSpPr/>
-          <p:nvPr/>
-        </p:nvSpPr>
+      <p:pic>
+        <p:nvPicPr>
+          <p:cNvPr id="4" name="Image 0" descr="/home/user/-/치과약리학실험2-논문발표/assets/fig3_he.jpg">    </p:cNvPr>
+          <p:cNvPicPr>
+            <a:picLocks noChangeAspect="1"/>
+          </p:cNvPicPr>
+          <p:nvPr/>
+        </p:nvPicPr>
+        <p:blipFill>
+          <a:blip r:embed="rId1"/>
+          <a:srcRect l="0" r="0" t="0" b="0"/>
+          <a:stretch/>
+        </p:blipFill>
         <p:spPr>
           <a:xfrm>
             <a:off x="640080" y="1600200"/>
-            <a:ext cx="3611880" cy="3063240"/>
-          </a:xfrm>
-          <a:prstGeom prst="roundRect">
-            <a:avLst>
-              <a:gd name="adj" fmla="val 2985"/>
-            </a:avLst>
-          </a:prstGeom>
-          <a:solidFill>
-            <a:srgbClr val="FFFFFF"/>
-          </a:solidFill>
-          <a:ln/>
-          <a:effectLst>
-            <a:outerShdw sx="100000" sy="100000" kx="0" ky="0" algn="bl" rotWithShape="0" blurRad="76200" dist="25400" dir="5400000">
-              <a:srgbClr val="16232E">
-                <a:alpha val="10000"/>
-              </a:srgbClr>
-            </a:outerShdw>
-          </a:effectLst>
-        </p:spPr>
-      </p:sp>
-      <p:sp>
-        <p:nvSpPr>
-          <p:cNvPr id="5" name="Shape 3"/>
-          <p:cNvSpPr/>
-          <p:nvPr/>
-        </p:nvSpPr>
-        <p:spPr>
-          <a:xfrm>
-            <a:off x="868680" y="1801368"/>
-            <a:ext cx="3154680" cy="777240"/>
-          </a:xfrm>
-          <a:prstGeom prst="roundRect">
-            <a:avLst>
-              <a:gd name="adj" fmla="val 9412"/>
-            </a:avLst>
-          </a:prstGeom>
-          <a:solidFill>
-            <a:srgbClr val="D97706"/>
-          </a:solidFill>
-          <a:ln/>
-        </p:spPr>
-      </p:sp>
-      <p:sp>
-        <p:nvSpPr>
-          <p:cNvPr id="6" name="Text 4"/>
-          <p:cNvSpPr txBox="1"/>
-          <p:nvPr/>
-        </p:nvSpPr>
-        <p:spPr>
-          <a:xfrm>
-            <a:off x="868680" y="1856232"/>
-            <a:ext cx="3154680" cy="320040"/>
-          </a:xfrm>
-          <a:prstGeom prst="rect">
-            <a:avLst/>
-          </a:prstGeom>
-          <a:noFill/>
-          <a:ln/>
-        </p:spPr>
-        <p:txBody>
-          <a:bodyPr wrap="square" lIns="0" tIns="0" rIns="0" bIns="0" rtlCol="0" anchor="ctr"/>
-          <a:lstStyle/>
-          <a:p>
-            <a:pPr algn="ctr" indent="0" marL="0">
-              <a:buNone/>
-            </a:pPr>
-            <a:r>
-              <a:rPr lang="en-US" sz="1400" b="1" dirty="0">
-                <a:solidFill>
-                  <a:srgbClr val="FFFFFF"/>
-                </a:solidFill>
-                <a:latin typeface="맑은 고딕" pitchFamily="34" charset="0"/>
-                <a:ea typeface="맑은 고딕" pitchFamily="34" charset="-122"/>
-                <a:cs typeface="맑은 고딕" pitchFamily="34" charset="-120"/>
-              </a:rPr>
-              <a:t>코르티코스테로이드</a:t>
-            </a:r>
-            <a:endParaRPr lang="en-US" sz="1400" dirty="0"/>
-          </a:p>
-        </p:txBody>
-      </p:sp>
-      <p:sp>
-        <p:nvSpPr>
-          <p:cNvPr id="7" name="Text 5"/>
-          <p:cNvSpPr txBox="1"/>
-          <p:nvPr/>
-        </p:nvSpPr>
-        <p:spPr>
-          <a:xfrm>
-            <a:off x="868680" y="2167128"/>
-            <a:ext cx="3154680" cy="384048"/>
+            <a:ext cx="4754880" cy="4480560"/>
+          </a:xfrm>
+          <a:prstGeom prst="rect">
+            <a:avLst/>
+          </a:prstGeom>
+        </p:spPr>
+      </p:pic>
+      <p:sp>
+        <p:nvSpPr>
+          <p:cNvPr id="5" name="Text 2"/>
+          <p:cNvSpPr txBox="1"/>
+          <p:nvPr/>
+        </p:nvSpPr>
+        <p:spPr>
+          <a:xfrm>
+            <a:off x="640080" y="6080760"/>
+            <a:ext cx="4754880" cy="457200"/>
           </a:xfrm>
           <a:prstGeom prst="rect">
             <a:avLst/>
@@ -11254,74 +12841,74 @@
           <a:p>
             <a:pPr algn="ctr" indent="0" marL="0">
               <a:lnSpc>
-                <a:spcPct val="110000"/>
+                <a:spcPct val="115000"/>
               </a:lnSpc>
               <a:buNone/>
             </a:pPr>
             <a:r>
-              <a:rPr lang="en-US" sz="1050" i="1" dirty="0">
-                <a:solidFill>
-                  <a:srgbClr val="FFFFFF"/>
-                </a:solidFill>
-                <a:latin typeface="맑은 고딕" pitchFamily="34" charset="0"/>
-                <a:ea typeface="맑은 고딕" pitchFamily="34" charset="-122"/>
-                <a:cs typeface="맑은 고딕" pitchFamily="34" charset="-120"/>
-              </a:rPr>
-              <a:t>스테로이드성 항염증제</a:t>
-            </a:r>
-            <a:endParaRPr lang="en-US" sz="1050" dirty="0"/>
-          </a:p>
-          <a:p>
-            <a:pPr algn="ctr" indent="0" marL="0">
+              <a:rPr lang="en-US" sz="1000" i="1" dirty="0">
+                <a:solidFill>
+                  <a:srgbClr val="5B6B7A"/>
+                </a:solidFill>
+                <a:latin typeface="맑은 고딕" pitchFamily="34" charset="0"/>
+                <a:ea typeface="맑은 고딕" pitchFamily="34" charset="-122"/>
+                <a:cs typeface="맑은 고딕" pitchFamily="34" charset="-120"/>
+              </a:rPr>
+              <a:t>원문 Figure 3 (H&amp;E, ×40) — A: 음성대조, B: 양성대조, C: 코르티코스테로이드, D: 비타민D, E: PGE₂</a:t>
+            </a:r>
+            <a:endParaRPr lang="en-US" sz="1000" dirty="0"/>
+          </a:p>
+        </p:txBody>
+      </p:sp>
+      <p:sp>
+        <p:nvSpPr>
+          <p:cNvPr id="6" name="Text 3"/>
+          <p:cNvSpPr txBox="1"/>
+          <p:nvPr/>
+        </p:nvSpPr>
+        <p:spPr>
+          <a:xfrm>
+            <a:off x="5760720" y="1737360"/>
+            <a:ext cx="5788152" cy="3657600"/>
+          </a:xfrm>
+          <a:prstGeom prst="rect">
+            <a:avLst/>
+          </a:prstGeom>
+          <a:noFill/>
+          <a:ln/>
+        </p:spPr>
+        <p:txBody>
+          <a:bodyPr wrap="square" lIns="0" tIns="0" rIns="0" bIns="0" rtlCol="0" anchor="t"/>
+          <a:lstStyle/>
+          <a:p>
+            <a:pPr indent="0" marL="0">
               <a:lnSpc>
-                <a:spcPct val="110000"/>
+                <a:spcPct val="140000"/>
               </a:lnSpc>
               <a:buNone/>
             </a:pPr>
             <a:r>
-              <a:rPr lang="en-US" sz="1050" i="1" dirty="0">
-                <a:solidFill>
-                  <a:srgbClr val="FFFFFF"/>
-                </a:solidFill>
-                <a:latin typeface="맑은 고딕" pitchFamily="34" charset="0"/>
-                <a:ea typeface="맑은 고딕" pitchFamily="34" charset="-122"/>
-                <a:cs typeface="맑은 고딕" pitchFamily="34" charset="-120"/>
-              </a:rPr>
-              <a:t>(역설적 골흡수 촉진)</a:t>
-            </a:r>
-            <a:endParaRPr lang="en-US" sz="1050" dirty="0"/>
-          </a:p>
-        </p:txBody>
-      </p:sp>
-      <p:sp>
-        <p:nvSpPr>
-          <p:cNvPr id="8" name="Text 6"/>
-          <p:cNvSpPr txBox="1"/>
-          <p:nvPr/>
-        </p:nvSpPr>
-        <p:spPr>
-          <a:xfrm>
-            <a:off x="868680" y="2697480"/>
-            <a:ext cx="3154680" cy="1783080"/>
-          </a:xfrm>
-          <a:prstGeom prst="rect">
-            <a:avLst/>
-          </a:prstGeom>
-          <a:noFill/>
-          <a:ln/>
-        </p:spPr>
-        <p:txBody>
-          <a:bodyPr wrap="square" lIns="0" tIns="0" rIns="0" bIns="0" rtlCol="0" anchor="t"/>
-          <a:lstStyle/>
+              <a:rPr lang="en-US" sz="1350" dirty="0">
+                <a:solidFill>
+                  <a:srgbClr val="16232E"/>
+                </a:solidFill>
+                <a:latin typeface="맑은 고딕" pitchFamily="34" charset="0"/>
+                <a:ea typeface="맑은 고딕" pitchFamily="34" charset="-122"/>
+                <a:cs typeface="맑은 고딕" pitchFamily="34" charset="-120"/>
+              </a:rPr>
+              <a:t>•  코르티코스테로이드군(C) — 압박·긴장측 모두 치주인대(PDL) 폭 가장 넓게 유지</a:t>
+            </a:r>
+            <a:endParaRPr lang="en-US" sz="1350" dirty="0"/>
+          </a:p>
           <a:p>
             <a:pPr indent="0" marL="0">
               <a:lnSpc>
-                <a:spcPct val="132000"/>
+                <a:spcPct val="140000"/>
               </a:lnSpc>
               <a:buNone/>
             </a:pPr>
             <a:r>
-              <a:rPr lang="en-US" sz="1150" dirty="0">
+              <a:rPr lang="en-US" sz="1350" dirty="0">
                 <a:solidFill>
                   <a:srgbClr val="16232E"/>
                 </a:solidFill>
@@ -11329,28 +12916,39 @@
                 <a:ea typeface="맑은 고딕" pitchFamily="34" charset="-122"/>
                 <a:cs typeface="맑은 고딕" pitchFamily="34" charset="-120"/>
               </a:rPr>
-              <a:t>국소 고용량 투여 ▷ 염증유전자 억제 + 파골세포형성 직접 자극 ▷ 골흡수 급가속</a:t>
-            </a:r>
-            <a:endParaRPr lang="en-US" sz="1150" dirty="0"/>
+              <a:t>•  대조군(A, B) — PDL 폭 가장 좁음, 재발을 흡수할 조직 여유가 적음을 시사</a:t>
+            </a:r>
+            <a:endParaRPr lang="en-US" sz="1350" dirty="0"/>
           </a:p>
           <a:p>
             <a:pPr indent="0" marL="0">
               <a:lnSpc>
-                <a:spcPct val="132000"/>
+                <a:spcPct val="140000"/>
               </a:lnSpc>
               <a:buNone/>
             </a:pPr>
-            <a:endParaRPr lang="en-US" sz="1150" dirty="0"/>
+            <a:r>
+              <a:rPr lang="en-US" sz="1350" dirty="0">
+                <a:solidFill>
+                  <a:srgbClr val="16232E"/>
+                </a:solidFill>
+                <a:latin typeface="맑은 고딕" pitchFamily="34" charset="0"/>
+                <a:ea typeface="맑은 고딕" pitchFamily="34" charset="-122"/>
+                <a:cs typeface="맑은 고딕" pitchFamily="34" charset="-120"/>
+              </a:rPr>
+              <a:t>•  비타민D(D)·PGE₂(E)군 — 중간 수준의 PDL 폭</a:t>
+            </a:r>
+            <a:endParaRPr lang="en-US" sz="1350" dirty="0"/>
           </a:p>
           <a:p>
             <a:pPr indent="0" marL="0">
               <a:lnSpc>
-                <a:spcPct val="132000"/>
+                <a:spcPct val="140000"/>
               </a:lnSpc>
               <a:buNone/>
             </a:pPr>
             <a:r>
-              <a:rPr lang="en-US" sz="1150" dirty="0">
+              <a:rPr lang="en-US" sz="1350" dirty="0">
                 <a:solidFill>
                   <a:srgbClr val="16232E"/>
                 </a:solidFill>
@@ -11358,193 +12956,19 @@
                 <a:ea typeface="맑은 고딕" pitchFamily="34" charset="-122"/>
                 <a:cs typeface="맑은 고딕" pitchFamily="34" charset="-120"/>
               </a:rPr>
-              <a:t>통념(항염증=골흡수 억제)과 반대 — 용량·투여경로·표적조직에 따라 작용이 뒤바뀌는 사례</a:t>
-            </a:r>
-            <a:endParaRPr lang="en-US" sz="1150" dirty="0"/>
-          </a:p>
-        </p:txBody>
-      </p:sp>
-      <p:sp>
-        <p:nvSpPr>
-          <p:cNvPr id="9" name="Shape 7"/>
-          <p:cNvSpPr/>
-          <p:nvPr/>
-        </p:nvSpPr>
-        <p:spPr>
-          <a:xfrm>
-            <a:off x="4434840" y="1600200"/>
-            <a:ext cx="3611880" cy="3063240"/>
-          </a:xfrm>
-          <a:prstGeom prst="roundRect">
-            <a:avLst>
-              <a:gd name="adj" fmla="val 2985"/>
-            </a:avLst>
-          </a:prstGeom>
-          <a:solidFill>
-            <a:srgbClr val="FFFFFF"/>
-          </a:solidFill>
-          <a:ln/>
-          <a:effectLst>
-            <a:outerShdw sx="100000" sy="100000" kx="0" ky="0" algn="bl" rotWithShape="0" blurRad="76200" dist="25400" dir="5400000">
-              <a:srgbClr val="16232E">
-                <a:alpha val="10000"/>
-              </a:srgbClr>
-            </a:outerShdw>
-          </a:effectLst>
-        </p:spPr>
-      </p:sp>
-      <p:sp>
-        <p:nvSpPr>
-          <p:cNvPr id="10" name="Shape 8"/>
-          <p:cNvSpPr/>
-          <p:nvPr/>
-        </p:nvSpPr>
-        <p:spPr>
-          <a:xfrm>
-            <a:off x="4663440" y="1801368"/>
-            <a:ext cx="3154680" cy="777240"/>
-          </a:xfrm>
-          <a:prstGeom prst="roundRect">
-            <a:avLst>
-              <a:gd name="adj" fmla="val 9412"/>
-            </a:avLst>
-          </a:prstGeom>
-          <a:solidFill>
-            <a:srgbClr val="3D7EA6"/>
-          </a:solidFill>
-          <a:ln/>
-        </p:spPr>
-      </p:sp>
-      <p:sp>
-        <p:nvSpPr>
-          <p:cNvPr id="11" name="Text 9"/>
-          <p:cNvSpPr txBox="1"/>
-          <p:nvPr/>
-        </p:nvSpPr>
-        <p:spPr>
-          <a:xfrm>
-            <a:off x="4663440" y="1856232"/>
-            <a:ext cx="3154680" cy="320040"/>
-          </a:xfrm>
-          <a:prstGeom prst="rect">
-            <a:avLst/>
-          </a:prstGeom>
-          <a:noFill/>
-          <a:ln/>
-        </p:spPr>
-        <p:txBody>
-          <a:bodyPr wrap="square" lIns="0" tIns="0" rIns="0" bIns="0" rtlCol="0" anchor="ctr"/>
-          <a:lstStyle/>
-          <a:p>
-            <a:pPr algn="ctr" indent="0" marL="0">
-              <a:buNone/>
-            </a:pPr>
-            <a:r>
-              <a:rPr lang="en-US" sz="1400" b="1" dirty="0">
-                <a:solidFill>
-                  <a:srgbClr val="FFFFFF"/>
-                </a:solidFill>
-                <a:latin typeface="맑은 고딕" pitchFamily="34" charset="0"/>
-                <a:ea typeface="맑은 고딕" pitchFamily="34" charset="-122"/>
-                <a:cs typeface="맑은 고딕" pitchFamily="34" charset="-120"/>
-              </a:rPr>
-              <a:t>비타민D</a:t>
-            </a:r>
-            <a:endParaRPr lang="en-US" sz="1400" dirty="0"/>
-          </a:p>
-        </p:txBody>
-      </p:sp>
-      <p:sp>
-        <p:nvSpPr>
-          <p:cNvPr id="12" name="Text 10"/>
-          <p:cNvSpPr txBox="1"/>
-          <p:nvPr/>
-        </p:nvSpPr>
-        <p:spPr>
-          <a:xfrm>
-            <a:off x="4663440" y="2167128"/>
-            <a:ext cx="3154680" cy="384048"/>
-          </a:xfrm>
-          <a:prstGeom prst="rect">
-            <a:avLst/>
-          </a:prstGeom>
-          <a:noFill/>
-          <a:ln/>
-        </p:spPr>
-        <p:txBody>
-          <a:bodyPr wrap="square" lIns="0" tIns="0" rIns="0" bIns="0" rtlCol="0" anchor="ctr"/>
-          <a:lstStyle/>
-          <a:p>
-            <a:pPr algn="ctr" indent="0" marL="0">
+              <a:t>•  캘리퍼 임상 측정 결과와 조직 소견이 서로 뒷받침함</a:t>
+            </a:r>
+            <a:endParaRPr lang="en-US" sz="1350" dirty="0"/>
+          </a:p>
+          <a:p>
+            <a:pPr indent="0" marL="0">
               <a:lnSpc>
-                <a:spcPct val="110000"/>
+                <a:spcPct val="140000"/>
               </a:lnSpc>
               <a:buNone/>
             </a:pPr>
             <a:r>
-              <a:rPr lang="en-US" sz="1050" i="1" dirty="0">
-                <a:solidFill>
-                  <a:srgbClr val="FFFFFF"/>
-                </a:solidFill>
-                <a:latin typeface="맑은 고딕" pitchFamily="34" charset="0"/>
-                <a:ea typeface="맑은 고딕" pitchFamily="34" charset="-122"/>
-                <a:cs typeface="맑은 고딕" pitchFamily="34" charset="-120"/>
-              </a:rPr>
-              <a:t>지용성 호르몬</a:t>
-            </a:r>
-            <a:endParaRPr lang="en-US" sz="1050" dirty="0"/>
-          </a:p>
-          <a:p>
-            <a:pPr algn="ctr" indent="0" marL="0">
-              <a:lnSpc>
-                <a:spcPct val="110000"/>
-              </a:lnSpc>
-              <a:buNone/>
-            </a:pPr>
-            <a:r>
-              <a:rPr lang="en-US" sz="1050" i="1" dirty="0">
-                <a:solidFill>
-                  <a:srgbClr val="FFFFFF"/>
-                </a:solidFill>
-                <a:latin typeface="맑은 고딕" pitchFamily="34" charset="0"/>
-                <a:ea typeface="맑은 고딕" pitchFamily="34" charset="-122"/>
-                <a:cs typeface="맑은 고딕" pitchFamily="34" charset="-120"/>
-              </a:rPr>
-              <a:t>(핵수용체 리간드)</a:t>
-            </a:r>
-            <a:endParaRPr lang="en-US" sz="1050" dirty="0"/>
-          </a:p>
-        </p:txBody>
-      </p:sp>
-      <p:sp>
-        <p:nvSpPr>
-          <p:cNvPr id="13" name="Text 11"/>
-          <p:cNvSpPr txBox="1"/>
-          <p:nvPr/>
-        </p:nvSpPr>
-        <p:spPr>
-          <a:xfrm>
-            <a:off x="4663440" y="2697480"/>
-            <a:ext cx="3154680" cy="1783080"/>
-          </a:xfrm>
-          <a:prstGeom prst="rect">
-            <a:avLst/>
-          </a:prstGeom>
-          <a:noFill/>
-          <a:ln/>
-        </p:spPr>
-        <p:txBody>
-          <a:bodyPr wrap="square" lIns="0" tIns="0" rIns="0" bIns="0" rtlCol="0" anchor="t"/>
-          <a:lstStyle/>
-          <a:p>
-            <a:pPr indent="0" marL="0">
-              <a:lnSpc>
-                <a:spcPct val="132000"/>
-              </a:lnSpc>
-              <a:buNone/>
-            </a:pPr>
-            <a:r>
-              <a:rPr lang="en-US" sz="1150" dirty="0">
+              <a:rPr lang="en-US" sz="1350" dirty="0">
                 <a:solidFill>
                   <a:srgbClr val="16232E"/>
                 </a:solidFill>
@@ -11552,390 +12976,15 @@
                 <a:ea typeface="맑은 고딕" pitchFamily="34" charset="-122"/>
                 <a:cs typeface="맑은 고딕" pitchFamily="34" charset="-120"/>
               </a:rPr>
-              <a:t>VDR(비타민D수용체) 결합 ▷ 골개조 관련 유전자 발현 조절 ▷ 파골세포 활성 + 면역매개체 동시 조절 ▷ 완만한 가속</a:t>
-            </a:r>
-            <a:endParaRPr lang="en-US" sz="1150" dirty="0"/>
-          </a:p>
-          <a:p>
-            <a:pPr indent="0" marL="0">
-              <a:lnSpc>
-                <a:spcPct val="132000"/>
-              </a:lnSpc>
-              <a:buNone/>
-            </a:pPr>
-            <a:endParaRPr lang="en-US" sz="1150" dirty="0"/>
-          </a:p>
-          <a:p>
-            <a:pPr indent="0" marL="0">
-              <a:lnSpc>
-                <a:spcPct val="132000"/>
-              </a:lnSpc>
-              <a:buNone/>
-            </a:pPr>
-            <a:r>
-              <a:rPr lang="en-US" sz="1150" dirty="0">
-                <a:solidFill>
-                  <a:srgbClr val="16232E"/>
-                </a:solidFill>
-                <a:latin typeface="맑은 고딕" pitchFamily="34" charset="0"/>
-                <a:ea typeface="맑은 고딕" pitchFamily="34" charset="-122"/>
-                <a:cs typeface="맑은 고딕" pitchFamily="34" charset="-120"/>
-              </a:rPr>
-              <a:t>전신 칼슘 대사 호르몬이 국소 골개조에도 관여하는 사례</a:t>
-            </a:r>
-            <a:endParaRPr lang="en-US" sz="1150" dirty="0"/>
-          </a:p>
-        </p:txBody>
-      </p:sp>
-      <p:sp>
-        <p:nvSpPr>
-          <p:cNvPr id="14" name="Shape 12"/>
-          <p:cNvSpPr/>
-          <p:nvPr/>
-        </p:nvSpPr>
-        <p:spPr>
-          <a:xfrm>
-            <a:off x="8229600" y="1600200"/>
-            <a:ext cx="3611880" cy="3063240"/>
-          </a:xfrm>
-          <a:prstGeom prst="roundRect">
-            <a:avLst>
-              <a:gd name="adj" fmla="val 2985"/>
-            </a:avLst>
-          </a:prstGeom>
-          <a:solidFill>
-            <a:srgbClr val="FFFFFF"/>
-          </a:solidFill>
-          <a:ln/>
-          <a:effectLst>
-            <a:outerShdw sx="100000" sy="100000" kx="0" ky="0" algn="bl" rotWithShape="0" blurRad="76200" dist="25400" dir="5400000">
-              <a:srgbClr val="16232E">
-                <a:alpha val="10000"/>
-              </a:srgbClr>
-            </a:outerShdw>
-          </a:effectLst>
-        </p:spPr>
-      </p:sp>
-      <p:sp>
-        <p:nvSpPr>
-          <p:cNvPr id="15" name="Shape 13"/>
-          <p:cNvSpPr/>
-          <p:nvPr/>
-        </p:nvSpPr>
-        <p:spPr>
-          <a:xfrm>
-            <a:off x="8458200" y="1801368"/>
-            <a:ext cx="3154680" cy="777240"/>
-          </a:xfrm>
-          <a:prstGeom prst="roundRect">
-            <a:avLst>
-              <a:gd name="adj" fmla="val 9412"/>
-            </a:avLst>
-          </a:prstGeom>
-          <a:solidFill>
-            <a:srgbClr val="2F855A"/>
-          </a:solidFill>
-          <a:ln/>
-        </p:spPr>
-      </p:sp>
-      <p:sp>
-        <p:nvSpPr>
-          <p:cNvPr id="16" name="Text 14"/>
-          <p:cNvSpPr txBox="1"/>
-          <p:nvPr/>
-        </p:nvSpPr>
-        <p:spPr>
-          <a:xfrm>
-            <a:off x="8458200" y="1856232"/>
-            <a:ext cx="3154680" cy="320040"/>
-          </a:xfrm>
-          <a:prstGeom prst="rect">
-            <a:avLst/>
-          </a:prstGeom>
-          <a:noFill/>
-          <a:ln/>
-        </p:spPr>
-        <p:txBody>
-          <a:bodyPr wrap="square" lIns="0" tIns="0" rIns="0" bIns="0" rtlCol="0" anchor="ctr"/>
-          <a:lstStyle/>
-          <a:p>
-            <a:pPr algn="ctr" indent="0" marL="0">
-              <a:buNone/>
-            </a:pPr>
-            <a:r>
-              <a:rPr lang="en-US" sz="1400" b="1" dirty="0">
-                <a:solidFill>
-                  <a:srgbClr val="FFFFFF"/>
-                </a:solidFill>
-                <a:latin typeface="맑은 고딕" pitchFamily="34" charset="0"/>
-                <a:ea typeface="맑은 고딕" pitchFamily="34" charset="-122"/>
-                <a:cs typeface="맑은 고딕" pitchFamily="34" charset="-120"/>
-              </a:rPr>
-              <a:t>PGE₂</a:t>
-            </a:r>
-            <a:endParaRPr lang="en-US" sz="1400" dirty="0"/>
-          </a:p>
-        </p:txBody>
-      </p:sp>
-      <p:sp>
-        <p:nvSpPr>
-          <p:cNvPr id="17" name="Text 15"/>
-          <p:cNvSpPr txBox="1"/>
-          <p:nvPr/>
-        </p:nvSpPr>
-        <p:spPr>
-          <a:xfrm>
-            <a:off x="8458200" y="2167128"/>
-            <a:ext cx="3154680" cy="384048"/>
-          </a:xfrm>
-          <a:prstGeom prst="rect">
-            <a:avLst/>
-          </a:prstGeom>
-          <a:noFill/>
-          <a:ln/>
-        </p:spPr>
-        <p:txBody>
-          <a:bodyPr wrap="square" lIns="0" tIns="0" rIns="0" bIns="0" rtlCol="0" anchor="ctr"/>
-          <a:lstStyle/>
-          <a:p>
-            <a:pPr algn="ctr" indent="0" marL="0">
-              <a:lnSpc>
-                <a:spcPct val="110000"/>
-              </a:lnSpc>
-              <a:buNone/>
-            </a:pPr>
-            <a:r>
-              <a:rPr lang="en-US" sz="1050" i="1" dirty="0">
-                <a:solidFill>
-                  <a:srgbClr val="FFFFFF"/>
-                </a:solidFill>
-                <a:latin typeface="맑은 고딕" pitchFamily="34" charset="0"/>
-                <a:ea typeface="맑은 고딕" pitchFamily="34" charset="-122"/>
-                <a:cs typeface="맑은 고딕" pitchFamily="34" charset="-120"/>
-              </a:rPr>
-              <a:t>지질 매개체(autacoid)</a:t>
-            </a:r>
-            <a:endParaRPr lang="en-US" sz="1050" dirty="0"/>
-          </a:p>
-          <a:p>
-            <a:pPr algn="ctr" indent="0" marL="0">
-              <a:lnSpc>
-                <a:spcPct val="110000"/>
-              </a:lnSpc>
-              <a:buNone/>
-            </a:pPr>
-            <a:r>
-              <a:rPr lang="en-US" sz="1050" i="1" dirty="0">
-                <a:solidFill>
-                  <a:srgbClr val="FFFFFF"/>
-                </a:solidFill>
-                <a:latin typeface="맑은 고딕" pitchFamily="34" charset="0"/>
-                <a:ea typeface="맑은 고딕" pitchFamily="34" charset="-122"/>
-                <a:cs typeface="맑은 고딕" pitchFamily="34" charset="-120"/>
-              </a:rPr>
-              <a:t>= 교정력의 자연 신호물질</a:t>
-            </a:r>
-            <a:endParaRPr lang="en-US" sz="1050" dirty="0"/>
-          </a:p>
-        </p:txBody>
-      </p:sp>
-      <p:sp>
-        <p:nvSpPr>
-          <p:cNvPr id="18" name="Text 16"/>
-          <p:cNvSpPr txBox="1"/>
-          <p:nvPr/>
-        </p:nvSpPr>
-        <p:spPr>
-          <a:xfrm>
-            <a:off x="8458200" y="2697480"/>
-            <a:ext cx="3154680" cy="1783080"/>
-          </a:xfrm>
-          <a:prstGeom prst="rect">
-            <a:avLst/>
-          </a:prstGeom>
-          <a:noFill/>
-          <a:ln/>
-        </p:spPr>
-        <p:txBody>
-          <a:bodyPr wrap="square" lIns="0" tIns="0" rIns="0" bIns="0" rtlCol="0" anchor="t"/>
-          <a:lstStyle/>
-          <a:p>
-            <a:pPr indent="0" marL="0">
-              <a:lnSpc>
-                <a:spcPct val="132000"/>
-              </a:lnSpc>
-              <a:buNone/>
-            </a:pPr>
-            <a:r>
-              <a:rPr lang="en-US" sz="1150" dirty="0">
-                <a:solidFill>
-                  <a:srgbClr val="16232E"/>
-                </a:solidFill>
-                <a:latin typeface="맑은 고딕" pitchFamily="34" charset="0"/>
-                <a:ea typeface="맑은 고딕" pitchFamily="34" charset="-122"/>
-                <a:cs typeface="맑은 고딕" pitchFamily="34" charset="-120"/>
-              </a:rPr>
-              <a:t>[자연 경로] 교정력 ▷ COX-2 ▷ PGE2 자체 생성 ▷ RANKL ▷ 파골세포</a:t>
-            </a:r>
-            <a:endParaRPr lang="en-US" sz="1150" dirty="0"/>
-          </a:p>
-          <a:p>
-            <a:pPr indent="0" marL="0">
-              <a:lnSpc>
-                <a:spcPct val="132000"/>
-              </a:lnSpc>
-              <a:buNone/>
-            </a:pPr>
-            <a:endParaRPr lang="en-US" sz="1150" dirty="0"/>
-          </a:p>
-          <a:p>
-            <a:pPr indent="0" marL="0">
-              <a:lnSpc>
-                <a:spcPct val="132000"/>
-              </a:lnSpc>
-              <a:buNone/>
-            </a:pPr>
-            <a:r>
-              <a:rPr lang="en-US" sz="1150" dirty="0">
-                <a:solidFill>
-                  <a:srgbClr val="16232E"/>
-                </a:solidFill>
-                <a:latin typeface="맑은 고딕" pitchFamily="34" charset="0"/>
-                <a:ea typeface="맑은 고딕" pitchFamily="34" charset="-122"/>
-                <a:cs typeface="맑은 고딕" pitchFamily="34" charset="-120"/>
-              </a:rPr>
-              <a:t>이 실험은 PGE2를 외부 직접 주입 — 경로 중간부터 재현·검증</a:t>
-            </a:r>
-            <a:endParaRPr lang="en-US" sz="1150" dirty="0"/>
-          </a:p>
-        </p:txBody>
-      </p:sp>
-      <p:sp>
-        <p:nvSpPr>
-          <p:cNvPr id="19" name="Shape 17"/>
-          <p:cNvSpPr/>
-          <p:nvPr/>
-        </p:nvSpPr>
-        <p:spPr>
-          <a:xfrm>
-            <a:off x="640080" y="4892040"/>
-            <a:ext cx="10908792" cy="1463040"/>
-          </a:xfrm>
-          <a:prstGeom prst="roundRect">
-            <a:avLst>
-              <a:gd name="adj" fmla="val 6250"/>
-            </a:avLst>
-          </a:prstGeom>
-          <a:solidFill>
-            <a:srgbClr val="EAF2F7"/>
-          </a:solidFill>
-          <a:ln/>
-          <a:effectLst>
-            <a:outerShdw sx="100000" sy="100000" kx="0" ky="0" algn="bl" rotWithShape="0" blurRad="76200" dist="25400" dir="5400000">
-              <a:srgbClr val="16232E">
-                <a:alpha val="10000"/>
-              </a:srgbClr>
-            </a:outerShdw>
-          </a:effectLst>
-        </p:spPr>
-      </p:sp>
-      <p:sp>
-        <p:nvSpPr>
-          <p:cNvPr id="20" name="Text 18"/>
-          <p:cNvSpPr txBox="1"/>
-          <p:nvPr/>
-        </p:nvSpPr>
-        <p:spPr>
-          <a:xfrm>
-            <a:off x="914400" y="5047488"/>
-            <a:ext cx="10360152" cy="1188720"/>
-          </a:xfrm>
-          <a:prstGeom prst="rect">
-            <a:avLst/>
-          </a:prstGeom>
-          <a:noFill/>
-          <a:ln/>
-        </p:spPr>
-        <p:txBody>
-          <a:bodyPr wrap="square" lIns="0" tIns="0" rIns="0" bIns="0" rtlCol="0" anchor="ctr"/>
-          <a:lstStyle/>
-          <a:p>
-            <a:pPr indent="0" marL="0">
-              <a:lnSpc>
-                <a:spcPct val="130000"/>
-              </a:lnSpc>
-              <a:buNone/>
-            </a:pPr>
-            <a:r>
-              <a:rPr lang="en-US" sz="1200" b="1" dirty="0">
-                <a:solidFill>
-                  <a:srgbClr val="1B4965"/>
-                </a:solidFill>
-                <a:latin typeface="맑은 고딕" pitchFamily="34" charset="0"/>
-                <a:ea typeface="맑은 고딕" pitchFamily="34" charset="-122"/>
-                <a:cs typeface="맑은 고딕" pitchFamily="34" charset="-120"/>
-              </a:rPr>
-              <a:t>핵심 시사점  </a:t>
-            </a:r>
-            <a:pPr indent="0" marL="0">
-              <a:lnSpc>
-                <a:spcPct val="130000"/>
-              </a:lnSpc>
-              <a:buNone/>
-            </a:pPr>
-            <a:r>
-              <a:rPr lang="en-US" sz="1200" dirty="0">
-                <a:solidFill>
-                  <a:srgbClr val="16232E"/>
-                </a:solidFill>
-                <a:latin typeface="맑은 고딕" pitchFamily="34" charset="0"/>
-                <a:ea typeface="맑은 고딕" pitchFamily="34" charset="-122"/>
-                <a:cs typeface="맑은 고딕" pitchFamily="34" charset="-120"/>
-              </a:rPr>
-              <a:t>세 약물은 서로 다른 약리학적 경로(유전자 억제·호르몬 수용체·지질 매개체)로 결국 같은 종착점인 '파골세포 활성화'에 도달한다 — 그러나 경로가 다르면 부작용·재발 위험도 달라진다.
-</a:t>
-            </a:r>
-            <a:pPr indent="0" marL="0">
-              <a:lnSpc>
-                <a:spcPct val="130000"/>
-              </a:lnSpc>
-              <a:buNone/>
-            </a:pPr>
-            <a:r>
-              <a:rPr lang="en-US" sz="1200" b="1" dirty="0">
-                <a:solidFill>
-                  <a:srgbClr val="1B4965"/>
-                </a:solidFill>
-                <a:latin typeface="맑은 고딕" pitchFamily="34" charset="0"/>
-                <a:ea typeface="맑은 고딕" pitchFamily="34" charset="-122"/>
-                <a:cs typeface="맑은 고딕" pitchFamily="34" charset="-120"/>
-              </a:rPr>
-              <a:t>치과교정학 기본원칙과의 연결  </a:t>
-            </a:r>
-            <a:pPr indent="0" marL="0">
-              <a:lnSpc>
-                <a:spcPct val="130000"/>
-              </a:lnSpc>
-              <a:buNone/>
-            </a:pPr>
-            <a:r>
-              <a:rPr lang="en-US" sz="1200" dirty="0">
-                <a:solidFill>
-                  <a:srgbClr val="16232E"/>
-                </a:solidFill>
-                <a:latin typeface="맑은 고딕" pitchFamily="34" charset="0"/>
-                <a:ea typeface="맑은 고딕" pitchFamily="34" charset="-122"/>
-                <a:cs typeface="맑은 고딕" pitchFamily="34" charset="-120"/>
-              </a:rPr>
-              <a:t>압박-긴장설(pressure-tension theory)에서 치아이동은 골흡수뿐 아니라 흡수 이후의 '구조적 재조직화'가 뒤따라야 안정된다 — 코르티코스테로이드처럼 흡수만 급가속하면 재조직화가 못 따라가 재발이 커진다. 이 논문의 '가속↑ = 재발↑' 결과는 곧 "치아이동 속도는 생물학적 재형성 속도가 제한한다"는 교정학 기본원칙을 약리학적으로 재확인한 것이다.</a:t>
-            </a:r>
-            <a:endParaRPr lang="en-US" sz="1200" dirty="0"/>
-          </a:p>
-        </p:txBody>
-      </p:sp>
-      <p:sp>
-        <p:nvSpPr>
-          <p:cNvPr id="21" name="Text 19"/>
+              <a:t>•  동일한 순서 패턴이 ALP·TRAP 염색(원문 Figure 4, 5)에서도 확인됨</a:t>
+            </a:r>
+            <a:endParaRPr lang="en-US" sz="1350" dirty="0"/>
+          </a:p>
+        </p:txBody>
+      </p:sp>
+      <p:sp>
+        <p:nvSpPr>
+          <p:cNvPr id="7" name="Text 4"/>
           <p:cNvSpPr txBox="1"/>
           <p:nvPr/>
         </p:nvSpPr>

--- a/치과약리학실험2-논문발표/치과약리학실험2_논문발표.pptx
+++ b/치과약리학실험2-논문발표/치과약리학실험2_논문발표.pptx
@@ -10025,7 +10025,7 @@
                 <a:ea typeface="맑은 고딕" pitchFamily="34" charset="-122"/>
                 <a:cs typeface="맑은 고딕" pitchFamily="34" charset="-120"/>
               </a:rPr>
-              <a:t>데이터가 정규분포를 따르는지 확인하는 사전 점검 ▷ 통과해야 ANOVA 같은 모수적 검정을 쓸 수 있음</a:t>
+              <a:t>데이터의 정규 분포성 확인 ▷ ANOVA 등 모수적 검정 가능</a:t>
             </a:r>
             <a:endParaRPr lang="en-US" sz="1050" dirty="0"/>
           </a:p>
@@ -10626,7 +10626,7 @@
                 <a:ea typeface="맑은 고딕" pitchFamily="34" charset="-122"/>
                 <a:cs typeface="맑은 고딕" pitchFamily="34" charset="-120"/>
               </a:rPr>
-              <a:t>Shapiro–Wilk(정규성 확인) ▷ One-way ANOVA(군간 전체 비교) ▷ 유의하면 Tukey post-hoc(어느 쌍이 다른지 확정) — 같은 군의 시점 전후(가속 후 vs 보정 후 등) 비교는 paired t-test로 별도 진행.
+              <a:t>Shapiro–Wilk ▷ One-way ANOVA ▷ 유의하면 Tukey post-hoc — 군내 시점별 비교(가속 후 vs 보정 후 등)는 paired t-test로 별도 진행
 </a:t>
             </a:r>
             <a:pPr indent="0" marL="0">
@@ -10661,7 +10661,7 @@
                 <a:ea typeface="맑은 고딕" pitchFamily="34" charset="-122"/>
                 <a:cs typeface="맑은 고딕" pitchFamily="34" charset="-120"/>
               </a:rPr>
-              <a:t>이 차이가 우연히 생겼을 확률이 5% 미만이라는 뜻 — 관행적으로 이 기준을 넘으면 '통계적으로 유의하다'고 판단. 이 논문 대부분의 비교는 p &lt; 0.001로, 우연일 확률이 매우 낮음.</a:t>
+              <a:t>이 차이가 우연히 생겼을 확률이 5% 미만이라는 뜻 — 관행적 기준; 이 논문 대부분의 비교는 p &lt; 0.001로, 우연일 확률이 매우 낮다.</a:t>
             </a:r>
             <a:endParaRPr lang="en-US" sz="1100" dirty="0"/>
           </a:p>
@@ -12601,7 +12601,7 @@
                 <a:ea typeface="맑은 고딕" pitchFamily="34" charset="-122"/>
                 <a:cs typeface="맑은 고딕" pitchFamily="34" charset="-120"/>
               </a:rPr>
-              <a:t>치주인대(PDL) 폭이 코르티코스테로이드군에서 가장 넓게 유지(압박·긴장측 모두) — 대조군이 가장 좁음, 비타민D·PGE₂군은 중간 수준. 임상측정 결과와 조직 소견이 서로를 뒷받침한다.</a:t>
+              <a:t>치주인대(PDL) 폭이 코르티코스테로이드군에서 가장 넓게 유지(압박·긴장측 모두) — 대조군이 가장 좁음, 비타민D·PGE₂군은 중간 수준.</a:t>
             </a:r>
             <a:endParaRPr lang="en-US" sz="1300" dirty="0"/>
           </a:p>

--- a/치과약리학실험2-논문발표/치과약리학실험2_논문발표.pptx
+++ b/치과약리학실험2-논문발표/치과약리학실험2_논문발표.pptx
@@ -12896,7 +12896,7 @@
                 <a:ea typeface="맑은 고딕" pitchFamily="34" charset="-122"/>
                 <a:cs typeface="맑은 고딕" pitchFamily="34" charset="-120"/>
               </a:rPr>
-              <a:t>•  코르티코스테로이드군(C) — 압박·긴장측 모두 치주인대(PDL) 폭 가장 넓게 유지</a:t>
+              <a:t>•  코르티코스테로이드군(C) — 압박·긴장측 모두 해당</a:t>
             </a:r>
             <a:endParaRPr lang="en-US" sz="1350" dirty="0"/>
           </a:p>

--- a/치과약리학실험2-논문발표/치과약리학실험2_논문발표.pptx
+++ b/치과약리학실험2-논문발표/치과약리학실험2_논문발표.pptx
@@ -608,7 +608,7 @@
           <a:p>
             <a:r>
               <a:rPr lang="en-US" dirty="0"/>
-              <a:t>[대본 5:40~7:00 — 발표의 핵심]
+              <a:t>[대본 6:40~8:00 — 발표의 핵심]
 이 논문이 저희 수업들과 왜 연결되는지 설명드리겠습니다.
 세 약물은 사실 완전히 다른 종류의 약입니다. 코르티코스테로이드는 원래 항염증제로 알려져 있어서, 보통 '염증을 줄이면 골흡수도 줄어든다'고 생각하기 쉽습니다. 그런데 이 연구에서는 국소로 고용량 주입했을 때 오히려 파골세포형성을 직접 자극해서 골흡수를 가장 강하게 촉진했습니다. 같은 약물이라도 용량과 투여 경로, 표적 조직에 따라 정반대 효과가 날 수 있다는 걸 보여주는 사례입니다.
 비타민D는 지용성 호르몬이죠. 비타민D 수용체를 통해 유전자 발현을 조절하는 방식으로 작용하는데, 이건 저희가 구강생화학에서 배운 칼슘·인 대사 조절 호르몬이 전신뿐 아니라 국소 골개조에도 관여한다는 걸 실제로 보여주는 사례입니다.
@@ -704,7 +704,7 @@
           <a:p>
             <a:r>
               <a:rPr lang="en-US" dirty="0"/>
-              <a:t>[대본 7:00~8:00]
+              <a:t>[대본 8:00~9:00]
 강점으로는 ARRIVE 가이드라인 준수, 윤리위 승인, 무작위 배정과 눈가림, 그리고 임상 측정과 조직학을 함께 사용한 이중 검증을 들 수 있습니다.
 한계로는, 배정만 눈가림했고 실제 측정은 한 명의 연구자가 다 했다는 점, 약물마다 용량을 하나씩만 테스트해서 용량-반응 분석이 불가능하다는 점, 그리고 투여 빈도도 매일·3일마다·매주로 제각각이라 공정한 비교인지 의문이 남는다는 점을 지적할 수 있습니다.
 임상 적용 측면에서는, 코르티코스테로이드는 가속 효과는 크지만 재발 위험이 가장 크기 때문에, 전신 스테로이드를 복용 중인 교정 환자라면 특히 신중해야 합니다. 반면 비타민D와 PGE2는 온건한 가속에 재발도 적어서 상대적으로 안전한 보조제가 될 수 있어 보입니다. 다만 PGE2는 고용량에서 치근흡수 위험이 있다는 보고도 있어서, 안전성과 효능 사이의 균형이 필요합니다.
@@ -796,7 +796,7 @@
           <a:p>
             <a:r>
               <a:rPr lang="en-US" dirty="0"/>
-              <a:t>[대본 8:00~8:30]
+              <a:t>[대본 9:00~9:30]
 코르티코스테로이드는 선행연구마다 결과가 엇갈리는데, 이건 연구 기간이나 용량 차이 때문으로 보입니다. 비타민D는 여러 선행연구와 일관되게 가속 효과가 확인됐고, PGE2도 마찬가지로 가속 효과를 보고한 연구는 많지만 '효과 없음'을 보고한 연구는 없었습니다.
 [발표 팁] 원문 Discussion 'Comparison with previous studies' 문단 재구성. 코르티코스테로이드만 문헌 간 결과가 정반대인 이유(연구기간·용량 차이)를 짚으면 비평적 고찰과 자연스럽게 연결됨.</a:t>
             </a:r>
@@ -974,7 +974,7 @@
           <a:p>
             <a:r>
               <a:rPr lang="en-US" dirty="0"/>
-              <a:t>[대본 8:30~9:15]
+              <a:t>[대본 9:30~10:15]
 정리하면, 치아이동을 가장 많이 가속하는 약물이 보정 후 가장 많이 되돌아가기도 합니다. 코르티코스테로이드는 최대 가속·최대 재발, PGE2는 최소 가속·최소 재발, 비타민D는 그 중간입니다.
 '빠른 이동'과 '안정적인 결과' 사이의 트레이드오프를 보여준 첫 3약물 비교 연구이고, 치과약리학1의 PGE2/COX 내용과 구강생화학의 골대사·칼슘 항상성 내용이 이 논문 하나로 이어진다는 점에서 오늘 발표 논문으로 선정했습니다.
 [발표 팁] 이 결론 슬라이드는 Q&amp;A 동안 화면에 계속 띄워둘 것(원 저자 의도). 치과약리학1(PGE2/COX)과 구강생화학(골대사·칼슘 항상성) 두 과목 내용이 이 논문 하나로 이어진다는 점을 다시 언급하며 마무리 후 Q&amp;A로 전환.</a:t>
@@ -1065,7 +1065,7 @@
           <a:p>
             <a:r>
               <a:rPr lang="en-US" dirty="0"/>
-              <a:t>[대본 9:15~10:00]
+              <a:t>[대본 10:15~11:00]
 이상으로 발표를 마치겠습니다. 질문 받겠습니다. 감사합니다.
 [예상 질문 &amp; 답변 메모]
 Q1. 동물실험 결과를 사람에게 그대로 적용할 수 있는가?
@@ -1351,8 +1351,8 @@
               <a:t>[대본 1:10~2:00]
 세 약물이 파골세포를 활성화하는 경로부터 보겠습니다.
 코르티코스테로이드는 염증 유전자 발현을 억제하면서 동시에 파골세포형성을 직접 자극하고 콜라게나아제 활성도 높여서, 골흡수를 가장 강하게 촉진합니다. 비타민D는 파골세포 활성 자체를 높이면서 면역매개체를 조절하는 방식으로 작용하고요. PGE2는 RANKL을 매개로 파골세포형성을 자극합니다 — 사실 이건 교정력이 가해졌을 때 우리 몸이 스스로 만들어내는 경로를 외부에서 그대로 보충하는 방식입니다.
-세 약물 모두 결국 파골세포를 활성화시키지만, 가는 길이 다르다는 점을 기억해 주시면 됩니다. 이 부분은 슬라이드 9에서 더 자세히 다루겠습니다.
-[발표 팁] 구강생화학 '뼈와 치아의 석회화, 혈청칼슘 항상성' 챕터에서 배운 칼슘/인 대사 조절호르몬(비타민D, PTH 등) 내용과 연결지어 설명하면 좋음. 세 경로의 차이는 슬라이드 9(치과약리학적 의의)에서 더 깊게 다룸.</a:t>
+세 약물 모두 결국 파골세포를 활성화시키지만, 가는 길이 다르다는 점을 기억해 주시면 됩니다. 이 부분은 슬라이드 10에서 더 자세히 다루겠습니다.
+[발표 팁] 구강생화학 '뼈와 치아의 석회화, 혈청칼슘 항상성' 챕터에서 배운 칼슘/인 대사 조절호르몬(비타민D, PTH 등) 내용과 연결지어 설명하면 좋음. 세 경로의 차이는 슬라이드 10(치과약리학적 의의)에서 더 깊게 다룸.</a:t>
             </a:r>
             <a:endParaRPr lang="en-US" dirty="0"/>
           </a:p>
@@ -1623,7 +1623,7 @@
           <a:p>
             <a:r>
               <a:rPr lang="en-US" dirty="0"/>
-              <a:t>[대본 — 결과 슬라이드 진입 전 삽입]
+              <a:t>[대본 3:40~4:40]
 결과를 보기 전에 이 논문이 쓴 통계 방법을 간단히 짚고 가겠습니다.
 먼저 Shapiro-Wilk 검정으로 데이터가 정규분포를 따르는지 확인했고, 그다음 One-way ANOVA로 5개 군 평균을 한꺼번에 비교했습니다. ANOVA는 '군 사이에 차이가 있다'까지만 알려주기 때문에, 정확히 어느 군과 어느 군이 다른지는 Tukey post-hoc 검정으로 하나하나 다시 비교합니다. 그리고 같은 군을 시점별로 비교할 때는 — 예를 들어 같은 랫드의 가속기 직후와 보정 1주 후를 비교할 때는 — paired t-test를 썼습니다.
 p값은 이 차이가 우연히 나왔을 확률을 뜻하는데, 관행적으로 5% 미만이면 '통계적으로 유의하다'고 봅니다. 이 논문은 대부분 p&lt;0.001로 나와서, 우연일 가능성이 매우 낮다고 볼 수 있습니다.
@@ -1715,7 +1715,7 @@
           <a:p>
             <a:r>
               <a:rPr lang="en-US" dirty="0"/>
-              <a:t>[대본 3:40~4:20]
+              <a:t>[대본 4:40~5:20]
 가속기 4주 결과입니다. 코르티코스테로이드군이 6.50mm로 가장 많이 이동했고, 비타민D 3.73mm, PGE2 2.80mm 순이었습니다. 대조군은 1.29mm에 그쳤고요. 세 약물 모두 대조군 대비 유의하게 가속됐고(p&lt;0.001), 조직검사 결과도 같은 순서로 나왔습니다.
 [발표 팁] 원문 Table I·II 기준. 보정기(2주) 동안은 모든 군에서 유의한 변화 없음(장치를 다시 수동적으로 부착해 이동량을 '고정') — 질문 나오면 이 부분도 설명 가능.</a:t>
             </a:r>
@@ -1805,7 +1805,7 @@
           <a:p>
             <a:r>
               <a:rPr lang="en-US" dirty="0"/>
-              <a:t>[대본 4:20~5:10]
+              <a:t>[대본 5:20~6:10]
 이제 진짜 흥미로운 부분, 재발기 결과입니다. 2주간 재발량을 보면 코르티코스테로이드군이 -5.07mm로 가장 많이 되돌아갔고, 비타민D가 -2.75mm, 그리고 PGE2는 -0.86mm로 가장 적게 재발했습니다. 참고로 대조군은 -1.09mm였는데, PGE2와 거의 비슷한 수준이죠 — 이 부분은 나중에 부록에서 다시 설명하겠습니다.
 즉 가속기에서 가장 많이 이동했던 코르티코스테로이드군이, 재발기에서도 가장 많이 되돌아간 겁니다. 조직학적으로도 코르티코스테로이드군의 치주인대 폭이 가장 넓게 유지된 게 확인돼서, 임상 측정과 조직 소견이 서로 맞아떨어집니다.
 [발표 팁] 가속량이 클수록(코르티코스테로이드) 재발량도 크고, 가속량이 작을수록(PGE2) 재발도 작다는 '가속-재발 트레이드오프' 패턴이 핵심 메시지. 원문 Table III·VI·VII 기준.</a:t>
@@ -1896,7 +1896,7 @@
           <a:p>
             <a:r>
               <a:rPr lang="en-US" dirty="0"/>
-              <a:t>[대본 5:10~5:40]
+              <a:t>[대본 6:10~6:40]
 H&amp;E 염색 결과를 보면, 코르티코스테로이드군(C)의 치주인대 폭이 압박측·긴장측 모두에서 가장 넓게 유지된 반면, 대조군(A, B)은 가장 좁았습니다. 비타민D와 PGE2는 중간 수준이었고요. 같은 패턴이 ALP·TRAP 염색에서도 똑같이 나타났습니다.
 [발표 팁] 원문 Figure 3(H&amp;E)·4(ALP)·5(TRAP) 모두 같은 순서(코르티코스테로이드 &gt; 비타민D &gt; PGE2 &gt; 대조군)로 조직학적 활성을 보여줌. 임상측정치와 조직 소견이 일치한다는 점이 이 논문의 방법론적 강점.</a:t>
             </a:r>
@@ -9629,7 +9629,7 @@
       </p:sp>
       <p:pic>
         <p:nvPicPr>
-          <p:cNvPr id="27" name="Image 0" descr="/home/user/-/치과약리학실험2-논문발표/assets/fig1_loop.jpg">    </p:cNvPr>
+          <p:cNvPr id="27" name="Image 0" descr="/home/user/-/.claude/worktrees/agent-a5f0f2f1b1642492a/치과약리학실험2-논문발표/assets/fig1_loop.jpg">    </p:cNvPr>
           <p:cNvPicPr>
             <a:picLocks noChangeAspect="1"/>
           </p:cNvPicPr>
@@ -12797,7 +12797,7 @@
       </p:sp>
       <p:pic>
         <p:nvPicPr>
-          <p:cNvPr id="4" name="Image 0" descr="/home/user/-/치과약리학실험2-논문발표/assets/fig3_he.jpg">    </p:cNvPr>
+          <p:cNvPr id="4" name="Image 0" descr="/home/user/-/.claude/worktrees/agent-a5f0f2f1b1642492a/치과약리학실험2-논문발표/assets/fig3_he.jpg">    </p:cNvPr>
           <p:cNvPicPr>
             <a:picLocks noChangeAspect="1"/>
           </p:cNvPicPr>

--- a/치과약리학실험2-논문발표/치과약리학실험2_논문발표.pptx
+++ b/치과약리학실험2-논문발표/치과약리학실험2_논문발표.pptx
@@ -9629,7 +9629,7 @@
       </p:sp>
       <p:pic>
         <p:nvPicPr>
-          <p:cNvPr id="27" name="Image 0" descr="/home/user/-/.claude/worktrees/agent-a5f0f2f1b1642492a/치과약리학실험2-논문발표/assets/fig1_loop.jpg">    </p:cNvPr>
+          <p:cNvPr id="27" name="Image 0" descr="/home/user/-/.claude/worktrees/agent-a607bd68cee3be655/치과약리학실험2-논문발표/assets/fig1_loop.jpg">    </p:cNvPr>
           <p:cNvPicPr>
             <a:picLocks noChangeAspect="1"/>
           </p:cNvPicPr>
@@ -12797,7 +12797,7 @@
       </p:sp>
       <p:pic>
         <p:nvPicPr>
-          <p:cNvPr id="4" name="Image 0" descr="/home/user/-/.claude/worktrees/agent-a5f0f2f1b1642492a/치과약리학실험2-논문발표/assets/fig3_he.jpg">    </p:cNvPr>
+          <p:cNvPr id="4" name="Image 0" descr="/home/user/-/.claude/worktrees/agent-a607bd68cee3be655/치과약리학실험2-논문발표/assets/fig3_he.jpg">    </p:cNvPr>
           <p:cNvPicPr>
             <a:picLocks noChangeAspect="1"/>
           </p:cNvPicPr>

--- a/치과약리학실험2-논문발표/치과약리학실험2_논문발표.pptx
+++ b/치과약리학실험2-논문발표/치과약리학실험2_논문발표.pptx
@@ -707,7 +707,7 @@
               <a:t>[대본 8:00~9:00]
 강점으로는 ARRIVE 가이드라인 준수, 윤리위 승인, 무작위 배정과 눈가림, 그리고 임상 측정과 조직학을 함께 사용한 이중 검증을 들 수 있습니다.
 한계로는, 배정만 눈가림했고 실제 측정은 한 명의 연구자가 다 했다는 점, 약물마다 용량을 하나씩만 테스트해서 용량-반응 분석이 불가능하다는 점, 그리고 투여 빈도도 매일·3일마다·매주로 제각각이라 공정한 비교인지 의문이 남는다는 점을 지적할 수 있습니다.
-임상 적용 측면에서는, 코르티코스테로이드는 가속 효과는 크지만 재발 위험이 가장 크기 때문에, 전신 스테로이드를 복용 중인 교정 환자라면 특히 신중해야 합니다. 반면 비타민D와 PGE2는 온건한 가속에 재발도 적어서 상대적으로 안전한 보조제가 될 수 있어 보입니다. 다만 PGE2는 고용량에서 치근흡수 위험이 있다는 보고도 있어서, 안전성과 효능 사이의 균형이 필요합니다.
+임상 적용 측면에서는, 코르티코스테로이드는 가속 효과는 크지만 재발 위험이 가장 크기 때문에, 전신 스테로이드를 복용 중인 교정 환자라면 특히 신중해야 합니다. 이건 이 연구의 국소 주입과는 별개로, 전신 코르티코스테로이드 자체가 골다공증·골괴사, 조골세포 활성 감소·파골세포 활성 증가, 성장억제 같은 부작용을 갖는다고 교과서에 명시돼 있기 때문인데요, 장기간 전신 스테로이드를 복용 중인 환자의 치아이동 계획을 세울 때는 이 부분도 함께 고려해야 합니다. 반면 비타민D와 PGE2는 온건한 가속에 재발도 적어서 상대적으로 안전한 보조제가 될 수 있어 보입니다. 다만 PGE2는 고용량에서 치근흡수 위험이 있다는 보고도 있어서, 안전성과 효능 사이의 균형이 필요합니다.
 [발표 팁] 발표자 본인 의견으로 최종 다듬을 것 — 특히 Q&amp;A 대비를 위해 표본수 검정력·비맹검 측정 부분은 원문 근거로 보강 추천.</a:t>
             </a:r>
             <a:endParaRPr lang="en-US" dirty="0"/>
@@ -1350,7 +1350,8 @@
               <a:rPr lang="en-US" dirty="0"/>
               <a:t>[대본 1:10~2:00]
 세 약물이 파골세포를 활성화하는 경로부터 보겠습니다.
-코르티코스테로이드는 염증 유전자 발현을 억제하면서 동시에 파골세포형성을 직접 자극하고 콜라게나아제 활성도 높여서, 골흡수를 가장 강하게 촉진합니다. 비타민D는 파골세포 활성 자체를 높이면서 면역매개체를 조절하는 방식으로 작용하고요. PGE2는 RANKL을 매개로 파골세포형성을 자극합니다 — 사실 이건 교정력이 가해졌을 때 우리 몸이 스스로 만들어내는 경로를 외부에서 그대로 보충하는 방식입니다.
+코르티코스테로이드는 세포질 수용체와 결합한 뒤 이량체화되어 핵으로 이동하고, COX-2를 비롯한 염증유전자의 전사를 억제합니다. 그런데 동시에 파골세포형성을 직접 자극하고 콜라게나아제 활성도 높여서, 골흡수를 가장 강하게 촉진합니다. 교과서에도 코르티코스테로이드의 골격계 작용으로 조골세포 활성은 감소시키고 파골세포 활성은 증가시킨다고 명시돼 있습니다.
+비타민D는 비타민D수용체, VDR에 결합해서 표적유전자 발현을 조절하는 방식으로 파골세포 활성 자체를 높이면서 면역매개체를 조절합니다. PGE2는 아라키돈산이 유도형 COX-2를 거쳐 PGE2로 전환된 뒤 EP2·EP4 수용체를 통해 RANKL 발현을 유도해서 파골세포형성을 자극합니다 — 사실 이건 교정력이 가해졌을 때 우리 몸이 스스로 만들어내는 경로를 외부에서 그대로 보충하는 방식입니다.
 세 약물 모두 결국 파골세포를 활성화시키지만, 가는 길이 다르다는 점을 기억해 주시면 됩니다. 이 부분은 슬라이드 10에서 더 자세히 다루겠습니다.
 [발표 팁] 구강생화학 '뼈와 치아의 석회화, 혈청칼슘 항상성' 챕터에서 배운 칼슘/인 대사 조절호르몬(비타민D, PTH 등) 내용과 연결지어 설명하면 좋음. 세 경로의 차이는 슬라이드 10(치과약리학적 의의)에서 더 깊게 다룸.</a:t>
             </a:r>
@@ -4040,6 +4041,26 @@
                 <a:cs typeface="맑은 고딕" pitchFamily="34" charset="-120"/>
               </a:rPr>
               <a:t>•  코르티코스테로이드는 가속 효과 크지만 재발 위험도 가장 큼 — 전신 스테로이드 복용 중인 교정환자에서 특히 신중한 판단 필요</a:t>
+            </a:r>
+            <a:endParaRPr lang="en-US" sz="1100" dirty="0"/>
+          </a:p>
+          <a:p>
+            <a:pPr indent="0" marL="0">
+              <a:lnSpc>
+                <a:spcPct val="135000"/>
+              </a:lnSpc>
+              <a:buNone/>
+            </a:pPr>
+            <a:r>
+              <a:rPr lang="en-US" sz="1100" dirty="0">
+                <a:solidFill>
+                  <a:srgbClr val="16232E"/>
+                </a:solidFill>
+                <a:latin typeface="맑은 고딕" pitchFamily="34" charset="0"/>
+                <a:ea typeface="맑은 고딕" pitchFamily="34" charset="-122"/>
+                <a:cs typeface="맑은 고딕" pitchFamily="34" charset="-120"/>
+              </a:rPr>
+              <a:t>•  전신 코르티코스테로이드의 골 관련 부작용(골다공증·골괴사, 조골세포↓·파골세포↑, 성장억제)은 이 연구의 국소 주입과 별개로 교과서에 명시된 위험 — 장기 전신 스테로이드 환자의 치아이동 계획 시 반드시 고려</a:t>
             </a:r>
             <a:endParaRPr lang="en-US" sz="1100" dirty="0"/>
           </a:p>
@@ -7796,7 +7817,7 @@
                 <a:ea typeface="맑은 고딕" pitchFamily="34" charset="-122"/>
                 <a:cs typeface="맑은 고딕" pitchFamily="34" charset="-120"/>
               </a:rPr>
-              <a:t>염증 유전자 발현 억제 + 파골세포형성(osteoclastogenesis) 직접 자극 + 콜라게나아제 활성 증가</a:t>
+              <a:t>세포질 수용체와 결합→이량체화→핵 이동, COX-2 등 염증유전자 전사 억제 + 파골세포형성 직접 자극 + 콜라게나아제 활성 증가 (조골세포↓·파골세포↑는 교과서에 명시된 골대사 작용)</a:t>
             </a:r>
             <a:endParaRPr lang="en-US" sz="1250" dirty="0"/>
           </a:p>
@@ -7970,7 +7991,7 @@
                 <a:ea typeface="맑은 고딕" pitchFamily="34" charset="-122"/>
                 <a:cs typeface="맑은 고딕" pitchFamily="34" charset="-120"/>
               </a:rPr>
-              <a:t>파골세포 활성 자체를 증가시키고 면역매개체를 조절</a:t>
+              <a:t>비타민D수용체(VDR)와 결합→표적유전자 발현 조절로 파골세포 활성 자체를 증가시키고 면역매개체를 조절</a:t>
             </a:r>
             <a:endParaRPr lang="en-US" sz="1250" dirty="0"/>
           </a:p>
@@ -8012,7 +8033,7 @@
                 <a:ea typeface="맑은 고딕" pitchFamily="34" charset="-122"/>
                 <a:cs typeface="맑은 고딕" pitchFamily="34" charset="-120"/>
               </a:rPr>
-              <a:t>→ 골개조 촉진 + osteocalcin·비타민D수용체 유전자 발현에도 관여</a:t>
+              <a:t>→ 골개조 촉진 + osteocalcin·VDR 유전자 발현에도 관여</a:t>
             </a:r>
             <a:endParaRPr lang="en-US" sz="1200" dirty="0"/>
           </a:p>
@@ -8144,7 +8165,7 @@
                 <a:ea typeface="맑은 고딕" pitchFamily="34" charset="-122"/>
                 <a:cs typeface="맑은 고딕" pitchFamily="34" charset="-120"/>
               </a:rPr>
-              <a:t>RANKL 매개 파골세포형성 자극 + 국소 골흡수 강화</a:t>
+              <a:t>아라키돈산이 유도형 COX-2를 거쳐 PGE₂로 전환 → EP2/EP4 수용체 통해 RANKL 발현 유도, 파골세포형성 자극 + 국소 골흡수 강화</a:t>
             </a:r>
             <a:endParaRPr lang="en-US" sz="1250" dirty="0"/>
           </a:p>
@@ -9629,7 +9650,7 @@
       </p:sp>
       <p:pic>
         <p:nvPicPr>
-          <p:cNvPr id="27" name="Image 0" descr="/home/user/-/.claude/worktrees/agent-a607bd68cee3be655/치과약리학실험2-논문발표/assets/fig1_loop.jpg">    </p:cNvPr>
+          <p:cNvPr id="27" name="Image 0" descr="/home/user/-/치과약리학실험2-논문발표/assets/fig1_loop.jpg">    </p:cNvPr>
           <p:cNvPicPr>
             <a:picLocks noChangeAspect="1"/>
           </p:cNvPicPr>
@@ -12797,7 +12818,7 @@
       </p:sp>
       <p:pic>
         <p:nvPicPr>
-          <p:cNvPr id="4" name="Image 0" descr="/home/user/-/.claude/worktrees/agent-a607bd68cee3be655/치과약리학실험2-논문발표/assets/fig3_he.jpg">    </p:cNvPr>
+          <p:cNvPr id="4" name="Image 0" descr="/home/user/-/치과약리학실험2-논문발표/assets/fig3_he.jpg">    </p:cNvPr>
           <p:cNvPicPr>
             <a:picLocks noChangeAspect="1"/>
           </p:cNvPicPr>

--- a/치과약리학실험2-논문발표/치과약리학실험2_논문발표.pptx
+++ b/치과약리학실험2-논문발표/치과약리학실험2_논문발표.pptx
@@ -707,7 +707,7 @@
               <a:t>[대본 8:00~9:00]
 강점으로는 ARRIVE 가이드라인 준수, 윤리위 승인, 무작위 배정과 눈가림, 그리고 임상 측정과 조직학을 함께 사용한 이중 검증을 들 수 있습니다.
 한계로는, 배정만 눈가림했고 실제 측정은 한 명의 연구자가 다 했다는 점, 약물마다 용량을 하나씩만 테스트해서 용량-반응 분석이 불가능하다는 점, 그리고 투여 빈도도 매일·3일마다·매주로 제각각이라 공정한 비교인지 의문이 남는다는 점을 지적할 수 있습니다.
-임상 적용 측면에서는, 코르티코스테로이드는 가속 효과는 크지만 재발 위험이 가장 크기 때문에, 전신 스테로이드를 복용 중인 교정 환자라면 특히 신중해야 합니다. 이건 이 연구의 국소 주입과는 별개로, 전신 코르티코스테로이드 자체가 골다공증·골괴사, 조골세포 활성 감소·파골세포 활성 증가, 성장억제 같은 부작용을 갖는다고 교과서에 명시돼 있기 때문인데요, 장기간 전신 스테로이드를 복용 중인 환자의 치아이동 계획을 세울 때는 이 부분도 함께 고려해야 합니다. 반면 비타민D와 PGE2는 온건한 가속에 재발도 적어서 상대적으로 안전한 보조제가 될 수 있어 보입니다. 다만 PGE2는 고용량에서 치근흡수 위험이 있다는 보고도 있어서, 안전성과 효능 사이의 균형이 필요합니다.
+임상 적용 측면에서는, 코르티코스테로이드는 가속 효과는 크지만 재발 위험이 가장 크기 때문에, 전신 스테로이드를 복용 중인 교정 환자라면 특히 신중해야 합니다. 이건 이 연구의 국소 주입과는 별개로, 전신 코르티코스테로이드 자체가 골다공증·골괴사, 조골세포 활성 감소·파골세포 활성 증가, 성장억제 같은 부작용을 갖는다고 치과약리학 교안(34장)에 명시돼 있기 때문인데요, 장기간 전신 스테로이드를 복용 중인 환자의 치아이동 계획을 세울 때는 이 부분도 함께 고려해야 합니다. 반면 비타민D와 PGE2는 온건한 가속에 재발도 적어서 상대적으로 안전한 보조제가 될 수 있어 보입니다. 다만 PGE2는 고용량에서 치근흡수 위험이 있다는 보고도 있어서, 안전성과 효능 사이의 균형이 필요합니다.
 [발표 팁] 발표자 본인 의견으로 최종 다듬을 것 — 특히 Q&amp;A 대비를 위해 표본수 검정력·비맹검 측정 부분은 원문 근거로 보강 추천.</a:t>
             </a:r>
             <a:endParaRPr lang="en-US" dirty="0"/>
@@ -1077,7 +1077,9 @@
 Q4. PGE2가 치근흡수를 유발할 수 있다는데, 이 연구에서는 그런 부작용을 확인했는가?
 → 이 연구에서는 별도로 치근흡수를 측정하지 않았습니다. 다만 타 문헌에서 PGE2 고용량 투여 시 치근흡수 위험이 보고된 바 있어서, 안전성 평가는 후속 연구 과제로 남아있다고 답하면 됩니다.
 Q5. 암컷 랫드는 왜 제외했는가?
-→ 수컷만 사용한 이유는 호르몬 주기에 의한 변동을 배제하기 위해서입니다. 다만 이로 인해 성별에 따른 차이는 이 연구로는 알 수 없고, 여성 환자에게 그대로 적용할 수 있는지는 후속 연구가 필요하다는 한계로 이어집니다.</a:t>
+→ 수컷만 사용한 이유는 호르몬 주기에 의한 변동을 배제하기 위해서입니다. 다만 이로 인해 성별에 따른 차이는 이 연구로는 알 수 없고, 여성 환자에게 그대로 적용할 수 있는지는 후속 연구가 필요하다는 한계로 이어집니다.
+Q6. 코르티코스테로이드는 COX-2 발현을 억제해서 PGE2 생성을 줄일 텐데, 왜 치아이동 가속이 가장 컸는가?
+→ 논문은 코르티코스테로이드의 가속 기전을 '염증유전자 발현 억제 + 파골세포형성 자극 + 콜라게나아제 활성 증가'로 설명하고, PGE2 경로를 거친다고는 하지 않습니다. 치과약리학 교안(34장)에도 코르티코스테로이드가 조골세포 활성은 낮추고 파골세포 활성은 높인다고 나와 있어서, COX-2·PGE2를 거치지 않는 경로로 골흡수가 촉진됐을 가능성이 있습니다. 다만 이 연구는 COX-2나 PGE2 수치를 직접 측정하지 않았기 때문에, 정확한 기전은 문헌에 근거한 추정이고 후속 연구가 필요하다고 답하면 됩니다.</a:t>
             </a:r>
             <a:endParaRPr lang="en-US" dirty="0"/>
           </a:p>
@@ -1350,8 +1352,8 @@
               <a:rPr lang="en-US" dirty="0"/>
               <a:t>[대본 1:10~2:00]
 세 약물이 파골세포를 활성화하는 경로부터 보겠습니다.
-코르티코스테로이드는 세포질 수용체와 결합한 뒤 이량체화되어 핵으로 이동하고, COX-2를 비롯한 염증유전자의 전사를 억제합니다. 그런데 동시에 파골세포형성을 직접 자극하고 콜라게나아제 활성도 높여서, 골흡수를 가장 강하게 촉진합니다. 교과서에도 코르티코스테로이드의 골격계 작용으로 조골세포 활성은 감소시키고 파골세포 활성은 증가시킨다고 명시돼 있습니다.
-비타민D는 비타민D수용체, VDR에 결합해서 표적유전자 발현을 조절하는 방식으로 파골세포 활성 자체를 높이면서 면역매개체를 조절합니다. PGE2는 아라키돈산이 유도형 COX-2를 거쳐 PGE2로 전환된 뒤 EP2·EP4 수용체를 통해 RANKL 발현을 유도해서 파골세포형성을 자극합니다 — 사실 이건 교정력이 가해졌을 때 우리 몸이 스스로 만들어내는 경로를 외부에서 그대로 보충하는 방식입니다.
+코르티코스테로이드는 세포질 수용체와 결합한 뒤 이량체화되어 핵으로 이동하고, COX-2를 비롯한 염증유전자의 전사를 억제합니다. 그런데 동시에 파골세포형성을 직접 자극하고 콜라게나아제 활성도 높여서, 골흡수를 가장 강하게 촉진합니다. 치과약리학 교안(34장)에도 코르티코스테로이드의 골격계 작용으로 조골세포 활성은 감소시키고 파골세포 활성은 증가시킨다고 나와 있습니다.
+비타민D는 비타민D수용체, VDR에 결합해서 표적유전자 발현을 조절하는 방식으로 파골세포 활성 자체를 높이면서 면역매개체를 조절합니다. PGE2는 아라키돈산이 유도형 COX-2를 거쳐 PGE2로 전환된 뒤 EP 수용체를 통해 RANKL 발현을 유도해서 파골세포형성을 자극합니다 — 사실 이건 교정력이 가해졌을 때 우리 몸이 스스로 만들어내는 경로를 외부에서 그대로 보충하는 방식입니다.
 세 약물 모두 결국 파골세포를 활성화시키지만, 가는 길이 다르다는 점을 기억해 주시면 됩니다. 이 부분은 슬라이드 10에서 더 자세히 다루겠습니다.
 [발표 팁] 구강생화학 '뼈와 치아의 석회화, 혈청칼슘 항상성' 챕터에서 배운 칼슘/인 대사 조절호르몬(비타민D, PTH 등) 내용과 연결지어 설명하면 좋음. 세 경로의 차이는 슬라이드 10(치과약리학적 의의)에서 더 깊게 다룸.</a:t>
             </a:r>
@@ -2349,7 +2351,7 @@
                 <a:ea typeface="맑은 고딕" pitchFamily="34" charset="-122"/>
                 <a:cs typeface="맑은 고딕" pitchFamily="34" charset="-120"/>
               </a:rPr>
-              <a:t>치과약리학실험2 · 논문 발표</a:t>
+              <a:t>2026-2 〈치과약리학실험2〉</a:t>
             </a:r>
             <a:endParaRPr lang="en-US" sz="1500" dirty="0"/>
           </a:p>
@@ -4060,7 +4062,7 @@
                 <a:ea typeface="맑은 고딕" pitchFamily="34" charset="-122"/>
                 <a:cs typeface="맑은 고딕" pitchFamily="34" charset="-120"/>
               </a:rPr>
-              <a:t>•  전신 코르티코스테로이드의 골 관련 부작용(골다공증·골괴사, 조골세포↓·파골세포↑, 성장억제)은 이 연구의 국소 주입과 별개로 교과서에 명시된 위험 — 장기 전신 스테로이드 환자의 치아이동 계획 시 반드시 고려</a:t>
+              <a:t>•  전신 코르티코스테로이드의 골 관련 부작용(골다공증·골괴사, 조골세포↓·파골세포↑, 성장억제)은 이 연구의 국소 주입과 별개로 교안에 명시된 위험 — 장기 전신 스테로이드 환자의 치아이동 계획 시 반드시 고려</a:t>
             </a:r>
             <a:endParaRPr lang="en-US" sz="1100" dirty="0"/>
           </a:p>
@@ -7140,7 +7142,7 @@
         </p:nvSpPr>
         <p:spPr>
           <a:xfrm>
-            <a:off x="1783080" y="1874520"/>
+            <a:off x="1783080" y="2148840"/>
             <a:ext cx="4114800" cy="457200"/>
           </a:xfrm>
           <a:prstGeom prst="rect">
@@ -7306,7 +7308,7 @@
         </p:nvSpPr>
         <p:spPr>
           <a:xfrm>
-            <a:off x="1783080" y="3410712"/>
+            <a:off x="1783080" y="3685032"/>
             <a:ext cx="4114800" cy="457200"/>
           </a:xfrm>
           <a:prstGeom prst="rect">
@@ -7472,7 +7474,7 @@
         </p:nvSpPr>
         <p:spPr>
           <a:xfrm>
-            <a:off x="1783080" y="4946904"/>
+            <a:off x="1783080" y="5221224"/>
             <a:ext cx="4114800" cy="457200"/>
           </a:xfrm>
           <a:prstGeom prst="rect">
@@ -7621,7 +7623,7 @@
         </p:nvSpPr>
         <p:spPr>
           <a:xfrm>
-            <a:off x="640080" y="365760"/>
+            <a:off x="640080" y="329184"/>
             <a:ext cx="10908792" cy="292608"/>
           </a:xfrm>
           <a:prstGeom prst="rect">
@@ -7660,7 +7662,7 @@
         </p:nvSpPr>
         <p:spPr>
           <a:xfrm>
-            <a:off x="640080" y="640080"/>
+            <a:off x="649224" y="640080"/>
             <a:ext cx="10908792" cy="640080"/>
           </a:xfrm>
           <a:prstGeom prst="rect">
@@ -7817,7 +7819,27 @@
                 <a:ea typeface="맑은 고딕" pitchFamily="34" charset="-122"/>
                 <a:cs typeface="맑은 고딕" pitchFamily="34" charset="-120"/>
               </a:rPr>
-              <a:t>세포질 수용체와 결합→이량체화→핵 이동, COX-2 등 염증유전자 전사 억제 + 파골세포형성 직접 자극 + 콜라게나아제 활성 증가 (조골세포↓·파골세포↑는 교과서에 명시된 골대사 작용)</a:t>
+              <a:t>세포질 수용체와 결합→이량체화→핵 이동,</a:t>
+            </a:r>
+            <a:endParaRPr lang="en-US" sz="1250" dirty="0"/>
+          </a:p>
+          <a:p>
+            <a:pPr indent="0" marL="0">
+              <a:lnSpc>
+                <a:spcPct val="135000"/>
+              </a:lnSpc>
+              <a:buNone/>
+            </a:pPr>
+            <a:r>
+              <a:rPr lang="en-US" sz="1250" dirty="0">
+                <a:solidFill>
+                  <a:srgbClr val="16232E"/>
+                </a:solidFill>
+                <a:latin typeface="맑은 고딕" pitchFamily="34" charset="0"/>
+                <a:ea typeface="맑은 고딕" pitchFamily="34" charset="-122"/>
+                <a:cs typeface="맑은 고딕" pitchFamily="34" charset="-120"/>
+              </a:rPr>
+              <a:t>COX-2 등 염증유전자 전사 억제 + 파골세포형성 직접 자극 + collagenase 활성 증가 (조골세포↓·파골세포↑)</a:t>
             </a:r>
             <a:endParaRPr lang="en-US" sz="1250" dirty="0"/>
           </a:p>
@@ -7991,7 +8013,27 @@
                 <a:ea typeface="맑은 고딕" pitchFamily="34" charset="-122"/>
                 <a:cs typeface="맑은 고딕" pitchFamily="34" charset="-120"/>
               </a:rPr>
-              <a:t>비타민D수용체(VDR)와 결합→표적유전자 발현 조절로 파골세포 활성 자체를 증가시키고 면역매개체를 조절</a:t>
+              <a:t>비타민D수용체(VDR)와 결합</a:t>
+            </a:r>
+            <a:endParaRPr lang="en-US" sz="1250" dirty="0"/>
+          </a:p>
+          <a:p>
+            <a:pPr indent="0" marL="0">
+              <a:lnSpc>
+                <a:spcPct val="135000"/>
+              </a:lnSpc>
+              <a:buNone/>
+            </a:pPr>
+            <a:r>
+              <a:rPr lang="en-US" sz="1250" dirty="0">
+                <a:solidFill>
+                  <a:srgbClr val="16232E"/>
+                </a:solidFill>
+                <a:latin typeface="맑은 고딕" pitchFamily="34" charset="0"/>
+                <a:ea typeface="맑은 고딕" pitchFamily="34" charset="-122"/>
+                <a:cs typeface="맑은 고딕" pitchFamily="34" charset="-120"/>
+              </a:rPr>
+              <a:t>→ 표적 유전자 발현 조절로 파골세포 활성 자체를 증가시키고 면역 매개체를 조절</a:t>
             </a:r>
             <a:endParaRPr lang="en-US" sz="1250" dirty="0"/>
           </a:p>
@@ -8033,7 +8075,27 @@
                 <a:ea typeface="맑은 고딕" pitchFamily="34" charset="-122"/>
                 <a:cs typeface="맑은 고딕" pitchFamily="34" charset="-120"/>
               </a:rPr>
-              <a:t>→ 골개조 촉진 + osteocalcin·VDR 유전자 발현에도 관여</a:t>
+              <a:t>→ 골개조 촉진</a:t>
+            </a:r>
+            <a:endParaRPr lang="en-US" sz="1200" dirty="0"/>
+          </a:p>
+          <a:p>
+            <a:pPr indent="0" marL="0">
+              <a:lnSpc>
+                <a:spcPct val="130000"/>
+              </a:lnSpc>
+              <a:buNone/>
+            </a:pPr>
+            <a:r>
+              <a:rPr lang="en-US" sz="1200" b="1" i="1" dirty="0">
+                <a:solidFill>
+                  <a:srgbClr val="3D7EA6"/>
+                </a:solidFill>
+                <a:latin typeface="맑은 고딕" pitchFamily="34" charset="0"/>
+                <a:ea typeface="맑은 고딕" pitchFamily="34" charset="-122"/>
+                <a:cs typeface="맑은 고딕" pitchFamily="34" charset="-120"/>
+              </a:rPr>
+              <a:t>+ osteocalcin·비타민D수용체 유전자 발현 관여</a:t>
             </a:r>
             <a:endParaRPr lang="en-US" sz="1200" dirty="0"/>
           </a:p>
@@ -8157,6 +8219,26 @@
               <a:buNone/>
             </a:pPr>
             <a:r>
+              <a:rPr lang="en-US" sz="1000" dirty="0">
+                <a:solidFill>
+                  <a:srgbClr val="16232E"/>
+                </a:solidFill>
+                <a:latin typeface="맑은 고딕" pitchFamily="34" charset="0"/>
+                <a:ea typeface="맑은 고딕" pitchFamily="34" charset="-122"/>
+                <a:cs typeface="맑은 고딕" pitchFamily="34" charset="-120"/>
+              </a:rPr>
+              <a:t>(아라키돈산이 유도형 COX-2를 거쳐 PGE₂로 전환)</a:t>
+            </a:r>
+            <a:endParaRPr lang="en-US" sz="1250" dirty="0"/>
+          </a:p>
+          <a:p>
+            <a:pPr indent="0" marL="0">
+              <a:lnSpc>
+                <a:spcPct val="135000"/>
+              </a:lnSpc>
+              <a:buNone/>
+            </a:pPr>
+            <a:r>
               <a:rPr lang="en-US" sz="1250" dirty="0">
                 <a:solidFill>
                   <a:srgbClr val="16232E"/>
@@ -8165,7 +8247,7 @@
                 <a:ea typeface="맑은 고딕" pitchFamily="34" charset="-122"/>
                 <a:cs typeface="맑은 고딕" pitchFamily="34" charset="-120"/>
               </a:rPr>
-              <a:t>아라키돈산이 유도형 COX-2를 거쳐 PGE₂로 전환 → EP2/EP4 수용체 통해 RANKL 발현 유도, 파골세포형성 자극 + 국소 골흡수 강화</a:t>
+              <a:t>→ EP 수용체 통해 RANKL 발현 유도, 파골세포형성 자극 + 국소 골흡수 강화</a:t>
             </a:r>
             <a:endParaRPr lang="en-US" sz="1250" dirty="0"/>
           </a:p>
@@ -8887,7 +8969,7 @@
                 <a:ea typeface="맑은 고딕" pitchFamily="34" charset="-122"/>
                 <a:cs typeface="맑은 고딕" pitchFamily="34" charset="-120"/>
               </a:rPr>
-              <a:t>•  무작위배정, 눈가림(2번째 저자가 배정) — 최종 배정 후엔 주 연구자 1인이 개입·측정·평가 전부 수행</a:t>
+              <a:t>•  무작위배정, 눈가림(2번째 저자가 배정)— 최종 배정 후엔 주 연구자 1인이 개입·측정·평가 전부 수행</a:t>
             </a:r>
             <a:endParaRPr lang="en-US" sz="1200" dirty="0"/>
           </a:p>
@@ -8961,7 +9043,7 @@
         </p:nvSpPr>
         <p:spPr>
           <a:xfrm>
-            <a:off x="960120" y="4251960"/>
+            <a:off x="960120" y="4014216"/>
             <a:ext cx="347472" cy="301752"/>
           </a:xfrm>
           <a:prstGeom prst="roundRect">
@@ -8983,7 +9065,7 @@
         </p:nvSpPr>
         <p:spPr>
           <a:xfrm>
-            <a:off x="960120" y="4251960"/>
+            <a:off x="960120" y="4014216"/>
             <a:ext cx="347472" cy="301752"/>
           </a:xfrm>
           <a:prstGeom prst="rect">
@@ -9022,7 +9104,7 @@
         </p:nvSpPr>
         <p:spPr>
           <a:xfrm>
-            <a:off x="1426464" y="4224528"/>
+            <a:off x="1426464" y="3986784"/>
             <a:ext cx="2286000" cy="365760"/>
           </a:xfrm>
           <a:prstGeom prst="rect">
@@ -9061,7 +9143,7 @@
         </p:nvSpPr>
         <p:spPr>
           <a:xfrm>
-            <a:off x="3749040" y="4224528"/>
+            <a:off x="3749040" y="3986784"/>
             <a:ext cx="2651760" cy="365760"/>
           </a:xfrm>
           <a:prstGeom prst="rect">
@@ -9100,7 +9182,7 @@
         </p:nvSpPr>
         <p:spPr>
           <a:xfrm>
-            <a:off x="960120" y="4608576"/>
+            <a:off x="960120" y="4370832"/>
             <a:ext cx="347472" cy="301752"/>
           </a:xfrm>
           <a:prstGeom prst="roundRect">
@@ -9122,7 +9204,7 @@
         </p:nvSpPr>
         <p:spPr>
           <a:xfrm>
-            <a:off x="960120" y="4608576"/>
+            <a:off x="960120" y="4370832"/>
             <a:ext cx="347472" cy="301752"/>
           </a:xfrm>
           <a:prstGeom prst="rect">
@@ -9161,7 +9243,7 @@
         </p:nvSpPr>
         <p:spPr>
           <a:xfrm>
-            <a:off x="1426464" y="4581144"/>
+            <a:off x="1426464" y="4343400"/>
             <a:ext cx="2286000" cy="365760"/>
           </a:xfrm>
           <a:prstGeom prst="rect">
@@ -9200,7 +9282,7 @@
         </p:nvSpPr>
         <p:spPr>
           <a:xfrm>
-            <a:off x="3749040" y="4581144"/>
+            <a:off x="3749040" y="4343400"/>
             <a:ext cx="2651760" cy="365760"/>
           </a:xfrm>
           <a:prstGeom prst="rect">
@@ -9239,7 +9321,7 @@
         </p:nvSpPr>
         <p:spPr>
           <a:xfrm>
-            <a:off x="960120" y="4965192"/>
+            <a:off x="960120" y="4727448"/>
             <a:ext cx="347472" cy="301752"/>
           </a:xfrm>
           <a:prstGeom prst="roundRect">
@@ -9261,7 +9343,7 @@
         </p:nvSpPr>
         <p:spPr>
           <a:xfrm>
-            <a:off x="960120" y="4965192"/>
+            <a:off x="960120" y="4727448"/>
             <a:ext cx="347472" cy="301752"/>
           </a:xfrm>
           <a:prstGeom prst="rect">
@@ -9300,7 +9382,7 @@
         </p:nvSpPr>
         <p:spPr>
           <a:xfrm>
-            <a:off x="1426464" y="4937760"/>
+            <a:off x="1426464" y="4700016"/>
             <a:ext cx="2286000" cy="365760"/>
           </a:xfrm>
           <a:prstGeom prst="rect">
@@ -9339,7 +9421,7 @@
         </p:nvSpPr>
         <p:spPr>
           <a:xfrm>
-            <a:off x="3749040" y="4937760"/>
+            <a:off x="3749040" y="4700016"/>
             <a:ext cx="2651760" cy="365760"/>
           </a:xfrm>
           <a:prstGeom prst="rect">
@@ -9378,7 +9460,7 @@
         </p:nvSpPr>
         <p:spPr>
           <a:xfrm>
-            <a:off x="960120" y="5321808"/>
+            <a:off x="960120" y="5084064"/>
             <a:ext cx="347472" cy="301752"/>
           </a:xfrm>
           <a:prstGeom prst="roundRect">
@@ -9400,7 +9482,7 @@
         </p:nvSpPr>
         <p:spPr>
           <a:xfrm>
-            <a:off x="960120" y="5321808"/>
+            <a:off x="960120" y="5084064"/>
             <a:ext cx="347472" cy="301752"/>
           </a:xfrm>
           <a:prstGeom prst="rect">
@@ -9439,7 +9521,7 @@
         </p:nvSpPr>
         <p:spPr>
           <a:xfrm>
-            <a:off x="1426464" y="5294376"/>
+            <a:off x="1426464" y="5056632"/>
             <a:ext cx="2286000" cy="365760"/>
           </a:xfrm>
           <a:prstGeom prst="rect">
@@ -9478,7 +9560,7 @@
         </p:nvSpPr>
         <p:spPr>
           <a:xfrm>
-            <a:off x="3749040" y="5294376"/>
+            <a:off x="3749040" y="5056632"/>
             <a:ext cx="2651760" cy="365760"/>
           </a:xfrm>
           <a:prstGeom prst="rect">
@@ -9517,7 +9599,7 @@
         </p:nvSpPr>
         <p:spPr>
           <a:xfrm>
-            <a:off x="960120" y="5678424"/>
+            <a:off x="960120" y="5440680"/>
             <a:ext cx="347472" cy="301752"/>
           </a:xfrm>
           <a:prstGeom prst="roundRect">
@@ -9539,7 +9621,7 @@
         </p:nvSpPr>
         <p:spPr>
           <a:xfrm>
-            <a:off x="960120" y="5678424"/>
+            <a:off x="960120" y="5440680"/>
             <a:ext cx="347472" cy="301752"/>
           </a:xfrm>
           <a:prstGeom prst="rect">
@@ -9578,7 +9660,7 @@
         </p:nvSpPr>
         <p:spPr>
           <a:xfrm>
-            <a:off x="1426464" y="5650992"/>
+            <a:off x="1426464" y="5413248"/>
             <a:ext cx="2286000" cy="365760"/>
           </a:xfrm>
           <a:prstGeom prst="rect">
@@ -9617,7 +9699,7 @@
         </p:nvSpPr>
         <p:spPr>
           <a:xfrm>
-            <a:off x="3749040" y="5650992"/>
+            <a:off x="3749040" y="5413248"/>
             <a:ext cx="2651760" cy="365760"/>
           </a:xfrm>
           <a:prstGeom prst="rect">
@@ -10046,7 +10128,27 @@
                 <a:ea typeface="맑은 고딕" pitchFamily="34" charset="-122"/>
                 <a:cs typeface="맑은 고딕" pitchFamily="34" charset="-120"/>
               </a:rPr>
-              <a:t>데이터의 정규 분포성 확인 ▷ ANOVA 등 모수적 검정 가능</a:t>
+              <a:t>데이터의 정규 분포성 확인</a:t>
+            </a:r>
+            <a:endParaRPr lang="en-US" sz="1050" dirty="0"/>
+          </a:p>
+          <a:p>
+            <a:pPr indent="0" marL="0">
+              <a:lnSpc>
+                <a:spcPct val="130000"/>
+              </a:lnSpc>
+              <a:buNone/>
+            </a:pPr>
+            <a:r>
+              <a:rPr lang="en-US" sz="1050" dirty="0">
+                <a:solidFill>
+                  <a:srgbClr val="16232E"/>
+                </a:solidFill>
+                <a:latin typeface="맑은 고딕" pitchFamily="34" charset="0"/>
+                <a:ea typeface="맑은 고딕" pitchFamily="34" charset="-122"/>
+                <a:cs typeface="맑은 고딕" pitchFamily="34" charset="-120"/>
+              </a:rPr>
+              <a:t>▷ ANOVA 등 모수적 검정 가능</a:t>
             </a:r>
             <a:endParaRPr lang="en-US" sz="1050" dirty="0"/>
           </a:p>
@@ -10217,7 +10319,27 @@
                 <a:ea typeface="맑은 고딕" pitchFamily="34" charset="-122"/>
                 <a:cs typeface="맑은 고딕" pitchFamily="34" charset="-120"/>
               </a:rPr>
-              <a:t>3개 이상 군의 평균을 한 번에 비교 ▷ "군 사이에 적어도 하나는 다르다"까지만 알려줌, 어느 군끼리 다른지는 모름</a:t>
+              <a:t>3개 이상 군의 평균을 한 번에 비교</a:t>
+            </a:r>
+            <a:endParaRPr lang="en-US" sz="1050" dirty="0"/>
+          </a:p>
+          <a:p>
+            <a:pPr indent="0" marL="0">
+              <a:lnSpc>
+                <a:spcPct val="130000"/>
+              </a:lnSpc>
+              <a:buNone/>
+            </a:pPr>
+            <a:r>
+              <a:rPr lang="en-US" sz="1050" dirty="0">
+                <a:solidFill>
+                  <a:srgbClr val="16232E"/>
+                </a:solidFill>
+                <a:latin typeface="맑은 고딕" pitchFamily="34" charset="0"/>
+                <a:ea typeface="맑은 고딕" pitchFamily="34" charset="-122"/>
+                <a:cs typeface="맑은 고딕" pitchFamily="34" charset="-120"/>
+              </a:rPr>
+              <a:t>▷ "군 사이에 적어도 하나는 다르다"까지만 알려줌, 어느 군끼리 다른지는 모름</a:t>
             </a:r>
             <a:endParaRPr lang="en-US" sz="1050" dirty="0"/>
           </a:p>
@@ -10388,7 +10510,27 @@
                 <a:ea typeface="맑은 고딕" pitchFamily="34" charset="-122"/>
                 <a:cs typeface="맑은 고딕" pitchFamily="34" charset="-120"/>
               </a:rPr>
-              <a:t>ANOVA가 유의하면 모든 군을 쌍(pair)으로 나눠 비교 ▷ 정확히 어느 군과 어느 군이 다른지 확정 — 이 논문의 '군간 비교' 표가 전부 이 결과</a:t>
+              <a:t>ANOVA가 유의하면 모든 군을 쌍(pair)으로 나눠 비교</a:t>
+            </a:r>
+            <a:endParaRPr lang="en-US" sz="1050" dirty="0"/>
+          </a:p>
+          <a:p>
+            <a:pPr indent="0" marL="0">
+              <a:lnSpc>
+                <a:spcPct val="130000"/>
+              </a:lnSpc>
+              <a:buNone/>
+            </a:pPr>
+            <a:r>
+              <a:rPr lang="en-US" sz="1050" dirty="0">
+                <a:solidFill>
+                  <a:srgbClr val="16232E"/>
+                </a:solidFill>
+                <a:latin typeface="맑은 고딕" pitchFamily="34" charset="0"/>
+                <a:ea typeface="맑은 고딕" pitchFamily="34" charset="-122"/>
+                <a:cs typeface="맑은 고딕" pitchFamily="34" charset="-120"/>
+              </a:rPr>
+              <a:t>▷ 정확히 어느 군과 어느 군이 다른지 확정 — 이 논문의 '군간 비교' 표가 전부 이 결과</a:t>
             </a:r>
             <a:endParaRPr lang="en-US" sz="1050" dirty="0"/>
           </a:p>
@@ -10559,7 +10701,27 @@
                 <a:ea typeface="맑은 고딕" pitchFamily="34" charset="-122"/>
                 <a:cs typeface="맑은 고딕" pitchFamily="34" charset="-120"/>
               </a:rPr>
-              <a:t>같은 개체를 두 시점에서 비교 ▷ 예: 같은 랫드의 '가속기 직후' vs '보정 1주 후' 위치 비교(군 내 비교)</a:t>
+              <a:t>같은 개체를 두 시점에서 비교</a:t>
+            </a:r>
+            <a:endParaRPr lang="en-US" sz="1050" dirty="0"/>
+          </a:p>
+          <a:p>
+            <a:pPr indent="0" marL="0">
+              <a:lnSpc>
+                <a:spcPct val="130000"/>
+              </a:lnSpc>
+              <a:buNone/>
+            </a:pPr>
+            <a:r>
+              <a:rPr lang="en-US" sz="1050" dirty="0">
+                <a:solidFill>
+                  <a:srgbClr val="16232E"/>
+                </a:solidFill>
+                <a:latin typeface="맑은 고딕" pitchFamily="34" charset="0"/>
+                <a:ea typeface="맑은 고딕" pitchFamily="34" charset="-122"/>
+                <a:cs typeface="맑은 고딕" pitchFamily="34" charset="-120"/>
+              </a:rPr>
+              <a:t>▷ 예: 같은 랫드의 '가속기 직후' vs '보정 1주 후' 위치 비교(군 내 비교)</a:t>
             </a:r>
             <a:endParaRPr lang="en-US" sz="1050" dirty="0"/>
           </a:p>
@@ -11186,7 +11348,7 @@
               <a:buNone/>
             </a:pPr>
             <a:r>
-              <a:rPr lang="en-US" sz="1300" i="1" dirty="0">
+              <a:rPr lang="en-US" sz="1300" dirty="0">
                 <a:solidFill>
                   <a:srgbClr val="1B4965"/>
                 </a:solidFill>
@@ -11194,7 +11356,27 @@
                 <a:ea typeface="맑은 고딕" pitchFamily="34" charset="-122"/>
                 <a:cs typeface="맑은 고딕" pitchFamily="34" charset="-120"/>
               </a:rPr>
-              <a:t>→ 대조군(1.29±0.11mm) 대비 세 약물 모두 유의하게 가속 (p &lt; 0.001) — 가속 순위: 코르티코스테로이드 &gt; 비타민D &gt; PGE₂, 조직검사(ALP·TRAP)도 동일 순서로 확인됨</a:t>
+              <a:t>→ 대조군(1.29±0.11mm) 대비 세 약물 모두 유의하게 가속 (p &lt; 0.001)</a:t>
+            </a:r>
+            <a:endParaRPr lang="en-US" sz="1300" dirty="0"/>
+          </a:p>
+          <a:p>
+            <a:pPr indent="0" marL="0">
+              <a:lnSpc>
+                <a:spcPct val="130000"/>
+              </a:lnSpc>
+              <a:buNone/>
+            </a:pPr>
+            <a:r>
+              <a:rPr lang="en-US" sz="1300" dirty="0">
+                <a:solidFill>
+                  <a:srgbClr val="1B4965"/>
+                </a:solidFill>
+                <a:latin typeface="맑은 고딕" pitchFamily="34" charset="0"/>
+                <a:ea typeface="맑은 고딕" pitchFamily="34" charset="-122"/>
+                <a:cs typeface="맑은 고딕" pitchFamily="34" charset="-120"/>
+              </a:rPr>
+              <a:t>— 가속 순위: 코르티코스테로이드 &gt; 비타민D &gt; PGE₂, 조직검사(ALP·TRAP)도 동일 순서로 확인됨</a:t>
             </a:r>
             <a:endParaRPr lang="en-US" sz="1300" dirty="0"/>
           </a:p>
@@ -12152,7 +12334,24 @@
                 <a:ea typeface="맑은 고딕" pitchFamily="34" charset="-122"/>
                 <a:cs typeface="맑은 고딕" pitchFamily="34" charset="-120"/>
               </a:rPr>
-              <a:t>-1.09 ± 0.17</a:t>
+              <a:t>-1.09</a:t>
+            </a:r>
+            <a:endParaRPr lang="en-US" sz="4000" dirty="0"/>
+          </a:p>
+          <a:p>
+            <a:pPr algn="ctr" indent="0" marL="0">
+              <a:buNone/>
+            </a:pPr>
+            <a:r>
+              <a:rPr lang="en-US" sz="2000" b="1" dirty="0">
+                <a:solidFill>
+                  <a:srgbClr val="9AA5B1"/>
+                </a:solidFill>
+                <a:latin typeface="맑은 고딕" pitchFamily="34" charset="0"/>
+                <a:ea typeface="맑은 고딕" pitchFamily="34" charset="-122"/>
+                <a:cs typeface="맑은 고딕" pitchFamily="34" charset="-120"/>
+              </a:rPr>
+              <a:t>± 0.17</a:t>
             </a:r>
             <a:endParaRPr lang="en-US" sz="4000" dirty="0"/>
           </a:p>
@@ -12259,7 +12458,24 @@
                 <a:ea typeface="맑은 고딕" pitchFamily="34" charset="-122"/>
                 <a:cs typeface="맑은 고딕" pitchFamily="34" charset="-120"/>
               </a:rPr>
-              <a:t>-0.86 ± 0.23</a:t>
+              <a:t>-0.86</a:t>
+            </a:r>
+            <a:endParaRPr lang="en-US" sz="4000" dirty="0"/>
+          </a:p>
+          <a:p>
+            <a:pPr algn="ctr" indent="0" marL="0">
+              <a:buNone/>
+            </a:pPr>
+            <a:r>
+              <a:rPr lang="en-US" sz="2000" b="1" dirty="0">
+                <a:solidFill>
+                  <a:srgbClr val="2F855A"/>
+                </a:solidFill>
+                <a:latin typeface="맑은 고딕" pitchFamily="34" charset="0"/>
+                <a:ea typeface="맑은 고딕" pitchFamily="34" charset="-122"/>
+                <a:cs typeface="맑은 고딕" pitchFamily="34" charset="-120"/>
+              </a:rPr>
+              <a:t>± 0.23</a:t>
             </a:r>
             <a:endParaRPr lang="en-US" sz="4000" dirty="0"/>
           </a:p>
@@ -12366,7 +12582,24 @@
                 <a:ea typeface="맑은 고딕" pitchFamily="34" charset="-122"/>
                 <a:cs typeface="맑은 고딕" pitchFamily="34" charset="-120"/>
               </a:rPr>
-              <a:t>-2.75 ± 0.15</a:t>
+              <a:t>-2.75</a:t>
+            </a:r>
+            <a:endParaRPr lang="en-US" sz="4000" dirty="0"/>
+          </a:p>
+          <a:p>
+            <a:pPr algn="ctr" indent="0" marL="0">
+              <a:buNone/>
+            </a:pPr>
+            <a:r>
+              <a:rPr lang="en-US" sz="2000" b="1" dirty="0">
+                <a:solidFill>
+                  <a:srgbClr val="3D7EA6"/>
+                </a:solidFill>
+                <a:latin typeface="맑은 고딕" pitchFamily="34" charset="0"/>
+                <a:ea typeface="맑은 고딕" pitchFamily="34" charset="-122"/>
+                <a:cs typeface="맑은 고딕" pitchFamily="34" charset="-120"/>
+              </a:rPr>
+              <a:t>± 0.15</a:t>
             </a:r>
             <a:endParaRPr lang="en-US" sz="4000" dirty="0"/>
           </a:p>
@@ -12473,7 +12706,24 @@
                 <a:ea typeface="맑은 고딕" pitchFamily="34" charset="-122"/>
                 <a:cs typeface="맑은 고딕" pitchFamily="34" charset="-120"/>
               </a:rPr>
-              <a:t>-5.07 ± 0.87</a:t>
+              <a:t>-5.07</a:t>
+            </a:r>
+            <a:endParaRPr lang="en-US" sz="4000" dirty="0"/>
+          </a:p>
+          <a:p>
+            <a:pPr algn="ctr" indent="0" marL="0">
+              <a:buNone/>
+            </a:pPr>
+            <a:r>
+              <a:rPr lang="en-US" sz="2000" b="1" dirty="0">
+                <a:solidFill>
+                  <a:srgbClr val="D97706"/>
+                </a:solidFill>
+                <a:latin typeface="맑은 고딕" pitchFamily="34" charset="0"/>
+                <a:ea typeface="맑은 고딕" pitchFamily="34" charset="-122"/>
+                <a:cs typeface="맑은 고딕" pitchFamily="34" charset="-120"/>
+              </a:rPr>
+              <a:t>± 0.87</a:t>
             </a:r>
             <a:endParaRPr lang="en-US" sz="4000" dirty="0"/>
           </a:p>

--- a/치과약리학실험2-논문발표/치과약리학실험2_논문발표.pptx
+++ b/치과약리학실험2-논문발표/치과약리학실험2_논문발표.pptx
@@ -2347,9 +2347,9 @@
                 <a:solidFill>
                   <a:srgbClr val="D97706"/>
                 </a:solidFill>
-                <a:latin typeface="맑은 고딕" pitchFamily="34" charset="0"/>
-                <a:ea typeface="맑은 고딕" pitchFamily="34" charset="-122"/>
-                <a:cs typeface="맑은 고딕" pitchFamily="34" charset="-120"/>
+                <a:latin typeface="Pretendard" pitchFamily="34" charset="0"/>
+                <a:ea typeface="Pretendard" pitchFamily="34" charset="-122"/>
+                <a:cs typeface="Pretendard" pitchFamily="34" charset="-120"/>
               </a:rPr>
               <a:t>2026-2 〈치과약리학실험2〉</a:t>
             </a:r>
@@ -2389,9 +2389,9 @@
                 <a:solidFill>
                   <a:srgbClr val="FFFFFF"/>
                 </a:solidFill>
-                <a:latin typeface="맑은 고딕" pitchFamily="34" charset="0"/>
-                <a:ea typeface="맑은 고딕" pitchFamily="34" charset="-122"/>
-                <a:cs typeface="맑은 고딕" pitchFamily="34" charset="-120"/>
+                <a:latin typeface="Pretendard" pitchFamily="34" charset="0"/>
+                <a:ea typeface="Pretendard" pitchFamily="34" charset="-122"/>
+                <a:cs typeface="Pretendard" pitchFamily="34" charset="-120"/>
               </a:rPr>
               <a:t>Three Pharmacological Agents for Acceleratory</a:t>
             </a:r>
@@ -2409,9 +2409,9 @@
                 <a:solidFill>
                   <a:srgbClr val="FFFFFF"/>
                 </a:solidFill>
-                <a:latin typeface="맑은 고딕" pitchFamily="34" charset="0"/>
-                <a:ea typeface="맑은 고딕" pitchFamily="34" charset="-122"/>
-                <a:cs typeface="맑은 고딕" pitchFamily="34" charset="-120"/>
+                <a:latin typeface="Pretendard" pitchFamily="34" charset="0"/>
+                <a:ea typeface="Pretendard" pitchFamily="34" charset="-122"/>
+                <a:cs typeface="Pretendard" pitchFamily="34" charset="-120"/>
               </a:rPr>
               <a:t>Orthodontic Tooth Movement and Subsequent Relapse</a:t>
             </a:r>
@@ -2448,9 +2448,9 @@
                 <a:solidFill>
                   <a:srgbClr val="AECBDC"/>
                 </a:solidFill>
-                <a:latin typeface="맑은 고딕" pitchFamily="34" charset="0"/>
-                <a:ea typeface="맑은 고딕" pitchFamily="34" charset="-122"/>
-                <a:cs typeface="맑은 고딕" pitchFamily="34" charset="-120"/>
+                <a:latin typeface="Pretendard" pitchFamily="34" charset="0"/>
+                <a:ea typeface="Pretendard" pitchFamily="34" charset="-122"/>
+                <a:cs typeface="Pretendard" pitchFamily="34" charset="-120"/>
               </a:rPr>
               <a:t>A Randomized Controlled Animal Study — 코르티코스테로이드 · 비타민D · PGE₂ 비교</a:t>
             </a:r>
@@ -2490,9 +2490,9 @@
                 <a:solidFill>
                   <a:srgbClr val="D97706"/>
                 </a:solidFill>
-                <a:latin typeface="맑은 고딕" pitchFamily="34" charset="0"/>
-                <a:ea typeface="맑은 고딕" pitchFamily="34" charset="-122"/>
-                <a:cs typeface="맑은 고딕" pitchFamily="34" charset="-120"/>
+                <a:latin typeface="Pretendard" pitchFamily="34" charset="0"/>
+                <a:ea typeface="Pretendard" pitchFamily="34" charset="-122"/>
+                <a:cs typeface="Pretendard" pitchFamily="34" charset="-120"/>
               </a:rPr>
               <a:t>저널  </a:t>
             </a:r>
@@ -2507,9 +2507,9 @@
                 <a:solidFill>
                   <a:srgbClr val="FFFFFF"/>
                 </a:solidFill>
-                <a:latin typeface="맑은 고딕" pitchFamily="34" charset="0"/>
-                <a:ea typeface="맑은 고딕" pitchFamily="34" charset="-122"/>
-                <a:cs typeface="맑은 고딕" pitchFamily="34" charset="-120"/>
+                <a:latin typeface="Pretendard" pitchFamily="34" charset="0"/>
+                <a:ea typeface="Pretendard" pitchFamily="34" charset="-122"/>
+                <a:cs typeface="Pretendard" pitchFamily="34" charset="-120"/>
               </a:rPr>
               <a:t>International Orthodontics, 2026;24:101112 (Elsevier)
 </a:t>
@@ -2525,9 +2525,9 @@
                 <a:solidFill>
                   <a:srgbClr val="D97706"/>
                 </a:solidFill>
-                <a:latin typeface="맑은 고딕" pitchFamily="34" charset="0"/>
-                <a:ea typeface="맑은 고딕" pitchFamily="34" charset="-122"/>
-                <a:cs typeface="맑은 고딕" pitchFamily="34" charset="-120"/>
+                <a:latin typeface="Pretendard" pitchFamily="34" charset="0"/>
+                <a:ea typeface="Pretendard" pitchFamily="34" charset="-122"/>
+                <a:cs typeface="Pretendard" pitchFamily="34" charset="-120"/>
               </a:rPr>
               <a:t>저자  </a:t>
             </a:r>
@@ -2542,9 +2542,9 @@
                 <a:solidFill>
                   <a:srgbClr val="FFFFFF"/>
                 </a:solidFill>
-                <a:latin typeface="맑은 고딕" pitchFamily="34" charset="0"/>
-                <a:ea typeface="맑은 고딕" pitchFamily="34" charset="-122"/>
-                <a:cs typeface="맑은 고딕" pitchFamily="34" charset="-120"/>
+                <a:latin typeface="Pretendard" pitchFamily="34" charset="0"/>
+                <a:ea typeface="Pretendard" pitchFamily="34" charset="-122"/>
+                <a:cs typeface="Pretendard" pitchFamily="34" charset="-120"/>
               </a:rPr>
               <a:t>Hamed SA, et al. (Mansoura University, Egypt)
 </a:t>
@@ -2560,9 +2560,9 @@
                 <a:solidFill>
                   <a:srgbClr val="D97706"/>
                 </a:solidFill>
-                <a:latin typeface="맑은 고딕" pitchFamily="34" charset="0"/>
-                <a:ea typeface="맑은 고딕" pitchFamily="34" charset="-122"/>
-                <a:cs typeface="맑은 고딕" pitchFamily="34" charset="-120"/>
+                <a:latin typeface="Pretendard" pitchFamily="34" charset="0"/>
+                <a:ea typeface="Pretendard" pitchFamily="34" charset="-122"/>
+                <a:cs typeface="Pretendard" pitchFamily="34" charset="-120"/>
               </a:rPr>
               <a:t>발표자  </a:t>
             </a:r>
@@ -2577,9 +2577,9 @@
                 <a:solidFill>
                   <a:srgbClr val="FFFFFF"/>
                 </a:solidFill>
-                <a:latin typeface="맑은 고딕" pitchFamily="34" charset="0"/>
-                <a:ea typeface="맑은 고딕" pitchFamily="34" charset="-122"/>
-                <a:cs typeface="맑은 고딕" pitchFamily="34" charset="-120"/>
+                <a:latin typeface="Pretendard" pitchFamily="34" charset="0"/>
+                <a:ea typeface="Pretendard" pitchFamily="34" charset="-122"/>
+                <a:cs typeface="Pretendard" pitchFamily="34" charset="-120"/>
               </a:rPr>
               <a:t>김민성</a:t>
             </a:r>
@@ -2648,9 +2648,9 @@
                 <a:solidFill>
                   <a:srgbClr val="3D7EA6"/>
                 </a:solidFill>
-                <a:latin typeface="맑은 고딕" pitchFamily="34" charset="0"/>
-                <a:ea typeface="맑은 고딕" pitchFamily="34" charset="-122"/>
-                <a:cs typeface="맑은 고딕" pitchFamily="34" charset="-120"/>
+                <a:latin typeface="Pretendard" pitchFamily="34" charset="0"/>
+                <a:ea typeface="Pretendard" pitchFamily="34" charset="-122"/>
+                <a:cs typeface="Pretendard" pitchFamily="34" charset="-120"/>
               </a:rPr>
               <a:t>PHARMACOLOGICAL SIGNIFICANCE</a:t>
             </a:r>
@@ -2687,9 +2687,9 @@
                 <a:solidFill>
                   <a:srgbClr val="1B4965"/>
                 </a:solidFill>
-                <a:latin typeface="맑은 고딕" pitchFamily="34" charset="0"/>
-                <a:ea typeface="맑은 고딕" pitchFamily="34" charset="-122"/>
-                <a:cs typeface="맑은 고딕" pitchFamily="34" charset="-120"/>
+                <a:latin typeface="Pretendard" pitchFamily="34" charset="0"/>
+                <a:ea typeface="Pretendard" pitchFamily="34" charset="-122"/>
+                <a:cs typeface="Pretendard" pitchFamily="34" charset="-120"/>
               </a:rPr>
               <a:t>치과약리학적 의의 — 왜 이 세 약물인가</a:t>
             </a:r>
@@ -2777,9 +2777,9 @@
                 <a:solidFill>
                   <a:srgbClr val="FFFFFF"/>
                 </a:solidFill>
-                <a:latin typeface="맑은 고딕" pitchFamily="34" charset="0"/>
-                <a:ea typeface="맑은 고딕" pitchFamily="34" charset="-122"/>
-                <a:cs typeface="맑은 고딕" pitchFamily="34" charset="-120"/>
+                <a:latin typeface="Pretendard" pitchFamily="34" charset="0"/>
+                <a:ea typeface="Pretendard" pitchFamily="34" charset="-122"/>
+                <a:cs typeface="Pretendard" pitchFamily="34" charset="-120"/>
               </a:rPr>
               <a:t>코르티코스테로이드</a:t>
             </a:r>
@@ -2819,9 +2819,9 @@
                 <a:solidFill>
                   <a:srgbClr val="FFFFFF"/>
                 </a:solidFill>
-                <a:latin typeface="맑은 고딕" pitchFamily="34" charset="0"/>
-                <a:ea typeface="맑은 고딕" pitchFamily="34" charset="-122"/>
-                <a:cs typeface="맑은 고딕" pitchFamily="34" charset="-120"/>
+                <a:latin typeface="Pretendard" pitchFamily="34" charset="0"/>
+                <a:ea typeface="Pretendard" pitchFamily="34" charset="-122"/>
+                <a:cs typeface="Pretendard" pitchFamily="34" charset="-120"/>
               </a:rPr>
               <a:t>스테로이드성 항염증제</a:t>
             </a:r>
@@ -2839,9 +2839,9 @@
                 <a:solidFill>
                   <a:srgbClr val="FFFFFF"/>
                 </a:solidFill>
-                <a:latin typeface="맑은 고딕" pitchFamily="34" charset="0"/>
-                <a:ea typeface="맑은 고딕" pitchFamily="34" charset="-122"/>
-                <a:cs typeface="맑은 고딕" pitchFamily="34" charset="-120"/>
+                <a:latin typeface="Pretendard" pitchFamily="34" charset="0"/>
+                <a:ea typeface="Pretendard" pitchFamily="34" charset="-122"/>
+                <a:cs typeface="Pretendard" pitchFamily="34" charset="-120"/>
               </a:rPr>
               <a:t>(역설적 골흡수 촉진)</a:t>
             </a:r>
@@ -2881,9 +2881,9 @@
                 <a:solidFill>
                   <a:srgbClr val="16232E"/>
                 </a:solidFill>
-                <a:latin typeface="맑은 고딕" pitchFamily="34" charset="0"/>
-                <a:ea typeface="맑은 고딕" pitchFamily="34" charset="-122"/>
-                <a:cs typeface="맑은 고딕" pitchFamily="34" charset="-120"/>
+                <a:latin typeface="Pretendard" pitchFamily="34" charset="0"/>
+                <a:ea typeface="Pretendard" pitchFamily="34" charset="-122"/>
+                <a:cs typeface="Pretendard" pitchFamily="34" charset="-120"/>
               </a:rPr>
               <a:t>국소 고용량 투여 ▷ 염증유전자 억제 + 파골세포형성 직접 자극 ▷ 골흡수 급가속</a:t>
             </a:r>
@@ -2910,9 +2910,9 @@
                 <a:solidFill>
                   <a:srgbClr val="16232E"/>
                 </a:solidFill>
-                <a:latin typeface="맑은 고딕" pitchFamily="34" charset="0"/>
-                <a:ea typeface="맑은 고딕" pitchFamily="34" charset="-122"/>
-                <a:cs typeface="맑은 고딕" pitchFamily="34" charset="-120"/>
+                <a:latin typeface="Pretendard" pitchFamily="34" charset="0"/>
+                <a:ea typeface="Pretendard" pitchFamily="34" charset="-122"/>
+                <a:cs typeface="Pretendard" pitchFamily="34" charset="-120"/>
               </a:rPr>
               <a:t>통념(항염증=골흡수 억제)과 반대 — 용량·투여경로·표적조직에 따라 작용이 뒤바뀌는 사례</a:t>
             </a:r>
@@ -3000,9 +3000,9 @@
                 <a:solidFill>
                   <a:srgbClr val="FFFFFF"/>
                 </a:solidFill>
-                <a:latin typeface="맑은 고딕" pitchFamily="34" charset="0"/>
-                <a:ea typeface="맑은 고딕" pitchFamily="34" charset="-122"/>
-                <a:cs typeface="맑은 고딕" pitchFamily="34" charset="-120"/>
+                <a:latin typeface="Pretendard" pitchFamily="34" charset="0"/>
+                <a:ea typeface="Pretendard" pitchFamily="34" charset="-122"/>
+                <a:cs typeface="Pretendard" pitchFamily="34" charset="-120"/>
               </a:rPr>
               <a:t>비타민D</a:t>
             </a:r>
@@ -3042,9 +3042,9 @@
                 <a:solidFill>
                   <a:srgbClr val="FFFFFF"/>
                 </a:solidFill>
-                <a:latin typeface="맑은 고딕" pitchFamily="34" charset="0"/>
-                <a:ea typeface="맑은 고딕" pitchFamily="34" charset="-122"/>
-                <a:cs typeface="맑은 고딕" pitchFamily="34" charset="-120"/>
+                <a:latin typeface="Pretendard" pitchFamily="34" charset="0"/>
+                <a:ea typeface="Pretendard" pitchFamily="34" charset="-122"/>
+                <a:cs typeface="Pretendard" pitchFamily="34" charset="-120"/>
               </a:rPr>
               <a:t>지용성 호르몬</a:t>
             </a:r>
@@ -3062,9 +3062,9 @@
                 <a:solidFill>
                   <a:srgbClr val="FFFFFF"/>
                 </a:solidFill>
-                <a:latin typeface="맑은 고딕" pitchFamily="34" charset="0"/>
-                <a:ea typeface="맑은 고딕" pitchFamily="34" charset="-122"/>
-                <a:cs typeface="맑은 고딕" pitchFamily="34" charset="-120"/>
+                <a:latin typeface="Pretendard" pitchFamily="34" charset="0"/>
+                <a:ea typeface="Pretendard" pitchFamily="34" charset="-122"/>
+                <a:cs typeface="Pretendard" pitchFamily="34" charset="-120"/>
               </a:rPr>
               <a:t>(핵수용체 리간드)</a:t>
             </a:r>
@@ -3104,9 +3104,9 @@
                 <a:solidFill>
                   <a:srgbClr val="16232E"/>
                 </a:solidFill>
-                <a:latin typeface="맑은 고딕" pitchFamily="34" charset="0"/>
-                <a:ea typeface="맑은 고딕" pitchFamily="34" charset="-122"/>
-                <a:cs typeface="맑은 고딕" pitchFamily="34" charset="-120"/>
+                <a:latin typeface="Pretendard" pitchFamily="34" charset="0"/>
+                <a:ea typeface="Pretendard" pitchFamily="34" charset="-122"/>
+                <a:cs typeface="Pretendard" pitchFamily="34" charset="-120"/>
               </a:rPr>
               <a:t>VDR(비타민D수용체) 결합 ▷ 골개조 관련 유전자 발현 조절 ▷ 파골세포 활성 + 면역매개체 동시 조절 ▷ 완만한 가속</a:t>
             </a:r>
@@ -3133,9 +3133,9 @@
                 <a:solidFill>
                   <a:srgbClr val="16232E"/>
                 </a:solidFill>
-                <a:latin typeface="맑은 고딕" pitchFamily="34" charset="0"/>
-                <a:ea typeface="맑은 고딕" pitchFamily="34" charset="-122"/>
-                <a:cs typeface="맑은 고딕" pitchFamily="34" charset="-120"/>
+                <a:latin typeface="Pretendard" pitchFamily="34" charset="0"/>
+                <a:ea typeface="Pretendard" pitchFamily="34" charset="-122"/>
+                <a:cs typeface="Pretendard" pitchFamily="34" charset="-120"/>
               </a:rPr>
               <a:t>전신 칼슘 대사 호르몬이 국소 골개조에도 관여하는 사례</a:t>
             </a:r>
@@ -3223,9 +3223,9 @@
                 <a:solidFill>
                   <a:srgbClr val="FFFFFF"/>
                 </a:solidFill>
-                <a:latin typeface="맑은 고딕" pitchFamily="34" charset="0"/>
-                <a:ea typeface="맑은 고딕" pitchFamily="34" charset="-122"/>
-                <a:cs typeface="맑은 고딕" pitchFamily="34" charset="-120"/>
+                <a:latin typeface="Pretendard" pitchFamily="34" charset="0"/>
+                <a:ea typeface="Pretendard" pitchFamily="34" charset="-122"/>
+                <a:cs typeface="Pretendard" pitchFamily="34" charset="-120"/>
               </a:rPr>
               <a:t>PGE₂</a:t>
             </a:r>
@@ -3265,9 +3265,9 @@
                 <a:solidFill>
                   <a:srgbClr val="FFFFFF"/>
                 </a:solidFill>
-                <a:latin typeface="맑은 고딕" pitchFamily="34" charset="0"/>
-                <a:ea typeface="맑은 고딕" pitchFamily="34" charset="-122"/>
-                <a:cs typeface="맑은 고딕" pitchFamily="34" charset="-120"/>
+                <a:latin typeface="Pretendard" pitchFamily="34" charset="0"/>
+                <a:ea typeface="Pretendard" pitchFamily="34" charset="-122"/>
+                <a:cs typeface="Pretendard" pitchFamily="34" charset="-120"/>
               </a:rPr>
               <a:t>지질 매개체(autacoid)</a:t>
             </a:r>
@@ -3285,9 +3285,9 @@
                 <a:solidFill>
                   <a:srgbClr val="FFFFFF"/>
                 </a:solidFill>
-                <a:latin typeface="맑은 고딕" pitchFamily="34" charset="0"/>
-                <a:ea typeface="맑은 고딕" pitchFamily="34" charset="-122"/>
-                <a:cs typeface="맑은 고딕" pitchFamily="34" charset="-120"/>
+                <a:latin typeface="Pretendard" pitchFamily="34" charset="0"/>
+                <a:ea typeface="Pretendard" pitchFamily="34" charset="-122"/>
+                <a:cs typeface="Pretendard" pitchFamily="34" charset="-120"/>
               </a:rPr>
               <a:t>= 교정력의 자연 신호물질</a:t>
             </a:r>
@@ -3327,9 +3327,9 @@
                 <a:solidFill>
                   <a:srgbClr val="16232E"/>
                 </a:solidFill>
-                <a:latin typeface="맑은 고딕" pitchFamily="34" charset="0"/>
-                <a:ea typeface="맑은 고딕" pitchFamily="34" charset="-122"/>
-                <a:cs typeface="맑은 고딕" pitchFamily="34" charset="-120"/>
+                <a:latin typeface="Pretendard" pitchFamily="34" charset="0"/>
+                <a:ea typeface="Pretendard" pitchFamily="34" charset="-122"/>
+                <a:cs typeface="Pretendard" pitchFamily="34" charset="-120"/>
               </a:rPr>
               <a:t>[자연 경로] 교정력 ▷ COX-2 ▷ PGE2 자체 생성 ▷ RANKL ▷ 파골세포</a:t>
             </a:r>
@@ -3356,9 +3356,9 @@
                 <a:solidFill>
                   <a:srgbClr val="16232E"/>
                 </a:solidFill>
-                <a:latin typeface="맑은 고딕" pitchFamily="34" charset="0"/>
-                <a:ea typeface="맑은 고딕" pitchFamily="34" charset="-122"/>
-                <a:cs typeface="맑은 고딕" pitchFamily="34" charset="-120"/>
+                <a:latin typeface="Pretendard" pitchFamily="34" charset="0"/>
+                <a:ea typeface="Pretendard" pitchFamily="34" charset="-122"/>
+                <a:cs typeface="Pretendard" pitchFamily="34" charset="-120"/>
               </a:rPr>
               <a:t>이 실험은 PGE2를 외부 직접 주입 — 경로 중간부터 재현·검증</a:t>
             </a:r>
@@ -3427,9 +3427,9 @@
                 <a:solidFill>
                   <a:srgbClr val="1B4965"/>
                 </a:solidFill>
-                <a:latin typeface="맑은 고딕" pitchFamily="34" charset="0"/>
-                <a:ea typeface="맑은 고딕" pitchFamily="34" charset="-122"/>
-                <a:cs typeface="맑은 고딕" pitchFamily="34" charset="-120"/>
+                <a:latin typeface="Pretendard" pitchFamily="34" charset="0"/>
+                <a:ea typeface="Pretendard" pitchFamily="34" charset="-122"/>
+                <a:cs typeface="Pretendard" pitchFamily="34" charset="-120"/>
               </a:rPr>
               <a:t>핵심 시사점  </a:t>
             </a:r>
@@ -3444,9 +3444,9 @@
                 <a:solidFill>
                   <a:srgbClr val="16232E"/>
                 </a:solidFill>
-                <a:latin typeface="맑은 고딕" pitchFamily="34" charset="0"/>
-                <a:ea typeface="맑은 고딕" pitchFamily="34" charset="-122"/>
-                <a:cs typeface="맑은 고딕" pitchFamily="34" charset="-120"/>
+                <a:latin typeface="Pretendard" pitchFamily="34" charset="0"/>
+                <a:ea typeface="Pretendard" pitchFamily="34" charset="-122"/>
+                <a:cs typeface="Pretendard" pitchFamily="34" charset="-120"/>
               </a:rPr>
               <a:t>세 약물은 서로 다른 약리학적 경로(유전자 억제·호르몬 수용체·지질 매개체)로 결국 같은 종착점인 '파골세포 활성화'에 도달한다 — 그러나 경로가 다르면 부작용·재발 위험도 달라진다.
 </a:t>
@@ -3462,9 +3462,9 @@
                 <a:solidFill>
                   <a:srgbClr val="1B4965"/>
                 </a:solidFill>
-                <a:latin typeface="맑은 고딕" pitchFamily="34" charset="0"/>
-                <a:ea typeface="맑은 고딕" pitchFamily="34" charset="-122"/>
-                <a:cs typeface="맑은 고딕" pitchFamily="34" charset="-120"/>
+                <a:latin typeface="Pretendard" pitchFamily="34" charset="0"/>
+                <a:ea typeface="Pretendard" pitchFamily="34" charset="-122"/>
+                <a:cs typeface="Pretendard" pitchFamily="34" charset="-120"/>
               </a:rPr>
               <a:t>치과교정학 기본원칙과의 연결  </a:t>
             </a:r>
@@ -3479,9 +3479,9 @@
                 <a:solidFill>
                   <a:srgbClr val="16232E"/>
                 </a:solidFill>
-                <a:latin typeface="맑은 고딕" pitchFamily="34" charset="0"/>
-                <a:ea typeface="맑은 고딕" pitchFamily="34" charset="-122"/>
-                <a:cs typeface="맑은 고딕" pitchFamily="34" charset="-120"/>
+                <a:latin typeface="Pretendard" pitchFamily="34" charset="0"/>
+                <a:ea typeface="Pretendard" pitchFamily="34" charset="-122"/>
+                <a:cs typeface="Pretendard" pitchFamily="34" charset="-120"/>
               </a:rPr>
               <a:t>압박-긴장설(pressure-tension theory)에서 치아이동은 골흡수뿐 아니라 흡수 이후의 '구조적 재조직화'가 뒤따라야 안정된다 — 코르티코스테로이드처럼 흡수만 급가속하면 재조직화가 못 따라가 재발이 커진다. 이 논문의 '가속↑ = 재발↑' 결과는 곧 "치아이동 속도는 생물학적 재형성 속도가 제한한다"는 교정학 기본원칙을 약리학적으로 재확인한 것이다.</a:t>
             </a:r>
@@ -3589,9 +3589,9 @@
                 <a:solidFill>
                   <a:srgbClr val="3D7EA6"/>
                 </a:solidFill>
-                <a:latin typeface="맑은 고딕" pitchFamily="34" charset="0"/>
-                <a:ea typeface="맑은 고딕" pitchFamily="34" charset="-122"/>
-                <a:cs typeface="맑은 고딕" pitchFamily="34" charset="-120"/>
+                <a:latin typeface="Pretendard" pitchFamily="34" charset="0"/>
+                <a:ea typeface="Pretendard" pitchFamily="34" charset="-122"/>
+                <a:cs typeface="Pretendard" pitchFamily="34" charset="-120"/>
               </a:rPr>
               <a:t>CRITICAL APPRAISAL</a:t>
             </a:r>
@@ -3628,9 +3628,9 @@
                 <a:solidFill>
                   <a:srgbClr val="1B4965"/>
                 </a:solidFill>
-                <a:latin typeface="맑은 고딕" pitchFamily="34" charset="0"/>
-                <a:ea typeface="맑은 고딕" pitchFamily="34" charset="-122"/>
-                <a:cs typeface="맑은 고딕" pitchFamily="34" charset="-120"/>
+                <a:latin typeface="Pretendard" pitchFamily="34" charset="0"/>
+                <a:ea typeface="Pretendard" pitchFamily="34" charset="-122"/>
+                <a:cs typeface="Pretendard" pitchFamily="34" charset="-120"/>
               </a:rPr>
               <a:t>비평적 고찰</a:t>
             </a:r>
@@ -3696,9 +3696,9 @@
                 <a:solidFill>
                   <a:srgbClr val="1B4965"/>
                 </a:solidFill>
-                <a:latin typeface="맑은 고딕" pitchFamily="34" charset="0"/>
-                <a:ea typeface="맑은 고딕" pitchFamily="34" charset="-122"/>
-                <a:cs typeface="맑은 고딕" pitchFamily="34" charset="-120"/>
+                <a:latin typeface="Pretendard" pitchFamily="34" charset="0"/>
+                <a:ea typeface="Pretendard" pitchFamily="34" charset="-122"/>
+                <a:cs typeface="Pretendard" pitchFamily="34" charset="-120"/>
               </a:rPr>
               <a:t>강점</a:t>
             </a:r>
@@ -3738,9 +3738,9 @@
                 <a:solidFill>
                   <a:srgbClr val="16232E"/>
                 </a:solidFill>
-                <a:latin typeface="맑은 고딕" pitchFamily="34" charset="0"/>
-                <a:ea typeface="맑은 고딕" pitchFamily="34" charset="-122"/>
-                <a:cs typeface="맑은 고딕" pitchFamily="34" charset="-120"/>
+                <a:latin typeface="Pretendard" pitchFamily="34" charset="0"/>
+                <a:ea typeface="Pretendard" pitchFamily="34" charset="-122"/>
+                <a:cs typeface="Pretendard" pitchFamily="34" charset="-120"/>
               </a:rPr>
               <a:t>•  ARRIVE 가이드라인 준수 + 윤리위 승인 + 배정 눈가림(무작위 배정)</a:t>
             </a:r>
@@ -3758,9 +3758,9 @@
                 <a:solidFill>
                   <a:srgbClr val="16232E"/>
                 </a:solidFill>
-                <a:latin typeface="맑은 고딕" pitchFamily="34" charset="0"/>
-                <a:ea typeface="맑은 고딕" pitchFamily="34" charset="-122"/>
-                <a:cs typeface="맑은 고딕" pitchFamily="34" charset="-120"/>
+                <a:latin typeface="Pretendard" pitchFamily="34" charset="0"/>
+                <a:ea typeface="Pretendard" pitchFamily="34" charset="-122"/>
+                <a:cs typeface="Pretendard" pitchFamily="34" charset="-120"/>
               </a:rPr>
               <a:t>•  임상측정(캘리퍼) + 조직학(PDL 폭, ALP/TRAP)으로 이중 검증</a:t>
             </a:r>
@@ -3778,9 +3778,9 @@
                 <a:solidFill>
                   <a:srgbClr val="16232E"/>
                 </a:solidFill>
-                <a:latin typeface="맑은 고딕" pitchFamily="34" charset="0"/>
-                <a:ea typeface="맑은 고딕" pitchFamily="34" charset="-122"/>
-                <a:cs typeface="맑은 고딕" pitchFamily="34" charset="-120"/>
+                <a:latin typeface="Pretendard" pitchFamily="34" charset="0"/>
+                <a:ea typeface="Pretendard" pitchFamily="34" charset="-122"/>
+                <a:cs typeface="Pretendard" pitchFamily="34" charset="-120"/>
               </a:rPr>
               <a:t>•  가속기·보정기·재발기를 모두 추적한 최초의 3약물 비교 — 선행연구 공백을 직접 채움</a:t>
             </a:r>
@@ -3846,9 +3846,9 @@
                 <a:solidFill>
                   <a:srgbClr val="1B4965"/>
                 </a:solidFill>
-                <a:latin typeface="맑은 고딕" pitchFamily="34" charset="0"/>
-                <a:ea typeface="맑은 고딕" pitchFamily="34" charset="-122"/>
-                <a:cs typeface="맑은 고딕" pitchFamily="34" charset="-120"/>
+                <a:latin typeface="Pretendard" pitchFamily="34" charset="0"/>
+                <a:ea typeface="Pretendard" pitchFamily="34" charset="-122"/>
+                <a:cs typeface="Pretendard" pitchFamily="34" charset="-120"/>
               </a:rPr>
               <a:t>한계 / Bias 위험</a:t>
             </a:r>
@@ -3888,9 +3888,9 @@
                 <a:solidFill>
                   <a:srgbClr val="16232E"/>
                 </a:solidFill>
-                <a:latin typeface="맑은 고딕" pitchFamily="34" charset="0"/>
-                <a:ea typeface="맑은 고딕" pitchFamily="34" charset="-122"/>
-                <a:cs typeface="맑은 고딕" pitchFamily="34" charset="-120"/>
+                <a:latin typeface="Pretendard" pitchFamily="34" charset="0"/>
+                <a:ea typeface="Pretendard" pitchFamily="34" charset="-122"/>
+                <a:cs typeface="Pretendard" pitchFamily="34" charset="-120"/>
               </a:rPr>
               <a:t>•  배정만 눈가림, 측정(outcome assessment)은 비맹검 — 원문: 주 연구자 1인이 개입·측정·평가를 전부 수행</a:t>
             </a:r>
@@ -3908,9 +3908,9 @@
                 <a:solidFill>
                   <a:srgbClr val="16232E"/>
                 </a:solidFill>
-                <a:latin typeface="맑은 고딕" pitchFamily="34" charset="0"/>
-                <a:ea typeface="맑은 고딕" pitchFamily="34" charset="-122"/>
-                <a:cs typeface="맑은 고딕" pitchFamily="34" charset="-120"/>
+                <a:latin typeface="Pretendard" pitchFamily="34" charset="0"/>
+                <a:ea typeface="Pretendard" pitchFamily="34" charset="-122"/>
+                <a:cs typeface="Pretendard" pitchFamily="34" charset="-120"/>
               </a:rPr>
               <a:t>•  약물당 용량 1개뿐 + 투여빈도도 매일·3일마다·매주로 제각각 — 공정 비교인지 불확실(용량-반응 분석 불가)</a:t>
             </a:r>
@@ -3928,9 +3928,9 @@
                 <a:solidFill>
                   <a:srgbClr val="16232E"/>
                 </a:solidFill>
-                <a:latin typeface="맑은 고딕" pitchFamily="34" charset="0"/>
-                <a:ea typeface="맑은 고딕" pitchFamily="34" charset="-122"/>
-                <a:cs typeface="맑은 고딕" pitchFamily="34" charset="-120"/>
+                <a:latin typeface="Pretendard" pitchFamily="34" charset="0"/>
+                <a:ea typeface="Pretendard" pitchFamily="34" charset="-122"/>
+                <a:cs typeface="Pretendard" pitchFamily="34" charset="-120"/>
               </a:rPr>
               <a:t>•  수컷 랫드만 사용 — 호르몬 변동은 배제했지만 여성(암컷) 적용 가능성은 미확인</a:t>
             </a:r>
@@ -3996,9 +3996,9 @@
                 <a:solidFill>
                   <a:srgbClr val="1B4965"/>
                 </a:solidFill>
-                <a:latin typeface="맑은 고딕" pitchFamily="34" charset="0"/>
-                <a:ea typeface="맑은 고딕" pitchFamily="34" charset="-122"/>
-                <a:cs typeface="맑은 고딕" pitchFamily="34" charset="-120"/>
+                <a:latin typeface="Pretendard" pitchFamily="34" charset="0"/>
+                <a:ea typeface="Pretendard" pitchFamily="34" charset="-122"/>
+                <a:cs typeface="Pretendard" pitchFamily="34" charset="-120"/>
               </a:rPr>
               <a:t>임상 적용 가능성</a:t>
             </a:r>
@@ -4038,9 +4038,9 @@
                 <a:solidFill>
                   <a:srgbClr val="16232E"/>
                 </a:solidFill>
-                <a:latin typeface="맑은 고딕" pitchFamily="34" charset="0"/>
-                <a:ea typeface="맑은 고딕" pitchFamily="34" charset="-122"/>
-                <a:cs typeface="맑은 고딕" pitchFamily="34" charset="-120"/>
+                <a:latin typeface="Pretendard" pitchFamily="34" charset="0"/>
+                <a:ea typeface="Pretendard" pitchFamily="34" charset="-122"/>
+                <a:cs typeface="Pretendard" pitchFamily="34" charset="-120"/>
               </a:rPr>
               <a:t>•  코르티코스테로이드는 가속 효과 크지만 재발 위험도 가장 큼 — 전신 스테로이드 복용 중인 교정환자에서 특히 신중한 판단 필요</a:t>
             </a:r>
@@ -4058,9 +4058,9 @@
                 <a:solidFill>
                   <a:srgbClr val="16232E"/>
                 </a:solidFill>
-                <a:latin typeface="맑은 고딕" pitchFamily="34" charset="0"/>
-                <a:ea typeface="맑은 고딕" pitchFamily="34" charset="-122"/>
-                <a:cs typeface="맑은 고딕" pitchFamily="34" charset="-120"/>
+                <a:latin typeface="Pretendard" pitchFamily="34" charset="0"/>
+                <a:ea typeface="Pretendard" pitchFamily="34" charset="-122"/>
+                <a:cs typeface="Pretendard" pitchFamily="34" charset="-120"/>
               </a:rPr>
               <a:t>•  전신 코르티코스테로이드의 골 관련 부작용(골다공증·골괴사, 조골세포↓·파골세포↑, 성장억제)은 이 연구의 국소 주입과 별개로 교안에 명시된 위험 — 장기 전신 스테로이드 환자의 치아이동 계획 시 반드시 고려</a:t>
             </a:r>
@@ -4078,9 +4078,9 @@
                 <a:solidFill>
                   <a:srgbClr val="16232E"/>
                 </a:solidFill>
-                <a:latin typeface="맑은 고딕" pitchFamily="34" charset="0"/>
-                <a:ea typeface="맑은 고딕" pitchFamily="34" charset="-122"/>
-                <a:cs typeface="맑은 고딕" pitchFamily="34" charset="-120"/>
+                <a:latin typeface="Pretendard" pitchFamily="34" charset="0"/>
+                <a:ea typeface="Pretendard" pitchFamily="34" charset="-122"/>
+                <a:cs typeface="Pretendard" pitchFamily="34" charset="-120"/>
               </a:rPr>
               <a:t>•  비타민D·PGE₂는 가속은 온건해도 재발이 적어 상대적으로 안전한 보조제일 수 있음 — 다만 PGE2는 고용량 시 치근흡수 위험 보고 있음(타 문헌)</a:t>
             </a:r>
@@ -4098,9 +4098,9 @@
                 <a:solidFill>
                   <a:srgbClr val="16232E"/>
                 </a:solidFill>
-                <a:latin typeface="맑은 고딕" pitchFamily="34" charset="0"/>
-                <a:ea typeface="맑은 고딕" pitchFamily="34" charset="-122"/>
-                <a:cs typeface="맑은 고딕" pitchFamily="34" charset="-120"/>
+                <a:latin typeface="Pretendard" pitchFamily="34" charset="0"/>
+                <a:ea typeface="Pretendard" pitchFamily="34" charset="-122"/>
+                <a:cs typeface="Pretendard" pitchFamily="34" charset="-120"/>
               </a:rPr>
               <a:t>•  동물(랫드)실험 — 종간 차이로 사람에 그대로 적용은 어려움(저자도 인정), 용량-반응 확립을 위한 후속 임상연구 필요</a:t>
             </a:r>
@@ -4208,9 +4208,9 @@
                 <a:solidFill>
                   <a:srgbClr val="3D7EA6"/>
                 </a:solidFill>
-                <a:latin typeface="맑은 고딕" pitchFamily="34" charset="0"/>
-                <a:ea typeface="맑은 고딕" pitchFamily="34" charset="-122"/>
-                <a:cs typeface="맑은 고딕" pitchFamily="34" charset="-120"/>
+                <a:latin typeface="Pretendard" pitchFamily="34" charset="0"/>
+                <a:ea typeface="Pretendard" pitchFamily="34" charset="-122"/>
+                <a:cs typeface="Pretendard" pitchFamily="34" charset="-120"/>
               </a:rPr>
               <a:t>DISCUSSION</a:t>
             </a:r>
@@ -4247,9 +4247,9 @@
                 <a:solidFill>
                   <a:srgbClr val="1B4965"/>
                 </a:solidFill>
-                <a:latin typeface="맑은 고딕" pitchFamily="34" charset="0"/>
-                <a:ea typeface="맑은 고딕" pitchFamily="34" charset="-122"/>
-                <a:cs typeface="맑은 고딕" pitchFamily="34" charset="-120"/>
+                <a:latin typeface="Pretendard" pitchFamily="34" charset="0"/>
+                <a:ea typeface="Pretendard" pitchFamily="34" charset="-122"/>
+                <a:cs typeface="Pretendard" pitchFamily="34" charset="-120"/>
               </a:rPr>
               <a:t>기타 연구와의 결과 비교</a:t>
             </a:r>
@@ -4337,9 +4337,9 @@
                 <a:solidFill>
                   <a:srgbClr val="FFFFFF"/>
                 </a:solidFill>
-                <a:latin typeface="맑은 고딕" pitchFamily="34" charset="0"/>
-                <a:ea typeface="맑은 고딕" pitchFamily="34" charset="-122"/>
-                <a:cs typeface="맑은 고딕" pitchFamily="34" charset="-120"/>
+                <a:latin typeface="Pretendard" pitchFamily="34" charset="0"/>
+                <a:ea typeface="Pretendard" pitchFamily="34" charset="-122"/>
+                <a:cs typeface="Pretendard" pitchFamily="34" charset="-120"/>
               </a:rPr>
               <a:t>코르티코스테로이드</a:t>
             </a:r>
@@ -4379,9 +4379,9 @@
                 <a:solidFill>
                   <a:srgbClr val="16232E"/>
                 </a:solidFill>
-                <a:latin typeface="맑은 고딕" pitchFamily="34" charset="0"/>
-                <a:ea typeface="맑은 고딕" pitchFamily="34" charset="-122"/>
-                <a:cs typeface="맑은 고딕" pitchFamily="34" charset="-120"/>
+                <a:latin typeface="Pretendard" pitchFamily="34" charset="0"/>
+                <a:ea typeface="Pretendard" pitchFamily="34" charset="-122"/>
+                <a:cs typeface="Pretendard" pitchFamily="34" charset="-120"/>
               </a:rPr>
               <a:t>Baofeng·Abtahi 등은 골흡수·파골세포형성 증가로 가속 보고 / 반대로 Yamane·Molina 등은 오히려 치아이동 감소 보고 — 연구기간(1–2주 vs 8주)·용량·힘·표본수 차이로 추정</a:t>
             </a:r>
@@ -4469,9 +4469,9 @@
                 <a:solidFill>
                   <a:srgbClr val="FFFFFF"/>
                 </a:solidFill>
-                <a:latin typeface="맑은 고딕" pitchFamily="34" charset="0"/>
-                <a:ea typeface="맑은 고딕" pitchFamily="34" charset="-122"/>
-                <a:cs typeface="맑은 고딕" pitchFamily="34" charset="-120"/>
+                <a:latin typeface="Pretendard" pitchFamily="34" charset="0"/>
+                <a:ea typeface="Pretendard" pitchFamily="34" charset="-122"/>
+                <a:cs typeface="Pretendard" pitchFamily="34" charset="-120"/>
               </a:rPr>
               <a:t>비타민D</a:t>
             </a:r>
@@ -4511,9 +4511,9 @@
                 <a:solidFill>
                   <a:srgbClr val="16232E"/>
                 </a:solidFill>
-                <a:latin typeface="맑은 고딕" pitchFamily="34" charset="0"/>
-                <a:ea typeface="맑은 고딕" pitchFamily="34" charset="-122"/>
-                <a:cs typeface="맑은 고딕" pitchFamily="34" charset="-120"/>
+                <a:latin typeface="Pretendard" pitchFamily="34" charset="0"/>
+                <a:ea typeface="Pretendard" pitchFamily="34" charset="-122"/>
+                <a:cs typeface="Pretendard" pitchFamily="34" charset="-120"/>
               </a:rPr>
               <a:t>Gowda·Varughese·Al-Attar·Moradinejad 등 다수가 골개조 증가·염증성 사이토카인 감소로 가속 효과를 일관되게 보고 — 본 연구 결과와 부합</a:t>
             </a:r>
@@ -4601,9 +4601,9 @@
                 <a:solidFill>
                   <a:srgbClr val="FFFFFF"/>
                 </a:solidFill>
-                <a:latin typeface="맑은 고딕" pitchFamily="34" charset="0"/>
-                <a:ea typeface="맑은 고딕" pitchFamily="34" charset="-122"/>
-                <a:cs typeface="맑은 고딕" pitchFamily="34" charset="-120"/>
+                <a:latin typeface="Pretendard" pitchFamily="34" charset="0"/>
+                <a:ea typeface="Pretendard" pitchFamily="34" charset="-122"/>
+                <a:cs typeface="Pretendard" pitchFamily="34" charset="-120"/>
               </a:rPr>
               <a:t>PGE₂</a:t>
             </a:r>
@@ -4643,9 +4643,9 @@
                 <a:solidFill>
                   <a:srgbClr val="16232E"/>
                 </a:solidFill>
-                <a:latin typeface="맑은 고딕" pitchFamily="34" charset="0"/>
-                <a:ea typeface="맑은 고딕" pitchFamily="34" charset="-122"/>
-                <a:cs typeface="맑은 고딕" pitchFamily="34" charset="-120"/>
+                <a:latin typeface="Pretendard" pitchFamily="34" charset="0"/>
+                <a:ea typeface="Pretendard" pitchFamily="34" charset="-122"/>
+                <a:cs typeface="Pretendard" pitchFamily="34" charset="-120"/>
               </a:rPr>
               <a:t>Kale·Cağlaroğlu·Seifi 등이 RANKL 발현·파골활성 증가를 보고 — 'PGE2 효과 없음'을 보고한 연구는 없음(저자 확인)</a:t>
             </a:r>
@@ -4682,9 +4682,9 @@
                 <a:solidFill>
                   <a:srgbClr val="1B4965"/>
                 </a:solidFill>
-                <a:latin typeface="맑은 고딕" pitchFamily="34" charset="0"/>
-                <a:ea typeface="맑은 고딕" pitchFamily="34" charset="-122"/>
-                <a:cs typeface="맑은 고딕" pitchFamily="34" charset="-120"/>
+                <a:latin typeface="Pretendard" pitchFamily="34" charset="0"/>
+                <a:ea typeface="Pretendard" pitchFamily="34" charset="-122"/>
+                <a:cs typeface="Pretendard" pitchFamily="34" charset="-120"/>
               </a:rPr>
               <a:t>※ 상반된 결과는 연구기간·용량·힘·표본수 차이 때문(저자 설명) — 재발까지 세 약물을 비교한 연구는 이번이 최초, 진짜 공백은 여기 있음.</a:t>
             </a:r>
@@ -4792,9 +4792,9 @@
                 <a:solidFill>
                   <a:srgbClr val="3D7EA6"/>
                 </a:solidFill>
-                <a:latin typeface="맑은 고딕" pitchFamily="34" charset="0"/>
-                <a:ea typeface="맑은 고딕" pitchFamily="34" charset="-122"/>
-                <a:cs typeface="맑은 고딕" pitchFamily="34" charset="-120"/>
+                <a:latin typeface="Pretendard" pitchFamily="34" charset="0"/>
+                <a:ea typeface="Pretendard" pitchFamily="34" charset="-122"/>
+                <a:cs typeface="Pretendard" pitchFamily="34" charset="-120"/>
               </a:rPr>
               <a:t>REFERENCE</a:t>
             </a:r>
@@ -4831,9 +4831,9 @@
                 <a:solidFill>
                   <a:srgbClr val="1B4965"/>
                 </a:solidFill>
-                <a:latin typeface="맑은 고딕" pitchFamily="34" charset="0"/>
-                <a:ea typeface="맑은 고딕" pitchFamily="34" charset="-122"/>
-                <a:cs typeface="맑은 고딕" pitchFamily="34" charset="-120"/>
+                <a:latin typeface="Pretendard" pitchFamily="34" charset="0"/>
+                <a:ea typeface="Pretendard" pitchFamily="34" charset="-122"/>
+                <a:cs typeface="Pretendard" pitchFamily="34" charset="-120"/>
               </a:rPr>
               <a:t>참고문헌</a:t>
             </a:r>
@@ -4873,9 +4873,9 @@
                 <a:solidFill>
                   <a:srgbClr val="16232E"/>
                 </a:solidFill>
-                <a:latin typeface="맑은 고딕" pitchFamily="34" charset="0"/>
-                <a:ea typeface="맑은 고딕" pitchFamily="34" charset="-122"/>
-                <a:cs typeface="맑은 고딕" pitchFamily="34" charset="-120"/>
+                <a:latin typeface="Pretendard" pitchFamily="34" charset="0"/>
+                <a:ea typeface="Pretendard" pitchFamily="34" charset="-122"/>
+                <a:cs typeface="Pretendard" pitchFamily="34" charset="-120"/>
               </a:rPr>
               <a:t>[1] [원 논문] Hamed SA, Mohammad MH, Grawish ME, Fouda AM, Montasser MA. Three pharmacological agents for acceleratory orthodontic tooth movement and subsequent relapse: A randomized controlled animal study. Int Orthod. 2026;24:101112.</a:t>
             </a:r>
@@ -4893,9 +4893,9 @@
                 <a:solidFill>
                   <a:srgbClr val="16232E"/>
                 </a:solidFill>
-                <a:latin typeface="맑은 고딕" pitchFamily="34" charset="0"/>
-                <a:ea typeface="맑은 고딕" pitchFamily="34" charset="-122"/>
-                <a:cs typeface="맑은 고딕" pitchFamily="34" charset="-120"/>
+                <a:latin typeface="Pretendard" pitchFamily="34" charset="0"/>
+                <a:ea typeface="Pretendard" pitchFamily="34" charset="-122"/>
+                <a:cs typeface="Pretendard" pitchFamily="34" charset="-120"/>
               </a:rPr>
               <a:t>[2] Baofeng L, et al. Characterization of a rabbit osteoporosis model induced by ovariectomy and glucocorticoid. Bone 2010;46(3):396-401.</a:t>
             </a:r>
@@ -4913,9 +4913,9 @@
                 <a:solidFill>
                   <a:srgbClr val="16232E"/>
                 </a:solidFill>
-                <a:latin typeface="맑은 고딕" pitchFamily="34" charset="0"/>
-                <a:ea typeface="맑은 고딕" pitchFamily="34" charset="-122"/>
-                <a:cs typeface="맑은 고딕" pitchFamily="34" charset="-120"/>
+                <a:latin typeface="Pretendard" pitchFamily="34" charset="0"/>
+                <a:ea typeface="Pretendard" pitchFamily="34" charset="-122"/>
+                <a:cs typeface="Pretendard" pitchFamily="34" charset="-120"/>
               </a:rPr>
               <a:t>[3] Abtahi M, et al. Effect of corticosteroids administration in rabbit model. J Clin Pediatr Dent 2014;38:285-9.</a:t>
             </a:r>
@@ -4933,9 +4933,9 @@
                 <a:solidFill>
                   <a:srgbClr val="16232E"/>
                 </a:solidFill>
-                <a:latin typeface="맑은 고딕" pitchFamily="34" charset="0"/>
-                <a:ea typeface="맑은 고딕" pitchFamily="34" charset="-122"/>
-                <a:cs typeface="맑은 고딕" pitchFamily="34" charset="-120"/>
+                <a:latin typeface="Pretendard" pitchFamily="34" charset="0"/>
+                <a:ea typeface="Pretendard" pitchFamily="34" charset="-122"/>
+                <a:cs typeface="Pretendard" pitchFamily="34" charset="-120"/>
               </a:rPr>
               <a:t>[4] Yamane A, Fukui T, Chiba M. In vitro measurement of orthodontic tooth movement in rats given beta-aminopropionitrile or hydrocortisone. Eur J Orthod 1997;19(1):21-8.</a:t>
             </a:r>
@@ -4953,9 +4953,9 @@
                 <a:solidFill>
                   <a:srgbClr val="16232E"/>
                 </a:solidFill>
-                <a:latin typeface="맑은 고딕" pitchFamily="34" charset="0"/>
-                <a:ea typeface="맑은 고딕" pitchFamily="34" charset="-122"/>
-                <a:cs typeface="맑은 고딕" pitchFamily="34" charset="-120"/>
+                <a:latin typeface="Pretendard" pitchFamily="34" charset="0"/>
+                <a:ea typeface="Pretendard" pitchFamily="34" charset="-122"/>
+                <a:cs typeface="Pretendard" pitchFamily="34" charset="-120"/>
               </a:rPr>
               <a:t>[5] Kale S, et al. Comparison of 1,25-dihydroxycholecalciferol and prostaglandin E2 on orthodontic tooth movement. Am J Orthod Dentofacial Orthop 2004;125:607-14.</a:t>
             </a:r>
@@ -4973,9 +4973,9 @@
                 <a:solidFill>
                   <a:srgbClr val="16232E"/>
                 </a:solidFill>
-                <a:latin typeface="맑은 고딕" pitchFamily="34" charset="0"/>
-                <a:ea typeface="맑은 고딕" pitchFamily="34" charset="-122"/>
-                <a:cs typeface="맑은 고딕" pitchFamily="34" charset="-120"/>
+                <a:latin typeface="Pretendard" pitchFamily="34" charset="0"/>
+                <a:ea typeface="Pretendard" pitchFamily="34" charset="-122"/>
+                <a:cs typeface="Pretendard" pitchFamily="34" charset="-120"/>
               </a:rPr>
               <a:t>[6] Seifi M, Hamedi R, Khavandegar Z. The effect of thyroid hormone, prostaglandin E2, and calcium gluconate on orthodontic tooth movement and root resorption in rats. J Dent 2015;16(1 Suppl):35.</a:t>
             </a:r>
@@ -5012,9 +5012,9 @@
                 <a:solidFill>
                   <a:srgbClr val="5B6B7A"/>
                 </a:solidFill>
-                <a:latin typeface="맑은 고딕" pitchFamily="34" charset="0"/>
-                <a:ea typeface="맑은 고딕" pitchFamily="34" charset="-122"/>
-                <a:cs typeface="맑은 고딕" pitchFamily="34" charset="-120"/>
+                <a:latin typeface="Pretendard" pitchFamily="34" charset="0"/>
+                <a:ea typeface="Pretendard" pitchFamily="34" charset="-122"/>
+                <a:cs typeface="Pretendard" pitchFamily="34" charset="-120"/>
               </a:rPr>
               <a:t>※ 슬라이드 11(선행연구 비교)에서 이름으로 인용한 문헌만 수록. 전체 참고문헌(28건)은 원 논문 References 참고.</a:t>
             </a:r>
@@ -5144,9 +5144,9 @@
                 <a:solidFill>
                   <a:srgbClr val="D97706"/>
                 </a:solidFill>
-                <a:latin typeface="맑은 고딕" pitchFamily="34" charset="0"/>
-                <a:ea typeface="맑은 고딕" pitchFamily="34" charset="-122"/>
-                <a:cs typeface="맑은 고딕" pitchFamily="34" charset="-120"/>
+                <a:latin typeface="Pretendard" pitchFamily="34" charset="0"/>
+                <a:ea typeface="Pretendard" pitchFamily="34" charset="-122"/>
+                <a:cs typeface="Pretendard" pitchFamily="34" charset="-120"/>
               </a:rPr>
               <a:t>TAKE-HOME MESSAGE</a:t>
             </a:r>
@@ -5186,9 +5186,9 @@
                 <a:solidFill>
                   <a:srgbClr val="FFFFFF"/>
                 </a:solidFill>
-                <a:latin typeface="맑은 고딕" pitchFamily="34" charset="0"/>
-                <a:ea typeface="맑은 고딕" pitchFamily="34" charset="-122"/>
-                <a:cs typeface="맑은 고딕" pitchFamily="34" charset="-120"/>
+                <a:latin typeface="Pretendard" pitchFamily="34" charset="0"/>
+                <a:ea typeface="Pretendard" pitchFamily="34" charset="-122"/>
+                <a:cs typeface="Pretendard" pitchFamily="34" charset="-120"/>
               </a:rPr>
               <a:t>치아이동을 가장 많이 가속하는 약물이,</a:t>
             </a:r>
@@ -5206,9 +5206,9 @@
                 <a:solidFill>
                   <a:srgbClr val="FFFFFF"/>
                 </a:solidFill>
-                <a:latin typeface="맑은 고딕" pitchFamily="34" charset="0"/>
-                <a:ea typeface="맑은 고딕" pitchFamily="34" charset="-122"/>
-                <a:cs typeface="맑은 고딕" pitchFamily="34" charset="-120"/>
+                <a:latin typeface="Pretendard" pitchFamily="34" charset="0"/>
+                <a:ea typeface="Pretendard" pitchFamily="34" charset="-122"/>
+                <a:cs typeface="Pretendard" pitchFamily="34" charset="-120"/>
               </a:rPr>
               <a:t>보정 후 가장 많이 되돌아가기도 한다.</a:t>
             </a:r>
@@ -5248,9 +5248,9 @@
                 <a:solidFill>
                   <a:srgbClr val="CFE0EC"/>
                 </a:solidFill>
-                <a:latin typeface="맑은 고딕" pitchFamily="34" charset="0"/>
-                <a:ea typeface="맑은 고딕" pitchFamily="34" charset="-122"/>
-                <a:cs typeface="맑은 고딕" pitchFamily="34" charset="-120"/>
+                <a:latin typeface="Pretendard" pitchFamily="34" charset="0"/>
+                <a:ea typeface="Pretendard" pitchFamily="34" charset="-122"/>
+                <a:cs typeface="Pretendard" pitchFamily="34" charset="-120"/>
               </a:rPr>
               <a:t>코르티코스테로이드 = 최대가속·최대재발  ·  비타민D = 중간  ·  PGE₂ = 최소가속·최소재발(대조군과 통계적 동률)</a:t>
             </a:r>
@@ -5290,9 +5290,9 @@
                 <a:solidFill>
                   <a:srgbClr val="FFFFFF"/>
                 </a:solidFill>
-                <a:latin typeface="맑은 고딕" pitchFamily="34" charset="0"/>
-                <a:ea typeface="맑은 고딕" pitchFamily="34" charset="-122"/>
-                <a:cs typeface="맑은 고딕" pitchFamily="34" charset="-120"/>
+                <a:latin typeface="Pretendard" pitchFamily="34" charset="0"/>
+                <a:ea typeface="Pretendard" pitchFamily="34" charset="-122"/>
+                <a:cs typeface="Pretendard" pitchFamily="34" charset="-120"/>
               </a:rPr>
               <a:t>'빠른 이동'과 '안정적 결과' 사이의 트레이드오프를 보여준 첫 3약물 비교 연구 — 치과약리학1(PGE2/COX 경로)과 구강생화학(골대사·칼슘 항상성)의 내용이 이 논문 하나로 이어진다.</a:t>
             </a:r>
@@ -5329,9 +5329,9 @@
                 <a:solidFill>
                   <a:srgbClr val="AECBDC"/>
                 </a:solidFill>
-                <a:latin typeface="맑은 고딕" pitchFamily="34" charset="0"/>
-                <a:ea typeface="맑은 고딕" pitchFamily="34" charset="-122"/>
-                <a:cs typeface="맑은 고딕" pitchFamily="34" charset="-120"/>
+                <a:latin typeface="Pretendard" pitchFamily="34" charset="0"/>
+                <a:ea typeface="Pretendard" pitchFamily="34" charset="-122"/>
+                <a:cs typeface="Pretendard" pitchFamily="34" charset="-120"/>
               </a:rPr>
               <a:t>※ PGE₂·대조군 relapse 차이 p = 0.605(유의하지 않음) — Appendix A 참고</a:t>
             </a:r>
@@ -5439,9 +5439,9 @@
                 <a:solidFill>
                   <a:srgbClr val="FFFFFF"/>
                 </a:solidFill>
-                <a:latin typeface="맑은 고딕" pitchFamily="34" charset="0"/>
-                <a:ea typeface="맑은 고딕" pitchFamily="34" charset="-122"/>
-                <a:cs typeface="맑은 고딕" pitchFamily="34" charset="-120"/>
+                <a:latin typeface="Pretendard" pitchFamily="34" charset="0"/>
+                <a:ea typeface="Pretendard" pitchFamily="34" charset="-122"/>
+                <a:cs typeface="Pretendard" pitchFamily="34" charset="-120"/>
               </a:rPr>
               <a:t>Q &amp; A</a:t>
             </a:r>
@@ -5478,9 +5478,9 @@
                 <a:solidFill>
                   <a:srgbClr val="D97706"/>
                 </a:solidFill>
-                <a:latin typeface="맑은 고딕" pitchFamily="34" charset="0"/>
-                <a:ea typeface="맑은 고딕" pitchFamily="34" charset="-122"/>
-                <a:cs typeface="맑은 고딕" pitchFamily="34" charset="-120"/>
+                <a:latin typeface="Pretendard" pitchFamily="34" charset="0"/>
+                <a:ea typeface="Pretendard" pitchFamily="34" charset="-122"/>
+                <a:cs typeface="Pretendard" pitchFamily="34" charset="-120"/>
               </a:rPr>
               <a:t>감사합니다</a:t>
             </a:r>
@@ -5549,9 +5549,9 @@
                 <a:solidFill>
                   <a:srgbClr val="3D7EA6"/>
                 </a:solidFill>
-                <a:latin typeface="맑은 고딕" pitchFamily="34" charset="0"/>
-                <a:ea typeface="맑은 고딕" pitchFamily="34" charset="-122"/>
-                <a:cs typeface="맑은 고딕" pitchFamily="34" charset="-120"/>
+                <a:latin typeface="Pretendard" pitchFamily="34" charset="0"/>
+                <a:ea typeface="Pretendard" pitchFamily="34" charset="-122"/>
+                <a:cs typeface="Pretendard" pitchFamily="34" charset="-120"/>
               </a:rPr>
               <a:t>APPENDIX A · Q&amp;A 백업</a:t>
             </a:r>
@@ -5588,9 +5588,9 @@
                 <a:solidFill>
                   <a:srgbClr val="1B4965"/>
                 </a:solidFill>
-                <a:latin typeface="맑은 고딕" pitchFamily="34" charset="0"/>
-                <a:ea typeface="맑은 고딕" pitchFamily="34" charset="-122"/>
-                <a:cs typeface="맑은 고딕" pitchFamily="34" charset="-120"/>
+                <a:latin typeface="Pretendard" pitchFamily="34" charset="0"/>
+                <a:ea typeface="Pretendard" pitchFamily="34" charset="-122"/>
+                <a:cs typeface="Pretendard" pitchFamily="34" charset="-120"/>
               </a:rPr>
               <a:t>재발이 '가장 적은' 군은 대조군도 PGE₂군도 아닌, 둘의 통계적 동률이다</a:t>
             </a:r>
@@ -5637,9 +5637,9 @@
                         <a:buNone/>
                       </a:pPr>
                       <a:endParaRPr lang="en-US" sz="1100" dirty="0">
-                        <a:latin typeface="맑은 고딕" charset="0"/>
-                        <a:ea typeface="맑은 고딕" charset="0"/>
-                        <a:cs typeface="맑은 고딕" charset="0"/>
+                        <a:latin typeface="Pretendard" charset="0"/>
+                        <a:ea typeface="Pretendard" charset="0"/>
+                        <a:cs typeface="Pretendard" charset="0"/>
                       </a:endParaRPr>
                     </a:p>
                   </a:txBody>
@@ -5698,16 +5698,16 @@
                           <a:solidFill>
                             <a:srgbClr val="FFFFFF"/>
                           </a:solidFill>
-                          <a:latin typeface="맑은 고딕" pitchFamily="34" charset="0"/>
-                          <a:ea typeface="맑은 고딕" pitchFamily="34" charset="-122"/>
-                          <a:cs typeface="맑은 고딕" pitchFamily="34" charset="-120"/>
+                          <a:latin typeface="Pretendard" pitchFamily="34" charset="0"/>
+                          <a:ea typeface="Pretendard" pitchFamily="34" charset="-122"/>
+                          <a:cs typeface="Pretendard" pitchFamily="34" charset="-120"/>
                         </a:rPr>
                         <a:t>양성대조</a:t>
                       </a:r>
                       <a:endParaRPr lang="en-US" sz="1100" dirty="0">
-                        <a:latin typeface="맑은 고딕" charset="0"/>
-                        <a:ea typeface="맑은 고딕" charset="0"/>
-                        <a:cs typeface="맑은 고딕" charset="0"/>
+                        <a:latin typeface="Pretendard" charset="0"/>
+                        <a:ea typeface="Pretendard" charset="0"/>
+                        <a:cs typeface="Pretendard" charset="0"/>
                       </a:endParaRPr>
                     </a:p>
                     <a:p>
@@ -5719,16 +5719,16 @@
                           <a:solidFill>
                             <a:srgbClr val="FFFFFF"/>
                           </a:solidFill>
-                          <a:latin typeface="맑은 고딕" pitchFamily="34" charset="0"/>
-                          <a:ea typeface="맑은 고딕" pitchFamily="34" charset="-122"/>
-                          <a:cs typeface="맑은 고딕" pitchFamily="34" charset="-120"/>
+                          <a:latin typeface="Pretendard" pitchFamily="34" charset="0"/>
+                          <a:ea typeface="Pretendard" pitchFamily="34" charset="-122"/>
+                          <a:cs typeface="Pretendard" pitchFamily="34" charset="-120"/>
                         </a:rPr>
                         <a:t>(CPG)</a:t>
                       </a:r>
                       <a:endParaRPr lang="en-US" sz="1100" dirty="0">
-                        <a:latin typeface="맑은 고딕" charset="0"/>
-                        <a:ea typeface="맑은 고딕" charset="0"/>
-                        <a:cs typeface="맑은 고딕" charset="0"/>
+                        <a:latin typeface="Pretendard" charset="0"/>
+                        <a:ea typeface="Pretendard" charset="0"/>
+                        <a:cs typeface="Pretendard" charset="0"/>
                       </a:endParaRPr>
                     </a:p>
                   </a:txBody>
@@ -5787,16 +5787,16 @@
                           <a:solidFill>
                             <a:srgbClr val="FFFFFF"/>
                           </a:solidFill>
-                          <a:latin typeface="맑은 고딕" pitchFamily="34" charset="0"/>
-                          <a:ea typeface="맑은 고딕" pitchFamily="34" charset="-122"/>
-                          <a:cs typeface="맑은 고딕" pitchFamily="34" charset="-120"/>
+                          <a:latin typeface="Pretendard" pitchFamily="34" charset="0"/>
+                          <a:ea typeface="Pretendard" pitchFamily="34" charset="-122"/>
+                          <a:cs typeface="Pretendard" pitchFamily="34" charset="-120"/>
                         </a:rPr>
                         <a:t>PGE₂</a:t>
                       </a:r>
                       <a:endParaRPr lang="en-US" sz="1100" dirty="0">
-                        <a:latin typeface="맑은 고딕" charset="0"/>
-                        <a:ea typeface="맑은 고딕" charset="0"/>
-                        <a:cs typeface="맑은 고딕" charset="0"/>
+                        <a:latin typeface="Pretendard" charset="0"/>
+                        <a:ea typeface="Pretendard" charset="0"/>
+                        <a:cs typeface="Pretendard" charset="0"/>
                       </a:endParaRPr>
                     </a:p>
                     <a:p>
@@ -5808,16 +5808,16 @@
                           <a:solidFill>
                             <a:srgbClr val="FFFFFF"/>
                           </a:solidFill>
-                          <a:latin typeface="맑은 고딕" pitchFamily="34" charset="0"/>
-                          <a:ea typeface="맑은 고딕" pitchFamily="34" charset="-122"/>
-                          <a:cs typeface="맑은 고딕" pitchFamily="34" charset="-120"/>
+                          <a:latin typeface="Pretendard" pitchFamily="34" charset="0"/>
+                          <a:ea typeface="Pretendard" pitchFamily="34" charset="-122"/>
+                          <a:cs typeface="Pretendard" pitchFamily="34" charset="-120"/>
                         </a:rPr>
                         <a:t>(PGE₂G)</a:t>
                       </a:r>
                       <a:endParaRPr lang="en-US" sz="1100" dirty="0">
-                        <a:latin typeface="맑은 고딕" charset="0"/>
-                        <a:ea typeface="맑은 고딕" charset="0"/>
-                        <a:cs typeface="맑은 고딕" charset="0"/>
+                        <a:latin typeface="Pretendard" charset="0"/>
+                        <a:ea typeface="Pretendard" charset="0"/>
+                        <a:cs typeface="Pretendard" charset="0"/>
                       </a:endParaRPr>
                     </a:p>
                   </a:txBody>
@@ -5876,16 +5876,16 @@
                           <a:solidFill>
                             <a:srgbClr val="FFFFFF"/>
                           </a:solidFill>
-                          <a:latin typeface="맑은 고딕" pitchFamily="34" charset="0"/>
-                          <a:ea typeface="맑은 고딕" pitchFamily="34" charset="-122"/>
-                          <a:cs typeface="맑은 고딕" pitchFamily="34" charset="-120"/>
+                          <a:latin typeface="Pretendard" pitchFamily="34" charset="0"/>
+                          <a:ea typeface="Pretendard" pitchFamily="34" charset="-122"/>
+                          <a:cs typeface="Pretendard" pitchFamily="34" charset="-120"/>
                         </a:rPr>
                         <a:t>비타민D</a:t>
                       </a:r>
                       <a:endParaRPr lang="en-US" sz="1100" dirty="0">
-                        <a:latin typeface="맑은 고딕" charset="0"/>
-                        <a:ea typeface="맑은 고딕" charset="0"/>
-                        <a:cs typeface="맑은 고딕" charset="0"/>
+                        <a:latin typeface="Pretendard" charset="0"/>
+                        <a:ea typeface="Pretendard" charset="0"/>
+                        <a:cs typeface="Pretendard" charset="0"/>
                       </a:endParaRPr>
                     </a:p>
                     <a:p>
@@ -5897,16 +5897,16 @@
                           <a:solidFill>
                             <a:srgbClr val="FFFFFF"/>
                           </a:solidFill>
-                          <a:latin typeface="맑은 고딕" pitchFamily="34" charset="0"/>
-                          <a:ea typeface="맑은 고딕" pitchFamily="34" charset="-122"/>
-                          <a:cs typeface="맑은 고딕" pitchFamily="34" charset="-120"/>
+                          <a:latin typeface="Pretendard" pitchFamily="34" charset="0"/>
+                          <a:ea typeface="Pretendard" pitchFamily="34" charset="-122"/>
+                          <a:cs typeface="Pretendard" pitchFamily="34" charset="-120"/>
                         </a:rPr>
                         <a:t>(VDG)</a:t>
                       </a:r>
                       <a:endParaRPr lang="en-US" sz="1100" dirty="0">
-                        <a:latin typeface="맑은 고딕" charset="0"/>
-                        <a:ea typeface="맑은 고딕" charset="0"/>
-                        <a:cs typeface="맑은 고딕" charset="0"/>
+                        <a:latin typeface="Pretendard" charset="0"/>
+                        <a:ea typeface="Pretendard" charset="0"/>
+                        <a:cs typeface="Pretendard" charset="0"/>
                       </a:endParaRPr>
                     </a:p>
                   </a:txBody>
@@ -5965,16 +5965,16 @@
                           <a:solidFill>
                             <a:srgbClr val="FFFFFF"/>
                           </a:solidFill>
-                          <a:latin typeface="맑은 고딕" pitchFamily="34" charset="0"/>
-                          <a:ea typeface="맑은 고딕" pitchFamily="34" charset="-122"/>
-                          <a:cs typeface="맑은 고딕" pitchFamily="34" charset="-120"/>
+                          <a:latin typeface="Pretendard" pitchFamily="34" charset="0"/>
+                          <a:ea typeface="Pretendard" pitchFamily="34" charset="-122"/>
+                          <a:cs typeface="Pretendard" pitchFamily="34" charset="-120"/>
                         </a:rPr>
                         <a:t>코르티코스테로이드</a:t>
                       </a:r>
                       <a:endParaRPr lang="en-US" sz="1100" dirty="0">
-                        <a:latin typeface="맑은 고딕" charset="0"/>
-                        <a:ea typeface="맑은 고딕" charset="0"/>
-                        <a:cs typeface="맑은 고딕" charset="0"/>
+                        <a:latin typeface="Pretendard" charset="0"/>
+                        <a:ea typeface="Pretendard" charset="0"/>
+                        <a:cs typeface="Pretendard" charset="0"/>
                       </a:endParaRPr>
                     </a:p>
                     <a:p>
@@ -5986,16 +5986,16 @@
                           <a:solidFill>
                             <a:srgbClr val="FFFFFF"/>
                           </a:solidFill>
-                          <a:latin typeface="맑은 고딕" pitchFamily="34" charset="0"/>
-                          <a:ea typeface="맑은 고딕" pitchFamily="34" charset="-122"/>
-                          <a:cs typeface="맑은 고딕" pitchFamily="34" charset="-120"/>
+                          <a:latin typeface="Pretendard" pitchFamily="34" charset="0"/>
+                          <a:ea typeface="Pretendard" pitchFamily="34" charset="-122"/>
+                          <a:cs typeface="Pretendard" pitchFamily="34" charset="-120"/>
                         </a:rPr>
                         <a:t>(COG)</a:t>
                       </a:r>
                       <a:endParaRPr lang="en-US" sz="1100" dirty="0">
-                        <a:latin typeface="맑은 고딕" charset="0"/>
-                        <a:ea typeface="맑은 고딕" charset="0"/>
-                        <a:cs typeface="맑은 고딕" charset="0"/>
+                        <a:latin typeface="Pretendard" charset="0"/>
+                        <a:ea typeface="Pretendard" charset="0"/>
+                        <a:cs typeface="Pretendard" charset="0"/>
                       </a:endParaRPr>
                     </a:p>
                   </a:txBody>
@@ -6056,16 +6056,16 @@
                           <a:solidFill>
                             <a:srgbClr val="16232E"/>
                           </a:solidFill>
-                          <a:latin typeface="맑은 고딕" pitchFamily="34" charset="0"/>
-                          <a:ea typeface="맑은 고딕" pitchFamily="34" charset="-122"/>
-                          <a:cs typeface="맑은 고딕" pitchFamily="34" charset="-120"/>
+                          <a:latin typeface="Pretendard" pitchFamily="34" charset="0"/>
+                          <a:ea typeface="Pretendard" pitchFamily="34" charset="-122"/>
+                          <a:cs typeface="Pretendard" pitchFamily="34" charset="-120"/>
                         </a:rPr>
                         <a:t>2주 재발량(T0 대비)</a:t>
                       </a:r>
                       <a:endParaRPr lang="en-US" sz="1100" dirty="0">
-                        <a:latin typeface="맑은 고딕" charset="0"/>
-                        <a:ea typeface="맑은 고딕" charset="0"/>
-                        <a:cs typeface="맑은 고딕" charset="0"/>
+                        <a:latin typeface="Pretendard" charset="0"/>
+                        <a:ea typeface="Pretendard" charset="0"/>
+                        <a:cs typeface="Pretendard" charset="0"/>
                       </a:endParaRPr>
                     </a:p>
                   </a:txBody>
@@ -6121,16 +6121,16 @@
                           <a:solidFill>
                             <a:srgbClr val="16232E"/>
                           </a:solidFill>
-                          <a:latin typeface="맑은 고딕" pitchFamily="34" charset="0"/>
-                          <a:ea typeface="맑은 고딕" pitchFamily="34" charset="-122"/>
-                          <a:cs typeface="맑은 고딕" pitchFamily="34" charset="-120"/>
+                          <a:latin typeface="Pretendard" pitchFamily="34" charset="0"/>
+                          <a:ea typeface="Pretendard" pitchFamily="34" charset="-122"/>
+                          <a:cs typeface="Pretendard" pitchFamily="34" charset="-120"/>
                         </a:rPr>
                         <a:t>-1.09 ± 0.17 mm</a:t>
                       </a:r>
                       <a:endParaRPr lang="en-US" sz="1100" dirty="0">
-                        <a:latin typeface="맑은 고딕" charset="0"/>
-                        <a:ea typeface="맑은 고딕" charset="0"/>
-                        <a:cs typeface="맑은 고딕" charset="0"/>
+                        <a:latin typeface="Pretendard" charset="0"/>
+                        <a:ea typeface="Pretendard" charset="0"/>
+                        <a:cs typeface="Pretendard" charset="0"/>
                       </a:endParaRPr>
                     </a:p>
                   </a:txBody>
@@ -6186,16 +6186,16 @@
                           <a:solidFill>
                             <a:srgbClr val="16232E"/>
                           </a:solidFill>
-                          <a:latin typeface="맑은 고딕" pitchFamily="34" charset="0"/>
-                          <a:ea typeface="맑은 고딕" pitchFamily="34" charset="-122"/>
-                          <a:cs typeface="맑은 고딕" pitchFamily="34" charset="-120"/>
+                          <a:latin typeface="Pretendard" pitchFamily="34" charset="0"/>
+                          <a:ea typeface="Pretendard" pitchFamily="34" charset="-122"/>
+                          <a:cs typeface="Pretendard" pitchFamily="34" charset="-120"/>
                         </a:rPr>
                         <a:t>-0.86 ± 0.23 mm</a:t>
                       </a:r>
                       <a:endParaRPr lang="en-US" sz="1100" dirty="0">
-                        <a:latin typeface="맑은 고딕" charset="0"/>
-                        <a:ea typeface="맑은 고딕" charset="0"/>
-                        <a:cs typeface="맑은 고딕" charset="0"/>
+                        <a:latin typeface="Pretendard" charset="0"/>
+                        <a:ea typeface="Pretendard" charset="0"/>
+                        <a:cs typeface="Pretendard" charset="0"/>
                       </a:endParaRPr>
                     </a:p>
                   </a:txBody>
@@ -6251,16 +6251,16 @@
                           <a:solidFill>
                             <a:srgbClr val="16232E"/>
                           </a:solidFill>
-                          <a:latin typeface="맑은 고딕" pitchFamily="34" charset="0"/>
-                          <a:ea typeface="맑은 고딕" pitchFamily="34" charset="-122"/>
-                          <a:cs typeface="맑은 고딕" pitchFamily="34" charset="-120"/>
+                          <a:latin typeface="Pretendard" pitchFamily="34" charset="0"/>
+                          <a:ea typeface="Pretendard" pitchFamily="34" charset="-122"/>
+                          <a:cs typeface="Pretendard" pitchFamily="34" charset="-120"/>
                         </a:rPr>
                         <a:t>-2.75 ± 0.15 mm</a:t>
                       </a:r>
                       <a:endParaRPr lang="en-US" sz="1100" dirty="0">
-                        <a:latin typeface="맑은 고딕" charset="0"/>
-                        <a:ea typeface="맑은 고딕" charset="0"/>
-                        <a:cs typeface="맑은 고딕" charset="0"/>
+                        <a:latin typeface="Pretendard" charset="0"/>
+                        <a:ea typeface="Pretendard" charset="0"/>
+                        <a:cs typeface="Pretendard" charset="0"/>
                       </a:endParaRPr>
                     </a:p>
                   </a:txBody>
@@ -6316,16 +6316,16 @@
                           <a:solidFill>
                             <a:srgbClr val="16232E"/>
                           </a:solidFill>
-                          <a:latin typeface="맑은 고딕" pitchFamily="34" charset="0"/>
-                          <a:ea typeface="맑은 고딕" pitchFamily="34" charset="-122"/>
-                          <a:cs typeface="맑은 고딕" pitchFamily="34" charset="-120"/>
+                          <a:latin typeface="Pretendard" pitchFamily="34" charset="0"/>
+                          <a:ea typeface="Pretendard" pitchFamily="34" charset="-122"/>
+                          <a:cs typeface="Pretendard" pitchFamily="34" charset="-120"/>
                         </a:rPr>
                         <a:t>-5.07 ± 0.87 mm</a:t>
                       </a:r>
                       <a:endParaRPr lang="en-US" sz="1100" dirty="0">
-                        <a:latin typeface="맑은 고딕" charset="0"/>
-                        <a:ea typeface="맑은 고딕" charset="0"/>
-                        <a:cs typeface="맑은 고딕" charset="0"/>
+                        <a:latin typeface="Pretendard" charset="0"/>
+                        <a:ea typeface="Pretendard" charset="0"/>
+                        <a:cs typeface="Pretendard" charset="0"/>
                       </a:endParaRPr>
                     </a:p>
                   </a:txBody>
@@ -6383,16 +6383,16 @@
                           <a:solidFill>
                             <a:srgbClr val="16232E"/>
                           </a:solidFill>
-                          <a:latin typeface="맑은 고딕" pitchFamily="34" charset="0"/>
-                          <a:ea typeface="맑은 고딕" pitchFamily="34" charset="-122"/>
-                          <a:cs typeface="맑은 고딕" pitchFamily="34" charset="-120"/>
+                          <a:latin typeface="Pretendard" pitchFamily="34" charset="0"/>
+                          <a:ea typeface="Pretendard" pitchFamily="34" charset="-122"/>
+                          <a:cs typeface="Pretendard" pitchFamily="34" charset="-120"/>
                         </a:rPr>
                         <a:t>원문 유의성 문자</a:t>
                       </a:r>
                       <a:endParaRPr lang="en-US" sz="1100" dirty="0">
-                        <a:latin typeface="맑은 고딕" charset="0"/>
-                        <a:ea typeface="맑은 고딕" charset="0"/>
-                        <a:cs typeface="맑은 고딕" charset="0"/>
+                        <a:latin typeface="Pretendard" charset="0"/>
+                        <a:ea typeface="Pretendard" charset="0"/>
+                        <a:cs typeface="Pretendard" charset="0"/>
                       </a:endParaRPr>
                     </a:p>
                   </a:txBody>
@@ -6448,16 +6448,16 @@
                           <a:solidFill>
                             <a:srgbClr val="16232E"/>
                           </a:solidFill>
-                          <a:latin typeface="맑은 고딕" pitchFamily="34" charset="0"/>
-                          <a:ea typeface="맑은 고딕" pitchFamily="34" charset="-122"/>
-                          <a:cs typeface="맑은 고딕" pitchFamily="34" charset="-120"/>
+                          <a:latin typeface="Pretendard" pitchFamily="34" charset="0"/>
+                          <a:ea typeface="Pretendard" pitchFamily="34" charset="-122"/>
+                          <a:cs typeface="Pretendard" pitchFamily="34" charset="-120"/>
                         </a:rPr>
                         <a:t>a</a:t>
                       </a:r>
                       <a:endParaRPr lang="en-US" sz="1100" dirty="0">
-                        <a:latin typeface="맑은 고딕" charset="0"/>
-                        <a:ea typeface="맑은 고딕" charset="0"/>
-                        <a:cs typeface="맑은 고딕" charset="0"/>
+                        <a:latin typeface="Pretendard" charset="0"/>
+                        <a:ea typeface="Pretendard" charset="0"/>
+                        <a:cs typeface="Pretendard" charset="0"/>
                       </a:endParaRPr>
                     </a:p>
                   </a:txBody>
@@ -6513,16 +6513,16 @@
                           <a:solidFill>
                             <a:srgbClr val="16232E"/>
                           </a:solidFill>
-                          <a:latin typeface="맑은 고딕" pitchFamily="34" charset="0"/>
-                          <a:ea typeface="맑은 고딕" pitchFamily="34" charset="-122"/>
-                          <a:cs typeface="맑은 고딕" pitchFamily="34" charset="-120"/>
+                          <a:latin typeface="Pretendard" pitchFamily="34" charset="0"/>
+                          <a:ea typeface="Pretendard" pitchFamily="34" charset="-122"/>
+                          <a:cs typeface="Pretendard" pitchFamily="34" charset="-120"/>
                         </a:rPr>
                         <a:t>a</a:t>
                       </a:r>
                       <a:endParaRPr lang="en-US" sz="1100" dirty="0">
-                        <a:latin typeface="맑은 고딕" charset="0"/>
-                        <a:ea typeface="맑은 고딕" charset="0"/>
-                        <a:cs typeface="맑은 고딕" charset="0"/>
+                        <a:latin typeface="Pretendard" charset="0"/>
+                        <a:ea typeface="Pretendard" charset="0"/>
+                        <a:cs typeface="Pretendard" charset="0"/>
                       </a:endParaRPr>
                     </a:p>
                   </a:txBody>
@@ -6578,16 +6578,16 @@
                           <a:solidFill>
                             <a:srgbClr val="16232E"/>
                           </a:solidFill>
-                          <a:latin typeface="맑은 고딕" pitchFamily="34" charset="0"/>
-                          <a:ea typeface="맑은 고딕" pitchFamily="34" charset="-122"/>
-                          <a:cs typeface="맑은 고딕" pitchFamily="34" charset="-120"/>
+                          <a:latin typeface="Pretendard" pitchFamily="34" charset="0"/>
+                          <a:ea typeface="Pretendard" pitchFamily="34" charset="-122"/>
+                          <a:cs typeface="Pretendard" pitchFamily="34" charset="-120"/>
                         </a:rPr>
                         <a:t>b</a:t>
                       </a:r>
                       <a:endParaRPr lang="en-US" sz="1100" dirty="0">
-                        <a:latin typeface="맑은 고딕" charset="0"/>
-                        <a:ea typeface="맑은 고딕" charset="0"/>
-                        <a:cs typeface="맑은 고딕" charset="0"/>
+                        <a:latin typeface="Pretendard" charset="0"/>
+                        <a:ea typeface="Pretendard" charset="0"/>
+                        <a:cs typeface="Pretendard" charset="0"/>
                       </a:endParaRPr>
                     </a:p>
                   </a:txBody>
@@ -6643,16 +6643,16 @@
                           <a:solidFill>
                             <a:srgbClr val="16232E"/>
                           </a:solidFill>
-                          <a:latin typeface="맑은 고딕" pitchFamily="34" charset="0"/>
-                          <a:ea typeface="맑은 고딕" pitchFamily="34" charset="-122"/>
-                          <a:cs typeface="맑은 고딕" pitchFamily="34" charset="-120"/>
+                          <a:latin typeface="Pretendard" pitchFamily="34" charset="0"/>
+                          <a:ea typeface="Pretendard" pitchFamily="34" charset="-122"/>
+                          <a:cs typeface="Pretendard" pitchFamily="34" charset="-120"/>
                         </a:rPr>
                         <a:t>c</a:t>
                       </a:r>
                       <a:endParaRPr lang="en-US" sz="1100" dirty="0">
-                        <a:latin typeface="맑은 고딕" charset="0"/>
-                        <a:ea typeface="맑은 고딕" charset="0"/>
-                        <a:cs typeface="맑은 고딕" charset="0"/>
+                        <a:latin typeface="Pretendard" charset="0"/>
+                        <a:ea typeface="Pretendard" charset="0"/>
+                        <a:cs typeface="Pretendard" charset="0"/>
                       </a:endParaRPr>
                     </a:p>
                   </a:txBody>
@@ -6729,9 +6729,9 @@
                 <a:solidFill>
                   <a:srgbClr val="5B6B7A"/>
                 </a:solidFill>
-                <a:latin typeface="맑은 고딕" pitchFamily="34" charset="0"/>
-                <a:ea typeface="맑은 고딕" pitchFamily="34" charset="-122"/>
-                <a:cs typeface="맑은 고딕" pitchFamily="34" charset="-120"/>
+                <a:latin typeface="Pretendard" pitchFamily="34" charset="0"/>
+                <a:ea typeface="Pretendard" pitchFamily="34" charset="-122"/>
+                <a:cs typeface="Pretendard" pitchFamily="34" charset="-120"/>
               </a:rPr>
               <a:t>※ 같은 문자(a, a) — 두 군간 통계적 유의차 없음 (Table III, Tukey post-hoc)</a:t>
             </a:r>
@@ -6800,9 +6800,9 @@
                 <a:solidFill>
                   <a:srgbClr val="1B4965"/>
                 </a:solidFill>
-                <a:latin typeface="맑은 고딕" pitchFamily="34" charset="0"/>
-                <a:ea typeface="맑은 고딕" pitchFamily="34" charset="-122"/>
-                <a:cs typeface="맑은 고딕" pitchFamily="34" charset="-120"/>
+                <a:latin typeface="Pretendard" pitchFamily="34" charset="0"/>
+                <a:ea typeface="Pretendard" pitchFamily="34" charset="-122"/>
+                <a:cs typeface="Pretendard" pitchFamily="34" charset="-120"/>
               </a:rPr>
               <a:t>핵심 수치  </a:t>
             </a:r>
@@ -6817,9 +6817,9 @@
                 <a:solidFill>
                   <a:srgbClr val="16232E"/>
                 </a:solidFill>
-                <a:latin typeface="맑은 고딕" pitchFamily="34" charset="0"/>
-                <a:ea typeface="맑은 고딕" pitchFamily="34" charset="-122"/>
-                <a:cs typeface="맑은 고딕" pitchFamily="34" charset="-120"/>
+                <a:latin typeface="Pretendard" pitchFamily="34" charset="0"/>
+                <a:ea typeface="Pretendard" pitchFamily="34" charset="-122"/>
+                <a:cs typeface="Pretendard" pitchFamily="34" charset="-120"/>
               </a:rPr>
               <a:t>양성대조 vs PGE2군의 2주 재발량 차이는 통계적으로 유의하지 않음(p = 0.605, Table III). 반면 비타민D·코르티코스테로이드는 서로 및 위 두 군과 모두 유의하게 다름(p &lt; 0.001).
 </a:t>
@@ -6835,9 +6835,9 @@
                 <a:solidFill>
                   <a:srgbClr val="1B4965"/>
                 </a:solidFill>
-                <a:latin typeface="맑은 고딕" pitchFamily="34" charset="0"/>
-                <a:ea typeface="맑은 고딕" pitchFamily="34" charset="-122"/>
-                <a:cs typeface="맑은 고딕" pitchFamily="34" charset="-120"/>
+                <a:latin typeface="Pretendard" pitchFamily="34" charset="0"/>
+                <a:ea typeface="Pretendard" pitchFamily="34" charset="-122"/>
+                <a:cs typeface="Pretendard" pitchFamily="34" charset="-120"/>
               </a:rPr>
               <a:t>통계적으로 유의미한 계층 구조  </a:t>
             </a:r>
@@ -6852,9 +6852,9 @@
                 <a:solidFill>
                   <a:srgbClr val="16232E"/>
                 </a:solidFill>
-                <a:latin typeface="맑은 고딕" pitchFamily="34" charset="0"/>
-                <a:ea typeface="맑은 고딕" pitchFamily="34" charset="-122"/>
-                <a:cs typeface="맑은 고딕" pitchFamily="34" charset="-120"/>
+                <a:latin typeface="Pretendard" pitchFamily="34" charset="0"/>
+                <a:ea typeface="Pretendard" pitchFamily="34" charset="-122"/>
+                <a:cs typeface="Pretendard" pitchFamily="34" charset="-120"/>
               </a:rPr>
               <a:t>{양성대조, PGE2} &lt; 비타민D &lt; 코르티코스테로이드 (재발 적은 순)
 </a:t>
@@ -6870,9 +6870,9 @@
                 <a:solidFill>
                   <a:srgbClr val="1B4965"/>
                 </a:solidFill>
-                <a:latin typeface="맑은 고딕" pitchFamily="34" charset="0"/>
-                <a:ea typeface="맑은 고딕" pitchFamily="34" charset="-122"/>
-                <a:cs typeface="맑은 고딕" pitchFamily="34" charset="-120"/>
+                <a:latin typeface="Pretendard" pitchFamily="34" charset="0"/>
+                <a:ea typeface="Pretendard" pitchFamily="34" charset="-122"/>
+                <a:cs typeface="Pretendard" pitchFamily="34" charset="-120"/>
               </a:rPr>
               <a:t>원문 서술 간 불일치 주의  </a:t>
             </a:r>
@@ -6887,9 +6887,9 @@
                 <a:solidFill>
                   <a:srgbClr val="16232E"/>
                 </a:solidFill>
-                <a:latin typeface="맑은 고딕" pitchFamily="34" charset="0"/>
-                <a:ea typeface="맑은 고딕" pitchFamily="34" charset="-122"/>
-                <a:cs typeface="맑은 고딕" pitchFamily="34" charset="-120"/>
+                <a:latin typeface="Pretendard" pitchFamily="34" charset="0"/>
+                <a:ea typeface="Pretendard" pitchFamily="34" charset="-122"/>
+                <a:cs typeface="Pretendard" pitchFamily="34" charset="-120"/>
               </a:rPr>
               <a:t>Results 본문·Conclusions는 "PGE2가 최소 재발"이라 서술하지만, Discussion 'Interpretation of findings'는 "대조군이 최소, 그 다음 PGE2"라 서술 — 둘 다 raw mean 순위와 통계적 유의성 서술을 혼용한 단순화이며, 정확한 결론은 위 표대로 '대조군·PGE2군 통계적 동률'이다.</a:t>
             </a:r>
@@ -6997,9 +6997,9 @@
                 <a:solidFill>
                   <a:srgbClr val="3D7EA6"/>
                 </a:solidFill>
-                <a:latin typeface="맑은 고딕" pitchFamily="34" charset="0"/>
-                <a:ea typeface="맑은 고딕" pitchFamily="34" charset="-122"/>
-                <a:cs typeface="맑은 고딕" pitchFamily="34" charset="-120"/>
+                <a:latin typeface="Pretendard" pitchFamily="34" charset="0"/>
+                <a:ea typeface="Pretendard" pitchFamily="34" charset="-122"/>
+                <a:cs typeface="Pretendard" pitchFamily="34" charset="-120"/>
               </a:rPr>
               <a:t>BACKGROUND</a:t>
             </a:r>
@@ -7036,9 +7036,9 @@
                 <a:solidFill>
                   <a:srgbClr val="1B4965"/>
                 </a:solidFill>
-                <a:latin typeface="맑은 고딕" pitchFamily="34" charset="0"/>
-                <a:ea typeface="맑은 고딕" pitchFamily="34" charset="-122"/>
-                <a:cs typeface="맑은 고딕" pitchFamily="34" charset="-120"/>
+                <a:latin typeface="Pretendard" pitchFamily="34" charset="0"/>
+                <a:ea typeface="Pretendard" pitchFamily="34" charset="-122"/>
+                <a:cs typeface="Pretendard" pitchFamily="34" charset="-120"/>
               </a:rPr>
               <a:t>교정 치아 이동 가속과 재발, 두 마리 토끼</a:t>
             </a:r>
@@ -7124,9 +7124,9 @@
                 <a:solidFill>
                   <a:srgbClr val="FFFFFF"/>
                 </a:solidFill>
-                <a:latin typeface="맑은 고딕" pitchFamily="34" charset="0"/>
-                <a:ea typeface="맑은 고딕" pitchFamily="34" charset="-122"/>
-                <a:cs typeface="맑은 고딕" pitchFamily="34" charset="-120"/>
+                <a:latin typeface="Pretendard" pitchFamily="34" charset="0"/>
+                <a:ea typeface="Pretendard" pitchFamily="34" charset="-122"/>
+                <a:cs typeface="Pretendard" pitchFamily="34" charset="-120"/>
               </a:rPr>
               <a:t>1</a:t>
             </a:r>
@@ -7163,9 +7163,9 @@
                 <a:solidFill>
                   <a:srgbClr val="16232E"/>
                 </a:solidFill>
-                <a:latin typeface="맑은 고딕" pitchFamily="34" charset="0"/>
-                <a:ea typeface="맑은 고딕" pitchFamily="34" charset="-122"/>
-                <a:cs typeface="맑은 고딕" pitchFamily="34" charset="-120"/>
+                <a:latin typeface="Pretendard" pitchFamily="34" charset="0"/>
+                <a:ea typeface="Pretendard" pitchFamily="34" charset="-122"/>
+                <a:cs typeface="Pretendard" pitchFamily="34" charset="-120"/>
               </a:rPr>
               <a:t>재발(relapse)과 고정력 상실</a:t>
             </a:r>
@@ -7202,9 +7202,9 @@
                 <a:solidFill>
                   <a:srgbClr val="5B6B7A"/>
                 </a:solidFill>
-                <a:latin typeface="맑은 고딕" pitchFamily="34" charset="0"/>
-                <a:ea typeface="맑은 고딕" pitchFamily="34" charset="-122"/>
-                <a:cs typeface="맑은 고딕" pitchFamily="34" charset="-120"/>
+                <a:latin typeface="Pretendard" pitchFamily="34" charset="0"/>
+                <a:ea typeface="Pretendard" pitchFamily="34" charset="-122"/>
+                <a:cs typeface="Pretendard" pitchFamily="34" charset="-120"/>
               </a:rPr>
               <a:t>교정 장치 제거 후 잔재 결합력이 풀리며 치아가 원래 위치로 되돌아가는 현상 — 원인은 아직 명확히 규명되지 않음</a:t>
             </a:r>
@@ -7290,9 +7290,9 @@
                 <a:solidFill>
                   <a:srgbClr val="FFFFFF"/>
                 </a:solidFill>
-                <a:latin typeface="맑은 고딕" pitchFamily="34" charset="0"/>
-                <a:ea typeface="맑은 고딕" pitchFamily="34" charset="-122"/>
-                <a:cs typeface="맑은 고딕" pitchFamily="34" charset="-120"/>
+                <a:latin typeface="Pretendard" pitchFamily="34" charset="0"/>
+                <a:ea typeface="Pretendard" pitchFamily="34" charset="-122"/>
+                <a:cs typeface="Pretendard" pitchFamily="34" charset="-120"/>
               </a:rPr>
               <a:t>2</a:t>
             </a:r>
@@ -7329,9 +7329,9 @@
                 <a:solidFill>
                   <a:srgbClr val="16232E"/>
                 </a:solidFill>
-                <a:latin typeface="맑은 고딕" pitchFamily="34" charset="0"/>
-                <a:ea typeface="맑은 고딕" pitchFamily="34" charset="-122"/>
-                <a:cs typeface="맑은 고딕" pitchFamily="34" charset="-120"/>
+                <a:latin typeface="Pretendard" pitchFamily="34" charset="0"/>
+                <a:ea typeface="Pretendard" pitchFamily="34" charset="-122"/>
+                <a:cs typeface="Pretendard" pitchFamily="34" charset="-120"/>
               </a:rPr>
               <a:t>치아 이동 가속의 필요성</a:t>
             </a:r>
@@ -7368,9 +7368,9 @@
                 <a:solidFill>
                   <a:srgbClr val="5B6B7A"/>
                 </a:solidFill>
-                <a:latin typeface="맑은 고딕" pitchFamily="34" charset="0"/>
-                <a:ea typeface="맑은 고딕" pitchFamily="34" charset="-122"/>
-                <a:cs typeface="맑은 고딕" pitchFamily="34" charset="-120"/>
+                <a:latin typeface="Pretendard" pitchFamily="34" charset="0"/>
+                <a:ea typeface="Pretendard" pitchFamily="34" charset="-122"/>
+                <a:cs typeface="Pretendard" pitchFamily="34" charset="-120"/>
               </a:rPr>
               <a:t>치료 기간 단축을 위해 수술적·기계적·약리학적 방법으로 치아 이동을 가속하는 연구가 활발 — 국소 주사·전신 투여 모두 시도됨</a:t>
             </a:r>
@@ -7456,9 +7456,9 @@
                 <a:solidFill>
                   <a:srgbClr val="FFFFFF"/>
                 </a:solidFill>
-                <a:latin typeface="맑은 고딕" pitchFamily="34" charset="0"/>
-                <a:ea typeface="맑은 고딕" pitchFamily="34" charset="-122"/>
-                <a:cs typeface="맑은 고딕" pitchFamily="34" charset="-120"/>
+                <a:latin typeface="Pretendard" pitchFamily="34" charset="0"/>
+                <a:ea typeface="Pretendard" pitchFamily="34" charset="-122"/>
+                <a:cs typeface="Pretendard" pitchFamily="34" charset="-120"/>
               </a:rPr>
               <a:t>3</a:t>
             </a:r>
@@ -7495,9 +7495,9 @@
                 <a:solidFill>
                   <a:srgbClr val="16232E"/>
                 </a:solidFill>
-                <a:latin typeface="맑은 고딕" pitchFamily="34" charset="0"/>
-                <a:ea typeface="맑은 고딕" pitchFamily="34" charset="-122"/>
-                <a:cs typeface="맑은 고딕" pitchFamily="34" charset="-120"/>
+                <a:latin typeface="Pretendard" pitchFamily="34" charset="0"/>
+                <a:ea typeface="Pretendard" pitchFamily="34" charset="-122"/>
+                <a:cs typeface="Pretendard" pitchFamily="34" charset="-120"/>
               </a:rPr>
               <a:t>미해결 과제</a:t>
             </a:r>
@@ -7534,9 +7534,9 @@
                 <a:solidFill>
                   <a:srgbClr val="5B6B7A"/>
                 </a:solidFill>
-                <a:latin typeface="맑은 고딕" pitchFamily="34" charset="0"/>
-                <a:ea typeface="맑은 고딕" pitchFamily="34" charset="-122"/>
-                <a:cs typeface="맑은 고딕" pitchFamily="34" charset="-120"/>
+                <a:latin typeface="Pretendard" pitchFamily="34" charset="0"/>
+                <a:ea typeface="Pretendard" pitchFamily="34" charset="-122"/>
+                <a:cs typeface="Pretendard" pitchFamily="34" charset="-120"/>
               </a:rPr>
               <a:t>가속 효과를 낸 약물들이 보정(retention) 후 재발에 어떤 영향을 주는지는 선행연구가 거의 없음 — 이 논문이 처음으로 3개 약물의 재발까지 비교</a:t>
             </a:r>
@@ -7644,9 +7644,9 @@
                 <a:solidFill>
                   <a:srgbClr val="3D7EA6"/>
                 </a:solidFill>
-                <a:latin typeface="맑은 고딕" pitchFamily="34" charset="0"/>
-                <a:ea typeface="맑은 고딕" pitchFamily="34" charset="-122"/>
-                <a:cs typeface="맑은 고딕" pitchFamily="34" charset="-120"/>
+                <a:latin typeface="Pretendard" pitchFamily="34" charset="0"/>
+                <a:ea typeface="Pretendard" pitchFamily="34" charset="-122"/>
+                <a:cs typeface="Pretendard" pitchFamily="34" charset="-120"/>
               </a:rPr>
               <a:t>MECHANISM</a:t>
             </a:r>
@@ -7683,9 +7683,9 @@
                 <a:solidFill>
                   <a:srgbClr val="1B4965"/>
                 </a:solidFill>
-                <a:latin typeface="맑은 고딕" pitchFamily="34" charset="0"/>
-                <a:ea typeface="맑은 고딕" pitchFamily="34" charset="-122"/>
-                <a:cs typeface="맑은 고딕" pitchFamily="34" charset="-120"/>
+                <a:latin typeface="Pretendard" pitchFamily="34" charset="0"/>
+                <a:ea typeface="Pretendard" pitchFamily="34" charset="-122"/>
+                <a:cs typeface="Pretendard" pitchFamily="34" charset="-120"/>
               </a:rPr>
               <a:t>약물별 파골세포 형성 경로</a:t>
             </a:r>
@@ -7773,9 +7773,9 @@
                 <a:solidFill>
                   <a:srgbClr val="FFFFFF"/>
                 </a:solidFill>
-                <a:latin typeface="맑은 고딕" pitchFamily="34" charset="0"/>
-                <a:ea typeface="맑은 고딕" pitchFamily="34" charset="-122"/>
-                <a:cs typeface="맑은 고딕" pitchFamily="34" charset="-120"/>
+                <a:latin typeface="Pretendard" pitchFamily="34" charset="0"/>
+                <a:ea typeface="Pretendard" pitchFamily="34" charset="-122"/>
+                <a:cs typeface="Pretendard" pitchFamily="34" charset="-120"/>
               </a:rPr>
               <a:t>코르티코스테로이드</a:t>
             </a:r>
@@ -7815,9 +7815,9 @@
                 <a:solidFill>
                   <a:srgbClr val="16232E"/>
                 </a:solidFill>
-                <a:latin typeface="맑은 고딕" pitchFamily="34" charset="0"/>
-                <a:ea typeface="맑은 고딕" pitchFamily="34" charset="-122"/>
-                <a:cs typeface="맑은 고딕" pitchFamily="34" charset="-120"/>
+                <a:latin typeface="Pretendard" pitchFamily="34" charset="0"/>
+                <a:ea typeface="Pretendard" pitchFamily="34" charset="-122"/>
+                <a:cs typeface="Pretendard" pitchFamily="34" charset="-120"/>
               </a:rPr>
               <a:t>세포질 수용체와 결합→이량체화→핵 이동,</a:t>
             </a:r>
@@ -7835,9 +7835,9 @@
                 <a:solidFill>
                   <a:srgbClr val="16232E"/>
                 </a:solidFill>
-                <a:latin typeface="맑은 고딕" pitchFamily="34" charset="0"/>
-                <a:ea typeface="맑은 고딕" pitchFamily="34" charset="-122"/>
-                <a:cs typeface="맑은 고딕" pitchFamily="34" charset="-120"/>
+                <a:latin typeface="Pretendard" pitchFamily="34" charset="0"/>
+                <a:ea typeface="Pretendard" pitchFamily="34" charset="-122"/>
+                <a:cs typeface="Pretendard" pitchFamily="34" charset="-120"/>
               </a:rPr>
               <a:t>COX-2 등 염증유전자 전사 억제 + 파골세포형성 직접 자극 + collagenase 활성 증가 (조골세포↓·파골세포↑)</a:t>
             </a:r>
@@ -7877,9 +7877,9 @@
                 <a:solidFill>
                   <a:srgbClr val="D97706"/>
                 </a:solidFill>
-                <a:latin typeface="맑은 고딕" pitchFamily="34" charset="0"/>
-                <a:ea typeface="맑은 고딕" pitchFamily="34" charset="-122"/>
-                <a:cs typeface="맑은 고딕" pitchFamily="34" charset="-120"/>
+                <a:latin typeface="Pretendard" pitchFamily="34" charset="0"/>
+                <a:ea typeface="Pretendard" pitchFamily="34" charset="-122"/>
+                <a:cs typeface="Pretendard" pitchFamily="34" charset="-120"/>
               </a:rPr>
               <a:t>→ 골흡수 강하게 촉진</a:t>
             </a:r>
@@ -7967,9 +7967,9 @@
                 <a:solidFill>
                   <a:srgbClr val="FFFFFF"/>
                 </a:solidFill>
-                <a:latin typeface="맑은 고딕" pitchFamily="34" charset="0"/>
-                <a:ea typeface="맑은 고딕" pitchFamily="34" charset="-122"/>
-                <a:cs typeface="맑은 고딕" pitchFamily="34" charset="-120"/>
+                <a:latin typeface="Pretendard" pitchFamily="34" charset="0"/>
+                <a:ea typeface="Pretendard" pitchFamily="34" charset="-122"/>
+                <a:cs typeface="Pretendard" pitchFamily="34" charset="-120"/>
               </a:rPr>
               <a:t>비타민D</a:t>
             </a:r>
@@ -8009,9 +8009,9 @@
                 <a:solidFill>
                   <a:srgbClr val="16232E"/>
                 </a:solidFill>
-                <a:latin typeface="맑은 고딕" pitchFamily="34" charset="0"/>
-                <a:ea typeface="맑은 고딕" pitchFamily="34" charset="-122"/>
-                <a:cs typeface="맑은 고딕" pitchFamily="34" charset="-120"/>
+                <a:latin typeface="Pretendard" pitchFamily="34" charset="0"/>
+                <a:ea typeface="Pretendard" pitchFamily="34" charset="-122"/>
+                <a:cs typeface="Pretendard" pitchFamily="34" charset="-120"/>
               </a:rPr>
               <a:t>비타민D수용체(VDR)와 결합</a:t>
             </a:r>
@@ -8029,9 +8029,9 @@
                 <a:solidFill>
                   <a:srgbClr val="16232E"/>
                 </a:solidFill>
-                <a:latin typeface="맑은 고딕" pitchFamily="34" charset="0"/>
-                <a:ea typeface="맑은 고딕" pitchFamily="34" charset="-122"/>
-                <a:cs typeface="맑은 고딕" pitchFamily="34" charset="-120"/>
+                <a:latin typeface="Pretendard" pitchFamily="34" charset="0"/>
+                <a:ea typeface="Pretendard" pitchFamily="34" charset="-122"/>
+                <a:cs typeface="Pretendard" pitchFamily="34" charset="-120"/>
               </a:rPr>
               <a:t>→ 표적 유전자 발현 조절로 파골세포 활성 자체를 증가시키고 면역 매개체를 조절</a:t>
             </a:r>
@@ -8071,9 +8071,9 @@
                 <a:solidFill>
                   <a:srgbClr val="3D7EA6"/>
                 </a:solidFill>
-                <a:latin typeface="맑은 고딕" pitchFamily="34" charset="0"/>
-                <a:ea typeface="맑은 고딕" pitchFamily="34" charset="-122"/>
-                <a:cs typeface="맑은 고딕" pitchFamily="34" charset="-120"/>
+                <a:latin typeface="Pretendard" pitchFamily="34" charset="0"/>
+                <a:ea typeface="Pretendard" pitchFamily="34" charset="-122"/>
+                <a:cs typeface="Pretendard" pitchFamily="34" charset="-120"/>
               </a:rPr>
               <a:t>→ 골개조 촉진</a:t>
             </a:r>
@@ -8091,9 +8091,9 @@
                 <a:solidFill>
                   <a:srgbClr val="3D7EA6"/>
                 </a:solidFill>
-                <a:latin typeface="맑은 고딕" pitchFamily="34" charset="0"/>
-                <a:ea typeface="맑은 고딕" pitchFamily="34" charset="-122"/>
-                <a:cs typeface="맑은 고딕" pitchFamily="34" charset="-120"/>
+                <a:latin typeface="Pretendard" pitchFamily="34" charset="0"/>
+                <a:ea typeface="Pretendard" pitchFamily="34" charset="-122"/>
+                <a:cs typeface="Pretendard" pitchFamily="34" charset="-120"/>
               </a:rPr>
               <a:t>+ osteocalcin·비타민D수용체 유전자 발현 관여</a:t>
             </a:r>
@@ -8181,9 +8181,9 @@
                 <a:solidFill>
                   <a:srgbClr val="FFFFFF"/>
                 </a:solidFill>
-                <a:latin typeface="맑은 고딕" pitchFamily="34" charset="0"/>
-                <a:ea typeface="맑은 고딕" pitchFamily="34" charset="-122"/>
-                <a:cs typeface="맑은 고딕" pitchFamily="34" charset="-120"/>
+                <a:latin typeface="Pretendard" pitchFamily="34" charset="0"/>
+                <a:ea typeface="Pretendard" pitchFamily="34" charset="-122"/>
+                <a:cs typeface="Pretendard" pitchFamily="34" charset="-120"/>
               </a:rPr>
               <a:t>PGE₂</a:t>
             </a:r>
@@ -8223,9 +8223,9 @@
                 <a:solidFill>
                   <a:srgbClr val="16232E"/>
                 </a:solidFill>
-                <a:latin typeface="맑은 고딕" pitchFamily="34" charset="0"/>
-                <a:ea typeface="맑은 고딕" pitchFamily="34" charset="-122"/>
-                <a:cs typeface="맑은 고딕" pitchFamily="34" charset="-120"/>
+                <a:latin typeface="Pretendard" pitchFamily="34" charset="0"/>
+                <a:ea typeface="Pretendard" pitchFamily="34" charset="-122"/>
+                <a:cs typeface="Pretendard" pitchFamily="34" charset="-120"/>
               </a:rPr>
               <a:t>(아라키돈산이 유도형 COX-2를 거쳐 PGE₂로 전환)</a:t>
             </a:r>
@@ -8243,9 +8243,9 @@
                 <a:solidFill>
                   <a:srgbClr val="16232E"/>
                 </a:solidFill>
-                <a:latin typeface="맑은 고딕" pitchFamily="34" charset="0"/>
-                <a:ea typeface="맑은 고딕" pitchFamily="34" charset="-122"/>
-                <a:cs typeface="맑은 고딕" pitchFamily="34" charset="-120"/>
+                <a:latin typeface="Pretendard" pitchFamily="34" charset="0"/>
+                <a:ea typeface="Pretendard" pitchFamily="34" charset="-122"/>
+                <a:cs typeface="Pretendard" pitchFamily="34" charset="-120"/>
               </a:rPr>
               <a:t>→ EP 수용체 통해 RANKL 발현 유도, 파골세포형성 자극 + 국소 골흡수 강화</a:t>
             </a:r>
@@ -8285,9 +8285,9 @@
                 <a:solidFill>
                   <a:srgbClr val="2F855A"/>
                 </a:solidFill>
-                <a:latin typeface="맑은 고딕" pitchFamily="34" charset="0"/>
-                <a:ea typeface="맑은 고딕" pitchFamily="34" charset="-122"/>
-                <a:cs typeface="맑은 고딕" pitchFamily="34" charset="-120"/>
+                <a:latin typeface="Pretendard" pitchFamily="34" charset="0"/>
+                <a:ea typeface="Pretendard" pitchFamily="34" charset="-122"/>
+                <a:cs typeface="Pretendard" pitchFamily="34" charset="-120"/>
               </a:rPr>
               <a:t>— 교정력에 의한 내인성 경로(COX→PGE2→RANKL)를 외부에서 직접 보충</a:t>
             </a:r>
@@ -8324,9 +8324,9 @@
                 <a:solidFill>
                   <a:srgbClr val="5B6B7A"/>
                 </a:solidFill>
-                <a:latin typeface="맑은 고딕" pitchFamily="34" charset="0"/>
-                <a:ea typeface="맑은 고딕" pitchFamily="34" charset="-122"/>
-                <a:cs typeface="맑은 고딕" pitchFamily="34" charset="-120"/>
+                <a:latin typeface="Pretendard" pitchFamily="34" charset="0"/>
+                <a:ea typeface="Pretendard" pitchFamily="34" charset="-122"/>
+                <a:cs typeface="Pretendard" pitchFamily="34" charset="-120"/>
               </a:rPr>
               <a:t>※ 세 약물 모두 '파골세포 활성화'를 유발하지만, 도달 경로가 서로 달라 가속 강도와 재발이 나타나는 양상이 다르다.</a:t>
             </a:r>
@@ -8434,9 +8434,9 @@
                 <a:solidFill>
                   <a:srgbClr val="D97706"/>
                 </a:solidFill>
-                <a:latin typeface="맑은 고딕" pitchFamily="34" charset="0"/>
-                <a:ea typeface="맑은 고딕" pitchFamily="34" charset="-122"/>
-                <a:cs typeface="맑은 고딕" pitchFamily="34" charset="-120"/>
+                <a:latin typeface="Pretendard" pitchFamily="34" charset="0"/>
+                <a:ea typeface="Pretendard" pitchFamily="34" charset="-122"/>
+                <a:cs typeface="Pretendard" pitchFamily="34" charset="-120"/>
               </a:rPr>
               <a:t>OBJECTIVE &amp; HYPOTHESIS</a:t>
             </a:r>
@@ -8473,9 +8473,9 @@
                 <a:solidFill>
                   <a:srgbClr val="FFFFFF"/>
                 </a:solidFill>
-                <a:latin typeface="맑은 고딕" pitchFamily="34" charset="0"/>
-                <a:ea typeface="맑은 고딕" pitchFamily="34" charset="-122"/>
-                <a:cs typeface="맑은 고딕" pitchFamily="34" charset="-120"/>
+                <a:latin typeface="Pretendard" pitchFamily="34" charset="0"/>
+                <a:ea typeface="Pretendard" pitchFamily="34" charset="-122"/>
+                <a:cs typeface="Pretendard" pitchFamily="34" charset="-120"/>
               </a:rPr>
               <a:t>연구 목적 및 가설</a:t>
             </a:r>
@@ -8541,9 +8541,9 @@
                 <a:solidFill>
                   <a:srgbClr val="D97706"/>
                 </a:solidFill>
-                <a:latin typeface="맑은 고딕" pitchFamily="34" charset="0"/>
-                <a:ea typeface="맑은 고딕" pitchFamily="34" charset="-122"/>
-                <a:cs typeface="맑은 고딕" pitchFamily="34" charset="-120"/>
+                <a:latin typeface="Pretendard" pitchFamily="34" charset="0"/>
+                <a:ea typeface="Pretendard" pitchFamily="34" charset="-122"/>
+                <a:cs typeface="Pretendard" pitchFamily="34" charset="-120"/>
               </a:rPr>
               <a:t>연구 목적</a:t>
             </a:r>
@@ -8583,9 +8583,9 @@
                 <a:solidFill>
                   <a:srgbClr val="16232E"/>
                 </a:solidFill>
-                <a:latin typeface="맑은 고딕" pitchFamily="34" charset="0"/>
-                <a:ea typeface="맑은 고딕" pitchFamily="34" charset="-122"/>
-                <a:cs typeface="맑은 고딕" pitchFamily="34" charset="-120"/>
+                <a:latin typeface="Pretendard" pitchFamily="34" charset="0"/>
+                <a:ea typeface="Pretendard" pitchFamily="34" charset="-122"/>
+                <a:cs typeface="Pretendard" pitchFamily="34" charset="-120"/>
               </a:rPr>
               <a:t>랫드 모델에서 코르티코스테로이드·비타민D·PGE₂의 국소(점막하) 주입이 교정 치아이동 가속 및 보정 후 재발에 미치는 영향을 비교한다.</a:t>
             </a:r>
@@ -8603,9 +8603,9 @@
                 <a:solidFill>
                   <a:srgbClr val="16232E"/>
                 </a:solidFill>
-                <a:latin typeface="맑은 고딕" pitchFamily="34" charset="0"/>
-                <a:ea typeface="맑은 고딕" pitchFamily="34" charset="-122"/>
-                <a:cs typeface="맑은 고딕" pitchFamily="34" charset="-120"/>
+                <a:latin typeface="Pretendard" pitchFamily="34" charset="0"/>
+                <a:ea typeface="Pretendard" pitchFamily="34" charset="-122"/>
+                <a:cs typeface="Pretendard" pitchFamily="34" charset="-120"/>
               </a:rPr>
               <a:t>귀무가설(H0): 세 약물 간 가속기·재발기 효과에 차이가 없다.</a:t>
             </a:r>
@@ -8664,9 +8664,9 @@
                 <a:solidFill>
                   <a:srgbClr val="102C3A"/>
                 </a:solidFill>
-                <a:latin typeface="맑은 고딕" pitchFamily="34" charset="0"/>
-                <a:ea typeface="맑은 고딕" pitchFamily="34" charset="-122"/>
-                <a:cs typeface="맑은 고딕" pitchFamily="34" charset="-120"/>
+                <a:latin typeface="Pretendard" pitchFamily="34" charset="0"/>
+                <a:ea typeface="Pretendard" pitchFamily="34" charset="-122"/>
+                <a:cs typeface="Pretendard" pitchFamily="34" charset="-120"/>
               </a:rPr>
               <a:t>가설 (H1) — 발표자 재구성</a:t>
             </a:r>
@@ -8706,9 +8706,9 @@
                 <a:solidFill>
                   <a:srgbClr val="102C3A"/>
                 </a:solidFill>
-                <a:latin typeface="맑은 고딕" pitchFamily="34" charset="0"/>
-                <a:ea typeface="맑은 고딕" pitchFamily="34" charset="-122"/>
-                <a:cs typeface="맑은 고딕" pitchFamily="34" charset="-120"/>
+                <a:latin typeface="Pretendard" pitchFamily="34" charset="0"/>
+                <a:ea typeface="Pretendard" pitchFamily="34" charset="-122"/>
+                <a:cs typeface="Pretendard" pitchFamily="34" charset="-120"/>
               </a:rPr>
               <a:t>세 약물 모두 대조군보다 치아이동을 가속하되, 가속 정도가 큰 약물일수록 보정 후 재발량도 클 것이다 (가속–재발 트레이드오프).</a:t>
             </a:r>
@@ -8816,9 +8816,9 @@
                 <a:solidFill>
                   <a:srgbClr val="3D7EA6"/>
                 </a:solidFill>
-                <a:latin typeface="맑은 고딕" pitchFamily="34" charset="0"/>
-                <a:ea typeface="맑은 고딕" pitchFamily="34" charset="-122"/>
-                <a:cs typeface="맑은 고딕" pitchFamily="34" charset="-120"/>
+                <a:latin typeface="Pretendard" pitchFamily="34" charset="0"/>
+                <a:ea typeface="Pretendard" pitchFamily="34" charset="-122"/>
+                <a:cs typeface="Pretendard" pitchFamily="34" charset="-120"/>
               </a:rPr>
               <a:t>METHODS</a:t>
             </a:r>
@@ -8855,9 +8855,9 @@
                 <a:solidFill>
                   <a:srgbClr val="1B4965"/>
                 </a:solidFill>
-                <a:latin typeface="맑은 고딕" pitchFamily="34" charset="0"/>
-                <a:ea typeface="맑은 고딕" pitchFamily="34" charset="-122"/>
-                <a:cs typeface="맑은 고딕" pitchFamily="34" charset="-120"/>
+                <a:latin typeface="Pretendard" pitchFamily="34" charset="0"/>
+                <a:ea typeface="Pretendard" pitchFamily="34" charset="-122"/>
+                <a:cs typeface="Pretendard" pitchFamily="34" charset="-120"/>
               </a:rPr>
               <a:t>5군 랫드 모델 — 4주 가속 + 2주 보정 + 2주 재발</a:t>
             </a:r>
@@ -8923,9 +8923,9 @@
                 <a:solidFill>
                   <a:srgbClr val="1B4965"/>
                 </a:solidFill>
-                <a:latin typeface="맑은 고딕" pitchFamily="34" charset="0"/>
-                <a:ea typeface="맑은 고딕" pitchFamily="34" charset="-122"/>
-                <a:cs typeface="맑은 고딕" pitchFamily="34" charset="-120"/>
+                <a:latin typeface="Pretendard" pitchFamily="34" charset="0"/>
+                <a:ea typeface="Pretendard" pitchFamily="34" charset="-122"/>
+                <a:cs typeface="Pretendard" pitchFamily="34" charset="-120"/>
               </a:rPr>
               <a:t>설계</a:t>
             </a:r>
@@ -8965,9 +8965,9 @@
                 <a:solidFill>
                   <a:srgbClr val="16232E"/>
                 </a:solidFill>
-                <a:latin typeface="맑은 고딕" pitchFamily="34" charset="0"/>
-                <a:ea typeface="맑은 고딕" pitchFamily="34" charset="-122"/>
-                <a:cs typeface="맑은 고딕" pitchFamily="34" charset="-120"/>
+                <a:latin typeface="Pretendard" pitchFamily="34" charset="0"/>
+                <a:ea typeface="Pretendard" pitchFamily="34" charset="-122"/>
+                <a:cs typeface="Pretendard" pitchFamily="34" charset="-120"/>
               </a:rPr>
               <a:t>•  무작위배정, 눈가림(2번째 저자가 배정)— 최종 배정 후엔 주 연구자 1인이 개입·측정·평가 전부 수행</a:t>
             </a:r>
@@ -8985,9 +8985,9 @@
                 <a:solidFill>
                   <a:srgbClr val="16232E"/>
                 </a:solidFill>
-                <a:latin typeface="맑은 고딕" pitchFamily="34" charset="0"/>
-                <a:ea typeface="맑은 고딕" pitchFamily="34" charset="-122"/>
-                <a:cs typeface="맑은 고딕" pitchFamily="34" charset="-120"/>
+                <a:latin typeface="Pretendard" pitchFamily="34" charset="0"/>
+                <a:ea typeface="Pretendard" pitchFamily="34" charset="-122"/>
+                <a:cs typeface="Pretendard" pitchFamily="34" charset="-120"/>
               </a:rPr>
               <a:t>•  Sprague–Dawley 랫드 105마리(수컷, 6–12주령) → 5군, 군당 21마리</a:t>
             </a:r>
@@ -9005,9 +9005,9 @@
                 <a:solidFill>
                   <a:srgbClr val="16232E"/>
                 </a:solidFill>
-                <a:latin typeface="맑은 고딕" pitchFamily="34" charset="0"/>
-                <a:ea typeface="맑은 고딕" pitchFamily="34" charset="-122"/>
-                <a:cs typeface="맑은 고딕" pitchFamily="34" charset="-120"/>
+                <a:latin typeface="Pretendard" pitchFamily="34" charset="0"/>
+                <a:ea typeface="Pretendard" pitchFamily="34" charset="-122"/>
+                <a:cs typeface="Pretendard" pitchFamily="34" charset="-120"/>
               </a:rPr>
               <a:t>•  장치: 상악 절치 사이 스테인리스 open-coil loop, 25g 힘, tipping 이동</a:t>
             </a:r>
@@ -9025,9 +9025,9 @@
                 <a:solidFill>
                   <a:srgbClr val="16232E"/>
                 </a:solidFill>
-                <a:latin typeface="맑은 고딕" pitchFamily="34" charset="0"/>
-                <a:ea typeface="맑은 고딕" pitchFamily="34" charset="-122"/>
-                <a:cs typeface="맑은 고딕" pitchFamily="34" charset="-120"/>
+                <a:latin typeface="Pretendard" pitchFamily="34" charset="0"/>
+                <a:ea typeface="Pretendard" pitchFamily="34" charset="-122"/>
+                <a:cs typeface="Pretendard" pitchFamily="34" charset="-120"/>
               </a:rPr>
               <a:t>•  측정: 디지털 캘리퍼(0.01mm)로 절치 간 거리</a:t>
             </a:r>
@@ -9086,9 +9086,9 @@
                 <a:solidFill>
                   <a:srgbClr val="FFFFFF"/>
                 </a:solidFill>
-                <a:latin typeface="맑은 고딕" pitchFamily="34" charset="0"/>
-                <a:ea typeface="맑은 고딕" pitchFamily="34" charset="-122"/>
-                <a:cs typeface="맑은 고딕" pitchFamily="34" charset="-120"/>
+                <a:latin typeface="Pretendard" pitchFamily="34" charset="0"/>
+                <a:ea typeface="Pretendard" pitchFamily="34" charset="-122"/>
+                <a:cs typeface="Pretendard" pitchFamily="34" charset="-120"/>
               </a:rPr>
               <a:t>I</a:t>
             </a:r>
@@ -9125,9 +9125,9 @@
                 <a:solidFill>
                   <a:srgbClr val="16232E"/>
                 </a:solidFill>
-                <a:latin typeface="맑은 고딕" pitchFamily="34" charset="0"/>
-                <a:ea typeface="맑은 고딕" pitchFamily="34" charset="-122"/>
-                <a:cs typeface="맑은 고딕" pitchFamily="34" charset="-120"/>
+                <a:latin typeface="Pretendard" pitchFamily="34" charset="0"/>
+                <a:ea typeface="Pretendard" pitchFamily="34" charset="-122"/>
+                <a:cs typeface="Pretendard" pitchFamily="34" charset="-120"/>
               </a:rPr>
               <a:t>음성대조</a:t>
             </a:r>
@@ -9164,9 +9164,9 @@
                 <a:solidFill>
                   <a:srgbClr val="5B6B7A"/>
                 </a:solidFill>
-                <a:latin typeface="맑은 고딕" pitchFamily="34" charset="0"/>
-                <a:ea typeface="맑은 고딕" pitchFamily="34" charset="-122"/>
-                <a:cs typeface="맑은 고딕" pitchFamily="34" charset="-120"/>
+                <a:latin typeface="Pretendard" pitchFamily="34" charset="0"/>
+                <a:ea typeface="Pretendard" pitchFamily="34" charset="-122"/>
+                <a:cs typeface="Pretendard" pitchFamily="34" charset="-120"/>
               </a:rPr>
               <a:t>무처치, OTM 없음</a:t>
             </a:r>
@@ -9225,9 +9225,9 @@
                 <a:solidFill>
                   <a:srgbClr val="FFFFFF"/>
                 </a:solidFill>
-                <a:latin typeface="맑은 고딕" pitchFamily="34" charset="0"/>
-                <a:ea typeface="맑은 고딕" pitchFamily="34" charset="-122"/>
-                <a:cs typeface="맑은 고딕" pitchFamily="34" charset="-120"/>
+                <a:latin typeface="Pretendard" pitchFamily="34" charset="0"/>
+                <a:ea typeface="Pretendard" pitchFamily="34" charset="-122"/>
+                <a:cs typeface="Pretendard" pitchFamily="34" charset="-120"/>
               </a:rPr>
               <a:t>II</a:t>
             </a:r>
@@ -9264,9 +9264,9 @@
                 <a:solidFill>
                   <a:srgbClr val="16232E"/>
                 </a:solidFill>
-                <a:latin typeface="맑은 고딕" pitchFamily="34" charset="0"/>
-                <a:ea typeface="맑은 고딕" pitchFamily="34" charset="-122"/>
-                <a:cs typeface="맑은 고딕" pitchFamily="34" charset="-120"/>
+                <a:latin typeface="Pretendard" pitchFamily="34" charset="0"/>
+                <a:ea typeface="Pretendard" pitchFamily="34" charset="-122"/>
+                <a:cs typeface="Pretendard" pitchFamily="34" charset="-120"/>
               </a:rPr>
               <a:t>양성대조(CPG)</a:t>
             </a:r>
@@ -9303,9 +9303,9 @@
                 <a:solidFill>
                   <a:srgbClr val="5B6B7A"/>
                 </a:solidFill>
-                <a:latin typeface="맑은 고딕" pitchFamily="34" charset="0"/>
-                <a:ea typeface="맑은 고딕" pitchFamily="34" charset="-122"/>
-                <a:cs typeface="맑은 고딕" pitchFamily="34" charset="-120"/>
+                <a:latin typeface="Pretendard" pitchFamily="34" charset="0"/>
+                <a:ea typeface="Pretendard" pitchFamily="34" charset="-122"/>
+                <a:cs typeface="Pretendard" pitchFamily="34" charset="-120"/>
               </a:rPr>
               <a:t>OTM만, 약물 없음</a:t>
             </a:r>
@@ -9364,9 +9364,9 @@
                 <a:solidFill>
                   <a:srgbClr val="FFFFFF"/>
                 </a:solidFill>
-                <a:latin typeface="맑은 고딕" pitchFamily="34" charset="0"/>
-                <a:ea typeface="맑은 고딕" pitchFamily="34" charset="-122"/>
-                <a:cs typeface="맑은 고딕" pitchFamily="34" charset="-120"/>
+                <a:latin typeface="Pretendard" pitchFamily="34" charset="0"/>
+                <a:ea typeface="Pretendard" pitchFamily="34" charset="-122"/>
+                <a:cs typeface="Pretendard" pitchFamily="34" charset="-120"/>
               </a:rPr>
               <a:t>III</a:t>
             </a:r>
@@ -9403,9 +9403,9 @@
                 <a:solidFill>
                   <a:srgbClr val="16232E"/>
                 </a:solidFill>
-                <a:latin typeface="맑은 고딕" pitchFamily="34" charset="0"/>
-                <a:ea typeface="맑은 고딕" pitchFamily="34" charset="-122"/>
-                <a:cs typeface="맑은 고딕" pitchFamily="34" charset="-120"/>
+                <a:latin typeface="Pretendard" pitchFamily="34" charset="0"/>
+                <a:ea typeface="Pretendard" pitchFamily="34" charset="-122"/>
+                <a:cs typeface="Pretendard" pitchFamily="34" charset="-120"/>
               </a:rPr>
               <a:t>코르티코스테로이드(COG)</a:t>
             </a:r>
@@ -9442,9 +9442,9 @@
                 <a:solidFill>
                   <a:srgbClr val="5B6B7A"/>
                 </a:solidFill>
-                <a:latin typeface="맑은 고딕" pitchFamily="34" charset="0"/>
-                <a:ea typeface="맑은 고딕" pitchFamily="34" charset="-122"/>
-                <a:cs typeface="맑은 고딕" pitchFamily="34" charset="-120"/>
+                <a:latin typeface="Pretendard" pitchFamily="34" charset="0"/>
+                <a:ea typeface="Pretendard" pitchFamily="34" charset="-122"/>
+                <a:cs typeface="Pretendard" pitchFamily="34" charset="-120"/>
               </a:rPr>
               <a:t>50µL 8mg/kg, 매일 주입</a:t>
             </a:r>
@@ -9503,9 +9503,9 @@
                 <a:solidFill>
                   <a:srgbClr val="FFFFFF"/>
                 </a:solidFill>
-                <a:latin typeface="맑은 고딕" pitchFamily="34" charset="0"/>
-                <a:ea typeface="맑은 고딕" pitchFamily="34" charset="-122"/>
-                <a:cs typeface="맑은 고딕" pitchFamily="34" charset="-120"/>
+                <a:latin typeface="Pretendard" pitchFamily="34" charset="0"/>
+                <a:ea typeface="Pretendard" pitchFamily="34" charset="-122"/>
+                <a:cs typeface="Pretendard" pitchFamily="34" charset="-120"/>
               </a:rPr>
               <a:t>IV</a:t>
             </a:r>
@@ -9542,9 +9542,9 @@
                 <a:solidFill>
                   <a:srgbClr val="16232E"/>
                 </a:solidFill>
-                <a:latin typeface="맑은 고딕" pitchFamily="34" charset="0"/>
-                <a:ea typeface="맑은 고딕" pitchFamily="34" charset="-122"/>
-                <a:cs typeface="맑은 고딕" pitchFamily="34" charset="-120"/>
+                <a:latin typeface="Pretendard" pitchFamily="34" charset="0"/>
+                <a:ea typeface="Pretendard" pitchFamily="34" charset="-122"/>
+                <a:cs typeface="Pretendard" pitchFamily="34" charset="-120"/>
               </a:rPr>
               <a:t>비타민D(VDG)</a:t>
             </a:r>
@@ -9581,9 +9581,9 @@
                 <a:solidFill>
                   <a:srgbClr val="5B6B7A"/>
                 </a:solidFill>
-                <a:latin typeface="맑은 고딕" pitchFamily="34" charset="0"/>
-                <a:ea typeface="맑은 고딕" pitchFamily="34" charset="-122"/>
-                <a:cs typeface="맑은 고딕" pitchFamily="34" charset="-120"/>
+                <a:latin typeface="Pretendard" pitchFamily="34" charset="0"/>
+                <a:ea typeface="Pretendard" pitchFamily="34" charset="-122"/>
+                <a:cs typeface="Pretendard" pitchFamily="34" charset="-120"/>
               </a:rPr>
               <a:t>20µL 10⁻¹⁰mol/L, 3일마다 주입</a:t>
             </a:r>
@@ -9642,9 +9642,9 @@
                 <a:solidFill>
                   <a:srgbClr val="FFFFFF"/>
                 </a:solidFill>
-                <a:latin typeface="맑은 고딕" pitchFamily="34" charset="0"/>
-                <a:ea typeface="맑은 고딕" pitchFamily="34" charset="-122"/>
-                <a:cs typeface="맑은 고딕" pitchFamily="34" charset="-120"/>
+                <a:latin typeface="Pretendard" pitchFamily="34" charset="0"/>
+                <a:ea typeface="Pretendard" pitchFamily="34" charset="-122"/>
+                <a:cs typeface="Pretendard" pitchFamily="34" charset="-120"/>
               </a:rPr>
               <a:t>V</a:t>
             </a:r>
@@ -9681,9 +9681,9 @@
                 <a:solidFill>
                   <a:srgbClr val="16232E"/>
                 </a:solidFill>
-                <a:latin typeface="맑은 고딕" pitchFamily="34" charset="0"/>
-                <a:ea typeface="맑은 고딕" pitchFamily="34" charset="-122"/>
-                <a:cs typeface="맑은 고딕" pitchFamily="34" charset="-120"/>
+                <a:latin typeface="Pretendard" pitchFamily="34" charset="0"/>
+                <a:ea typeface="Pretendard" pitchFamily="34" charset="-122"/>
+                <a:cs typeface="Pretendard" pitchFamily="34" charset="-120"/>
               </a:rPr>
               <a:t>PGE₂(PGE₂G)</a:t>
             </a:r>
@@ -9720,9 +9720,9 @@
                 <a:solidFill>
                   <a:srgbClr val="5B6B7A"/>
                 </a:solidFill>
-                <a:latin typeface="맑은 고딕" pitchFamily="34" charset="0"/>
-                <a:ea typeface="맑은 고딕" pitchFamily="34" charset="-122"/>
-                <a:cs typeface="맑은 고딕" pitchFamily="34" charset="-120"/>
+                <a:latin typeface="Pretendard" pitchFamily="34" charset="0"/>
+                <a:ea typeface="Pretendard" pitchFamily="34" charset="-122"/>
+                <a:cs typeface="Pretendard" pitchFamily="34" charset="-120"/>
               </a:rPr>
               <a:t>0.1µg/0.1mL, 매주 주입</a:t>
             </a:r>
@@ -9804,9 +9804,9 @@
                 <a:solidFill>
                   <a:srgbClr val="5B6B7A"/>
                 </a:solidFill>
-                <a:latin typeface="맑은 고딕" pitchFamily="34" charset="0"/>
-                <a:ea typeface="맑은 고딕" pitchFamily="34" charset="-122"/>
-                <a:cs typeface="맑은 고딕" pitchFamily="34" charset="-120"/>
+                <a:latin typeface="Pretendard" pitchFamily="34" charset="0"/>
+                <a:ea typeface="Pretendard" pitchFamily="34" charset="-122"/>
+                <a:cs typeface="Pretendard" pitchFamily="34" charset="-120"/>
               </a:rPr>
               <a:t>Figure 1 원문 — Orthodontic loop in place</a:t>
             </a:r>
@@ -9914,9 +9914,9 @@
                 <a:solidFill>
                   <a:srgbClr val="3D7EA6"/>
                 </a:solidFill>
-                <a:latin typeface="맑은 고딕" pitchFamily="34" charset="0"/>
-                <a:ea typeface="맑은 고딕" pitchFamily="34" charset="-122"/>
-                <a:cs typeface="맑은 고딕" pitchFamily="34" charset="-120"/>
+                <a:latin typeface="Pretendard" pitchFamily="34" charset="0"/>
+                <a:ea typeface="Pretendard" pitchFamily="34" charset="-122"/>
+                <a:cs typeface="Pretendard" pitchFamily="34" charset="-120"/>
               </a:rPr>
               <a:t>STATISTICS 101</a:t>
             </a:r>
@@ -9953,9 +9953,9 @@
                 <a:solidFill>
                   <a:srgbClr val="1B4965"/>
                 </a:solidFill>
-                <a:latin typeface="맑은 고딕" pitchFamily="34" charset="0"/>
-                <a:ea typeface="맑은 고딕" pitchFamily="34" charset="-122"/>
-                <a:cs typeface="맑은 고딕" pitchFamily="34" charset="-120"/>
+                <a:latin typeface="Pretendard" pitchFamily="34" charset="0"/>
+                <a:ea typeface="Pretendard" pitchFamily="34" charset="-122"/>
+                <a:cs typeface="Pretendard" pitchFamily="34" charset="-120"/>
               </a:rPr>
               <a:t>이 논문은 어떻게 통계로 검증했나</a:t>
             </a:r>
@@ -10043,9 +10043,9 @@
                 <a:solidFill>
                   <a:srgbClr val="FFFFFF"/>
                 </a:solidFill>
-                <a:latin typeface="맑은 고딕" pitchFamily="34" charset="0"/>
-                <a:ea typeface="맑은 고딕" pitchFamily="34" charset="-122"/>
-                <a:cs typeface="맑은 고딕" pitchFamily="34" charset="-120"/>
+                <a:latin typeface="Pretendard" pitchFamily="34" charset="0"/>
+                <a:ea typeface="Pretendard" pitchFamily="34" charset="-122"/>
+                <a:cs typeface="Pretendard" pitchFamily="34" charset="-120"/>
               </a:rPr>
               <a:t>Shapiro–Wilk 검정</a:t>
             </a:r>
@@ -10082,9 +10082,9 @@
                 <a:solidFill>
                   <a:srgbClr val="FFFFFF"/>
                 </a:solidFill>
-                <a:latin typeface="맑은 고딕" pitchFamily="34" charset="0"/>
-                <a:ea typeface="맑은 고딕" pitchFamily="34" charset="-122"/>
-                <a:cs typeface="맑은 고딕" pitchFamily="34" charset="-120"/>
+                <a:latin typeface="Pretendard" pitchFamily="34" charset="0"/>
+                <a:ea typeface="Pretendard" pitchFamily="34" charset="-122"/>
+                <a:cs typeface="Pretendard" pitchFamily="34" charset="-120"/>
               </a:rPr>
               <a:t>정규성 검정</a:t>
             </a:r>
@@ -10124,9 +10124,9 @@
                 <a:solidFill>
                   <a:srgbClr val="16232E"/>
                 </a:solidFill>
-                <a:latin typeface="맑은 고딕" pitchFamily="34" charset="0"/>
-                <a:ea typeface="맑은 고딕" pitchFamily="34" charset="-122"/>
-                <a:cs typeface="맑은 고딕" pitchFamily="34" charset="-120"/>
+                <a:latin typeface="Pretendard" pitchFamily="34" charset="0"/>
+                <a:ea typeface="Pretendard" pitchFamily="34" charset="-122"/>
+                <a:cs typeface="Pretendard" pitchFamily="34" charset="-120"/>
               </a:rPr>
               <a:t>데이터의 정규 분포성 확인</a:t>
             </a:r>
@@ -10144,9 +10144,9 @@
                 <a:solidFill>
                   <a:srgbClr val="16232E"/>
                 </a:solidFill>
-                <a:latin typeface="맑은 고딕" pitchFamily="34" charset="0"/>
-                <a:ea typeface="맑은 고딕" pitchFamily="34" charset="-122"/>
-                <a:cs typeface="맑은 고딕" pitchFamily="34" charset="-120"/>
+                <a:latin typeface="Pretendard" pitchFamily="34" charset="0"/>
+                <a:ea typeface="Pretendard" pitchFamily="34" charset="-122"/>
+                <a:cs typeface="Pretendard" pitchFamily="34" charset="-120"/>
               </a:rPr>
               <a:t>▷ ANOVA 등 모수적 검정 가능</a:t>
             </a:r>
@@ -10234,9 +10234,9 @@
                 <a:solidFill>
                   <a:srgbClr val="FFFFFF"/>
                 </a:solidFill>
-                <a:latin typeface="맑은 고딕" pitchFamily="34" charset="0"/>
-                <a:ea typeface="맑은 고딕" pitchFamily="34" charset="-122"/>
-                <a:cs typeface="맑은 고딕" pitchFamily="34" charset="-120"/>
+                <a:latin typeface="Pretendard" pitchFamily="34" charset="0"/>
+                <a:ea typeface="Pretendard" pitchFamily="34" charset="-122"/>
+                <a:cs typeface="Pretendard" pitchFamily="34" charset="-120"/>
               </a:rPr>
               <a:t>One-way ANOVA</a:t>
             </a:r>
@@ -10273,9 +10273,9 @@
                 <a:solidFill>
                   <a:srgbClr val="FFFFFF"/>
                 </a:solidFill>
-                <a:latin typeface="맑은 고딕" pitchFamily="34" charset="0"/>
-                <a:ea typeface="맑은 고딕" pitchFamily="34" charset="-122"/>
-                <a:cs typeface="맑은 고딕" pitchFamily="34" charset="-120"/>
+                <a:latin typeface="Pretendard" pitchFamily="34" charset="0"/>
+                <a:ea typeface="Pretendard" pitchFamily="34" charset="-122"/>
+                <a:cs typeface="Pretendard" pitchFamily="34" charset="-120"/>
               </a:rPr>
               <a:t>일원분산분석</a:t>
             </a:r>
@@ -10315,9 +10315,9 @@
                 <a:solidFill>
                   <a:srgbClr val="16232E"/>
                 </a:solidFill>
-                <a:latin typeface="맑은 고딕" pitchFamily="34" charset="0"/>
-                <a:ea typeface="맑은 고딕" pitchFamily="34" charset="-122"/>
-                <a:cs typeface="맑은 고딕" pitchFamily="34" charset="-120"/>
+                <a:latin typeface="Pretendard" pitchFamily="34" charset="0"/>
+                <a:ea typeface="Pretendard" pitchFamily="34" charset="-122"/>
+                <a:cs typeface="Pretendard" pitchFamily="34" charset="-120"/>
               </a:rPr>
               <a:t>3개 이상 군의 평균을 한 번에 비교</a:t>
             </a:r>
@@ -10335,9 +10335,9 @@
                 <a:solidFill>
                   <a:srgbClr val="16232E"/>
                 </a:solidFill>
-                <a:latin typeface="맑은 고딕" pitchFamily="34" charset="0"/>
-                <a:ea typeface="맑은 고딕" pitchFamily="34" charset="-122"/>
-                <a:cs typeface="맑은 고딕" pitchFamily="34" charset="-120"/>
+                <a:latin typeface="Pretendard" pitchFamily="34" charset="0"/>
+                <a:ea typeface="Pretendard" pitchFamily="34" charset="-122"/>
+                <a:cs typeface="Pretendard" pitchFamily="34" charset="-120"/>
               </a:rPr>
               <a:t>▷ "군 사이에 적어도 하나는 다르다"까지만 알려줌, 어느 군끼리 다른지는 모름</a:t>
             </a:r>
@@ -10425,9 +10425,9 @@
                 <a:solidFill>
                   <a:srgbClr val="FFFFFF"/>
                 </a:solidFill>
-                <a:latin typeface="맑은 고딕" pitchFamily="34" charset="0"/>
-                <a:ea typeface="맑은 고딕" pitchFamily="34" charset="-122"/>
-                <a:cs typeface="맑은 고딕" pitchFamily="34" charset="-120"/>
+                <a:latin typeface="Pretendard" pitchFamily="34" charset="0"/>
+                <a:ea typeface="Pretendard" pitchFamily="34" charset="-122"/>
+                <a:cs typeface="Pretendard" pitchFamily="34" charset="-120"/>
               </a:rPr>
               <a:t>Tukey post-hoc</a:t>
             </a:r>
@@ -10464,9 +10464,9 @@
                 <a:solidFill>
                   <a:srgbClr val="FFFFFF"/>
                 </a:solidFill>
-                <a:latin typeface="맑은 고딕" pitchFamily="34" charset="0"/>
-                <a:ea typeface="맑은 고딕" pitchFamily="34" charset="-122"/>
-                <a:cs typeface="맑은 고딕" pitchFamily="34" charset="-120"/>
+                <a:latin typeface="Pretendard" pitchFamily="34" charset="0"/>
+                <a:ea typeface="Pretendard" pitchFamily="34" charset="-122"/>
+                <a:cs typeface="Pretendard" pitchFamily="34" charset="-120"/>
               </a:rPr>
               <a:t>사후검정</a:t>
             </a:r>
@@ -10506,9 +10506,9 @@
                 <a:solidFill>
                   <a:srgbClr val="16232E"/>
                 </a:solidFill>
-                <a:latin typeface="맑은 고딕" pitchFamily="34" charset="0"/>
-                <a:ea typeface="맑은 고딕" pitchFamily="34" charset="-122"/>
-                <a:cs typeface="맑은 고딕" pitchFamily="34" charset="-120"/>
+                <a:latin typeface="Pretendard" pitchFamily="34" charset="0"/>
+                <a:ea typeface="Pretendard" pitchFamily="34" charset="-122"/>
+                <a:cs typeface="Pretendard" pitchFamily="34" charset="-120"/>
               </a:rPr>
               <a:t>ANOVA가 유의하면 모든 군을 쌍(pair)으로 나눠 비교</a:t>
             </a:r>
@@ -10526,9 +10526,9 @@
                 <a:solidFill>
                   <a:srgbClr val="16232E"/>
                 </a:solidFill>
-                <a:latin typeface="맑은 고딕" pitchFamily="34" charset="0"/>
-                <a:ea typeface="맑은 고딕" pitchFamily="34" charset="-122"/>
-                <a:cs typeface="맑은 고딕" pitchFamily="34" charset="-120"/>
+                <a:latin typeface="Pretendard" pitchFamily="34" charset="0"/>
+                <a:ea typeface="Pretendard" pitchFamily="34" charset="-122"/>
+                <a:cs typeface="Pretendard" pitchFamily="34" charset="-120"/>
               </a:rPr>
               <a:t>▷ 정확히 어느 군과 어느 군이 다른지 확정 — 이 논문의 '군간 비교' 표가 전부 이 결과</a:t>
             </a:r>
@@ -10616,9 +10616,9 @@
                 <a:solidFill>
                   <a:srgbClr val="FFFFFF"/>
                 </a:solidFill>
-                <a:latin typeface="맑은 고딕" pitchFamily="34" charset="0"/>
-                <a:ea typeface="맑은 고딕" pitchFamily="34" charset="-122"/>
-                <a:cs typeface="맑은 고딕" pitchFamily="34" charset="-120"/>
+                <a:latin typeface="Pretendard" pitchFamily="34" charset="0"/>
+                <a:ea typeface="Pretendard" pitchFamily="34" charset="-122"/>
+                <a:cs typeface="Pretendard" pitchFamily="34" charset="-120"/>
               </a:rPr>
               <a:t>Paired t-test</a:t>
             </a:r>
@@ -10655,9 +10655,9 @@
                 <a:solidFill>
                   <a:srgbClr val="FFFFFF"/>
                 </a:solidFill>
-                <a:latin typeface="맑은 고딕" pitchFamily="34" charset="0"/>
-                <a:ea typeface="맑은 고딕" pitchFamily="34" charset="-122"/>
-                <a:cs typeface="맑은 고딕" pitchFamily="34" charset="-120"/>
+                <a:latin typeface="Pretendard" pitchFamily="34" charset="0"/>
+                <a:ea typeface="Pretendard" pitchFamily="34" charset="-122"/>
+                <a:cs typeface="Pretendard" pitchFamily="34" charset="-120"/>
               </a:rPr>
               <a:t>대응표본 t-검정</a:t>
             </a:r>
@@ -10697,9 +10697,9 @@
                 <a:solidFill>
                   <a:srgbClr val="16232E"/>
                 </a:solidFill>
-                <a:latin typeface="맑은 고딕" pitchFamily="34" charset="0"/>
-                <a:ea typeface="맑은 고딕" pitchFamily="34" charset="-122"/>
-                <a:cs typeface="맑은 고딕" pitchFamily="34" charset="-120"/>
+                <a:latin typeface="Pretendard" pitchFamily="34" charset="0"/>
+                <a:ea typeface="Pretendard" pitchFamily="34" charset="-122"/>
+                <a:cs typeface="Pretendard" pitchFamily="34" charset="-120"/>
               </a:rPr>
               <a:t>같은 개체를 두 시점에서 비교</a:t>
             </a:r>
@@ -10717,9 +10717,9 @@
                 <a:solidFill>
                   <a:srgbClr val="16232E"/>
                 </a:solidFill>
-                <a:latin typeface="맑은 고딕" pitchFamily="34" charset="0"/>
-                <a:ea typeface="맑은 고딕" pitchFamily="34" charset="-122"/>
-                <a:cs typeface="맑은 고딕" pitchFamily="34" charset="-120"/>
+                <a:latin typeface="Pretendard" pitchFamily="34" charset="0"/>
+                <a:ea typeface="Pretendard" pitchFamily="34" charset="-122"/>
+                <a:cs typeface="Pretendard" pitchFamily="34" charset="-120"/>
               </a:rPr>
               <a:t>▷ 예: 같은 랫드의 '가속기 직후' vs '보정 1주 후' 위치 비교(군 내 비교)</a:t>
             </a:r>
@@ -10788,9 +10788,9 @@
                 <a:solidFill>
                   <a:srgbClr val="1B4965"/>
                 </a:solidFill>
-                <a:latin typeface="맑은 고딕" pitchFamily="34" charset="0"/>
-                <a:ea typeface="맑은 고딕" pitchFamily="34" charset="-122"/>
-                <a:cs typeface="맑은 고딕" pitchFamily="34" charset="-120"/>
+                <a:latin typeface="Pretendard" pitchFamily="34" charset="0"/>
+                <a:ea typeface="Pretendard" pitchFamily="34" charset="-122"/>
+                <a:cs typeface="Pretendard" pitchFamily="34" charset="-120"/>
               </a:rPr>
               <a:t>이 논문의 분석 흐름  </a:t>
             </a:r>
@@ -10805,9 +10805,9 @@
                 <a:solidFill>
                   <a:srgbClr val="16232E"/>
                 </a:solidFill>
-                <a:latin typeface="맑은 고딕" pitchFamily="34" charset="0"/>
-                <a:ea typeface="맑은 고딕" pitchFamily="34" charset="-122"/>
-                <a:cs typeface="맑은 고딕" pitchFamily="34" charset="-120"/>
+                <a:latin typeface="Pretendard" pitchFamily="34" charset="0"/>
+                <a:ea typeface="Pretendard" pitchFamily="34" charset="-122"/>
+                <a:cs typeface="Pretendard" pitchFamily="34" charset="-120"/>
               </a:rPr>
               <a:t>Shapiro–Wilk ▷ One-way ANOVA ▷ 유의하면 Tukey post-hoc — 군내 시점별 비교(가속 후 vs 보정 후 등)는 paired t-test로 별도 진행
 </a:t>
@@ -10823,9 +10823,9 @@
                 <a:solidFill>
                   <a:srgbClr val="1B4965"/>
                 </a:solidFill>
-                <a:latin typeface="맑은 고딕" pitchFamily="34" charset="0"/>
-                <a:ea typeface="맑은 고딕" pitchFamily="34" charset="-122"/>
-                <a:cs typeface="맑은 고딕" pitchFamily="34" charset="-120"/>
+                <a:latin typeface="Pretendard" pitchFamily="34" charset="0"/>
+                <a:ea typeface="Pretendard" pitchFamily="34" charset="-122"/>
+                <a:cs typeface="Pretendard" pitchFamily="34" charset="-120"/>
               </a:rPr>
               <a:t>p &lt; 0.05의 의미  </a:t>
             </a:r>
@@ -10840,9 +10840,9 @@
                 <a:solidFill>
                   <a:srgbClr val="16232E"/>
                 </a:solidFill>
-                <a:latin typeface="맑은 고딕" pitchFamily="34" charset="0"/>
-                <a:ea typeface="맑은 고딕" pitchFamily="34" charset="-122"/>
-                <a:cs typeface="맑은 고딕" pitchFamily="34" charset="-120"/>
+                <a:latin typeface="Pretendard" pitchFamily="34" charset="0"/>
+                <a:ea typeface="Pretendard" pitchFamily="34" charset="-122"/>
+                <a:cs typeface="Pretendard" pitchFamily="34" charset="-120"/>
               </a:rPr>
               <a:t>이 차이가 우연히 생겼을 확률이 5% 미만이라는 뜻 — 관행적 기준; 이 논문 대부분의 비교는 p &lt; 0.001로, 우연일 확률이 매우 낮다.</a:t>
             </a:r>
@@ -10950,9 +10950,9 @@
                 <a:solidFill>
                   <a:srgbClr val="3D7EA6"/>
                 </a:solidFill>
-                <a:latin typeface="맑은 고딕" pitchFamily="34" charset="0"/>
-                <a:ea typeface="맑은 고딕" pitchFamily="34" charset="-122"/>
-                <a:cs typeface="맑은 고딕" pitchFamily="34" charset="-120"/>
+                <a:latin typeface="Pretendard" pitchFamily="34" charset="0"/>
+                <a:ea typeface="Pretendard" pitchFamily="34" charset="-122"/>
+                <a:cs typeface="Pretendard" pitchFamily="34" charset="-120"/>
               </a:rPr>
               <a:t>RESULTS · 01</a:t>
             </a:r>
@@ -10989,9 +10989,9 @@
                 <a:solidFill>
                   <a:srgbClr val="1B4965"/>
                 </a:solidFill>
-                <a:latin typeface="맑은 고딕" pitchFamily="34" charset="0"/>
-                <a:ea typeface="맑은 고딕" pitchFamily="34" charset="-122"/>
-                <a:cs typeface="맑은 고딕" pitchFamily="34" charset="-120"/>
+                <a:latin typeface="Pretendard" pitchFamily="34" charset="0"/>
+                <a:ea typeface="Pretendard" pitchFamily="34" charset="-122"/>
+                <a:cs typeface="Pretendard" pitchFamily="34" charset="-120"/>
               </a:rPr>
               <a:t>가속기(4주) — 치아이동량 비교</a:t>
             </a:r>
@@ -11057,9 +11057,9 @@
                 <a:solidFill>
                   <a:srgbClr val="D97706"/>
                 </a:solidFill>
-                <a:latin typeface="맑은 고딕" pitchFamily="34" charset="0"/>
-                <a:ea typeface="맑은 고딕" pitchFamily="34" charset="-122"/>
-                <a:cs typeface="맑은 고딕" pitchFamily="34" charset="-120"/>
+                <a:latin typeface="Pretendard" pitchFamily="34" charset="0"/>
+                <a:ea typeface="Pretendard" pitchFamily="34" charset="-122"/>
+                <a:cs typeface="Pretendard" pitchFamily="34" charset="-120"/>
               </a:rPr>
               <a:t>6.50 ± 0.88</a:t>
             </a:r>
@@ -11096,9 +11096,9 @@
                 <a:solidFill>
                   <a:srgbClr val="16232E"/>
                 </a:solidFill>
-                <a:latin typeface="맑은 고딕" pitchFamily="34" charset="0"/>
-                <a:ea typeface="맑은 고딕" pitchFamily="34" charset="-122"/>
-                <a:cs typeface="맑은 고딕" pitchFamily="34" charset="-120"/>
+                <a:latin typeface="Pretendard" pitchFamily="34" charset="0"/>
+                <a:ea typeface="Pretendard" pitchFamily="34" charset="-122"/>
+                <a:cs typeface="Pretendard" pitchFamily="34" charset="-120"/>
               </a:rPr>
               <a:t>mm · 코르티코스테로이드</a:t>
             </a:r>
@@ -11164,9 +11164,9 @@
                 <a:solidFill>
                   <a:srgbClr val="3D7EA6"/>
                 </a:solidFill>
-                <a:latin typeface="맑은 고딕" pitchFamily="34" charset="0"/>
-                <a:ea typeface="맑은 고딕" pitchFamily="34" charset="-122"/>
-                <a:cs typeface="맑은 고딕" pitchFamily="34" charset="-120"/>
+                <a:latin typeface="Pretendard" pitchFamily="34" charset="0"/>
+                <a:ea typeface="Pretendard" pitchFamily="34" charset="-122"/>
+                <a:cs typeface="Pretendard" pitchFamily="34" charset="-120"/>
               </a:rPr>
               <a:t>3.73 ± 0.14</a:t>
             </a:r>
@@ -11203,9 +11203,9 @@
                 <a:solidFill>
                   <a:srgbClr val="16232E"/>
                 </a:solidFill>
-                <a:latin typeface="맑은 고딕" pitchFamily="34" charset="0"/>
-                <a:ea typeface="맑은 고딕" pitchFamily="34" charset="-122"/>
-                <a:cs typeface="맑은 고딕" pitchFamily="34" charset="-120"/>
+                <a:latin typeface="Pretendard" pitchFamily="34" charset="0"/>
+                <a:ea typeface="Pretendard" pitchFamily="34" charset="-122"/>
+                <a:cs typeface="Pretendard" pitchFamily="34" charset="-120"/>
               </a:rPr>
               <a:t>mm · 비타민D</a:t>
             </a:r>
@@ -11271,9 +11271,9 @@
                 <a:solidFill>
                   <a:srgbClr val="2F855A"/>
                 </a:solidFill>
-                <a:latin typeface="맑은 고딕" pitchFamily="34" charset="0"/>
-                <a:ea typeface="맑은 고딕" pitchFamily="34" charset="-122"/>
-                <a:cs typeface="맑은 고딕" pitchFamily="34" charset="-120"/>
+                <a:latin typeface="Pretendard" pitchFamily="34" charset="0"/>
+                <a:ea typeface="Pretendard" pitchFamily="34" charset="-122"/>
+                <a:cs typeface="Pretendard" pitchFamily="34" charset="-120"/>
               </a:rPr>
               <a:t>2.80 ± 0.15</a:t>
             </a:r>
@@ -11310,9 +11310,9 @@
                 <a:solidFill>
                   <a:srgbClr val="16232E"/>
                 </a:solidFill>
-                <a:latin typeface="맑은 고딕" pitchFamily="34" charset="0"/>
-                <a:ea typeface="맑은 고딕" pitchFamily="34" charset="-122"/>
-                <a:cs typeface="맑은 고딕" pitchFamily="34" charset="-120"/>
+                <a:latin typeface="Pretendard" pitchFamily="34" charset="0"/>
+                <a:ea typeface="Pretendard" pitchFamily="34" charset="-122"/>
+                <a:cs typeface="Pretendard" pitchFamily="34" charset="-120"/>
               </a:rPr>
               <a:t>mm · PGE₂</a:t>
             </a:r>
@@ -11352,9 +11352,9 @@
                 <a:solidFill>
                   <a:srgbClr val="1B4965"/>
                 </a:solidFill>
-                <a:latin typeface="맑은 고딕" pitchFamily="34" charset="0"/>
-                <a:ea typeface="맑은 고딕" pitchFamily="34" charset="-122"/>
-                <a:cs typeface="맑은 고딕" pitchFamily="34" charset="-120"/>
+                <a:latin typeface="Pretendard" pitchFamily="34" charset="0"/>
+                <a:ea typeface="Pretendard" pitchFamily="34" charset="-122"/>
+                <a:cs typeface="Pretendard" pitchFamily="34" charset="-120"/>
               </a:rPr>
               <a:t>→ 대조군(1.29±0.11mm) 대비 세 약물 모두 유의하게 가속 (p &lt; 0.001)</a:t>
             </a:r>
@@ -11372,9 +11372,9 @@
                 <a:solidFill>
                   <a:srgbClr val="1B4965"/>
                 </a:solidFill>
-                <a:latin typeface="맑은 고딕" pitchFamily="34" charset="0"/>
-                <a:ea typeface="맑은 고딕" pitchFamily="34" charset="-122"/>
-                <a:cs typeface="맑은 고딕" pitchFamily="34" charset="-120"/>
+                <a:latin typeface="Pretendard" pitchFamily="34" charset="0"/>
+                <a:ea typeface="Pretendard" pitchFamily="34" charset="-122"/>
+                <a:cs typeface="Pretendard" pitchFamily="34" charset="-120"/>
               </a:rPr>
               <a:t>— 가속 순위: 코르티코스테로이드 &gt; 비타민D &gt; PGE₂, 조직검사(ALP·TRAP)도 동일 순서로 확인됨</a:t>
             </a:r>
@@ -11405,11 +11405,11 @@
             <a:tbl>
               <a:tblPr/>
               <a:tblGrid>
-                <a:gridCol w="3108960"/>
+                <a:gridCol w="2743200"/>
                 <a:gridCol w="2103120"/>
                 <a:gridCol w="2468880"/>
                 <a:gridCol w="2103120"/>
-                <a:gridCol w="1124712"/>
+                <a:gridCol w="1490472"/>
               </a:tblGrid>
               <a:tr h="502920">
                 <a:tc>
@@ -11425,16 +11425,16 @@
                           <a:solidFill>
                             <a:srgbClr val="FFFFFF"/>
                           </a:solidFill>
-                          <a:latin typeface="맑은 고딕" pitchFamily="34" charset="0"/>
-                          <a:ea typeface="맑은 고딕" pitchFamily="34" charset="-122"/>
-                          <a:cs typeface="맑은 고딕" pitchFamily="34" charset="-120"/>
+                          <a:latin typeface="Pretendard" pitchFamily="34" charset="0"/>
+                          <a:ea typeface="Pretendard" pitchFamily="34" charset="-122"/>
+                          <a:cs typeface="Pretendard" pitchFamily="34" charset="-120"/>
                         </a:rPr>
                         <a:t>군</a:t>
                       </a:r>
                       <a:endParaRPr lang="en-US" sz="1150" dirty="0">
-                        <a:latin typeface="맑은 고딕" charset="0"/>
-                        <a:ea typeface="맑은 고딕" charset="0"/>
-                        <a:cs typeface="맑은 고딕" charset="0"/>
+                        <a:latin typeface="Pretendard" charset="0"/>
+                        <a:ea typeface="Pretendard" charset="0"/>
+                        <a:cs typeface="Pretendard" charset="0"/>
                       </a:endParaRPr>
                     </a:p>
                   </a:txBody>
@@ -11493,16 +11493,16 @@
                           <a:solidFill>
                             <a:srgbClr val="FFFFFF"/>
                           </a:solidFill>
-                          <a:latin typeface="맑은 고딕" pitchFamily="34" charset="0"/>
-                          <a:ea typeface="맑은 고딕" pitchFamily="34" charset="-122"/>
-                          <a:cs typeface="맑은 고딕" pitchFamily="34" charset="-120"/>
+                          <a:latin typeface="Pretendard" pitchFamily="34" charset="0"/>
+                          <a:ea typeface="Pretendard" pitchFamily="34" charset="-122"/>
+                          <a:cs typeface="Pretendard" pitchFamily="34" charset="-120"/>
                         </a:rPr>
                         <a:t>양성대조(CPG)</a:t>
                       </a:r>
                       <a:endParaRPr lang="en-US" sz="1150" dirty="0">
-                        <a:latin typeface="맑은 고딕" charset="0"/>
-                        <a:ea typeface="맑은 고딕" charset="0"/>
-                        <a:cs typeface="맑은 고딕" charset="0"/>
+                        <a:latin typeface="Pretendard" charset="0"/>
+                        <a:ea typeface="Pretendard" charset="0"/>
+                        <a:cs typeface="Pretendard" charset="0"/>
                       </a:endParaRPr>
                     </a:p>
                   </a:txBody>
@@ -11561,16 +11561,16 @@
                           <a:solidFill>
                             <a:srgbClr val="FFFFFF"/>
                           </a:solidFill>
-                          <a:latin typeface="맑은 고딕" pitchFamily="34" charset="0"/>
-                          <a:ea typeface="맑은 고딕" pitchFamily="34" charset="-122"/>
-                          <a:cs typeface="맑은 고딕" pitchFamily="34" charset="-120"/>
+                          <a:latin typeface="Pretendard" pitchFamily="34" charset="0"/>
+                          <a:ea typeface="Pretendard" pitchFamily="34" charset="-122"/>
+                          <a:cs typeface="Pretendard" pitchFamily="34" charset="-120"/>
                         </a:rPr>
                         <a:t>코르티코스테로이드(COG)</a:t>
                       </a:r>
                       <a:endParaRPr lang="en-US" sz="1150" dirty="0">
-                        <a:latin typeface="맑은 고딕" charset="0"/>
-                        <a:ea typeface="맑은 고딕" charset="0"/>
-                        <a:cs typeface="맑은 고딕" charset="0"/>
+                        <a:latin typeface="Pretendard" charset="0"/>
+                        <a:ea typeface="Pretendard" charset="0"/>
+                        <a:cs typeface="Pretendard" charset="0"/>
                       </a:endParaRPr>
                     </a:p>
                   </a:txBody>
@@ -11629,16 +11629,16 @@
                           <a:solidFill>
                             <a:srgbClr val="FFFFFF"/>
                           </a:solidFill>
-                          <a:latin typeface="맑은 고딕" pitchFamily="34" charset="0"/>
-                          <a:ea typeface="맑은 고딕" pitchFamily="34" charset="-122"/>
-                          <a:cs typeface="맑은 고딕" pitchFamily="34" charset="-120"/>
+                          <a:latin typeface="Pretendard" pitchFamily="34" charset="0"/>
+                          <a:ea typeface="Pretendard" pitchFamily="34" charset="-122"/>
+                          <a:cs typeface="Pretendard" pitchFamily="34" charset="-120"/>
                         </a:rPr>
                         <a:t>비타민D(VDG)</a:t>
                       </a:r>
                       <a:endParaRPr lang="en-US" sz="1150" dirty="0">
-                        <a:latin typeface="맑은 고딕" charset="0"/>
-                        <a:ea typeface="맑은 고딕" charset="0"/>
-                        <a:cs typeface="맑은 고딕" charset="0"/>
+                        <a:latin typeface="Pretendard" charset="0"/>
+                        <a:ea typeface="Pretendard" charset="0"/>
+                        <a:cs typeface="Pretendard" charset="0"/>
                       </a:endParaRPr>
                     </a:p>
                   </a:txBody>
@@ -11697,16 +11697,16 @@
                           <a:solidFill>
                             <a:srgbClr val="FFFFFF"/>
                           </a:solidFill>
-                          <a:latin typeface="맑은 고딕" pitchFamily="34" charset="0"/>
-                          <a:ea typeface="맑은 고딕" pitchFamily="34" charset="-122"/>
-                          <a:cs typeface="맑은 고딕" pitchFamily="34" charset="-120"/>
+                          <a:latin typeface="Pretendard" pitchFamily="34" charset="0"/>
+                          <a:ea typeface="Pretendard" pitchFamily="34" charset="-122"/>
+                          <a:cs typeface="Pretendard" pitchFamily="34" charset="-120"/>
                         </a:rPr>
                         <a:t>PGE₂(PGE₂G)</a:t>
                       </a:r>
                       <a:endParaRPr lang="en-US" sz="1150" dirty="0">
-                        <a:latin typeface="맑은 고딕" charset="0"/>
-                        <a:ea typeface="맑은 고딕" charset="0"/>
-                        <a:cs typeface="맑은 고딕" charset="0"/>
+                        <a:latin typeface="Pretendard" charset="0"/>
+                        <a:ea typeface="Pretendard" charset="0"/>
+                        <a:cs typeface="Pretendard" charset="0"/>
                       </a:endParaRPr>
                     </a:p>
                   </a:txBody>
@@ -11767,16 +11767,16 @@
                           <a:solidFill>
                             <a:srgbClr val="16232E"/>
                           </a:solidFill>
-                          <a:latin typeface="맑은 고딕" pitchFamily="34" charset="0"/>
-                          <a:ea typeface="맑은 고딕" pitchFamily="34" charset="-122"/>
-                          <a:cs typeface="맑은 고딕" pitchFamily="34" charset="-120"/>
+                          <a:latin typeface="Pretendard" pitchFamily="34" charset="0"/>
+                          <a:ea typeface="Pretendard" pitchFamily="34" charset="-122"/>
+                          <a:cs typeface="Pretendard" pitchFamily="34" charset="-120"/>
                         </a:rPr>
                         <a:t>4주 후 이동량(직후 대비 증가분)</a:t>
                       </a:r>
                       <a:endParaRPr lang="en-US" sz="1150" dirty="0">
-                        <a:latin typeface="맑은 고딕" charset="0"/>
-                        <a:ea typeface="맑은 고딕" charset="0"/>
-                        <a:cs typeface="맑은 고딕" charset="0"/>
+                        <a:latin typeface="Pretendard" charset="0"/>
+                        <a:ea typeface="Pretendard" charset="0"/>
+                        <a:cs typeface="Pretendard" charset="0"/>
                       </a:endParaRPr>
                     </a:p>
                   </a:txBody>
@@ -11832,16 +11832,16 @@
                           <a:solidFill>
                             <a:srgbClr val="16232E"/>
                           </a:solidFill>
-                          <a:latin typeface="맑은 고딕" pitchFamily="34" charset="0"/>
-                          <a:ea typeface="맑은 고딕" pitchFamily="34" charset="-122"/>
-                          <a:cs typeface="맑은 고딕" pitchFamily="34" charset="-120"/>
+                          <a:latin typeface="Pretendard" pitchFamily="34" charset="0"/>
+                          <a:ea typeface="Pretendard" pitchFamily="34" charset="-122"/>
+                          <a:cs typeface="Pretendard" pitchFamily="34" charset="-120"/>
                         </a:rPr>
                         <a:t>1.29 ± 0.11 mm</a:t>
                       </a:r>
                       <a:endParaRPr lang="en-US" sz="1150" dirty="0">
-                        <a:latin typeface="맑은 고딕" charset="0"/>
-                        <a:ea typeface="맑은 고딕" charset="0"/>
-                        <a:cs typeface="맑은 고딕" charset="0"/>
+                        <a:latin typeface="Pretendard" charset="0"/>
+                        <a:ea typeface="Pretendard" charset="0"/>
+                        <a:cs typeface="Pretendard" charset="0"/>
                       </a:endParaRPr>
                     </a:p>
                   </a:txBody>
@@ -11897,16 +11897,16 @@
                           <a:solidFill>
                             <a:srgbClr val="16232E"/>
                           </a:solidFill>
-                          <a:latin typeface="맑은 고딕" pitchFamily="34" charset="0"/>
-                          <a:ea typeface="맑은 고딕" pitchFamily="34" charset="-122"/>
-                          <a:cs typeface="맑은 고딕" pitchFamily="34" charset="-120"/>
+                          <a:latin typeface="Pretendard" pitchFamily="34" charset="0"/>
+                          <a:ea typeface="Pretendard" pitchFamily="34" charset="-122"/>
+                          <a:cs typeface="Pretendard" pitchFamily="34" charset="-120"/>
                         </a:rPr>
                         <a:t>6.50 ± 0.88 mm</a:t>
                       </a:r>
                       <a:endParaRPr lang="en-US" sz="1150" dirty="0">
-                        <a:latin typeface="맑은 고딕" charset="0"/>
-                        <a:ea typeface="맑은 고딕" charset="0"/>
-                        <a:cs typeface="맑은 고딕" charset="0"/>
+                        <a:latin typeface="Pretendard" charset="0"/>
+                        <a:ea typeface="Pretendard" charset="0"/>
+                        <a:cs typeface="Pretendard" charset="0"/>
                       </a:endParaRPr>
                     </a:p>
                   </a:txBody>
@@ -11962,16 +11962,16 @@
                           <a:solidFill>
                             <a:srgbClr val="16232E"/>
                           </a:solidFill>
-                          <a:latin typeface="맑은 고딕" pitchFamily="34" charset="0"/>
-                          <a:ea typeface="맑은 고딕" pitchFamily="34" charset="-122"/>
-                          <a:cs typeface="맑은 고딕" pitchFamily="34" charset="-120"/>
+                          <a:latin typeface="Pretendard" pitchFamily="34" charset="0"/>
+                          <a:ea typeface="Pretendard" pitchFamily="34" charset="-122"/>
+                          <a:cs typeface="Pretendard" pitchFamily="34" charset="-120"/>
                         </a:rPr>
                         <a:t>3.73 ± 0.14 mm</a:t>
                       </a:r>
                       <a:endParaRPr lang="en-US" sz="1150" dirty="0">
-                        <a:latin typeface="맑은 고딕" charset="0"/>
-                        <a:ea typeface="맑은 고딕" charset="0"/>
-                        <a:cs typeface="맑은 고딕" charset="0"/>
+                        <a:latin typeface="Pretendard" charset="0"/>
+                        <a:ea typeface="Pretendard" charset="0"/>
+                        <a:cs typeface="Pretendard" charset="0"/>
                       </a:endParaRPr>
                     </a:p>
                   </a:txBody>
@@ -12027,16 +12027,16 @@
                           <a:solidFill>
                             <a:srgbClr val="16232E"/>
                           </a:solidFill>
-                          <a:latin typeface="맑은 고딕" pitchFamily="34" charset="0"/>
-                          <a:ea typeface="맑은 고딕" pitchFamily="34" charset="-122"/>
-                          <a:cs typeface="맑은 고딕" pitchFamily="34" charset="-120"/>
+                          <a:latin typeface="Pretendard" pitchFamily="34" charset="0"/>
+                          <a:ea typeface="Pretendard" pitchFamily="34" charset="-122"/>
+                          <a:cs typeface="Pretendard" pitchFamily="34" charset="-120"/>
                         </a:rPr>
                         <a:t>2.80 ± 0.15 mm</a:t>
                       </a:r>
                       <a:endParaRPr lang="en-US" sz="1150" dirty="0">
-                        <a:latin typeface="맑은 고딕" charset="0"/>
-                        <a:ea typeface="맑은 고딕" charset="0"/>
-                        <a:cs typeface="맑은 고딕" charset="0"/>
+                        <a:latin typeface="Pretendard" charset="0"/>
+                        <a:ea typeface="Pretendard" charset="0"/>
+                        <a:cs typeface="Pretendard" charset="0"/>
                       </a:endParaRPr>
                     </a:p>
                   </a:txBody>
@@ -12113,9 +12113,9 @@
                 <a:solidFill>
                   <a:srgbClr val="5B6B7A"/>
                 </a:solidFill>
-                <a:latin typeface="맑은 고딕" pitchFamily="34" charset="0"/>
-                <a:ea typeface="맑은 고딕" pitchFamily="34" charset="-122"/>
-                <a:cs typeface="맑은 고딕" pitchFamily="34" charset="-120"/>
+                <a:latin typeface="Pretendard" pitchFamily="34" charset="0"/>
+                <a:ea typeface="Pretendard" pitchFamily="34" charset="-122"/>
+                <a:cs typeface="Pretendard" pitchFamily="34" charset="-120"/>
               </a:rPr>
               <a:t>※ 모든 군간 비교 p &lt; 0.001 (One-way ANOVA + Tukey post-hoc). 원문 Table I·II 기준.</a:t>
             </a:r>
@@ -12223,9 +12223,9 @@
                 <a:solidFill>
                   <a:srgbClr val="3D7EA6"/>
                 </a:solidFill>
-                <a:latin typeface="맑은 고딕" pitchFamily="34" charset="0"/>
-                <a:ea typeface="맑은 고딕" pitchFamily="34" charset="-122"/>
-                <a:cs typeface="맑은 고딕" pitchFamily="34" charset="-120"/>
+                <a:latin typeface="Pretendard" pitchFamily="34" charset="0"/>
+                <a:ea typeface="Pretendard" pitchFamily="34" charset="-122"/>
+                <a:cs typeface="Pretendard" pitchFamily="34" charset="-120"/>
               </a:rPr>
               <a:t>RESULTS · 02</a:t>
             </a:r>
@@ -12262,9 +12262,9 @@
                 <a:solidFill>
                   <a:srgbClr val="1B4965"/>
                 </a:solidFill>
-                <a:latin typeface="맑은 고딕" pitchFamily="34" charset="0"/>
-                <a:ea typeface="맑은 고딕" pitchFamily="34" charset="-122"/>
-                <a:cs typeface="맑은 고딕" pitchFamily="34" charset="-120"/>
+                <a:latin typeface="Pretendard" pitchFamily="34" charset="0"/>
+                <a:ea typeface="Pretendard" pitchFamily="34" charset="-122"/>
+                <a:cs typeface="Pretendard" pitchFamily="34" charset="-120"/>
               </a:rPr>
               <a:t>재발기(2주) — 가속이 컸던 약물이 더 많이 되돌아간다</a:t>
             </a:r>
@@ -12330,9 +12330,9 @@
                 <a:solidFill>
                   <a:srgbClr val="9AA5B1"/>
                 </a:solidFill>
-                <a:latin typeface="맑은 고딕" pitchFamily="34" charset="0"/>
-                <a:ea typeface="맑은 고딕" pitchFamily="34" charset="-122"/>
-                <a:cs typeface="맑은 고딕" pitchFamily="34" charset="-120"/>
+                <a:latin typeface="Pretendard" pitchFamily="34" charset="0"/>
+                <a:ea typeface="Pretendard" pitchFamily="34" charset="-122"/>
+                <a:cs typeface="Pretendard" pitchFamily="34" charset="-120"/>
               </a:rPr>
               <a:t>-1.09</a:t>
             </a:r>
@@ -12347,9 +12347,9 @@
                 <a:solidFill>
                   <a:srgbClr val="9AA5B1"/>
                 </a:solidFill>
-                <a:latin typeface="맑은 고딕" pitchFamily="34" charset="0"/>
-                <a:ea typeface="맑은 고딕" pitchFamily="34" charset="-122"/>
-                <a:cs typeface="맑은 고딕" pitchFamily="34" charset="-120"/>
+                <a:latin typeface="Pretendard" pitchFamily="34" charset="0"/>
+                <a:ea typeface="Pretendard" pitchFamily="34" charset="-122"/>
+                <a:cs typeface="Pretendard" pitchFamily="34" charset="-120"/>
               </a:rPr>
               <a:t>± 0.17</a:t>
             </a:r>
@@ -12386,9 +12386,9 @@
                 <a:solidFill>
                   <a:srgbClr val="16232E"/>
                 </a:solidFill>
-                <a:latin typeface="맑은 고딕" pitchFamily="34" charset="0"/>
-                <a:ea typeface="맑은 고딕" pitchFamily="34" charset="-122"/>
-                <a:cs typeface="맑은 고딕" pitchFamily="34" charset="-120"/>
+                <a:latin typeface="Pretendard" pitchFamily="34" charset="0"/>
+                <a:ea typeface="Pretendard" pitchFamily="34" charset="-122"/>
+                <a:cs typeface="Pretendard" pitchFamily="34" charset="-120"/>
               </a:rPr>
               <a:t>mm · 양성대조</a:t>
             </a:r>
@@ -12454,9 +12454,9 @@
                 <a:solidFill>
                   <a:srgbClr val="2F855A"/>
                 </a:solidFill>
-                <a:latin typeface="맑은 고딕" pitchFamily="34" charset="0"/>
-                <a:ea typeface="맑은 고딕" pitchFamily="34" charset="-122"/>
-                <a:cs typeface="맑은 고딕" pitchFamily="34" charset="-120"/>
+                <a:latin typeface="Pretendard" pitchFamily="34" charset="0"/>
+                <a:ea typeface="Pretendard" pitchFamily="34" charset="-122"/>
+                <a:cs typeface="Pretendard" pitchFamily="34" charset="-120"/>
               </a:rPr>
               <a:t>-0.86</a:t>
             </a:r>
@@ -12471,9 +12471,9 @@
                 <a:solidFill>
                   <a:srgbClr val="2F855A"/>
                 </a:solidFill>
-                <a:latin typeface="맑은 고딕" pitchFamily="34" charset="0"/>
-                <a:ea typeface="맑은 고딕" pitchFamily="34" charset="-122"/>
-                <a:cs typeface="맑은 고딕" pitchFamily="34" charset="-120"/>
+                <a:latin typeface="Pretendard" pitchFamily="34" charset="0"/>
+                <a:ea typeface="Pretendard" pitchFamily="34" charset="-122"/>
+                <a:cs typeface="Pretendard" pitchFamily="34" charset="-120"/>
               </a:rPr>
               <a:t>± 0.23</a:t>
             </a:r>
@@ -12510,9 +12510,9 @@
                 <a:solidFill>
                   <a:srgbClr val="16232E"/>
                 </a:solidFill>
-                <a:latin typeface="맑은 고딕" pitchFamily="34" charset="0"/>
-                <a:ea typeface="맑은 고딕" pitchFamily="34" charset="-122"/>
-                <a:cs typeface="맑은 고딕" pitchFamily="34" charset="-120"/>
+                <a:latin typeface="Pretendard" pitchFamily="34" charset="0"/>
+                <a:ea typeface="Pretendard" pitchFamily="34" charset="-122"/>
+                <a:cs typeface="Pretendard" pitchFamily="34" charset="-120"/>
               </a:rPr>
               <a:t>mm · PGE₂ (최소)</a:t>
             </a:r>
@@ -12578,9 +12578,9 @@
                 <a:solidFill>
                   <a:srgbClr val="3D7EA6"/>
                 </a:solidFill>
-                <a:latin typeface="맑은 고딕" pitchFamily="34" charset="0"/>
-                <a:ea typeface="맑은 고딕" pitchFamily="34" charset="-122"/>
-                <a:cs typeface="맑은 고딕" pitchFamily="34" charset="-120"/>
+                <a:latin typeface="Pretendard" pitchFamily="34" charset="0"/>
+                <a:ea typeface="Pretendard" pitchFamily="34" charset="-122"/>
+                <a:cs typeface="Pretendard" pitchFamily="34" charset="-120"/>
               </a:rPr>
               <a:t>-2.75</a:t>
             </a:r>
@@ -12595,9 +12595,9 @@
                 <a:solidFill>
                   <a:srgbClr val="3D7EA6"/>
                 </a:solidFill>
-                <a:latin typeface="맑은 고딕" pitchFamily="34" charset="0"/>
-                <a:ea typeface="맑은 고딕" pitchFamily="34" charset="-122"/>
-                <a:cs typeface="맑은 고딕" pitchFamily="34" charset="-120"/>
+                <a:latin typeface="Pretendard" pitchFamily="34" charset="0"/>
+                <a:ea typeface="Pretendard" pitchFamily="34" charset="-122"/>
+                <a:cs typeface="Pretendard" pitchFamily="34" charset="-120"/>
               </a:rPr>
               <a:t>± 0.15</a:t>
             </a:r>
@@ -12634,9 +12634,9 @@
                 <a:solidFill>
                   <a:srgbClr val="16232E"/>
                 </a:solidFill>
-                <a:latin typeface="맑은 고딕" pitchFamily="34" charset="0"/>
-                <a:ea typeface="맑은 고딕" pitchFamily="34" charset="-122"/>
-                <a:cs typeface="맑은 고딕" pitchFamily="34" charset="-120"/>
+                <a:latin typeface="Pretendard" pitchFamily="34" charset="0"/>
+                <a:ea typeface="Pretendard" pitchFamily="34" charset="-122"/>
+                <a:cs typeface="Pretendard" pitchFamily="34" charset="-120"/>
               </a:rPr>
               <a:t>mm · 비타민D</a:t>
             </a:r>
@@ -12702,9 +12702,9 @@
                 <a:solidFill>
                   <a:srgbClr val="D97706"/>
                 </a:solidFill>
-                <a:latin typeface="맑은 고딕" pitchFamily="34" charset="0"/>
-                <a:ea typeface="맑은 고딕" pitchFamily="34" charset="-122"/>
-                <a:cs typeface="맑은 고딕" pitchFamily="34" charset="-120"/>
+                <a:latin typeface="Pretendard" pitchFamily="34" charset="0"/>
+                <a:ea typeface="Pretendard" pitchFamily="34" charset="-122"/>
+                <a:cs typeface="Pretendard" pitchFamily="34" charset="-120"/>
               </a:rPr>
               <a:t>-5.07</a:t>
             </a:r>
@@ -12719,9 +12719,9 @@
                 <a:solidFill>
                   <a:srgbClr val="D97706"/>
                 </a:solidFill>
-                <a:latin typeface="맑은 고딕" pitchFamily="34" charset="0"/>
-                <a:ea typeface="맑은 고딕" pitchFamily="34" charset="-122"/>
-                <a:cs typeface="맑은 고딕" pitchFamily="34" charset="-120"/>
+                <a:latin typeface="Pretendard" pitchFamily="34" charset="0"/>
+                <a:ea typeface="Pretendard" pitchFamily="34" charset="-122"/>
+                <a:cs typeface="Pretendard" pitchFamily="34" charset="-120"/>
               </a:rPr>
               <a:t>± 0.87</a:t>
             </a:r>
@@ -12758,9 +12758,9 @@
                 <a:solidFill>
                   <a:srgbClr val="16232E"/>
                 </a:solidFill>
-                <a:latin typeface="맑은 고딕" pitchFamily="34" charset="0"/>
-                <a:ea typeface="맑은 고딕" pitchFamily="34" charset="-122"/>
-                <a:cs typeface="맑은 고딕" pitchFamily="34" charset="-120"/>
+                <a:latin typeface="Pretendard" pitchFamily="34" charset="0"/>
+                <a:ea typeface="Pretendard" pitchFamily="34" charset="-122"/>
+                <a:cs typeface="Pretendard" pitchFamily="34" charset="-120"/>
               </a:rPr>
               <a:t>mm · 코르티코스테로이드 (최대)</a:t>
             </a:r>
@@ -12826,9 +12826,9 @@
                 <a:solidFill>
                   <a:srgbClr val="1B4965"/>
                 </a:solidFill>
-                <a:latin typeface="맑은 고딕" pitchFamily="34" charset="0"/>
-                <a:ea typeface="맑은 고딕" pitchFamily="34" charset="-122"/>
-                <a:cs typeface="맑은 고딕" pitchFamily="34" charset="-120"/>
+                <a:latin typeface="Pretendard" pitchFamily="34" charset="0"/>
+                <a:ea typeface="Pretendard" pitchFamily="34" charset="-122"/>
+                <a:cs typeface="Pretendard" pitchFamily="34" charset="-120"/>
               </a:rPr>
               <a:t>조직학적 소견이 임상 측정을 뒷받침</a:t>
             </a:r>
@@ -12868,9 +12868,9 @@
                 <a:solidFill>
                   <a:srgbClr val="16232E"/>
                 </a:solidFill>
-                <a:latin typeface="맑은 고딕" pitchFamily="34" charset="0"/>
-                <a:ea typeface="맑은 고딕" pitchFamily="34" charset="-122"/>
-                <a:cs typeface="맑은 고딕" pitchFamily="34" charset="-120"/>
+                <a:latin typeface="Pretendard" pitchFamily="34" charset="0"/>
+                <a:ea typeface="Pretendard" pitchFamily="34" charset="-122"/>
+                <a:cs typeface="Pretendard" pitchFamily="34" charset="-120"/>
               </a:rPr>
               <a:t>치주인대(PDL) 폭이 코르티코스테로이드군에서 가장 넓게 유지(압박·긴장측 모두) — 대조군이 가장 좁음, 비타민D·PGE₂군은 중간 수준.</a:t>
             </a:r>
@@ -12907,9 +12907,9 @@
                 <a:solidFill>
                   <a:srgbClr val="5B6B7A"/>
                 </a:solidFill>
-                <a:latin typeface="맑은 고딕" pitchFamily="34" charset="0"/>
-                <a:ea typeface="맑은 고딕" pitchFamily="34" charset="-122"/>
-                <a:cs typeface="맑은 고딕" pitchFamily="34" charset="-120"/>
+                <a:latin typeface="Pretendard" pitchFamily="34" charset="0"/>
+                <a:ea typeface="Pretendard" pitchFamily="34" charset="-122"/>
+                <a:cs typeface="Pretendard" pitchFamily="34" charset="-120"/>
               </a:rPr>
               <a:t>※ 양성대조 vs PGE₂ 재발량 차이 — 통계적으로 유의하지 않음(p = 0.605). 자세한 내용은 부록(Appendix A) 참고.</a:t>
             </a:r>
@@ -13017,9 +13017,9 @@
                 <a:solidFill>
                   <a:srgbClr val="3D7EA6"/>
                 </a:solidFill>
-                <a:latin typeface="맑은 고딕" pitchFamily="34" charset="0"/>
-                <a:ea typeface="맑은 고딕" pitchFamily="34" charset="-122"/>
-                <a:cs typeface="맑은 고딕" pitchFamily="34" charset="-120"/>
+                <a:latin typeface="Pretendard" pitchFamily="34" charset="0"/>
+                <a:ea typeface="Pretendard" pitchFamily="34" charset="-122"/>
+                <a:cs typeface="Pretendard" pitchFamily="34" charset="-120"/>
               </a:rPr>
               <a:t>RESULTS · 03</a:t>
             </a:r>
@@ -13056,9 +13056,9 @@
                 <a:solidFill>
                   <a:srgbClr val="1B4965"/>
                 </a:solidFill>
-                <a:latin typeface="맑은 고딕" pitchFamily="34" charset="0"/>
-                <a:ea typeface="맑은 고딕" pitchFamily="34" charset="-122"/>
-                <a:cs typeface="맑은 고딕" pitchFamily="34" charset="-120"/>
+                <a:latin typeface="Pretendard" pitchFamily="34" charset="0"/>
+                <a:ea typeface="Pretendard" pitchFamily="34" charset="-122"/>
+                <a:cs typeface="Pretendard" pitchFamily="34" charset="-120"/>
               </a:rPr>
               <a:t>조직학적 소견 — 코르티코스테로이드군에서 PDL 폭 가장 넓게 유지</a:t>
             </a:r>
@@ -13121,9 +13121,9 @@
                 <a:solidFill>
                   <a:srgbClr val="5B6B7A"/>
                 </a:solidFill>
-                <a:latin typeface="맑은 고딕" pitchFamily="34" charset="0"/>
-                <a:ea typeface="맑은 고딕" pitchFamily="34" charset="-122"/>
-                <a:cs typeface="맑은 고딕" pitchFamily="34" charset="-120"/>
+                <a:latin typeface="Pretendard" pitchFamily="34" charset="0"/>
+                <a:ea typeface="Pretendard" pitchFamily="34" charset="-122"/>
+                <a:cs typeface="Pretendard" pitchFamily="34" charset="-120"/>
               </a:rPr>
               <a:t>원문 Figure 3 (H&amp;E, ×40) — A: 음성대조, B: 양성대조, C: 코르티코스테로이드, D: 비타민D, E: PGE₂</a:t>
             </a:r>
@@ -13163,9 +13163,9 @@
                 <a:solidFill>
                   <a:srgbClr val="16232E"/>
                 </a:solidFill>
-                <a:latin typeface="맑은 고딕" pitchFamily="34" charset="0"/>
-                <a:ea typeface="맑은 고딕" pitchFamily="34" charset="-122"/>
-                <a:cs typeface="맑은 고딕" pitchFamily="34" charset="-120"/>
+                <a:latin typeface="Pretendard" pitchFamily="34" charset="0"/>
+                <a:ea typeface="Pretendard" pitchFamily="34" charset="-122"/>
+                <a:cs typeface="Pretendard" pitchFamily="34" charset="-120"/>
               </a:rPr>
               <a:t>•  코르티코스테로이드군(C) — 압박·긴장측 모두 해당</a:t>
             </a:r>
@@ -13183,9 +13183,9 @@
                 <a:solidFill>
                   <a:srgbClr val="16232E"/>
                 </a:solidFill>
-                <a:latin typeface="맑은 고딕" pitchFamily="34" charset="0"/>
-                <a:ea typeface="맑은 고딕" pitchFamily="34" charset="-122"/>
-                <a:cs typeface="맑은 고딕" pitchFamily="34" charset="-120"/>
+                <a:latin typeface="Pretendard" pitchFamily="34" charset="0"/>
+                <a:ea typeface="Pretendard" pitchFamily="34" charset="-122"/>
+                <a:cs typeface="Pretendard" pitchFamily="34" charset="-120"/>
               </a:rPr>
               <a:t>•  대조군(A, B) — PDL 폭 가장 좁음, 재발을 흡수할 조직 여유가 적음을 시사</a:t>
             </a:r>
@@ -13203,9 +13203,9 @@
                 <a:solidFill>
                   <a:srgbClr val="16232E"/>
                 </a:solidFill>
-                <a:latin typeface="맑은 고딕" pitchFamily="34" charset="0"/>
-                <a:ea typeface="맑은 고딕" pitchFamily="34" charset="-122"/>
-                <a:cs typeface="맑은 고딕" pitchFamily="34" charset="-120"/>
+                <a:latin typeface="Pretendard" pitchFamily="34" charset="0"/>
+                <a:ea typeface="Pretendard" pitchFamily="34" charset="-122"/>
+                <a:cs typeface="Pretendard" pitchFamily="34" charset="-120"/>
               </a:rPr>
               <a:t>•  비타민D(D)·PGE₂(E)군 — 중간 수준의 PDL 폭</a:t>
             </a:r>
@@ -13223,9 +13223,9 @@
                 <a:solidFill>
                   <a:srgbClr val="16232E"/>
                 </a:solidFill>
-                <a:latin typeface="맑은 고딕" pitchFamily="34" charset="0"/>
-                <a:ea typeface="맑은 고딕" pitchFamily="34" charset="-122"/>
-                <a:cs typeface="맑은 고딕" pitchFamily="34" charset="-120"/>
+                <a:latin typeface="Pretendard" pitchFamily="34" charset="0"/>
+                <a:ea typeface="Pretendard" pitchFamily="34" charset="-122"/>
+                <a:cs typeface="Pretendard" pitchFamily="34" charset="-120"/>
               </a:rPr>
               <a:t>•  캘리퍼 임상 측정 결과와 조직 소견이 서로 뒷받침함</a:t>
             </a:r>
@@ -13243,9 +13243,9 @@
                 <a:solidFill>
                   <a:srgbClr val="16232E"/>
                 </a:solidFill>
-                <a:latin typeface="맑은 고딕" pitchFamily="34" charset="0"/>
-                <a:ea typeface="맑은 고딕" pitchFamily="34" charset="-122"/>
-                <a:cs typeface="맑은 고딕" pitchFamily="34" charset="-120"/>
+                <a:latin typeface="Pretendard" pitchFamily="34" charset="0"/>
+                <a:ea typeface="Pretendard" pitchFamily="34" charset="-122"/>
+                <a:cs typeface="Pretendard" pitchFamily="34" charset="-120"/>
               </a:rPr>
               <a:t>•  동일한 순서 패턴이 ALP·TRAP 염색(원문 Figure 4, 5)에서도 확인됨</a:t>
             </a:r>

--- a/치과약리학실험2-논문발표/치과약리학실험2_논문발표.pptx
+++ b/치과약리학실험2-논문발표/치과약리학실험2_논문발표.pptx
@@ -1079,7 +1079,11 @@
 Q5. 암컷 랫드는 왜 제외했는가?
 → 수컷만 사용한 이유는 호르몬 주기에 의한 변동을 배제하기 위해서입니다. 다만 이로 인해 성별에 따른 차이는 이 연구로는 알 수 없고, 여성 환자에게 그대로 적용할 수 있는지는 후속 연구가 필요하다는 한계로 이어집니다.
 Q6. 코르티코스테로이드는 COX-2 발현을 억제해서 PGE2 생성을 줄일 텐데, 왜 치아이동 가속이 가장 컸는가?
-→ 논문은 코르티코스테로이드의 가속 기전을 '염증유전자 발현 억제 + 파골세포형성 자극 + 콜라게나아제 활성 증가'로 설명하고, PGE2 경로를 거친다고는 하지 않습니다. 치과약리학 교안(34장)에도 코르티코스테로이드가 조골세포 활성은 낮추고 파골세포 활성은 높인다고 나와 있어서, COX-2·PGE2를 거치지 않는 경로로 골흡수가 촉진됐을 가능성이 있습니다. 다만 이 연구는 COX-2나 PGE2 수치를 직접 측정하지 않았기 때문에, 정확한 기전은 문헌에 근거한 추정이고 후속 연구가 필요하다고 답하면 됩니다.</a:t>
+→ 논문은 코르티코스테로이드의 가속 기전을 '염증유전자 발현 억제 + 파골세포형성 자극 + 콜라게나아제 활성 증가'로 설명할 뿐, PGE2 경로를 거친다고는 하지 않습니다. 실제로 이 연구는 COX-2·PGE2·RANKL을 직접 측정하지 않았습니다.
+→ 관련 문헌을 보면, 글루코코르티코이드는 조골세포·골세포에서 RANKL과 M-CSF 발현을 높이고 OPG(osteoprotegerin)는 낮춰서 RANKL/OPG 비를 파골세포 쪽으로 기울이고, 특히 OPG 억제가 주된 경로로 보고됩니다. 즉 COX-2·PGE2를 거치지 않고도 RANKL 축을 직접 열 수 있어서, 치과약리학 교안(34장)의 '조골세포↓·파골세포↑'와도 맞습니다.
+→ 다만 동물 치아이동 문헌 자체가 용량·기간에 따라 엇갈립니다. 코르티코스테로이드 동물 연구 리뷰에서는 실험 기간 3~49일, 용량 0.5~15mg/kg 범위에서 감소 2편·무영향 2편·증가 2편으로 갈렸고, 고용량 히드로코르티손(15mg/kg)을 쓴 토끼 연구에서는 치아이동이 3~4배 빨랐습니다. 또 장기 투여에서는 파골세포 수명은 늘지만 흡수 능력 자체는 떨어진다는 보고도 있어서, 이 연구의 고용량·매일 국소주입 조건이 가속 쪽으로 작용했다고 해석할 수 있습니다(이 해석은 추정입니다).
+→ 정리하면 '기전은 문헌에 근거한 추정이고, 이 연구가 직접 검증한 건 아니어서 COX-2·PGE2·RANKL/OPG 측정이 후속 연구 과제'라고 답하면 됩니다.
+[Q6 근거 문헌] (1) Pathogenic mechanisms of glucocorticoid-induced osteoporosis (PMC10518688) — RANKL·M-CSF 상승, OPG 감소. (2) Cortical bone loss caused by glucocorticoid excess requires RANKL production by osteocytes, Am J Physiol Endocrinol Metab (doi:10.1152/ajpendo.00219.2016). (3) Influence of corticosteroid therapy on orthodontic tooth movement: a narrative review of studies in animal-models, Orthod Craniofac Res (doi:10.1111/ocr.12243). (4) Glucocorticoids suppress bone formation via the osteoclast, J Clin Invest (jci.org/articles/view/28084).</a:t>
             </a:r>
             <a:endParaRPr lang="en-US" dirty="0"/>
           </a:p>

--- a/치과약리학실험2-논문발표/치과약리학실험2_논문발표.pptx
+++ b/치과약리학실험2-논문발표/치과약리학실험2_논문발표.pptx
@@ -1083,7 +1083,9 @@
 → 관련 문헌을 보면, 글루코코르티코이드는 조골세포·골세포에서 RANKL과 M-CSF 발현을 높이고 OPG(osteoprotegerin)는 낮춰서 RANKL/OPG 비를 파골세포 쪽으로 기울이고, 특히 OPG 억제가 주된 경로로 보고됩니다. 즉 COX-2·PGE2를 거치지 않고도 RANKL 축을 직접 열 수 있어서, 치과약리학 교안(34장)의 '조골세포↓·파골세포↑'와도 맞습니다.
 → 다만 동물 치아이동 문헌 자체가 용량·기간에 따라 엇갈립니다. 코르티코스테로이드 동물 연구 리뷰에서는 실험 기간 3~49일, 용량 0.5~15mg/kg 범위에서 감소 2편·무영향 2편·증가 2편으로 갈렸고, 고용량 히드로코르티손(15mg/kg)을 쓴 토끼 연구에서는 치아이동이 3~4배 빨랐습니다. 또 장기 투여에서는 파골세포 수명은 늘지만 흡수 능력 자체는 떨어진다는 보고도 있어서, 이 연구의 고용량·매일 국소주입 조건이 가속 쪽으로 작용했다고 해석할 수 있습니다(이 해석은 추정입니다).
 → 정리하면 '기전은 문헌에 근거한 추정이고, 이 연구가 직접 검증한 건 아니어서 COX-2·PGE2·RANKL/OPG 측정이 후속 연구 과제'라고 답하면 됩니다.
-[Q6 근거 문헌] (1) Pathogenic mechanisms of glucocorticoid-induced osteoporosis (PMC10518688) — RANKL·M-CSF 상승, OPG 감소. (2) Cortical bone loss caused by glucocorticoid excess requires RANKL production by osteocytes, Am J Physiol Endocrinol Metab (doi:10.1152/ajpendo.00219.2016). (3) Influence of corticosteroid therapy on orthodontic tooth movement: a narrative review of studies in animal-models, Orthod Craniofac Res (doi:10.1111/ocr.12243). (4) Glucocorticoids suppress bone formation via the osteoclast, J Clin Invest (jci.org/articles/view/28084).</a:t>
+[Q6 근거 문헌] (1) Pathogenic mechanisms of glucocorticoid-induced osteoporosis (PMC10518688) — RANKL·M-CSF 상승, OPG 감소. (2) Cortical bone loss caused by glucocorticoid excess requires RANKL production by osteocytes, Am J Physiol Endocrinol Metab (doi:10.1152/ajpendo.00219.2016). (3) Influence of corticosteroid therapy on orthodontic tooth movement: a narrative review of studies in animal-models, Orthod Craniofac Res (doi:10.1111/ocr.12243). (4) Glucocorticoids suppress bone formation via the osteoclast, J Clin Invest (jci.org/articles/view/28084).
+Q7. 가속이 클수록 재발도 크다는데, 많이 움직였으니 많이 되돌아가는 건 당연한 것 아닌가? 이동량 대비 비율로 보면 어떤가?
+→ 맞는 지적입니다. 논문의 재발량은 mm 절대값이라 이동량이 큰 군일수록 커지기 쉽습니다. 논문 표 II(이동량)와 표 VII(재발량) 수치로 이동량 대비 재발 비율을 계산해 보면 대조군 약 106%, 코르티코스테로이드 약 82%, 비타민D 약 80%, PGE2 약 34%입니다. 즉 비율로는 코르티코스테로이드가 대조군보다 나쁘지 않고 PGE2만 뚜렷하게 낮아서, '트레이드오프'는 절대량 기준의 요약이고 비율 기준으로는 'PGE2가 얻은 이동을 가장 잘 유지했다'가 더 정확합니다. 이 비율은 논문이 직접 제시한 값이 아니라 표 수치로 계산한 것이라고 밝히고 답하면 됩니다.</a:t>
             </a:r>
             <a:endParaRPr lang="en-US" dirty="0"/>
           </a:p>
